--- a/docs/test/stress/e2e-outputs/income_case14_bangi_discount_basic.pptx
+++ b/docs/test/stress/e2e-outputs/income_case14_bangi_discount_basic.pptx
@@ -3998,37 +3998,149 @@
       </p:sp>
       <p:sp>
         <p:nvSpPr>
-          <p:cNvPr id="19" name="Text 17"/>
-          <p:cNvSpPr/>
-          <p:nvPr/>
-        </p:nvSpPr>
-        <p:spPr>
-          <a:xfrm>
-            <a:off x="566928" y="6419088"/>
-            <a:ext cx="11057839" cy="201168"/>
-          </a:xfrm>
-          <a:prstGeom prst="rect">
-            <a:avLst/>
-          </a:prstGeom>
-          <a:noFill/>
-          <a:ln/>
-        </p:spPr>
-        <p:txBody>
-          <a:bodyPr wrap="square" lIns="0" tIns="0" rIns="0" bIns="0" rtlCol="0" anchor="ctr"/>
-          <a:lstStyle/>
-          <a:p>
-            <a:pPr algn="ctr" indent="0" marL="0">
-              <a:buNone/>
-            </a:pPr>
-            <a:r>
-              <a:rPr lang="en-US" sz="750" dirty="0">
-                <a:solidFill>
-                  <a:srgbClr val="64748B"/>
+          <p:cNvPr id="19" name="Shape 17"/>
+          <p:cNvSpPr/>
+          <p:nvPr/>
+        </p:nvSpPr>
+        <p:spPr>
+          <a:xfrm>
+            <a:off x="566928" y="3611880"/>
+            <a:ext cx="5437480" cy="1097280"/>
+          </a:xfrm>
+          <a:prstGeom prst="roundRect">
+            <a:avLst>
+              <a:gd name="adj" fmla="val 5000"/>
+            </a:avLst>
+          </a:prstGeom>
+          <a:solidFill>
+            <a:srgbClr val="DBEAFE"/>
+          </a:solidFill>
+          <a:ln/>
+        </p:spPr>
+      </p:sp>
+      <p:sp>
+        <p:nvSpPr>
+          <p:cNvPr id="20" name="Shape 18"/>
+          <p:cNvSpPr/>
+          <p:nvPr/>
+        </p:nvSpPr>
+        <p:spPr>
+          <a:xfrm>
+            <a:off x="566928" y="3666744"/>
+            <a:ext cx="36576" cy="987552"/>
+          </a:xfrm>
+          <a:prstGeom prst="rect">
+            <a:avLst/>
+          </a:prstGeom>
+          <a:solidFill>
+            <a:srgbClr val="1D4ED8"/>
+          </a:solidFill>
+          <a:ln/>
+        </p:spPr>
+      </p:sp>
+      <p:sp>
+        <p:nvSpPr>
+          <p:cNvPr id="21" name="Text 19"/>
+          <p:cNvSpPr/>
+          <p:nvPr/>
+        </p:nvSpPr>
+        <p:spPr>
+          <a:xfrm>
+            <a:off x="749808" y="3721608"/>
+            <a:ext cx="5108296" cy="201168"/>
+          </a:xfrm>
+          <a:prstGeom prst="rect">
+            <a:avLst/>
+          </a:prstGeom>
+          <a:noFill/>
+          <a:ln/>
+        </p:spPr>
+        <p:txBody>
+          <a:bodyPr wrap="square" lIns="0" tIns="0" rIns="0" bIns="0" rtlCol="0" anchor="ctr"/>
+          <a:lstStyle/>
+          <a:p>
+            <a:pPr indent="0" marL="0">
+              <a:buNone/>
+            </a:pPr>
+            <a:endParaRPr lang="en-US" sz="1050" dirty="0"/>
+          </a:p>
+        </p:txBody>
+      </p:sp>
+      <p:sp>
+        <p:nvSpPr>
+          <p:cNvPr id="22" name="Text 20"/>
+          <p:cNvSpPr/>
+          <p:nvPr/>
+        </p:nvSpPr>
+        <p:spPr>
+          <a:xfrm>
+            <a:off x="749808" y="3941064"/>
+            <a:ext cx="5108296" cy="694944"/>
+          </a:xfrm>
+          <a:prstGeom prst="rect">
+            <a:avLst/>
+          </a:prstGeom>
+          <a:noFill/>
+          <a:ln/>
+        </p:spPr>
+        <p:txBody>
+          <a:bodyPr wrap="square" lIns="0" tIns="0" rIns="0" bIns="0" rtlCol="0" anchor="t"/>
+          <a:lstStyle/>
+          <a:p>
+            <a:pPr indent="0" marL="0">
+              <a:lnSpc>
+                <a:spcPct val="120000"/>
+              </a:lnSpc>
+              <a:buNone/>
+            </a:pPr>
+            <a:r>
+              <a:rPr lang="en-US" sz="930" dirty="0">
+                <a:solidFill>
+                  <a:srgbClr val="0F172A"/>
                 </a:solidFill>
                 <a:latin typeface="Pretendard" pitchFamily="34" charset="0"/>
                 <a:ea typeface="Pretendard" pitchFamily="34" charset="-122"/>
                 <a:cs typeface="Pretendard" pitchFamily="34" charset="-120"/>
               </a:rPr>
+              <a:t>본 매물은 송파권역 대로변 입지의 우량 메디컬 테넌트 만실 운영 자산입니다.</a:t>
+            </a:r>
+            <a:endParaRPr lang="en-US" sz="930" dirty="0"/>
+          </a:p>
+        </p:txBody>
+      </p:sp>
+      <p:sp>
+        <p:nvSpPr>
+          <p:cNvPr id="23" name="Text 21"/>
+          <p:cNvSpPr/>
+          <p:nvPr/>
+        </p:nvSpPr>
+        <p:spPr>
+          <a:xfrm>
+            <a:off x="566928" y="6419088"/>
+            <a:ext cx="11057839" cy="201168"/>
+          </a:xfrm>
+          <a:prstGeom prst="rect">
+            <a:avLst/>
+          </a:prstGeom>
+          <a:noFill/>
+          <a:ln/>
+        </p:spPr>
+        <p:txBody>
+          <a:bodyPr wrap="square" lIns="0" tIns="0" rIns="0" bIns="0" rtlCol="0" anchor="ctr"/>
+          <a:lstStyle/>
+          <a:p>
+            <a:pPr algn="ctr" indent="0" marL="0">
+              <a:buNone/>
+            </a:pPr>
+            <a:r>
+              <a:rPr lang="en-US" sz="750" dirty="0">
+                <a:solidFill>
+                  <a:srgbClr val="64748B"/>
+                </a:solidFill>
+                <a:latin typeface="Pretendard" pitchFamily="34" charset="0"/>
+                <a:ea typeface="Pretendard" pitchFamily="34" charset="-122"/>
+                <a:cs typeface="Pretendard" pitchFamily="34" charset="-120"/>
+              </a:rPr>
               <a:t>크리딜  ·    ·  2</a:t>
             </a:r>
             <a:endParaRPr lang="en-US" sz="750" dirty="0"/>
@@ -4037,7 +4149,7 @@
       </p:sp>
       <p:sp>
         <p:nvSpPr>
-          <p:cNvPr id="20" name="Shape 18"/>
+          <p:cNvPr id="24" name="Shape 22"/>
           <p:cNvSpPr/>
           <p:nvPr/>
         </p:nvSpPr>
@@ -5137,7 +5249,7 @@
                 <a:ea typeface="Pretendard" pitchFamily="34" charset="-122"/>
                 <a:cs typeface="Pretendard" pitchFamily="34" charset="-120"/>
               </a:rPr>
-              <a:t>{"ok"</a:t>
+              <a:t>소재지</a:t>
             </a:r>
             <a:endParaRPr lang="en-US" sz="1400" dirty="0"/>
           </a:p>
@@ -5179,7 +5291,7 @@
                 <a:ea typeface="Pretendard" pitchFamily="34" charset="-122"/>
                 <a:cs typeface="Pretendard" pitchFamily="34" charset="-120"/>
               </a:rPr>
-              <a:t>true,"mocked":true,"extractedFields":{"area_signal":"역삼","asset_type":"오피스빌딩","price_band":"300억","size_signal":"3000평(약 9917.4㎡)"},"extractedFacts":{"region":"역삼","exactAddressCandidate":"역삼동 742-1","assetType":"오피스빌딩","priceText":"300억","sizeText":"3000평(약 9917.4㎡)","currentUse":"오피스","currentUseSignal":"근린생활시설","leaseSignal":"임대중","vacancySignal":"공실없음","tenantNames":"쿠팡","네이버","unitRentTexts":"301호: 1500만","sellerMotivationText":"자산 효율화","brokerNotes":"초역세권 매물"},"detectedSensitiveFields":"exact_address","tenant_name","ambiguousFields":,"warnings":,"areaSignal":"역삼","assetType":"오피스빌딩","priceBand":"300억","sizeSignal":"3000평(약 9917.4㎡)","dealType":"매각","buildingName":"역삼 센트럴타워","exactAddress":"역삼동 742-1","totalFloorArea":9917.3,"buildYear":2015,"currentUseSignal":"근린생활시설","vacancySignal":"공실 없음","fitSummary":"초역세권 근생 빌딩으로 시행/사옥 매입에 최적화","cautionSummary":"주요 임차 업종 만기 조율 필요","hiddenFields":"exact_address","seller_motivation","confidence":{"areaSignal":"confirmed","assetType":"confirmed","priceBand":"ai_hypothesis","fitSummary":"ai_hypothesis"},"missingData":"sizeSignal","boundaryNote":"본 자료는 실거래 통계 기반 참고치입니다.","buyerType":"법인 사옥형","budgetRange":{"min":50,"max":80,"display":"50억~80억"},"preferredRegions":"강남","성수","assetTypes":"꼬마빌딩","사옥용","purchasePurpose":"사옥용 매입","mustHave":"초역세권","주차","niceToHave":"테라스","루프탑","riskTolerance":"medium","financingNote":"자본금 50% 준비","missingQuestions":"구체적인 입주 시기가 언제인가요?","선호하는 수익률이 있나요?","privacyNotes":"연락처 비공개","fitReasons":"매수자 예산(50-80억)에 부합하는 매물입니다.","요청하신 성수/강남 권역에 해당합니다.","cautionReasons":"요청한 용도와 달리 명도 협의가 다소 필요합니다.","recommendedNextAction":"현장 답사 제안","kakaoMessage":"안녕하세요! 요청하신 조건에 부합하는 추천 매물이 있어 안내해 드립니다. 확인해보시고 피드백 부탁드립니다.","title":"강남 역삼역 초역세권 오피스 사옥용 빌딩 매각","shortSummary":"역삼역 도보 5분 거리의 준신축급 대형 오피스빌딩입니다.","dealPoints":"초역세권","사옥 최적","cautionPoints":"명도 조율 필요","hiddenInfoNotice":"보증금 및 지번은 인가 후 확인 가능","gateMessage":"G1 등급 등록이 필요합니다.","kakaoText":"강남 역삼역 오피스 빌딩 매각 안내입니다.","exactUnitCandidate":"101호","floor":"1층","areaSqmText":"150㎡","spaceType":"office","depositText":"5000만","monthlyRentText":"400만","maintenanceFeeText":"50만","availableFromText":"즉시입주","leaseTermMonthsText":"24","incentivesText":"렌트프리 2개월","restrictions":,"landlordIdentity":"김성수","currentTenant":"스타트업","vacancyReason":"이전 확장","rentNegotiation":"협의 가능","region":"성수동","areaSqm":150,"deposit":5000,"monthlyRent":400,"maintenanceFee":50,"availableFrom":"즉시입주","leaseTermMonths":24,"incentives":{"rentFreeMonths":2,"interiorSupport":"일부 인테리어 지원","freeRentDetail":"렌트프리 2개월 지원"},"shortSummaryLease":"성수역 도보 5분 거리 1층 리테일 상가 매물입니다."}</a:t>
+              <a:t>송파권역</a:t>
             </a:r>
             <a:endParaRPr lang="en-US" sz="1400" dirty="0"/>
           </a:p>
@@ -5188,6 +5300,862 @@
       <p:sp>
         <p:nvSpPr>
           <p:cNvPr id="8" name="Shape 6"/>
+          <p:cNvSpPr/>
+          <p:nvPr/>
+        </p:nvSpPr>
+        <p:spPr>
+          <a:xfrm>
+            <a:off x="566928" y="2048256"/>
+            <a:ext cx="6858000" cy="0"/>
+          </a:xfrm>
+          <a:prstGeom prst="line">
+            <a:avLst/>
+          </a:prstGeom>
+          <a:noFill/>
+          <a:ln w="3810">
+            <a:solidFill>
+              <a:srgbClr val="CBD5E1"/>
+            </a:solidFill>
+            <a:prstDash val="solid"/>
+          </a:ln>
+        </p:spPr>
+      </p:sp>
+      <p:sp>
+        <p:nvSpPr>
+          <p:cNvPr id="9" name="Text 7"/>
+          <p:cNvSpPr/>
+          <p:nvPr/>
+        </p:nvSpPr>
+        <p:spPr>
+          <a:xfrm>
+            <a:off x="566928" y="2048256"/>
+            <a:ext cx="2606040" cy="402336"/>
+          </a:xfrm>
+          <a:prstGeom prst="rect">
+            <a:avLst/>
+          </a:prstGeom>
+          <a:noFill/>
+          <a:ln/>
+        </p:spPr>
+        <p:txBody>
+          <a:bodyPr wrap="square" lIns="0" tIns="0" rIns="0" bIns="0" rtlCol="0" anchor="ctr"/>
+          <a:lstStyle/>
+          <a:p>
+            <a:pPr indent="0" marL="0">
+              <a:lnSpc>
+                <a:spcPct val="120000"/>
+              </a:lnSpc>
+              <a:buNone/>
+            </a:pPr>
+            <a:r>
+              <a:rPr lang="en-US" sz="1400" dirty="0">
+                <a:solidFill>
+                  <a:srgbClr val="64748B"/>
+                </a:solidFill>
+                <a:latin typeface="Pretendard" pitchFamily="34" charset="0"/>
+                <a:ea typeface="Pretendard" pitchFamily="34" charset="-122"/>
+                <a:cs typeface="Pretendard" pitchFamily="34" charset="-120"/>
+              </a:rPr>
+              <a:t>주요 용도</a:t>
+            </a:r>
+            <a:endParaRPr lang="en-US" sz="1400" dirty="0"/>
+          </a:p>
+        </p:txBody>
+      </p:sp>
+      <p:sp>
+        <p:nvSpPr>
+          <p:cNvPr id="10" name="Text 8"/>
+          <p:cNvSpPr/>
+          <p:nvPr/>
+        </p:nvSpPr>
+        <p:spPr>
+          <a:xfrm>
+            <a:off x="3172968" y="2048256"/>
+            <a:ext cx="4251960" cy="402336"/>
+          </a:xfrm>
+          <a:prstGeom prst="rect">
+            <a:avLst/>
+          </a:prstGeom>
+          <a:noFill/>
+          <a:ln/>
+        </p:spPr>
+        <p:txBody>
+          <a:bodyPr wrap="square" lIns="0" tIns="0" rIns="0" bIns="0" rtlCol="0" anchor="ctr"/>
+          <a:lstStyle/>
+          <a:p>
+            <a:pPr indent="0" marL="0">
+              <a:lnSpc>
+                <a:spcPct val="120000"/>
+              </a:lnSpc>
+              <a:buNone/>
+            </a:pPr>
+            <a:r>
+              <a:rPr lang="en-US" sz="1400" b="1" dirty="0">
+                <a:solidFill>
+                  <a:srgbClr val="0F172A"/>
+                </a:solidFill>
+                <a:latin typeface="Pretendard" pitchFamily="34" charset="0"/>
+                <a:ea typeface="Pretendard" pitchFamily="34" charset="-122"/>
+                <a:cs typeface="Pretendard" pitchFamily="34" charset="-120"/>
+              </a:rPr>
+              <a:t>근린생활시설 / 메디컬</a:t>
+            </a:r>
+            <a:endParaRPr lang="en-US" sz="1400" dirty="0"/>
+          </a:p>
+        </p:txBody>
+      </p:sp>
+      <p:sp>
+        <p:nvSpPr>
+          <p:cNvPr id="11" name="Shape 9"/>
+          <p:cNvSpPr/>
+          <p:nvPr/>
+        </p:nvSpPr>
+        <p:spPr>
+          <a:xfrm>
+            <a:off x="566928" y="2450592"/>
+            <a:ext cx="6858000" cy="0"/>
+          </a:xfrm>
+          <a:prstGeom prst="line">
+            <a:avLst/>
+          </a:prstGeom>
+          <a:noFill/>
+          <a:ln w="3810">
+            <a:solidFill>
+              <a:srgbClr val="CBD5E1"/>
+            </a:solidFill>
+            <a:prstDash val="solid"/>
+          </a:ln>
+        </p:spPr>
+      </p:sp>
+      <p:sp>
+        <p:nvSpPr>
+          <p:cNvPr id="12" name="Text 10"/>
+          <p:cNvSpPr/>
+          <p:nvPr/>
+        </p:nvSpPr>
+        <p:spPr>
+          <a:xfrm>
+            <a:off x="566928" y="2450592"/>
+            <a:ext cx="2606040" cy="402336"/>
+          </a:xfrm>
+          <a:prstGeom prst="rect">
+            <a:avLst/>
+          </a:prstGeom>
+          <a:noFill/>
+          <a:ln/>
+        </p:spPr>
+        <p:txBody>
+          <a:bodyPr wrap="square" lIns="0" tIns="0" rIns="0" bIns="0" rtlCol="0" anchor="ctr"/>
+          <a:lstStyle/>
+          <a:p>
+            <a:pPr indent="0" marL="0">
+              <a:lnSpc>
+                <a:spcPct val="120000"/>
+              </a:lnSpc>
+              <a:buNone/>
+            </a:pPr>
+            <a:r>
+              <a:rPr lang="en-US" sz="1400" dirty="0">
+                <a:solidFill>
+                  <a:srgbClr val="64748B"/>
+                </a:solidFill>
+                <a:latin typeface="Pretendard" pitchFamily="34" charset="0"/>
+                <a:ea typeface="Pretendard" pitchFamily="34" charset="-122"/>
+                <a:cs typeface="Pretendard" pitchFamily="34" charset="-120"/>
+              </a:rPr>
+              <a:t>연면적</a:t>
+            </a:r>
+            <a:endParaRPr lang="en-US" sz="1400" dirty="0"/>
+          </a:p>
+        </p:txBody>
+      </p:sp>
+      <p:sp>
+        <p:nvSpPr>
+          <p:cNvPr id="13" name="Text 11"/>
+          <p:cNvSpPr/>
+          <p:nvPr/>
+        </p:nvSpPr>
+        <p:spPr>
+          <a:xfrm>
+            <a:off x="3172968" y="2450592"/>
+            <a:ext cx="4251960" cy="402336"/>
+          </a:xfrm>
+          <a:prstGeom prst="rect">
+            <a:avLst/>
+          </a:prstGeom>
+          <a:noFill/>
+          <a:ln/>
+        </p:spPr>
+        <p:txBody>
+          <a:bodyPr wrap="square" lIns="0" tIns="0" rIns="0" bIns="0" rtlCol="0" anchor="ctr"/>
+          <a:lstStyle/>
+          <a:p>
+            <a:pPr indent="0" marL="0">
+              <a:lnSpc>
+                <a:spcPct val="120000"/>
+              </a:lnSpc>
+              <a:buNone/>
+            </a:pPr>
+            <a:r>
+              <a:rPr lang="en-US" sz="1400" b="1" dirty="0">
+                <a:solidFill>
+                  <a:srgbClr val="0F172A"/>
+                </a:solidFill>
+                <a:latin typeface="Pretendard" pitchFamily="34" charset="0"/>
+                <a:ea typeface="Pretendard" pitchFamily="34" charset="-122"/>
+                <a:cs typeface="Pretendard" pitchFamily="34" charset="-120"/>
+              </a:rPr>
+              <a:t>5,000㎡ (약 1513평(약 5001.7㎡))</a:t>
+            </a:r>
+            <a:endParaRPr lang="en-US" sz="1400" dirty="0"/>
+          </a:p>
+        </p:txBody>
+      </p:sp>
+      <p:sp>
+        <p:nvSpPr>
+          <p:cNvPr id="14" name="Shape 12"/>
+          <p:cNvSpPr/>
+          <p:nvPr/>
+        </p:nvSpPr>
+        <p:spPr>
+          <a:xfrm>
+            <a:off x="566928" y="2852928"/>
+            <a:ext cx="6858000" cy="0"/>
+          </a:xfrm>
+          <a:prstGeom prst="line">
+            <a:avLst/>
+          </a:prstGeom>
+          <a:noFill/>
+          <a:ln w="3810">
+            <a:solidFill>
+              <a:srgbClr val="CBD5E1"/>
+            </a:solidFill>
+            <a:prstDash val="solid"/>
+          </a:ln>
+        </p:spPr>
+      </p:sp>
+      <p:sp>
+        <p:nvSpPr>
+          <p:cNvPr id="15" name="Text 13"/>
+          <p:cNvSpPr/>
+          <p:nvPr/>
+        </p:nvSpPr>
+        <p:spPr>
+          <a:xfrm>
+            <a:off x="566928" y="2852928"/>
+            <a:ext cx="2606040" cy="402336"/>
+          </a:xfrm>
+          <a:prstGeom prst="rect">
+            <a:avLst/>
+          </a:prstGeom>
+          <a:noFill/>
+          <a:ln/>
+        </p:spPr>
+        <p:txBody>
+          <a:bodyPr wrap="square" lIns="0" tIns="0" rIns="0" bIns="0" rtlCol="0" anchor="ctr"/>
+          <a:lstStyle/>
+          <a:p>
+            <a:pPr indent="0" marL="0">
+              <a:lnSpc>
+                <a:spcPct val="120000"/>
+              </a:lnSpc>
+              <a:buNone/>
+            </a:pPr>
+            <a:r>
+              <a:rPr lang="en-US" sz="1400" dirty="0">
+                <a:solidFill>
+                  <a:srgbClr val="64748B"/>
+                </a:solidFill>
+                <a:latin typeface="Pretendard" pitchFamily="34" charset="0"/>
+                <a:ea typeface="Pretendard" pitchFamily="34" charset="-122"/>
+                <a:cs typeface="Pretendard" pitchFamily="34" charset="-120"/>
+              </a:rPr>
+              <a:t>대지면적</a:t>
+            </a:r>
+            <a:endParaRPr lang="en-US" sz="1400" dirty="0"/>
+          </a:p>
+        </p:txBody>
+      </p:sp>
+      <p:sp>
+        <p:nvSpPr>
+          <p:cNvPr id="16" name="Text 14"/>
+          <p:cNvSpPr/>
+          <p:nvPr/>
+        </p:nvSpPr>
+        <p:spPr>
+          <a:xfrm>
+            <a:off x="3172968" y="2852928"/>
+            <a:ext cx="4251960" cy="402336"/>
+          </a:xfrm>
+          <a:prstGeom prst="rect">
+            <a:avLst/>
+          </a:prstGeom>
+          <a:noFill/>
+          <a:ln/>
+        </p:spPr>
+        <p:txBody>
+          <a:bodyPr wrap="square" lIns="0" tIns="0" rIns="0" bIns="0" rtlCol="0" anchor="ctr"/>
+          <a:lstStyle/>
+          <a:p>
+            <a:pPr indent="0" marL="0">
+              <a:lnSpc>
+                <a:spcPct val="120000"/>
+              </a:lnSpc>
+              <a:buNone/>
+            </a:pPr>
+            <a:r>
+              <a:rPr lang="en-US" sz="1400" b="1" dirty="0">
+                <a:solidFill>
+                  <a:srgbClr val="0F172A"/>
+                </a:solidFill>
+                <a:latin typeface="Pretendard" pitchFamily="34" charset="0"/>
+                <a:ea typeface="Pretendard" pitchFamily="34" charset="-122"/>
+                <a:cs typeface="Pretendard" pitchFamily="34" charset="-120"/>
+              </a:rPr>
+              <a:t>1,000㎡ (약 303평(약 1001.7㎡))</a:t>
+            </a:r>
+            <a:endParaRPr lang="en-US" sz="1400" dirty="0"/>
+          </a:p>
+        </p:txBody>
+      </p:sp>
+      <p:sp>
+        <p:nvSpPr>
+          <p:cNvPr id="17" name="Shape 15"/>
+          <p:cNvSpPr/>
+          <p:nvPr/>
+        </p:nvSpPr>
+        <p:spPr>
+          <a:xfrm>
+            <a:off x="566928" y="3255264"/>
+            <a:ext cx="6858000" cy="0"/>
+          </a:xfrm>
+          <a:prstGeom prst="line">
+            <a:avLst/>
+          </a:prstGeom>
+          <a:noFill/>
+          <a:ln w="3810">
+            <a:solidFill>
+              <a:srgbClr val="CBD5E1"/>
+            </a:solidFill>
+            <a:prstDash val="solid"/>
+          </a:ln>
+        </p:spPr>
+      </p:sp>
+      <p:sp>
+        <p:nvSpPr>
+          <p:cNvPr id="18" name="Text 16"/>
+          <p:cNvSpPr/>
+          <p:nvPr/>
+        </p:nvSpPr>
+        <p:spPr>
+          <a:xfrm>
+            <a:off x="566928" y="3255264"/>
+            <a:ext cx="2606040" cy="402336"/>
+          </a:xfrm>
+          <a:prstGeom prst="rect">
+            <a:avLst/>
+          </a:prstGeom>
+          <a:noFill/>
+          <a:ln/>
+        </p:spPr>
+        <p:txBody>
+          <a:bodyPr wrap="square" lIns="0" tIns="0" rIns="0" bIns="0" rtlCol="0" anchor="ctr"/>
+          <a:lstStyle/>
+          <a:p>
+            <a:pPr indent="0" marL="0">
+              <a:lnSpc>
+                <a:spcPct val="120000"/>
+              </a:lnSpc>
+              <a:buNone/>
+            </a:pPr>
+            <a:r>
+              <a:rPr lang="en-US" sz="1400" dirty="0">
+                <a:solidFill>
+                  <a:srgbClr val="64748B"/>
+                </a:solidFill>
+                <a:latin typeface="Pretendard" pitchFamily="34" charset="0"/>
+                <a:ea typeface="Pretendard" pitchFamily="34" charset="-122"/>
+                <a:cs typeface="Pretendard" pitchFamily="34" charset="-120"/>
+              </a:rPr>
+              <a:t>용도지역</a:t>
+            </a:r>
+            <a:endParaRPr lang="en-US" sz="1400" dirty="0"/>
+          </a:p>
+        </p:txBody>
+      </p:sp>
+      <p:sp>
+        <p:nvSpPr>
+          <p:cNvPr id="19" name="Text 17"/>
+          <p:cNvSpPr/>
+          <p:nvPr/>
+        </p:nvSpPr>
+        <p:spPr>
+          <a:xfrm>
+            <a:off x="3172968" y="3255264"/>
+            <a:ext cx="4251960" cy="402336"/>
+          </a:xfrm>
+          <a:prstGeom prst="rect">
+            <a:avLst/>
+          </a:prstGeom>
+          <a:noFill/>
+          <a:ln/>
+        </p:spPr>
+        <p:txBody>
+          <a:bodyPr wrap="square" lIns="0" tIns="0" rIns="0" bIns="0" rtlCol="0" anchor="ctr"/>
+          <a:lstStyle/>
+          <a:p>
+            <a:pPr indent="0" marL="0">
+              <a:lnSpc>
+                <a:spcPct val="120000"/>
+              </a:lnSpc>
+              <a:buNone/>
+            </a:pPr>
+            <a:r>
+              <a:rPr lang="en-US" sz="1400" b="1" dirty="0">
+                <a:solidFill>
+                  <a:srgbClr val="0F172A"/>
+                </a:solidFill>
+                <a:latin typeface="Pretendard" pitchFamily="34" charset="0"/>
+                <a:ea typeface="Pretendard" pitchFamily="34" charset="-122"/>
+                <a:cs typeface="Pretendard" pitchFamily="34" charset="-120"/>
+              </a:rPr>
+              <a:t>일반상업지역</a:t>
+            </a:r>
+            <a:endParaRPr lang="en-US" sz="1400" dirty="0"/>
+          </a:p>
+        </p:txBody>
+      </p:sp>
+      <p:sp>
+        <p:nvSpPr>
+          <p:cNvPr id="20" name="Shape 18"/>
+          <p:cNvSpPr/>
+          <p:nvPr/>
+        </p:nvSpPr>
+        <p:spPr>
+          <a:xfrm>
+            <a:off x="566928" y="3657600"/>
+            <a:ext cx="6858000" cy="0"/>
+          </a:xfrm>
+          <a:prstGeom prst="line">
+            <a:avLst/>
+          </a:prstGeom>
+          <a:noFill/>
+          <a:ln w="3810">
+            <a:solidFill>
+              <a:srgbClr val="CBD5E1"/>
+            </a:solidFill>
+            <a:prstDash val="solid"/>
+          </a:ln>
+        </p:spPr>
+      </p:sp>
+      <p:sp>
+        <p:nvSpPr>
+          <p:cNvPr id="21" name="Text 19"/>
+          <p:cNvSpPr/>
+          <p:nvPr/>
+        </p:nvSpPr>
+        <p:spPr>
+          <a:xfrm>
+            <a:off x="566928" y="3657600"/>
+            <a:ext cx="2606040" cy="402336"/>
+          </a:xfrm>
+          <a:prstGeom prst="rect">
+            <a:avLst/>
+          </a:prstGeom>
+          <a:noFill/>
+          <a:ln/>
+        </p:spPr>
+        <p:txBody>
+          <a:bodyPr wrap="square" lIns="0" tIns="0" rIns="0" bIns="0" rtlCol="0" anchor="ctr"/>
+          <a:lstStyle/>
+          <a:p>
+            <a:pPr indent="0" marL="0">
+              <a:lnSpc>
+                <a:spcPct val="120000"/>
+              </a:lnSpc>
+              <a:buNone/>
+            </a:pPr>
+            <a:r>
+              <a:rPr lang="en-US" sz="1400" dirty="0">
+                <a:solidFill>
+                  <a:srgbClr val="64748B"/>
+                </a:solidFill>
+                <a:latin typeface="Pretendard" pitchFamily="34" charset="0"/>
+                <a:ea typeface="Pretendard" pitchFamily="34" charset="-122"/>
+                <a:cs typeface="Pretendard" pitchFamily="34" charset="-120"/>
+              </a:rPr>
+              <a:t>승강기</a:t>
+            </a:r>
+            <a:endParaRPr lang="en-US" sz="1400" dirty="0"/>
+          </a:p>
+        </p:txBody>
+      </p:sp>
+      <p:sp>
+        <p:nvSpPr>
+          <p:cNvPr id="22" name="Text 20"/>
+          <p:cNvSpPr/>
+          <p:nvPr/>
+        </p:nvSpPr>
+        <p:spPr>
+          <a:xfrm>
+            <a:off x="3172968" y="3657600"/>
+            <a:ext cx="4251960" cy="402336"/>
+          </a:xfrm>
+          <a:prstGeom prst="rect">
+            <a:avLst/>
+          </a:prstGeom>
+          <a:noFill/>
+          <a:ln/>
+        </p:spPr>
+        <p:txBody>
+          <a:bodyPr wrap="square" lIns="0" tIns="0" rIns="0" bIns="0" rtlCol="0" anchor="ctr"/>
+          <a:lstStyle/>
+          <a:p>
+            <a:pPr indent="0" marL="0">
+              <a:lnSpc>
+                <a:spcPct val="120000"/>
+              </a:lnSpc>
+              <a:buNone/>
+            </a:pPr>
+            <a:r>
+              <a:rPr lang="en-US" sz="1400" b="1" dirty="0">
+                <a:solidFill>
+                  <a:srgbClr val="0F172A"/>
+                </a:solidFill>
+                <a:latin typeface="Pretendard" pitchFamily="34" charset="0"/>
+                <a:ea typeface="Pretendard" pitchFamily="34" charset="-122"/>
+                <a:cs typeface="Pretendard" pitchFamily="34" charset="-120"/>
+              </a:rPr>
+              <a:t>1대 (15인승 침대용)</a:t>
+            </a:r>
+            <a:endParaRPr lang="en-US" sz="1400" dirty="0"/>
+          </a:p>
+        </p:txBody>
+      </p:sp>
+      <p:sp>
+        <p:nvSpPr>
+          <p:cNvPr id="23" name="Shape 21"/>
+          <p:cNvSpPr/>
+          <p:nvPr/>
+        </p:nvSpPr>
+        <p:spPr>
+          <a:xfrm>
+            <a:off x="566928" y="4059936"/>
+            <a:ext cx="6858000" cy="0"/>
+          </a:xfrm>
+          <a:prstGeom prst="line">
+            <a:avLst/>
+          </a:prstGeom>
+          <a:noFill/>
+          <a:ln w="3810">
+            <a:solidFill>
+              <a:srgbClr val="CBD5E1"/>
+            </a:solidFill>
+            <a:prstDash val="solid"/>
+          </a:ln>
+        </p:spPr>
+      </p:sp>
+      <p:sp>
+        <p:nvSpPr>
+          <p:cNvPr id="24" name="Text 22"/>
+          <p:cNvSpPr/>
+          <p:nvPr/>
+        </p:nvSpPr>
+        <p:spPr>
+          <a:xfrm>
+            <a:off x="566928" y="4059936"/>
+            <a:ext cx="2606040" cy="402336"/>
+          </a:xfrm>
+          <a:prstGeom prst="rect">
+            <a:avLst/>
+          </a:prstGeom>
+          <a:noFill/>
+          <a:ln/>
+        </p:spPr>
+        <p:txBody>
+          <a:bodyPr wrap="square" lIns="0" tIns="0" rIns="0" bIns="0" rtlCol="0" anchor="ctr"/>
+          <a:lstStyle/>
+          <a:p>
+            <a:pPr indent="0" marL="0">
+              <a:lnSpc>
+                <a:spcPct val="120000"/>
+              </a:lnSpc>
+              <a:buNone/>
+            </a:pPr>
+            <a:r>
+              <a:rPr lang="en-US" sz="1400" dirty="0">
+                <a:solidFill>
+                  <a:srgbClr val="64748B"/>
+                </a:solidFill>
+                <a:latin typeface="Pretendard" pitchFamily="34" charset="0"/>
+                <a:ea typeface="Pretendard" pitchFamily="34" charset="-122"/>
+                <a:cs typeface="Pretendard" pitchFamily="34" charset="-120"/>
+              </a:rPr>
+              <a:t>주차 대수</a:t>
+            </a:r>
+            <a:endParaRPr lang="en-US" sz="1400" dirty="0"/>
+          </a:p>
+        </p:txBody>
+      </p:sp>
+      <p:sp>
+        <p:nvSpPr>
+          <p:cNvPr id="25" name="Text 23"/>
+          <p:cNvSpPr/>
+          <p:nvPr/>
+        </p:nvSpPr>
+        <p:spPr>
+          <a:xfrm>
+            <a:off x="3172968" y="4059936"/>
+            <a:ext cx="4251960" cy="402336"/>
+          </a:xfrm>
+          <a:prstGeom prst="rect">
+            <a:avLst/>
+          </a:prstGeom>
+          <a:noFill/>
+          <a:ln/>
+        </p:spPr>
+        <p:txBody>
+          <a:bodyPr wrap="square" lIns="0" tIns="0" rIns="0" bIns="0" rtlCol="0" anchor="ctr"/>
+          <a:lstStyle/>
+          <a:p>
+            <a:pPr indent="0" marL="0">
+              <a:lnSpc>
+                <a:spcPct val="120000"/>
+              </a:lnSpc>
+              <a:buNone/>
+            </a:pPr>
+            <a:r>
+              <a:rPr lang="en-US" sz="1400" b="1" dirty="0">
+                <a:solidFill>
+                  <a:srgbClr val="0F172A"/>
+                </a:solidFill>
+                <a:latin typeface="Pretendard" pitchFamily="34" charset="0"/>
+                <a:ea typeface="Pretendard" pitchFamily="34" charset="-122"/>
+                <a:cs typeface="Pretendard" pitchFamily="34" charset="-120"/>
+              </a:rPr>
+              <a:t>18대 (자주식 완비)</a:t>
+            </a:r>
+            <a:endParaRPr lang="en-US" sz="1400" dirty="0"/>
+          </a:p>
+        </p:txBody>
+      </p:sp>
+      <p:sp>
+        <p:nvSpPr>
+          <p:cNvPr id="26" name="Shape 24"/>
+          <p:cNvSpPr/>
+          <p:nvPr/>
+        </p:nvSpPr>
+        <p:spPr>
+          <a:xfrm>
+            <a:off x="566928" y="4462272"/>
+            <a:ext cx="6858000" cy="0"/>
+          </a:xfrm>
+          <a:prstGeom prst="line">
+            <a:avLst/>
+          </a:prstGeom>
+          <a:noFill/>
+          <a:ln w="3810">
+            <a:solidFill>
+              <a:srgbClr val="CBD5E1"/>
+            </a:solidFill>
+            <a:prstDash val="solid"/>
+          </a:ln>
+        </p:spPr>
+      </p:sp>
+      <p:sp>
+        <p:nvSpPr>
+          <p:cNvPr id="27" name="Text 25"/>
+          <p:cNvSpPr/>
+          <p:nvPr/>
+        </p:nvSpPr>
+        <p:spPr>
+          <a:xfrm>
+            <a:off x="566928" y="4462272"/>
+            <a:ext cx="2606040" cy="402336"/>
+          </a:xfrm>
+          <a:prstGeom prst="rect">
+            <a:avLst/>
+          </a:prstGeom>
+          <a:noFill/>
+          <a:ln/>
+        </p:spPr>
+        <p:txBody>
+          <a:bodyPr wrap="square" lIns="0" tIns="0" rIns="0" bIns="0" rtlCol="0" anchor="ctr"/>
+          <a:lstStyle/>
+          <a:p>
+            <a:pPr indent="0" marL="0">
+              <a:lnSpc>
+                <a:spcPct val="120000"/>
+              </a:lnSpc>
+              <a:buNone/>
+            </a:pPr>
+            <a:r>
+              <a:rPr lang="en-US" sz="1400" dirty="0">
+                <a:solidFill>
+                  <a:srgbClr val="64748B"/>
+                </a:solidFill>
+                <a:latin typeface="Pretendard" pitchFamily="34" charset="0"/>
+                <a:ea typeface="Pretendard" pitchFamily="34" charset="-122"/>
+                <a:cs typeface="Pretendard" pitchFamily="34" charset="-120"/>
+              </a:rPr>
+              <a:t>주구조</a:t>
+            </a:r>
+            <a:endParaRPr lang="en-US" sz="1400" dirty="0"/>
+          </a:p>
+        </p:txBody>
+      </p:sp>
+      <p:sp>
+        <p:nvSpPr>
+          <p:cNvPr id="28" name="Text 26"/>
+          <p:cNvSpPr/>
+          <p:nvPr/>
+        </p:nvSpPr>
+        <p:spPr>
+          <a:xfrm>
+            <a:off x="3172968" y="4462272"/>
+            <a:ext cx="4251960" cy="402336"/>
+          </a:xfrm>
+          <a:prstGeom prst="rect">
+            <a:avLst/>
+          </a:prstGeom>
+          <a:noFill/>
+          <a:ln/>
+        </p:spPr>
+        <p:txBody>
+          <a:bodyPr wrap="square" lIns="0" tIns="0" rIns="0" bIns="0" rtlCol="0" anchor="ctr"/>
+          <a:lstStyle/>
+          <a:p>
+            <a:pPr indent="0" marL="0">
+              <a:lnSpc>
+                <a:spcPct val="120000"/>
+              </a:lnSpc>
+              <a:buNone/>
+            </a:pPr>
+            <a:r>
+              <a:rPr lang="en-US" sz="1400" b="1" dirty="0">
+                <a:solidFill>
+                  <a:srgbClr val="0F172A"/>
+                </a:solidFill>
+                <a:latin typeface="Pretendard" pitchFamily="34" charset="0"/>
+                <a:ea typeface="Pretendard" pitchFamily="34" charset="-122"/>
+                <a:cs typeface="Pretendard" pitchFamily="34" charset="-120"/>
+              </a:rPr>
+              <a:t>철근콘크리트구조</a:t>
+            </a:r>
+            <a:endParaRPr lang="en-US" sz="1400" dirty="0"/>
+          </a:p>
+        </p:txBody>
+      </p:sp>
+      <p:sp>
+        <p:nvSpPr>
+          <p:cNvPr id="29" name="Shape 27"/>
+          <p:cNvSpPr/>
+          <p:nvPr/>
+        </p:nvSpPr>
+        <p:spPr>
+          <a:xfrm>
+            <a:off x="566928" y="4864608"/>
+            <a:ext cx="6858000" cy="0"/>
+          </a:xfrm>
+          <a:prstGeom prst="line">
+            <a:avLst/>
+          </a:prstGeom>
+          <a:noFill/>
+          <a:ln w="3810">
+            <a:solidFill>
+              <a:srgbClr val="CBD5E1"/>
+            </a:solidFill>
+            <a:prstDash val="solid"/>
+          </a:ln>
+        </p:spPr>
+      </p:sp>
+      <p:sp>
+        <p:nvSpPr>
+          <p:cNvPr id="30" name="Text 28"/>
+          <p:cNvSpPr/>
+          <p:nvPr/>
+        </p:nvSpPr>
+        <p:spPr>
+          <a:xfrm>
+            <a:off x="566928" y="4864608"/>
+            <a:ext cx="2606040" cy="402336"/>
+          </a:xfrm>
+          <a:prstGeom prst="rect">
+            <a:avLst/>
+          </a:prstGeom>
+          <a:noFill/>
+          <a:ln/>
+        </p:spPr>
+        <p:txBody>
+          <a:bodyPr wrap="square" lIns="0" tIns="0" rIns="0" bIns="0" rtlCol="0" anchor="ctr"/>
+          <a:lstStyle/>
+          <a:p>
+            <a:pPr indent="0" marL="0">
+              <a:lnSpc>
+                <a:spcPct val="120000"/>
+              </a:lnSpc>
+              <a:buNone/>
+            </a:pPr>
+            <a:r>
+              <a:rPr lang="en-US" sz="1400" dirty="0">
+                <a:solidFill>
+                  <a:srgbClr val="64748B"/>
+                </a:solidFill>
+                <a:latin typeface="Pretendard" pitchFamily="34" charset="0"/>
+                <a:ea typeface="Pretendard" pitchFamily="34" charset="-122"/>
+                <a:cs typeface="Pretendard" pitchFamily="34" charset="-120"/>
+              </a:rPr>
+              <a:t>매매 희망가</a:t>
+            </a:r>
+            <a:endParaRPr lang="en-US" sz="1400" dirty="0"/>
+          </a:p>
+        </p:txBody>
+      </p:sp>
+      <p:sp>
+        <p:nvSpPr>
+          <p:cNvPr id="31" name="Text 29"/>
+          <p:cNvSpPr/>
+          <p:nvPr/>
+        </p:nvSpPr>
+        <p:spPr>
+          <a:xfrm>
+            <a:off x="3172968" y="4864608"/>
+            <a:ext cx="4251960" cy="402336"/>
+          </a:xfrm>
+          <a:prstGeom prst="rect">
+            <a:avLst/>
+          </a:prstGeom>
+          <a:noFill/>
+          <a:ln/>
+        </p:spPr>
+        <p:txBody>
+          <a:bodyPr wrap="square" lIns="0" tIns="0" rIns="0" bIns="0" rtlCol="0" anchor="ctr"/>
+          <a:lstStyle/>
+          <a:p>
+            <a:pPr indent="0" marL="0">
+              <a:lnSpc>
+                <a:spcPct val="120000"/>
+              </a:lnSpc>
+              <a:buNone/>
+            </a:pPr>
+            <a:r>
+              <a:rPr lang="en-US" sz="1400" b="1" dirty="0">
+                <a:solidFill>
+                  <a:srgbClr val="0F172A"/>
+                </a:solidFill>
+                <a:latin typeface="Pretendard" pitchFamily="34" charset="0"/>
+                <a:ea typeface="Pretendard" pitchFamily="34" charset="-122"/>
+                <a:cs typeface="Pretendard" pitchFamily="34" charset="-120"/>
+              </a:rPr>
+              <a:t>72억</a:t>
+            </a:r>
+            <a:endParaRPr lang="en-US" sz="1400" dirty="0"/>
+          </a:p>
+        </p:txBody>
+      </p:sp>
+      <p:sp>
+        <p:nvSpPr>
+          <p:cNvPr id="32" name="Shape 30"/>
           <p:cNvSpPr/>
           <p:nvPr/>
         </p:nvSpPr>
@@ -5210,18 +6178,18 @@
       </p:sp>
       <p:sp>
         <p:nvSpPr>
-          <p:cNvPr id="9" name="Shape 7"/>
+          <p:cNvPr id="33" name="Shape 31"/>
           <p:cNvSpPr/>
           <p:nvPr/>
         </p:nvSpPr>
         <p:spPr>
           <a:xfrm>
             <a:off x="7784287" y="1645920"/>
-            <a:ext cx="3840480" cy="2103120"/>
+            <a:ext cx="3840480" cy="1645920"/>
           </a:xfrm>
           <a:prstGeom prst="roundRect">
             <a:avLst>
-              <a:gd name="adj" fmla="val 2609"/>
+              <a:gd name="adj" fmla="val 3333"/>
             </a:avLst>
           </a:prstGeom>
           <a:solidFill>
@@ -5232,14 +6200,14 @@
       </p:sp>
       <p:sp>
         <p:nvSpPr>
-          <p:cNvPr id="10" name="Shape 8"/>
+          <p:cNvPr id="34" name="Shape 32"/>
           <p:cNvSpPr/>
           <p:nvPr/>
         </p:nvSpPr>
         <p:spPr>
           <a:xfrm>
             <a:off x="7784287" y="1700784"/>
-            <a:ext cx="36576" cy="1993392"/>
+            <a:ext cx="36576" cy="1536192"/>
           </a:xfrm>
           <a:prstGeom prst="rect">
             <a:avLst/>
@@ -5252,7 +6220,7 @@
       </p:sp>
       <p:sp>
         <p:nvSpPr>
-          <p:cNvPr id="11" name="Text 9"/>
+          <p:cNvPr id="35" name="Text 33"/>
           <p:cNvSpPr/>
           <p:nvPr/>
         </p:nvSpPr>
@@ -5274,305 +6242,85 @@
             <a:pPr indent="0" marL="0">
               <a:buNone/>
             </a:pPr>
-            <a:r>
-              <a:rPr lang="en-US" sz="1050" b="1" dirty="0">
-                <a:solidFill>
-                  <a:srgbClr val="1D4ED8"/>
+            <a:endParaRPr lang="en-US" sz="1050" dirty="0"/>
+          </a:p>
+        </p:txBody>
+      </p:sp>
+      <p:sp>
+        <p:nvSpPr>
+          <p:cNvPr id="36" name="Text 34"/>
+          <p:cNvSpPr/>
+          <p:nvPr/>
+        </p:nvSpPr>
+        <p:spPr>
+          <a:xfrm>
+            <a:off x="7967167" y="1975104"/>
+            <a:ext cx="3511296" cy="1243584"/>
+          </a:xfrm>
+          <a:prstGeom prst="rect">
+            <a:avLst/>
+          </a:prstGeom>
+          <a:noFill/>
+          <a:ln/>
+        </p:spPr>
+        <p:txBody>
+          <a:bodyPr wrap="square" lIns="0" tIns="0" rIns="0" bIns="0" rtlCol="0" anchor="t"/>
+          <a:lstStyle/>
+          <a:p>
+            <a:pPr indent="0" marL="0">
+              <a:lnSpc>
+                <a:spcPct val="120000"/>
+              </a:lnSpc>
+              <a:buNone/>
+            </a:pPr>
+            <a:r>
+              <a:rPr lang="en-US" sz="930" dirty="0">
+                <a:solidFill>
+                  <a:srgbClr val="0F172A"/>
                 </a:solidFill>
                 <a:latin typeface="Pretendard" pitchFamily="34" charset="0"/>
                 <a:ea typeface="Pretendard" pitchFamily="34" charset="-122"/>
                 <a:cs typeface="Pretendard" pitchFamily="34" charset="-120"/>
               </a:rPr>
-              <a:t>토지 및 건물 분석 포인트</a:t>
-            </a:r>
-            <a:endParaRPr lang="en-US" sz="1050" dirty="0"/>
-          </a:p>
-        </p:txBody>
-      </p:sp>
-      <p:sp>
-        <p:nvSpPr>
-          <p:cNvPr id="12" name="Text 10"/>
-          <p:cNvSpPr/>
-          <p:nvPr/>
-        </p:nvSpPr>
-        <p:spPr>
-          <a:xfrm>
-            <a:off x="7967167" y="1975104"/>
-            <a:ext cx="3511296" cy="1700784"/>
-          </a:xfrm>
-          <a:prstGeom prst="rect">
-            <a:avLst/>
-          </a:prstGeom>
-          <a:noFill/>
-          <a:ln/>
-        </p:spPr>
-        <p:txBody>
-          <a:bodyPr wrap="square" lIns="0" tIns="0" rIns="0" bIns="0" rtlCol="0" anchor="t"/>
-          <a:lstStyle/>
-          <a:p>
-            <a:pPr marL="342900" indent="-342900">
-              <a:lnSpc>
-                <a:spcPct val="120000"/>
-              </a:lnSpc>
-              <a:buSzPct val="100000"/>
-              <a:buChar char="•"/>
-            </a:pPr>
-            <a:r>
-              <a:rPr lang="en-US" sz="930" dirty="0">
-                <a:solidFill>
-                  <a:srgbClr val="0F172A"/>
+              <a:t>본 매물은 송파권역 대로변 입지의 우량 메디컬 테넌트 만실 운영 자산입니다.</a:t>
+            </a:r>
+            <a:endParaRPr lang="en-US" sz="930" dirty="0"/>
+          </a:p>
+        </p:txBody>
+      </p:sp>
+      <p:sp>
+        <p:nvSpPr>
+          <p:cNvPr id="37" name="Text 35"/>
+          <p:cNvSpPr/>
+          <p:nvPr/>
+        </p:nvSpPr>
+        <p:spPr>
+          <a:xfrm>
+            <a:off x="566928" y="6419088"/>
+            <a:ext cx="11057839" cy="201168"/>
+          </a:xfrm>
+          <a:prstGeom prst="rect">
+            <a:avLst/>
+          </a:prstGeom>
+          <a:noFill/>
+          <a:ln/>
+        </p:spPr>
+        <p:txBody>
+          <a:bodyPr wrap="square" lIns="0" tIns="0" rIns="0" bIns="0" rtlCol="0" anchor="ctr"/>
+          <a:lstStyle/>
+          <a:p>
+            <a:pPr algn="ctr" indent="0" marL="0">
+              <a:buNone/>
+            </a:pPr>
+            <a:r>
+              <a:rPr lang="en-US" sz="750" dirty="0">
+                <a:solidFill>
+                  <a:srgbClr val="64748B"/>
                 </a:solidFill>
                 <a:latin typeface="Pretendard" pitchFamily="34" charset="0"/>
                 <a:ea typeface="Pretendard" pitchFamily="34" charset="-122"/>
                 <a:cs typeface="Pretendard" pitchFamily="34" charset="-120"/>
               </a:rPr>
-              <a:t>서초대로 25m 메인 도로변 우수한 가시성 확보</a:t>
-            </a:r>
-            <a:endParaRPr lang="en-US" sz="930" dirty="0"/>
-          </a:p>
-          <a:p>
-            <a:pPr marL="342900" indent="-342900">
-              <a:lnSpc>
-                <a:spcPct val="120000"/>
-              </a:lnSpc>
-              <a:buSzPct val="100000"/>
-              <a:buChar char="•"/>
-            </a:pPr>
-            <a:r>
-              <a:rPr lang="en-US" sz="930" dirty="0">
-                <a:solidFill>
-                  <a:srgbClr val="0F172A"/>
-                </a:solidFill>
-                <a:latin typeface="Pretendard" pitchFamily="34" charset="0"/>
-                <a:ea typeface="Pretendard" pitchFamily="34" charset="-122"/>
-                <a:cs typeface="Pretendard" pitchFamily="34" charset="-120"/>
-              </a:rPr>
-              <a:t>제3종일반주거지역 법정 용적률 완비 자산</a:t>
-            </a:r>
-            <a:endParaRPr lang="en-US" sz="930" dirty="0"/>
-          </a:p>
-          <a:p>
-            <a:pPr marL="342900" indent="-342900">
-              <a:lnSpc>
-                <a:spcPct val="120000"/>
-              </a:lnSpc>
-              <a:buSzPct val="100000"/>
-              <a:buChar char="•"/>
-            </a:pPr>
-            <a:r>
-              <a:rPr lang="en-US" sz="930" dirty="0">
-                <a:solidFill>
-                  <a:srgbClr val="0F172A"/>
-                </a:solidFill>
-                <a:latin typeface="Pretendard" pitchFamily="34" charset="0"/>
-                <a:ea typeface="Pretendard" pitchFamily="34" charset="-122"/>
-                <a:cs typeface="Pretendard" pitchFamily="34" charset="-120"/>
-              </a:rPr>
-              <a:t>침대용 승강기 완비로 병의원 입점 최적화 구조</a:t>
-            </a:r>
-            <a:endParaRPr lang="en-US" sz="930" dirty="0"/>
-          </a:p>
-        </p:txBody>
-      </p:sp>
-      <p:sp>
-        <p:nvSpPr>
-          <p:cNvPr id="13" name="Shape 11"/>
-          <p:cNvSpPr/>
-          <p:nvPr/>
-        </p:nvSpPr>
-        <p:spPr>
-          <a:xfrm>
-            <a:off x="7784287" y="3977640"/>
-            <a:ext cx="3840480" cy="2148840"/>
-          </a:xfrm>
-          <a:prstGeom prst="roundRect">
-            <a:avLst>
-              <a:gd name="adj" fmla="val 2553"/>
-            </a:avLst>
-          </a:prstGeom>
-          <a:solidFill>
-            <a:srgbClr val="DBEAFE"/>
-          </a:solidFill>
-          <a:ln/>
-        </p:spPr>
-      </p:sp>
-      <p:sp>
-        <p:nvSpPr>
-          <p:cNvPr id="14" name="Shape 12"/>
-          <p:cNvSpPr/>
-          <p:nvPr/>
-        </p:nvSpPr>
-        <p:spPr>
-          <a:xfrm>
-            <a:off x="7784287" y="4032504"/>
-            <a:ext cx="36576" cy="2039112"/>
-          </a:xfrm>
-          <a:prstGeom prst="rect">
-            <a:avLst/>
-          </a:prstGeom>
-          <a:solidFill>
-            <a:srgbClr val="1D4ED8"/>
-          </a:solidFill>
-          <a:ln/>
-        </p:spPr>
-      </p:sp>
-      <p:sp>
-        <p:nvSpPr>
-          <p:cNvPr id="15" name="Text 13"/>
-          <p:cNvSpPr/>
-          <p:nvPr/>
-        </p:nvSpPr>
-        <p:spPr>
-          <a:xfrm>
-            <a:off x="7967167" y="4087368"/>
-            <a:ext cx="3511296" cy="201168"/>
-          </a:xfrm>
-          <a:prstGeom prst="rect">
-            <a:avLst/>
-          </a:prstGeom>
-          <a:noFill/>
-          <a:ln/>
-        </p:spPr>
-        <p:txBody>
-          <a:bodyPr wrap="square" lIns="0" tIns="0" rIns="0" bIns="0" rtlCol="0" anchor="ctr"/>
-          <a:lstStyle/>
-          <a:p>
-            <a:pPr indent="0" marL="0">
-              <a:buNone/>
-            </a:pPr>
-            <a:r>
-              <a:rPr lang="en-US" sz="1050" b="1" dirty="0">
-                <a:solidFill>
-                  <a:srgbClr val="1D4ED8"/>
-                </a:solidFill>
-                <a:latin typeface="Pretendard" pitchFamily="34" charset="0"/>
-                <a:ea typeface="Pretendard" pitchFamily="34" charset="-122"/>
-                <a:cs typeface="Pretendard" pitchFamily="34" charset="-120"/>
-              </a:rPr>
-              <a:t>물건 실사 및 관리 상태</a:t>
-            </a:r>
-            <a:endParaRPr lang="en-US" sz="1050" dirty="0"/>
-          </a:p>
-        </p:txBody>
-      </p:sp>
-      <p:sp>
-        <p:nvSpPr>
-          <p:cNvPr id="16" name="Text 14"/>
-          <p:cNvSpPr/>
-          <p:nvPr/>
-        </p:nvSpPr>
-        <p:spPr>
-          <a:xfrm>
-            <a:off x="7967167" y="4306824"/>
-            <a:ext cx="3511296" cy="1746504"/>
-          </a:xfrm>
-          <a:prstGeom prst="rect">
-            <a:avLst/>
-          </a:prstGeom>
-          <a:noFill/>
-          <a:ln/>
-        </p:spPr>
-        <p:txBody>
-          <a:bodyPr wrap="square" lIns="0" tIns="0" rIns="0" bIns="0" rtlCol="0" anchor="t"/>
-          <a:lstStyle/>
-          <a:p>
-            <a:pPr marL="342900" indent="-342900">
-              <a:lnSpc>
-                <a:spcPct val="120000"/>
-              </a:lnSpc>
-              <a:buSzPct val="100000"/>
-              <a:buChar char="•"/>
-            </a:pPr>
-            <a:r>
-              <a:rPr lang="en-US" sz="930" dirty="0">
-                <a:solidFill>
-                  <a:srgbClr val="0F172A"/>
-                </a:solidFill>
-                <a:latin typeface="Pretendard" pitchFamily="34" charset="0"/>
-                <a:ea typeface="Pretendard" pitchFamily="34" charset="-122"/>
-                <a:cs typeface="Pretendard" pitchFamily="34" charset="-120"/>
-              </a:rPr>
-              <a:t>2017년 준공 신축급 상태로 누수·균열 0건</a:t>
-            </a:r>
-            <a:endParaRPr lang="en-US" sz="930" dirty="0"/>
-          </a:p>
-          <a:p>
-            <a:pPr marL="342900" indent="-342900">
-              <a:lnSpc>
-                <a:spcPct val="120000"/>
-              </a:lnSpc>
-              <a:buSzPct val="100000"/>
-              <a:buChar char="•"/>
-            </a:pPr>
-            <a:r>
-              <a:rPr lang="en-US" sz="930" dirty="0">
-                <a:solidFill>
-                  <a:srgbClr val="0F172A"/>
-                </a:solidFill>
-                <a:latin typeface="Pretendard" pitchFamily="34" charset="0"/>
-                <a:ea typeface="Pretendard" pitchFamily="34" charset="-122"/>
-                <a:cs typeface="Pretendard" pitchFamily="34" charset="-120"/>
-              </a:rPr>
-              <a:t>단독 법인 소유로 권리관계 투명</a:t>
-            </a:r>
-            <a:endParaRPr lang="en-US" sz="930" dirty="0"/>
-          </a:p>
-          <a:p>
-            <a:pPr marL="342900" indent="-342900">
-              <a:lnSpc>
-                <a:spcPct val="120000"/>
-              </a:lnSpc>
-              <a:buSzPct val="100000"/>
-              <a:buChar char="•"/>
-            </a:pPr>
-            <a:r>
-              <a:rPr lang="en-US" sz="930" dirty="0">
-                <a:solidFill>
-                  <a:srgbClr val="0F172A"/>
-                </a:solidFill>
-                <a:latin typeface="Pretendard" pitchFamily="34" charset="0"/>
-                <a:ea typeface="Pretendard" pitchFamily="34" charset="-122"/>
-                <a:cs typeface="Pretendard" pitchFamily="34" charset="-120"/>
-              </a:rPr>
-              <a:t>1금융권 담보대출 85억 원 승계 적격</a:t>
-            </a:r>
-            <a:endParaRPr lang="en-US" sz="930" dirty="0"/>
-          </a:p>
-        </p:txBody>
-      </p:sp>
-      <p:sp>
-        <p:nvSpPr>
-          <p:cNvPr id="17" name="Text 15"/>
-          <p:cNvSpPr/>
-          <p:nvPr/>
-        </p:nvSpPr>
-        <p:spPr>
-          <a:xfrm>
-            <a:off x="566928" y="6419088"/>
-            <a:ext cx="11057839" cy="201168"/>
-          </a:xfrm>
-          <a:prstGeom prst="rect">
-            <a:avLst/>
-          </a:prstGeom>
-          <a:noFill/>
-          <a:ln/>
-        </p:spPr>
-        <p:txBody>
-          <a:bodyPr wrap="square" lIns="0" tIns="0" rIns="0" bIns="0" rtlCol="0" anchor="ctr"/>
-          <a:lstStyle/>
-          <a:p>
-            <a:pPr algn="ctr" indent="0" marL="0">
-              <a:buNone/>
-            </a:pPr>
-            <a:r>
-              <a:rPr lang="en-US" sz="750" dirty="0">
-                <a:solidFill>
-                  <a:srgbClr val="64748B"/>
-                </a:solidFill>
-                <a:latin typeface="Pretendard" pitchFamily="34" charset="0"/>
-                <a:ea typeface="Pretendard" pitchFamily="34" charset="-122"/>
-                <a:cs typeface="Pretendard" pitchFamily="34" charset="-120"/>
-              </a:rPr>
               <a:t>크리딜  ·    ·  4</a:t>
             </a:r>
             <a:endParaRPr lang="en-US" sz="750" dirty="0"/>
@@ -5581,7 +6329,7 @@
       </p:sp>
       <p:sp>
         <p:nvSpPr>
-          <p:cNvPr id="18" name="Shape 16"/>
+          <p:cNvPr id="38" name="Shape 36"/>
           <p:cNvSpPr/>
           <p:nvPr/>
         </p:nvSpPr>
@@ -5732,25 +6480,1095 @@
           </a:p>
         </p:txBody>
       </p:sp>
-      <p:sp>
-        <p:nvSpPr>
-          <p:cNvPr id="5" name="Text 3"/>
-          <p:cNvSpPr/>
-          <p:nvPr/>
-        </p:nvSpPr>
-        <p:spPr>
-          <a:xfrm>
-            <a:off x="566928" y="1645920"/>
-            <a:ext cx="4201979" cy="402336"/>
-          </a:xfrm>
-          <a:prstGeom prst="rect">
-            <a:avLst/>
-          </a:prstGeom>
-          <a:noFill/>
-          <a:ln/>
-        </p:spPr>
-        <p:txBody>
-          <a:bodyPr wrap="square" lIns="0" tIns="0" rIns="0" bIns="0" rtlCol="0" anchor="ctr"/>
+      <p:graphicFrame>
+        <p:nvGraphicFramePr>
+          <p:cNvPr id="6" name="Table 0"/>
+          <p:cNvGraphicFramePr>
+            <a:graphicFrameLocks noGrp="1"/>
+          </p:cNvGraphicFramePr>
+          <p:nvPr>
+            <p:extLst>
+              <p:ext uri="{D42A27DB-BD31-4B8C-83A1-F6EECF244321}">
+                <p14:modId xmlns:p14="http://schemas.microsoft.com/office/powerpoint/2010/main" val="1579011935"/>
+              </p:ext>
+            </p:extLst>
+          </p:nvPr>
+        </p:nvGraphicFramePr>
+        <p:xfrm>
+          <a:off x="566928" y="1645920"/>
+          <a:ext cx="11057839" cy="914400"/>
+        </p:xfrm>
+        <a:graphic>
+          <a:graphicData uri="http://schemas.openxmlformats.org/drawingml/2006/table">
+            <a:tbl>
+              <a:tblPr/>
+              <a:tblGrid>
+                <a:gridCol w="5528920"/>
+                <a:gridCol w="5528920"/>
+              </a:tblGrid>
+              <a:tr h="457200">
+                <a:tc>
+                  <a:txBody>
+                    <a:bodyPr/>
+                    <a:lstStyle/>
+                    <a:p>
+                      <a:pPr indent="0" marL="0">
+                        <a:buNone/>
+                      </a:pPr>
+                      <a:r>
+                        <a:rPr lang="en-US" sz="1300" b="1" dirty="0">
+                          <a:solidFill>
+                            <a:srgbClr val="64748B"/>
+                          </a:solidFill>
+                          <a:latin typeface="Pretendard" pitchFamily="34" charset="0"/>
+                          <a:ea typeface="Pretendard" pitchFamily="34" charset="-122"/>
+                          <a:cs typeface="Pretendard" pitchFamily="34" charset="-120"/>
+                        </a:rPr>
+                        <a:t>항목</a:t>
+                      </a:r>
+                      <a:endParaRPr lang="en-US" sz="1300" dirty="0">
+                        <a:latin typeface="Pretendard" charset="0"/>
+                        <a:ea typeface="Pretendard" charset="0"/>
+                        <a:cs typeface="Pretendard" charset="0"/>
+                      </a:endParaRPr>
+                    </a:p>
+                  </a:txBody>
+                  <a:tcPr marL="50800" marR="50800" marT="25400" marB="25400" anchor="ctr">
+                    <a:lnL w="3810" cap="flat" cmpd="sng" algn="ctr">
+                      <a:solidFill>
+                        <a:srgbClr val="CBD5E1"/>
+                      </a:solidFill>
+                      <a:prstDash val="solid"/>
+                      <a:round/>
+                      <a:headEnd type="none" w="med" len="med"/>
+                      <a:tailEnd type="none" w="med" len="med"/>
+                    </a:lnL>
+                    <a:lnR w="3810" cap="flat" cmpd="sng" algn="ctr">
+                      <a:solidFill>
+                        <a:srgbClr val="CBD5E1"/>
+                      </a:solidFill>
+                      <a:prstDash val="solid"/>
+                      <a:round/>
+                      <a:headEnd type="none" w="med" len="med"/>
+                      <a:tailEnd type="none" w="med" len="med"/>
+                    </a:lnR>
+                    <a:lnT w="3810" cap="flat" cmpd="sng" algn="ctr">
+                      <a:solidFill>
+                        <a:srgbClr val="CBD5E1"/>
+                      </a:solidFill>
+                      <a:prstDash val="solid"/>
+                      <a:round/>
+                      <a:headEnd type="none" w="med" len="med"/>
+                      <a:tailEnd type="none" w="med" len="med"/>
+                    </a:lnT>
+                    <a:lnB w="3810" cap="flat" cmpd="sng" algn="ctr">
+                      <a:solidFill>
+                        <a:srgbClr val="CBD5E1"/>
+                      </a:solidFill>
+                      <a:prstDash val="solid"/>
+                      <a:round/>
+                      <a:headEnd type="none" w="med" len="med"/>
+                      <a:tailEnd type="none" w="med" len="med"/>
+                    </a:lnB>
+                    <a:solidFill>
+                      <a:srgbClr val="F8FAFC"/>
+                    </a:solidFill>
+                  </a:tcPr>
+                </a:tc>
+                <a:tc>
+                  <a:txBody>
+                    <a:bodyPr/>
+                    <a:lstStyle/>
+                    <a:p>
+                      <a:pPr indent="0" marL="0">
+                        <a:buNone/>
+                      </a:pPr>
+                      <a:r>
+                        <a:rPr lang="en-US" sz="1300" b="1" dirty="0">
+                          <a:solidFill>
+                            <a:srgbClr val="64748B"/>
+                          </a:solidFill>
+                          <a:latin typeface="Pretendard" pitchFamily="34" charset="0"/>
+                          <a:ea typeface="Pretendard" pitchFamily="34" charset="-122"/>
+                          <a:cs typeface="Pretendard" pitchFamily="34" charset="-120"/>
+                        </a:rPr>
+                        <a:t>내용</a:t>
+                      </a:r>
+                      <a:endParaRPr lang="en-US" sz="1300" dirty="0">
+                        <a:latin typeface="Pretendard" charset="0"/>
+                        <a:ea typeface="Pretendard" charset="0"/>
+                        <a:cs typeface="Pretendard" charset="0"/>
+                      </a:endParaRPr>
+                    </a:p>
+                  </a:txBody>
+                  <a:tcPr marL="50800" marR="50800" marT="25400" marB="25400" anchor="ctr">
+                    <a:lnL w="3810" cap="flat" cmpd="sng" algn="ctr">
+                      <a:solidFill>
+                        <a:srgbClr val="CBD5E1"/>
+                      </a:solidFill>
+                      <a:prstDash val="solid"/>
+                      <a:round/>
+                      <a:headEnd type="none" w="med" len="med"/>
+                      <a:tailEnd type="none" w="med" len="med"/>
+                    </a:lnL>
+                    <a:lnR w="3810" cap="flat" cmpd="sng" algn="ctr">
+                      <a:solidFill>
+                        <a:srgbClr val="CBD5E1"/>
+                      </a:solidFill>
+                      <a:prstDash val="solid"/>
+                      <a:round/>
+                      <a:headEnd type="none" w="med" len="med"/>
+                      <a:tailEnd type="none" w="med" len="med"/>
+                    </a:lnR>
+                    <a:lnT w="3810" cap="flat" cmpd="sng" algn="ctr">
+                      <a:solidFill>
+                        <a:srgbClr val="CBD5E1"/>
+                      </a:solidFill>
+                      <a:prstDash val="solid"/>
+                      <a:round/>
+                      <a:headEnd type="none" w="med" len="med"/>
+                      <a:tailEnd type="none" w="med" len="med"/>
+                    </a:lnT>
+                    <a:lnB w="3810" cap="flat" cmpd="sng" algn="ctr">
+                      <a:solidFill>
+                        <a:srgbClr val="CBD5E1"/>
+                      </a:solidFill>
+                      <a:prstDash val="solid"/>
+                      <a:round/>
+                      <a:headEnd type="none" w="med" len="med"/>
+                      <a:tailEnd type="none" w="med" len="med"/>
+                    </a:lnB>
+                    <a:solidFill>
+                      <a:srgbClr val="F8FAFC"/>
+                    </a:solidFill>
+                  </a:tcPr>
+                </a:tc>
+              </a:tr>
+              <a:tr h="457200">
+                <a:tc>
+                  <a:txBody>
+                    <a:bodyPr/>
+                    <a:lstStyle/>
+                    <a:p>
+                      <a:pPr indent="0" marL="0">
+                        <a:buNone/>
+                      </a:pPr>
+                      <a:r>
+                        <a:rPr lang="en-US" sz="1300" b="1" dirty="0">
+                          <a:solidFill>
+                            <a:srgbClr val="0F172A"/>
+                          </a:solidFill>
+                          <a:latin typeface="Pretendard" pitchFamily="34" charset="0"/>
+                          <a:ea typeface="Pretendard" pitchFamily="34" charset="-122"/>
+                          <a:cs typeface="Pretendard" pitchFamily="34" charset="-120"/>
+                        </a:rPr>
+                        <a:t>공실 </a:t>
+                      </a:r>
+                      <a:pPr indent="0" marL="0">
+                        <a:buNone/>
+                      </a:pPr>
+                      <a:r>
+                        <a:rPr lang="en-US" sz="1300" b="1" dirty="0">
+                          <a:solidFill>
+                            <a:srgbClr val="0F172A"/>
+                          </a:solidFill>
+                          <a:latin typeface="Pretendard" pitchFamily="34" charset="0"/>
+                          <a:ea typeface="Pretendard" pitchFamily="34" charset="-122"/>
+                          <a:cs typeface="Pretendard" pitchFamily="34" charset="-120"/>
+                        </a:rPr>
+                        <a:t>현황</a:t>
+                      </a:r>
+                      <a:endParaRPr lang="en-US" sz="1300" dirty="0">
+                        <a:latin typeface="Pretendard" charset="0"/>
+                        <a:ea typeface="Pretendard" charset="0"/>
+                        <a:cs typeface="Pretendard" charset="0"/>
+                      </a:endParaRPr>
+                    </a:p>
+                  </a:txBody>
+                  <a:tcPr marL="50800" marR="50800" marT="25400" marB="25400" anchor="ctr">
+                    <a:lnL w="3810" cap="flat" cmpd="sng" algn="ctr">
+                      <a:solidFill>
+                        <a:srgbClr val="CBD5E1"/>
+                      </a:solidFill>
+                      <a:prstDash val="solid"/>
+                      <a:round/>
+                      <a:headEnd type="none" w="med" len="med"/>
+                      <a:tailEnd type="none" w="med" len="med"/>
+                    </a:lnL>
+                    <a:lnR w="3810" cap="flat" cmpd="sng" algn="ctr">
+                      <a:solidFill>
+                        <a:srgbClr val="CBD5E1"/>
+                      </a:solidFill>
+                      <a:prstDash val="solid"/>
+                      <a:round/>
+                      <a:headEnd type="none" w="med" len="med"/>
+                      <a:tailEnd type="none" w="med" len="med"/>
+                    </a:lnR>
+                    <a:lnT w="3810" cap="flat" cmpd="sng" algn="ctr">
+                      <a:solidFill>
+                        <a:srgbClr val="CBD5E1"/>
+                      </a:solidFill>
+                      <a:prstDash val="solid"/>
+                      <a:round/>
+                      <a:headEnd type="none" w="med" len="med"/>
+                      <a:tailEnd type="none" w="med" len="med"/>
+                    </a:lnT>
+                    <a:lnB w="3810" cap="flat" cmpd="sng" algn="ctr">
+                      <a:solidFill>
+                        <a:srgbClr val="CBD5E1"/>
+                      </a:solidFill>
+                      <a:prstDash val="solid"/>
+                      <a:round/>
+                      <a:headEnd type="none" w="med" len="med"/>
+                      <a:tailEnd type="none" w="med" len="med"/>
+                    </a:lnB>
+                    <a:solidFill>
+                      <a:srgbClr val="FFFFFF"/>
+                    </a:solidFill>
+                  </a:tcPr>
+                </a:tc>
+                <a:tc>
+                  <a:txBody>
+                    <a:bodyPr/>
+                    <a:lstStyle/>
+                    <a:p>
+                      <a:pPr indent="0" marL="0">
+                        <a:buNone/>
+                      </a:pPr>
+                      <a:r>
+                        <a:rPr lang="en-US" sz="1300" dirty="0">
+                          <a:solidFill>
+                            <a:srgbClr val="0F172A"/>
+                          </a:solidFill>
+                          <a:latin typeface="Pretendard" pitchFamily="34" charset="0"/>
+                          <a:ea typeface="Pretendard" pitchFamily="34" charset="-122"/>
+                          <a:cs typeface="Pretendard" pitchFamily="34" charset="-120"/>
+                        </a:rPr>
+                        <a:t>상세 </a:t>
+                      </a:r>
+                      <a:pPr indent="0" marL="0">
+                        <a:buNone/>
+                      </a:pPr>
+                      <a:r>
+                        <a:rPr lang="en-US" sz="1300" dirty="0">
+                          <a:solidFill>
+                            <a:srgbClr val="0F172A"/>
+                          </a:solidFill>
+                          <a:latin typeface="Pretendard" pitchFamily="34" charset="0"/>
+                          <a:ea typeface="Pretendard" pitchFamily="34" charset="-122"/>
+                          <a:cs typeface="Pretendard" pitchFamily="34" charset="-120"/>
+                        </a:rPr>
+                        <a:t>확인 </a:t>
+                      </a:r>
+                      <a:pPr indent="0" marL="0">
+                        <a:buNone/>
+                      </a:pPr>
+                      <a:r>
+                        <a:rPr lang="en-US" sz="1300" dirty="0">
+                          <a:solidFill>
+                            <a:srgbClr val="0F172A"/>
+                          </a:solidFill>
+                          <a:latin typeface="Pretendard" pitchFamily="34" charset="0"/>
+                          <a:ea typeface="Pretendard" pitchFamily="34" charset="-122"/>
+                          <a:cs typeface="Pretendard" pitchFamily="34" charset="-120"/>
+                        </a:rPr>
+                        <a:t>필요</a:t>
+                      </a:r>
+                      <a:endParaRPr lang="en-US" sz="1300" dirty="0">
+                        <a:latin typeface="Pretendard" charset="0"/>
+                        <a:ea typeface="Pretendard" charset="0"/>
+                        <a:cs typeface="Pretendard" charset="0"/>
+                      </a:endParaRPr>
+                    </a:p>
+                  </a:txBody>
+                  <a:tcPr marL="50800" marR="50800" marT="25400" marB="25400" anchor="ctr">
+                    <a:lnL w="3810" cap="flat" cmpd="sng" algn="ctr">
+                      <a:solidFill>
+                        <a:srgbClr val="CBD5E1"/>
+                      </a:solidFill>
+                      <a:prstDash val="solid"/>
+                      <a:round/>
+                      <a:headEnd type="none" w="med" len="med"/>
+                      <a:tailEnd type="none" w="med" len="med"/>
+                    </a:lnL>
+                    <a:lnR w="3810" cap="flat" cmpd="sng" algn="ctr">
+                      <a:solidFill>
+                        <a:srgbClr val="CBD5E1"/>
+                      </a:solidFill>
+                      <a:prstDash val="solid"/>
+                      <a:round/>
+                      <a:headEnd type="none" w="med" len="med"/>
+                      <a:tailEnd type="none" w="med" len="med"/>
+                    </a:lnR>
+                    <a:lnT w="3810" cap="flat" cmpd="sng" algn="ctr">
+                      <a:solidFill>
+                        <a:srgbClr val="CBD5E1"/>
+                      </a:solidFill>
+                      <a:prstDash val="solid"/>
+                      <a:round/>
+                      <a:headEnd type="none" w="med" len="med"/>
+                      <a:tailEnd type="none" w="med" len="med"/>
+                    </a:lnT>
+                    <a:lnB w="3810" cap="flat" cmpd="sng" algn="ctr">
+                      <a:solidFill>
+                        <a:srgbClr val="CBD5E1"/>
+                      </a:solidFill>
+                      <a:prstDash val="solid"/>
+                      <a:round/>
+                      <a:headEnd type="none" w="med" len="med"/>
+                      <a:tailEnd type="none" w="med" len="med"/>
+                    </a:lnB>
+                    <a:solidFill>
+                      <a:srgbClr val="FFFFFF"/>
+                    </a:solidFill>
+                  </a:tcPr>
+                </a:tc>
+              </a:tr>
+              <a:tr h="457200">
+                <a:tc>
+                  <a:txBody>
+                    <a:bodyPr/>
+                    <a:lstStyle/>
+                    <a:p>
+                      <a:pPr indent="0" marL="0">
+                        <a:buNone/>
+                      </a:pPr>
+                      <a:r>
+                        <a:rPr lang="en-US" sz="1300" b="1" dirty="0">
+                          <a:solidFill>
+                            <a:srgbClr val="0F172A"/>
+                          </a:solidFill>
+                          <a:latin typeface="Pretendard" pitchFamily="34" charset="0"/>
+                          <a:ea typeface="Pretendard" pitchFamily="34" charset="-122"/>
+                          <a:cs typeface="Pretendard" pitchFamily="34" charset="-120"/>
+                        </a:rPr>
+                        <a:t>월 </a:t>
+                      </a:r>
+                      <a:pPr indent="0" marL="0">
+                        <a:buNone/>
+                      </a:pPr>
+                      <a:r>
+                        <a:rPr lang="en-US" sz="1300" b="1" dirty="0">
+                          <a:solidFill>
+                            <a:srgbClr val="0F172A"/>
+                          </a:solidFill>
+                          <a:latin typeface="Pretendard" pitchFamily="34" charset="0"/>
+                          <a:ea typeface="Pretendard" pitchFamily="34" charset="-122"/>
+                          <a:cs typeface="Pretendard" pitchFamily="34" charset="-120"/>
+                        </a:rPr>
+                        <a:t>임대료 </a:t>
+                      </a:r>
+                      <a:pPr indent="0" marL="0">
+                        <a:buNone/>
+                      </a:pPr>
+                      <a:r>
+                        <a:rPr lang="en-US" sz="1300" b="1" dirty="0">
+                          <a:solidFill>
+                            <a:srgbClr val="0F172A"/>
+                          </a:solidFill>
+                          <a:latin typeface="Pretendard" pitchFamily="34" charset="0"/>
+                          <a:ea typeface="Pretendard" pitchFamily="34" charset="-122"/>
+                          <a:cs typeface="Pretendard" pitchFamily="34" charset="-120"/>
+                        </a:rPr>
+                        <a:t>합계</a:t>
+                      </a:r>
+                      <a:endParaRPr lang="en-US" sz="1300" dirty="0">
+                        <a:latin typeface="Pretendard" charset="0"/>
+                        <a:ea typeface="Pretendard" charset="0"/>
+                        <a:cs typeface="Pretendard" charset="0"/>
+                      </a:endParaRPr>
+                    </a:p>
+                  </a:txBody>
+                  <a:tcPr marL="50800" marR="50800" marT="25400" marB="25400" anchor="ctr">
+                    <a:lnL w="3810" cap="flat" cmpd="sng" algn="ctr">
+                      <a:solidFill>
+                        <a:srgbClr val="CBD5E1"/>
+                      </a:solidFill>
+                      <a:prstDash val="solid"/>
+                      <a:round/>
+                      <a:headEnd type="none" w="med" len="med"/>
+                      <a:tailEnd type="none" w="med" len="med"/>
+                    </a:lnL>
+                    <a:lnR w="3810" cap="flat" cmpd="sng" algn="ctr">
+                      <a:solidFill>
+                        <a:srgbClr val="CBD5E1"/>
+                      </a:solidFill>
+                      <a:prstDash val="solid"/>
+                      <a:round/>
+                      <a:headEnd type="none" w="med" len="med"/>
+                      <a:tailEnd type="none" w="med" len="med"/>
+                    </a:lnR>
+                    <a:lnT w="3810" cap="flat" cmpd="sng" algn="ctr">
+                      <a:solidFill>
+                        <a:srgbClr val="CBD5E1"/>
+                      </a:solidFill>
+                      <a:prstDash val="solid"/>
+                      <a:round/>
+                      <a:headEnd type="none" w="med" len="med"/>
+                      <a:tailEnd type="none" w="med" len="med"/>
+                    </a:lnT>
+                    <a:lnB w="3810" cap="flat" cmpd="sng" algn="ctr">
+                      <a:solidFill>
+                        <a:srgbClr val="CBD5E1"/>
+                      </a:solidFill>
+                      <a:prstDash val="solid"/>
+                      <a:round/>
+                      <a:headEnd type="none" w="med" len="med"/>
+                      <a:tailEnd type="none" w="med" len="med"/>
+                    </a:lnB>
+                    <a:solidFill>
+                      <a:srgbClr val="F8FAFC"/>
+                    </a:solidFill>
+                  </a:tcPr>
+                </a:tc>
+                <a:tc>
+                  <a:txBody>
+                    <a:bodyPr/>
+                    <a:lstStyle/>
+                    <a:p>
+                      <a:pPr indent="0" marL="0">
+                        <a:buNone/>
+                      </a:pPr>
+                      <a:r>
+                        <a:rPr lang="en-US" sz="1300" dirty="0">
+                          <a:solidFill>
+                            <a:srgbClr val="0F172A"/>
+                          </a:solidFill>
+                          <a:latin typeface="Pretendard" pitchFamily="34" charset="0"/>
+                          <a:ea typeface="Pretendard" pitchFamily="34" charset="-122"/>
+                          <a:cs typeface="Pretendard" pitchFamily="34" charset="-120"/>
+                        </a:rPr>
+                        <a:t>약 </a:t>
+                      </a:r>
+                      <a:pPr indent="0" marL="0">
+                        <a:buNone/>
+                      </a:pPr>
+                      <a:r>
+                        <a:rPr lang="en-US" sz="1300" dirty="0">
+                          <a:solidFill>
+                            <a:srgbClr val="0F172A"/>
+                          </a:solidFill>
+                          <a:latin typeface="Pretendard" pitchFamily="34" charset="0"/>
+                          <a:ea typeface="Pretendard" pitchFamily="34" charset="-122"/>
+                          <a:cs typeface="Pretendard" pitchFamily="34" charset="-120"/>
+                        </a:rPr>
+                        <a:t>2200만 </a:t>
+                      </a:r>
+                      <a:pPr indent="0" marL="0">
+                        <a:buNone/>
+                      </a:pPr>
+                      <a:r>
+                        <a:rPr lang="en-US" sz="1300" dirty="0">
+                          <a:solidFill>
+                            <a:srgbClr val="0F172A"/>
+                          </a:solidFill>
+                          <a:latin typeface="Pretendard" pitchFamily="34" charset="0"/>
+                          <a:ea typeface="Pretendard" pitchFamily="34" charset="-122"/>
+                          <a:cs typeface="Pretendard" pitchFamily="34" charset="-120"/>
+                        </a:rPr>
+                        <a:t>원/월 </a:t>
+                      </a:r>
+                      <a:pPr indent="0" marL="0">
+                        <a:buNone/>
+                      </a:pPr>
+                      <a:r>
+                        <a:rPr lang="en-US" sz="1300" dirty="0">
+                          <a:solidFill>
+                            <a:srgbClr val="0F172A"/>
+                          </a:solidFill>
+                          <a:latin typeface="Pretendard" pitchFamily="34" charset="0"/>
+                          <a:ea typeface="Pretendard" pitchFamily="34" charset="-122"/>
+                          <a:cs typeface="Pretendard" pitchFamily="34" charset="-120"/>
+                        </a:rPr>
+                        <a:t>(추정)</a:t>
+                      </a:r>
+                      <a:endParaRPr lang="en-US" sz="1300" dirty="0">
+                        <a:latin typeface="Pretendard" charset="0"/>
+                        <a:ea typeface="Pretendard" charset="0"/>
+                        <a:cs typeface="Pretendard" charset="0"/>
+                      </a:endParaRPr>
+                    </a:p>
+                  </a:txBody>
+                  <a:tcPr marL="50800" marR="50800" marT="25400" marB="25400" anchor="ctr">
+                    <a:lnL w="3810" cap="flat" cmpd="sng" algn="ctr">
+                      <a:solidFill>
+                        <a:srgbClr val="CBD5E1"/>
+                      </a:solidFill>
+                      <a:prstDash val="solid"/>
+                      <a:round/>
+                      <a:headEnd type="none" w="med" len="med"/>
+                      <a:tailEnd type="none" w="med" len="med"/>
+                    </a:lnL>
+                    <a:lnR w="3810" cap="flat" cmpd="sng" algn="ctr">
+                      <a:solidFill>
+                        <a:srgbClr val="CBD5E1"/>
+                      </a:solidFill>
+                      <a:prstDash val="solid"/>
+                      <a:round/>
+                      <a:headEnd type="none" w="med" len="med"/>
+                      <a:tailEnd type="none" w="med" len="med"/>
+                    </a:lnR>
+                    <a:lnT w="3810" cap="flat" cmpd="sng" algn="ctr">
+                      <a:solidFill>
+                        <a:srgbClr val="CBD5E1"/>
+                      </a:solidFill>
+                      <a:prstDash val="solid"/>
+                      <a:round/>
+                      <a:headEnd type="none" w="med" len="med"/>
+                      <a:tailEnd type="none" w="med" len="med"/>
+                    </a:lnT>
+                    <a:lnB w="3810" cap="flat" cmpd="sng" algn="ctr">
+                      <a:solidFill>
+                        <a:srgbClr val="CBD5E1"/>
+                      </a:solidFill>
+                      <a:prstDash val="solid"/>
+                      <a:round/>
+                      <a:headEnd type="none" w="med" len="med"/>
+                      <a:tailEnd type="none" w="med" len="med"/>
+                    </a:lnB>
+                    <a:solidFill>
+                      <a:srgbClr val="F8FAFC"/>
+                    </a:solidFill>
+                  </a:tcPr>
+                </a:tc>
+              </a:tr>
+              <a:tr h="457200">
+                <a:tc>
+                  <a:txBody>
+                    <a:bodyPr/>
+                    <a:lstStyle/>
+                    <a:p>
+                      <a:pPr indent="0" marL="0">
+                        <a:buNone/>
+                      </a:pPr>
+                      <a:r>
+                        <a:rPr lang="en-US" sz="1300" b="1" dirty="0">
+                          <a:solidFill>
+                            <a:srgbClr val="0F172A"/>
+                          </a:solidFill>
+                          <a:latin typeface="Pretendard" pitchFamily="34" charset="0"/>
+                          <a:ea typeface="Pretendard" pitchFamily="34" charset="-122"/>
+                          <a:cs typeface="Pretendard" pitchFamily="34" charset="-120"/>
+                        </a:rPr>
+                        <a:t>연 </a:t>
+                      </a:r>
+                      <a:pPr indent="0" marL="0">
+                        <a:buNone/>
+                      </a:pPr>
+                      <a:r>
+                        <a:rPr lang="en-US" sz="1300" b="1" dirty="0">
+                          <a:solidFill>
+                            <a:srgbClr val="0F172A"/>
+                          </a:solidFill>
+                          <a:latin typeface="Pretendard" pitchFamily="34" charset="0"/>
+                          <a:ea typeface="Pretendard" pitchFamily="34" charset="-122"/>
+                          <a:cs typeface="Pretendard" pitchFamily="34" charset="-120"/>
+                        </a:rPr>
+                        <a:t>임대 </a:t>
+                      </a:r>
+                      <a:pPr indent="0" marL="0">
+                        <a:buNone/>
+                      </a:pPr>
+                      <a:r>
+                        <a:rPr lang="en-US" sz="1300" b="1" dirty="0">
+                          <a:solidFill>
+                            <a:srgbClr val="0F172A"/>
+                          </a:solidFill>
+                          <a:latin typeface="Pretendard" pitchFamily="34" charset="0"/>
+                          <a:ea typeface="Pretendard" pitchFamily="34" charset="-122"/>
+                          <a:cs typeface="Pretendard" pitchFamily="34" charset="-120"/>
+                        </a:rPr>
+                        <a:t>수입</a:t>
+                      </a:r>
+                      <a:endParaRPr lang="en-US" sz="1300" dirty="0">
+                        <a:latin typeface="Pretendard" charset="0"/>
+                        <a:ea typeface="Pretendard" charset="0"/>
+                        <a:cs typeface="Pretendard" charset="0"/>
+                      </a:endParaRPr>
+                    </a:p>
+                  </a:txBody>
+                  <a:tcPr marL="50800" marR="50800" marT="25400" marB="25400" anchor="ctr">
+                    <a:lnL w="3810" cap="flat" cmpd="sng" algn="ctr">
+                      <a:solidFill>
+                        <a:srgbClr val="CBD5E1"/>
+                      </a:solidFill>
+                      <a:prstDash val="solid"/>
+                      <a:round/>
+                      <a:headEnd type="none" w="med" len="med"/>
+                      <a:tailEnd type="none" w="med" len="med"/>
+                    </a:lnL>
+                    <a:lnR w="3810" cap="flat" cmpd="sng" algn="ctr">
+                      <a:solidFill>
+                        <a:srgbClr val="CBD5E1"/>
+                      </a:solidFill>
+                      <a:prstDash val="solid"/>
+                      <a:round/>
+                      <a:headEnd type="none" w="med" len="med"/>
+                      <a:tailEnd type="none" w="med" len="med"/>
+                    </a:lnR>
+                    <a:lnT w="3810" cap="flat" cmpd="sng" algn="ctr">
+                      <a:solidFill>
+                        <a:srgbClr val="CBD5E1"/>
+                      </a:solidFill>
+                      <a:prstDash val="solid"/>
+                      <a:round/>
+                      <a:headEnd type="none" w="med" len="med"/>
+                      <a:tailEnd type="none" w="med" len="med"/>
+                    </a:lnT>
+                    <a:lnB w="3810" cap="flat" cmpd="sng" algn="ctr">
+                      <a:solidFill>
+                        <a:srgbClr val="CBD5E1"/>
+                      </a:solidFill>
+                      <a:prstDash val="solid"/>
+                      <a:round/>
+                      <a:headEnd type="none" w="med" len="med"/>
+                      <a:tailEnd type="none" w="med" len="med"/>
+                    </a:lnB>
+                    <a:solidFill>
+                      <a:srgbClr val="FFFFFF"/>
+                    </a:solidFill>
+                  </a:tcPr>
+                </a:tc>
+                <a:tc>
+                  <a:txBody>
+                    <a:bodyPr/>
+                    <a:lstStyle/>
+                    <a:p>
+                      <a:pPr indent="0" marL="0">
+                        <a:buNone/>
+                      </a:pPr>
+                      <a:r>
+                        <a:rPr lang="en-US" sz="1300" dirty="0">
+                          <a:solidFill>
+                            <a:srgbClr val="0F172A"/>
+                          </a:solidFill>
+                          <a:latin typeface="Pretendard" pitchFamily="34" charset="0"/>
+                          <a:ea typeface="Pretendard" pitchFamily="34" charset="-122"/>
+                          <a:cs typeface="Pretendard" pitchFamily="34" charset="-120"/>
+                        </a:rPr>
+                        <a:t>약 </a:t>
+                      </a:r>
+                      <a:pPr indent="0" marL="0">
+                        <a:buNone/>
+                      </a:pPr>
+                      <a:r>
+                        <a:rPr lang="en-US" sz="1300" dirty="0">
+                          <a:solidFill>
+                            <a:srgbClr val="0F172A"/>
+                          </a:solidFill>
+                          <a:latin typeface="Pretendard" pitchFamily="34" charset="0"/>
+                          <a:ea typeface="Pretendard" pitchFamily="34" charset="-122"/>
+                          <a:cs typeface="Pretendard" pitchFamily="34" charset="-120"/>
+                        </a:rPr>
+                        <a:t>2.6억 </a:t>
+                      </a:r>
+                      <a:pPr indent="0" marL="0">
+                        <a:buNone/>
+                      </a:pPr>
+                      <a:r>
+                        <a:rPr lang="en-US" sz="1300" dirty="0">
+                          <a:solidFill>
+                            <a:srgbClr val="0F172A"/>
+                          </a:solidFill>
+                          <a:latin typeface="Pretendard" pitchFamily="34" charset="0"/>
+                          <a:ea typeface="Pretendard" pitchFamily="34" charset="-122"/>
+                          <a:cs typeface="Pretendard" pitchFamily="34" charset="-120"/>
+                        </a:rPr>
+                        <a:t>원/년 </a:t>
+                      </a:r>
+                      <a:pPr indent="0" marL="0">
+                        <a:buNone/>
+                      </a:pPr>
+                      <a:r>
+                        <a:rPr lang="en-US" sz="1300" dirty="0">
+                          <a:solidFill>
+                            <a:srgbClr val="0F172A"/>
+                          </a:solidFill>
+                          <a:latin typeface="Pretendard" pitchFamily="34" charset="0"/>
+                          <a:ea typeface="Pretendard" pitchFamily="34" charset="-122"/>
+                          <a:cs typeface="Pretendard" pitchFamily="34" charset="-120"/>
+                        </a:rPr>
+                        <a:t>(추정)</a:t>
+                      </a:r>
+                      <a:endParaRPr lang="en-US" sz="1300" dirty="0">
+                        <a:latin typeface="Pretendard" charset="0"/>
+                        <a:ea typeface="Pretendard" charset="0"/>
+                        <a:cs typeface="Pretendard" charset="0"/>
+                      </a:endParaRPr>
+                    </a:p>
+                  </a:txBody>
+                  <a:tcPr marL="50800" marR="50800" marT="25400" marB="25400" anchor="ctr">
+                    <a:lnL w="3810" cap="flat" cmpd="sng" algn="ctr">
+                      <a:solidFill>
+                        <a:srgbClr val="CBD5E1"/>
+                      </a:solidFill>
+                      <a:prstDash val="solid"/>
+                      <a:round/>
+                      <a:headEnd type="none" w="med" len="med"/>
+                      <a:tailEnd type="none" w="med" len="med"/>
+                    </a:lnL>
+                    <a:lnR w="3810" cap="flat" cmpd="sng" algn="ctr">
+                      <a:solidFill>
+                        <a:srgbClr val="CBD5E1"/>
+                      </a:solidFill>
+                      <a:prstDash val="solid"/>
+                      <a:round/>
+                      <a:headEnd type="none" w="med" len="med"/>
+                      <a:tailEnd type="none" w="med" len="med"/>
+                    </a:lnR>
+                    <a:lnT w="3810" cap="flat" cmpd="sng" algn="ctr">
+                      <a:solidFill>
+                        <a:srgbClr val="CBD5E1"/>
+                      </a:solidFill>
+                      <a:prstDash val="solid"/>
+                      <a:round/>
+                      <a:headEnd type="none" w="med" len="med"/>
+                      <a:tailEnd type="none" w="med" len="med"/>
+                    </a:lnT>
+                    <a:lnB w="3810" cap="flat" cmpd="sng" algn="ctr">
+                      <a:solidFill>
+                        <a:srgbClr val="CBD5E1"/>
+                      </a:solidFill>
+                      <a:prstDash val="solid"/>
+                      <a:round/>
+                      <a:headEnd type="none" w="med" len="med"/>
+                      <a:tailEnd type="none" w="med" len="med"/>
+                    </a:lnB>
+                    <a:solidFill>
+                      <a:srgbClr val="FFFFFF"/>
+                    </a:solidFill>
+                  </a:tcPr>
+                </a:tc>
+              </a:tr>
+              <a:tr h="457200">
+                <a:tc>
+                  <a:txBody>
+                    <a:bodyPr/>
+                    <a:lstStyle/>
+                    <a:p>
+                      <a:pPr indent="0" marL="0">
+                        <a:buNone/>
+                      </a:pPr>
+                      <a:r>
+                        <a:rPr lang="en-US" sz="1300" b="1" dirty="0">
+                          <a:solidFill>
+                            <a:srgbClr val="0F172A"/>
+                          </a:solidFill>
+                          <a:latin typeface="Pretendard" pitchFamily="34" charset="0"/>
+                          <a:ea typeface="Pretendard" pitchFamily="34" charset="-122"/>
+                          <a:cs typeface="Pretendard" pitchFamily="34" charset="-120"/>
+                        </a:rPr>
+                        <a:t>임차인 </a:t>
+                      </a:r>
+                      <a:pPr indent="0" marL="0">
+                        <a:buNone/>
+                      </a:pPr>
+                      <a:r>
+                        <a:rPr lang="en-US" sz="1300" b="1" dirty="0">
+                          <a:solidFill>
+                            <a:srgbClr val="0F172A"/>
+                          </a:solidFill>
+                          <a:latin typeface="Pretendard" pitchFamily="34" charset="0"/>
+                          <a:ea typeface="Pretendard" pitchFamily="34" charset="-122"/>
+                          <a:cs typeface="Pretendard" pitchFamily="34" charset="-120"/>
+                        </a:rPr>
+                        <a:t>정보</a:t>
+                      </a:r>
+                      <a:endParaRPr lang="en-US" sz="1300" dirty="0">
+                        <a:latin typeface="Pretendard" charset="0"/>
+                        <a:ea typeface="Pretendard" charset="0"/>
+                        <a:cs typeface="Pretendard" charset="0"/>
+                      </a:endParaRPr>
+                    </a:p>
+                  </a:txBody>
+                  <a:tcPr marL="50800" marR="50800" marT="25400" marB="25400" anchor="ctr">
+                    <a:lnL w="3810" cap="flat" cmpd="sng" algn="ctr">
+                      <a:solidFill>
+                        <a:srgbClr val="CBD5E1"/>
+                      </a:solidFill>
+                      <a:prstDash val="solid"/>
+                      <a:round/>
+                      <a:headEnd type="none" w="med" len="med"/>
+                      <a:tailEnd type="none" w="med" len="med"/>
+                    </a:lnL>
+                    <a:lnR w="3810" cap="flat" cmpd="sng" algn="ctr">
+                      <a:solidFill>
+                        <a:srgbClr val="CBD5E1"/>
+                      </a:solidFill>
+                      <a:prstDash val="solid"/>
+                      <a:round/>
+                      <a:headEnd type="none" w="med" len="med"/>
+                      <a:tailEnd type="none" w="med" len="med"/>
+                    </a:lnR>
+                    <a:lnT w="3810" cap="flat" cmpd="sng" algn="ctr">
+                      <a:solidFill>
+                        <a:srgbClr val="CBD5E1"/>
+                      </a:solidFill>
+                      <a:prstDash val="solid"/>
+                      <a:round/>
+                      <a:headEnd type="none" w="med" len="med"/>
+                      <a:tailEnd type="none" w="med" len="med"/>
+                    </a:lnT>
+                    <a:lnB w="3810" cap="flat" cmpd="sng" algn="ctr">
+                      <a:solidFill>
+                        <a:srgbClr val="CBD5E1"/>
+                      </a:solidFill>
+                      <a:prstDash val="solid"/>
+                      <a:round/>
+                      <a:headEnd type="none" w="med" len="med"/>
+                      <a:tailEnd type="none" w="med" len="med"/>
+                    </a:lnB>
+                    <a:solidFill>
+                      <a:srgbClr val="F8FAFC"/>
+                    </a:solidFill>
+                  </a:tcPr>
+                </a:tc>
+                <a:tc>
+                  <a:txBody>
+                    <a:bodyPr/>
+                    <a:lstStyle/>
+                    <a:p>
+                      <a:pPr indent="0" marL="0">
+                        <a:buNone/>
+                      </a:pPr>
+                      <a:r>
+                        <a:rPr lang="en-US" sz="1300" dirty="0">
+                          <a:solidFill>
+                            <a:srgbClr val="0F172A"/>
+                          </a:solidFill>
+                          <a:latin typeface="Pretendard" pitchFamily="34" charset="0"/>
+                          <a:ea typeface="Pretendard" pitchFamily="34" charset="-122"/>
+                          <a:cs typeface="Pretendard" pitchFamily="34" charset="-120"/>
+                        </a:rPr>
+                        <a:t>NDA </a:t>
+                      </a:r>
+                      <a:pPr indent="0" marL="0">
+                        <a:buNone/>
+                      </a:pPr>
+                      <a:r>
+                        <a:rPr lang="en-US" sz="1300" dirty="0">
+                          <a:solidFill>
+                            <a:srgbClr val="0F172A"/>
+                          </a:solidFill>
+                          <a:latin typeface="Pretendard" pitchFamily="34" charset="0"/>
+                          <a:ea typeface="Pretendard" pitchFamily="34" charset="-122"/>
+                          <a:cs typeface="Pretendard" pitchFamily="34" charset="-120"/>
+                        </a:rPr>
+                        <a:t>체결 </a:t>
+                      </a:r>
+                      <a:pPr indent="0" marL="0">
+                        <a:buNone/>
+                      </a:pPr>
+                      <a:r>
+                        <a:rPr lang="en-US" sz="1300" dirty="0">
+                          <a:solidFill>
+                            <a:srgbClr val="0F172A"/>
+                          </a:solidFill>
+                          <a:latin typeface="Pretendard" pitchFamily="34" charset="0"/>
+                          <a:ea typeface="Pretendard" pitchFamily="34" charset="-122"/>
+                          <a:cs typeface="Pretendard" pitchFamily="34" charset="-120"/>
+                        </a:rPr>
+                        <a:t>후 </a:t>
+                      </a:r>
+                      <a:pPr indent="0" marL="0">
+                        <a:buNone/>
+                      </a:pPr>
+                      <a:r>
+                        <a:rPr lang="en-US" sz="1300" dirty="0">
+                          <a:solidFill>
+                            <a:srgbClr val="0F172A"/>
+                          </a:solidFill>
+                          <a:latin typeface="Pretendard" pitchFamily="34" charset="0"/>
+                          <a:ea typeface="Pretendard" pitchFamily="34" charset="-122"/>
+                          <a:cs typeface="Pretendard" pitchFamily="34" charset="-120"/>
+                        </a:rPr>
+                        <a:t>공개</a:t>
+                      </a:r>
+                      <a:endParaRPr lang="en-US" sz="1300" dirty="0">
+                        <a:latin typeface="Pretendard" charset="0"/>
+                        <a:ea typeface="Pretendard" charset="0"/>
+                        <a:cs typeface="Pretendard" charset="0"/>
+                      </a:endParaRPr>
+                    </a:p>
+                  </a:txBody>
+                  <a:tcPr marL="50800" marR="50800" marT="25400" marB="25400" anchor="ctr">
+                    <a:lnL w="3810" cap="flat" cmpd="sng" algn="ctr">
+                      <a:solidFill>
+                        <a:srgbClr val="CBD5E1"/>
+                      </a:solidFill>
+                      <a:prstDash val="solid"/>
+                      <a:round/>
+                      <a:headEnd type="none" w="med" len="med"/>
+                      <a:tailEnd type="none" w="med" len="med"/>
+                    </a:lnL>
+                    <a:lnR w="3810" cap="flat" cmpd="sng" algn="ctr">
+                      <a:solidFill>
+                        <a:srgbClr val="CBD5E1"/>
+                      </a:solidFill>
+                      <a:prstDash val="solid"/>
+                      <a:round/>
+                      <a:headEnd type="none" w="med" len="med"/>
+                      <a:tailEnd type="none" w="med" len="med"/>
+                    </a:lnR>
+                    <a:lnT w="3810" cap="flat" cmpd="sng" algn="ctr">
+                      <a:solidFill>
+                        <a:srgbClr val="CBD5E1"/>
+                      </a:solidFill>
+                      <a:prstDash val="solid"/>
+                      <a:round/>
+                      <a:headEnd type="none" w="med" len="med"/>
+                      <a:tailEnd type="none" w="med" len="med"/>
+                    </a:lnT>
+                    <a:lnB w="3810" cap="flat" cmpd="sng" algn="ctr">
+                      <a:solidFill>
+                        <a:srgbClr val="CBD5E1"/>
+                      </a:solidFill>
+                      <a:prstDash val="solid"/>
+                      <a:round/>
+                      <a:headEnd type="none" w="med" len="med"/>
+                      <a:tailEnd type="none" w="med" len="med"/>
+                    </a:lnB>
+                    <a:solidFill>
+                      <a:srgbClr val="F8FAFC"/>
+                    </a:solidFill>
+                  </a:tcPr>
+                </a:tc>
+              </a:tr>
+            </a:tbl>
+          </a:graphicData>
+        </a:graphic>
+      </p:graphicFrame>
+      <p:sp>
+        <p:nvSpPr>
+          <p:cNvPr id="6" name="Text 3"/>
+          <p:cNvSpPr/>
+          <p:nvPr/>
+        </p:nvSpPr>
+        <p:spPr>
+          <a:xfrm>
+            <a:off x="566928" y="3895344"/>
+            <a:ext cx="11057839" cy="384048"/>
+          </a:xfrm>
+          <a:prstGeom prst="rect">
+            <a:avLst/>
+          </a:prstGeom>
+          <a:noFill/>
+          <a:ln/>
+        </p:spPr>
+        <p:txBody>
+          <a:bodyPr wrap="square" lIns="0" tIns="0" rIns="0" bIns="0" rtlCol="0" anchor="ctr"/>
+          <a:lstStyle/>
+          <a:p>
+            <a:pPr indent="0" marL="0">
+              <a:lnSpc>
+                <a:spcPct val="125000"/>
+              </a:lnSpc>
+              <a:buNone/>
+            </a:pPr>
+            <a:r>
+              <a:rPr lang="en-US" sz="780" dirty="0">
+                <a:solidFill>
+                  <a:srgbClr val="94A3B8"/>
+                </a:solidFill>
+                <a:latin typeface="Pretendard" pitchFamily="34" charset="0"/>
+                <a:ea typeface="Pretendard" pitchFamily="34" charset="-122"/>
+                <a:cs typeface="Pretendard" pitchFamily="34" charset="-120"/>
+              </a:rPr>
+              <a:t>임차인명 및 상세 정보는 개인정보 보호를 위해 비공개 처리되었습니다.</a:t>
+            </a:r>
+            <a:endParaRPr lang="en-US" sz="780" dirty="0"/>
+          </a:p>
+        </p:txBody>
+      </p:sp>
+      <p:sp>
+        <p:nvSpPr>
+          <p:cNvPr id="7" name="Shape 4"/>
+          <p:cNvSpPr/>
+          <p:nvPr/>
+        </p:nvSpPr>
+        <p:spPr>
+          <a:xfrm>
+            <a:off x="566928" y="4169664"/>
+            <a:ext cx="5437480" cy="1097280"/>
+          </a:xfrm>
+          <a:prstGeom prst="roundRect">
+            <a:avLst>
+              <a:gd name="adj" fmla="val 5000"/>
+            </a:avLst>
+          </a:prstGeom>
+          <a:solidFill>
+            <a:srgbClr val="DBEAFE"/>
+          </a:solidFill>
+          <a:ln/>
+        </p:spPr>
+      </p:sp>
+      <p:sp>
+        <p:nvSpPr>
+          <p:cNvPr id="8" name="Shape 5"/>
+          <p:cNvSpPr/>
+          <p:nvPr/>
+        </p:nvSpPr>
+        <p:spPr>
+          <a:xfrm>
+            <a:off x="566928" y="4224528"/>
+            <a:ext cx="36576" cy="987552"/>
+          </a:xfrm>
+          <a:prstGeom prst="rect">
+            <a:avLst/>
+          </a:prstGeom>
+          <a:solidFill>
+            <a:srgbClr val="1D4ED8"/>
+          </a:solidFill>
+          <a:ln/>
+        </p:spPr>
+      </p:sp>
+      <p:sp>
+        <p:nvSpPr>
+          <p:cNvPr id="9" name="Text 6"/>
+          <p:cNvSpPr/>
+          <p:nvPr/>
+        </p:nvSpPr>
+        <p:spPr>
+          <a:xfrm>
+            <a:off x="749808" y="4279392"/>
+            <a:ext cx="5108296" cy="201168"/>
+          </a:xfrm>
+          <a:prstGeom prst="rect">
+            <a:avLst/>
+          </a:prstGeom>
+          <a:noFill/>
+          <a:ln/>
+        </p:spPr>
+        <p:txBody>
+          <a:bodyPr wrap="square" lIns="0" tIns="0" rIns="0" bIns="0" rtlCol="0" anchor="ctr"/>
+          <a:lstStyle/>
+          <a:p>
+            <a:pPr indent="0" marL="0">
+              <a:buNone/>
+            </a:pPr>
+            <a:endParaRPr lang="en-US" sz="1050" dirty="0"/>
+          </a:p>
+        </p:txBody>
+      </p:sp>
+      <p:sp>
+        <p:nvSpPr>
+          <p:cNvPr id="10" name="Text 7"/>
+          <p:cNvSpPr/>
+          <p:nvPr/>
+        </p:nvSpPr>
+        <p:spPr>
+          <a:xfrm>
+            <a:off x="749808" y="4498848"/>
+            <a:ext cx="5108296" cy="694944"/>
+          </a:xfrm>
+          <a:prstGeom prst="rect">
+            <a:avLst/>
+          </a:prstGeom>
+          <a:noFill/>
+          <a:ln/>
+        </p:spPr>
+        <p:txBody>
+          <a:bodyPr wrap="square" lIns="0" tIns="0" rIns="0" bIns="0" rtlCol="0" anchor="t"/>
           <a:lstStyle/>
           <a:p>
             <a:pPr indent="0" marL="0">
@@ -5760,95 +7578,53 @@
               <a:buNone/>
             </a:pPr>
             <a:r>
-              <a:rPr lang="en-US" sz="1400" dirty="0">
-                <a:solidFill>
-                  <a:srgbClr val="64748B"/>
+              <a:rPr lang="en-US" sz="930" dirty="0">
+                <a:solidFill>
+                  <a:srgbClr val="0F172A"/>
                 </a:solidFill>
                 <a:latin typeface="Pretendard" pitchFamily="34" charset="0"/>
                 <a:ea typeface="Pretendard" pitchFamily="34" charset="-122"/>
                 <a:cs typeface="Pretendard" pitchFamily="34" charset="-120"/>
               </a:rPr>
-              <a:t>{"ok"</a:t>
-            </a:r>
-            <a:endParaRPr lang="en-US" sz="1400" dirty="0"/>
-          </a:p>
-        </p:txBody>
-      </p:sp>
-      <p:sp>
-        <p:nvSpPr>
-          <p:cNvPr id="6" name="Text 4"/>
-          <p:cNvSpPr/>
-          <p:nvPr/>
-        </p:nvSpPr>
-        <p:spPr>
-          <a:xfrm>
-            <a:off x="4768907" y="1645920"/>
-            <a:ext cx="6855860" cy="402336"/>
-          </a:xfrm>
-          <a:prstGeom prst="rect">
-            <a:avLst/>
-          </a:prstGeom>
-          <a:noFill/>
-          <a:ln/>
-        </p:spPr>
-        <p:txBody>
-          <a:bodyPr wrap="square" lIns="0" tIns="0" rIns="0" bIns="0" rtlCol="0" anchor="ctr"/>
-          <a:lstStyle/>
-          <a:p>
-            <a:pPr indent="0" marL="0">
-              <a:lnSpc>
-                <a:spcPct val="120000"/>
-              </a:lnSpc>
-              <a:buNone/>
-            </a:pPr>
-            <a:r>
-              <a:rPr lang="en-US" sz="1400" b="1" dirty="0">
-                <a:solidFill>
-                  <a:srgbClr val="0F172A"/>
+              <a:t>임차인명 및 상세 정보는 개인정보 보호를 위해 비공개 처리되었습니다.</a:t>
+            </a:r>
+            <a:endParaRPr lang="en-US" sz="930" dirty="0"/>
+          </a:p>
+        </p:txBody>
+      </p:sp>
+      <p:sp>
+        <p:nvSpPr>
+          <p:cNvPr id="11" name="Text 8"/>
+          <p:cNvSpPr/>
+          <p:nvPr/>
+        </p:nvSpPr>
+        <p:spPr>
+          <a:xfrm>
+            <a:off x="566928" y="6419088"/>
+            <a:ext cx="11057839" cy="201168"/>
+          </a:xfrm>
+          <a:prstGeom prst="rect">
+            <a:avLst/>
+          </a:prstGeom>
+          <a:noFill/>
+          <a:ln/>
+        </p:spPr>
+        <p:txBody>
+          <a:bodyPr wrap="square" lIns="0" tIns="0" rIns="0" bIns="0" rtlCol="0" anchor="ctr"/>
+          <a:lstStyle/>
+          <a:p>
+            <a:pPr algn="ctr" indent="0" marL="0">
+              <a:buNone/>
+            </a:pPr>
+            <a:r>
+              <a:rPr lang="en-US" sz="750" dirty="0">
+                <a:solidFill>
+                  <a:srgbClr val="64748B"/>
                 </a:solidFill>
                 <a:latin typeface="Pretendard" pitchFamily="34" charset="0"/>
                 <a:ea typeface="Pretendard" pitchFamily="34" charset="-122"/>
                 <a:cs typeface="Pretendard" pitchFamily="34" charset="-120"/>
               </a:rPr>
-              <a:t>true,"mocked":true,"extractedFields":{"area_signal":"역삼","asset_type":"오피스빌딩","price_band":"300억","size_signal":"3000평(약 9917.4㎡)"},"extractedFacts":{"region":"역삼","exactAddressCandidate":"역삼동 742-1","assetType":"오피스빌딩","priceText":"300억","sizeText":"3000평(약 9917.4㎡)","currentUse":"오피스","currentUseSignal":"근린생활시설","leaseSignal":"임대중","vacancySignal":"공실없음","tenantNames":"쿠팡","네이버","unitRentTexts":"301호: 1500만","sellerMotivationText":"자산 효율화","brokerNotes":"초역세권 매물"},"detectedSensitiveFields":"exact_address","tenant_name","ambiguousFields":,"warnings":,"areaSignal":"역삼","assetType":"오피스빌딩","priceBand":"300억","sizeSignal":"3000평(약 9917.4㎡)","dealType":"매각","buildingName":"역삼 센트럴타워","exactAddress":"역삼동 742-1","totalFloorArea":9917.3,"buildYear":2015,"currentUseSignal":"근린생활시설","vacancySignal":"공실 없음","fitSummary":"초역세권 근생 빌딩으로 시행/사옥 매입에 최적화","cautionSummary":"주요 임차 업종 만기 조율 필요","hiddenFields":"exact_address","seller_motivation","confidence":{"areaSignal":"confirmed","assetType":"confirmed","priceBand":"ai_hypothesis","fitSummary":"ai_hypothesis"},"missingData":"sizeSignal","boundaryNote":"본 자료는 실거래 통계 기반 참고치입니다.","buyerType":"법인 사옥형","budgetRange":{"min":50,"max":80,"display":"50억~80억"},"preferredRegions":"강남","성수","assetTypes":"꼬마빌딩","사옥용","purchasePurpose":"사옥용 매입","mustHave":"초역세권","주차","niceToHave":"테라스","루프탑","riskTolerance":"medium","financingNote":"자본금 50% 준비","missingQuestions":"구체적인 입주 시기가 언제인가요?","선호하는 수익률이 있나요?","privacyNotes":"연락처 비공개","fitReasons":"매수자 예산(50-80억)에 부합하는 매물입니다.","요청하신 성수/강남 권역에 해당합니다.","cautionReasons":"요청한 용도와 달리 명도 협의가 다소 필요합니다.","recommendedNextAction":"현장 답사 제안","kakaoMessage":"안녕하세요! 요청하신 조건에 부합하는 추천 매물이 있어 안내해 드립니다. 확인해보시고 피드백 부탁드립니다.","title":"강남 역삼역 초역세권 오피스 사옥용 빌딩 매각","shortSummary":"역삼역 도보 5분 거리의 준신축급 대형 오피스빌딩입니다.","dealPoints":"초역세권","사옥 최적","cautionPoints":"명도 조율 필요","hiddenInfoNotice":"보증금 및 지번은 인가 후 확인 가능","gateMessage":"G1 등급 등록이 필요합니다.","kakaoText":"강남 역삼역 오피스 빌딩 매각 안내입니다.","exactUnitCandidate":"101호","floor":"1층","areaSqmText":"150㎡","spaceType":"office","depositText":"5000만","monthlyRentText":"400만","maintenanceFeeText":"50만","availableFromText":"즉시입주","leaseTermMonthsText":"24","incentivesText":"렌트프리 2개월","restrictions":,"landlordIdentity":"김성수","currentTenant":"스타트업","vacancyReason":"이전 확장","rentNegotiation":"협의 가능","region":"성수동","areaSqm":150,"deposit":5000,"monthlyRent":400,"maintenanceFee":50,"availableFrom":"즉시입주","leaseTermMonths":24,"incentives":{"rentFreeMonths":2,"interiorSupport":"일부 인테리어 지원","freeRentDetail":"렌트프리 2개월 지원"},"shortSummaryLease":"성수역 도보 5분 거리 1층 리테일 상가 매물입니다."}</a:t>
-            </a:r>
-            <a:endParaRPr lang="en-US" sz="1400" dirty="0"/>
-          </a:p>
-        </p:txBody>
-      </p:sp>
-      <p:sp>
-        <p:nvSpPr>
-          <p:cNvPr id="7" name="Text 5"/>
-          <p:cNvSpPr/>
-          <p:nvPr/>
-        </p:nvSpPr>
-        <p:spPr>
-          <a:xfrm>
-            <a:off x="566928" y="6419088"/>
-            <a:ext cx="11057839" cy="201168"/>
-          </a:xfrm>
-          <a:prstGeom prst="rect">
-            <a:avLst/>
-          </a:prstGeom>
-          <a:noFill/>
-          <a:ln/>
-        </p:spPr>
-        <p:txBody>
-          <a:bodyPr wrap="square" lIns="0" tIns="0" rIns="0" bIns="0" rtlCol="0" anchor="ctr"/>
-          <a:lstStyle/>
-          <a:p>
-            <a:pPr algn="ctr" indent="0" marL="0">
-              <a:buNone/>
-            </a:pPr>
-            <a:r>
-              <a:rPr lang="en-US" sz="750" dirty="0">
-                <a:solidFill>
-                  <a:srgbClr val="64748B"/>
-                </a:solidFill>
-                <a:latin typeface="Pretendard" pitchFamily="34" charset="0"/>
-                <a:ea typeface="Pretendard" pitchFamily="34" charset="-122"/>
-                <a:cs typeface="Pretendard" pitchFamily="34" charset="-120"/>
-              </a:rPr>
               <a:t>크리딜  ·    ·  5</a:t>
             </a:r>
             <a:endParaRPr lang="en-US" sz="750" dirty="0"/>
@@ -5857,7 +7633,7 @@
       </p:sp>
       <p:sp>
         <p:nvSpPr>
-          <p:cNvPr id="8" name="Shape 6"/>
+          <p:cNvPr id="12" name="Shape 9"/>
           <p:cNvSpPr/>
           <p:nvPr/>
         </p:nvSpPr>
@@ -6016,137 +7792,17 @@
         </p:nvSpPr>
         <p:spPr>
           <a:xfrm>
-            <a:off x="566928" y="1325880"/>
-            <a:ext cx="6858000" cy="237744"/>
-          </a:xfrm>
-          <a:prstGeom prst="rect">
-            <a:avLst/>
-          </a:prstGeom>
-          <a:noFill/>
-          <a:ln/>
-        </p:spPr>
-        <p:txBody>
-          <a:bodyPr wrap="square" lIns="0" tIns="0" rIns="0" bIns="0" rtlCol="0" anchor="ctr"/>
-          <a:lstStyle/>
-          <a:p>
-            <a:pPr indent="0" marL="0">
-              <a:buNone/>
-            </a:pPr>
-            <a:r>
-              <a:rPr lang="en-US" sz="1100" b="1" dirty="0">
-                <a:solidFill>
-                  <a:srgbClr val="0F172A"/>
-                </a:solidFill>
-                <a:latin typeface="Pretendard" pitchFamily="34" charset="0"/>
-                <a:ea typeface="Pretendard" pitchFamily="34" charset="-122"/>
-                <a:cs typeface="Pretendard" pitchFamily="34" charset="-120"/>
-              </a:rPr>
-              <a:t>핵심 현금흐름 3줄 요약 (내 돈 &amp; 월 순수익)</a:t>
-            </a:r>
-            <a:endParaRPr lang="en-US" sz="1100" dirty="0"/>
-          </a:p>
-        </p:txBody>
-      </p:sp>
-      <p:sp>
-        <p:nvSpPr>
-          <p:cNvPr id="6" name="Shape 4"/>
-          <p:cNvSpPr/>
-          <p:nvPr/>
-        </p:nvSpPr>
-        <p:spPr>
-          <a:xfrm>
-            <a:off x="566928" y="1828800"/>
-            <a:ext cx="6858000" cy="2743200"/>
-          </a:xfrm>
-          <a:prstGeom prst="roundRect">
-            <a:avLst>
-              <a:gd name="adj" fmla="val 2000"/>
-            </a:avLst>
-          </a:prstGeom>
-          <a:solidFill>
-            <a:srgbClr val="DBEAFE"/>
-          </a:solidFill>
-          <a:ln/>
-        </p:spPr>
-      </p:sp>
-      <p:sp>
-        <p:nvSpPr>
-          <p:cNvPr id="7" name="Shape 5"/>
-          <p:cNvSpPr/>
-          <p:nvPr/>
-        </p:nvSpPr>
-        <p:spPr>
-          <a:xfrm>
-            <a:off x="566928" y="1883664"/>
-            <a:ext cx="36576" cy="2633472"/>
-          </a:xfrm>
-          <a:prstGeom prst="rect">
-            <a:avLst/>
-          </a:prstGeom>
-          <a:solidFill>
-            <a:srgbClr val="1D4ED8"/>
-          </a:solidFill>
-          <a:ln/>
-        </p:spPr>
-      </p:sp>
-      <p:sp>
-        <p:nvSpPr>
-          <p:cNvPr id="8" name="Text 6"/>
-          <p:cNvSpPr/>
-          <p:nvPr/>
-        </p:nvSpPr>
-        <p:spPr>
-          <a:xfrm>
-            <a:off x="749808" y="1938528"/>
-            <a:ext cx="6528816" cy="201168"/>
-          </a:xfrm>
-          <a:prstGeom prst="rect">
-            <a:avLst/>
-          </a:prstGeom>
-          <a:noFill/>
-          <a:ln/>
-        </p:spPr>
-        <p:txBody>
-          <a:bodyPr wrap="square" lIns="0" tIns="0" rIns="0" bIns="0" rtlCol="0" anchor="ctr"/>
-          <a:lstStyle/>
-          <a:p>
-            <a:pPr indent="0" marL="0">
-              <a:buNone/>
-            </a:pPr>
-            <a:r>
-              <a:rPr lang="en-US" sz="1050" b="1" dirty="0">
-                <a:solidFill>
-                  <a:srgbClr val="1D4ED8"/>
-                </a:solidFill>
-                <a:latin typeface="Pretendard" pitchFamily="34" charset="0"/>
-                <a:ea typeface="Pretendard" pitchFamily="34" charset="-122"/>
-                <a:cs typeface="Pretendard" pitchFamily="34" charset="-120"/>
-              </a:rPr>
-              <a:t>핵심 투자 가치 제안 (Value Proposition)</a:t>
-            </a:r>
-            <a:endParaRPr lang="en-US" sz="1050" dirty="0"/>
-          </a:p>
-        </p:txBody>
-      </p:sp>
-      <p:sp>
-        <p:nvSpPr>
-          <p:cNvPr id="9" name="Text 7"/>
-          <p:cNvSpPr/>
-          <p:nvPr/>
-        </p:nvSpPr>
-        <p:spPr>
-          <a:xfrm>
-            <a:off x="749808" y="2157984"/>
-            <a:ext cx="6528816" cy="2340864"/>
-          </a:xfrm>
-          <a:prstGeom prst="rect">
-            <a:avLst/>
-          </a:prstGeom>
-          <a:noFill/>
-          <a:ln/>
-        </p:spPr>
-        <p:txBody>
-          <a:bodyPr wrap="square" lIns="0" tIns="0" rIns="0" bIns="0" rtlCol="0" anchor="t"/>
+            <a:off x="566928" y="1417320"/>
+            <a:ext cx="2606040" cy="402336"/>
+          </a:xfrm>
+          <a:prstGeom prst="rect">
+            <a:avLst/>
+          </a:prstGeom>
+          <a:noFill/>
+          <a:ln/>
+        </p:spPr>
+        <p:txBody>
+          <a:bodyPr wrap="square" lIns="0" tIns="0" rIns="0" bIns="0" rtlCol="0" anchor="ctr"/>
           <a:lstStyle/>
           <a:p>
             <a:pPr indent="0" marL="0">
@@ -6156,23 +7812,65 @@
               <a:buNone/>
             </a:pPr>
             <a:r>
-              <a:rPr lang="en-US" sz="930" dirty="0">
-                <a:solidFill>
-                  <a:srgbClr val="0F172A"/>
+              <a:rPr lang="en-US" sz="1300" dirty="0">
+                <a:solidFill>
+                  <a:srgbClr val="64748B"/>
                 </a:solidFill>
                 <a:latin typeface="Pretendard" pitchFamily="34" charset="0"/>
                 <a:ea typeface="Pretendard" pitchFamily="34" charset="-122"/>
                 <a:cs typeface="Pretendard" pitchFamily="34" charset="-120"/>
               </a:rPr>
-              <a:t>아래 수치는 AI 추정값으로 참고용이며, 투자 결정의 근거로 사용할 수 없습니다. 면책: AI 추정값 (참고용). 실제 수익은 임대차 조건·공실률·세금에 따라 상이합니다.</a:t>
-            </a:r>
-            <a:endParaRPr lang="en-US" sz="930" dirty="0"/>
-          </a:p>
-        </p:txBody>
-      </p:sp>
-      <p:sp>
-        <p:nvSpPr>
-          <p:cNvPr id="10" name="Shape 8"/>
+              <a:t>{"ok"</a:t>
+            </a:r>
+            <a:endParaRPr lang="en-US" sz="1300" dirty="0"/>
+          </a:p>
+        </p:txBody>
+      </p:sp>
+      <p:sp>
+        <p:nvSpPr>
+          <p:cNvPr id="6" name="Text 4"/>
+          <p:cNvSpPr/>
+          <p:nvPr/>
+        </p:nvSpPr>
+        <p:spPr>
+          <a:xfrm>
+            <a:off x="3172968" y="1417320"/>
+            <a:ext cx="4251960" cy="402336"/>
+          </a:xfrm>
+          <a:prstGeom prst="rect">
+            <a:avLst/>
+          </a:prstGeom>
+          <a:noFill/>
+          <a:ln/>
+        </p:spPr>
+        <p:txBody>
+          <a:bodyPr wrap="square" lIns="0" tIns="0" rIns="0" bIns="0" rtlCol="0" anchor="ctr"/>
+          <a:lstStyle/>
+          <a:p>
+            <a:pPr indent="0" marL="0">
+              <a:lnSpc>
+                <a:spcPct val="120000"/>
+              </a:lnSpc>
+              <a:buNone/>
+            </a:pPr>
+            <a:r>
+              <a:rPr lang="en-US" sz="1300" b="1" dirty="0">
+                <a:solidFill>
+                  <a:srgbClr val="0F172A"/>
+                </a:solidFill>
+                <a:latin typeface="Pretendard" pitchFamily="34" charset="0"/>
+                <a:ea typeface="Pretendard" pitchFamily="34" charset="-122"/>
+                <a:cs typeface="Pretendard" pitchFamily="34" charset="-120"/>
+              </a:rPr>
+              <a:t>true,"mocked":true,"extractedFields":{"area_signal":"역삼","asset_type":"오피스빌딩","price_band":"300억","size_signal":"3000평(약 9917.4㎡)"},"extractedFacts":{"region":"역삼","exactAddressCandidate":"역삼동 742-1","assetType":"오피스빌딩","priceText":"300억","sizeText":"3000평(약 9917.4㎡)","currentUse":"오피스","currentUseSignal":"근린생활시설","leaseSignal":"임대중","vacancySignal":"공실없음","tenantNames":"쿠팡","네이버","unitRentTexts":"301호: 1500만","sellerMotivationText":"자산 효율화","brokerNotes":"초역세권 매물"},"detectedSensitiveFields":"exact_address","tenant_name","ambiguousFields":,"warnings":,"areaSignal":"역삼","assetType":"오피스빌딩","priceBand":"300억","sizeSignal":"3000평(약 9917.4㎡)","dealType":"매각","buildingName":"역삼 센트럴타워","exactAddress":"역삼동 742-1","totalFloorArea":9917.3,"buildYear":2015,"currentUseSignal":"근린생활시설","vacancySignal":"공실 없음","fitSummary":"초역세권 근생 빌딩으로 시행/사옥 매입에 최적화","cautionSummary":"주요 임차 업종 만기 조율 필요","hiddenFields":"exact_address","seller_motivation","confidence":{"areaSignal":"confirmed","assetType":"confirmed","priceBand":"ai_hypothesis","fitSummary":"ai_hypothesis"},"missingData":"sizeSignal","boundaryNote":"본 자료는 실거래 통계 기반 참고치입니다.","buyerType":"법인 사옥형","budgetRange":{"min":50,"max":80,"display":"50억~80억"},"preferredRegions":"강남","성수","assetTypes":"꼬마빌딩","사옥용","purchasePurpose":"사옥용 매입","mustHave":"초역세권","주차","niceToHave":"테라스","루프탑","riskTolerance":"medium","financingNote":"자본금 50% 준비","missingQuestions":"구체적인 입주 시기가 언제인가요?","선호하는 수익률이 있나요?","privacyNotes":"연락처 비공개","fitReasons":"매수자 예산(50-80억)에 부합하는 매물입니다.","요청하신 성수/강남 권역에 해당합니다.","cautionReasons":"요청한 용도와 달리 명도 협의가 다소 필요합니다.","recommendedNextAction":"현장 답사 제안","kakaoMessage":"안녕하세요! 요청하신 조건에 부합하는 추천 매물이 있어 안내해 드립니다. 확인해보시고 피드백 부탁드립니다.","title":"강남 역삼역 초역세권 오피스 사옥용 빌딩 매각","shortSummary":"역삼역 도보 5분 거리의 준신축급 대형 오피스빌딩입니다.","dealPoints":"초역세권","사옥 최적","cautionPoints":"명도 조율 필요","hiddenInfoNotice":"보증금 및 지번은 인가 후 확인 가능","gateMessage":"G1 등급 등록이 필요합니다.","kakaoText":"강남 역삼역 오피스 빌딩 매각 안내입니다.","exactUnitCandidate":"101호","floor":"1층","areaSqmText":"150㎡","spaceType":"office","depositText":"5000만","monthlyRentText":"400만","maintenanceFeeText":"50만","availableFromText":"즉시입주","leaseTermMonthsText":"24","incentivesText":"렌트프리 2개월","restrictions":,"landlordIdentity":"김성수","currentTenant":"스타트업","vacancyReason":"이전 확장","rentNegotiation":"협의 가능","region":"성수동","areaSqm":150,"deposit":5000,"monthlyRent":400,"maintenanceFee":50,"availableFrom":"즉시입주","leaseTermMonths":24,"incentives":{"rentFreeMonths":2,"interiorSupport":"일부 인테리어 지원","freeRentDetail":"렌트프리 2개월 지원"},"shortSummaryLease":"성수역 도보 5분 거리 1층 리테일 상가 매물입니다."}</a:t>
+            </a:r>
+            <a:endParaRPr lang="en-US" sz="1300" dirty="0"/>
+          </a:p>
+        </p:txBody>
+      </p:sp>
+      <p:sp>
+        <p:nvSpPr>
+          <p:cNvPr id="7" name="Shape 5"/>
           <p:cNvSpPr/>
           <p:nvPr/>
         </p:nvSpPr>
@@ -6195,57 +7893,30 @@
       </p:sp>
       <p:sp>
         <p:nvSpPr>
-          <p:cNvPr id="11" name="Shape 9"/>
-          <p:cNvSpPr/>
-          <p:nvPr/>
-        </p:nvSpPr>
-        <p:spPr>
-          <a:xfrm>
-            <a:off x="7784287" y="1536192"/>
-            <a:ext cx="3840480" cy="1005840"/>
-          </a:xfrm>
-          <a:prstGeom prst="roundRect">
-            <a:avLst>
-              <a:gd name="adj" fmla="val 5455"/>
-            </a:avLst>
-          </a:prstGeom>
-          <a:solidFill>
-            <a:srgbClr val="F8FAFC"/>
-          </a:solidFill>
-          <a:ln w="6350">
-            <a:solidFill>
-              <a:srgbClr val="CBD5E1"/>
-            </a:solidFill>
-            <a:prstDash val="solid"/>
-          </a:ln>
-        </p:spPr>
-      </p:sp>
-      <p:sp>
-        <p:nvSpPr>
-          <p:cNvPr id="12" name="Text 10"/>
-          <p:cNvSpPr/>
-          <p:nvPr/>
-        </p:nvSpPr>
-        <p:spPr>
-          <a:xfrm>
-            <a:off x="7948879" y="1664208"/>
-            <a:ext cx="3511296" cy="201168"/>
-          </a:xfrm>
-          <a:prstGeom prst="rect">
-            <a:avLst/>
-          </a:prstGeom>
-          <a:noFill/>
-          <a:ln/>
-        </p:spPr>
-        <p:txBody>
-          <a:bodyPr wrap="square" lIns="0" tIns="0" rIns="0" bIns="0" rtlCol="0" anchor="ctr"/>
-          <a:lstStyle/>
-          <a:p>
-            <a:pPr indent="0" marL="0">
-              <a:buNone/>
-            </a:pPr>
-            <a:r>
-              <a:rPr lang="en-US" sz="950" dirty="0">
+          <p:cNvPr id="8" name="Text 6"/>
+          <p:cNvSpPr/>
+          <p:nvPr/>
+        </p:nvSpPr>
+        <p:spPr>
+          <a:xfrm>
+            <a:off x="566928" y="6419088"/>
+            <a:ext cx="11057839" cy="201168"/>
+          </a:xfrm>
+          <a:prstGeom prst="rect">
+            <a:avLst/>
+          </a:prstGeom>
+          <a:noFill/>
+          <a:ln/>
+        </p:spPr>
+        <p:txBody>
+          <a:bodyPr wrap="square" lIns="0" tIns="0" rIns="0" bIns="0" rtlCol="0" anchor="ctr"/>
+          <a:lstStyle/>
+          <a:p>
+            <a:pPr algn="ctr" indent="0" marL="0">
+              <a:buNone/>
+            </a:pPr>
+            <a:r>
+              <a:rPr lang="en-US" sz="750" dirty="0">
                 <a:solidFill>
                   <a:srgbClr val="64748B"/>
                 </a:solidFill>
@@ -6253,1270 +7924,6 @@
                 <a:ea typeface="Pretendard" pitchFamily="34" charset="-122"/>
                 <a:cs typeface="Pretendard" pitchFamily="34" charset="-120"/>
               </a:rPr>
-              <a:t>① 실투자금 (내 돈)</a:t>
-            </a:r>
-            <a:endParaRPr lang="en-US" sz="950" dirty="0"/>
-          </a:p>
-        </p:txBody>
-      </p:sp>
-      <p:sp>
-        <p:nvSpPr>
-          <p:cNvPr id="13" name="Text 11"/>
-          <p:cNvSpPr/>
-          <p:nvPr/>
-        </p:nvSpPr>
-        <p:spPr>
-          <a:xfrm>
-            <a:off x="7948879" y="1847088"/>
-            <a:ext cx="3511296" cy="402336"/>
-          </a:xfrm>
-          <a:prstGeom prst="rect">
-            <a:avLst/>
-          </a:prstGeom>
-          <a:noFill/>
-          <a:ln/>
-        </p:spPr>
-        <p:txBody>
-          <a:bodyPr wrap="square" lIns="0" tIns="0" rIns="0" bIns="0" rtlCol="0" anchor="ctr">
-            <a:normAutofit/>
-          </a:bodyPr>
-          <a:lstStyle/>
-          <a:p>
-            <a:pPr indent="0" marL="0">
-              <a:buNone/>
-            </a:pPr>
-            <a:r>
-              <a:rPr lang="en-US" sz="1800" b="1" dirty="0">
-                <a:solidFill>
-                  <a:srgbClr val="0F172A"/>
-                </a:solidFill>
-                <a:latin typeface="Pretendard" pitchFamily="34" charset="0"/>
-                <a:ea typeface="Pretendard" pitchFamily="34" charset="-122"/>
-                <a:cs typeface="Pretendard" pitchFamily="34" charset="-120"/>
-              </a:rPr>
-              <a:t>약 26.2억 원</a:t>
-            </a:r>
-            <a:endParaRPr lang="en-US" sz="1800" dirty="0"/>
-          </a:p>
-        </p:txBody>
-      </p:sp>
-      <p:sp>
-        <p:nvSpPr>
-          <p:cNvPr id="14" name="Text 12"/>
-          <p:cNvSpPr/>
-          <p:nvPr/>
-        </p:nvSpPr>
-        <p:spPr>
-          <a:xfrm>
-            <a:off x="7948879" y="2212848"/>
-            <a:ext cx="3511296" cy="164592"/>
-          </a:xfrm>
-          <a:prstGeom prst="rect">
-            <a:avLst/>
-          </a:prstGeom>
-          <a:noFill/>
-          <a:ln/>
-        </p:spPr>
-        <p:txBody>
-          <a:bodyPr wrap="square" lIns="0" tIns="0" rIns="0" bIns="0" rtlCol="0" anchor="ctr"/>
-          <a:lstStyle/>
-          <a:p>
-            <a:pPr indent="0" marL="0">
-              <a:buNone/>
-            </a:pPr>
-            <a:r>
-              <a:rPr lang="en-US" sz="880" dirty="0">
-                <a:solidFill>
-                  <a:srgbClr val="64748B"/>
-                </a:solidFill>
-                <a:latin typeface="Pretendard" pitchFamily="34" charset="0"/>
-                <a:ea typeface="Pretendard" pitchFamily="34" charset="-122"/>
-                <a:cs typeface="Pretendard" pitchFamily="34" charset="-120"/>
-              </a:rPr>
-              <a:t>매매가(72억) - 대출(42억) - 보증금(3.8억)</a:t>
-            </a:r>
-            <a:endParaRPr lang="en-US" sz="880" dirty="0"/>
-          </a:p>
-        </p:txBody>
-      </p:sp>
-      <p:sp>
-        <p:nvSpPr>
-          <p:cNvPr id="15" name="Shape 13"/>
-          <p:cNvSpPr/>
-          <p:nvPr/>
-        </p:nvSpPr>
-        <p:spPr>
-          <a:xfrm>
-            <a:off x="7784287" y="2670048"/>
-            <a:ext cx="3840480" cy="1005840"/>
-          </a:xfrm>
-          <a:prstGeom prst="roundRect">
-            <a:avLst>
-              <a:gd name="adj" fmla="val 5455"/>
-            </a:avLst>
-          </a:prstGeom>
-          <a:solidFill>
-            <a:srgbClr val="F8FAFC"/>
-          </a:solidFill>
-          <a:ln w="6350">
-            <a:solidFill>
-              <a:srgbClr val="CBD5E1"/>
-            </a:solidFill>
-            <a:prstDash val="solid"/>
-          </a:ln>
-        </p:spPr>
-      </p:sp>
-      <p:sp>
-        <p:nvSpPr>
-          <p:cNvPr id="16" name="Text 14"/>
-          <p:cNvSpPr/>
-          <p:nvPr/>
-        </p:nvSpPr>
-        <p:spPr>
-          <a:xfrm>
-            <a:off x="7948879" y="2798064"/>
-            <a:ext cx="3511296" cy="201168"/>
-          </a:xfrm>
-          <a:prstGeom prst="rect">
-            <a:avLst/>
-          </a:prstGeom>
-          <a:noFill/>
-          <a:ln/>
-        </p:spPr>
-        <p:txBody>
-          <a:bodyPr wrap="square" lIns="0" tIns="0" rIns="0" bIns="0" rtlCol="0" anchor="ctr"/>
-          <a:lstStyle/>
-          <a:p>
-            <a:pPr indent="0" marL="0">
-              <a:buNone/>
-            </a:pPr>
-            <a:r>
-              <a:rPr lang="en-US" sz="950" dirty="0">
-                <a:solidFill>
-                  <a:srgbClr val="64748B"/>
-                </a:solidFill>
-                <a:latin typeface="Pretendard" pitchFamily="34" charset="0"/>
-                <a:ea typeface="Pretendard" pitchFamily="34" charset="-122"/>
-                <a:cs typeface="Pretendard" pitchFamily="34" charset="-120"/>
-              </a:rPr>
-              <a:t>② 매달 통장에 꽂히는 돈</a:t>
-            </a:r>
-            <a:endParaRPr lang="en-US" sz="950" dirty="0"/>
-          </a:p>
-        </p:txBody>
-      </p:sp>
-      <p:sp>
-        <p:nvSpPr>
-          <p:cNvPr id="17" name="Text 15"/>
-          <p:cNvSpPr/>
-          <p:nvPr/>
-        </p:nvSpPr>
-        <p:spPr>
-          <a:xfrm>
-            <a:off x="7948879" y="2980944"/>
-            <a:ext cx="3511296" cy="402336"/>
-          </a:xfrm>
-          <a:prstGeom prst="rect">
-            <a:avLst/>
-          </a:prstGeom>
-          <a:noFill/>
-          <a:ln/>
-        </p:spPr>
-        <p:txBody>
-          <a:bodyPr wrap="square" lIns="0" tIns="0" rIns="0" bIns="0" rtlCol="0" anchor="ctr">
-            <a:normAutofit/>
-          </a:bodyPr>
-          <a:lstStyle/>
-          <a:p>
-            <a:pPr indent="0" marL="0">
-              <a:buNone/>
-            </a:pPr>
-            <a:r>
-              <a:rPr lang="en-US" sz="1800" b="1" dirty="0">
-                <a:solidFill>
-                  <a:srgbClr val="0F172A"/>
-                </a:solidFill>
-                <a:latin typeface="Pretendard" pitchFamily="34" charset="0"/>
-                <a:ea typeface="Pretendard" pitchFamily="34" charset="-122"/>
-                <a:cs typeface="Pretendard" pitchFamily="34" charset="-120"/>
-              </a:rPr>
-              <a:t>월 약 625만 원</a:t>
-            </a:r>
-            <a:endParaRPr lang="en-US" sz="1800" dirty="0"/>
-          </a:p>
-        </p:txBody>
-      </p:sp>
-      <p:sp>
-        <p:nvSpPr>
-          <p:cNvPr id="18" name="Text 16"/>
-          <p:cNvSpPr/>
-          <p:nvPr/>
-        </p:nvSpPr>
-        <p:spPr>
-          <a:xfrm>
-            <a:off x="7948879" y="3346704"/>
-            <a:ext cx="3511296" cy="164592"/>
-          </a:xfrm>
-          <a:prstGeom prst="rect">
-            <a:avLst/>
-          </a:prstGeom>
-          <a:noFill/>
-          <a:ln/>
-        </p:spPr>
-        <p:txBody>
-          <a:bodyPr wrap="square" lIns="0" tIns="0" rIns="0" bIns="0" rtlCol="0" anchor="ctr"/>
-          <a:lstStyle/>
-          <a:p>
-            <a:pPr indent="0" marL="0">
-              <a:buNone/>
-            </a:pPr>
-            <a:r>
-              <a:rPr lang="en-US" sz="880" dirty="0">
-                <a:solidFill>
-                  <a:srgbClr val="64748B"/>
-                </a:solidFill>
-                <a:latin typeface="Pretendard" pitchFamily="34" charset="0"/>
-                <a:ea typeface="Pretendard" pitchFamily="34" charset="-122"/>
-                <a:cs typeface="Pretendard" pitchFamily="34" charset="-120"/>
-              </a:rPr>
-              <a:t>월 임대료(2,200만) - 월 이자(1,575만) (금리 4.5%)</a:t>
-            </a:r>
-            <a:endParaRPr lang="en-US" sz="880" dirty="0"/>
-          </a:p>
-        </p:txBody>
-      </p:sp>
-      <p:sp>
-        <p:nvSpPr>
-          <p:cNvPr id="19" name="Shape 17"/>
-          <p:cNvSpPr/>
-          <p:nvPr/>
-        </p:nvSpPr>
-        <p:spPr>
-          <a:xfrm>
-            <a:off x="7784287" y="3803904"/>
-            <a:ext cx="3840480" cy="1005840"/>
-          </a:xfrm>
-          <a:prstGeom prst="roundRect">
-            <a:avLst>
-              <a:gd name="adj" fmla="val 5455"/>
-            </a:avLst>
-          </a:prstGeom>
-          <a:solidFill>
-            <a:srgbClr val="F8FAFC"/>
-          </a:solidFill>
-          <a:ln w="6350">
-            <a:solidFill>
-              <a:srgbClr val="CBD5E1"/>
-            </a:solidFill>
-            <a:prstDash val="solid"/>
-          </a:ln>
-        </p:spPr>
-      </p:sp>
-      <p:sp>
-        <p:nvSpPr>
-          <p:cNvPr id="20" name="Text 18"/>
-          <p:cNvSpPr/>
-          <p:nvPr/>
-        </p:nvSpPr>
-        <p:spPr>
-          <a:xfrm>
-            <a:off x="7948879" y="3931920"/>
-            <a:ext cx="3511296" cy="201168"/>
-          </a:xfrm>
-          <a:prstGeom prst="rect">
-            <a:avLst/>
-          </a:prstGeom>
-          <a:noFill/>
-          <a:ln/>
-        </p:spPr>
-        <p:txBody>
-          <a:bodyPr wrap="square" lIns="0" tIns="0" rIns="0" bIns="0" rtlCol="0" anchor="ctr"/>
-          <a:lstStyle/>
-          <a:p>
-            <a:pPr indent="0" marL="0">
-              <a:buNone/>
-            </a:pPr>
-            <a:r>
-              <a:rPr lang="en-US" sz="950" dirty="0">
-                <a:solidFill>
-                  <a:srgbClr val="64748B"/>
-                </a:solidFill>
-                <a:latin typeface="Pretendard" pitchFamily="34" charset="0"/>
-                <a:ea typeface="Pretendard" pitchFamily="34" charset="-122"/>
-                <a:cs typeface="Pretendard" pitchFamily="34" charset="-120"/>
-              </a:rPr>
-              <a:t>③ 내 돈 대비 연 수익률</a:t>
-            </a:r>
-            <a:endParaRPr lang="en-US" sz="950" dirty="0"/>
-          </a:p>
-        </p:txBody>
-      </p:sp>
-      <p:sp>
-        <p:nvSpPr>
-          <p:cNvPr id="21" name="Text 19"/>
-          <p:cNvSpPr/>
-          <p:nvPr/>
-        </p:nvSpPr>
-        <p:spPr>
-          <a:xfrm>
-            <a:off x="7948879" y="4114800"/>
-            <a:ext cx="3511296" cy="402336"/>
-          </a:xfrm>
-          <a:prstGeom prst="rect">
-            <a:avLst/>
-          </a:prstGeom>
-          <a:noFill/>
-          <a:ln/>
-        </p:spPr>
-        <p:txBody>
-          <a:bodyPr wrap="square" lIns="0" tIns="0" rIns="0" bIns="0" rtlCol="0" anchor="ctr">
-            <a:normAutofit/>
-          </a:bodyPr>
-          <a:lstStyle/>
-          <a:p>
-            <a:pPr indent="0" marL="0">
-              <a:buNone/>
-            </a:pPr>
-            <a:r>
-              <a:rPr lang="en-US" sz="1800" b="1" dirty="0">
-                <a:solidFill>
-                  <a:srgbClr val="0F172A"/>
-                </a:solidFill>
-                <a:latin typeface="Pretendard" pitchFamily="34" charset="0"/>
-                <a:ea typeface="Pretendard" pitchFamily="34" charset="-122"/>
-                <a:cs typeface="Pretendard" pitchFamily="34" charset="-120"/>
-              </a:rPr>
-              <a:t>연 2.86%</a:t>
-            </a:r>
-            <a:endParaRPr lang="en-US" sz="1800" dirty="0"/>
-          </a:p>
-        </p:txBody>
-      </p:sp>
-      <p:sp>
-        <p:nvSpPr>
-          <p:cNvPr id="22" name="Text 20"/>
-          <p:cNvSpPr/>
-          <p:nvPr/>
-        </p:nvSpPr>
-        <p:spPr>
-          <a:xfrm>
-            <a:off x="7948879" y="4480560"/>
-            <a:ext cx="3511296" cy="164592"/>
-          </a:xfrm>
-          <a:prstGeom prst="rect">
-            <a:avLst/>
-          </a:prstGeom>
-          <a:noFill/>
-          <a:ln/>
-        </p:spPr>
-        <p:txBody>
-          <a:bodyPr wrap="square" lIns="0" tIns="0" rIns="0" bIns="0" rtlCol="0" anchor="ctr"/>
-          <a:lstStyle/>
-          <a:p>
-            <a:pPr indent="0" marL="0">
-              <a:buNone/>
-            </a:pPr>
-            <a:r>
-              <a:rPr lang="en-US" sz="880" dirty="0">
-                <a:solidFill>
-                  <a:srgbClr val="64748B"/>
-                </a:solidFill>
-                <a:latin typeface="Pretendard" pitchFamily="34" charset="0"/>
-                <a:ea typeface="Pretendard" pitchFamily="34" charset="-122"/>
-                <a:cs typeface="Pretendard" pitchFamily="34" charset="-120"/>
-              </a:rPr>
-              <a:t>실투자금 대비 연 순수익(약 0.75억 원)</a:t>
-            </a:r>
-            <a:endParaRPr lang="en-US" sz="880" dirty="0"/>
-          </a:p>
-        </p:txBody>
-      </p:sp>
-      <p:sp>
-        <p:nvSpPr>
-          <p:cNvPr id="23" name="Shape 21"/>
-          <p:cNvSpPr/>
-          <p:nvPr/>
-        </p:nvSpPr>
-        <p:spPr>
-          <a:xfrm>
-            <a:off x="7784287" y="4937760"/>
-            <a:ext cx="3840480" cy="1005840"/>
-          </a:xfrm>
-          <a:prstGeom prst="roundRect">
-            <a:avLst>
-              <a:gd name="adj" fmla="val 5455"/>
-            </a:avLst>
-          </a:prstGeom>
-          <a:solidFill>
-            <a:srgbClr val="F8FAFC"/>
-          </a:solidFill>
-          <a:ln w="6350">
-            <a:solidFill>
-              <a:srgbClr val="CBD5E1"/>
-            </a:solidFill>
-            <a:prstDash val="solid"/>
-          </a:ln>
-        </p:spPr>
-      </p:sp>
-      <p:sp>
-        <p:nvSpPr>
-          <p:cNvPr id="24" name="Text 22"/>
-          <p:cNvSpPr/>
-          <p:nvPr/>
-        </p:nvSpPr>
-        <p:spPr>
-          <a:xfrm>
-            <a:off x="7948879" y="5065776"/>
-            <a:ext cx="3511296" cy="201168"/>
-          </a:xfrm>
-          <a:prstGeom prst="rect">
-            <a:avLst/>
-          </a:prstGeom>
-          <a:noFill/>
-          <a:ln/>
-        </p:spPr>
-        <p:txBody>
-          <a:bodyPr wrap="square" lIns="0" tIns="0" rIns="0" bIns="0" rtlCol="0" anchor="ctr"/>
-          <a:lstStyle/>
-          <a:p>
-            <a:pPr indent="0" marL="0">
-              <a:buNone/>
-            </a:pPr>
-            <a:r>
-              <a:rPr lang="en-US" sz="950" dirty="0">
-                <a:solidFill>
-                  <a:srgbClr val="64748B"/>
-                </a:solidFill>
-                <a:latin typeface="Pretendard" pitchFamily="34" charset="0"/>
-                <a:ea typeface="Pretendard" pitchFamily="34" charset="-122"/>
-                <a:cs typeface="Pretendard" pitchFamily="34" charset="-120"/>
-              </a:rPr>
-              <a:t>연 순영업소득(남는 돈 NOI)</a:t>
-            </a:r>
-            <a:endParaRPr lang="en-US" sz="950" dirty="0"/>
-          </a:p>
-        </p:txBody>
-      </p:sp>
-      <p:sp>
-        <p:nvSpPr>
-          <p:cNvPr id="25" name="Text 23"/>
-          <p:cNvSpPr/>
-          <p:nvPr/>
-        </p:nvSpPr>
-        <p:spPr>
-          <a:xfrm>
-            <a:off x="7948879" y="5248656"/>
-            <a:ext cx="3511296" cy="402336"/>
-          </a:xfrm>
-          <a:prstGeom prst="rect">
-            <a:avLst/>
-          </a:prstGeom>
-          <a:noFill/>
-          <a:ln/>
-        </p:spPr>
-        <p:txBody>
-          <a:bodyPr wrap="square" lIns="0" tIns="0" rIns="0" bIns="0" rtlCol="0" anchor="ctr">
-            <a:normAutofit/>
-          </a:bodyPr>
-          <a:lstStyle/>
-          <a:p>
-            <a:pPr indent="0" marL="0">
-              <a:buNone/>
-            </a:pPr>
-            <a:r>
-              <a:rPr lang="en-US" sz="1400" b="1" dirty="0">
-                <a:solidFill>
-                  <a:srgbClr val="0F172A"/>
-                </a:solidFill>
-                <a:latin typeface="Pretendard" pitchFamily="34" charset="0"/>
-                <a:ea typeface="Pretendard" pitchFamily="34" charset="-122"/>
-                <a:cs typeface="Pretendard" pitchFamily="34" charset="-120"/>
-              </a:rPr>
-              <a:t>약 1.8억 원~약 2.2억 원</a:t>
-            </a:r>
-            <a:endParaRPr lang="en-US" sz="1400" dirty="0"/>
-          </a:p>
-        </p:txBody>
-      </p:sp>
-      <p:sp>
-        <p:nvSpPr>
-          <p:cNvPr id="26" name="Text 24"/>
-          <p:cNvSpPr/>
-          <p:nvPr/>
-        </p:nvSpPr>
-        <p:spPr>
-          <a:xfrm>
-            <a:off x="7948879" y="5614416"/>
-            <a:ext cx="3511296" cy="164592"/>
-          </a:xfrm>
-          <a:prstGeom prst="rect">
-            <a:avLst/>
-          </a:prstGeom>
-          <a:noFill/>
-          <a:ln/>
-        </p:spPr>
-        <p:txBody>
-          <a:bodyPr wrap="square" lIns="0" tIns="0" rIns="0" bIns="0" rtlCol="0" anchor="ctr"/>
-          <a:lstStyle/>
-          <a:p>
-            <a:pPr indent="0" marL="0">
-              <a:buNone/>
-            </a:pPr>
-            <a:r>
-              <a:rPr lang="en-US" sz="880" dirty="0">
-                <a:solidFill>
-                  <a:srgbClr val="64748B"/>
-                </a:solidFill>
-                <a:latin typeface="Pretendard" pitchFamily="34" charset="0"/>
-                <a:ea typeface="Pretendard" pitchFamily="34" charset="-122"/>
-                <a:cs typeface="Pretendard" pitchFamily="34" charset="-120"/>
-              </a:rPr>
-              <a:t>운영비 차감 후 실질 순수익</a:t>
-            </a:r>
-            <a:endParaRPr lang="en-US" sz="880" dirty="0"/>
-          </a:p>
-        </p:txBody>
-      </p:sp>
-      <p:sp>
-        <p:nvSpPr>
-          <p:cNvPr id="27" name="Shape 25"/>
-          <p:cNvSpPr/>
-          <p:nvPr/>
-        </p:nvSpPr>
-        <p:spPr>
-          <a:xfrm>
-            <a:off x="7784287" y="6071616"/>
-            <a:ext cx="3840480" cy="1005840"/>
-          </a:xfrm>
-          <a:prstGeom prst="roundRect">
-            <a:avLst>
-              <a:gd name="adj" fmla="val 5455"/>
-            </a:avLst>
-          </a:prstGeom>
-          <a:solidFill>
-            <a:srgbClr val="F8FAFC"/>
-          </a:solidFill>
-          <a:ln w="6350">
-            <a:solidFill>
-              <a:srgbClr val="CBD5E1"/>
-            </a:solidFill>
-            <a:prstDash val="solid"/>
-          </a:ln>
-        </p:spPr>
-      </p:sp>
-      <p:sp>
-        <p:nvSpPr>
-          <p:cNvPr id="28" name="Text 26"/>
-          <p:cNvSpPr/>
-          <p:nvPr/>
-        </p:nvSpPr>
-        <p:spPr>
-          <a:xfrm>
-            <a:off x="7948879" y="6199632"/>
-            <a:ext cx="3511296" cy="201168"/>
-          </a:xfrm>
-          <a:prstGeom prst="rect">
-            <a:avLst/>
-          </a:prstGeom>
-          <a:noFill/>
-          <a:ln/>
-        </p:spPr>
-        <p:txBody>
-          <a:bodyPr wrap="square" lIns="0" tIns="0" rIns="0" bIns="0" rtlCol="0" anchor="ctr"/>
-          <a:lstStyle/>
-          <a:p>
-            <a:pPr indent="0" marL="0">
-              <a:buNone/>
-            </a:pPr>
-            <a:r>
-              <a:rPr lang="en-US" sz="950" dirty="0">
-                <a:solidFill>
-                  <a:srgbClr val="64748B"/>
-                </a:solidFill>
-                <a:latin typeface="Pretendard" pitchFamily="34" charset="0"/>
-                <a:ea typeface="Pretendard" pitchFamily="34" charset="-122"/>
-                <a:cs typeface="Pretendard" pitchFamily="34" charset="-120"/>
-              </a:rPr>
-              <a:t>연 순수익률(Cap Rate)</a:t>
-            </a:r>
-            <a:endParaRPr lang="en-US" sz="950" dirty="0"/>
-          </a:p>
-        </p:txBody>
-      </p:sp>
-      <p:sp>
-        <p:nvSpPr>
-          <p:cNvPr id="29" name="Text 27"/>
-          <p:cNvSpPr/>
-          <p:nvPr/>
-        </p:nvSpPr>
-        <p:spPr>
-          <a:xfrm>
-            <a:off x="7948879" y="6382512"/>
-            <a:ext cx="3511296" cy="402336"/>
-          </a:xfrm>
-          <a:prstGeom prst="rect">
-            <a:avLst/>
-          </a:prstGeom>
-          <a:noFill/>
-          <a:ln/>
-        </p:spPr>
-        <p:txBody>
-          <a:bodyPr wrap="square" lIns="0" tIns="0" rIns="0" bIns="0" rtlCol="0" anchor="ctr">
-            <a:normAutofit/>
-          </a:bodyPr>
-          <a:lstStyle/>
-          <a:p>
-            <a:pPr indent="0" marL="0">
-              <a:buNone/>
-            </a:pPr>
-            <a:r>
-              <a:rPr lang="en-US" sz="1800" b="1" dirty="0">
-                <a:solidFill>
-                  <a:srgbClr val="0F172A"/>
-                </a:solidFill>
-                <a:latin typeface="Arial" pitchFamily="34" charset="0"/>
-                <a:ea typeface="Arial" pitchFamily="34" charset="-122"/>
-                <a:cs typeface="Arial" pitchFamily="34" charset="-120"/>
-              </a:rPr>
-              <a:t>2.5%–3.1%</a:t>
-            </a:r>
-            <a:endParaRPr lang="en-US" sz="1800" dirty="0"/>
-          </a:p>
-        </p:txBody>
-      </p:sp>
-      <p:sp>
-        <p:nvSpPr>
-          <p:cNvPr id="30" name="Text 28"/>
-          <p:cNvSpPr/>
-          <p:nvPr/>
-        </p:nvSpPr>
-        <p:spPr>
-          <a:xfrm>
-            <a:off x="7948879" y="6748272"/>
-            <a:ext cx="3511296" cy="164592"/>
-          </a:xfrm>
-          <a:prstGeom prst="rect">
-            <a:avLst/>
-          </a:prstGeom>
-          <a:noFill/>
-          <a:ln/>
-        </p:spPr>
-        <p:txBody>
-          <a:bodyPr wrap="square" lIns="0" tIns="0" rIns="0" bIns="0" rtlCol="0" anchor="ctr"/>
-          <a:lstStyle/>
-          <a:p>
-            <a:pPr indent="0" marL="0">
-              <a:buNone/>
-            </a:pPr>
-            <a:r>
-              <a:rPr lang="en-US" sz="880" dirty="0">
-                <a:solidFill>
-                  <a:srgbClr val="64748B"/>
-                </a:solidFill>
-                <a:latin typeface="Pretendard" pitchFamily="34" charset="0"/>
-                <a:ea typeface="Pretendard" pitchFamily="34" charset="-122"/>
-                <a:cs typeface="Pretendard" pitchFamily="34" charset="-120"/>
-              </a:rPr>
-              <a:t>매매가 대비 구간 추정</a:t>
-            </a:r>
-            <a:endParaRPr lang="en-US" sz="880" dirty="0"/>
-          </a:p>
-        </p:txBody>
-      </p:sp>
-      <p:sp>
-        <p:nvSpPr>
-          <p:cNvPr id="31" name="Shape 29"/>
-          <p:cNvSpPr/>
-          <p:nvPr/>
-        </p:nvSpPr>
-        <p:spPr>
-          <a:xfrm>
-            <a:off x="7784287" y="7205472"/>
-            <a:ext cx="3840480" cy="1005840"/>
-          </a:xfrm>
-          <a:prstGeom prst="roundRect">
-            <a:avLst>
-              <a:gd name="adj" fmla="val 5455"/>
-            </a:avLst>
-          </a:prstGeom>
-          <a:solidFill>
-            <a:srgbClr val="F8FAFC"/>
-          </a:solidFill>
-          <a:ln w="6350">
-            <a:solidFill>
-              <a:srgbClr val="CBD5E1"/>
-            </a:solidFill>
-            <a:prstDash val="solid"/>
-          </a:ln>
-        </p:spPr>
-      </p:sp>
-      <p:sp>
-        <p:nvSpPr>
-          <p:cNvPr id="32" name="Text 30"/>
-          <p:cNvSpPr/>
-          <p:nvPr/>
-        </p:nvSpPr>
-        <p:spPr>
-          <a:xfrm>
-            <a:off x="7948879" y="7333488"/>
-            <a:ext cx="3511296" cy="201168"/>
-          </a:xfrm>
-          <a:prstGeom prst="rect">
-            <a:avLst/>
-          </a:prstGeom>
-          <a:noFill/>
-          <a:ln/>
-        </p:spPr>
-        <p:txBody>
-          <a:bodyPr wrap="square" lIns="0" tIns="0" rIns="0" bIns="0" rtlCol="0" anchor="ctr"/>
-          <a:lstStyle/>
-          <a:p>
-            <a:pPr indent="0" marL="0">
-              <a:buNone/>
-            </a:pPr>
-            <a:r>
-              <a:rPr lang="en-US" sz="950" dirty="0">
-                <a:solidFill>
-                  <a:srgbClr val="64748B"/>
-                </a:solidFill>
-                <a:latin typeface="Pretendard" pitchFamily="34" charset="0"/>
-                <a:ea typeface="Pretendard" pitchFamily="34" charset="-122"/>
-                <a:cs typeface="Pretendard" pitchFamily="34" charset="-120"/>
-              </a:rPr>
-              <a:t>5년 보유 시 투자수익률(IRR)</a:t>
-            </a:r>
-            <a:endParaRPr lang="en-US" sz="950" dirty="0"/>
-          </a:p>
-        </p:txBody>
-      </p:sp>
-      <p:sp>
-        <p:nvSpPr>
-          <p:cNvPr id="33" name="Text 31"/>
-          <p:cNvSpPr/>
-          <p:nvPr/>
-        </p:nvSpPr>
-        <p:spPr>
-          <a:xfrm>
-            <a:off x="7948879" y="7516368"/>
-            <a:ext cx="3511296" cy="402336"/>
-          </a:xfrm>
-          <a:prstGeom prst="rect">
-            <a:avLst/>
-          </a:prstGeom>
-          <a:noFill/>
-          <a:ln/>
-        </p:spPr>
-        <p:txBody>
-          <a:bodyPr wrap="square" lIns="0" tIns="0" rIns="0" bIns="0" rtlCol="0" anchor="ctr">
-            <a:normAutofit/>
-          </a:bodyPr>
-          <a:lstStyle/>
-          <a:p>
-            <a:pPr indent="0" marL="0">
-              <a:buNone/>
-            </a:pPr>
-            <a:r>
-              <a:rPr lang="en-US" sz="1800" b="1" dirty="0">
-                <a:solidFill>
-                  <a:srgbClr val="0F172A"/>
-                </a:solidFill>
-                <a:latin typeface="Arial" pitchFamily="34" charset="0"/>
-                <a:ea typeface="Arial" pitchFamily="34" charset="-122"/>
-                <a:cs typeface="Arial" pitchFamily="34" charset="-120"/>
-              </a:rPr>
-              <a:t>-4.2%–5.6%</a:t>
-            </a:r>
-            <a:endParaRPr lang="en-US" sz="1800" dirty="0"/>
-          </a:p>
-        </p:txBody>
-      </p:sp>
-      <p:sp>
-        <p:nvSpPr>
-          <p:cNvPr id="34" name="Text 32"/>
-          <p:cNvSpPr/>
-          <p:nvPr/>
-        </p:nvSpPr>
-        <p:spPr>
-          <a:xfrm>
-            <a:off x="7948879" y="7882128"/>
-            <a:ext cx="3511296" cy="164592"/>
-          </a:xfrm>
-          <a:prstGeom prst="rect">
-            <a:avLst/>
-          </a:prstGeom>
-          <a:noFill/>
-          <a:ln/>
-        </p:spPr>
-        <p:txBody>
-          <a:bodyPr wrap="square" lIns="0" tIns="0" rIns="0" bIns="0" rtlCol="0" anchor="ctr"/>
-          <a:lstStyle/>
-          <a:p>
-            <a:pPr indent="0" marL="0">
-              <a:buNone/>
-            </a:pPr>
-            <a:r>
-              <a:rPr lang="en-US" sz="880" dirty="0">
-                <a:solidFill>
-                  <a:srgbClr val="64748B"/>
-                </a:solidFill>
-                <a:latin typeface="Pretendard" pitchFamily="34" charset="0"/>
-                <a:ea typeface="Pretendard" pitchFamily="34" charset="-122"/>
-                <a:cs typeface="Pretendard" pitchFamily="34" charset="-120"/>
-              </a:rPr>
-              <a:t>시나리오 추정, 참고용</a:t>
-            </a:r>
-            <a:endParaRPr lang="en-US" sz="880" dirty="0"/>
-          </a:p>
-        </p:txBody>
-      </p:sp>
-      <p:sp>
-        <p:nvSpPr>
-          <p:cNvPr id="35" name="Shape 33"/>
-          <p:cNvSpPr/>
-          <p:nvPr/>
-        </p:nvSpPr>
-        <p:spPr>
-          <a:xfrm>
-            <a:off x="7784287" y="8339328"/>
-            <a:ext cx="3840480" cy="1005840"/>
-          </a:xfrm>
-          <a:prstGeom prst="roundRect">
-            <a:avLst>
-              <a:gd name="adj" fmla="val 5455"/>
-            </a:avLst>
-          </a:prstGeom>
-          <a:solidFill>
-            <a:srgbClr val="F8FAFC"/>
-          </a:solidFill>
-          <a:ln w="6350">
-            <a:solidFill>
-              <a:srgbClr val="CBD5E1"/>
-            </a:solidFill>
-            <a:prstDash val="solid"/>
-          </a:ln>
-        </p:spPr>
-      </p:sp>
-      <p:sp>
-        <p:nvSpPr>
-          <p:cNvPr id="36" name="Text 34"/>
-          <p:cNvSpPr/>
-          <p:nvPr/>
-        </p:nvSpPr>
-        <p:spPr>
-          <a:xfrm>
-            <a:off x="7948879" y="8467344"/>
-            <a:ext cx="3511296" cy="201168"/>
-          </a:xfrm>
-          <a:prstGeom prst="rect">
-            <a:avLst/>
-          </a:prstGeom>
-          <a:noFill/>
-          <a:ln/>
-        </p:spPr>
-        <p:txBody>
-          <a:bodyPr wrap="square" lIns="0" tIns="0" rIns="0" bIns="0" rtlCol="0" anchor="ctr"/>
-          <a:lstStyle/>
-          <a:p>
-            <a:pPr indent="0" marL="0">
-              <a:buNone/>
-            </a:pPr>
-            <a:r>
-              <a:rPr lang="en-US" sz="950" dirty="0">
-                <a:solidFill>
-                  <a:srgbClr val="64748B"/>
-                </a:solidFill>
-                <a:latin typeface="Pretendard" pitchFamily="34" charset="0"/>
-                <a:ea typeface="Pretendard" pitchFamily="34" charset="-122"/>
-                <a:cs typeface="Pretendard" pitchFamily="34" charset="-120"/>
-              </a:rPr>
-              <a:t>총 수익률(Gross Yield)</a:t>
-            </a:r>
-            <a:endParaRPr lang="en-US" sz="950" dirty="0"/>
-          </a:p>
-        </p:txBody>
-      </p:sp>
-      <p:sp>
-        <p:nvSpPr>
-          <p:cNvPr id="37" name="Text 35"/>
-          <p:cNvSpPr/>
-          <p:nvPr/>
-        </p:nvSpPr>
-        <p:spPr>
-          <a:xfrm>
-            <a:off x="7948879" y="8650224"/>
-            <a:ext cx="3511296" cy="402336"/>
-          </a:xfrm>
-          <a:prstGeom prst="rect">
-            <a:avLst/>
-          </a:prstGeom>
-          <a:noFill/>
-          <a:ln/>
-        </p:spPr>
-        <p:txBody>
-          <a:bodyPr wrap="square" lIns="0" tIns="0" rIns="0" bIns="0" rtlCol="0" anchor="ctr">
-            <a:normAutofit/>
-          </a:bodyPr>
-          <a:lstStyle/>
-          <a:p>
-            <a:pPr indent="0" marL="0">
-              <a:buNone/>
-            </a:pPr>
-            <a:r>
-              <a:rPr lang="en-US" sz="2500" b="1" dirty="0">
-                <a:solidFill>
-                  <a:srgbClr val="0F172A"/>
-                </a:solidFill>
-                <a:latin typeface="Arial" pitchFamily="34" charset="0"/>
-                <a:ea typeface="Arial" pitchFamily="34" charset="-122"/>
-                <a:cs typeface="Arial" pitchFamily="34" charset="-120"/>
-              </a:rPr>
-              <a:t>3.7%</a:t>
-            </a:r>
-            <a:endParaRPr lang="en-US" sz="2500" dirty="0"/>
-          </a:p>
-        </p:txBody>
-      </p:sp>
-      <p:sp>
-        <p:nvSpPr>
-          <p:cNvPr id="38" name="Text 36"/>
-          <p:cNvSpPr/>
-          <p:nvPr/>
-        </p:nvSpPr>
-        <p:spPr>
-          <a:xfrm>
-            <a:off x="7948879" y="9015984"/>
-            <a:ext cx="3511296" cy="164592"/>
-          </a:xfrm>
-          <a:prstGeom prst="rect">
-            <a:avLst/>
-          </a:prstGeom>
-          <a:noFill/>
-          <a:ln/>
-        </p:spPr>
-        <p:txBody>
-          <a:bodyPr wrap="square" lIns="0" tIns="0" rIns="0" bIns="0" rtlCol="0" anchor="ctr"/>
-          <a:lstStyle/>
-          <a:p>
-            <a:pPr indent="0" marL="0">
-              <a:buNone/>
-            </a:pPr>
-            <a:r>
-              <a:rPr lang="en-US" sz="880" dirty="0">
-                <a:solidFill>
-                  <a:srgbClr val="64748B"/>
-                </a:solidFill>
-                <a:latin typeface="Pretendard" pitchFamily="34" charset="0"/>
-                <a:ea typeface="Pretendard" pitchFamily="34" charset="-122"/>
-                <a:cs typeface="Pretendard" pitchFamily="34" charset="-120"/>
-              </a:rPr>
-              <a:t>연 임대수입/매매가</a:t>
-            </a:r>
-            <a:endParaRPr lang="en-US" sz="880" dirty="0"/>
-          </a:p>
-        </p:txBody>
-      </p:sp>
-      <p:sp>
-        <p:nvSpPr>
-          <p:cNvPr id="39" name="Shape 37"/>
-          <p:cNvSpPr/>
-          <p:nvPr/>
-        </p:nvSpPr>
-        <p:spPr>
-          <a:xfrm>
-            <a:off x="7784287" y="9473184"/>
-            <a:ext cx="3840480" cy="1005840"/>
-          </a:xfrm>
-          <a:prstGeom prst="roundRect">
-            <a:avLst>
-              <a:gd name="adj" fmla="val 5455"/>
-            </a:avLst>
-          </a:prstGeom>
-          <a:solidFill>
-            <a:srgbClr val="F8FAFC"/>
-          </a:solidFill>
-          <a:ln w="6350">
-            <a:solidFill>
-              <a:srgbClr val="CBD5E1"/>
-            </a:solidFill>
-            <a:prstDash val="solid"/>
-          </a:ln>
-        </p:spPr>
-      </p:sp>
-      <p:sp>
-        <p:nvSpPr>
-          <p:cNvPr id="40" name="Text 38"/>
-          <p:cNvSpPr/>
-          <p:nvPr/>
-        </p:nvSpPr>
-        <p:spPr>
-          <a:xfrm>
-            <a:off x="7948879" y="9601200"/>
-            <a:ext cx="3511296" cy="201168"/>
-          </a:xfrm>
-          <a:prstGeom prst="rect">
-            <a:avLst/>
-          </a:prstGeom>
-          <a:noFill/>
-          <a:ln/>
-        </p:spPr>
-        <p:txBody>
-          <a:bodyPr wrap="square" lIns="0" tIns="0" rIns="0" bIns="0" rtlCol="0" anchor="ctr"/>
-          <a:lstStyle/>
-          <a:p>
-            <a:pPr indent="0" marL="0">
-              <a:buNone/>
-            </a:pPr>
-            <a:r>
-              <a:rPr lang="en-US" sz="950" dirty="0">
-                <a:solidFill>
-                  <a:srgbClr val="64748B"/>
-                </a:solidFill>
-                <a:latin typeface="Pretendard" pitchFamily="34" charset="0"/>
-                <a:ea typeface="Pretendard" pitchFamily="34" charset="-122"/>
-                <a:cs typeface="Pretendard" pitchFamily="34" charset="-120"/>
-              </a:rPr>
-              <a:t>평당 매매가</a:t>
-            </a:r>
-            <a:endParaRPr lang="en-US" sz="950" dirty="0"/>
-          </a:p>
-        </p:txBody>
-      </p:sp>
-      <p:sp>
-        <p:nvSpPr>
-          <p:cNvPr id="41" name="Text 39"/>
-          <p:cNvSpPr/>
-          <p:nvPr/>
-        </p:nvSpPr>
-        <p:spPr>
-          <a:xfrm>
-            <a:off x="7948879" y="9784080"/>
-            <a:ext cx="3511296" cy="402336"/>
-          </a:xfrm>
-          <a:prstGeom prst="rect">
-            <a:avLst/>
-          </a:prstGeom>
-          <a:noFill/>
-          <a:ln/>
-        </p:spPr>
-        <p:txBody>
-          <a:bodyPr wrap="square" lIns="0" tIns="0" rIns="0" bIns="0" rtlCol="0" anchor="ctr">
-            <a:normAutofit/>
-          </a:bodyPr>
-          <a:lstStyle/>
-          <a:p>
-            <a:pPr indent="0" marL="0">
-              <a:buNone/>
-            </a:pPr>
-            <a:r>
-              <a:rPr lang="en-US" sz="1800" b="1" dirty="0">
-                <a:solidFill>
-                  <a:srgbClr val="0F172A"/>
-                </a:solidFill>
-                <a:latin typeface="Pretendard" pitchFamily="34" charset="0"/>
-                <a:ea typeface="Pretendard" pitchFamily="34" charset="-122"/>
-                <a:cs typeface="Pretendard" pitchFamily="34" charset="-120"/>
-              </a:rPr>
-              <a:t>4,760,323원/평</a:t>
-            </a:r>
-            <a:endParaRPr lang="en-US" sz="1800" dirty="0"/>
-          </a:p>
-        </p:txBody>
-      </p:sp>
-      <p:sp>
-        <p:nvSpPr>
-          <p:cNvPr id="42" name="Text 40"/>
-          <p:cNvSpPr/>
-          <p:nvPr/>
-        </p:nvSpPr>
-        <p:spPr>
-          <a:xfrm>
-            <a:off x="7948879" y="10149840"/>
-            <a:ext cx="3511296" cy="164592"/>
-          </a:xfrm>
-          <a:prstGeom prst="rect">
-            <a:avLst/>
-          </a:prstGeom>
-          <a:noFill/>
-          <a:ln/>
-        </p:spPr>
-        <p:txBody>
-          <a:bodyPr wrap="square" lIns="0" tIns="0" rIns="0" bIns="0" rtlCol="0" anchor="ctr"/>
-          <a:lstStyle/>
-          <a:p>
-            <a:pPr indent="0" marL="0">
-              <a:buNone/>
-            </a:pPr>
-            <a:r>
-              <a:rPr lang="en-US" sz="880" dirty="0">
-                <a:solidFill>
-                  <a:srgbClr val="64748B"/>
-                </a:solidFill>
-                <a:latin typeface="Pretendard" pitchFamily="34" charset="0"/>
-                <a:ea typeface="Pretendard" pitchFamily="34" charset="-122"/>
-                <a:cs typeface="Pretendard" pitchFamily="34" charset="-120"/>
-              </a:rPr>
-              <a:t>참고용</a:t>
-            </a:r>
-            <a:endParaRPr lang="en-US" sz="880" dirty="0"/>
-          </a:p>
-        </p:txBody>
-      </p:sp>
-      <p:sp>
-        <p:nvSpPr>
-          <p:cNvPr id="43" name="Shape 41"/>
-          <p:cNvSpPr/>
-          <p:nvPr/>
-        </p:nvSpPr>
-        <p:spPr>
-          <a:xfrm>
-            <a:off x="7784287" y="10607040"/>
-            <a:ext cx="3840480" cy="1097280"/>
-          </a:xfrm>
-          <a:prstGeom prst="roundRect">
-            <a:avLst>
-              <a:gd name="adj" fmla="val 5000"/>
-            </a:avLst>
-          </a:prstGeom>
-          <a:solidFill>
-            <a:srgbClr val="DBEAFE"/>
-          </a:solidFill>
-          <a:ln/>
-        </p:spPr>
-      </p:sp>
-      <p:sp>
-        <p:nvSpPr>
-          <p:cNvPr id="44" name="Shape 42"/>
-          <p:cNvSpPr/>
-          <p:nvPr/>
-        </p:nvSpPr>
-        <p:spPr>
-          <a:xfrm>
-            <a:off x="7784287" y="10661904"/>
-            <a:ext cx="36576" cy="987552"/>
-          </a:xfrm>
-          <a:prstGeom prst="rect">
-            <a:avLst/>
-          </a:prstGeom>
-          <a:solidFill>
-            <a:srgbClr val="1D4ED8"/>
-          </a:solidFill>
-          <a:ln/>
-        </p:spPr>
-      </p:sp>
-      <p:sp>
-        <p:nvSpPr>
-          <p:cNvPr id="45" name="Text 43"/>
-          <p:cNvSpPr/>
-          <p:nvPr/>
-        </p:nvSpPr>
-        <p:spPr>
-          <a:xfrm>
-            <a:off x="7967167" y="10716768"/>
-            <a:ext cx="3511296" cy="201168"/>
-          </a:xfrm>
-          <a:prstGeom prst="rect">
-            <a:avLst/>
-          </a:prstGeom>
-          <a:noFill/>
-          <a:ln/>
-        </p:spPr>
-        <p:txBody>
-          <a:bodyPr wrap="square" lIns="0" tIns="0" rIns="0" bIns="0" rtlCol="0" anchor="ctr"/>
-          <a:lstStyle/>
-          <a:p>
-            <a:pPr indent="0" marL="0">
-              <a:buNone/>
-            </a:pPr>
-            <a:r>
-              <a:rPr lang="en-US" sz="1050" b="1" dirty="0">
-                <a:solidFill>
-                  <a:srgbClr val="1D4ED8"/>
-                </a:solidFill>
-                <a:latin typeface="Pretendard" pitchFamily="34" charset="0"/>
-                <a:ea typeface="Pretendard" pitchFamily="34" charset="-122"/>
-                <a:cs typeface="Pretendard" pitchFamily="34" charset="-120"/>
-              </a:rPr>
-              <a:t>면책</a:t>
-            </a:r>
-            <a:endParaRPr lang="en-US" sz="1050" dirty="0"/>
-          </a:p>
-        </p:txBody>
-      </p:sp>
-      <p:sp>
-        <p:nvSpPr>
-          <p:cNvPr id="46" name="Text 44"/>
-          <p:cNvSpPr/>
-          <p:nvPr/>
-        </p:nvSpPr>
-        <p:spPr>
-          <a:xfrm>
-            <a:off x="7967167" y="10936224"/>
-            <a:ext cx="3511296" cy="694944"/>
-          </a:xfrm>
-          <a:prstGeom prst="rect">
-            <a:avLst/>
-          </a:prstGeom>
-          <a:noFill/>
-          <a:ln/>
-        </p:spPr>
-        <p:txBody>
-          <a:bodyPr wrap="square" lIns="0" tIns="0" rIns="0" bIns="0" rtlCol="0" anchor="t"/>
-          <a:lstStyle/>
-          <a:p>
-            <a:pPr indent="0" marL="0">
-              <a:lnSpc>
-                <a:spcPct val="120000"/>
-              </a:lnSpc>
-              <a:buNone/>
-            </a:pPr>
-            <a:r>
-              <a:rPr lang="en-US" sz="930" dirty="0">
-                <a:solidFill>
-                  <a:srgbClr val="0F172A"/>
-                </a:solidFill>
-                <a:latin typeface="Pretendard" pitchFamily="34" charset="0"/>
-                <a:ea typeface="Pretendard" pitchFamily="34" charset="-122"/>
-                <a:cs typeface="Pretendard" pitchFamily="34" charset="-120"/>
-              </a:rPr>
-              <a:t>AI 추정값 (참고용). 실제 수익은 임대차 조건·공실률·세금에 따라 상이합니다.</a:t>
-            </a:r>
-            <a:endParaRPr lang="en-US" sz="930" dirty="0"/>
-          </a:p>
-        </p:txBody>
-      </p:sp>
-      <p:sp>
-        <p:nvSpPr>
-          <p:cNvPr id="47" name="Text 45"/>
-          <p:cNvSpPr/>
-          <p:nvPr/>
-        </p:nvSpPr>
-        <p:spPr>
-          <a:xfrm>
-            <a:off x="566928" y="6419088"/>
-            <a:ext cx="11057839" cy="201168"/>
-          </a:xfrm>
-          <a:prstGeom prst="rect">
-            <a:avLst/>
-          </a:prstGeom>
-          <a:noFill/>
-          <a:ln/>
-        </p:spPr>
-        <p:txBody>
-          <a:bodyPr wrap="square" lIns="0" tIns="0" rIns="0" bIns="0" rtlCol="0" anchor="ctr"/>
-          <a:lstStyle/>
-          <a:p>
-            <a:pPr algn="ctr" indent="0" marL="0">
-              <a:buNone/>
-            </a:pPr>
-            <a:r>
-              <a:rPr lang="en-US" sz="750" dirty="0">
-                <a:solidFill>
-                  <a:srgbClr val="64748B"/>
-                </a:solidFill>
-                <a:latin typeface="Pretendard" pitchFamily="34" charset="0"/>
-                <a:ea typeface="Pretendard" pitchFamily="34" charset="-122"/>
-                <a:cs typeface="Pretendard" pitchFamily="34" charset="-120"/>
-              </a:rPr>
               <a:t>크리딜  ·    ·  6</a:t>
             </a:r>
             <a:endParaRPr lang="en-US" sz="750" dirty="0"/>
@@ -7525,7 +7932,7 @@
       </p:sp>
       <p:sp>
         <p:nvSpPr>
-          <p:cNvPr id="48" name="Shape 46"/>
+          <p:cNvPr id="9" name="Shape 7"/>
           <p:cNvSpPr/>
           <p:nvPr/>
         </p:nvSpPr>
@@ -7545,6 +7952,45 @@
             <a:prstDash val="solid"/>
           </a:ln>
         </p:spPr>
+      </p:sp>
+      <p:sp>
+        <p:nvSpPr>
+          <p:cNvPr id="10" name="Text 8"/>
+          <p:cNvSpPr/>
+          <p:nvPr/>
+        </p:nvSpPr>
+        <p:spPr>
+          <a:xfrm>
+            <a:off x="566928" y="1481328"/>
+            <a:ext cx="11057839" cy="9692640"/>
+          </a:xfrm>
+          <a:prstGeom prst="rect">
+            <a:avLst/>
+          </a:prstGeom>
+          <a:noFill/>
+          <a:ln/>
+        </p:spPr>
+        <p:txBody>
+          <a:bodyPr wrap="square" lIns="0" tIns="0" rIns="0" bIns="0" rtlCol="0" anchor="t"/>
+          <a:lstStyle/>
+          <a:p>
+            <a:pPr indent="0" marL="0">
+              <a:buNone/>
+            </a:pPr>
+            <a:r>
+              <a:rPr lang="en-US" sz="1000" dirty="0">
+                <a:solidFill>
+                  <a:srgbClr val="0F172A"/>
+                </a:solidFill>
+                <a:latin typeface="Pretendard" pitchFamily="34" charset="0"/>
+                <a:ea typeface="Pretendard" pitchFamily="34" charset="-122"/>
+                <a:cs typeface="Pretendard" pitchFamily="34" charset="-120"/>
+              </a:rPr>
+              <a:t>{"ok":true,"mocked":true,"extractedFields":{"area_signal":"역삼","asset_type":"오피스빌딩","price_band":"300억","size_signal":"3000평(약 9917.4㎡)"},"extractedFacts":{"region":"역삼","exactAddressCandidate":"역삼동 742-1","assetType":"오피스빌딩","priceText":"300억","sizeText":"3000평(약 9917.4㎡)","currentUse":"오피스","currentUseSignal":"근린생활시설","leaseSignal":"임대중","vacancySignal":"공실없음","tenantNames":["쿠팡","네이버"],"unitRentTexts":["301호: 1500만"],"sellerMotivationText":"자산 효율화","brokerNotes":["초역세권 매물"]},"detectedSensitiveFields":["exact_address","tenant_name"],"ambiguousFields":[],"warnings":[],"areaSignal":"역삼","assetType":"오피스빌딩","priceBand":"300억","sizeSignal":"3000평(약 9917.4㎡)","dealType":"매각","buildingName":"역삼 센트럴타워","exactAddress":"역삼동 742-1","totalFloorArea":9917.3,"buildYear":2015,"currentUseSignal":"근린생활시설","vacancySignal":"공실 없음","fitSummary":"초역세권 근생 빌딩으로 시행/사옥 매입에 최적화","cautionSummary":"주요 임차 업종 만기 조율 필요","hiddenFields":["exact_address","seller_motivation"],"confidence":{"areaSignal":"confirmed","assetType":"confirmed","priceBand":"ai_hypothesis","fitSummary":"ai_hypothesis"},"missingData":["sizeSignal"],"boundaryNote":"본 자료는 실거래 통계 기반 참고치입니다.","buyerType":"법인 사옥형","budgetRange":{"min":50,"max":80,"display":"50억~80억"},"preferredRegions":["강남","성수"],"assetTypes":["꼬마빌딩","사옥용"],"purchasePurpose":"사옥용 매입","mustHave":["초역세권","주차"],"niceToHave":["테라스","루프탑"],"riskTolerance":"medium","financingNote":"자본금 50% 준비","missingQuestions":["구체적인 입주 시기가 언제인가요?","선호하는 수익률이 있나요?"],"privacyNotes":["연락처 비공개"],"fitReasons":["매수자 예산(50-80억)에 부합하는 매물입니다.","요청하신 성수/강남 권역에 해당합니다."],"cautionReasons":["요청한 용도와 달리 명도 협의가 다소 필요합니다."],"recommendedNextAction":"현장 답사 제안","kakaoMessage":"안녕하세요! 요청하신 조건에 부합하는 추천 매물이 있어 안내해 드립니다. 확인해보시고 피드백 부탁드립니다.","title":"강남 역삼역 초역세권 오피스 사옥용 빌딩 매각","shortSummary":"역삼역 도보 5분 거리의 준신축급 대형 오피스빌딩입니다.","dealPoints":["초역세권","사옥 최적"],"cautionPoints":["명도 조율 필요"],"hiddenInfoNotice":["보증금 및 지번은 인가 후 확인 가능"],"gateMessage":"G1 등급 등록이 필요합니다.","kakaoText":"강남 역삼역 오피스 빌딩 매각 안내입니다.","exactUnitCandidate":"101호","floor":"1층","areaSqmText":"150㎡","spaceType":"office","depositText":"5000만","monthlyRentText":"400만","maintenanceFeeText":"50만","availableFromText":"즉시입주","leaseTermMonthsText":"24","incentivesText":"렌트프리 2개월","restrictions":[],"landlordIdentity":"김성수","currentTenant":"스타트업","vacancyReason":"이전 확장","rentNegotiation":"협의 가능","region":"성수동","areaSqm":150,"deposit":5000,"monthlyRent":400,"maintenanceFee":50,"availableFrom":"즉시입주","leaseTermMonths":24,"incentives":{"rentFreeMonths":2,"interiorSupport":"일부 인테리어 지원","freeRentDetail":"렌트프리 2개월 지원"},"shortSummaryLease":"성수역 도보 5분 거리 1층 리테일 상가 매물입니다."}</a:t>
+            </a:r>
+            <a:endParaRPr lang="en-US" sz="1000" dirty="0"/>
+          </a:p>
+        </p:txBody>
       </p:sp>
     </p:spTree>
   </p:cSld>
@@ -7774,7 +8220,7 @@
                 <a:ea typeface="Pretendard" pitchFamily="34" charset="-122"/>
                 <a:cs typeface="Pretendard" pitchFamily="34" charset="-120"/>
               </a:rPr>
-              <a:t>건물 물리적 상태</a:t>
+              <a:t>용도 리스크</a:t>
             </a:r>
             <a:endParaRPr lang="en-US" sz="1350" dirty="0"/>
           </a:p>
@@ -7813,7 +8259,7 @@
                 <a:ea typeface="Pretendard" pitchFamily="34" charset="-122"/>
                 <a:cs typeface="Pretendard" pitchFamily="34" charset="-120"/>
               </a:rPr>
-              <a:t>2017년 준공 신축급 상태 (누수/균열</a:t>
+              <a:t>—</a:t>
             </a:r>
             <a:endParaRPr lang="en-US" sz="1500" dirty="0"/>
           </a:p>
@@ -7853,7 +8299,7 @@
                 <a:ea typeface="Pretendard" pitchFamily="34" charset="-122"/>
                 <a:cs typeface="Pretendard" pitchFamily="34" charset="-120"/>
               </a:rPr>
-              <a:t>준공 10년 미만으로 대규모 수선비용 발생 가능성 낮음</a:t>
+              <a:t>{"ok":true,"mocked":true,"extractedFields":{"area_signal":"역삼","asset_type":"오피스빌딩","price_band":"300억","size_signal":"3000평(약 9917.4㎡)"},"extractedFacts":{"region":"역삼","exactAddressCandidate":"역삼동 7</a:t>
             </a:r>
             <a:endParaRPr lang="en-US" sz="1250" dirty="0"/>
           </a:p>
@@ -7861,487 +8307,37 @@
       </p:sp>
       <p:sp>
         <p:nvSpPr>
-          <p:cNvPr id="11" name="Shape 9"/>
-          <p:cNvSpPr/>
-          <p:nvPr/>
-        </p:nvSpPr>
-        <p:spPr>
-          <a:xfrm>
-            <a:off x="4344314" y="1417320"/>
-            <a:ext cx="3503066" cy="3611880"/>
-          </a:xfrm>
-          <a:prstGeom prst="rect">
-            <a:avLst/>
-          </a:prstGeom>
-          <a:solidFill>
-            <a:srgbClr val="F8FAFC"/>
-          </a:solidFill>
-          <a:ln w="3810">
-            <a:solidFill>
-              <a:srgbClr val="CBD5E1"/>
-            </a:solidFill>
-            <a:prstDash val="solid"/>
-          </a:ln>
-        </p:spPr>
-      </p:sp>
-      <p:sp>
-        <p:nvSpPr>
-          <p:cNvPr id="12" name="Shape 10"/>
-          <p:cNvSpPr/>
-          <p:nvPr/>
-        </p:nvSpPr>
-        <p:spPr>
-          <a:xfrm>
-            <a:off x="4344314" y="1417320"/>
-            <a:ext cx="3503066" cy="36576"/>
-          </a:xfrm>
-          <a:prstGeom prst="rect">
-            <a:avLst/>
-          </a:prstGeom>
-          <a:solidFill>
-            <a:srgbClr val="6B8E00"/>
-          </a:solidFill>
-          <a:ln/>
-        </p:spPr>
-      </p:sp>
-      <p:sp>
-        <p:nvSpPr>
-          <p:cNvPr id="13" name="Shape 11"/>
-          <p:cNvSpPr/>
-          <p:nvPr/>
-        </p:nvSpPr>
-        <p:spPr>
-          <a:xfrm>
-            <a:off x="4344314" y="1417320"/>
-            <a:ext cx="3503066" cy="45720"/>
-          </a:xfrm>
-          <a:prstGeom prst="rect">
-            <a:avLst/>
-          </a:prstGeom>
-          <a:solidFill>
-            <a:srgbClr val="6B8E00"/>
-          </a:solidFill>
-          <a:ln/>
-        </p:spPr>
-      </p:sp>
-      <p:sp>
-        <p:nvSpPr>
-          <p:cNvPr id="14" name="Text 12"/>
-          <p:cNvSpPr/>
-          <p:nvPr/>
-        </p:nvSpPr>
-        <p:spPr>
-          <a:xfrm>
-            <a:off x="4572914" y="1618488"/>
-            <a:ext cx="3045866" cy="292608"/>
-          </a:xfrm>
-          <a:prstGeom prst="rect">
-            <a:avLst/>
-          </a:prstGeom>
-          <a:noFill/>
-          <a:ln/>
-        </p:spPr>
-        <p:txBody>
-          <a:bodyPr wrap="square" lIns="0" tIns="0" rIns="0" bIns="0" rtlCol="0" anchor="ctr"/>
-          <a:lstStyle/>
-          <a:p>
-            <a:pPr indent="0" marL="0">
-              <a:buNone/>
-            </a:pPr>
-            <a:r>
-              <a:rPr lang="en-US" sz="1350" b="1" dirty="0">
-                <a:solidFill>
-                  <a:srgbClr val="4F6A00"/>
+          <p:cNvPr id="11" name="Text 9"/>
+          <p:cNvSpPr/>
+          <p:nvPr/>
+        </p:nvSpPr>
+        <p:spPr>
+          <a:xfrm>
+            <a:off x="566928" y="6419088"/>
+            <a:ext cx="11057839" cy="201168"/>
+          </a:xfrm>
+          <a:prstGeom prst="rect">
+            <a:avLst/>
+          </a:prstGeom>
+          <a:noFill/>
+          <a:ln/>
+        </p:spPr>
+        <p:txBody>
+          <a:bodyPr wrap="square" lIns="0" tIns="0" rIns="0" bIns="0" rtlCol="0" anchor="ctr"/>
+          <a:lstStyle/>
+          <a:p>
+            <a:pPr algn="ctr" indent="0" marL="0">
+              <a:buNone/>
+            </a:pPr>
+            <a:r>
+              <a:rPr lang="en-US" sz="750" dirty="0">
+                <a:solidFill>
+                  <a:srgbClr val="64748B"/>
                 </a:solidFill>
                 <a:latin typeface="Pretendard" pitchFamily="34" charset="0"/>
                 <a:ea typeface="Pretendard" pitchFamily="34" charset="-122"/>
                 <a:cs typeface="Pretendard" pitchFamily="34" charset="-120"/>
               </a:rPr>
-              <a:t>승강기 및 설비</a:t>
-            </a:r>
-            <a:endParaRPr lang="en-US" sz="1350" dirty="0"/>
-          </a:p>
-        </p:txBody>
-      </p:sp>
-      <p:sp>
-        <p:nvSpPr>
-          <p:cNvPr id="15" name="Text 13"/>
-          <p:cNvSpPr/>
-          <p:nvPr/>
-        </p:nvSpPr>
-        <p:spPr>
-          <a:xfrm>
-            <a:off x="4572914" y="1929384"/>
-            <a:ext cx="3045866" cy="347472"/>
-          </a:xfrm>
-          <a:prstGeom prst="rect">
-            <a:avLst/>
-          </a:prstGeom>
-          <a:noFill/>
-          <a:ln/>
-        </p:spPr>
-        <p:txBody>
-          <a:bodyPr wrap="square" lIns="0" tIns="0" rIns="0" bIns="0" rtlCol="0" anchor="ctr"/>
-          <a:lstStyle/>
-          <a:p>
-            <a:pPr indent="0" marL="0">
-              <a:buNone/>
-            </a:pPr>
-            <a:r>
-              <a:rPr lang="en-US" sz="1500" b="1" dirty="0">
-                <a:solidFill>
-                  <a:srgbClr val="0F172A"/>
-                </a:solidFill>
-                <a:latin typeface="Pretendard" pitchFamily="34" charset="0"/>
-                <a:ea typeface="Pretendard" pitchFamily="34" charset="-122"/>
-                <a:cs typeface="Pretendard" pitchFamily="34" charset="-120"/>
-              </a:rPr>
-              <a:t>15인승 침대용 승강기 및 냉난방 설비 </a:t>
-            </a:r>
-            <a:endParaRPr lang="en-US" sz="1500" dirty="0"/>
-          </a:p>
-        </p:txBody>
-      </p:sp>
-      <p:sp>
-        <p:nvSpPr>
-          <p:cNvPr id="16" name="Text 14"/>
-          <p:cNvSpPr/>
-          <p:nvPr/>
-        </p:nvSpPr>
-        <p:spPr>
-          <a:xfrm>
-            <a:off x="4572914" y="2313432"/>
-            <a:ext cx="3045866" cy="2606040"/>
-          </a:xfrm>
-          <a:prstGeom prst="rect">
-            <a:avLst/>
-          </a:prstGeom>
-          <a:noFill/>
-          <a:ln/>
-        </p:spPr>
-        <p:txBody>
-          <a:bodyPr wrap="square" lIns="0" tIns="0" rIns="0" bIns="0" rtlCol="0" anchor="t"/>
-          <a:lstStyle/>
-          <a:p>
-            <a:pPr marL="342900" indent="-342900">
-              <a:buSzPct val="100000"/>
-              <a:buChar char="•"/>
-            </a:pPr>
-            <a:r>
-              <a:rPr lang="en-US" sz="1250" dirty="0">
-                <a:solidFill>
-                  <a:srgbClr val="0F172A"/>
-                </a:solidFill>
-                <a:latin typeface="Pretendard" pitchFamily="34" charset="0"/>
-                <a:ea typeface="Pretendard" pitchFamily="34" charset="-122"/>
-                <a:cs typeface="Pretendard" pitchFamily="34" charset="-120"/>
-              </a:rPr>
-              <a:t>주기적 정기 점검 계약 유지로 관리 리스크 최소화</a:t>
-            </a:r>
-            <a:endParaRPr lang="en-US" sz="1250" dirty="0"/>
-          </a:p>
-        </p:txBody>
-      </p:sp>
-      <p:sp>
-        <p:nvSpPr>
-          <p:cNvPr id="17" name="Shape 15"/>
-          <p:cNvSpPr/>
-          <p:nvPr/>
-        </p:nvSpPr>
-        <p:spPr>
-          <a:xfrm>
-            <a:off x="8121701" y="1417320"/>
-            <a:ext cx="3503066" cy="3611880"/>
-          </a:xfrm>
-          <a:prstGeom prst="rect">
-            <a:avLst/>
-          </a:prstGeom>
-          <a:solidFill>
-            <a:srgbClr val="F8FAFC"/>
-          </a:solidFill>
-          <a:ln w="3810">
-            <a:solidFill>
-              <a:srgbClr val="CBD5E1"/>
-            </a:solidFill>
-            <a:prstDash val="solid"/>
-          </a:ln>
-        </p:spPr>
-      </p:sp>
-      <p:sp>
-        <p:nvSpPr>
-          <p:cNvPr id="18" name="Shape 16"/>
-          <p:cNvSpPr/>
-          <p:nvPr/>
-        </p:nvSpPr>
-        <p:spPr>
-          <a:xfrm>
-            <a:off x="8121701" y="1417320"/>
-            <a:ext cx="3503066" cy="36576"/>
-          </a:xfrm>
-          <a:prstGeom prst="rect">
-            <a:avLst/>
-          </a:prstGeom>
-          <a:solidFill>
-            <a:srgbClr val="6B8E00"/>
-          </a:solidFill>
-          <a:ln/>
-        </p:spPr>
-      </p:sp>
-      <p:sp>
-        <p:nvSpPr>
-          <p:cNvPr id="19" name="Shape 17"/>
-          <p:cNvSpPr/>
-          <p:nvPr/>
-        </p:nvSpPr>
-        <p:spPr>
-          <a:xfrm>
-            <a:off x="8121701" y="1417320"/>
-            <a:ext cx="3503066" cy="45720"/>
-          </a:xfrm>
-          <a:prstGeom prst="rect">
-            <a:avLst/>
-          </a:prstGeom>
-          <a:solidFill>
-            <a:srgbClr val="6B8E00"/>
-          </a:solidFill>
-          <a:ln/>
-        </p:spPr>
-      </p:sp>
-      <p:sp>
-        <p:nvSpPr>
-          <p:cNvPr id="20" name="Text 18"/>
-          <p:cNvSpPr/>
-          <p:nvPr/>
-        </p:nvSpPr>
-        <p:spPr>
-          <a:xfrm>
-            <a:off x="8350301" y="1618488"/>
-            <a:ext cx="3045866" cy="292608"/>
-          </a:xfrm>
-          <a:prstGeom prst="rect">
-            <a:avLst/>
-          </a:prstGeom>
-          <a:noFill/>
-          <a:ln/>
-        </p:spPr>
-        <p:txBody>
-          <a:bodyPr wrap="square" lIns="0" tIns="0" rIns="0" bIns="0" rtlCol="0" anchor="ctr"/>
-          <a:lstStyle/>
-          <a:p>
-            <a:pPr indent="0" marL="0">
-              <a:buNone/>
-            </a:pPr>
-            <a:r>
-              <a:rPr lang="en-US" sz="1350" b="1" dirty="0">
-                <a:solidFill>
-                  <a:srgbClr val="4F6A00"/>
-                </a:solidFill>
-                <a:latin typeface="Pretendard" pitchFamily="34" charset="0"/>
-                <a:ea typeface="Pretendard" pitchFamily="34" charset="-122"/>
-                <a:cs typeface="Pretendard" pitchFamily="34" charset="-120"/>
-              </a:rPr>
-              <a:t>임차인 이탈 위험</a:t>
-            </a:r>
-            <a:endParaRPr lang="en-US" sz="1350" dirty="0"/>
-          </a:p>
-        </p:txBody>
-      </p:sp>
-      <p:sp>
-        <p:nvSpPr>
-          <p:cNvPr id="21" name="Text 19"/>
-          <p:cNvSpPr/>
-          <p:nvPr/>
-        </p:nvSpPr>
-        <p:spPr>
-          <a:xfrm>
-            <a:off x="8350301" y="1929384"/>
-            <a:ext cx="3045866" cy="347472"/>
-          </a:xfrm>
-          <a:prstGeom prst="rect">
-            <a:avLst/>
-          </a:prstGeom>
-          <a:noFill/>
-          <a:ln/>
-        </p:spPr>
-        <p:txBody>
-          <a:bodyPr wrap="square" lIns="0" tIns="0" rIns="0" bIns="0" rtlCol="0" anchor="ctr"/>
-          <a:lstStyle/>
-          <a:p>
-            <a:pPr indent="0" marL="0">
-              <a:buNone/>
-            </a:pPr>
-            <a:r>
-              <a:rPr lang="en-US" sz="1500" b="1" dirty="0">
-                <a:solidFill>
-                  <a:srgbClr val="0F172A"/>
-                </a:solidFill>
-                <a:latin typeface="Pretendard" pitchFamily="34" charset="0"/>
-                <a:ea typeface="Pretendard" pitchFamily="34" charset="-122"/>
-                <a:cs typeface="Pretendard" pitchFamily="34" charset="-120"/>
-              </a:rPr>
-              <a:t>병의원/약국 인테리어 투자비(호실당 5억</a:t>
-            </a:r>
-            <a:endParaRPr lang="en-US" sz="1500" dirty="0"/>
-          </a:p>
-        </p:txBody>
-      </p:sp>
-      <p:sp>
-        <p:nvSpPr>
-          <p:cNvPr id="22" name="Text 20"/>
-          <p:cNvSpPr/>
-          <p:nvPr/>
-        </p:nvSpPr>
-        <p:spPr>
-          <a:xfrm>
-            <a:off x="8350301" y="2313432"/>
-            <a:ext cx="3045866" cy="2606040"/>
-          </a:xfrm>
-          <a:prstGeom prst="rect">
-            <a:avLst/>
-          </a:prstGeom>
-          <a:noFill/>
-          <a:ln/>
-        </p:spPr>
-        <p:txBody>
-          <a:bodyPr wrap="square" lIns="0" tIns="0" rIns="0" bIns="0" rtlCol="0" anchor="t"/>
-          <a:lstStyle/>
-          <a:p>
-            <a:pPr marL="342900" indent="-342900">
-              <a:buSzPct val="100000"/>
-              <a:buChar char="•"/>
-            </a:pPr>
-            <a:r>
-              <a:rPr lang="en-US" sz="1250" dirty="0">
-                <a:solidFill>
-                  <a:srgbClr val="0F172A"/>
-                </a:solidFill>
-                <a:latin typeface="Pretendard" pitchFamily="34" charset="0"/>
-                <a:ea typeface="Pretendard" pitchFamily="34" charset="-122"/>
-                <a:cs typeface="Pretendard" pitchFamily="34" charset="-120"/>
-              </a:rPr>
-              <a:t>WALE 3.5년 확보 및 만기 6개월 전 재계약 협상 개시</a:t>
-            </a:r>
-            <a:endParaRPr lang="en-US" sz="1250" dirty="0"/>
-          </a:p>
-        </p:txBody>
-      </p:sp>
-      <p:sp>
-        <p:nvSpPr>
-          <p:cNvPr id="23" name="Shape 21"/>
-          <p:cNvSpPr/>
-          <p:nvPr/>
-        </p:nvSpPr>
-        <p:spPr>
-          <a:xfrm>
-            <a:off x="566928" y="5193792"/>
-            <a:ext cx="11057839" cy="621792"/>
-          </a:xfrm>
-          <a:prstGeom prst="rect">
-            <a:avLst/>
-          </a:prstGeom>
-          <a:solidFill>
-            <a:srgbClr val="F8FAFC"/>
-          </a:solidFill>
-          <a:ln w="3810">
-            <a:solidFill>
-              <a:srgbClr val="CBD5E1"/>
-            </a:solidFill>
-            <a:prstDash val="solid"/>
-          </a:ln>
-        </p:spPr>
-      </p:sp>
-      <p:sp>
-        <p:nvSpPr>
-          <p:cNvPr id="24" name="Shape 22"/>
-          <p:cNvSpPr/>
-          <p:nvPr/>
-        </p:nvSpPr>
-        <p:spPr>
-          <a:xfrm>
-            <a:off x="566928" y="5193792"/>
-            <a:ext cx="11057839" cy="36576"/>
-          </a:xfrm>
-          <a:prstGeom prst="rect">
-            <a:avLst/>
-          </a:prstGeom>
-          <a:solidFill>
-            <a:srgbClr val="6B8E00"/>
-          </a:solidFill>
-          <a:ln/>
-        </p:spPr>
-      </p:sp>
-      <p:sp>
-        <p:nvSpPr>
-          <p:cNvPr id="25" name="Text 23"/>
-          <p:cNvSpPr/>
-          <p:nvPr/>
-        </p:nvSpPr>
-        <p:spPr>
-          <a:xfrm>
-            <a:off x="795528" y="5193792"/>
-            <a:ext cx="10600639" cy="621792"/>
-          </a:xfrm>
-          <a:prstGeom prst="rect">
-            <a:avLst/>
-          </a:prstGeom>
-          <a:noFill/>
-          <a:ln/>
-        </p:spPr>
-        <p:txBody>
-          <a:bodyPr wrap="square" lIns="0" tIns="0" rIns="0" bIns="0" rtlCol="0" anchor="ctr"/>
-          <a:lstStyle/>
-          <a:p>
-            <a:pPr indent="0" marL="0">
-              <a:buNone/>
-            </a:pPr>
-            <a:r>
-              <a:rPr lang="en-US" sz="1200" dirty="0">
-                <a:solidFill>
-                  <a:srgbClr val="0F172A"/>
-                </a:solidFill>
-                <a:latin typeface="Pretendard" pitchFamily="34" charset="0"/>
-                <a:ea typeface="Pretendard" pitchFamily="34" charset="-122"/>
-                <a:cs typeface="Pretendard" pitchFamily="34" charset="-120"/>
-              </a:rPr>
-              <a:t>실사 총평: 자산의 물리적·권리적 하자가 없으며, 세부 임대차 계약서 및 등기사항증명서는 LOI 접수 후 원본 열람 검토 여지가 있으나, 관련 법규·인허가·시설 요건의 현장 확인이 필요합니다..</a:t>
-            </a:r>
-            <a:endParaRPr lang="en-US" sz="1200" dirty="0"/>
-          </a:p>
-        </p:txBody>
-      </p:sp>
-      <p:sp>
-        <p:nvSpPr>
-          <p:cNvPr id="26" name="Text 24"/>
-          <p:cNvSpPr/>
-          <p:nvPr/>
-        </p:nvSpPr>
-        <p:spPr>
-          <a:xfrm>
-            <a:off x="566928" y="6419088"/>
-            <a:ext cx="11057839" cy="201168"/>
-          </a:xfrm>
-          <a:prstGeom prst="rect">
-            <a:avLst/>
-          </a:prstGeom>
-          <a:noFill/>
-          <a:ln/>
-        </p:spPr>
-        <p:txBody>
-          <a:bodyPr wrap="square" lIns="0" tIns="0" rIns="0" bIns="0" rtlCol="0" anchor="ctr"/>
-          <a:lstStyle/>
-          <a:p>
-            <a:pPr algn="ctr" indent="0" marL="0">
-              <a:buNone/>
-            </a:pPr>
-            <a:r>
-              <a:rPr lang="en-US" sz="750" dirty="0">
-                <a:solidFill>
-                  <a:srgbClr val="64748B"/>
-                </a:solidFill>
-                <a:latin typeface="Pretendard" pitchFamily="34" charset="0"/>
-                <a:ea typeface="Pretendard" pitchFamily="34" charset="-122"/>
-                <a:cs typeface="Pretendard" pitchFamily="34" charset="-120"/>
-              </a:rPr>
               <a:t>크리딜  ·    ·  7</a:t>
             </a:r>
             <a:endParaRPr lang="en-US" sz="750" dirty="0"/>
@@ -8350,7 +8346,7 @@
       </p:sp>
       <p:sp>
         <p:nvSpPr>
-          <p:cNvPr id="27" name="Shape 25"/>
+          <p:cNvPr id="12" name="Shape 10"/>
           <p:cNvSpPr/>
           <p:nvPr/>
         </p:nvSpPr>
@@ -9485,7 +9481,7 @@
         <p:spPr>
           <a:xfrm>
             <a:off x="566928" y="1572768"/>
-            <a:ext cx="11057839" cy="3200400"/>
+            <a:ext cx="3442106" cy="3200400"/>
           </a:xfrm>
           <a:prstGeom prst="rect">
             <a:avLst/>
@@ -9510,7 +9506,7 @@
         <p:spPr>
           <a:xfrm>
             <a:off x="566928" y="1572768"/>
-            <a:ext cx="11057839" cy="36576"/>
+            <a:ext cx="3442106" cy="36576"/>
           </a:xfrm>
           <a:prstGeom prst="rect">
             <a:avLst/>
@@ -9589,7 +9585,7 @@
         <p:spPr>
           <a:xfrm>
             <a:off x="786384" y="2304288"/>
-            <a:ext cx="10618927" cy="365760"/>
+            <a:ext cx="3003194" cy="365760"/>
           </a:xfrm>
           <a:prstGeom prst="rect">
             <a:avLst/>
@@ -9613,7 +9609,7 @@
                 <a:ea typeface="Pretendard" pitchFamily="34" charset="-122"/>
                 <a:cs typeface="Pretendard" pitchFamily="34" charset="-120"/>
               </a:rPr>
-              <a:t>{"ok"</a:t>
+              <a:t>초기 관심 표명 → 담당자 연락</a:t>
             </a:r>
             <a:endParaRPr lang="en-US" sz="1600" dirty="0"/>
           </a:p>
@@ -9628,7 +9624,7 @@
         <p:spPr>
           <a:xfrm>
             <a:off x="786384" y="2761488"/>
-            <a:ext cx="10618927" cy="1828800"/>
+            <a:ext cx="3003194" cy="1828800"/>
           </a:xfrm>
           <a:prstGeom prst="rect">
             <a:avLst/>
@@ -9643,8 +9639,165 @@
             <a:pPr indent="0" marL="0">
               <a:buNone/>
             </a:pPr>
-            <a:r>
-              <a:rPr lang="en-US" sz="1100" dirty="0">
+            <a:endParaRPr lang="en-US" sz="1100" dirty="0"/>
+          </a:p>
+        </p:txBody>
+      </p:sp>
+      <p:sp>
+        <p:nvSpPr>
+          <p:cNvPr id="11" name="Shape 9"/>
+          <p:cNvSpPr/>
+          <p:nvPr/>
+        </p:nvSpPr>
+        <p:spPr>
+          <a:xfrm>
+            <a:off x="4100474" y="3035808"/>
+            <a:ext cx="182880" cy="274320"/>
+          </a:xfrm>
+          <a:prstGeom prst="rightArrow">
+            <a:avLst/>
+          </a:prstGeom>
+          <a:solidFill>
+            <a:srgbClr val="CBD5E1"/>
+          </a:solidFill>
+          <a:ln w="6350">
+            <a:solidFill>
+              <a:srgbClr val="64748B"/>
+            </a:solidFill>
+            <a:prstDash val="solid"/>
+          </a:ln>
+        </p:spPr>
+      </p:sp>
+      <p:sp>
+        <p:nvSpPr>
+          <p:cNvPr id="12" name="Shape 10"/>
+          <p:cNvSpPr/>
+          <p:nvPr/>
+        </p:nvSpPr>
+        <p:spPr>
+          <a:xfrm>
+            <a:off x="4374794" y="1572768"/>
+            <a:ext cx="3442106" cy="3200400"/>
+          </a:xfrm>
+          <a:prstGeom prst="rect">
+            <a:avLst/>
+          </a:prstGeom>
+          <a:solidFill>
+            <a:srgbClr val="F8FAFC"/>
+          </a:solidFill>
+          <a:ln w="3810">
+            <a:solidFill>
+              <a:srgbClr val="CBD5E1"/>
+            </a:solidFill>
+            <a:prstDash val="solid"/>
+          </a:ln>
+        </p:spPr>
+      </p:sp>
+      <p:sp>
+        <p:nvSpPr>
+          <p:cNvPr id="13" name="Shape 11"/>
+          <p:cNvSpPr/>
+          <p:nvPr/>
+        </p:nvSpPr>
+        <p:spPr>
+          <a:xfrm>
+            <a:off x="4374794" y="1572768"/>
+            <a:ext cx="3442106" cy="36576"/>
+          </a:xfrm>
+          <a:prstGeom prst="rect">
+            <a:avLst/>
+          </a:prstGeom>
+          <a:solidFill>
+            <a:srgbClr val="6B8E00"/>
+          </a:solidFill>
+          <a:ln/>
+        </p:spPr>
+      </p:sp>
+      <p:sp>
+        <p:nvSpPr>
+          <p:cNvPr id="14" name="Shape 12"/>
+          <p:cNvSpPr/>
+          <p:nvPr/>
+        </p:nvSpPr>
+        <p:spPr>
+          <a:xfrm>
+            <a:off x="4594250" y="1792224"/>
+            <a:ext cx="384048" cy="384048"/>
+          </a:xfrm>
+          <a:prstGeom prst="ellipse">
+            <a:avLst/>
+          </a:prstGeom>
+          <a:solidFill>
+            <a:srgbClr val="6B8E00"/>
+          </a:solidFill>
+          <a:ln/>
+        </p:spPr>
+      </p:sp>
+      <p:sp>
+        <p:nvSpPr>
+          <p:cNvPr id="15" name="Text 13"/>
+          <p:cNvSpPr/>
+          <p:nvPr/>
+        </p:nvSpPr>
+        <p:spPr>
+          <a:xfrm>
+            <a:off x="4594250" y="1792224"/>
+            <a:ext cx="384048" cy="384048"/>
+          </a:xfrm>
+          <a:prstGeom prst="rect">
+            <a:avLst/>
+          </a:prstGeom>
+          <a:noFill/>
+          <a:ln/>
+        </p:spPr>
+        <p:txBody>
+          <a:bodyPr wrap="square" lIns="0" tIns="0" rIns="0" bIns="0" rtlCol="0" anchor="ctr"/>
+          <a:lstStyle/>
+          <a:p>
+            <a:pPr algn="ctr" indent="0" marL="0">
+              <a:buNone/>
+            </a:pPr>
+            <a:r>
+              <a:rPr lang="en-US" sz="1300" b="1" dirty="0">
+                <a:solidFill>
+                  <a:srgbClr val="FFFFFF"/>
+                </a:solidFill>
+                <a:latin typeface="Arial" pitchFamily="34" charset="0"/>
+                <a:ea typeface="Arial" pitchFamily="34" charset="-122"/>
+                <a:cs typeface="Arial" pitchFamily="34" charset="-120"/>
+              </a:rPr>
+              <a:t>STEP 2</a:t>
+            </a:r>
+            <a:endParaRPr lang="en-US" sz="1300" dirty="0"/>
+          </a:p>
+        </p:txBody>
+      </p:sp>
+      <p:sp>
+        <p:nvSpPr>
+          <p:cNvPr id="16" name="Text 14"/>
+          <p:cNvSpPr/>
+          <p:nvPr/>
+        </p:nvSpPr>
+        <p:spPr>
+          <a:xfrm>
+            <a:off x="4594250" y="2304288"/>
+            <a:ext cx="3003194" cy="365760"/>
+          </a:xfrm>
+          <a:prstGeom prst="rect">
+            <a:avLst/>
+          </a:prstGeom>
+          <a:noFill/>
+          <a:ln/>
+        </p:spPr>
+        <p:txBody>
+          <a:bodyPr wrap="square" rtlCol="0" anchor="ctr"/>
+          <a:lstStyle/>
+          <a:p>
+            <a:pPr indent="0" marL="0">
+              <a:buNone/>
+            </a:pPr>
+            <a:r>
+              <a:rPr lang="en-US" sz="1600" b="1" dirty="0">
                 <a:solidFill>
                   <a:srgbClr val="0F172A"/>
                 </a:solidFill>
@@ -9652,22 +9805,140 @@
                 <a:ea typeface="Pretendard" pitchFamily="34" charset="-122"/>
                 <a:cs typeface="Pretendard" pitchFamily="34" charset="-120"/>
               </a:rPr>
-              <a:t>true,"mocked":true,"extractedFields":{"area_signal":"역삼","asset_type":"오피스빌딩","price_band":"300억","size_signal":"3000평(약 9917.4㎡)"},"extractedFacts":{"region":"역삼","exactAddressCandidate":"역삼동 742-1","assetType":"오피스빌딩","priceText":"300억","sizeText":"3000평(약 9917.4㎡)","currentUse":"오피스","currentUseSignal":"근린생활시설","leaseSignal":"임대중","vacancySignal":"공실없음","tenantNames":["쿠팡","네이버"],"unitRentTexts":["301호: 1500만"],"sellerMotivationText":"자산 효율화","brokerNotes":["초역세권 매물"]},"detectedSensitiveFields":["exact_address","tenant_name"],"ambiguousFields":[],"warnings":[],"areaSignal":"역삼","assetType":"오피스빌딩","priceBand":"300억","sizeSignal":"3000평(약 9917.4㎡)","dealType":"매각","buildingName":"역삼 센트럴타워","exactAddress":"역삼동 742-1","totalFloorArea":9917.3,"buildYear":2015,"currentUseSignal":"근린생활시설","vacancySignal":"공실 없음","fitSummary":"초역세권 근생 빌딩으로 시행/사옥 매입에 최적화","cautionSummary":"주요 임차 업종 만기 조율 필요","hiddenFields":["exact_address","seller_motivation"],"confidence":{"areaSignal":"confirmed","assetType":"confirmed","priceBand":"ai_hypothesis","fitSummary":"ai_hypothesis"},"missingData":["sizeSignal"],"boundaryNote":"본 자료는 실거래 통계 기반 참고치입니다.","buyerType":"법인 사옥형","budgetRange":{"min":50,"max":80,"display":"50억~80억"},"preferredRegions":["강남","성수"],"assetTypes":["꼬마빌딩","사옥용"],"purchasePurpose":"사옥용 매입","mustHave":["초역세권","주차"],"niceToHave":["테라스","루프탑"],"riskTolerance":"medium","financingNote":"자본금 50% 준비","missingQuestions":["구체적인 입주 시기가 언제인가요?","선호하는 수익률이 있나요?"],"privacyNotes":["연락처 비공개"],"fitReasons":["매수자 예산(50-80억)에 부합하는 매물입니다.","요청하신 성수/강남 권역에 해당합니다."],"cautionReasons":["요청한 용도와 달리 명도 협의가 다소 필요합니다."],"recommendedNextAction":"현장 답사 제안","kakaoMessage":"안녕하세요! 요청하신 조건에 부합하는 추천 매물이 있어 안내해 드립니다. 확인해보시고 피드백 부탁드립니다.","title":"강남 역삼역 초역세권 오피스 사옥용 빌딩 매각","shortSummary":"역삼역 도보 5분 거리의 준신축급 대형 오피스빌딩입니다.","dealPoints":["초역세권","사옥 최적"],"cautionPoints":["명도 조율 필요"],"hiddenInfoNotice":["보증금 및 지번은 인가 후 확인 가능"],"gateMessage":"G1 등급 등록이 필요합니다.","kakaoText":"강남 역삼역 오피스 빌딩 매각 안내입니다.","exactUnitCandidate":"101호","floor":"1층","areaSqmText":"150㎡","spaceType":"office","depositText":"5000만","monthlyRentText":"400만","maintenanceFeeText":"50만","availableFromText":"즉시입주","leaseTermMonthsText":"24","incentivesText":"렌트프리 2개월","restrictions":[],"landlordIdentity":"김성수","currentTenant":"스타트업","vacancyReason":"이전 확장","rentNegotiation":"협의 가능","region":"성수동","areaSqm":150,"deposit":5000,"monthlyRent":400,"maintenanceFee":50,"availableFrom":"즉시입주","leaseTermMonths":24,"incentives":{"rentFreeMonths":2,"interiorSupport":"일부 인테리어 지원","freeRentDetail":"렌트프리 2개월 지원"},"shortSummaryLease":"성수역 도보 5분 거리 1층 리테일 상가 매물입니다."}</a:t>
-            </a:r>
+              <a:t>NDA 체결 → 임차인 정보 및 임대차계약서 제공</a:t>
+            </a:r>
+            <a:endParaRPr lang="en-US" sz="1600" dirty="0"/>
+          </a:p>
+        </p:txBody>
+      </p:sp>
+      <p:sp>
+        <p:nvSpPr>
+          <p:cNvPr id="17" name="Text 15"/>
+          <p:cNvSpPr/>
+          <p:nvPr/>
+        </p:nvSpPr>
+        <p:spPr>
+          <a:xfrm>
+            <a:off x="4594250" y="2761488"/>
+            <a:ext cx="3003194" cy="1828800"/>
+          </a:xfrm>
+          <a:prstGeom prst="rect">
+            <a:avLst/>
+          </a:prstGeom>
+          <a:noFill/>
+          <a:ln/>
+        </p:spPr>
+        <p:txBody>
+          <a:bodyPr wrap="square" rtlCol="0" anchor="t"/>
+          <a:lstStyle/>
+          <a:p>
+            <a:pPr indent="0" marL="0">
+              <a:buNone/>
+            </a:pPr>
             <a:endParaRPr lang="en-US" sz="1100" dirty="0"/>
           </a:p>
         </p:txBody>
       </p:sp>
       <p:sp>
         <p:nvSpPr>
-          <p:cNvPr id="11" name="Text 9"/>
-          <p:cNvSpPr/>
-          <p:nvPr/>
-        </p:nvSpPr>
-        <p:spPr>
-          <a:xfrm>
-            <a:off x="566928" y="6419088"/>
-            <a:ext cx="11057839" cy="201168"/>
+          <p:cNvPr id="18" name="Shape 16"/>
+          <p:cNvSpPr/>
+          <p:nvPr/>
+        </p:nvSpPr>
+        <p:spPr>
+          <a:xfrm>
+            <a:off x="7908341" y="3035808"/>
+            <a:ext cx="182880" cy="274320"/>
+          </a:xfrm>
+          <a:prstGeom prst="rightArrow">
+            <a:avLst/>
+          </a:prstGeom>
+          <a:solidFill>
+            <a:srgbClr val="CBD5E1"/>
+          </a:solidFill>
+          <a:ln w="6350">
+            <a:solidFill>
+              <a:srgbClr val="64748B"/>
+            </a:solidFill>
+            <a:prstDash val="solid"/>
+          </a:ln>
+        </p:spPr>
+      </p:sp>
+      <p:sp>
+        <p:nvSpPr>
+          <p:cNvPr id="19" name="Shape 17"/>
+          <p:cNvSpPr/>
+          <p:nvPr/>
+        </p:nvSpPr>
+        <p:spPr>
+          <a:xfrm>
+            <a:off x="8182661" y="1572768"/>
+            <a:ext cx="3442106" cy="3200400"/>
+          </a:xfrm>
+          <a:prstGeom prst="rect">
+            <a:avLst/>
+          </a:prstGeom>
+          <a:solidFill>
+            <a:srgbClr val="F8FAFC"/>
+          </a:solidFill>
+          <a:ln w="3810">
+            <a:solidFill>
+              <a:srgbClr val="CBD5E1"/>
+            </a:solidFill>
+            <a:prstDash val="solid"/>
+          </a:ln>
+        </p:spPr>
+      </p:sp>
+      <p:sp>
+        <p:nvSpPr>
+          <p:cNvPr id="20" name="Shape 18"/>
+          <p:cNvSpPr/>
+          <p:nvPr/>
+        </p:nvSpPr>
+        <p:spPr>
+          <a:xfrm>
+            <a:off x="8182661" y="1572768"/>
+            <a:ext cx="3442106" cy="36576"/>
+          </a:xfrm>
+          <a:prstGeom prst="rect">
+            <a:avLst/>
+          </a:prstGeom>
+          <a:solidFill>
+            <a:srgbClr val="6B8E00"/>
+          </a:solidFill>
+          <a:ln/>
+        </p:spPr>
+      </p:sp>
+      <p:sp>
+        <p:nvSpPr>
+          <p:cNvPr id="21" name="Shape 19"/>
+          <p:cNvSpPr/>
+          <p:nvPr/>
+        </p:nvSpPr>
+        <p:spPr>
+          <a:xfrm>
+            <a:off x="8402117" y="1792224"/>
+            <a:ext cx="384048" cy="384048"/>
+          </a:xfrm>
+          <a:prstGeom prst="ellipse">
+            <a:avLst/>
+          </a:prstGeom>
+          <a:solidFill>
+            <a:srgbClr val="6B8E00"/>
+          </a:solidFill>
+          <a:ln/>
+        </p:spPr>
+      </p:sp>
+      <p:sp>
+        <p:nvSpPr>
+          <p:cNvPr id="22" name="Text 20"/>
+          <p:cNvSpPr/>
+          <p:nvPr/>
+        </p:nvSpPr>
+        <p:spPr>
+          <a:xfrm>
+            <a:off x="8402117" y="1792224"/>
+            <a:ext cx="384048" cy="384048"/>
           </a:xfrm>
           <a:prstGeom prst="rect">
             <a:avLst/>
@@ -9683,14 +9954,120 @@
               <a:buNone/>
             </a:pPr>
             <a:r>
-              <a:rPr lang="en-US" sz="750" dirty="0">
-                <a:solidFill>
-                  <a:srgbClr val="64748B"/>
+              <a:rPr lang="en-US" sz="1300" b="1" dirty="0">
+                <a:solidFill>
+                  <a:srgbClr val="FFFFFF"/>
+                </a:solidFill>
+                <a:latin typeface="Arial" pitchFamily="34" charset="0"/>
+                <a:ea typeface="Arial" pitchFamily="34" charset="-122"/>
+                <a:cs typeface="Arial" pitchFamily="34" charset="-120"/>
+              </a:rPr>
+              <a:t>STEP 3</a:t>
+            </a:r>
+            <a:endParaRPr lang="en-US" sz="1300" dirty="0"/>
+          </a:p>
+        </p:txBody>
+      </p:sp>
+      <p:sp>
+        <p:nvSpPr>
+          <p:cNvPr id="23" name="Text 21"/>
+          <p:cNvSpPr/>
+          <p:nvPr/>
+        </p:nvSpPr>
+        <p:spPr>
+          <a:xfrm>
+            <a:off x="8402117" y="2304288"/>
+            <a:ext cx="3003194" cy="365760"/>
+          </a:xfrm>
+          <a:prstGeom prst="rect">
+            <a:avLst/>
+          </a:prstGeom>
+          <a:noFill/>
+          <a:ln/>
+        </p:spPr>
+        <p:txBody>
+          <a:bodyPr wrap="square" rtlCol="0" anchor="ctr"/>
+          <a:lstStyle/>
+          <a:p>
+            <a:pPr indent="0" marL="0">
+              <a:buNone/>
+            </a:pPr>
+            <a:r>
+              <a:rPr lang="en-US" sz="1600" b="1" dirty="0">
+                <a:solidFill>
+                  <a:srgbClr val="0F172A"/>
                 </a:solidFill>
                 <a:latin typeface="Pretendard" pitchFamily="34" charset="0"/>
                 <a:ea typeface="Pretendard" pitchFamily="34" charset="-122"/>
                 <a:cs typeface="Pretendard" pitchFamily="34" charset="-120"/>
               </a:rPr>
+              <a:t>현장 실사 일정 조율 → 건물 컨디션 및 설비 직접 확인</a:t>
+            </a:r>
+            <a:endParaRPr lang="en-US" sz="1600" dirty="0"/>
+          </a:p>
+        </p:txBody>
+      </p:sp>
+      <p:sp>
+        <p:nvSpPr>
+          <p:cNvPr id="24" name="Text 22"/>
+          <p:cNvSpPr/>
+          <p:nvPr/>
+        </p:nvSpPr>
+        <p:spPr>
+          <a:xfrm>
+            <a:off x="8402117" y="2761488"/>
+            <a:ext cx="3003194" cy="1828800"/>
+          </a:xfrm>
+          <a:prstGeom prst="rect">
+            <a:avLst/>
+          </a:prstGeom>
+          <a:noFill/>
+          <a:ln/>
+        </p:spPr>
+        <p:txBody>
+          <a:bodyPr wrap="square" rtlCol="0" anchor="t"/>
+          <a:lstStyle/>
+          <a:p>
+            <a:pPr indent="0" marL="0">
+              <a:buNone/>
+            </a:pPr>
+            <a:endParaRPr lang="en-US" sz="1100" dirty="0"/>
+          </a:p>
+        </p:txBody>
+      </p:sp>
+      <p:sp>
+        <p:nvSpPr>
+          <p:cNvPr id="25" name="Text 23"/>
+          <p:cNvSpPr/>
+          <p:nvPr/>
+        </p:nvSpPr>
+        <p:spPr>
+          <a:xfrm>
+            <a:off x="566928" y="6419088"/>
+            <a:ext cx="11057839" cy="201168"/>
+          </a:xfrm>
+          <a:prstGeom prst="rect">
+            <a:avLst/>
+          </a:prstGeom>
+          <a:noFill/>
+          <a:ln/>
+        </p:spPr>
+        <p:txBody>
+          <a:bodyPr wrap="square" lIns="0" tIns="0" rIns="0" bIns="0" rtlCol="0" anchor="ctr"/>
+          <a:lstStyle/>
+          <a:p>
+            <a:pPr algn="ctr" indent="0" marL="0">
+              <a:buNone/>
+            </a:pPr>
+            <a:r>
+              <a:rPr lang="en-US" sz="750" dirty="0">
+                <a:solidFill>
+                  <a:srgbClr val="64748B"/>
+                </a:solidFill>
+                <a:latin typeface="Pretendard" pitchFamily="34" charset="0"/>
+                <a:ea typeface="Pretendard" pitchFamily="34" charset="-122"/>
+                <a:cs typeface="Pretendard" pitchFamily="34" charset="-120"/>
+              </a:rPr>
               <a:t>크리딜  ·    ·  9</a:t>
             </a:r>
             <a:endParaRPr lang="en-US" sz="750" dirty="0"/>
@@ -9699,7 +10076,7 @@
       </p:sp>
       <p:sp>
         <p:nvSpPr>
-          <p:cNvPr id="12" name="Shape 10"/>
+          <p:cNvPr id="26" name="Shape 24"/>
           <p:cNvSpPr/>
           <p:nvPr/>
         </p:nvSpPr>

--- a/docs/test/stress/e2e-outputs/income_case14_bangi_discount_basic.pptx
+++ b/docs/test/stress/e2e-outputs/income_case14_bangi_discount_basic.pptx
@@ -5596,7 +5596,7 @@
                 <a:ea typeface="Pretendard" pitchFamily="34" charset="-122"/>
                 <a:cs typeface="Pretendard" pitchFamily="34" charset="-120"/>
               </a:rPr>
-              <a:t>소재지</a:t>
+              <a:t>{"ok"</a:t>
             </a:r>
             <a:endParaRPr lang="en-US" sz="1400" dirty="0"/>
           </a:p>
@@ -5638,7 +5638,7 @@
                 <a:ea typeface="Pretendard" pitchFamily="34" charset="-122"/>
                 <a:cs typeface="Pretendard" pitchFamily="34" charset="-120"/>
               </a:rPr>
-              <a:t>송파권역</a:t>
+              <a:t>true,"mocked":true,"extractedFields":{"area_signal":"역삼","asset_type":"오피스빌딩","price_band":"300억","size_signal":"3000평(약 9917.4㎡)"},"extractedFacts":{"region":"역삼","exactAddressCandidate":"역삼동 742-1","assetType":"오피스빌딩","priceText":"300억","sizeText":"3000평(약 9917.4㎡)","currentUse":"오피스","currentUseSignal":"근린생활시설","leaseSignal":"임대중","vacancySignal":"공실없음","tenantNames":"쿠팡","네이버","unitRentTexts":"301호: 1500만","sellerMotivationText":"자산 효율화","brokerNotes":"초역세권 매물"},"detectedSensitiveFields":"exact_address","tenant_name","ambiguousFields":,"warnings":,"areaSignal":"역삼","assetType":"오피스빌딩","priceBand":"300억","sizeSignal":"3000평(약 9917.4㎡)","dealType":"매각","buildingName":"역삼 센트럴타워","exactAddress":"역삼동 742-1","totalFloorArea":9917.3,"buildYear":2015,"currentUseSignal":"근린생활시설","vacancySignal":"공실 없음","fitSummary":"초역세권 근생 빌딩으로 시행/사옥 매입에 최적화","cautionSummary":"주요 임차 업종 만기 조율 필요","hiddenFields":"exact_address","seller_motivation","confidence":{"areaSignal":"confirmed","assetType":"confirmed","priceBand":"ai_hypothesis","fitSummary":"ai_hypothesis"},"missingData":"sizeSignal","boundaryNote":"본 자료는 실거래 통계 기반 참고치입니다.","buyerType":"법인 사옥형","budgetRange":{"min":50,"max":80,"display":"50억~80억"},"preferredRegions":"강남","성수","assetTypes":"꼬마빌딩","사옥용","purchasePurpose":"사옥용 매입","mustHave":"초역세권","주차","niceToHave":"테라스","루프탑","riskTolerance":"medium","financingNote":"자본금 50% 준비","missingQuestions":"구체적인 입주 시기가 언제인가요?","선호하는 수익률이 있나요?","privacyNotes":"연락처 비공개","fitReasons":"매수자 예산(50-80억)에 부합하는 매물입니다.","요청하신 성수/강남 권역에 해당합니다.","cautionReasons":"요청한 용도와 달리 명도 협의가 다소 필요합니다.","recommendedNextAction":"현장 답사 제안","kakaoMessage":"안녕하세요! 요청하신 조건에 부합하는 추천 매물이 있어 안내해 드립니다. 확인해보시고 피드백 부탁드립니다.","title":"강남 역삼역 초역세권 오피스 사옥용 빌딩 매각","shortSummary":"역삼역 도보 5분 거리의 준신축급 대형 오피스빌딩입니다.","dealPoints":"초역세권","사옥 최적","cautionPoints":"명도 조율 필요","hiddenInfoNotice":"보증금 및 지번은 인가 후 확인 가능","gateMessage":"G1 등급 등록이 필요합니다.","kakaoText":"강남 역삼역 오피스 빌딩 매각 안내입니다.","exactUnitCandidate":"101호","floor":"1층","areaSqmText":"150㎡","spaceType":"office","depositText":"5000만","monthlyRentText":"400만","maintenanceFeeText":"50만","availableFromText":"즉시입주","leaseTermMonthsText":"24","incentivesText":"렌트프리 2개월","restrictions":,"landlordIdentity":"김성수","currentTenant":"스타트업","vacancyReason":"이전 확장","rentNegotiation":"협의 가능","region":"성수동","areaSqm":150,"deposit":5000,"monthlyRent":400,"maintenanceFee":50,"availableFrom":"즉시입주","leaseTermMonths":24,"incentives":{"rentFreeMonths":2,"interiorSupport":"일부 인테리어 지원","freeRentDetail":"렌트프리 2개월 지원"},"shortSummaryLease":"성수역 도보 5분 거리 1층 리테일 상가 매물입니다."}</a:t>
             </a:r>
             <a:endParaRPr lang="en-US" sz="1400" dirty="0"/>
           </a:p>
@@ -5647,862 +5647,6 @@
       <p:sp>
         <p:nvSpPr>
           <p:cNvPr id="9" name="Shape 7"/>
-          <p:cNvSpPr/>
-          <p:nvPr/>
-        </p:nvSpPr>
-        <p:spPr>
-          <a:xfrm>
-            <a:off x="566928" y="2048256"/>
-            <a:ext cx="6858000" cy="0"/>
-          </a:xfrm>
-          <a:prstGeom prst="line">
-            <a:avLst/>
-          </a:prstGeom>
-          <a:noFill/>
-          <a:ln w="3810">
-            <a:solidFill>
-              <a:srgbClr val="CBD5E0"/>
-            </a:solidFill>
-            <a:prstDash val="solid"/>
-          </a:ln>
-        </p:spPr>
-      </p:sp>
-      <p:sp>
-        <p:nvSpPr>
-          <p:cNvPr id="10" name="Text 8"/>
-          <p:cNvSpPr/>
-          <p:nvPr/>
-        </p:nvSpPr>
-        <p:spPr>
-          <a:xfrm>
-            <a:off x="566928" y="2048256"/>
-            <a:ext cx="2606040" cy="402336"/>
-          </a:xfrm>
-          <a:prstGeom prst="rect">
-            <a:avLst/>
-          </a:prstGeom>
-          <a:noFill/>
-          <a:ln/>
-        </p:spPr>
-        <p:txBody>
-          <a:bodyPr wrap="square" lIns="0" tIns="0" rIns="0" bIns="0" rtlCol="0" anchor="ctr"/>
-          <a:lstStyle/>
-          <a:p>
-            <a:pPr indent="0" marL="0">
-              <a:lnSpc>
-                <a:spcPct val="120000"/>
-              </a:lnSpc>
-              <a:buNone/>
-            </a:pPr>
-            <a:r>
-              <a:rPr lang="en-US" sz="1400" dirty="0">
-                <a:solidFill>
-                  <a:srgbClr val="718096"/>
-                </a:solidFill>
-                <a:latin typeface="Pretendard" pitchFamily="34" charset="0"/>
-                <a:ea typeface="Pretendard" pitchFamily="34" charset="-122"/>
-                <a:cs typeface="Pretendard" pitchFamily="34" charset="-120"/>
-              </a:rPr>
-              <a:t>주요 용도</a:t>
-            </a:r>
-            <a:endParaRPr lang="en-US" sz="1400" dirty="0"/>
-          </a:p>
-        </p:txBody>
-      </p:sp>
-      <p:sp>
-        <p:nvSpPr>
-          <p:cNvPr id="11" name="Text 9"/>
-          <p:cNvSpPr/>
-          <p:nvPr/>
-        </p:nvSpPr>
-        <p:spPr>
-          <a:xfrm>
-            <a:off x="3172968" y="2048256"/>
-            <a:ext cx="4251960" cy="402336"/>
-          </a:xfrm>
-          <a:prstGeom prst="rect">
-            <a:avLst/>
-          </a:prstGeom>
-          <a:noFill/>
-          <a:ln/>
-        </p:spPr>
-        <p:txBody>
-          <a:bodyPr wrap="square" lIns="0" tIns="0" rIns="0" bIns="0" rtlCol="0" anchor="ctr"/>
-          <a:lstStyle/>
-          <a:p>
-            <a:pPr indent="0" marL="0">
-              <a:lnSpc>
-                <a:spcPct val="120000"/>
-              </a:lnSpc>
-              <a:buNone/>
-            </a:pPr>
-            <a:r>
-              <a:rPr lang="en-US" sz="1400" b="1" dirty="0">
-                <a:solidFill>
-                  <a:srgbClr val="10161F"/>
-                </a:solidFill>
-                <a:latin typeface="Pretendard" pitchFamily="34" charset="0"/>
-                <a:ea typeface="Pretendard" pitchFamily="34" charset="-122"/>
-                <a:cs typeface="Pretendard" pitchFamily="34" charset="-120"/>
-              </a:rPr>
-              <a:t>근린생활시설</a:t>
-            </a:r>
-            <a:endParaRPr lang="en-US" sz="1400" dirty="0"/>
-          </a:p>
-        </p:txBody>
-      </p:sp>
-      <p:sp>
-        <p:nvSpPr>
-          <p:cNvPr id="12" name="Shape 10"/>
-          <p:cNvSpPr/>
-          <p:nvPr/>
-        </p:nvSpPr>
-        <p:spPr>
-          <a:xfrm>
-            <a:off x="566928" y="2450592"/>
-            <a:ext cx="6858000" cy="0"/>
-          </a:xfrm>
-          <a:prstGeom prst="line">
-            <a:avLst/>
-          </a:prstGeom>
-          <a:noFill/>
-          <a:ln w="3810">
-            <a:solidFill>
-              <a:srgbClr val="CBD5E0"/>
-            </a:solidFill>
-            <a:prstDash val="solid"/>
-          </a:ln>
-        </p:spPr>
-      </p:sp>
-      <p:sp>
-        <p:nvSpPr>
-          <p:cNvPr id="13" name="Text 11"/>
-          <p:cNvSpPr/>
-          <p:nvPr/>
-        </p:nvSpPr>
-        <p:spPr>
-          <a:xfrm>
-            <a:off x="566928" y="2450592"/>
-            <a:ext cx="2606040" cy="402336"/>
-          </a:xfrm>
-          <a:prstGeom prst="rect">
-            <a:avLst/>
-          </a:prstGeom>
-          <a:noFill/>
-          <a:ln/>
-        </p:spPr>
-        <p:txBody>
-          <a:bodyPr wrap="square" lIns="0" tIns="0" rIns="0" bIns="0" rtlCol="0" anchor="ctr"/>
-          <a:lstStyle/>
-          <a:p>
-            <a:pPr indent="0" marL="0">
-              <a:lnSpc>
-                <a:spcPct val="120000"/>
-              </a:lnSpc>
-              <a:buNone/>
-            </a:pPr>
-            <a:r>
-              <a:rPr lang="en-US" sz="1400" dirty="0">
-                <a:solidFill>
-                  <a:srgbClr val="718096"/>
-                </a:solidFill>
-                <a:latin typeface="Pretendard" pitchFamily="34" charset="0"/>
-                <a:ea typeface="Pretendard" pitchFamily="34" charset="-122"/>
-                <a:cs typeface="Pretendard" pitchFamily="34" charset="-120"/>
-              </a:rPr>
-              <a:t>연면적</a:t>
-            </a:r>
-            <a:endParaRPr lang="en-US" sz="1400" dirty="0"/>
-          </a:p>
-        </p:txBody>
-      </p:sp>
-      <p:sp>
-        <p:nvSpPr>
-          <p:cNvPr id="14" name="Text 12"/>
-          <p:cNvSpPr/>
-          <p:nvPr/>
-        </p:nvSpPr>
-        <p:spPr>
-          <a:xfrm>
-            <a:off x="3172968" y="2450592"/>
-            <a:ext cx="4251960" cy="402336"/>
-          </a:xfrm>
-          <a:prstGeom prst="rect">
-            <a:avLst/>
-          </a:prstGeom>
-          <a:noFill/>
-          <a:ln/>
-        </p:spPr>
-        <p:txBody>
-          <a:bodyPr wrap="square" lIns="0" tIns="0" rIns="0" bIns="0" rtlCol="0" anchor="ctr"/>
-          <a:lstStyle/>
-          <a:p>
-            <a:pPr indent="0" marL="0">
-              <a:lnSpc>
-                <a:spcPct val="120000"/>
-              </a:lnSpc>
-              <a:buNone/>
-            </a:pPr>
-            <a:r>
-              <a:rPr lang="en-US" sz="1400" b="1" dirty="0">
-                <a:solidFill>
-                  <a:srgbClr val="10161F"/>
-                </a:solidFill>
-                <a:latin typeface="Pretendard" pitchFamily="34" charset="0"/>
-                <a:ea typeface="Pretendard" pitchFamily="34" charset="-122"/>
-                <a:cs typeface="Pretendard" pitchFamily="34" charset="-120"/>
-              </a:rPr>
-              <a:t>5,000㎡ (약 1513평(약 5001.7㎡))</a:t>
-            </a:r>
-            <a:endParaRPr lang="en-US" sz="1400" dirty="0"/>
-          </a:p>
-        </p:txBody>
-      </p:sp>
-      <p:sp>
-        <p:nvSpPr>
-          <p:cNvPr id="15" name="Shape 13"/>
-          <p:cNvSpPr/>
-          <p:nvPr/>
-        </p:nvSpPr>
-        <p:spPr>
-          <a:xfrm>
-            <a:off x="566928" y="2852928"/>
-            <a:ext cx="6858000" cy="0"/>
-          </a:xfrm>
-          <a:prstGeom prst="line">
-            <a:avLst/>
-          </a:prstGeom>
-          <a:noFill/>
-          <a:ln w="3810">
-            <a:solidFill>
-              <a:srgbClr val="CBD5E0"/>
-            </a:solidFill>
-            <a:prstDash val="solid"/>
-          </a:ln>
-        </p:spPr>
-      </p:sp>
-      <p:sp>
-        <p:nvSpPr>
-          <p:cNvPr id="16" name="Text 14"/>
-          <p:cNvSpPr/>
-          <p:nvPr/>
-        </p:nvSpPr>
-        <p:spPr>
-          <a:xfrm>
-            <a:off x="566928" y="2852928"/>
-            <a:ext cx="2606040" cy="402336"/>
-          </a:xfrm>
-          <a:prstGeom prst="rect">
-            <a:avLst/>
-          </a:prstGeom>
-          <a:noFill/>
-          <a:ln/>
-        </p:spPr>
-        <p:txBody>
-          <a:bodyPr wrap="square" lIns="0" tIns="0" rIns="0" bIns="0" rtlCol="0" anchor="ctr"/>
-          <a:lstStyle/>
-          <a:p>
-            <a:pPr indent="0" marL="0">
-              <a:lnSpc>
-                <a:spcPct val="120000"/>
-              </a:lnSpc>
-              <a:buNone/>
-            </a:pPr>
-            <a:r>
-              <a:rPr lang="en-US" sz="1400" dirty="0">
-                <a:solidFill>
-                  <a:srgbClr val="718096"/>
-                </a:solidFill>
-                <a:latin typeface="Pretendard" pitchFamily="34" charset="0"/>
-                <a:ea typeface="Pretendard" pitchFamily="34" charset="-122"/>
-                <a:cs typeface="Pretendard" pitchFamily="34" charset="-120"/>
-              </a:rPr>
-              <a:t>대지면적</a:t>
-            </a:r>
-            <a:endParaRPr lang="en-US" sz="1400" dirty="0"/>
-          </a:p>
-        </p:txBody>
-      </p:sp>
-      <p:sp>
-        <p:nvSpPr>
-          <p:cNvPr id="17" name="Text 15"/>
-          <p:cNvSpPr/>
-          <p:nvPr/>
-        </p:nvSpPr>
-        <p:spPr>
-          <a:xfrm>
-            <a:off x="3172968" y="2852928"/>
-            <a:ext cx="4251960" cy="402336"/>
-          </a:xfrm>
-          <a:prstGeom prst="rect">
-            <a:avLst/>
-          </a:prstGeom>
-          <a:noFill/>
-          <a:ln/>
-        </p:spPr>
-        <p:txBody>
-          <a:bodyPr wrap="square" lIns="0" tIns="0" rIns="0" bIns="0" rtlCol="0" anchor="ctr"/>
-          <a:lstStyle/>
-          <a:p>
-            <a:pPr indent="0" marL="0">
-              <a:lnSpc>
-                <a:spcPct val="120000"/>
-              </a:lnSpc>
-              <a:buNone/>
-            </a:pPr>
-            <a:r>
-              <a:rPr lang="en-US" sz="1400" b="1" dirty="0">
-                <a:solidFill>
-                  <a:srgbClr val="10161F"/>
-                </a:solidFill>
-                <a:latin typeface="Pretendard" pitchFamily="34" charset="0"/>
-                <a:ea typeface="Pretendard" pitchFamily="34" charset="-122"/>
-                <a:cs typeface="Pretendard" pitchFamily="34" charset="-120"/>
-              </a:rPr>
-              <a:t>1,000㎡ (약 303평(약 1001.7㎡))</a:t>
-            </a:r>
-            <a:endParaRPr lang="en-US" sz="1400" dirty="0"/>
-          </a:p>
-        </p:txBody>
-      </p:sp>
-      <p:sp>
-        <p:nvSpPr>
-          <p:cNvPr id="18" name="Shape 16"/>
-          <p:cNvSpPr/>
-          <p:nvPr/>
-        </p:nvSpPr>
-        <p:spPr>
-          <a:xfrm>
-            <a:off x="566928" y="3255264"/>
-            <a:ext cx="6858000" cy="0"/>
-          </a:xfrm>
-          <a:prstGeom prst="line">
-            <a:avLst/>
-          </a:prstGeom>
-          <a:noFill/>
-          <a:ln w="3810">
-            <a:solidFill>
-              <a:srgbClr val="CBD5E0"/>
-            </a:solidFill>
-            <a:prstDash val="solid"/>
-          </a:ln>
-        </p:spPr>
-      </p:sp>
-      <p:sp>
-        <p:nvSpPr>
-          <p:cNvPr id="19" name="Text 17"/>
-          <p:cNvSpPr/>
-          <p:nvPr/>
-        </p:nvSpPr>
-        <p:spPr>
-          <a:xfrm>
-            <a:off x="566928" y="3255264"/>
-            <a:ext cx="2606040" cy="402336"/>
-          </a:xfrm>
-          <a:prstGeom prst="rect">
-            <a:avLst/>
-          </a:prstGeom>
-          <a:noFill/>
-          <a:ln/>
-        </p:spPr>
-        <p:txBody>
-          <a:bodyPr wrap="square" lIns="0" tIns="0" rIns="0" bIns="0" rtlCol="0" anchor="ctr"/>
-          <a:lstStyle/>
-          <a:p>
-            <a:pPr indent="0" marL="0">
-              <a:lnSpc>
-                <a:spcPct val="120000"/>
-              </a:lnSpc>
-              <a:buNone/>
-            </a:pPr>
-            <a:r>
-              <a:rPr lang="en-US" sz="1400" dirty="0">
-                <a:solidFill>
-                  <a:srgbClr val="718096"/>
-                </a:solidFill>
-                <a:latin typeface="Pretendard" pitchFamily="34" charset="0"/>
-                <a:ea typeface="Pretendard" pitchFamily="34" charset="-122"/>
-                <a:cs typeface="Pretendard" pitchFamily="34" charset="-120"/>
-              </a:rPr>
-              <a:t>용도지역</a:t>
-            </a:r>
-            <a:endParaRPr lang="en-US" sz="1400" dirty="0"/>
-          </a:p>
-        </p:txBody>
-      </p:sp>
-      <p:sp>
-        <p:nvSpPr>
-          <p:cNvPr id="20" name="Text 18"/>
-          <p:cNvSpPr/>
-          <p:nvPr/>
-        </p:nvSpPr>
-        <p:spPr>
-          <a:xfrm>
-            <a:off x="3172968" y="3255264"/>
-            <a:ext cx="4251960" cy="402336"/>
-          </a:xfrm>
-          <a:prstGeom prst="rect">
-            <a:avLst/>
-          </a:prstGeom>
-          <a:noFill/>
-          <a:ln/>
-        </p:spPr>
-        <p:txBody>
-          <a:bodyPr wrap="square" lIns="0" tIns="0" rIns="0" bIns="0" rtlCol="0" anchor="ctr"/>
-          <a:lstStyle/>
-          <a:p>
-            <a:pPr indent="0" marL="0">
-              <a:lnSpc>
-                <a:spcPct val="120000"/>
-              </a:lnSpc>
-              <a:buNone/>
-            </a:pPr>
-            <a:r>
-              <a:rPr lang="en-US" sz="1400" b="1" dirty="0">
-                <a:solidFill>
-                  <a:srgbClr val="10161F"/>
-                </a:solidFill>
-                <a:latin typeface="Pretendard" pitchFamily="34" charset="0"/>
-                <a:ea typeface="Pretendard" pitchFamily="34" charset="-122"/>
-                <a:cs typeface="Pretendard" pitchFamily="34" charset="-120"/>
-              </a:rPr>
-              <a:t>일반상업지역</a:t>
-            </a:r>
-            <a:endParaRPr lang="en-US" sz="1400" dirty="0"/>
-          </a:p>
-        </p:txBody>
-      </p:sp>
-      <p:sp>
-        <p:nvSpPr>
-          <p:cNvPr id="21" name="Shape 19"/>
-          <p:cNvSpPr/>
-          <p:nvPr/>
-        </p:nvSpPr>
-        <p:spPr>
-          <a:xfrm>
-            <a:off x="566928" y="3657600"/>
-            <a:ext cx="6858000" cy="0"/>
-          </a:xfrm>
-          <a:prstGeom prst="line">
-            <a:avLst/>
-          </a:prstGeom>
-          <a:noFill/>
-          <a:ln w="3810">
-            <a:solidFill>
-              <a:srgbClr val="CBD5E0"/>
-            </a:solidFill>
-            <a:prstDash val="solid"/>
-          </a:ln>
-        </p:spPr>
-      </p:sp>
-      <p:sp>
-        <p:nvSpPr>
-          <p:cNvPr id="22" name="Text 20"/>
-          <p:cNvSpPr/>
-          <p:nvPr/>
-        </p:nvSpPr>
-        <p:spPr>
-          <a:xfrm>
-            <a:off x="566928" y="3657600"/>
-            <a:ext cx="2606040" cy="402336"/>
-          </a:xfrm>
-          <a:prstGeom prst="rect">
-            <a:avLst/>
-          </a:prstGeom>
-          <a:noFill/>
-          <a:ln/>
-        </p:spPr>
-        <p:txBody>
-          <a:bodyPr wrap="square" lIns="0" tIns="0" rIns="0" bIns="0" rtlCol="0" anchor="ctr"/>
-          <a:lstStyle/>
-          <a:p>
-            <a:pPr indent="0" marL="0">
-              <a:lnSpc>
-                <a:spcPct val="120000"/>
-              </a:lnSpc>
-              <a:buNone/>
-            </a:pPr>
-            <a:r>
-              <a:rPr lang="en-US" sz="1400" dirty="0">
-                <a:solidFill>
-                  <a:srgbClr val="718096"/>
-                </a:solidFill>
-                <a:latin typeface="Pretendard" pitchFamily="34" charset="0"/>
-                <a:ea typeface="Pretendard" pitchFamily="34" charset="-122"/>
-                <a:cs typeface="Pretendard" pitchFamily="34" charset="-120"/>
-              </a:rPr>
-              <a:t>승강기</a:t>
-            </a:r>
-            <a:endParaRPr lang="en-US" sz="1400" dirty="0"/>
-          </a:p>
-        </p:txBody>
-      </p:sp>
-      <p:sp>
-        <p:nvSpPr>
-          <p:cNvPr id="23" name="Text 21"/>
-          <p:cNvSpPr/>
-          <p:nvPr/>
-        </p:nvSpPr>
-        <p:spPr>
-          <a:xfrm>
-            <a:off x="3172968" y="3657600"/>
-            <a:ext cx="4251960" cy="402336"/>
-          </a:xfrm>
-          <a:prstGeom prst="rect">
-            <a:avLst/>
-          </a:prstGeom>
-          <a:noFill/>
-          <a:ln/>
-        </p:spPr>
-        <p:txBody>
-          <a:bodyPr wrap="square" lIns="0" tIns="0" rIns="0" bIns="0" rtlCol="0" anchor="ctr"/>
-          <a:lstStyle/>
-          <a:p>
-            <a:pPr indent="0" marL="0">
-              <a:lnSpc>
-                <a:spcPct val="120000"/>
-              </a:lnSpc>
-              <a:buNone/>
-            </a:pPr>
-            <a:r>
-              <a:rPr lang="en-US" sz="1400" b="1" dirty="0">
-                <a:solidFill>
-                  <a:srgbClr val="10161F"/>
-                </a:solidFill>
-                <a:latin typeface="Pretendard" pitchFamily="34" charset="0"/>
-                <a:ea typeface="Pretendard" pitchFamily="34" charset="-122"/>
-                <a:cs typeface="Pretendard" pitchFamily="34" charset="-120"/>
-              </a:rPr>
-              <a:t>1대 (15인승 침대용)</a:t>
-            </a:r>
-            <a:endParaRPr lang="en-US" sz="1400" dirty="0"/>
-          </a:p>
-        </p:txBody>
-      </p:sp>
-      <p:sp>
-        <p:nvSpPr>
-          <p:cNvPr id="24" name="Shape 22"/>
-          <p:cNvSpPr/>
-          <p:nvPr/>
-        </p:nvSpPr>
-        <p:spPr>
-          <a:xfrm>
-            <a:off x="566928" y="4059936"/>
-            <a:ext cx="6858000" cy="0"/>
-          </a:xfrm>
-          <a:prstGeom prst="line">
-            <a:avLst/>
-          </a:prstGeom>
-          <a:noFill/>
-          <a:ln w="3810">
-            <a:solidFill>
-              <a:srgbClr val="CBD5E0"/>
-            </a:solidFill>
-            <a:prstDash val="solid"/>
-          </a:ln>
-        </p:spPr>
-      </p:sp>
-      <p:sp>
-        <p:nvSpPr>
-          <p:cNvPr id="25" name="Text 23"/>
-          <p:cNvSpPr/>
-          <p:nvPr/>
-        </p:nvSpPr>
-        <p:spPr>
-          <a:xfrm>
-            <a:off x="566928" y="4059936"/>
-            <a:ext cx="2606040" cy="402336"/>
-          </a:xfrm>
-          <a:prstGeom prst="rect">
-            <a:avLst/>
-          </a:prstGeom>
-          <a:noFill/>
-          <a:ln/>
-        </p:spPr>
-        <p:txBody>
-          <a:bodyPr wrap="square" lIns="0" tIns="0" rIns="0" bIns="0" rtlCol="0" anchor="ctr"/>
-          <a:lstStyle/>
-          <a:p>
-            <a:pPr indent="0" marL="0">
-              <a:lnSpc>
-                <a:spcPct val="120000"/>
-              </a:lnSpc>
-              <a:buNone/>
-            </a:pPr>
-            <a:r>
-              <a:rPr lang="en-US" sz="1400" dirty="0">
-                <a:solidFill>
-                  <a:srgbClr val="718096"/>
-                </a:solidFill>
-                <a:latin typeface="Pretendard" pitchFamily="34" charset="0"/>
-                <a:ea typeface="Pretendard" pitchFamily="34" charset="-122"/>
-                <a:cs typeface="Pretendard" pitchFamily="34" charset="-120"/>
-              </a:rPr>
-              <a:t>주차 대수</a:t>
-            </a:r>
-            <a:endParaRPr lang="en-US" sz="1400" dirty="0"/>
-          </a:p>
-        </p:txBody>
-      </p:sp>
-      <p:sp>
-        <p:nvSpPr>
-          <p:cNvPr id="26" name="Text 24"/>
-          <p:cNvSpPr/>
-          <p:nvPr/>
-        </p:nvSpPr>
-        <p:spPr>
-          <a:xfrm>
-            <a:off x="3172968" y="4059936"/>
-            <a:ext cx="4251960" cy="402336"/>
-          </a:xfrm>
-          <a:prstGeom prst="rect">
-            <a:avLst/>
-          </a:prstGeom>
-          <a:noFill/>
-          <a:ln/>
-        </p:spPr>
-        <p:txBody>
-          <a:bodyPr wrap="square" lIns="0" tIns="0" rIns="0" bIns="0" rtlCol="0" anchor="ctr"/>
-          <a:lstStyle/>
-          <a:p>
-            <a:pPr indent="0" marL="0">
-              <a:lnSpc>
-                <a:spcPct val="120000"/>
-              </a:lnSpc>
-              <a:buNone/>
-            </a:pPr>
-            <a:r>
-              <a:rPr lang="en-US" sz="1400" b="1" dirty="0">
-                <a:solidFill>
-                  <a:srgbClr val="10161F"/>
-                </a:solidFill>
-                <a:latin typeface="Pretendard" pitchFamily="34" charset="0"/>
-                <a:ea typeface="Pretendard" pitchFamily="34" charset="-122"/>
-                <a:cs typeface="Pretendard" pitchFamily="34" charset="-120"/>
-              </a:rPr>
-              <a:t>18대 (자주식 완비)</a:t>
-            </a:r>
-            <a:endParaRPr lang="en-US" sz="1400" dirty="0"/>
-          </a:p>
-        </p:txBody>
-      </p:sp>
-      <p:sp>
-        <p:nvSpPr>
-          <p:cNvPr id="27" name="Shape 25"/>
-          <p:cNvSpPr/>
-          <p:nvPr/>
-        </p:nvSpPr>
-        <p:spPr>
-          <a:xfrm>
-            <a:off x="566928" y="4462272"/>
-            <a:ext cx="6858000" cy="0"/>
-          </a:xfrm>
-          <a:prstGeom prst="line">
-            <a:avLst/>
-          </a:prstGeom>
-          <a:noFill/>
-          <a:ln w="3810">
-            <a:solidFill>
-              <a:srgbClr val="CBD5E0"/>
-            </a:solidFill>
-            <a:prstDash val="solid"/>
-          </a:ln>
-        </p:spPr>
-      </p:sp>
-      <p:sp>
-        <p:nvSpPr>
-          <p:cNvPr id="28" name="Text 26"/>
-          <p:cNvSpPr/>
-          <p:nvPr/>
-        </p:nvSpPr>
-        <p:spPr>
-          <a:xfrm>
-            <a:off x="566928" y="4462272"/>
-            <a:ext cx="2606040" cy="402336"/>
-          </a:xfrm>
-          <a:prstGeom prst="rect">
-            <a:avLst/>
-          </a:prstGeom>
-          <a:noFill/>
-          <a:ln/>
-        </p:spPr>
-        <p:txBody>
-          <a:bodyPr wrap="square" lIns="0" tIns="0" rIns="0" bIns="0" rtlCol="0" anchor="ctr"/>
-          <a:lstStyle/>
-          <a:p>
-            <a:pPr indent="0" marL="0">
-              <a:lnSpc>
-                <a:spcPct val="120000"/>
-              </a:lnSpc>
-              <a:buNone/>
-            </a:pPr>
-            <a:r>
-              <a:rPr lang="en-US" sz="1400" dirty="0">
-                <a:solidFill>
-                  <a:srgbClr val="718096"/>
-                </a:solidFill>
-                <a:latin typeface="Pretendard" pitchFamily="34" charset="0"/>
-                <a:ea typeface="Pretendard" pitchFamily="34" charset="-122"/>
-                <a:cs typeface="Pretendard" pitchFamily="34" charset="-120"/>
-              </a:rPr>
-              <a:t>주구조</a:t>
-            </a:r>
-            <a:endParaRPr lang="en-US" sz="1400" dirty="0"/>
-          </a:p>
-        </p:txBody>
-      </p:sp>
-      <p:sp>
-        <p:nvSpPr>
-          <p:cNvPr id="29" name="Text 27"/>
-          <p:cNvSpPr/>
-          <p:nvPr/>
-        </p:nvSpPr>
-        <p:spPr>
-          <a:xfrm>
-            <a:off x="3172968" y="4462272"/>
-            <a:ext cx="4251960" cy="402336"/>
-          </a:xfrm>
-          <a:prstGeom prst="rect">
-            <a:avLst/>
-          </a:prstGeom>
-          <a:noFill/>
-          <a:ln/>
-        </p:spPr>
-        <p:txBody>
-          <a:bodyPr wrap="square" lIns="0" tIns="0" rIns="0" bIns="0" rtlCol="0" anchor="ctr"/>
-          <a:lstStyle/>
-          <a:p>
-            <a:pPr indent="0" marL="0">
-              <a:lnSpc>
-                <a:spcPct val="120000"/>
-              </a:lnSpc>
-              <a:buNone/>
-            </a:pPr>
-            <a:r>
-              <a:rPr lang="en-US" sz="1400" b="1" dirty="0">
-                <a:solidFill>
-                  <a:srgbClr val="10161F"/>
-                </a:solidFill>
-                <a:latin typeface="Pretendard" pitchFamily="34" charset="0"/>
-                <a:ea typeface="Pretendard" pitchFamily="34" charset="-122"/>
-                <a:cs typeface="Pretendard" pitchFamily="34" charset="-120"/>
-              </a:rPr>
-              <a:t>철근콘크리트구조</a:t>
-            </a:r>
-            <a:endParaRPr lang="en-US" sz="1400" dirty="0"/>
-          </a:p>
-        </p:txBody>
-      </p:sp>
-      <p:sp>
-        <p:nvSpPr>
-          <p:cNvPr id="30" name="Shape 28"/>
-          <p:cNvSpPr/>
-          <p:nvPr/>
-        </p:nvSpPr>
-        <p:spPr>
-          <a:xfrm>
-            <a:off x="566928" y="4864608"/>
-            <a:ext cx="6858000" cy="0"/>
-          </a:xfrm>
-          <a:prstGeom prst="line">
-            <a:avLst/>
-          </a:prstGeom>
-          <a:noFill/>
-          <a:ln w="3810">
-            <a:solidFill>
-              <a:srgbClr val="CBD5E0"/>
-            </a:solidFill>
-            <a:prstDash val="solid"/>
-          </a:ln>
-        </p:spPr>
-      </p:sp>
-      <p:sp>
-        <p:nvSpPr>
-          <p:cNvPr id="31" name="Text 29"/>
-          <p:cNvSpPr/>
-          <p:nvPr/>
-        </p:nvSpPr>
-        <p:spPr>
-          <a:xfrm>
-            <a:off x="566928" y="4864608"/>
-            <a:ext cx="2606040" cy="402336"/>
-          </a:xfrm>
-          <a:prstGeom prst="rect">
-            <a:avLst/>
-          </a:prstGeom>
-          <a:noFill/>
-          <a:ln/>
-        </p:spPr>
-        <p:txBody>
-          <a:bodyPr wrap="square" lIns="0" tIns="0" rIns="0" bIns="0" rtlCol="0" anchor="ctr"/>
-          <a:lstStyle/>
-          <a:p>
-            <a:pPr indent="0" marL="0">
-              <a:lnSpc>
-                <a:spcPct val="120000"/>
-              </a:lnSpc>
-              <a:buNone/>
-            </a:pPr>
-            <a:r>
-              <a:rPr lang="en-US" sz="1400" dirty="0">
-                <a:solidFill>
-                  <a:srgbClr val="718096"/>
-                </a:solidFill>
-                <a:latin typeface="Pretendard" pitchFamily="34" charset="0"/>
-                <a:ea typeface="Pretendard" pitchFamily="34" charset="-122"/>
-                <a:cs typeface="Pretendard" pitchFamily="34" charset="-120"/>
-              </a:rPr>
-              <a:t>매매 희망가</a:t>
-            </a:r>
-            <a:endParaRPr lang="en-US" sz="1400" dirty="0"/>
-          </a:p>
-        </p:txBody>
-      </p:sp>
-      <p:sp>
-        <p:nvSpPr>
-          <p:cNvPr id="32" name="Text 30"/>
-          <p:cNvSpPr/>
-          <p:nvPr/>
-        </p:nvSpPr>
-        <p:spPr>
-          <a:xfrm>
-            <a:off x="3172968" y="4864608"/>
-            <a:ext cx="4251960" cy="402336"/>
-          </a:xfrm>
-          <a:prstGeom prst="rect">
-            <a:avLst/>
-          </a:prstGeom>
-          <a:noFill/>
-          <a:ln/>
-        </p:spPr>
-        <p:txBody>
-          <a:bodyPr wrap="square" lIns="0" tIns="0" rIns="0" bIns="0" rtlCol="0" anchor="ctr"/>
-          <a:lstStyle/>
-          <a:p>
-            <a:pPr indent="0" marL="0">
-              <a:lnSpc>
-                <a:spcPct val="120000"/>
-              </a:lnSpc>
-              <a:buNone/>
-            </a:pPr>
-            <a:r>
-              <a:rPr lang="en-US" sz="1400" b="1" dirty="0">
-                <a:solidFill>
-                  <a:srgbClr val="10161F"/>
-                </a:solidFill>
-                <a:latin typeface="Pretendard" pitchFamily="34" charset="0"/>
-                <a:ea typeface="Pretendard" pitchFamily="34" charset="-122"/>
-                <a:cs typeface="Pretendard" pitchFamily="34" charset="-120"/>
-              </a:rPr>
-              <a:t>72억</a:t>
-            </a:r>
-            <a:endParaRPr lang="en-US" sz="1400" dirty="0"/>
-          </a:p>
-        </p:txBody>
-      </p:sp>
-      <p:sp>
-        <p:nvSpPr>
-          <p:cNvPr id="33" name="Shape 31"/>
           <p:cNvSpPr/>
           <p:nvPr/>
         </p:nvSpPr>
@@ -6525,49 +5669,49 @@
       </p:sp>
       <p:sp>
         <p:nvSpPr>
-          <p:cNvPr id="34" name="Shape 32"/>
+          <p:cNvPr id="10" name="Shape 8"/>
           <p:cNvSpPr/>
           <p:nvPr/>
         </p:nvSpPr>
         <p:spPr>
           <a:xfrm>
             <a:off x="7784287" y="1645920"/>
-            <a:ext cx="3840480" cy="1645920"/>
+            <a:ext cx="3840480" cy="2103120"/>
           </a:xfrm>
           <a:prstGeom prst="roundRect">
             <a:avLst>
-              <a:gd name="adj" fmla="val 3333"/>
+              <a:gd name="adj" fmla="val 2609"/>
             </a:avLst>
           </a:prstGeom>
           <a:solidFill>
-            <a:srgbClr val="BEE3F8"/>
+            <a:srgbClr val="F3EBDA"/>
           </a:solidFill>
           <a:ln/>
         </p:spPr>
       </p:sp>
       <p:sp>
         <p:nvSpPr>
-          <p:cNvPr id="35" name="Shape 33"/>
+          <p:cNvPr id="11" name="Shape 9"/>
           <p:cNvSpPr/>
           <p:nvPr/>
         </p:nvSpPr>
         <p:spPr>
           <a:xfrm>
             <a:off x="7784287" y="1700784"/>
-            <a:ext cx="36576" cy="1536192"/>
+            <a:ext cx="36576" cy="1993392"/>
           </a:xfrm>
           <a:prstGeom prst="rect">
             <a:avLst/>
           </a:prstGeom>
           <a:solidFill>
-            <a:srgbClr val="2B6CB0"/>
+            <a:srgbClr val="977024"/>
           </a:solidFill>
           <a:ln/>
         </p:spPr>
       </p:sp>
       <p:sp>
         <p:nvSpPr>
-          <p:cNvPr id="36" name="Text 34"/>
+          <p:cNvPr id="12" name="Text 10"/>
           <p:cNvSpPr/>
           <p:nvPr/>
         </p:nvSpPr>
@@ -6595,14 +5739,14 @@
       </p:sp>
       <p:sp>
         <p:nvSpPr>
-          <p:cNvPr id="37" name="Text 35"/>
+          <p:cNvPr id="13" name="Text 11"/>
           <p:cNvSpPr/>
           <p:nvPr/>
         </p:nvSpPr>
         <p:spPr>
           <a:xfrm>
             <a:off x="7967167" y="1975104"/>
-            <a:ext cx="3511296" cy="1243584"/>
+            <a:ext cx="3511296" cy="1700784"/>
           </a:xfrm>
           <a:prstGeom prst="rect">
             <a:avLst/>
@@ -6629,7 +5773,7 @@
                 <a:ea typeface="Pretendard" pitchFamily="34" charset="-122"/>
                 <a:cs typeface="Pretendard" pitchFamily="34" charset="-120"/>
               </a:rPr>
-              <a:t>본 매물은 송파권역 입지의 안정적 운영 자산입니다.</a:t>
+              <a:t>{"ok":true,"mocked":true,"extractedFields":{"area_signal":"역삼","asset_type":"오피스빌딩","price_band":"300억","size_signal":"3</a:t>
             </a:r>
             <a:endParaRPr lang="en-US" sz="930" dirty="0"/>
           </a:p>
@@ -6637,7 +5781,7 @@
       </p:sp>
       <p:sp>
         <p:nvSpPr>
-          <p:cNvPr id="38" name="Text 36"/>
+          <p:cNvPr id="14" name="Text 12"/>
           <p:cNvSpPr/>
           <p:nvPr/>
         </p:nvSpPr>
@@ -6676,7 +5820,7 @@
       </p:sp>
       <p:sp>
         <p:nvSpPr>
-          <p:cNvPr id="39" name="Text 37"/>
+          <p:cNvPr id="15" name="Text 13"/>
           <p:cNvSpPr/>
           <p:nvPr/>
         </p:nvSpPr>
@@ -7215,13 +6359,52 @@
       </p:sp>
       <p:sp>
         <p:nvSpPr>
-          <p:cNvPr id="6" name="Shape 4"/>
+          <p:cNvPr id="6" name="Text 4"/>
           <p:cNvSpPr/>
           <p:nvPr/>
         </p:nvSpPr>
         <p:spPr>
           <a:xfrm>
             <a:off x="566928" y="1325880"/>
+            <a:ext cx="11057839" cy="237744"/>
+          </a:xfrm>
+          <a:prstGeom prst="rect">
+            <a:avLst/>
+          </a:prstGeom>
+          <a:noFill/>
+          <a:ln/>
+        </p:spPr>
+        <p:txBody>
+          <a:bodyPr wrap="square" lIns="0" tIns="0" rIns="0" bIns="0" rtlCol="0" anchor="ctr"/>
+          <a:lstStyle/>
+          <a:p>
+            <a:pPr indent="0" marL="0">
+              <a:buNone/>
+            </a:pPr>
+            <a:r>
+              <a:rPr lang="en-US" sz="1100" b="1" dirty="0">
+                <a:solidFill>
+                  <a:srgbClr val="10161F"/>
+                </a:solidFill>
+                <a:latin typeface="Pretendard" pitchFamily="34" charset="0"/>
+                <a:ea typeface="Pretendard" pitchFamily="34" charset="-122"/>
+                <a:cs typeface="Pretendard" pitchFamily="34" charset="-120"/>
+              </a:rPr>
+              <a:t>[참고] 핵심 현금흐름 3줄 요약 (내 돈 &amp; 월 순수익)</a:t>
+            </a:r>
+            <a:endParaRPr lang="en-US" sz="1100" dirty="0"/>
+          </a:p>
+        </p:txBody>
+      </p:sp>
+      <p:sp>
+        <p:nvSpPr>
+          <p:cNvPr id="7" name="Shape 5"/>
+          <p:cNvSpPr/>
+          <p:nvPr/>
+        </p:nvSpPr>
+        <p:spPr>
+          <a:xfrm>
+            <a:off x="566928" y="1737360"/>
             <a:ext cx="11057839" cy="0"/>
           </a:xfrm>
           <a:prstGeom prst="line">
@@ -7238,14 +6421,890 @@
       </p:sp>
       <p:sp>
         <p:nvSpPr>
-          <p:cNvPr id="7" name="Shape 5"/>
-          <p:cNvSpPr/>
-          <p:nvPr/>
-        </p:nvSpPr>
-        <p:spPr>
-          <a:xfrm>
-            <a:off x="566928" y="1645920"/>
-            <a:ext cx="11057839" cy="1280160"/>
+          <p:cNvPr id="8" name="Shape 6"/>
+          <p:cNvSpPr/>
+          <p:nvPr/>
+        </p:nvSpPr>
+        <p:spPr>
+          <a:xfrm>
+            <a:off x="566928" y="1965960"/>
+            <a:ext cx="3576218" cy="1188720"/>
+          </a:xfrm>
+          <a:prstGeom prst="roundRect">
+            <a:avLst>
+              <a:gd name="adj" fmla="val 4615"/>
+            </a:avLst>
+          </a:prstGeom>
+          <a:solidFill>
+            <a:srgbClr val="F7FAFC"/>
+          </a:solidFill>
+          <a:ln w="6350">
+            <a:solidFill>
+              <a:srgbClr val="CBD5E0"/>
+            </a:solidFill>
+            <a:prstDash val="solid"/>
+          </a:ln>
+        </p:spPr>
+      </p:sp>
+      <p:sp>
+        <p:nvSpPr>
+          <p:cNvPr id="9" name="Text 7"/>
+          <p:cNvSpPr/>
+          <p:nvPr/>
+        </p:nvSpPr>
+        <p:spPr>
+          <a:xfrm>
+            <a:off x="731520" y="2093976"/>
+            <a:ext cx="3247034" cy="201168"/>
+          </a:xfrm>
+          <a:prstGeom prst="rect">
+            <a:avLst/>
+          </a:prstGeom>
+          <a:noFill/>
+          <a:ln/>
+        </p:spPr>
+        <p:txBody>
+          <a:bodyPr wrap="square" lIns="0" tIns="0" rIns="0" bIns="0" rtlCol="0" anchor="ctr"/>
+          <a:lstStyle/>
+          <a:p>
+            <a:pPr indent="0" marL="0">
+              <a:buNone/>
+            </a:pPr>
+            <a:r>
+              <a:rPr lang="en-US" sz="950" dirty="0">
+                <a:solidFill>
+                  <a:srgbClr val="718096"/>
+                </a:solidFill>
+                <a:latin typeface="Pretendard" pitchFamily="34" charset="0"/>
+                <a:ea typeface="Pretendard" pitchFamily="34" charset="-122"/>
+                <a:cs typeface="Pretendard" pitchFamily="34" charset="-120"/>
+              </a:rPr>
+              <a:t>① 실투자금 (내 돈)</a:t>
+            </a:r>
+            <a:endParaRPr lang="en-US" sz="950" dirty="0"/>
+          </a:p>
+        </p:txBody>
+      </p:sp>
+      <p:sp>
+        <p:nvSpPr>
+          <p:cNvPr id="10" name="Text 8"/>
+          <p:cNvSpPr/>
+          <p:nvPr/>
+        </p:nvSpPr>
+        <p:spPr>
+          <a:xfrm>
+            <a:off x="731520" y="2276856"/>
+            <a:ext cx="3247034" cy="402336"/>
+          </a:xfrm>
+          <a:prstGeom prst="rect">
+            <a:avLst/>
+          </a:prstGeom>
+          <a:noFill/>
+          <a:ln/>
+        </p:spPr>
+        <p:txBody>
+          <a:bodyPr wrap="square" lIns="0" tIns="0" rIns="0" bIns="0" rtlCol="0" anchor="ctr">
+            <a:normAutofit/>
+          </a:bodyPr>
+          <a:lstStyle/>
+          <a:p>
+            <a:pPr indent="0" marL="0">
+              <a:buNone/>
+            </a:pPr>
+            <a:r>
+              <a:rPr lang="en-US" sz="2200" b="1" dirty="0">
+                <a:solidFill>
+                  <a:srgbClr val="10161F"/>
+                </a:solidFill>
+                <a:latin typeface="Pretendard" pitchFamily="34" charset="0"/>
+                <a:ea typeface="Pretendard" pitchFamily="34" charset="-122"/>
+                <a:cs typeface="Pretendard" pitchFamily="34" charset="-120"/>
+              </a:rPr>
+              <a:t>약 26.2억 원</a:t>
+            </a:r>
+            <a:endParaRPr lang="en-US" sz="2200" dirty="0"/>
+          </a:p>
+        </p:txBody>
+      </p:sp>
+      <p:sp>
+        <p:nvSpPr>
+          <p:cNvPr id="11" name="Text 9"/>
+          <p:cNvSpPr/>
+          <p:nvPr/>
+        </p:nvSpPr>
+        <p:spPr>
+          <a:xfrm>
+            <a:off x="731520" y="2642616"/>
+            <a:ext cx="3247034" cy="164592"/>
+          </a:xfrm>
+          <a:prstGeom prst="rect">
+            <a:avLst/>
+          </a:prstGeom>
+          <a:noFill/>
+          <a:ln/>
+        </p:spPr>
+        <p:txBody>
+          <a:bodyPr wrap="square" lIns="0" tIns="0" rIns="0" bIns="0" rtlCol="0" anchor="ctr"/>
+          <a:lstStyle/>
+          <a:p>
+            <a:pPr indent="0" marL="0">
+              <a:buNone/>
+            </a:pPr>
+            <a:r>
+              <a:rPr lang="en-US" sz="880" dirty="0">
+                <a:solidFill>
+                  <a:srgbClr val="718096"/>
+                </a:solidFill>
+                <a:latin typeface="Pretendard" pitchFamily="34" charset="0"/>
+                <a:ea typeface="Pretendard" pitchFamily="34" charset="-122"/>
+                <a:cs typeface="Pretendard" pitchFamily="34" charset="-120"/>
+              </a:rPr>
+              <a:t>매매가(72억) - 대출(42억) - 보증금(3.8억)</a:t>
+            </a:r>
+            <a:endParaRPr lang="en-US" sz="880" dirty="0"/>
+          </a:p>
+        </p:txBody>
+      </p:sp>
+      <p:sp>
+        <p:nvSpPr>
+          <p:cNvPr id="12" name="Shape 10"/>
+          <p:cNvSpPr/>
+          <p:nvPr/>
+        </p:nvSpPr>
+        <p:spPr>
+          <a:xfrm>
+            <a:off x="4307738" y="1965960"/>
+            <a:ext cx="3576218" cy="1188720"/>
+          </a:xfrm>
+          <a:prstGeom prst="roundRect">
+            <a:avLst>
+              <a:gd name="adj" fmla="val 4615"/>
+            </a:avLst>
+          </a:prstGeom>
+          <a:solidFill>
+            <a:srgbClr val="F7FAFC"/>
+          </a:solidFill>
+          <a:ln w="6350">
+            <a:solidFill>
+              <a:srgbClr val="CBD5E0"/>
+            </a:solidFill>
+            <a:prstDash val="solid"/>
+          </a:ln>
+        </p:spPr>
+      </p:sp>
+      <p:sp>
+        <p:nvSpPr>
+          <p:cNvPr id="13" name="Text 11"/>
+          <p:cNvSpPr/>
+          <p:nvPr/>
+        </p:nvSpPr>
+        <p:spPr>
+          <a:xfrm>
+            <a:off x="4472330" y="2093976"/>
+            <a:ext cx="3247034" cy="201168"/>
+          </a:xfrm>
+          <a:prstGeom prst="rect">
+            <a:avLst/>
+          </a:prstGeom>
+          <a:noFill/>
+          <a:ln/>
+        </p:spPr>
+        <p:txBody>
+          <a:bodyPr wrap="square" lIns="0" tIns="0" rIns="0" bIns="0" rtlCol="0" anchor="ctr"/>
+          <a:lstStyle/>
+          <a:p>
+            <a:pPr indent="0" marL="0">
+              <a:buNone/>
+            </a:pPr>
+            <a:r>
+              <a:rPr lang="en-US" sz="950" dirty="0">
+                <a:solidFill>
+                  <a:srgbClr val="718096"/>
+                </a:solidFill>
+                <a:latin typeface="Pretendard" pitchFamily="34" charset="0"/>
+                <a:ea typeface="Pretendard" pitchFamily="34" charset="-122"/>
+                <a:cs typeface="Pretendard" pitchFamily="34" charset="-120"/>
+              </a:rPr>
+              <a:t>② 매달 통장에 꽂히는 돈</a:t>
+            </a:r>
+            <a:endParaRPr lang="en-US" sz="950" dirty="0"/>
+          </a:p>
+        </p:txBody>
+      </p:sp>
+      <p:sp>
+        <p:nvSpPr>
+          <p:cNvPr id="14" name="Text 12"/>
+          <p:cNvSpPr/>
+          <p:nvPr/>
+        </p:nvSpPr>
+        <p:spPr>
+          <a:xfrm>
+            <a:off x="4472330" y="2276856"/>
+            <a:ext cx="3247034" cy="402336"/>
+          </a:xfrm>
+          <a:prstGeom prst="rect">
+            <a:avLst/>
+          </a:prstGeom>
+          <a:noFill/>
+          <a:ln/>
+        </p:spPr>
+        <p:txBody>
+          <a:bodyPr wrap="square" lIns="0" tIns="0" rIns="0" bIns="0" rtlCol="0" anchor="ctr">
+            <a:normAutofit/>
+          </a:bodyPr>
+          <a:lstStyle/>
+          <a:p>
+            <a:pPr indent="0" marL="0">
+              <a:buNone/>
+            </a:pPr>
+            <a:r>
+              <a:rPr lang="en-US" sz="2200" b="1" dirty="0">
+                <a:solidFill>
+                  <a:srgbClr val="10161F"/>
+                </a:solidFill>
+                <a:latin typeface="Pretendard" pitchFamily="34" charset="0"/>
+                <a:ea typeface="Pretendard" pitchFamily="34" charset="-122"/>
+                <a:cs typeface="Pretendard" pitchFamily="34" charset="-120"/>
+              </a:rPr>
+              <a:t>월 약 625만 원</a:t>
+            </a:r>
+            <a:endParaRPr lang="en-US" sz="2200" dirty="0"/>
+          </a:p>
+        </p:txBody>
+      </p:sp>
+      <p:sp>
+        <p:nvSpPr>
+          <p:cNvPr id="15" name="Text 13"/>
+          <p:cNvSpPr/>
+          <p:nvPr/>
+        </p:nvSpPr>
+        <p:spPr>
+          <a:xfrm>
+            <a:off x="4472330" y="2642616"/>
+            <a:ext cx="3247034" cy="164592"/>
+          </a:xfrm>
+          <a:prstGeom prst="rect">
+            <a:avLst/>
+          </a:prstGeom>
+          <a:noFill/>
+          <a:ln/>
+        </p:spPr>
+        <p:txBody>
+          <a:bodyPr wrap="square" lIns="0" tIns="0" rIns="0" bIns="0" rtlCol="0" anchor="ctr"/>
+          <a:lstStyle/>
+          <a:p>
+            <a:pPr indent="0" marL="0">
+              <a:buNone/>
+            </a:pPr>
+            <a:r>
+              <a:rPr lang="en-US" sz="880" dirty="0">
+                <a:solidFill>
+                  <a:srgbClr val="718096"/>
+                </a:solidFill>
+                <a:latin typeface="Pretendard" pitchFamily="34" charset="0"/>
+                <a:ea typeface="Pretendard" pitchFamily="34" charset="-122"/>
+                <a:cs typeface="Pretendard" pitchFamily="34" charset="-120"/>
+              </a:rPr>
+              <a:t>월 임대료(2,200만) - 월 이자(1,575만) (금리 4.5%)</a:t>
+            </a:r>
+            <a:endParaRPr lang="en-US" sz="880" dirty="0"/>
+          </a:p>
+        </p:txBody>
+      </p:sp>
+      <p:sp>
+        <p:nvSpPr>
+          <p:cNvPr id="16" name="Shape 14"/>
+          <p:cNvSpPr/>
+          <p:nvPr/>
+        </p:nvSpPr>
+        <p:spPr>
+          <a:xfrm>
+            <a:off x="8048549" y="1965960"/>
+            <a:ext cx="3576218" cy="1188720"/>
+          </a:xfrm>
+          <a:prstGeom prst="roundRect">
+            <a:avLst>
+              <a:gd name="adj" fmla="val 4615"/>
+            </a:avLst>
+          </a:prstGeom>
+          <a:solidFill>
+            <a:srgbClr val="F7FAFC"/>
+          </a:solidFill>
+          <a:ln w="6350">
+            <a:solidFill>
+              <a:srgbClr val="CBD5E0"/>
+            </a:solidFill>
+            <a:prstDash val="solid"/>
+          </a:ln>
+        </p:spPr>
+      </p:sp>
+      <p:sp>
+        <p:nvSpPr>
+          <p:cNvPr id="17" name="Text 15"/>
+          <p:cNvSpPr/>
+          <p:nvPr/>
+        </p:nvSpPr>
+        <p:spPr>
+          <a:xfrm>
+            <a:off x="8213141" y="2093976"/>
+            <a:ext cx="3247034" cy="201168"/>
+          </a:xfrm>
+          <a:prstGeom prst="rect">
+            <a:avLst/>
+          </a:prstGeom>
+          <a:noFill/>
+          <a:ln/>
+        </p:spPr>
+        <p:txBody>
+          <a:bodyPr wrap="square" lIns="0" tIns="0" rIns="0" bIns="0" rtlCol="0" anchor="ctr"/>
+          <a:lstStyle/>
+          <a:p>
+            <a:pPr indent="0" marL="0">
+              <a:buNone/>
+            </a:pPr>
+            <a:r>
+              <a:rPr lang="en-US" sz="950" dirty="0">
+                <a:solidFill>
+                  <a:srgbClr val="718096"/>
+                </a:solidFill>
+                <a:latin typeface="Pretendard" pitchFamily="34" charset="0"/>
+                <a:ea typeface="Pretendard" pitchFamily="34" charset="-122"/>
+                <a:cs typeface="Pretendard" pitchFamily="34" charset="-120"/>
+              </a:rPr>
+              <a:t>③ 내 돈 대비 연 수익률</a:t>
+            </a:r>
+            <a:endParaRPr lang="en-US" sz="950" dirty="0"/>
+          </a:p>
+        </p:txBody>
+      </p:sp>
+      <p:sp>
+        <p:nvSpPr>
+          <p:cNvPr id="18" name="Text 16"/>
+          <p:cNvSpPr/>
+          <p:nvPr/>
+        </p:nvSpPr>
+        <p:spPr>
+          <a:xfrm>
+            <a:off x="8213141" y="2276856"/>
+            <a:ext cx="3247034" cy="402336"/>
+          </a:xfrm>
+          <a:prstGeom prst="rect">
+            <a:avLst/>
+          </a:prstGeom>
+          <a:noFill/>
+          <a:ln/>
+        </p:spPr>
+        <p:txBody>
+          <a:bodyPr wrap="square" lIns="0" tIns="0" rIns="0" bIns="0" rtlCol="0" anchor="ctr">
+            <a:normAutofit/>
+          </a:bodyPr>
+          <a:lstStyle/>
+          <a:p>
+            <a:pPr indent="0" marL="0">
+              <a:buNone/>
+            </a:pPr>
+            <a:r>
+              <a:rPr lang="en-US" sz="2200" b="1" dirty="0">
+                <a:solidFill>
+                  <a:srgbClr val="10161F"/>
+                </a:solidFill>
+                <a:latin typeface="Pretendard" pitchFamily="34" charset="0"/>
+                <a:ea typeface="Pretendard" pitchFamily="34" charset="-122"/>
+                <a:cs typeface="Pretendard" pitchFamily="34" charset="-120"/>
+              </a:rPr>
+              <a:t>연 2.86%</a:t>
+            </a:r>
+            <a:endParaRPr lang="en-US" sz="2200" dirty="0"/>
+          </a:p>
+        </p:txBody>
+      </p:sp>
+      <p:sp>
+        <p:nvSpPr>
+          <p:cNvPr id="19" name="Text 17"/>
+          <p:cNvSpPr/>
+          <p:nvPr/>
+        </p:nvSpPr>
+        <p:spPr>
+          <a:xfrm>
+            <a:off x="8213141" y="2642616"/>
+            <a:ext cx="3247034" cy="164592"/>
+          </a:xfrm>
+          <a:prstGeom prst="rect">
+            <a:avLst/>
+          </a:prstGeom>
+          <a:noFill/>
+          <a:ln/>
+        </p:spPr>
+        <p:txBody>
+          <a:bodyPr wrap="square" lIns="0" tIns="0" rIns="0" bIns="0" rtlCol="0" anchor="ctr"/>
+          <a:lstStyle/>
+          <a:p>
+            <a:pPr indent="0" marL="0">
+              <a:buNone/>
+            </a:pPr>
+            <a:r>
+              <a:rPr lang="en-US" sz="880" dirty="0">
+                <a:solidFill>
+                  <a:srgbClr val="718096"/>
+                </a:solidFill>
+                <a:latin typeface="Pretendard" pitchFamily="34" charset="0"/>
+                <a:ea typeface="Pretendard" pitchFamily="34" charset="-122"/>
+                <a:cs typeface="Pretendard" pitchFamily="34" charset="-120"/>
+              </a:rPr>
+              <a:t>실투자금 대비 연 순수익(약 0.75억 원)</a:t>
+            </a:r>
+            <a:endParaRPr lang="en-US" sz="880" dirty="0"/>
+          </a:p>
+        </p:txBody>
+      </p:sp>
+      <p:sp>
+        <p:nvSpPr>
+          <p:cNvPr id="20" name="Shape 18"/>
+          <p:cNvSpPr/>
+          <p:nvPr/>
+        </p:nvSpPr>
+        <p:spPr>
+          <a:xfrm>
+            <a:off x="566928" y="3319272"/>
+            <a:ext cx="3576218" cy="1051560"/>
+          </a:xfrm>
+          <a:prstGeom prst="roundRect">
+            <a:avLst>
+              <a:gd name="adj" fmla="val 5217"/>
+            </a:avLst>
+          </a:prstGeom>
+          <a:solidFill>
+            <a:srgbClr val="F7FAFC"/>
+          </a:solidFill>
+          <a:ln w="6350">
+            <a:solidFill>
+              <a:srgbClr val="CBD5E0"/>
+            </a:solidFill>
+            <a:prstDash val="solid"/>
+          </a:ln>
+        </p:spPr>
+      </p:sp>
+      <p:sp>
+        <p:nvSpPr>
+          <p:cNvPr id="21" name="Text 19"/>
+          <p:cNvSpPr/>
+          <p:nvPr/>
+        </p:nvSpPr>
+        <p:spPr>
+          <a:xfrm>
+            <a:off x="731520" y="3447288"/>
+            <a:ext cx="3247034" cy="201168"/>
+          </a:xfrm>
+          <a:prstGeom prst="rect">
+            <a:avLst/>
+          </a:prstGeom>
+          <a:noFill/>
+          <a:ln/>
+        </p:spPr>
+        <p:txBody>
+          <a:bodyPr wrap="square" lIns="0" tIns="0" rIns="0" bIns="0" rtlCol="0" anchor="ctr"/>
+          <a:lstStyle/>
+          <a:p>
+            <a:pPr indent="0" marL="0">
+              <a:buNone/>
+            </a:pPr>
+            <a:r>
+              <a:rPr lang="en-US" sz="950" dirty="0">
+                <a:solidFill>
+                  <a:srgbClr val="718096"/>
+                </a:solidFill>
+                <a:latin typeface="Pretendard" pitchFamily="34" charset="0"/>
+                <a:ea typeface="Pretendard" pitchFamily="34" charset="-122"/>
+                <a:cs typeface="Pretendard" pitchFamily="34" charset="-120"/>
+              </a:rPr>
+              <a:t>연 순영업소득(남는 돈 NOI)</a:t>
+            </a:r>
+            <a:endParaRPr lang="en-US" sz="950" dirty="0"/>
+          </a:p>
+        </p:txBody>
+      </p:sp>
+      <p:sp>
+        <p:nvSpPr>
+          <p:cNvPr id="22" name="Text 20"/>
+          <p:cNvSpPr/>
+          <p:nvPr/>
+        </p:nvSpPr>
+        <p:spPr>
+          <a:xfrm>
+            <a:off x="731520" y="3630168"/>
+            <a:ext cx="3247034" cy="402336"/>
+          </a:xfrm>
+          <a:prstGeom prst="rect">
+            <a:avLst/>
+          </a:prstGeom>
+          <a:noFill/>
+          <a:ln/>
+        </p:spPr>
+        <p:txBody>
+          <a:bodyPr wrap="square" lIns="0" tIns="0" rIns="0" bIns="0" rtlCol="0" anchor="ctr">
+            <a:normAutofit/>
+          </a:bodyPr>
+          <a:lstStyle/>
+          <a:p>
+            <a:pPr indent="0" marL="0">
+              <a:buNone/>
+            </a:pPr>
+            <a:r>
+              <a:rPr lang="en-US" sz="1800" b="1" dirty="0">
+                <a:solidFill>
+                  <a:srgbClr val="10161F"/>
+                </a:solidFill>
+                <a:latin typeface="Pretendard" pitchFamily="34" charset="0"/>
+                <a:ea typeface="Pretendard" pitchFamily="34" charset="-122"/>
+                <a:cs typeface="Pretendard" pitchFamily="34" charset="-120"/>
+              </a:rPr>
+              <a:t>약 1.8억 원~약 2.2억 원</a:t>
+            </a:r>
+            <a:endParaRPr lang="en-US" sz="1800" dirty="0"/>
+          </a:p>
+        </p:txBody>
+      </p:sp>
+      <p:sp>
+        <p:nvSpPr>
+          <p:cNvPr id="23" name="Text 21"/>
+          <p:cNvSpPr/>
+          <p:nvPr/>
+        </p:nvSpPr>
+        <p:spPr>
+          <a:xfrm>
+            <a:off x="731520" y="3995928"/>
+            <a:ext cx="3247034" cy="164592"/>
+          </a:xfrm>
+          <a:prstGeom prst="rect">
+            <a:avLst/>
+          </a:prstGeom>
+          <a:noFill/>
+          <a:ln/>
+        </p:spPr>
+        <p:txBody>
+          <a:bodyPr wrap="square" lIns="0" tIns="0" rIns="0" bIns="0" rtlCol="0" anchor="ctr"/>
+          <a:lstStyle/>
+          <a:p>
+            <a:pPr indent="0" marL="0">
+              <a:buNone/>
+            </a:pPr>
+            <a:r>
+              <a:rPr lang="en-US" sz="880" dirty="0">
+                <a:solidFill>
+                  <a:srgbClr val="718096"/>
+                </a:solidFill>
+                <a:latin typeface="Pretendard" pitchFamily="34" charset="0"/>
+                <a:ea typeface="Pretendard" pitchFamily="34" charset="-122"/>
+                <a:cs typeface="Pretendard" pitchFamily="34" charset="-120"/>
+              </a:rPr>
+              <a:t>운영비 차감 후 실질 순수익</a:t>
+            </a:r>
+            <a:endParaRPr lang="en-US" sz="880" dirty="0"/>
+          </a:p>
+        </p:txBody>
+      </p:sp>
+      <p:sp>
+        <p:nvSpPr>
+          <p:cNvPr id="24" name="Shape 22"/>
+          <p:cNvSpPr/>
+          <p:nvPr/>
+        </p:nvSpPr>
+        <p:spPr>
+          <a:xfrm>
+            <a:off x="4307738" y="3319272"/>
+            <a:ext cx="3576218" cy="1051560"/>
+          </a:xfrm>
+          <a:prstGeom prst="roundRect">
+            <a:avLst>
+              <a:gd name="adj" fmla="val 5217"/>
+            </a:avLst>
+          </a:prstGeom>
+          <a:solidFill>
+            <a:srgbClr val="F7FAFC"/>
+          </a:solidFill>
+          <a:ln w="6350">
+            <a:solidFill>
+              <a:srgbClr val="CBD5E0"/>
+            </a:solidFill>
+            <a:prstDash val="solid"/>
+          </a:ln>
+        </p:spPr>
+      </p:sp>
+      <p:sp>
+        <p:nvSpPr>
+          <p:cNvPr id="25" name="Text 23"/>
+          <p:cNvSpPr/>
+          <p:nvPr/>
+        </p:nvSpPr>
+        <p:spPr>
+          <a:xfrm>
+            <a:off x="4472330" y="3447288"/>
+            <a:ext cx="3247034" cy="201168"/>
+          </a:xfrm>
+          <a:prstGeom prst="rect">
+            <a:avLst/>
+          </a:prstGeom>
+          <a:noFill/>
+          <a:ln/>
+        </p:spPr>
+        <p:txBody>
+          <a:bodyPr wrap="square" lIns="0" tIns="0" rIns="0" bIns="0" rtlCol="0" anchor="ctr"/>
+          <a:lstStyle/>
+          <a:p>
+            <a:pPr indent="0" marL="0">
+              <a:buNone/>
+            </a:pPr>
+            <a:r>
+              <a:rPr lang="en-US" sz="950" dirty="0">
+                <a:solidFill>
+                  <a:srgbClr val="718096"/>
+                </a:solidFill>
+                <a:latin typeface="Pretendard" pitchFamily="34" charset="0"/>
+                <a:ea typeface="Pretendard" pitchFamily="34" charset="-122"/>
+                <a:cs typeface="Pretendard" pitchFamily="34" charset="-120"/>
+              </a:rPr>
+              <a:t>연 순수익률(Cap Rate)</a:t>
+            </a:r>
+            <a:endParaRPr lang="en-US" sz="950" dirty="0"/>
+          </a:p>
+        </p:txBody>
+      </p:sp>
+      <p:sp>
+        <p:nvSpPr>
+          <p:cNvPr id="26" name="Text 24"/>
+          <p:cNvSpPr/>
+          <p:nvPr/>
+        </p:nvSpPr>
+        <p:spPr>
+          <a:xfrm>
+            <a:off x="4472330" y="3630168"/>
+            <a:ext cx="3247034" cy="402336"/>
+          </a:xfrm>
+          <a:prstGeom prst="rect">
+            <a:avLst/>
+          </a:prstGeom>
+          <a:noFill/>
+          <a:ln/>
+        </p:spPr>
+        <p:txBody>
+          <a:bodyPr wrap="square" lIns="0" tIns="0" rIns="0" bIns="0" rtlCol="0" anchor="ctr">
+            <a:normAutofit/>
+          </a:bodyPr>
+          <a:lstStyle/>
+          <a:p>
+            <a:pPr indent="0" marL="0">
+              <a:buNone/>
+            </a:pPr>
+            <a:r>
+              <a:rPr lang="en-US" sz="1800" b="1" dirty="0">
+                <a:solidFill>
+                  <a:srgbClr val="10161F"/>
+                </a:solidFill>
+                <a:latin typeface="Arial" pitchFamily="34" charset="0"/>
+                <a:ea typeface="Arial" pitchFamily="34" charset="-122"/>
+                <a:cs typeface="Arial" pitchFamily="34" charset="-120"/>
+              </a:rPr>
+              <a:t>2.5%–3.1%</a:t>
+            </a:r>
+            <a:endParaRPr lang="en-US" sz="1800" dirty="0"/>
+          </a:p>
+        </p:txBody>
+      </p:sp>
+      <p:sp>
+        <p:nvSpPr>
+          <p:cNvPr id="27" name="Text 25"/>
+          <p:cNvSpPr/>
+          <p:nvPr/>
+        </p:nvSpPr>
+        <p:spPr>
+          <a:xfrm>
+            <a:off x="4472330" y="3995928"/>
+            <a:ext cx="3247034" cy="164592"/>
+          </a:xfrm>
+          <a:prstGeom prst="rect">
+            <a:avLst/>
+          </a:prstGeom>
+          <a:noFill/>
+          <a:ln/>
+        </p:spPr>
+        <p:txBody>
+          <a:bodyPr wrap="square" lIns="0" tIns="0" rIns="0" bIns="0" rtlCol="0" anchor="ctr"/>
+          <a:lstStyle/>
+          <a:p>
+            <a:pPr indent="0" marL="0">
+              <a:buNone/>
+            </a:pPr>
+            <a:r>
+              <a:rPr lang="en-US" sz="880" dirty="0">
+                <a:solidFill>
+                  <a:srgbClr val="718096"/>
+                </a:solidFill>
+                <a:latin typeface="Pretendard" pitchFamily="34" charset="0"/>
+                <a:ea typeface="Pretendard" pitchFamily="34" charset="-122"/>
+                <a:cs typeface="Pretendard" pitchFamily="34" charset="-120"/>
+              </a:rPr>
+              <a:t>매매가 대비 구간 추정</a:t>
+            </a:r>
+            <a:endParaRPr lang="en-US" sz="880" dirty="0"/>
+          </a:p>
+        </p:txBody>
+      </p:sp>
+      <p:sp>
+        <p:nvSpPr>
+          <p:cNvPr id="28" name="Shape 26"/>
+          <p:cNvSpPr/>
+          <p:nvPr/>
+        </p:nvSpPr>
+        <p:spPr>
+          <a:xfrm>
+            <a:off x="8048549" y="3319272"/>
+            <a:ext cx="3576218" cy="1051560"/>
+          </a:xfrm>
+          <a:prstGeom prst="roundRect">
+            <a:avLst>
+              <a:gd name="adj" fmla="val 5217"/>
+            </a:avLst>
+          </a:prstGeom>
+          <a:solidFill>
+            <a:srgbClr val="F7FAFC"/>
+          </a:solidFill>
+          <a:ln w="6350">
+            <a:solidFill>
+              <a:srgbClr val="CBD5E0"/>
+            </a:solidFill>
+            <a:prstDash val="solid"/>
+          </a:ln>
+        </p:spPr>
+      </p:sp>
+      <p:sp>
+        <p:nvSpPr>
+          <p:cNvPr id="29" name="Text 27"/>
+          <p:cNvSpPr/>
+          <p:nvPr/>
+        </p:nvSpPr>
+        <p:spPr>
+          <a:xfrm>
+            <a:off x="8213141" y="3447288"/>
+            <a:ext cx="3247034" cy="201168"/>
+          </a:xfrm>
+          <a:prstGeom prst="rect">
+            <a:avLst/>
+          </a:prstGeom>
+          <a:noFill/>
+          <a:ln/>
+        </p:spPr>
+        <p:txBody>
+          <a:bodyPr wrap="square" lIns="0" tIns="0" rIns="0" bIns="0" rtlCol="0" anchor="ctr"/>
+          <a:lstStyle/>
+          <a:p>
+            <a:pPr indent="0" marL="0">
+              <a:buNone/>
+            </a:pPr>
+            <a:r>
+              <a:rPr lang="en-US" sz="950" dirty="0">
+                <a:solidFill>
+                  <a:srgbClr val="718096"/>
+                </a:solidFill>
+                <a:latin typeface="Pretendard" pitchFamily="34" charset="0"/>
+                <a:ea typeface="Pretendard" pitchFamily="34" charset="-122"/>
+                <a:cs typeface="Pretendard" pitchFamily="34" charset="-120"/>
+              </a:rPr>
+              <a:t>5년 보유 시 투자수익률(IRR)</a:t>
+            </a:r>
+            <a:endParaRPr lang="en-US" sz="950" dirty="0"/>
+          </a:p>
+        </p:txBody>
+      </p:sp>
+      <p:sp>
+        <p:nvSpPr>
+          <p:cNvPr id="30" name="Text 28"/>
+          <p:cNvSpPr/>
+          <p:nvPr/>
+        </p:nvSpPr>
+        <p:spPr>
+          <a:xfrm>
+            <a:off x="8213141" y="3630168"/>
+            <a:ext cx="3247034" cy="402336"/>
+          </a:xfrm>
+          <a:prstGeom prst="rect">
+            <a:avLst/>
+          </a:prstGeom>
+          <a:noFill/>
+          <a:ln/>
+        </p:spPr>
+        <p:txBody>
+          <a:bodyPr wrap="square" lIns="0" tIns="0" rIns="0" bIns="0" rtlCol="0" anchor="ctr">
+            <a:normAutofit/>
+          </a:bodyPr>
+          <a:lstStyle/>
+          <a:p>
+            <a:pPr indent="0" marL="0">
+              <a:buNone/>
+            </a:pPr>
+            <a:r>
+              <a:rPr lang="en-US" sz="1800" b="1" dirty="0">
+                <a:solidFill>
+                  <a:srgbClr val="10161F"/>
+                </a:solidFill>
+                <a:latin typeface="Arial" pitchFamily="34" charset="0"/>
+                <a:ea typeface="Arial" pitchFamily="34" charset="-122"/>
+                <a:cs typeface="Arial" pitchFamily="34" charset="-120"/>
+              </a:rPr>
+              <a:t>-4.2%–5.6%</a:t>
+            </a:r>
+            <a:endParaRPr lang="en-US" sz="1800" dirty="0"/>
+          </a:p>
+        </p:txBody>
+      </p:sp>
+      <p:sp>
+        <p:nvSpPr>
+          <p:cNvPr id="31" name="Text 29"/>
+          <p:cNvSpPr/>
+          <p:nvPr/>
+        </p:nvSpPr>
+        <p:spPr>
+          <a:xfrm>
+            <a:off x="8213141" y="3995928"/>
+            <a:ext cx="3247034" cy="164592"/>
+          </a:xfrm>
+          <a:prstGeom prst="rect">
+            <a:avLst/>
+          </a:prstGeom>
+          <a:noFill/>
+          <a:ln/>
+        </p:spPr>
+        <p:txBody>
+          <a:bodyPr wrap="square" lIns="0" tIns="0" rIns="0" bIns="0" rtlCol="0" anchor="ctr"/>
+          <a:lstStyle/>
+          <a:p>
+            <a:pPr indent="0" marL="0">
+              <a:buNone/>
+            </a:pPr>
+            <a:r>
+              <a:rPr lang="en-US" sz="880" dirty="0">
+                <a:solidFill>
+                  <a:srgbClr val="718096"/>
+                </a:solidFill>
+                <a:latin typeface="Pretendard" pitchFamily="34" charset="0"/>
+                <a:ea typeface="Pretendard" pitchFamily="34" charset="-122"/>
+                <a:cs typeface="Pretendard" pitchFamily="34" charset="-120"/>
+              </a:rPr>
+              <a:t>시나리오 추정, 참고용</a:t>
+            </a:r>
+            <a:endParaRPr lang="en-US" sz="880" dirty="0"/>
+          </a:p>
+        </p:txBody>
+      </p:sp>
+      <p:sp>
+        <p:nvSpPr>
+          <p:cNvPr id="32" name="Shape 30"/>
+          <p:cNvSpPr/>
+          <p:nvPr/>
+        </p:nvSpPr>
+        <p:spPr>
+          <a:xfrm>
+            <a:off x="566928" y="4626864"/>
+            <a:ext cx="5437480" cy="1280160"/>
           </a:xfrm>
           <a:prstGeom prst="roundRect">
             <a:avLst>
@@ -7260,13 +7319,13 @@
       </p:sp>
       <p:sp>
         <p:nvSpPr>
-          <p:cNvPr id="8" name="Shape 6"/>
-          <p:cNvSpPr/>
-          <p:nvPr/>
-        </p:nvSpPr>
-        <p:spPr>
-          <a:xfrm>
-            <a:off x="566928" y="1700784"/>
+          <p:cNvPr id="33" name="Shape 31"/>
+          <p:cNvSpPr/>
+          <p:nvPr/>
+        </p:nvSpPr>
+        <p:spPr>
+          <a:xfrm>
+            <a:off x="566928" y="4681728"/>
             <a:ext cx="36576" cy="1170432"/>
           </a:xfrm>
           <a:prstGeom prst="rect">
@@ -7280,14 +7339,14 @@
       </p:sp>
       <p:sp>
         <p:nvSpPr>
-          <p:cNvPr id="9" name="Text 7"/>
-          <p:cNvSpPr/>
-          <p:nvPr/>
-        </p:nvSpPr>
-        <p:spPr>
-          <a:xfrm>
-            <a:off x="749808" y="1755648"/>
-            <a:ext cx="10728655" cy="201168"/>
+          <p:cNvPr id="34" name="Text 32"/>
+          <p:cNvSpPr/>
+          <p:nvPr/>
+        </p:nvSpPr>
+        <p:spPr>
+          <a:xfrm>
+            <a:off x="749808" y="4736592"/>
+            <a:ext cx="5108296" cy="201168"/>
           </a:xfrm>
           <a:prstGeom prst="rect">
             <a:avLst/>
@@ -7319,14 +7378,14 @@
       </p:sp>
       <p:sp>
         <p:nvSpPr>
-          <p:cNvPr id="10" name="Text 8"/>
-          <p:cNvSpPr/>
-          <p:nvPr/>
-        </p:nvSpPr>
-        <p:spPr>
-          <a:xfrm>
-            <a:off x="749808" y="1975104"/>
-            <a:ext cx="10728655" cy="877824"/>
+          <p:cNvPr id="35" name="Text 33"/>
+          <p:cNvSpPr/>
+          <p:nvPr/>
+        </p:nvSpPr>
+        <p:spPr>
+          <a:xfrm>
+            <a:off x="749808" y="4956048"/>
+            <a:ext cx="5108296" cy="877824"/>
           </a:xfrm>
           <a:prstGeom prst="rect">
             <a:avLst/>
@@ -7353,7 +7412,7 @@
                 <a:ea typeface="Pretendard" pitchFamily="34" charset="-122"/>
                 <a:cs typeface="Pretendard" pitchFamily="34" charset="-120"/>
               </a:rPr>
-              <a:t>{"ok":true,"mocked":true,"extractedFields":{"area_signal":"역삼","asset_type":"오피스빌딩","price_band":"300억","size_signal":"3000평(약 9917.4㎡)"},"extractedFacts":{"region":"역삼","exactAddressCandidate":"역삼동 742-1","assetType":"오피스빌딩","priceText":"300억","sizeText":"3000평(약 9917.4㎡)","currentUse":"오피스","currentUseSignal":"근린생활시설","leaseSignal":"임대중","vacancySignal":"공실없음","tenantNames":["쿠팡","네이버"],"unitRentTexts":["301호: 1500만"],"sellerMotivationText":"자산 효율화","brokerNotes":["초역세권 매물"]},"detectedSensitiveFields":["exact_address","tenant_name"],"ambiguousFields":[],"warnings":[],"areaSignal":"역삼","assetType":"오피스빌딩","priceBand":"300억","sizeSignal":"3000평(약 9917.4㎡)","dealType":"매각","buildingName":"역삼 센트럴타워","exactAddress":"역삼동 742-1","totalFloorArea":9917.3,"buildYear":2015,"currentUseSignal":"근린생활시설","vacancySignal":"공실 없음","fitSummary":"초역세권 근생 빌딩으로 시행/사옥 매입에 최적화","cautionSummary":"주요 임차 업종 만기 조율 필요","hiddenFields":["exact_address","seller_motivation"],"confidence":{"areaSignal":"confirmed","assetType":"confirmed","priceBand":"ai_hypothesis","fitSummary":"ai_hypothesis"},"missingData":["sizeSignal"],"boundaryNote":"본 자료는 실거래 통계 기반 참고치입니다.","buyerType":"법인 사옥형","budgetRange":{"min":50,"max":80,"display":"50억~80억"},"preferredRegions":["강남","성수"],"assetTypes":["꼬마빌딩","사옥용"],"purchasePurpose":"사옥용 매입","mustHave":["초역세권","주차"],"niceToHave":["테라스","루프탑"],"riskTolerance":"medium","financingNote":"자본금 50% 준비","missingQuestions":["구체적인 입주 시기가 언제인가요?","선호하는 수익률이 있나요?"],"privacyNotes":["연락처 비공개"],"fitReasons":["매수자 예산(50-80억)에 부합하는 매물입니다.","요청하신 성수/강남 권역에 해당합니다."],"cautionReasons":["요청한 용도와 달리 명도 협의가 다소 필요합니다."],"recommendedNextAction":"현장 답사 제안","kakaoMessage":"안녕하세요! 요청하신 조건에 부합하는 추천 매물이 있어 안내해 드립니다. 확인해보시고 피드백 부탁드립니다.","title":"강남 역삼역 초역세권 오피스 사옥용 빌딩 매각","shortSummary":"역삼역 도보 5분 거리의 준신축급 대형 오피스빌딩입니다.","dealPoints":["초역세권","사옥 최적"],"cautionPoints":["명도 조율 필요"],"hiddenInfoNotice":["보증금 및 지번은 인가 후 확인 가능"],"gateMessage":"G1 등급 등록이 필요합니다.","kakaoText":"강남 역삼역 오피스 빌딩 매각 안내입니다.","exactUnitCandidate":"101호","floor":"1층","areaSqmText":"150㎡","spaceType":"office","depositText":"5000만","monthlyRentText":"400만","maintenanceFeeText":"50만","availableFromText":"즉시입주","leaseTermMonthsText":"24","incentivesText":"렌트프리 2개월","restrictions":[],"landlordIdentity":"김성수","currentTenant":"스타트업","vacancyReason":"이전 확장","rentNegotiation":"협의 가능","region":"성수동","areaSqm":150,"deposit":5000,"monthlyRent":400,"maintenanceFee":50,"availableFrom":"즉시입주","leaseTermMonths":24,"incentives":{"rentFreeMonths":2,"interiorSupport":"일부 인테리어 지원","freeRentDetail":"렌트프리 2개월 지원"},"shortSummaryLease":"성수역 도보 5분 거리 1층 리테일 상가 매물입니다."}</a:t>
+              <a:t>본 자산은 우수한 입지 경쟁력과 견고한 펀더멘털을 바탕으로 안정적인 현금흐름 창출과 중장기 자산 가치 상승을 동시에 실현할 수 있는 우량 투자 기회입니다.</a:t>
             </a:r>
             <a:endParaRPr lang="en-US" sz="930" dirty="0"/>
           </a:p>
@@ -7361,14 +7420,56 @@
       </p:sp>
       <p:sp>
         <p:nvSpPr>
-          <p:cNvPr id="11" name="Text 9"/>
-          <p:cNvSpPr/>
-          <p:nvPr/>
-        </p:nvSpPr>
-        <p:spPr>
-          <a:xfrm>
-            <a:off x="566928" y="6382512"/>
-            <a:ext cx="7315200" cy="219456"/>
+          <p:cNvPr id="36" name="Shape 34"/>
+          <p:cNvSpPr/>
+          <p:nvPr/>
+        </p:nvSpPr>
+        <p:spPr>
+          <a:xfrm>
+            <a:off x="6187288" y="4626864"/>
+            <a:ext cx="5437480" cy="1280160"/>
+          </a:xfrm>
+          <a:prstGeom prst="roundRect">
+            <a:avLst>
+              <a:gd name="adj" fmla="val 4286"/>
+            </a:avLst>
+          </a:prstGeom>
+          <a:solidFill>
+            <a:srgbClr val="BEE3F8"/>
+          </a:solidFill>
+          <a:ln/>
+        </p:spPr>
+      </p:sp>
+      <p:sp>
+        <p:nvSpPr>
+          <p:cNvPr id="37" name="Shape 35"/>
+          <p:cNvSpPr/>
+          <p:nvPr/>
+        </p:nvSpPr>
+        <p:spPr>
+          <a:xfrm>
+            <a:off x="6187288" y="4681728"/>
+            <a:ext cx="36576" cy="1170432"/>
+          </a:xfrm>
+          <a:prstGeom prst="rect">
+            <a:avLst/>
+          </a:prstGeom>
+          <a:solidFill>
+            <a:srgbClr val="2B6CB0"/>
+          </a:solidFill>
+          <a:ln/>
+        </p:spPr>
+      </p:sp>
+      <p:sp>
+        <p:nvSpPr>
+          <p:cNvPr id="38" name="Text 36"/>
+          <p:cNvSpPr/>
+          <p:nvPr/>
+        </p:nvSpPr>
+        <p:spPr>
+          <a:xfrm>
+            <a:off x="6370168" y="4736592"/>
+            <a:ext cx="5108296" cy="201168"/>
           </a:xfrm>
           <a:prstGeom prst="rect">
             <a:avLst/>
@@ -7384,14 +7485,95 @@
               <a:buNone/>
             </a:pPr>
             <a:r>
-              <a:rPr lang="en-US" sz="800" dirty="0">
-                <a:solidFill>
-                  <a:srgbClr val="718096"/>
+              <a:rPr lang="en-US" sz="1050" b="1" dirty="0">
+                <a:solidFill>
+                  <a:srgbClr val="2B6CB0"/>
                 </a:solidFill>
                 <a:latin typeface="Pretendard" pitchFamily="34" charset="0"/>
                 <a:ea typeface="Pretendard" pitchFamily="34" charset="-122"/>
                 <a:cs typeface="Pretendard" pitchFamily="34" charset="-120"/>
               </a:rPr>
+              <a:t>[주의] 면책</a:t>
+            </a:r>
+            <a:endParaRPr lang="en-US" sz="1050" dirty="0"/>
+          </a:p>
+        </p:txBody>
+      </p:sp>
+      <p:sp>
+        <p:nvSpPr>
+          <p:cNvPr id="39" name="Text 37"/>
+          <p:cNvSpPr/>
+          <p:nvPr/>
+        </p:nvSpPr>
+        <p:spPr>
+          <a:xfrm>
+            <a:off x="6370168" y="4956048"/>
+            <a:ext cx="5108296" cy="877824"/>
+          </a:xfrm>
+          <a:prstGeom prst="rect">
+            <a:avLst/>
+          </a:prstGeom>
+          <a:noFill/>
+          <a:ln/>
+        </p:spPr>
+        <p:txBody>
+          <a:bodyPr wrap="square" lIns="0" tIns="0" rIns="0" bIns="0" rtlCol="0" anchor="t"/>
+          <a:lstStyle/>
+          <a:p>
+            <a:pPr indent="0" marL="0">
+              <a:lnSpc>
+                <a:spcPct val="120000"/>
+              </a:lnSpc>
+              <a:buNone/>
+            </a:pPr>
+            <a:r>
+              <a:rPr lang="en-US" sz="930" dirty="0">
+                <a:solidFill>
+                  <a:srgbClr val="10161F"/>
+                </a:solidFill>
+                <a:latin typeface="Pretendard" pitchFamily="34" charset="0"/>
+                <a:ea typeface="Pretendard" pitchFamily="34" charset="-122"/>
+                <a:cs typeface="Pretendard" pitchFamily="34" charset="-120"/>
+              </a:rPr>
+              <a:t>AI 추정값 (참고용). 실제 수익은 임대차 조건·공실률·세금에 따라 상이합니다.</a:t>
+            </a:r>
+            <a:endParaRPr lang="en-US" sz="930" dirty="0"/>
+          </a:p>
+        </p:txBody>
+      </p:sp>
+      <p:sp>
+        <p:nvSpPr>
+          <p:cNvPr id="40" name="Text 38"/>
+          <p:cNvSpPr/>
+          <p:nvPr/>
+        </p:nvSpPr>
+        <p:spPr>
+          <a:xfrm>
+            <a:off x="566928" y="6382512"/>
+            <a:ext cx="7315200" cy="219456"/>
+          </a:xfrm>
+          <a:prstGeom prst="rect">
+            <a:avLst/>
+          </a:prstGeom>
+          <a:noFill/>
+          <a:ln/>
+        </p:spPr>
+        <p:txBody>
+          <a:bodyPr wrap="square" lIns="0" tIns="0" rIns="0" bIns="0" rtlCol="0" anchor="ctr"/>
+          <a:lstStyle/>
+          <a:p>
+            <a:pPr indent="0" marL="0">
+              <a:buNone/>
+            </a:pPr>
+            <a:r>
+              <a:rPr lang="en-US" sz="800" dirty="0">
+                <a:solidFill>
+                  <a:srgbClr val="718096"/>
+                </a:solidFill>
+                <a:latin typeface="Pretendard" pitchFamily="34" charset="0"/>
+                <a:ea typeface="Pretendard" pitchFamily="34" charset="-122"/>
+                <a:cs typeface="Pretendard" pitchFamily="34" charset="-120"/>
+              </a:rPr>
               <a:t>크리딜   |   </a:t>
             </a:r>
             <a:endParaRPr lang="en-US" sz="800" dirty="0"/>
@@ -7400,7 +7582,7 @@
       </p:sp>
       <p:sp>
         <p:nvSpPr>
-          <p:cNvPr id="12" name="Text 10"/>
+          <p:cNvPr id="41" name="Text 39"/>
           <p:cNvSpPr/>
           <p:nvPr/>
         </p:nvSpPr>
@@ -8058,645 +8240,9 @@
                 <a:ea typeface="Pretendard" pitchFamily="34" charset="-122"/>
                 <a:cs typeface="Pretendard" pitchFamily="34" charset="-120"/>
               </a:rPr>
-              <a:t>3대 핵심 투자 포인트 (Investment Highlights)</a:t>
+              <a:t>밸류업 시나리오 (AI 추정)</a:t>
             </a:r>
             <a:endParaRPr lang="en-US" sz="1100" dirty="0"/>
-          </a:p>
-        </p:txBody>
-      </p:sp>
-      <p:sp>
-        <p:nvSpPr>
-          <p:cNvPr id="7" name="Shape 5"/>
-          <p:cNvSpPr/>
-          <p:nvPr/>
-        </p:nvSpPr>
-        <p:spPr>
-          <a:xfrm>
-            <a:off x="566928" y="1481328"/>
-            <a:ext cx="3472586" cy="2560320"/>
-          </a:xfrm>
-          <a:prstGeom prst="roundRect">
-            <a:avLst>
-              <a:gd name="adj" fmla="val 2857"/>
-            </a:avLst>
-          </a:prstGeom>
-          <a:solidFill>
-            <a:srgbClr val="F7FAFC"/>
-          </a:solidFill>
-          <a:ln w="10160">
-            <a:solidFill>
-              <a:srgbClr val="CBD5E0"/>
-            </a:solidFill>
-            <a:prstDash val="solid"/>
-          </a:ln>
-        </p:spPr>
-      </p:sp>
-      <p:sp>
-        <p:nvSpPr>
-          <p:cNvPr id="8" name="Shape 6"/>
-          <p:cNvSpPr/>
-          <p:nvPr/>
-        </p:nvSpPr>
-        <p:spPr>
-          <a:xfrm>
-            <a:off x="566928" y="1481328"/>
-            <a:ext cx="3472586" cy="54864"/>
-          </a:xfrm>
-          <a:prstGeom prst="rect">
-            <a:avLst/>
-          </a:prstGeom>
-          <a:solidFill>
-            <a:srgbClr val="B98A2E"/>
-          </a:solidFill>
-          <a:ln/>
-        </p:spPr>
-      </p:sp>
-      <p:sp>
-        <p:nvSpPr>
-          <p:cNvPr id="9" name="Shape 7"/>
-          <p:cNvSpPr/>
-          <p:nvPr/>
-        </p:nvSpPr>
-        <p:spPr>
-          <a:xfrm>
-            <a:off x="795528" y="1755648"/>
-            <a:ext cx="475488" cy="292608"/>
-          </a:xfrm>
-          <a:prstGeom prst="roundRect">
-            <a:avLst>
-              <a:gd name="adj" fmla="val 12500"/>
-            </a:avLst>
-          </a:prstGeom>
-          <a:solidFill>
-            <a:srgbClr val="D9B668"/>
-          </a:solidFill>
-          <a:ln/>
-        </p:spPr>
-      </p:sp>
-      <p:sp>
-        <p:nvSpPr>
-          <p:cNvPr id="10" name="Text 8"/>
-          <p:cNvSpPr/>
-          <p:nvPr/>
-        </p:nvSpPr>
-        <p:spPr>
-          <a:xfrm>
-            <a:off x="795528" y="1755648"/>
-            <a:ext cx="475488" cy="292608"/>
-          </a:xfrm>
-          <a:prstGeom prst="rect">
-            <a:avLst/>
-          </a:prstGeom>
-          <a:noFill/>
-          <a:ln/>
-        </p:spPr>
-        <p:txBody>
-          <a:bodyPr wrap="square" lIns="0" tIns="0" rIns="0" bIns="0" rtlCol="0" anchor="ctr"/>
-          <a:lstStyle/>
-          <a:p>
-            <a:pPr algn="ctr" indent="0" marL="0">
-              <a:buNone/>
-            </a:pPr>
-            <a:r>
-              <a:rPr lang="en-US" sz="1100" b="1" dirty="0">
-                <a:solidFill>
-                  <a:srgbClr val="977024"/>
-                </a:solidFill>
-                <a:latin typeface="Arial" pitchFamily="34" charset="0"/>
-                <a:ea typeface="Arial" pitchFamily="34" charset="-122"/>
-                <a:cs typeface="Arial" pitchFamily="34" charset="-120"/>
-              </a:rPr>
-              <a:t>01</a:t>
-            </a:r>
-            <a:endParaRPr lang="en-US" sz="1100" dirty="0"/>
-          </a:p>
-        </p:txBody>
-      </p:sp>
-      <p:sp>
-        <p:nvSpPr>
-          <p:cNvPr id="11" name="Text 9"/>
-          <p:cNvSpPr/>
-          <p:nvPr/>
-        </p:nvSpPr>
-        <p:spPr>
-          <a:xfrm>
-            <a:off x="795528" y="2194560"/>
-            <a:ext cx="3015386" cy="365760"/>
-          </a:xfrm>
-          <a:prstGeom prst="rect">
-            <a:avLst/>
-          </a:prstGeom>
-          <a:noFill/>
-          <a:ln/>
-        </p:spPr>
-        <p:txBody>
-          <a:bodyPr wrap="square" lIns="0" tIns="0" rIns="0" bIns="0" rtlCol="0" anchor="t"/>
-          <a:lstStyle/>
-          <a:p>
-            <a:pPr indent="0" marL="0">
-              <a:buNone/>
-            </a:pPr>
-            <a:r>
-              <a:rPr lang="en-US" sz="1500" b="1" dirty="0">
-                <a:solidFill>
-                  <a:srgbClr val="10161F"/>
-                </a:solidFill>
-                <a:latin typeface="Pretendard" pitchFamily="34" charset="0"/>
-                <a:ea typeface="Pretendard" pitchFamily="34" charset="-122"/>
-                <a:cs typeface="Pretendard" pitchFamily="34" charset="-120"/>
-              </a:rPr>
-              <a:t>원금 안전판 확보</a:t>
-            </a:r>
-            <a:endParaRPr lang="en-US" sz="1500" dirty="0"/>
-          </a:p>
-        </p:txBody>
-      </p:sp>
-      <p:sp>
-        <p:nvSpPr>
-          <p:cNvPr id="12" name="Shape 10"/>
-          <p:cNvSpPr/>
-          <p:nvPr/>
-        </p:nvSpPr>
-        <p:spPr>
-          <a:xfrm>
-            <a:off x="795528" y="2624328"/>
-            <a:ext cx="3015386" cy="0"/>
-          </a:xfrm>
-          <a:prstGeom prst="line">
-            <a:avLst/>
-          </a:prstGeom>
-          <a:noFill/>
-          <a:ln w="6350">
-            <a:solidFill>
-              <a:srgbClr val="CBD5E0"/>
-            </a:solidFill>
-            <a:prstDash val="solid"/>
-          </a:ln>
-        </p:spPr>
-      </p:sp>
-      <p:sp>
-        <p:nvSpPr>
-          <p:cNvPr id="13" name="Text 11"/>
-          <p:cNvSpPr/>
-          <p:nvPr/>
-        </p:nvSpPr>
-        <p:spPr>
-          <a:xfrm>
-            <a:off x="795528" y="2779776"/>
-            <a:ext cx="3015386" cy="1051560"/>
-          </a:xfrm>
-          <a:prstGeom prst="rect">
-            <a:avLst/>
-          </a:prstGeom>
-          <a:noFill/>
-          <a:ln/>
-        </p:spPr>
-        <p:txBody>
-          <a:bodyPr wrap="square" lIns="0" tIns="0" rIns="0" bIns="0" rtlCol="0" anchor="t"/>
-          <a:lstStyle/>
-          <a:p>
-            <a:pPr indent="0" marL="0">
-              <a:lnSpc>
-                <a:spcPct val="130000"/>
-              </a:lnSpc>
-              <a:buNone/>
-            </a:pPr>
-            <a:r>
-              <a:rPr lang="en-US" sz="1200" dirty="0">
-                <a:solidFill>
-                  <a:srgbClr val="10161F"/>
-                </a:solidFill>
-                <a:latin typeface="Pretendard" pitchFamily="34" charset="0"/>
-                <a:ea typeface="Pretendard" pitchFamily="34" charset="-122"/>
-                <a:cs typeface="Pretendard" pitchFamily="34" charset="-120"/>
-              </a:rPr>
-              <a:t>송파권역의 핵심 입지로, 우량한 대지 지분 가치가 하방 경직성을 강력히 지지합니다.</a:t>
-            </a:r>
-            <a:endParaRPr lang="en-US" sz="1200" dirty="0"/>
-          </a:p>
-        </p:txBody>
-      </p:sp>
-      <p:sp>
-        <p:nvSpPr>
-          <p:cNvPr id="14" name="Shape 12"/>
-          <p:cNvSpPr/>
-          <p:nvPr/>
-        </p:nvSpPr>
-        <p:spPr>
-          <a:xfrm>
-            <a:off x="4359554" y="1481328"/>
-            <a:ext cx="3472586" cy="2560320"/>
-          </a:xfrm>
-          <a:prstGeom prst="roundRect">
-            <a:avLst>
-              <a:gd name="adj" fmla="val 2857"/>
-            </a:avLst>
-          </a:prstGeom>
-          <a:solidFill>
-            <a:srgbClr val="F7FAFC"/>
-          </a:solidFill>
-          <a:ln w="10160">
-            <a:solidFill>
-              <a:srgbClr val="CBD5E0"/>
-            </a:solidFill>
-            <a:prstDash val="solid"/>
-          </a:ln>
-        </p:spPr>
-      </p:sp>
-      <p:sp>
-        <p:nvSpPr>
-          <p:cNvPr id="15" name="Shape 13"/>
-          <p:cNvSpPr/>
-          <p:nvPr/>
-        </p:nvSpPr>
-        <p:spPr>
-          <a:xfrm>
-            <a:off x="4359554" y="1481328"/>
-            <a:ext cx="3472586" cy="54864"/>
-          </a:xfrm>
-          <a:prstGeom prst="rect">
-            <a:avLst/>
-          </a:prstGeom>
-          <a:solidFill>
-            <a:srgbClr val="B98A2E"/>
-          </a:solidFill>
-          <a:ln/>
-        </p:spPr>
-      </p:sp>
-      <p:sp>
-        <p:nvSpPr>
-          <p:cNvPr id="16" name="Shape 14"/>
-          <p:cNvSpPr/>
-          <p:nvPr/>
-        </p:nvSpPr>
-        <p:spPr>
-          <a:xfrm>
-            <a:off x="4588154" y="1755648"/>
-            <a:ext cx="475488" cy="292608"/>
-          </a:xfrm>
-          <a:prstGeom prst="roundRect">
-            <a:avLst>
-              <a:gd name="adj" fmla="val 12500"/>
-            </a:avLst>
-          </a:prstGeom>
-          <a:solidFill>
-            <a:srgbClr val="D9B668"/>
-          </a:solidFill>
-          <a:ln/>
-        </p:spPr>
-      </p:sp>
-      <p:sp>
-        <p:nvSpPr>
-          <p:cNvPr id="17" name="Text 15"/>
-          <p:cNvSpPr/>
-          <p:nvPr/>
-        </p:nvSpPr>
-        <p:spPr>
-          <a:xfrm>
-            <a:off x="4588154" y="1755648"/>
-            <a:ext cx="475488" cy="292608"/>
-          </a:xfrm>
-          <a:prstGeom prst="rect">
-            <a:avLst/>
-          </a:prstGeom>
-          <a:noFill/>
-          <a:ln/>
-        </p:spPr>
-        <p:txBody>
-          <a:bodyPr wrap="square" lIns="0" tIns="0" rIns="0" bIns="0" rtlCol="0" anchor="ctr"/>
-          <a:lstStyle/>
-          <a:p>
-            <a:pPr algn="ctr" indent="0" marL="0">
-              <a:buNone/>
-            </a:pPr>
-            <a:r>
-              <a:rPr lang="en-US" sz="1100" b="1" dirty="0">
-                <a:solidFill>
-                  <a:srgbClr val="977024"/>
-                </a:solidFill>
-                <a:latin typeface="Arial" pitchFamily="34" charset="0"/>
-                <a:ea typeface="Arial" pitchFamily="34" charset="-122"/>
-                <a:cs typeface="Arial" pitchFamily="34" charset="-120"/>
-              </a:rPr>
-              <a:t>02</a:t>
-            </a:r>
-            <a:endParaRPr lang="en-US" sz="1100" dirty="0"/>
-          </a:p>
-        </p:txBody>
-      </p:sp>
-      <p:sp>
-        <p:nvSpPr>
-          <p:cNvPr id="18" name="Text 16"/>
-          <p:cNvSpPr/>
-          <p:nvPr/>
-        </p:nvSpPr>
-        <p:spPr>
-          <a:xfrm>
-            <a:off x="4588154" y="2194560"/>
-            <a:ext cx="3015386" cy="365760"/>
-          </a:xfrm>
-          <a:prstGeom prst="rect">
-            <a:avLst/>
-          </a:prstGeom>
-          <a:noFill/>
-          <a:ln/>
-        </p:spPr>
-        <p:txBody>
-          <a:bodyPr wrap="square" lIns="0" tIns="0" rIns="0" bIns="0" rtlCol="0" anchor="t"/>
-          <a:lstStyle/>
-          <a:p>
-            <a:pPr indent="0" marL="0">
-              <a:buNone/>
-            </a:pPr>
-            <a:r>
-              <a:rPr lang="en-US" sz="1500" b="1" dirty="0">
-                <a:solidFill>
-                  <a:srgbClr val="10161F"/>
-                </a:solidFill>
-                <a:latin typeface="Pretendard" pitchFamily="34" charset="0"/>
-                <a:ea typeface="Pretendard" pitchFamily="34" charset="-122"/>
-                <a:cs typeface="Pretendard" pitchFamily="34" charset="-120"/>
-              </a:rPr>
-              <a:t>확실한 월 현금흐름</a:t>
-            </a:r>
-            <a:endParaRPr lang="en-US" sz="1500" dirty="0"/>
-          </a:p>
-        </p:txBody>
-      </p:sp>
-      <p:sp>
-        <p:nvSpPr>
-          <p:cNvPr id="19" name="Shape 17"/>
-          <p:cNvSpPr/>
-          <p:nvPr/>
-        </p:nvSpPr>
-        <p:spPr>
-          <a:xfrm>
-            <a:off x="4588154" y="2624328"/>
-            <a:ext cx="3015386" cy="0"/>
-          </a:xfrm>
-          <a:prstGeom prst="line">
-            <a:avLst/>
-          </a:prstGeom>
-          <a:noFill/>
-          <a:ln w="6350">
-            <a:solidFill>
-              <a:srgbClr val="CBD5E0"/>
-            </a:solidFill>
-            <a:prstDash val="solid"/>
-          </a:ln>
-        </p:spPr>
-      </p:sp>
-      <p:sp>
-        <p:nvSpPr>
-          <p:cNvPr id="20" name="Text 18"/>
-          <p:cNvSpPr/>
-          <p:nvPr/>
-        </p:nvSpPr>
-        <p:spPr>
-          <a:xfrm>
-            <a:off x="4588154" y="2779776"/>
-            <a:ext cx="3015386" cy="1051560"/>
-          </a:xfrm>
-          <a:prstGeom prst="rect">
-            <a:avLst/>
-          </a:prstGeom>
-          <a:noFill/>
-          <a:ln/>
-        </p:spPr>
-        <p:txBody>
-          <a:bodyPr wrap="square" lIns="0" tIns="0" rIns="0" bIns="0" rtlCol="0" anchor="t"/>
-          <a:lstStyle/>
-          <a:p>
-            <a:pPr indent="0" marL="0">
-              <a:lnSpc>
-                <a:spcPct val="130000"/>
-              </a:lnSpc>
-              <a:buNone/>
-            </a:pPr>
-            <a:r>
-              <a:rPr lang="en-US" sz="1200" dirty="0">
-                <a:solidFill>
-                  <a:srgbClr val="10161F"/>
-                </a:solidFill>
-                <a:latin typeface="Pretendard" pitchFamily="34" charset="0"/>
-                <a:ea typeface="Pretendard" pitchFamily="34" charset="-122"/>
-                <a:cs typeface="Pretendard" pitchFamily="34" charset="-120"/>
-              </a:rPr>
-              <a:t>우량 테넌트 만실 운영 및 장기 임대차 구조를 기반으로 매월 안정적인 순영업소득(NOI) 창출이 기대됩니다.</a:t>
-            </a:r>
-            <a:endParaRPr lang="en-US" sz="1200" dirty="0"/>
-          </a:p>
-        </p:txBody>
-      </p:sp>
-      <p:sp>
-        <p:nvSpPr>
-          <p:cNvPr id="21" name="Shape 19"/>
-          <p:cNvSpPr/>
-          <p:nvPr/>
-        </p:nvSpPr>
-        <p:spPr>
-          <a:xfrm>
-            <a:off x="8152181" y="1481328"/>
-            <a:ext cx="3472586" cy="2560320"/>
-          </a:xfrm>
-          <a:prstGeom prst="roundRect">
-            <a:avLst>
-              <a:gd name="adj" fmla="val 2857"/>
-            </a:avLst>
-          </a:prstGeom>
-          <a:solidFill>
-            <a:srgbClr val="F7FAFC"/>
-          </a:solidFill>
-          <a:ln w="10160">
-            <a:solidFill>
-              <a:srgbClr val="CBD5E0"/>
-            </a:solidFill>
-            <a:prstDash val="solid"/>
-          </a:ln>
-        </p:spPr>
-      </p:sp>
-      <p:sp>
-        <p:nvSpPr>
-          <p:cNvPr id="22" name="Shape 20"/>
-          <p:cNvSpPr/>
-          <p:nvPr/>
-        </p:nvSpPr>
-        <p:spPr>
-          <a:xfrm>
-            <a:off x="8152181" y="1481328"/>
-            <a:ext cx="3472586" cy="54864"/>
-          </a:xfrm>
-          <a:prstGeom prst="rect">
-            <a:avLst/>
-          </a:prstGeom>
-          <a:solidFill>
-            <a:srgbClr val="B98A2E"/>
-          </a:solidFill>
-          <a:ln/>
-        </p:spPr>
-      </p:sp>
-      <p:sp>
-        <p:nvSpPr>
-          <p:cNvPr id="23" name="Shape 21"/>
-          <p:cNvSpPr/>
-          <p:nvPr/>
-        </p:nvSpPr>
-        <p:spPr>
-          <a:xfrm>
-            <a:off x="8380781" y="1755648"/>
-            <a:ext cx="475488" cy="292608"/>
-          </a:xfrm>
-          <a:prstGeom prst="roundRect">
-            <a:avLst>
-              <a:gd name="adj" fmla="val 12500"/>
-            </a:avLst>
-          </a:prstGeom>
-          <a:solidFill>
-            <a:srgbClr val="D9B668"/>
-          </a:solidFill>
-          <a:ln/>
-        </p:spPr>
-      </p:sp>
-      <p:sp>
-        <p:nvSpPr>
-          <p:cNvPr id="24" name="Text 22"/>
-          <p:cNvSpPr/>
-          <p:nvPr/>
-        </p:nvSpPr>
-        <p:spPr>
-          <a:xfrm>
-            <a:off x="8380781" y="1755648"/>
-            <a:ext cx="475488" cy="292608"/>
-          </a:xfrm>
-          <a:prstGeom prst="rect">
-            <a:avLst/>
-          </a:prstGeom>
-          <a:noFill/>
-          <a:ln/>
-        </p:spPr>
-        <p:txBody>
-          <a:bodyPr wrap="square" lIns="0" tIns="0" rIns="0" bIns="0" rtlCol="0" anchor="ctr"/>
-          <a:lstStyle/>
-          <a:p>
-            <a:pPr algn="ctr" indent="0" marL="0">
-              <a:buNone/>
-            </a:pPr>
-            <a:r>
-              <a:rPr lang="en-US" sz="1100" b="1" dirty="0">
-                <a:solidFill>
-                  <a:srgbClr val="977024"/>
-                </a:solidFill>
-                <a:latin typeface="Arial" pitchFamily="34" charset="0"/>
-                <a:ea typeface="Arial" pitchFamily="34" charset="-122"/>
-                <a:cs typeface="Arial" pitchFamily="34" charset="-120"/>
-              </a:rPr>
-              <a:t>03</a:t>
-            </a:r>
-            <a:endParaRPr lang="en-US" sz="1100" dirty="0"/>
-          </a:p>
-        </p:txBody>
-      </p:sp>
-      <p:sp>
-        <p:nvSpPr>
-          <p:cNvPr id="25" name="Text 23"/>
-          <p:cNvSpPr/>
-          <p:nvPr/>
-        </p:nvSpPr>
-        <p:spPr>
-          <a:xfrm>
-            <a:off x="8380781" y="2194560"/>
-            <a:ext cx="3015386" cy="365760"/>
-          </a:xfrm>
-          <a:prstGeom prst="rect">
-            <a:avLst/>
-          </a:prstGeom>
-          <a:noFill/>
-          <a:ln/>
-        </p:spPr>
-        <p:txBody>
-          <a:bodyPr wrap="square" lIns="0" tIns="0" rIns="0" bIns="0" rtlCol="0" anchor="t"/>
-          <a:lstStyle/>
-          <a:p>
-            <a:pPr indent="0" marL="0">
-              <a:buNone/>
-            </a:pPr>
-            <a:r>
-              <a:rPr lang="en-US" sz="1500" b="1" dirty="0">
-                <a:solidFill>
-                  <a:srgbClr val="10161F"/>
-                </a:solidFill>
-                <a:latin typeface="Pretendard" pitchFamily="34" charset="0"/>
-                <a:ea typeface="Pretendard" pitchFamily="34" charset="-122"/>
-                <a:cs typeface="Pretendard" pitchFamily="34" charset="-120"/>
-              </a:rPr>
-              <a:t>가치 상승 및 출구 전략</a:t>
-            </a:r>
-            <a:endParaRPr lang="en-US" sz="1500" dirty="0"/>
-          </a:p>
-        </p:txBody>
-      </p:sp>
-      <p:sp>
-        <p:nvSpPr>
-          <p:cNvPr id="26" name="Shape 24"/>
-          <p:cNvSpPr/>
-          <p:nvPr/>
-        </p:nvSpPr>
-        <p:spPr>
-          <a:xfrm>
-            <a:off x="8380781" y="2624328"/>
-            <a:ext cx="3015386" cy="0"/>
-          </a:xfrm>
-          <a:prstGeom prst="line">
-            <a:avLst/>
-          </a:prstGeom>
-          <a:noFill/>
-          <a:ln w="6350">
-            <a:solidFill>
-              <a:srgbClr val="CBD5E0"/>
-            </a:solidFill>
-            <a:prstDash val="solid"/>
-          </a:ln>
-        </p:spPr>
-      </p:sp>
-      <p:sp>
-        <p:nvSpPr>
-          <p:cNvPr id="27" name="Text 25"/>
-          <p:cNvSpPr/>
-          <p:nvPr/>
-        </p:nvSpPr>
-        <p:spPr>
-          <a:xfrm>
-            <a:off x="8380781" y="2779776"/>
-            <a:ext cx="3015386" cy="1051560"/>
-          </a:xfrm>
-          <a:prstGeom prst="rect">
-            <a:avLst/>
-          </a:prstGeom>
-          <a:noFill/>
-          <a:ln/>
-        </p:spPr>
-        <p:txBody>
-          <a:bodyPr wrap="square" lIns="0" tIns="0" rIns="0" bIns="0" rtlCol="0" anchor="t"/>
-          <a:lstStyle/>
-          <a:p>
-            <a:pPr indent="0" marL="0">
-              <a:lnSpc>
-                <a:spcPct val="130000"/>
-              </a:lnSpc>
-              <a:buNone/>
-            </a:pPr>
-            <a:r>
-              <a:rPr lang="en-US" sz="1200" dirty="0">
-                <a:solidFill>
-                  <a:srgbClr val="10161F"/>
-                </a:solidFill>
-                <a:latin typeface="Pretendard" pitchFamily="34" charset="0"/>
-                <a:ea typeface="Pretendard" pitchFamily="34" charset="-122"/>
-                <a:cs typeface="Pretendard" pitchFamily="34" charset="-120"/>
-              </a:rPr>
-              <a:t>현행 공법 여력을 활용한 밸류업 기회와 더불어 향후 권역 지가 상승에 따른 시세차익 실현이 유력합니다.</a:t>
-            </a:r>
-            <a:endParaRPr lang="en-US" sz="1200" dirty="0"/>
           </a:p>
         </p:txBody>
       </p:sp>
@@ -8723,9 +8269,10 @@
             <a:tbl>
               <a:tblPr/>
               <a:tblGrid>
-                <a:gridCol w="3685946"/>
-                <a:gridCol w="3685946"/>
-                <a:gridCol w="3685946"/>
+                <a:gridCol w="2764460"/>
+                <a:gridCol w="2764460"/>
+                <a:gridCol w="2764460"/>
+                <a:gridCol w="2764460"/>
               </a:tblGrid>
               <a:tr h="329184">
                 <a:tc>
@@ -8745,7 +8292,7 @@
                           <a:ea typeface="Pretendard" pitchFamily="34" charset="-122"/>
                           <a:cs typeface="Pretendard" pitchFamily="34" charset="-120"/>
                         </a:rPr>
-                        <a:t>유형</a:t>
+                        <a:t>시나리오</a:t>
                       </a:r>
                       <a:endParaRPr lang="en-US" sz="1050" dirty="0">
                         <a:latin typeface="Pretendard" charset="0"/>
@@ -8813,7 +8360,21 @@
                           <a:ea typeface="Pretendard" pitchFamily="34" charset="-122"/>
                           <a:cs typeface="Pretendard" pitchFamily="34" charset="-120"/>
                         </a:rPr>
-                        <a:t>적합도</a:t>
+                        <a:t>NOI </a:t>
+                      </a:r>
+                      <a:pPr indent="0" marL="0">
+                        <a:buNone/>
+                      </a:pPr>
+                      <a:r>
+                        <a:rPr lang="en-US" sz="1050" b="1" dirty="0">
+                          <a:solidFill>
+                            <a:srgbClr val="718096"/>
+                          </a:solidFill>
+                          <a:latin typeface="Pretendard" pitchFamily="34" charset="0"/>
+                          <a:ea typeface="Pretendard" pitchFamily="34" charset="-122"/>
+                          <a:cs typeface="Pretendard" pitchFamily="34" charset="-120"/>
+                        </a:rPr>
+                        <a:t>개선</a:t>
                       </a:r>
                       <a:endParaRPr lang="en-US" sz="1050" dirty="0">
                         <a:latin typeface="Pretendard" charset="0"/>
@@ -8881,7 +8442,117 @@
                           <a:ea typeface="Pretendard" pitchFamily="34" charset="-122"/>
                           <a:cs typeface="Pretendard" pitchFamily="34" charset="-120"/>
                         </a:rPr>
-                        <a:t>이유</a:t>
+                        <a:t>개선 </a:t>
+                      </a:r>
+                      <a:pPr indent="0" marL="0">
+                        <a:buNone/>
+                      </a:pPr>
+                      <a:r>
+                        <a:rPr lang="en-US" sz="1050" b="1" dirty="0">
+                          <a:solidFill>
+                            <a:srgbClr val="718096"/>
+                          </a:solidFill>
+                          <a:latin typeface="Pretendard" pitchFamily="34" charset="0"/>
+                          <a:ea typeface="Pretendard" pitchFamily="34" charset="-122"/>
+                          <a:cs typeface="Pretendard" pitchFamily="34" charset="-120"/>
+                        </a:rPr>
+                        <a:t>Cap </a:t>
+                      </a:r>
+                      <a:pPr indent="0" marL="0">
+                        <a:buNone/>
+                      </a:pPr>
+                      <a:r>
+                        <a:rPr lang="en-US" sz="1050" b="1" dirty="0">
+                          <a:solidFill>
+                            <a:srgbClr val="718096"/>
+                          </a:solidFill>
+                          <a:latin typeface="Pretendard" pitchFamily="34" charset="0"/>
+                          <a:ea typeface="Pretendard" pitchFamily="34" charset="-122"/>
+                          <a:cs typeface="Pretendard" pitchFamily="34" charset="-120"/>
+                        </a:rPr>
+                        <a:t>Rate</a:t>
+                      </a:r>
+                      <a:endParaRPr lang="en-US" sz="1050" dirty="0">
+                        <a:latin typeface="Pretendard" charset="0"/>
+                        <a:ea typeface="Pretendard" charset="0"/>
+                        <a:cs typeface="Pretendard" charset="0"/>
+                      </a:endParaRPr>
+                    </a:p>
+                  </a:txBody>
+                  <a:tcPr marL="50800" marR="50800" marT="25400" marB="25400" anchor="ctr">
+                    <a:lnL w="3810" cap="flat" cmpd="sng" algn="ctr">
+                      <a:solidFill>
+                        <a:srgbClr val="CBD5E0"/>
+                      </a:solidFill>
+                      <a:prstDash val="solid"/>
+                      <a:round/>
+                      <a:headEnd type="none" w="med" len="med"/>
+                      <a:tailEnd type="none" w="med" len="med"/>
+                    </a:lnL>
+                    <a:lnR w="3810" cap="flat" cmpd="sng" algn="ctr">
+                      <a:solidFill>
+                        <a:srgbClr val="CBD5E0"/>
+                      </a:solidFill>
+                      <a:prstDash val="solid"/>
+                      <a:round/>
+                      <a:headEnd type="none" w="med" len="med"/>
+                      <a:tailEnd type="none" w="med" len="med"/>
+                    </a:lnR>
+                    <a:lnT w="3810" cap="flat" cmpd="sng" algn="ctr">
+                      <a:solidFill>
+                        <a:srgbClr val="CBD5E0"/>
+                      </a:solidFill>
+                      <a:prstDash val="solid"/>
+                      <a:round/>
+                      <a:headEnd type="none" w="med" len="med"/>
+                      <a:tailEnd type="none" w="med" len="med"/>
+                    </a:lnT>
+                    <a:lnB w="3810" cap="flat" cmpd="sng" algn="ctr">
+                      <a:solidFill>
+                        <a:srgbClr val="CBD5E0"/>
+                      </a:solidFill>
+                      <a:prstDash val="solid"/>
+                      <a:round/>
+                      <a:headEnd type="none" w="med" len="med"/>
+                      <a:tailEnd type="none" w="med" len="med"/>
+                    </a:lnB>
+                    <a:solidFill>
+                      <a:srgbClr val="F7FAFC"/>
+                    </a:solidFill>
+                  </a:tcPr>
+                </a:tc>
+                <a:tc>
+                  <a:txBody>
+                    <a:bodyPr/>
+                    <a:lstStyle/>
+                    <a:p>
+                      <a:pPr indent="0" marL="0">
+                        <a:buNone/>
+                      </a:pPr>
+                      <a:r>
+                        <a:rPr lang="en-US" sz="1050" b="1" dirty="0">
+                          <a:solidFill>
+                            <a:srgbClr val="718096"/>
+                          </a:solidFill>
+                          <a:latin typeface="Pretendard" pitchFamily="34" charset="0"/>
+                          <a:ea typeface="Pretendard" pitchFamily="34" charset="-122"/>
+                          <a:cs typeface="Pretendard" pitchFamily="34" charset="-120"/>
+                        </a:rPr>
+                        <a:t>투자 </a:t>
+                      </a:r>
+                      <a:pPr indent="0" marL="0">
+                        <a:buNone/>
+                      </a:pPr>
+                      <a:r>
+                        <a:rPr lang="en-US" sz="1050" b="1" dirty="0">
+                          <a:solidFill>
+                            <a:srgbClr val="718096"/>
+                          </a:solidFill>
+                          <a:latin typeface="Pretendard" pitchFamily="34" charset="0"/>
+                          <a:ea typeface="Pretendard" pitchFamily="34" charset="-122"/>
+                          <a:cs typeface="Pretendard" pitchFamily="34" charset="-120"/>
+                        </a:rPr>
+                        <a:t>비용</a:t>
                       </a:r>
                       <a:endParaRPr lang="en-US" sz="1050" dirty="0">
                         <a:latin typeface="Pretendard" charset="0"/>
@@ -8951,7 +8622,49 @@
                           <a:ea typeface="Pretendard" pitchFamily="34" charset="-122"/>
                           <a:cs typeface="Pretendard" pitchFamily="34" charset="-120"/>
                         </a:rPr>
-                        <a:t>(임대수익)</a:t>
+                        <a:t>② </a:t>
+                      </a:r>
+                      <a:pPr indent="0" marL="0">
+                        <a:buNone/>
+                      </a:pPr>
+                      <a:r>
+                        <a:rPr lang="en-US" sz="1050" b="1" dirty="0">
+                          <a:solidFill>
+                            <a:srgbClr val="10161F"/>
+                          </a:solidFill>
+                          <a:latin typeface="Pretendard" pitchFamily="34" charset="0"/>
+                          <a:ea typeface="Pretendard" pitchFamily="34" charset="-122"/>
+                          <a:cs typeface="Pretendard" pitchFamily="34" charset="-120"/>
+                        </a:rPr>
+                        <a:t>임대료 </a:t>
+                      </a:r>
+                      <a:pPr indent="0" marL="0">
+                        <a:buNone/>
+                      </a:pPr>
+                      <a:r>
+                        <a:rPr lang="en-US" sz="1050" b="1" dirty="0">
+                          <a:solidFill>
+                            <a:srgbClr val="10161F"/>
+                          </a:solidFill>
+                          <a:latin typeface="Pretendard" pitchFamily="34" charset="0"/>
+                          <a:ea typeface="Pretendard" pitchFamily="34" charset="-122"/>
+                          <a:cs typeface="Pretendard" pitchFamily="34" charset="-120"/>
+                        </a:rPr>
+                        <a:t>현실화 </a:t>
+                      </a:r>
+                      <a:pPr indent="0" marL="0">
+                        <a:buNone/>
+                      </a:pPr>
+                      <a:r>
+                        <a:rPr lang="en-US" sz="1050" b="1" dirty="0">
+                          <a:solidFill>
+                            <a:srgbClr val="10161F"/>
+                          </a:solidFill>
+                          <a:latin typeface="Pretendard" pitchFamily="34" charset="0"/>
+                          <a:ea typeface="Pretendard" pitchFamily="34" charset="-122"/>
+                          <a:cs typeface="Pretendard" pitchFamily="34" charset="-120"/>
+                        </a:rPr>
+                        <a:t>(+5%)</a:t>
                       </a:r>
                       <a:endParaRPr lang="en-US" sz="1050" dirty="0">
                         <a:latin typeface="Pretendard" charset="0"/>
@@ -9019,7 +8732,49 @@
                           <a:ea typeface="Pretendard" pitchFamily="34" charset="-122"/>
                           <a:cs typeface="Pretendard" pitchFamily="34" charset="-120"/>
                         </a:rPr>
-                        <a:t>★★★★★</a:t>
+                        <a:t>+약 </a:t>
+                      </a:r>
+                      <a:pPr indent="0" marL="0">
+                        <a:buNone/>
+                      </a:pPr>
+                      <a:r>
+                        <a:rPr lang="en-US" sz="1050" dirty="0">
+                          <a:solidFill>
+                            <a:srgbClr val="10161F"/>
+                          </a:solidFill>
+                          <a:latin typeface="Pretendard" pitchFamily="34" charset="0"/>
+                          <a:ea typeface="Pretendard" pitchFamily="34" charset="-122"/>
+                          <a:cs typeface="Pretendard" pitchFamily="34" charset="-120"/>
+                        </a:rPr>
+                        <a:t>0.11억 </a:t>
+                      </a:r>
+                      <a:pPr indent="0" marL="0">
+                        <a:buNone/>
+                      </a:pPr>
+                      <a:r>
+                        <a:rPr lang="en-US" sz="1050" dirty="0">
+                          <a:solidFill>
+                            <a:srgbClr val="10161F"/>
+                          </a:solidFill>
+                          <a:latin typeface="Pretendard" pitchFamily="34" charset="0"/>
+                          <a:ea typeface="Pretendard" pitchFamily="34" charset="-122"/>
+                          <a:cs typeface="Pretendard" pitchFamily="34" charset="-120"/>
+                        </a:rPr>
+                        <a:t>원 </a:t>
+                      </a:r>
+                      <a:pPr indent="0" marL="0">
+                        <a:buNone/>
+                      </a:pPr>
+                      <a:r>
+                        <a:rPr lang="en-US" sz="1050" dirty="0">
+                          <a:solidFill>
+                            <a:srgbClr val="10161F"/>
+                          </a:solidFill>
+                          <a:latin typeface="Pretendard" pitchFamily="34" charset="0"/>
+                          <a:ea typeface="Pretendard" pitchFamily="34" charset="-122"/>
+                          <a:cs typeface="Pretendard" pitchFamily="34" charset="-120"/>
+                        </a:rPr>
+                        <a:t>(+5%)</a:t>
                       </a:r>
                       <a:endParaRPr lang="en-US" sz="1050" dirty="0">
                         <a:latin typeface="Pretendard" charset="0"/>
@@ -9087,8 +8842,62 @@
                           <a:ea typeface="Pretendard" pitchFamily="34" charset="-122"/>
                           <a:cs typeface="Pretendard" pitchFamily="34" charset="-120"/>
                         </a:rPr>
-                        <a:t>안정 </a:t>
+                        <a:t>3.27%</a:t>
                       </a:r>
+                      <a:endParaRPr lang="en-US" sz="1050" dirty="0">
+                        <a:latin typeface="Pretendard" charset="0"/>
+                        <a:ea typeface="Pretendard" charset="0"/>
+                        <a:cs typeface="Pretendard" charset="0"/>
+                      </a:endParaRPr>
+                    </a:p>
+                  </a:txBody>
+                  <a:tcPr marL="50800" marR="50800" marT="25400" marB="25400" anchor="ctr">
+                    <a:lnL w="3810" cap="flat" cmpd="sng" algn="ctr">
+                      <a:solidFill>
+                        <a:srgbClr val="CBD5E0"/>
+                      </a:solidFill>
+                      <a:prstDash val="solid"/>
+                      <a:round/>
+                      <a:headEnd type="none" w="med" len="med"/>
+                      <a:tailEnd type="none" w="med" len="med"/>
+                    </a:lnL>
+                    <a:lnR w="3810" cap="flat" cmpd="sng" algn="ctr">
+                      <a:solidFill>
+                        <a:srgbClr val="CBD5E0"/>
+                      </a:solidFill>
+                      <a:prstDash val="solid"/>
+                      <a:round/>
+                      <a:headEnd type="none" w="med" len="med"/>
+                      <a:tailEnd type="none" w="med" len="med"/>
+                    </a:lnR>
+                    <a:lnT w="3810" cap="flat" cmpd="sng" algn="ctr">
+                      <a:solidFill>
+                        <a:srgbClr val="CBD5E0"/>
+                      </a:solidFill>
+                      <a:prstDash val="solid"/>
+                      <a:round/>
+                      <a:headEnd type="none" w="med" len="med"/>
+                      <a:tailEnd type="none" w="med" len="med"/>
+                    </a:lnT>
+                    <a:lnB w="3810" cap="flat" cmpd="sng" algn="ctr">
+                      <a:solidFill>
+                        <a:srgbClr val="CBD5E0"/>
+                      </a:solidFill>
+                      <a:prstDash val="solid"/>
+                      <a:round/>
+                      <a:headEnd type="none" w="med" len="med"/>
+                      <a:tailEnd type="none" w="med" len="med"/>
+                    </a:lnB>
+                    <a:solidFill>
+                      <a:srgbClr val="FFFFFF"/>
+                    </a:solidFill>
+                  </a:tcPr>
+                </a:tc>
+                <a:tc>
+                  <a:txBody>
+                    <a:bodyPr/>
+                    <a:lstStyle/>
+                    <a:p>
                       <a:pPr indent="0" marL="0">
                         <a:buNone/>
                       </a:pPr>
@@ -9101,63 +8910,7 @@
                           <a:ea typeface="Pretendard" pitchFamily="34" charset="-122"/>
                           <a:cs typeface="Pretendard" pitchFamily="34" charset="-120"/>
                         </a:rPr>
-                        <a:t>MD, </a:t>
-                      </a:r>
-                      <a:pPr indent="0" marL="0">
-                        <a:buNone/>
-                      </a:pPr>
-                      <a:r>
-                        <a:rPr lang="en-US" sz="1050" dirty="0">
-                          <a:solidFill>
-                            <a:srgbClr val="10161F"/>
-                          </a:solidFill>
-                          <a:latin typeface="Pretendard" pitchFamily="34" charset="0"/>
-                          <a:ea typeface="Pretendard" pitchFamily="34" charset="-122"/>
-                          <a:cs typeface="Pretendard" pitchFamily="34" charset="-120"/>
-                        </a:rPr>
-                        <a:t>예측 </a:t>
-                      </a:r>
-                      <a:pPr indent="0" marL="0">
-                        <a:buNone/>
-                      </a:pPr>
-                      <a:r>
-                        <a:rPr lang="en-US" sz="1050" dirty="0">
-                          <a:solidFill>
-                            <a:srgbClr val="10161F"/>
-                          </a:solidFill>
-                          <a:latin typeface="Pretendard" pitchFamily="34" charset="0"/>
-                          <a:ea typeface="Pretendard" pitchFamily="34" charset="-122"/>
-                          <a:cs typeface="Pretendard" pitchFamily="34" charset="-120"/>
-                        </a:rPr>
-                        <a:t>가능한 </a:t>
-                      </a:r>
-                      <a:pPr indent="0" marL="0">
-                        <a:buNone/>
-                      </a:pPr>
-                      <a:r>
-                        <a:rPr lang="en-US" sz="1050" dirty="0">
-                          <a:solidFill>
-                            <a:srgbClr val="10161F"/>
-                          </a:solidFill>
-                          <a:latin typeface="Pretendard" pitchFamily="34" charset="0"/>
-                          <a:ea typeface="Pretendard" pitchFamily="34" charset="-122"/>
-                          <a:cs typeface="Pretendard" pitchFamily="34" charset="-120"/>
-                        </a:rPr>
-                        <a:t>월 </a:t>
-                      </a:r>
-                      <a:pPr indent="0" marL="0">
-                        <a:buNone/>
-                      </a:pPr>
-                      <a:r>
-                        <a:rPr lang="en-US" sz="1050" dirty="0">
-                          <a:solidFill>
-                            <a:srgbClr val="10161F"/>
-                          </a:solidFill>
-                          <a:latin typeface="Pretendard" pitchFamily="34" charset="0"/>
-                          <a:ea typeface="Pretendard" pitchFamily="34" charset="-122"/>
-                          <a:cs typeface="Pretendard" pitchFamily="34" charset="-120"/>
-                        </a:rPr>
-                        <a:t>현금흐름</a:t>
+                        <a:t>불필요</a:t>
                       </a:r>
                       <a:endParaRPr lang="en-US" sz="1050" dirty="0">
                         <a:latin typeface="Pretendard" charset="0"/>
@@ -9227,7 +8980,7 @@
                           <a:ea typeface="Pretendard" pitchFamily="34" charset="-122"/>
                           <a:cs typeface="Pretendard" pitchFamily="34" charset="-120"/>
                         </a:rPr>
-                        <a:t>상가 </a:t>
+                        <a:t>③ </a:t>
                       </a:r>
                       <a:pPr indent="0" marL="0">
                         <a:buNone/>
@@ -9241,7 +8994,7 @@
                           <a:ea typeface="Pretendard" pitchFamily="34" charset="-122"/>
                           <a:cs typeface="Pretendard" pitchFamily="34" charset="-120"/>
                         </a:rPr>
-                        <a:t>전문 </a:t>
+                        <a:t>리모델링 </a:t>
                       </a:r>
                       <a:pPr indent="0" marL="0">
                         <a:buNone/>
@@ -9255,7 +9008,7 @@
                           <a:ea typeface="Pretendard" pitchFamily="34" charset="-122"/>
                           <a:cs typeface="Pretendard" pitchFamily="34" charset="-120"/>
                         </a:rPr>
-                        <a:t>임대 </a:t>
+                        <a:t>후 </a:t>
                       </a:r>
                       <a:pPr indent="0" marL="0">
                         <a:buNone/>
@@ -9269,7 +9022,21 @@
                           <a:ea typeface="Pretendard" pitchFamily="34" charset="-122"/>
                           <a:cs typeface="Pretendard" pitchFamily="34" charset="-120"/>
                         </a:rPr>
-                        <a:t>운영사</a:t>
+                        <a:t>임대료 </a:t>
+                      </a:r>
+                      <a:pPr indent="0" marL="0">
+                        <a:buNone/>
+                      </a:pPr>
+                      <a:r>
+                        <a:rPr lang="en-US" sz="1050" b="1" dirty="0">
+                          <a:solidFill>
+                            <a:srgbClr val="10161F"/>
+                          </a:solidFill>
+                          <a:latin typeface="Pretendard" pitchFamily="34" charset="0"/>
+                          <a:ea typeface="Pretendard" pitchFamily="34" charset="-122"/>
+                          <a:cs typeface="Pretendard" pitchFamily="34" charset="-120"/>
+                        </a:rPr>
+                        <a:t>상승</a:t>
                       </a:r>
                       <a:endParaRPr lang="en-US" sz="1050" dirty="0">
                         <a:latin typeface="Pretendard" charset="0"/>
@@ -9337,7 +9104,49 @@
                           <a:ea typeface="Pretendard" pitchFamily="34" charset="-122"/>
                           <a:cs typeface="Pretendard" pitchFamily="34" charset="-120"/>
                         </a:rPr>
-                        <a:t>★★★★</a:t>
+                        <a:t>+약 </a:t>
+                      </a:r>
+                      <a:pPr indent="0" marL="0">
+                        <a:buNone/>
+                      </a:pPr>
+                      <a:r>
+                        <a:rPr lang="en-US" sz="1050" dirty="0">
+                          <a:solidFill>
+                            <a:srgbClr val="10161F"/>
+                          </a:solidFill>
+                          <a:latin typeface="Pretendard" pitchFamily="34" charset="0"/>
+                          <a:ea typeface="Pretendard" pitchFamily="34" charset="-122"/>
+                          <a:cs typeface="Pretendard" pitchFamily="34" charset="-120"/>
+                        </a:rPr>
+                        <a:t>0.18억 </a:t>
+                      </a:r>
+                      <a:pPr indent="0" marL="0">
+                        <a:buNone/>
+                      </a:pPr>
+                      <a:r>
+                        <a:rPr lang="en-US" sz="1050" dirty="0">
+                          <a:solidFill>
+                            <a:srgbClr val="10161F"/>
+                          </a:solidFill>
+                          <a:latin typeface="Pretendard" pitchFamily="34" charset="0"/>
+                          <a:ea typeface="Pretendard" pitchFamily="34" charset="-122"/>
+                          <a:cs typeface="Pretendard" pitchFamily="34" charset="-120"/>
+                        </a:rPr>
+                        <a:t>원 </a:t>
+                      </a:r>
+                      <a:pPr indent="0" marL="0">
+                        <a:buNone/>
+                      </a:pPr>
+                      <a:r>
+                        <a:rPr lang="en-US" sz="1050" dirty="0">
+                          <a:solidFill>
+                            <a:srgbClr val="10161F"/>
+                          </a:solidFill>
+                          <a:latin typeface="Pretendard" pitchFamily="34" charset="0"/>
+                          <a:ea typeface="Pretendard" pitchFamily="34" charset="-122"/>
+                          <a:cs typeface="Pretendard" pitchFamily="34" charset="-120"/>
+                        </a:rPr>
+                        <a:t>(+8%)</a:t>
                       </a:r>
                       <a:endParaRPr lang="en-US" sz="1050" dirty="0">
                         <a:latin typeface="Pretendard" charset="0"/>
@@ -9405,7 +9214,75 @@
                           <a:ea typeface="Pretendard" pitchFamily="34" charset="-122"/>
                           <a:cs typeface="Pretendard" pitchFamily="34" charset="-120"/>
                         </a:rPr>
-                        <a:t>MD </a:t>
+                        <a:t>3.37%</a:t>
+                      </a:r>
+                      <a:endParaRPr lang="en-US" sz="1050" dirty="0">
+                        <a:latin typeface="Pretendard" charset="0"/>
+                        <a:ea typeface="Pretendard" charset="0"/>
+                        <a:cs typeface="Pretendard" charset="0"/>
+                      </a:endParaRPr>
+                    </a:p>
+                  </a:txBody>
+                  <a:tcPr marL="50800" marR="50800" marT="25400" marB="25400" anchor="ctr">
+                    <a:lnL w="3810" cap="flat" cmpd="sng" algn="ctr">
+                      <a:solidFill>
+                        <a:srgbClr val="CBD5E0"/>
+                      </a:solidFill>
+                      <a:prstDash val="solid"/>
+                      <a:round/>
+                      <a:headEnd type="none" w="med" len="med"/>
+                      <a:tailEnd type="none" w="med" len="med"/>
+                    </a:lnL>
+                    <a:lnR w="3810" cap="flat" cmpd="sng" algn="ctr">
+                      <a:solidFill>
+                        <a:srgbClr val="CBD5E0"/>
+                      </a:solidFill>
+                      <a:prstDash val="solid"/>
+                      <a:round/>
+                      <a:headEnd type="none" w="med" len="med"/>
+                      <a:tailEnd type="none" w="med" len="med"/>
+                    </a:lnR>
+                    <a:lnT w="3810" cap="flat" cmpd="sng" algn="ctr">
+                      <a:solidFill>
+                        <a:srgbClr val="CBD5E0"/>
+                      </a:solidFill>
+                      <a:prstDash val="solid"/>
+                      <a:round/>
+                      <a:headEnd type="none" w="med" len="med"/>
+                      <a:tailEnd type="none" w="med" len="med"/>
+                    </a:lnT>
+                    <a:lnB w="3810" cap="flat" cmpd="sng" algn="ctr">
+                      <a:solidFill>
+                        <a:srgbClr val="CBD5E0"/>
+                      </a:solidFill>
+                      <a:prstDash val="solid"/>
+                      <a:round/>
+                      <a:headEnd type="none" w="med" len="med"/>
+                      <a:tailEnd type="none" w="med" len="med"/>
+                    </a:lnB>
+                    <a:solidFill>
+                      <a:srgbClr val="F7FAFC"/>
+                    </a:solidFill>
+                  </a:tcPr>
+                </a:tc>
+                <a:tc>
+                  <a:txBody>
+                    <a:bodyPr/>
+                    <a:lstStyle/>
+                    <a:p>
+                      <a:pPr indent="0" marL="0">
+                        <a:buNone/>
+                      </a:pPr>
+                      <a:r>
+                        <a:rPr lang="en-US" sz="1050" dirty="0">
+                          <a:solidFill>
+                            <a:srgbClr val="10161F"/>
+                          </a:solidFill>
+                          <a:latin typeface="Pretendard" pitchFamily="34" charset="0"/>
+                          <a:ea typeface="Pretendard" pitchFamily="34" charset="-122"/>
+                          <a:cs typeface="Pretendard" pitchFamily="34" charset="-120"/>
+                        </a:rPr>
+                        <a:t>약 </a:t>
                       </a:r>
                       <a:pPr indent="0" marL="0">
                         <a:buNone/>
@@ -9419,7 +9296,7 @@
                           <a:ea typeface="Pretendard" pitchFamily="34" charset="-122"/>
                           <a:cs typeface="Pretendard" pitchFamily="34" charset="-120"/>
                         </a:rPr>
-                        <a:t>관리 </a:t>
+                        <a:t>15.00억 </a:t>
                       </a:r>
                       <a:pPr indent="0" marL="0">
                         <a:buNone/>
@@ -9433,49 +9310,7 @@
                           <a:ea typeface="Pretendard" pitchFamily="34" charset="-122"/>
                           <a:cs typeface="Pretendard" pitchFamily="34" charset="-120"/>
                         </a:rPr>
-                        <a:t>노하우 </a:t>
-                      </a:r>
-                      <a:pPr indent="0" marL="0">
-                        <a:buNone/>
-                      </a:pPr>
-                      <a:r>
-                        <a:rPr lang="en-US" sz="1050" dirty="0">
-                          <a:solidFill>
-                            <a:srgbClr val="10161F"/>
-                          </a:solidFill>
-                          <a:latin typeface="Pretendard" pitchFamily="34" charset="0"/>
-                          <a:ea typeface="Pretendard" pitchFamily="34" charset="-122"/>
-                          <a:cs typeface="Pretendard" pitchFamily="34" charset="-120"/>
-                        </a:rPr>
-                        <a:t>보유 </a:t>
-                      </a:r>
-                      <a:pPr indent="0" marL="0">
-                        <a:buNone/>
-                      </a:pPr>
-                      <a:r>
-                        <a:rPr lang="en-US" sz="1050" dirty="0">
-                          <a:solidFill>
-                            <a:srgbClr val="10161F"/>
-                          </a:solidFill>
-                          <a:latin typeface="Pretendard" pitchFamily="34" charset="0"/>
-                          <a:ea typeface="Pretendard" pitchFamily="34" charset="-122"/>
-                          <a:cs typeface="Pretendard" pitchFamily="34" charset="-120"/>
-                        </a:rPr>
-                        <a:t>시 </a:t>
-                      </a:r>
-                      <a:pPr indent="0" marL="0">
-                        <a:buNone/>
-                      </a:pPr>
-                      <a:r>
-                        <a:rPr lang="en-US" sz="1050" dirty="0">
-                          <a:solidFill>
-                            <a:srgbClr val="10161F"/>
-                          </a:solidFill>
-                          <a:latin typeface="Pretendard" pitchFamily="34" charset="0"/>
-                          <a:ea typeface="Pretendard" pitchFamily="34" charset="-122"/>
-                          <a:cs typeface="Pretendard" pitchFamily="34" charset="-120"/>
-                        </a:rPr>
-                        <a:t>최적</a:t>
+                        <a:t>원</a:t>
                       </a:r>
                       <a:endParaRPr lang="en-US" sz="1050" dirty="0">
                         <a:latin typeface="Pretendard" charset="0"/>
@@ -9527,323 +9362,19 @@
                   </a:tcPr>
                 </a:tc>
               </a:tr>
-              <a:tr h="329184">
-                <a:tc>
-                  <a:txBody>
-                    <a:bodyPr/>
-                    <a:lstStyle/>
-                    <a:p>
-                      <a:pPr indent="0" marL="0">
-                        <a:buNone/>
-                      </a:pPr>
-                      <a:r>
-                        <a:rPr lang="en-US" sz="1050" b="1" dirty="0">
-                          <a:solidFill>
-                            <a:srgbClr val="10161F"/>
-                          </a:solidFill>
-                          <a:latin typeface="Pretendard" pitchFamily="34" charset="0"/>
-                          <a:ea typeface="Pretendard" pitchFamily="34" charset="-122"/>
-                          <a:cs typeface="Pretendard" pitchFamily="34" charset="-120"/>
-                        </a:rPr>
-                        <a:t>프랜차이즈 </a:t>
-                      </a:r>
-                      <a:pPr indent="0" marL="0">
-                        <a:buNone/>
-                      </a:pPr>
-                      <a:r>
-                        <a:rPr lang="en-US" sz="1050" b="1" dirty="0">
-                          <a:solidFill>
-                            <a:srgbClr val="10161F"/>
-                          </a:solidFill>
-                          <a:latin typeface="Pretendard" pitchFamily="34" charset="0"/>
-                          <a:ea typeface="Pretendard" pitchFamily="34" charset="-122"/>
-                          <a:cs typeface="Pretendard" pitchFamily="34" charset="-120"/>
-                        </a:rPr>
-                        <a:t>본사 </a:t>
-                      </a:r>
-                      <a:pPr indent="0" marL="0">
-                        <a:buNone/>
-                      </a:pPr>
-                      <a:r>
-                        <a:rPr lang="en-US" sz="1050" b="1" dirty="0">
-                          <a:solidFill>
-                            <a:srgbClr val="10161F"/>
-                          </a:solidFill>
-                          <a:latin typeface="Pretendard" pitchFamily="34" charset="0"/>
-                          <a:ea typeface="Pretendard" pitchFamily="34" charset="-122"/>
-                          <a:cs typeface="Pretendard" pitchFamily="34" charset="-120"/>
-                        </a:rPr>
-                        <a:t>직매장</a:t>
-                      </a:r>
-                      <a:endParaRPr lang="en-US" sz="1050" dirty="0">
-                        <a:latin typeface="Pretendard" charset="0"/>
-                        <a:ea typeface="Pretendard" charset="0"/>
-                        <a:cs typeface="Pretendard" charset="0"/>
-                      </a:endParaRPr>
-                    </a:p>
-                  </a:txBody>
-                  <a:tcPr marL="50800" marR="50800" marT="25400" marB="25400" anchor="ctr">
-                    <a:lnL w="3810" cap="flat" cmpd="sng" algn="ctr">
-                      <a:solidFill>
-                        <a:srgbClr val="CBD5E0"/>
-                      </a:solidFill>
-                      <a:prstDash val="solid"/>
-                      <a:round/>
-                      <a:headEnd type="none" w="med" len="med"/>
-                      <a:tailEnd type="none" w="med" len="med"/>
-                    </a:lnL>
-                    <a:lnR w="3810" cap="flat" cmpd="sng" algn="ctr">
-                      <a:solidFill>
-                        <a:srgbClr val="CBD5E0"/>
-                      </a:solidFill>
-                      <a:prstDash val="solid"/>
-                      <a:round/>
-                      <a:headEnd type="none" w="med" len="med"/>
-                      <a:tailEnd type="none" w="med" len="med"/>
-                    </a:lnR>
-                    <a:lnT w="3810" cap="flat" cmpd="sng" algn="ctr">
-                      <a:solidFill>
-                        <a:srgbClr val="CBD5E0"/>
-                      </a:solidFill>
-                      <a:prstDash val="solid"/>
-                      <a:round/>
-                      <a:headEnd type="none" w="med" len="med"/>
-                      <a:tailEnd type="none" w="med" len="med"/>
-                    </a:lnT>
-                    <a:lnB w="3810" cap="flat" cmpd="sng" algn="ctr">
-                      <a:solidFill>
-                        <a:srgbClr val="CBD5E0"/>
-                      </a:solidFill>
-                      <a:prstDash val="solid"/>
-                      <a:round/>
-                      <a:headEnd type="none" w="med" len="med"/>
-                      <a:tailEnd type="none" w="med" len="med"/>
-                    </a:lnB>
-                    <a:solidFill>
-                      <a:srgbClr val="FFFFFF"/>
-                    </a:solidFill>
-                  </a:tcPr>
-                </a:tc>
-                <a:tc>
-                  <a:txBody>
-                    <a:bodyPr/>
-                    <a:lstStyle/>
-                    <a:p>
-                      <a:pPr indent="0" marL="0">
-                        <a:buNone/>
-                      </a:pPr>
-                      <a:r>
-                        <a:rPr lang="en-US" sz="1050" dirty="0">
-                          <a:solidFill>
-                            <a:srgbClr val="10161F"/>
-                          </a:solidFill>
-                          <a:latin typeface="Pretendard" pitchFamily="34" charset="0"/>
-                          <a:ea typeface="Pretendard" pitchFamily="34" charset="-122"/>
-                          <a:cs typeface="Pretendard" pitchFamily="34" charset="-120"/>
-                        </a:rPr>
-                        <a:t>★★★</a:t>
-                      </a:r>
-                      <a:endParaRPr lang="en-US" sz="1050" dirty="0">
-                        <a:latin typeface="Pretendard" charset="0"/>
-                        <a:ea typeface="Pretendard" charset="0"/>
-                        <a:cs typeface="Pretendard" charset="0"/>
-                      </a:endParaRPr>
-                    </a:p>
-                  </a:txBody>
-                  <a:tcPr marL="50800" marR="50800" marT="25400" marB="25400" anchor="ctr">
-                    <a:lnL w="3810" cap="flat" cmpd="sng" algn="ctr">
-                      <a:solidFill>
-                        <a:srgbClr val="CBD5E0"/>
-                      </a:solidFill>
-                      <a:prstDash val="solid"/>
-                      <a:round/>
-                      <a:headEnd type="none" w="med" len="med"/>
-                      <a:tailEnd type="none" w="med" len="med"/>
-                    </a:lnL>
-                    <a:lnR w="3810" cap="flat" cmpd="sng" algn="ctr">
-                      <a:solidFill>
-                        <a:srgbClr val="CBD5E0"/>
-                      </a:solidFill>
-                      <a:prstDash val="solid"/>
-                      <a:round/>
-                      <a:headEnd type="none" w="med" len="med"/>
-                      <a:tailEnd type="none" w="med" len="med"/>
-                    </a:lnR>
-                    <a:lnT w="3810" cap="flat" cmpd="sng" algn="ctr">
-                      <a:solidFill>
-                        <a:srgbClr val="CBD5E0"/>
-                      </a:solidFill>
-                      <a:prstDash val="solid"/>
-                      <a:round/>
-                      <a:headEnd type="none" w="med" len="med"/>
-                      <a:tailEnd type="none" w="med" len="med"/>
-                    </a:lnT>
-                    <a:lnB w="3810" cap="flat" cmpd="sng" algn="ctr">
-                      <a:solidFill>
-                        <a:srgbClr val="CBD5E0"/>
-                      </a:solidFill>
-                      <a:prstDash val="solid"/>
-                      <a:round/>
-                      <a:headEnd type="none" w="med" len="med"/>
-                      <a:tailEnd type="none" w="med" len="med"/>
-                    </a:lnB>
-                    <a:solidFill>
-                      <a:srgbClr val="FFFFFF"/>
-                    </a:solidFill>
-                  </a:tcPr>
-                </a:tc>
-                <a:tc>
-                  <a:txBody>
-                    <a:bodyPr/>
-                    <a:lstStyle/>
-                    <a:p>
-                      <a:pPr indent="0" marL="0">
-                        <a:buNone/>
-                      </a:pPr>
-                      <a:r>
-                        <a:rPr lang="en-US" sz="1050" dirty="0">
-                          <a:solidFill>
-                            <a:srgbClr val="10161F"/>
-                          </a:solidFill>
-                          <a:latin typeface="Pretendard" pitchFamily="34" charset="0"/>
-                          <a:ea typeface="Pretendard" pitchFamily="34" charset="-122"/>
-                          <a:cs typeface="Pretendard" pitchFamily="34" charset="-120"/>
-                        </a:rPr>
-                        <a:t>브랜드 </a:t>
-                      </a:r>
-                      <a:pPr indent="0" marL="0">
-                        <a:buNone/>
-                      </a:pPr>
-                      <a:r>
-                        <a:rPr lang="en-US" sz="1050" dirty="0">
-                          <a:solidFill>
-                            <a:srgbClr val="10161F"/>
-                          </a:solidFill>
-                          <a:latin typeface="Pretendard" pitchFamily="34" charset="0"/>
-                          <a:ea typeface="Pretendard" pitchFamily="34" charset="-122"/>
-                          <a:cs typeface="Pretendard" pitchFamily="34" charset="-120"/>
-                        </a:rPr>
-                        <a:t>노출 </a:t>
-                      </a:r>
-                      <a:pPr indent="0" marL="0">
-                        <a:buNone/>
-                      </a:pPr>
-                      <a:r>
-                        <a:rPr lang="en-US" sz="1050" dirty="0">
-                          <a:solidFill>
-                            <a:srgbClr val="10161F"/>
-                          </a:solidFill>
-                          <a:latin typeface="Pretendard" pitchFamily="34" charset="0"/>
-                          <a:ea typeface="Pretendard" pitchFamily="34" charset="-122"/>
-                          <a:cs typeface="Pretendard" pitchFamily="34" charset="-120"/>
-                        </a:rPr>
-                        <a:t>+ </a:t>
-                      </a:r>
-                      <a:pPr indent="0" marL="0">
-                        <a:buNone/>
-                      </a:pPr>
-                      <a:r>
-                        <a:rPr lang="en-US" sz="1050" dirty="0">
-                          <a:solidFill>
-                            <a:srgbClr val="10161F"/>
-                          </a:solidFill>
-                          <a:latin typeface="Pretendard" pitchFamily="34" charset="0"/>
-                          <a:ea typeface="Pretendard" pitchFamily="34" charset="-122"/>
-                          <a:cs typeface="Pretendard" pitchFamily="34" charset="-120"/>
-                        </a:rPr>
-                        <a:t>직영 </a:t>
-                      </a:r>
-                      <a:pPr indent="0" marL="0">
-                        <a:buNone/>
-                      </a:pPr>
-                      <a:r>
-                        <a:rPr lang="en-US" sz="1050" dirty="0">
-                          <a:solidFill>
-                            <a:srgbClr val="10161F"/>
-                          </a:solidFill>
-                          <a:latin typeface="Pretendard" pitchFamily="34" charset="0"/>
-                          <a:ea typeface="Pretendard" pitchFamily="34" charset="-122"/>
-                          <a:cs typeface="Pretendard" pitchFamily="34" charset="-120"/>
-                        </a:rPr>
-                        <a:t>운영 </a:t>
-                      </a:r>
-                      <a:pPr indent="0" marL="0">
-                        <a:buNone/>
-                      </a:pPr>
-                      <a:r>
-                        <a:rPr lang="en-US" sz="1050" dirty="0">
-                          <a:solidFill>
-                            <a:srgbClr val="10161F"/>
-                          </a:solidFill>
-                          <a:latin typeface="Pretendard" pitchFamily="34" charset="0"/>
-                          <a:ea typeface="Pretendard" pitchFamily="34" charset="-122"/>
-                          <a:cs typeface="Pretendard" pitchFamily="34" charset="-120"/>
-                        </a:rPr>
-                        <a:t>가능</a:t>
-                      </a:r>
-                      <a:endParaRPr lang="en-US" sz="1050" dirty="0">
-                        <a:latin typeface="Pretendard" charset="0"/>
-                        <a:ea typeface="Pretendard" charset="0"/>
-                        <a:cs typeface="Pretendard" charset="0"/>
-                      </a:endParaRPr>
-                    </a:p>
-                  </a:txBody>
-                  <a:tcPr marL="50800" marR="50800" marT="25400" marB="25400" anchor="ctr">
-                    <a:lnL w="3810" cap="flat" cmpd="sng" algn="ctr">
-                      <a:solidFill>
-                        <a:srgbClr val="CBD5E0"/>
-                      </a:solidFill>
-                      <a:prstDash val="solid"/>
-                      <a:round/>
-                      <a:headEnd type="none" w="med" len="med"/>
-                      <a:tailEnd type="none" w="med" len="med"/>
-                    </a:lnL>
-                    <a:lnR w="3810" cap="flat" cmpd="sng" algn="ctr">
-                      <a:solidFill>
-                        <a:srgbClr val="CBD5E0"/>
-                      </a:solidFill>
-                      <a:prstDash val="solid"/>
-                      <a:round/>
-                      <a:headEnd type="none" w="med" len="med"/>
-                      <a:tailEnd type="none" w="med" len="med"/>
-                    </a:lnR>
-                    <a:lnT w="3810" cap="flat" cmpd="sng" algn="ctr">
-                      <a:solidFill>
-                        <a:srgbClr val="CBD5E0"/>
-                      </a:solidFill>
-                      <a:prstDash val="solid"/>
-                      <a:round/>
-                      <a:headEnd type="none" w="med" len="med"/>
-                      <a:tailEnd type="none" w="med" len="med"/>
-                    </a:lnT>
-                    <a:lnB w="3810" cap="flat" cmpd="sng" algn="ctr">
-                      <a:solidFill>
-                        <a:srgbClr val="CBD5E0"/>
-                      </a:solidFill>
-                      <a:prstDash val="solid"/>
-                      <a:round/>
-                      <a:headEnd type="none" w="med" len="med"/>
-                      <a:tailEnd type="none" w="med" len="med"/>
-                    </a:lnB>
-                    <a:solidFill>
-                      <a:srgbClr val="FFFFFF"/>
-                    </a:solidFill>
-                  </a:tcPr>
-                </a:tc>
-              </a:tr>
             </a:tbl>
           </a:graphicData>
         </a:graphic>
       </p:graphicFrame>
       <p:sp>
         <p:nvSpPr>
-          <p:cNvPr id="29" name="Shape 26"/>
-          <p:cNvSpPr/>
-          <p:nvPr/>
-        </p:nvSpPr>
-        <p:spPr>
-          <a:xfrm>
-            <a:off x="566928" y="5678424"/>
+          <p:cNvPr id="8" name="Shape 5"/>
+          <p:cNvSpPr/>
+          <p:nvPr/>
+        </p:nvSpPr>
+        <p:spPr>
+          <a:xfrm>
+            <a:off x="566928" y="5349240"/>
             <a:ext cx="11057839" cy="804672"/>
           </a:xfrm>
           <a:prstGeom prst="roundRect">
@@ -9864,13 +9395,13 @@
       </p:sp>
       <p:sp>
         <p:nvSpPr>
-          <p:cNvPr id="30" name="Text 27"/>
-          <p:cNvSpPr/>
-          <p:nvPr/>
-        </p:nvSpPr>
-        <p:spPr>
-          <a:xfrm>
-            <a:off x="749808" y="5788152"/>
+          <p:cNvPr id="9" name="Text 6"/>
+          <p:cNvSpPr/>
+          <p:nvPr/>
+        </p:nvSpPr>
+        <p:spPr>
+          <a:xfrm>
+            <a:off x="749808" y="5458968"/>
             <a:ext cx="1691640" cy="256032"/>
           </a:xfrm>
           <a:prstGeom prst="rect">
@@ -9903,13 +9434,13 @@
       </p:sp>
       <p:sp>
         <p:nvSpPr>
-          <p:cNvPr id="31" name="Text 28"/>
-          <p:cNvSpPr/>
-          <p:nvPr/>
-        </p:nvSpPr>
-        <p:spPr>
-          <a:xfrm>
-            <a:off x="2487168" y="5751576"/>
+          <p:cNvPr id="10" name="Text 7"/>
+          <p:cNvSpPr/>
+          <p:nvPr/>
+        </p:nvSpPr>
+        <p:spPr>
+          <a:xfrm>
+            <a:off x="2487168" y="5422392"/>
             <a:ext cx="8954719" cy="658368"/>
           </a:xfrm>
           <a:prstGeom prst="rect">
@@ -9937,7 +9468,7 @@
                 <a:ea typeface="Pretendard" pitchFamily="34" charset="-122"/>
                 <a:cs typeface="Pretendard" pitchFamily="34" charset="-120"/>
               </a:rPr>
-              <a:t>[참고] 종합 가치 제안: 송파권역 핵심 상권의 희소성 높은 우량 자산으로, 안정적인 임대 수익과 향후 공법상 밸류업 및 권역 지가 상승에 따른 자본 이득(Capital Gain)을 동시에 실현할 수 있는 전략적 매물입니다.</a:t>
+              <a:t>{"ok":true,"mocked":true,"extractedFields":{"area_signal":"역삼","asset_type":"오피스빌딩","price_band":"300억","size_signal":"3000평(약 9917.4㎡)"},"extractedFacts":{"region":"역삼","exactAddressCandidate":"역삼동 742-1","assetType":"오피스빌딩","priceText":"300억","sizeText":"3000평(약 9917.4㎡)","currentUse":"오피스","currentUseSignal":"근린생활시설","leaseSignal":"임대중","vacancySignal":"공실없음","tenantNames":["쿠팡","네이버"],"unitRentTexts":["301호: 1500만"],"sellerMotivationText":"자산 효율화","brokerNotes":["초역세권 매물"]},"detectedSensitiveFields":["exact_address","tenant_name"],"ambiguousFields":[],"warnings":[],"areaSignal":"역삼","assetType":"오피스빌딩","priceBand":"300억","sizeSignal":"3000평(약 9917.4㎡)","dealType":"매각","buildingName":"역삼 센트럴타워","exactAddress":"역삼동 742-1","totalFloorArea":9917.3,"buildYear":2015,"currentUseSignal":"근린생활시설","vacancySignal":"공실 없음","fitSummary":"초역세권 근생 빌딩으로 시행/사옥 매입에 최적화","cautionSummary":"주요 임차 업종 만기 조율 필요","hiddenFields":["exact_address","seller_motivation"],"confidence":{"areaSignal":"confirmed","assetType":"confirmed","priceBand":"ai_hypothesis","fitSummary":"ai_hypothesis"},"missingData":["sizeSignal"],"boundaryNote":"본 자료는 실거래 통계 기반 참고치입니다.","buyerType":"법인 사옥형","budgetRange":{"min":50,"max":80,"display":"50억~80억"},"preferredRegions":["강남","성수"],"assetTypes":["꼬마빌딩","사옥용"],"purchasePurpose":"사옥용 매입","mustHave":["초역세권","주차"],"niceToHave":["테라스","루프탑"],"riskTolerance":"medium","financingNote":"자본금 50% 준비","missingQuestions":["구체적인 입주 시기가 언제인가요?","선호하는 수익률이 있나요?"],"privacyNotes":["연락처 비공개"],"fitReasons":["매수자 예산(50-80억)에 부합하는 매물입니다.","요청하신 성수/강남 권역에 해당합니다."],"cautionReasons":["요청한 용도와 달리 명도 협의가 다소 필요합니다."],"recommendedNextAction":"현장 답사 제안","kakaoMessage":"안녕하세요! 요청하신 조건에 부합하는 추천 매물이 있어 안내해 드립니다. 확인해보시고 피드백 부탁드립니다.","title":"강남 역삼역 초역세권 오피스 사옥용 빌딩 매각","shortSummary":"역삼역 도보 5분 거리의 준신축급 대형 오피스빌딩입니다.","dealPoints":["초역세권","사옥 최적"],"cautionPoints":["명도 조율 필요"],"hiddenInfoNotice":["보증금 및 지번은 인가 후 확인 가능"],"gateMessage":"G1 등급 등록이 필요합니다.","kakaoText":"강남 역삼역 오피스 빌딩 매각 안내입니다.","exactUnitCandidate":"101호","floor":"1층","areaSqmText":"150㎡","spaceType":"office","depositText":"5000만","monthlyRentText":"400만","maintenanceFeeText":"50만","availableFromText":"즉시입주","leaseTermMonthsText":"24","incentivesText":"렌트프리 2개월","restrictions":[],"landlordIdentity":"김성수","currentTenant":"스타트업","vacancyReason":"이전 확장","rentNegotiation":"협의 가능","region":"성수동","areaSqm":150,"deposit":5000,"monthlyRent":400,"maintenanceFee":50,"availableFrom":"즉시입주","leaseTermMonths":24,"incentives":{"rentFreeMonths":2,"interiorSupport":"일부 인테리어 지원","freeRentDetail":"렌트프리 2개월 지원"},"shortSummaryLease":"성수역 도보 5분 거리 1층 리테일 상가 매물입니다."}</a:t>
             </a:r>
             <a:endParaRPr lang="en-US" sz="1100" dirty="0"/>
           </a:p>
@@ -9945,7 +9476,7 @@
       </p:sp>
       <p:sp>
         <p:nvSpPr>
-          <p:cNvPr id="32" name="Text 29"/>
+          <p:cNvPr id="11" name="Text 8"/>
           <p:cNvSpPr/>
           <p:nvPr/>
         </p:nvSpPr>
@@ -9984,7 +9515,7 @@
       </p:sp>
       <p:sp>
         <p:nvSpPr>
-          <p:cNvPr id="33" name="Text 30"/>
+          <p:cNvPr id="12" name="Text 9"/>
           <p:cNvSpPr/>
           <p:nvPr/>
         </p:nvSpPr>

--- a/docs/test/stress/e2e-outputs/income_case14_bangi_discount_basic.pptx
+++ b/docs/test/stress/e2e-outputs/income_case14_bangi_discount_basic.pptx
@@ -4225,7 +4225,7 @@
                 <a:ea typeface="Pretendard" pitchFamily="34" charset="-122"/>
                 <a:cs typeface="Pretendard" pitchFamily="34" charset="-120"/>
               </a:rPr>
-              <a:t>약 26.2억 원</a:t>
+              <a:t>약 30.2억 원</a:t>
             </a:r>
             <a:endParaRPr lang="en-US" sz="2000" dirty="0"/>
           </a:p>
@@ -6359,52 +6359,13 @@
       </p:sp>
       <p:sp>
         <p:nvSpPr>
-          <p:cNvPr id="6" name="Text 4"/>
+          <p:cNvPr id="6" name="Shape 4"/>
           <p:cNvSpPr/>
           <p:nvPr/>
         </p:nvSpPr>
         <p:spPr>
           <a:xfrm>
             <a:off x="566928" y="1325880"/>
-            <a:ext cx="11057839" cy="237744"/>
-          </a:xfrm>
-          <a:prstGeom prst="rect">
-            <a:avLst/>
-          </a:prstGeom>
-          <a:noFill/>
-          <a:ln/>
-        </p:spPr>
-        <p:txBody>
-          <a:bodyPr wrap="square" lIns="0" tIns="0" rIns="0" bIns="0" rtlCol="0" anchor="ctr"/>
-          <a:lstStyle/>
-          <a:p>
-            <a:pPr indent="0" marL="0">
-              <a:buNone/>
-            </a:pPr>
-            <a:r>
-              <a:rPr lang="en-US" sz="1100" b="1" dirty="0">
-                <a:solidFill>
-                  <a:srgbClr val="10161F"/>
-                </a:solidFill>
-                <a:latin typeface="Pretendard" pitchFamily="34" charset="0"/>
-                <a:ea typeface="Pretendard" pitchFamily="34" charset="-122"/>
-                <a:cs typeface="Pretendard" pitchFamily="34" charset="-120"/>
-              </a:rPr>
-              <a:t>[참고] 핵심 현금흐름 3줄 요약 (내 돈 &amp; 월 순수익)</a:t>
-            </a:r>
-            <a:endParaRPr lang="en-US" sz="1100" dirty="0"/>
-          </a:p>
-        </p:txBody>
-      </p:sp>
-      <p:sp>
-        <p:nvSpPr>
-          <p:cNvPr id="7" name="Shape 5"/>
-          <p:cNvSpPr/>
-          <p:nvPr/>
-        </p:nvSpPr>
-        <p:spPr>
-          <a:xfrm>
-            <a:off x="566928" y="1737360"/>
             <a:ext cx="11057839" cy="0"/>
           </a:xfrm>
           <a:prstGeom prst="line">
@@ -6421,890 +6382,14 @@
       </p:sp>
       <p:sp>
         <p:nvSpPr>
-          <p:cNvPr id="8" name="Shape 6"/>
-          <p:cNvSpPr/>
-          <p:nvPr/>
-        </p:nvSpPr>
-        <p:spPr>
-          <a:xfrm>
-            <a:off x="566928" y="1965960"/>
-            <a:ext cx="3576218" cy="1188720"/>
-          </a:xfrm>
-          <a:prstGeom prst="roundRect">
-            <a:avLst>
-              <a:gd name="adj" fmla="val 4615"/>
-            </a:avLst>
-          </a:prstGeom>
-          <a:solidFill>
-            <a:srgbClr val="F7FAFC"/>
-          </a:solidFill>
-          <a:ln w="6350">
-            <a:solidFill>
-              <a:srgbClr val="CBD5E0"/>
-            </a:solidFill>
-            <a:prstDash val="solid"/>
-          </a:ln>
-        </p:spPr>
-      </p:sp>
-      <p:sp>
-        <p:nvSpPr>
-          <p:cNvPr id="9" name="Text 7"/>
-          <p:cNvSpPr/>
-          <p:nvPr/>
-        </p:nvSpPr>
-        <p:spPr>
-          <a:xfrm>
-            <a:off x="731520" y="2093976"/>
-            <a:ext cx="3247034" cy="201168"/>
-          </a:xfrm>
-          <a:prstGeom prst="rect">
-            <a:avLst/>
-          </a:prstGeom>
-          <a:noFill/>
-          <a:ln/>
-        </p:spPr>
-        <p:txBody>
-          <a:bodyPr wrap="square" lIns="0" tIns="0" rIns="0" bIns="0" rtlCol="0" anchor="ctr"/>
-          <a:lstStyle/>
-          <a:p>
-            <a:pPr indent="0" marL="0">
-              <a:buNone/>
-            </a:pPr>
-            <a:r>
-              <a:rPr lang="en-US" sz="950" dirty="0">
-                <a:solidFill>
-                  <a:srgbClr val="718096"/>
-                </a:solidFill>
-                <a:latin typeface="Pretendard" pitchFamily="34" charset="0"/>
-                <a:ea typeface="Pretendard" pitchFamily="34" charset="-122"/>
-                <a:cs typeface="Pretendard" pitchFamily="34" charset="-120"/>
-              </a:rPr>
-              <a:t>① 실투자금 (내 돈)</a:t>
-            </a:r>
-            <a:endParaRPr lang="en-US" sz="950" dirty="0"/>
-          </a:p>
-        </p:txBody>
-      </p:sp>
-      <p:sp>
-        <p:nvSpPr>
-          <p:cNvPr id="10" name="Text 8"/>
-          <p:cNvSpPr/>
-          <p:nvPr/>
-        </p:nvSpPr>
-        <p:spPr>
-          <a:xfrm>
-            <a:off x="731520" y="2276856"/>
-            <a:ext cx="3247034" cy="402336"/>
-          </a:xfrm>
-          <a:prstGeom prst="rect">
-            <a:avLst/>
-          </a:prstGeom>
-          <a:noFill/>
-          <a:ln/>
-        </p:spPr>
-        <p:txBody>
-          <a:bodyPr wrap="square" lIns="0" tIns="0" rIns="0" bIns="0" rtlCol="0" anchor="ctr">
-            <a:normAutofit/>
-          </a:bodyPr>
-          <a:lstStyle/>
-          <a:p>
-            <a:pPr indent="0" marL="0">
-              <a:buNone/>
-            </a:pPr>
-            <a:r>
-              <a:rPr lang="en-US" sz="2200" b="1" dirty="0">
-                <a:solidFill>
-                  <a:srgbClr val="10161F"/>
-                </a:solidFill>
-                <a:latin typeface="Pretendard" pitchFamily="34" charset="0"/>
-                <a:ea typeface="Pretendard" pitchFamily="34" charset="-122"/>
-                <a:cs typeface="Pretendard" pitchFamily="34" charset="-120"/>
-              </a:rPr>
-              <a:t>약 26.2억 원</a:t>
-            </a:r>
-            <a:endParaRPr lang="en-US" sz="2200" dirty="0"/>
-          </a:p>
-        </p:txBody>
-      </p:sp>
-      <p:sp>
-        <p:nvSpPr>
-          <p:cNvPr id="11" name="Text 9"/>
-          <p:cNvSpPr/>
-          <p:nvPr/>
-        </p:nvSpPr>
-        <p:spPr>
-          <a:xfrm>
-            <a:off x="731520" y="2642616"/>
-            <a:ext cx="3247034" cy="164592"/>
-          </a:xfrm>
-          <a:prstGeom prst="rect">
-            <a:avLst/>
-          </a:prstGeom>
-          <a:noFill/>
-          <a:ln/>
-        </p:spPr>
-        <p:txBody>
-          <a:bodyPr wrap="square" lIns="0" tIns="0" rIns="0" bIns="0" rtlCol="0" anchor="ctr"/>
-          <a:lstStyle/>
-          <a:p>
-            <a:pPr indent="0" marL="0">
-              <a:buNone/>
-            </a:pPr>
-            <a:r>
-              <a:rPr lang="en-US" sz="880" dirty="0">
-                <a:solidFill>
-                  <a:srgbClr val="718096"/>
-                </a:solidFill>
-                <a:latin typeface="Pretendard" pitchFamily="34" charset="0"/>
-                <a:ea typeface="Pretendard" pitchFamily="34" charset="-122"/>
-                <a:cs typeface="Pretendard" pitchFamily="34" charset="-120"/>
-              </a:rPr>
-              <a:t>매매가(72억) - 대출(42억) - 보증금(3.8억)</a:t>
-            </a:r>
-            <a:endParaRPr lang="en-US" sz="880" dirty="0"/>
-          </a:p>
-        </p:txBody>
-      </p:sp>
-      <p:sp>
-        <p:nvSpPr>
-          <p:cNvPr id="12" name="Shape 10"/>
-          <p:cNvSpPr/>
-          <p:nvPr/>
-        </p:nvSpPr>
-        <p:spPr>
-          <a:xfrm>
-            <a:off x="4307738" y="1965960"/>
-            <a:ext cx="3576218" cy="1188720"/>
-          </a:xfrm>
-          <a:prstGeom prst="roundRect">
-            <a:avLst>
-              <a:gd name="adj" fmla="val 4615"/>
-            </a:avLst>
-          </a:prstGeom>
-          <a:solidFill>
-            <a:srgbClr val="F7FAFC"/>
-          </a:solidFill>
-          <a:ln w="6350">
-            <a:solidFill>
-              <a:srgbClr val="CBD5E0"/>
-            </a:solidFill>
-            <a:prstDash val="solid"/>
-          </a:ln>
-        </p:spPr>
-      </p:sp>
-      <p:sp>
-        <p:nvSpPr>
-          <p:cNvPr id="13" name="Text 11"/>
-          <p:cNvSpPr/>
-          <p:nvPr/>
-        </p:nvSpPr>
-        <p:spPr>
-          <a:xfrm>
-            <a:off x="4472330" y="2093976"/>
-            <a:ext cx="3247034" cy="201168"/>
-          </a:xfrm>
-          <a:prstGeom prst="rect">
-            <a:avLst/>
-          </a:prstGeom>
-          <a:noFill/>
-          <a:ln/>
-        </p:spPr>
-        <p:txBody>
-          <a:bodyPr wrap="square" lIns="0" tIns="0" rIns="0" bIns="0" rtlCol="0" anchor="ctr"/>
-          <a:lstStyle/>
-          <a:p>
-            <a:pPr indent="0" marL="0">
-              <a:buNone/>
-            </a:pPr>
-            <a:r>
-              <a:rPr lang="en-US" sz="950" dirty="0">
-                <a:solidFill>
-                  <a:srgbClr val="718096"/>
-                </a:solidFill>
-                <a:latin typeface="Pretendard" pitchFamily="34" charset="0"/>
-                <a:ea typeface="Pretendard" pitchFamily="34" charset="-122"/>
-                <a:cs typeface="Pretendard" pitchFamily="34" charset="-120"/>
-              </a:rPr>
-              <a:t>② 매달 통장에 꽂히는 돈</a:t>
-            </a:r>
-            <a:endParaRPr lang="en-US" sz="950" dirty="0"/>
-          </a:p>
-        </p:txBody>
-      </p:sp>
-      <p:sp>
-        <p:nvSpPr>
-          <p:cNvPr id="14" name="Text 12"/>
-          <p:cNvSpPr/>
-          <p:nvPr/>
-        </p:nvSpPr>
-        <p:spPr>
-          <a:xfrm>
-            <a:off x="4472330" y="2276856"/>
-            <a:ext cx="3247034" cy="402336"/>
-          </a:xfrm>
-          <a:prstGeom prst="rect">
-            <a:avLst/>
-          </a:prstGeom>
-          <a:noFill/>
-          <a:ln/>
-        </p:spPr>
-        <p:txBody>
-          <a:bodyPr wrap="square" lIns="0" tIns="0" rIns="0" bIns="0" rtlCol="0" anchor="ctr">
-            <a:normAutofit/>
-          </a:bodyPr>
-          <a:lstStyle/>
-          <a:p>
-            <a:pPr indent="0" marL="0">
-              <a:buNone/>
-            </a:pPr>
-            <a:r>
-              <a:rPr lang="en-US" sz="2200" b="1" dirty="0">
-                <a:solidFill>
-                  <a:srgbClr val="10161F"/>
-                </a:solidFill>
-                <a:latin typeface="Pretendard" pitchFamily="34" charset="0"/>
-                <a:ea typeface="Pretendard" pitchFamily="34" charset="-122"/>
-                <a:cs typeface="Pretendard" pitchFamily="34" charset="-120"/>
-              </a:rPr>
-              <a:t>월 약 625만 원</a:t>
-            </a:r>
-            <a:endParaRPr lang="en-US" sz="2200" dirty="0"/>
-          </a:p>
-        </p:txBody>
-      </p:sp>
-      <p:sp>
-        <p:nvSpPr>
-          <p:cNvPr id="15" name="Text 13"/>
-          <p:cNvSpPr/>
-          <p:nvPr/>
-        </p:nvSpPr>
-        <p:spPr>
-          <a:xfrm>
-            <a:off x="4472330" y="2642616"/>
-            <a:ext cx="3247034" cy="164592"/>
-          </a:xfrm>
-          <a:prstGeom prst="rect">
-            <a:avLst/>
-          </a:prstGeom>
-          <a:noFill/>
-          <a:ln/>
-        </p:spPr>
-        <p:txBody>
-          <a:bodyPr wrap="square" lIns="0" tIns="0" rIns="0" bIns="0" rtlCol="0" anchor="ctr"/>
-          <a:lstStyle/>
-          <a:p>
-            <a:pPr indent="0" marL="0">
-              <a:buNone/>
-            </a:pPr>
-            <a:r>
-              <a:rPr lang="en-US" sz="880" dirty="0">
-                <a:solidFill>
-                  <a:srgbClr val="718096"/>
-                </a:solidFill>
-                <a:latin typeface="Pretendard" pitchFamily="34" charset="0"/>
-                <a:ea typeface="Pretendard" pitchFamily="34" charset="-122"/>
-                <a:cs typeface="Pretendard" pitchFamily="34" charset="-120"/>
-              </a:rPr>
-              <a:t>월 임대료(2,200만) - 월 이자(1,575만) (금리 4.5%)</a:t>
-            </a:r>
-            <a:endParaRPr lang="en-US" sz="880" dirty="0"/>
-          </a:p>
-        </p:txBody>
-      </p:sp>
-      <p:sp>
-        <p:nvSpPr>
-          <p:cNvPr id="16" name="Shape 14"/>
-          <p:cNvSpPr/>
-          <p:nvPr/>
-        </p:nvSpPr>
-        <p:spPr>
-          <a:xfrm>
-            <a:off x="8048549" y="1965960"/>
-            <a:ext cx="3576218" cy="1188720"/>
-          </a:xfrm>
-          <a:prstGeom prst="roundRect">
-            <a:avLst>
-              <a:gd name="adj" fmla="val 4615"/>
-            </a:avLst>
-          </a:prstGeom>
-          <a:solidFill>
-            <a:srgbClr val="F7FAFC"/>
-          </a:solidFill>
-          <a:ln w="6350">
-            <a:solidFill>
-              <a:srgbClr val="CBD5E0"/>
-            </a:solidFill>
-            <a:prstDash val="solid"/>
-          </a:ln>
-        </p:spPr>
-      </p:sp>
-      <p:sp>
-        <p:nvSpPr>
-          <p:cNvPr id="17" name="Text 15"/>
-          <p:cNvSpPr/>
-          <p:nvPr/>
-        </p:nvSpPr>
-        <p:spPr>
-          <a:xfrm>
-            <a:off x="8213141" y="2093976"/>
-            <a:ext cx="3247034" cy="201168"/>
-          </a:xfrm>
-          <a:prstGeom prst="rect">
-            <a:avLst/>
-          </a:prstGeom>
-          <a:noFill/>
-          <a:ln/>
-        </p:spPr>
-        <p:txBody>
-          <a:bodyPr wrap="square" lIns="0" tIns="0" rIns="0" bIns="0" rtlCol="0" anchor="ctr"/>
-          <a:lstStyle/>
-          <a:p>
-            <a:pPr indent="0" marL="0">
-              <a:buNone/>
-            </a:pPr>
-            <a:r>
-              <a:rPr lang="en-US" sz="950" dirty="0">
-                <a:solidFill>
-                  <a:srgbClr val="718096"/>
-                </a:solidFill>
-                <a:latin typeface="Pretendard" pitchFamily="34" charset="0"/>
-                <a:ea typeface="Pretendard" pitchFamily="34" charset="-122"/>
-                <a:cs typeface="Pretendard" pitchFamily="34" charset="-120"/>
-              </a:rPr>
-              <a:t>③ 내 돈 대비 연 수익률</a:t>
-            </a:r>
-            <a:endParaRPr lang="en-US" sz="950" dirty="0"/>
-          </a:p>
-        </p:txBody>
-      </p:sp>
-      <p:sp>
-        <p:nvSpPr>
-          <p:cNvPr id="18" name="Text 16"/>
-          <p:cNvSpPr/>
-          <p:nvPr/>
-        </p:nvSpPr>
-        <p:spPr>
-          <a:xfrm>
-            <a:off x="8213141" y="2276856"/>
-            <a:ext cx="3247034" cy="402336"/>
-          </a:xfrm>
-          <a:prstGeom prst="rect">
-            <a:avLst/>
-          </a:prstGeom>
-          <a:noFill/>
-          <a:ln/>
-        </p:spPr>
-        <p:txBody>
-          <a:bodyPr wrap="square" lIns="0" tIns="0" rIns="0" bIns="0" rtlCol="0" anchor="ctr">
-            <a:normAutofit/>
-          </a:bodyPr>
-          <a:lstStyle/>
-          <a:p>
-            <a:pPr indent="0" marL="0">
-              <a:buNone/>
-            </a:pPr>
-            <a:r>
-              <a:rPr lang="en-US" sz="2200" b="1" dirty="0">
-                <a:solidFill>
-                  <a:srgbClr val="10161F"/>
-                </a:solidFill>
-                <a:latin typeface="Pretendard" pitchFamily="34" charset="0"/>
-                <a:ea typeface="Pretendard" pitchFamily="34" charset="-122"/>
-                <a:cs typeface="Pretendard" pitchFamily="34" charset="-120"/>
-              </a:rPr>
-              <a:t>연 2.86%</a:t>
-            </a:r>
-            <a:endParaRPr lang="en-US" sz="2200" dirty="0"/>
-          </a:p>
-        </p:txBody>
-      </p:sp>
-      <p:sp>
-        <p:nvSpPr>
-          <p:cNvPr id="19" name="Text 17"/>
-          <p:cNvSpPr/>
-          <p:nvPr/>
-        </p:nvSpPr>
-        <p:spPr>
-          <a:xfrm>
-            <a:off x="8213141" y="2642616"/>
-            <a:ext cx="3247034" cy="164592"/>
-          </a:xfrm>
-          <a:prstGeom prst="rect">
-            <a:avLst/>
-          </a:prstGeom>
-          <a:noFill/>
-          <a:ln/>
-        </p:spPr>
-        <p:txBody>
-          <a:bodyPr wrap="square" lIns="0" tIns="0" rIns="0" bIns="0" rtlCol="0" anchor="ctr"/>
-          <a:lstStyle/>
-          <a:p>
-            <a:pPr indent="0" marL="0">
-              <a:buNone/>
-            </a:pPr>
-            <a:r>
-              <a:rPr lang="en-US" sz="880" dirty="0">
-                <a:solidFill>
-                  <a:srgbClr val="718096"/>
-                </a:solidFill>
-                <a:latin typeface="Pretendard" pitchFamily="34" charset="0"/>
-                <a:ea typeface="Pretendard" pitchFamily="34" charset="-122"/>
-                <a:cs typeface="Pretendard" pitchFamily="34" charset="-120"/>
-              </a:rPr>
-              <a:t>실투자금 대비 연 순수익(약 0.75억 원)</a:t>
-            </a:r>
-            <a:endParaRPr lang="en-US" sz="880" dirty="0"/>
-          </a:p>
-        </p:txBody>
-      </p:sp>
-      <p:sp>
-        <p:nvSpPr>
-          <p:cNvPr id="20" name="Shape 18"/>
-          <p:cNvSpPr/>
-          <p:nvPr/>
-        </p:nvSpPr>
-        <p:spPr>
-          <a:xfrm>
-            <a:off x="566928" y="3319272"/>
-            <a:ext cx="3576218" cy="1051560"/>
-          </a:xfrm>
-          <a:prstGeom prst="roundRect">
-            <a:avLst>
-              <a:gd name="adj" fmla="val 5217"/>
-            </a:avLst>
-          </a:prstGeom>
-          <a:solidFill>
-            <a:srgbClr val="F7FAFC"/>
-          </a:solidFill>
-          <a:ln w="6350">
-            <a:solidFill>
-              <a:srgbClr val="CBD5E0"/>
-            </a:solidFill>
-            <a:prstDash val="solid"/>
-          </a:ln>
-        </p:spPr>
-      </p:sp>
-      <p:sp>
-        <p:nvSpPr>
-          <p:cNvPr id="21" name="Text 19"/>
-          <p:cNvSpPr/>
-          <p:nvPr/>
-        </p:nvSpPr>
-        <p:spPr>
-          <a:xfrm>
-            <a:off x="731520" y="3447288"/>
-            <a:ext cx="3247034" cy="201168"/>
-          </a:xfrm>
-          <a:prstGeom prst="rect">
-            <a:avLst/>
-          </a:prstGeom>
-          <a:noFill/>
-          <a:ln/>
-        </p:spPr>
-        <p:txBody>
-          <a:bodyPr wrap="square" lIns="0" tIns="0" rIns="0" bIns="0" rtlCol="0" anchor="ctr"/>
-          <a:lstStyle/>
-          <a:p>
-            <a:pPr indent="0" marL="0">
-              <a:buNone/>
-            </a:pPr>
-            <a:r>
-              <a:rPr lang="en-US" sz="950" dirty="0">
-                <a:solidFill>
-                  <a:srgbClr val="718096"/>
-                </a:solidFill>
-                <a:latin typeface="Pretendard" pitchFamily="34" charset="0"/>
-                <a:ea typeface="Pretendard" pitchFamily="34" charset="-122"/>
-                <a:cs typeface="Pretendard" pitchFamily="34" charset="-120"/>
-              </a:rPr>
-              <a:t>연 순영업소득(남는 돈 NOI)</a:t>
-            </a:r>
-            <a:endParaRPr lang="en-US" sz="950" dirty="0"/>
-          </a:p>
-        </p:txBody>
-      </p:sp>
-      <p:sp>
-        <p:nvSpPr>
-          <p:cNvPr id="22" name="Text 20"/>
-          <p:cNvSpPr/>
-          <p:nvPr/>
-        </p:nvSpPr>
-        <p:spPr>
-          <a:xfrm>
-            <a:off x="731520" y="3630168"/>
-            <a:ext cx="3247034" cy="402336"/>
-          </a:xfrm>
-          <a:prstGeom prst="rect">
-            <a:avLst/>
-          </a:prstGeom>
-          <a:noFill/>
-          <a:ln/>
-        </p:spPr>
-        <p:txBody>
-          <a:bodyPr wrap="square" lIns="0" tIns="0" rIns="0" bIns="0" rtlCol="0" anchor="ctr">
-            <a:normAutofit/>
-          </a:bodyPr>
-          <a:lstStyle/>
-          <a:p>
-            <a:pPr indent="0" marL="0">
-              <a:buNone/>
-            </a:pPr>
-            <a:r>
-              <a:rPr lang="en-US" sz="1800" b="1" dirty="0">
-                <a:solidFill>
-                  <a:srgbClr val="10161F"/>
-                </a:solidFill>
-                <a:latin typeface="Pretendard" pitchFamily="34" charset="0"/>
-                <a:ea typeface="Pretendard" pitchFamily="34" charset="-122"/>
-                <a:cs typeface="Pretendard" pitchFamily="34" charset="-120"/>
-              </a:rPr>
-              <a:t>약 1.8억 원~약 2.2억 원</a:t>
-            </a:r>
-            <a:endParaRPr lang="en-US" sz="1800" dirty="0"/>
-          </a:p>
-        </p:txBody>
-      </p:sp>
-      <p:sp>
-        <p:nvSpPr>
-          <p:cNvPr id="23" name="Text 21"/>
-          <p:cNvSpPr/>
-          <p:nvPr/>
-        </p:nvSpPr>
-        <p:spPr>
-          <a:xfrm>
-            <a:off x="731520" y="3995928"/>
-            <a:ext cx="3247034" cy="164592"/>
-          </a:xfrm>
-          <a:prstGeom prst="rect">
-            <a:avLst/>
-          </a:prstGeom>
-          <a:noFill/>
-          <a:ln/>
-        </p:spPr>
-        <p:txBody>
-          <a:bodyPr wrap="square" lIns="0" tIns="0" rIns="0" bIns="0" rtlCol="0" anchor="ctr"/>
-          <a:lstStyle/>
-          <a:p>
-            <a:pPr indent="0" marL="0">
-              <a:buNone/>
-            </a:pPr>
-            <a:r>
-              <a:rPr lang="en-US" sz="880" dirty="0">
-                <a:solidFill>
-                  <a:srgbClr val="718096"/>
-                </a:solidFill>
-                <a:latin typeface="Pretendard" pitchFamily="34" charset="0"/>
-                <a:ea typeface="Pretendard" pitchFamily="34" charset="-122"/>
-                <a:cs typeface="Pretendard" pitchFamily="34" charset="-120"/>
-              </a:rPr>
-              <a:t>운영비 차감 후 실질 순수익</a:t>
-            </a:r>
-            <a:endParaRPr lang="en-US" sz="880" dirty="0"/>
-          </a:p>
-        </p:txBody>
-      </p:sp>
-      <p:sp>
-        <p:nvSpPr>
-          <p:cNvPr id="24" name="Shape 22"/>
-          <p:cNvSpPr/>
-          <p:nvPr/>
-        </p:nvSpPr>
-        <p:spPr>
-          <a:xfrm>
-            <a:off x="4307738" y="3319272"/>
-            <a:ext cx="3576218" cy="1051560"/>
-          </a:xfrm>
-          <a:prstGeom prst="roundRect">
-            <a:avLst>
-              <a:gd name="adj" fmla="val 5217"/>
-            </a:avLst>
-          </a:prstGeom>
-          <a:solidFill>
-            <a:srgbClr val="F7FAFC"/>
-          </a:solidFill>
-          <a:ln w="6350">
-            <a:solidFill>
-              <a:srgbClr val="CBD5E0"/>
-            </a:solidFill>
-            <a:prstDash val="solid"/>
-          </a:ln>
-        </p:spPr>
-      </p:sp>
-      <p:sp>
-        <p:nvSpPr>
-          <p:cNvPr id="25" name="Text 23"/>
-          <p:cNvSpPr/>
-          <p:nvPr/>
-        </p:nvSpPr>
-        <p:spPr>
-          <a:xfrm>
-            <a:off x="4472330" y="3447288"/>
-            <a:ext cx="3247034" cy="201168"/>
-          </a:xfrm>
-          <a:prstGeom prst="rect">
-            <a:avLst/>
-          </a:prstGeom>
-          <a:noFill/>
-          <a:ln/>
-        </p:spPr>
-        <p:txBody>
-          <a:bodyPr wrap="square" lIns="0" tIns="0" rIns="0" bIns="0" rtlCol="0" anchor="ctr"/>
-          <a:lstStyle/>
-          <a:p>
-            <a:pPr indent="0" marL="0">
-              <a:buNone/>
-            </a:pPr>
-            <a:r>
-              <a:rPr lang="en-US" sz="950" dirty="0">
-                <a:solidFill>
-                  <a:srgbClr val="718096"/>
-                </a:solidFill>
-                <a:latin typeface="Pretendard" pitchFamily="34" charset="0"/>
-                <a:ea typeface="Pretendard" pitchFamily="34" charset="-122"/>
-                <a:cs typeface="Pretendard" pitchFamily="34" charset="-120"/>
-              </a:rPr>
-              <a:t>연 순수익률(Cap Rate)</a:t>
-            </a:r>
-            <a:endParaRPr lang="en-US" sz="950" dirty="0"/>
-          </a:p>
-        </p:txBody>
-      </p:sp>
-      <p:sp>
-        <p:nvSpPr>
-          <p:cNvPr id="26" name="Text 24"/>
-          <p:cNvSpPr/>
-          <p:nvPr/>
-        </p:nvSpPr>
-        <p:spPr>
-          <a:xfrm>
-            <a:off x="4472330" y="3630168"/>
-            <a:ext cx="3247034" cy="402336"/>
-          </a:xfrm>
-          <a:prstGeom prst="rect">
-            <a:avLst/>
-          </a:prstGeom>
-          <a:noFill/>
-          <a:ln/>
-        </p:spPr>
-        <p:txBody>
-          <a:bodyPr wrap="square" lIns="0" tIns="0" rIns="0" bIns="0" rtlCol="0" anchor="ctr">
-            <a:normAutofit/>
-          </a:bodyPr>
-          <a:lstStyle/>
-          <a:p>
-            <a:pPr indent="0" marL="0">
-              <a:buNone/>
-            </a:pPr>
-            <a:r>
-              <a:rPr lang="en-US" sz="1800" b="1" dirty="0">
-                <a:solidFill>
-                  <a:srgbClr val="10161F"/>
-                </a:solidFill>
-                <a:latin typeface="Arial" pitchFamily="34" charset="0"/>
-                <a:ea typeface="Arial" pitchFamily="34" charset="-122"/>
-                <a:cs typeface="Arial" pitchFamily="34" charset="-120"/>
-              </a:rPr>
-              <a:t>2.5%–3.1%</a:t>
-            </a:r>
-            <a:endParaRPr lang="en-US" sz="1800" dirty="0"/>
-          </a:p>
-        </p:txBody>
-      </p:sp>
-      <p:sp>
-        <p:nvSpPr>
-          <p:cNvPr id="27" name="Text 25"/>
-          <p:cNvSpPr/>
-          <p:nvPr/>
-        </p:nvSpPr>
-        <p:spPr>
-          <a:xfrm>
-            <a:off x="4472330" y="3995928"/>
-            <a:ext cx="3247034" cy="164592"/>
-          </a:xfrm>
-          <a:prstGeom prst="rect">
-            <a:avLst/>
-          </a:prstGeom>
-          <a:noFill/>
-          <a:ln/>
-        </p:spPr>
-        <p:txBody>
-          <a:bodyPr wrap="square" lIns="0" tIns="0" rIns="0" bIns="0" rtlCol="0" anchor="ctr"/>
-          <a:lstStyle/>
-          <a:p>
-            <a:pPr indent="0" marL="0">
-              <a:buNone/>
-            </a:pPr>
-            <a:r>
-              <a:rPr lang="en-US" sz="880" dirty="0">
-                <a:solidFill>
-                  <a:srgbClr val="718096"/>
-                </a:solidFill>
-                <a:latin typeface="Pretendard" pitchFamily="34" charset="0"/>
-                <a:ea typeface="Pretendard" pitchFamily="34" charset="-122"/>
-                <a:cs typeface="Pretendard" pitchFamily="34" charset="-120"/>
-              </a:rPr>
-              <a:t>매매가 대비 구간 추정</a:t>
-            </a:r>
-            <a:endParaRPr lang="en-US" sz="880" dirty="0"/>
-          </a:p>
-        </p:txBody>
-      </p:sp>
-      <p:sp>
-        <p:nvSpPr>
-          <p:cNvPr id="28" name="Shape 26"/>
-          <p:cNvSpPr/>
-          <p:nvPr/>
-        </p:nvSpPr>
-        <p:spPr>
-          <a:xfrm>
-            <a:off x="8048549" y="3319272"/>
-            <a:ext cx="3576218" cy="1051560"/>
-          </a:xfrm>
-          <a:prstGeom prst="roundRect">
-            <a:avLst>
-              <a:gd name="adj" fmla="val 5217"/>
-            </a:avLst>
-          </a:prstGeom>
-          <a:solidFill>
-            <a:srgbClr val="F7FAFC"/>
-          </a:solidFill>
-          <a:ln w="6350">
-            <a:solidFill>
-              <a:srgbClr val="CBD5E0"/>
-            </a:solidFill>
-            <a:prstDash val="solid"/>
-          </a:ln>
-        </p:spPr>
-      </p:sp>
-      <p:sp>
-        <p:nvSpPr>
-          <p:cNvPr id="29" name="Text 27"/>
-          <p:cNvSpPr/>
-          <p:nvPr/>
-        </p:nvSpPr>
-        <p:spPr>
-          <a:xfrm>
-            <a:off x="8213141" y="3447288"/>
-            <a:ext cx="3247034" cy="201168"/>
-          </a:xfrm>
-          <a:prstGeom prst="rect">
-            <a:avLst/>
-          </a:prstGeom>
-          <a:noFill/>
-          <a:ln/>
-        </p:spPr>
-        <p:txBody>
-          <a:bodyPr wrap="square" lIns="0" tIns="0" rIns="0" bIns="0" rtlCol="0" anchor="ctr"/>
-          <a:lstStyle/>
-          <a:p>
-            <a:pPr indent="0" marL="0">
-              <a:buNone/>
-            </a:pPr>
-            <a:r>
-              <a:rPr lang="en-US" sz="950" dirty="0">
-                <a:solidFill>
-                  <a:srgbClr val="718096"/>
-                </a:solidFill>
-                <a:latin typeface="Pretendard" pitchFamily="34" charset="0"/>
-                <a:ea typeface="Pretendard" pitchFamily="34" charset="-122"/>
-                <a:cs typeface="Pretendard" pitchFamily="34" charset="-120"/>
-              </a:rPr>
-              <a:t>5년 보유 시 투자수익률(IRR)</a:t>
-            </a:r>
-            <a:endParaRPr lang="en-US" sz="950" dirty="0"/>
-          </a:p>
-        </p:txBody>
-      </p:sp>
-      <p:sp>
-        <p:nvSpPr>
-          <p:cNvPr id="30" name="Text 28"/>
-          <p:cNvSpPr/>
-          <p:nvPr/>
-        </p:nvSpPr>
-        <p:spPr>
-          <a:xfrm>
-            <a:off x="8213141" y="3630168"/>
-            <a:ext cx="3247034" cy="402336"/>
-          </a:xfrm>
-          <a:prstGeom prst="rect">
-            <a:avLst/>
-          </a:prstGeom>
-          <a:noFill/>
-          <a:ln/>
-        </p:spPr>
-        <p:txBody>
-          <a:bodyPr wrap="square" lIns="0" tIns="0" rIns="0" bIns="0" rtlCol="0" anchor="ctr">
-            <a:normAutofit/>
-          </a:bodyPr>
-          <a:lstStyle/>
-          <a:p>
-            <a:pPr indent="0" marL="0">
-              <a:buNone/>
-            </a:pPr>
-            <a:r>
-              <a:rPr lang="en-US" sz="1800" b="1" dirty="0">
-                <a:solidFill>
-                  <a:srgbClr val="10161F"/>
-                </a:solidFill>
-                <a:latin typeface="Arial" pitchFamily="34" charset="0"/>
-                <a:ea typeface="Arial" pitchFamily="34" charset="-122"/>
-                <a:cs typeface="Arial" pitchFamily="34" charset="-120"/>
-              </a:rPr>
-              <a:t>-4.2%–5.6%</a:t>
-            </a:r>
-            <a:endParaRPr lang="en-US" sz="1800" dirty="0"/>
-          </a:p>
-        </p:txBody>
-      </p:sp>
-      <p:sp>
-        <p:nvSpPr>
-          <p:cNvPr id="31" name="Text 29"/>
-          <p:cNvSpPr/>
-          <p:nvPr/>
-        </p:nvSpPr>
-        <p:spPr>
-          <a:xfrm>
-            <a:off x="8213141" y="3995928"/>
-            <a:ext cx="3247034" cy="164592"/>
-          </a:xfrm>
-          <a:prstGeom prst="rect">
-            <a:avLst/>
-          </a:prstGeom>
-          <a:noFill/>
-          <a:ln/>
-        </p:spPr>
-        <p:txBody>
-          <a:bodyPr wrap="square" lIns="0" tIns="0" rIns="0" bIns="0" rtlCol="0" anchor="ctr"/>
-          <a:lstStyle/>
-          <a:p>
-            <a:pPr indent="0" marL="0">
-              <a:buNone/>
-            </a:pPr>
-            <a:r>
-              <a:rPr lang="en-US" sz="880" dirty="0">
-                <a:solidFill>
-                  <a:srgbClr val="718096"/>
-                </a:solidFill>
-                <a:latin typeface="Pretendard" pitchFamily="34" charset="0"/>
-                <a:ea typeface="Pretendard" pitchFamily="34" charset="-122"/>
-                <a:cs typeface="Pretendard" pitchFamily="34" charset="-120"/>
-              </a:rPr>
-              <a:t>시나리오 추정, 참고용</a:t>
-            </a:r>
-            <a:endParaRPr lang="en-US" sz="880" dirty="0"/>
-          </a:p>
-        </p:txBody>
-      </p:sp>
-      <p:sp>
-        <p:nvSpPr>
-          <p:cNvPr id="32" name="Shape 30"/>
-          <p:cNvSpPr/>
-          <p:nvPr/>
-        </p:nvSpPr>
-        <p:spPr>
-          <a:xfrm>
-            <a:off x="566928" y="4626864"/>
-            <a:ext cx="5437480" cy="1280160"/>
+          <p:cNvPr id="7" name="Shape 5"/>
+          <p:cNvSpPr/>
+          <p:nvPr/>
+        </p:nvSpPr>
+        <p:spPr>
+          <a:xfrm>
+            <a:off x="566928" y="1645920"/>
+            <a:ext cx="11057839" cy="1280160"/>
           </a:xfrm>
           <a:prstGeom prst="roundRect">
             <a:avLst>
@@ -7319,13 +6404,13 @@
       </p:sp>
       <p:sp>
         <p:nvSpPr>
-          <p:cNvPr id="33" name="Shape 31"/>
-          <p:cNvSpPr/>
-          <p:nvPr/>
-        </p:nvSpPr>
-        <p:spPr>
-          <a:xfrm>
-            <a:off x="566928" y="4681728"/>
+          <p:cNvPr id="8" name="Shape 6"/>
+          <p:cNvSpPr/>
+          <p:nvPr/>
+        </p:nvSpPr>
+        <p:spPr>
+          <a:xfrm>
+            <a:off x="566928" y="1700784"/>
             <a:ext cx="36576" cy="1170432"/>
           </a:xfrm>
           <a:prstGeom prst="rect">
@@ -7339,14 +6424,14 @@
       </p:sp>
       <p:sp>
         <p:nvSpPr>
-          <p:cNvPr id="34" name="Text 32"/>
-          <p:cNvSpPr/>
-          <p:nvPr/>
-        </p:nvSpPr>
-        <p:spPr>
-          <a:xfrm>
-            <a:off x="749808" y="4736592"/>
-            <a:ext cx="5108296" cy="201168"/>
+          <p:cNvPr id="9" name="Text 7"/>
+          <p:cNvSpPr/>
+          <p:nvPr/>
+        </p:nvSpPr>
+        <p:spPr>
+          <a:xfrm>
+            <a:off x="749808" y="1755648"/>
+            <a:ext cx="10728655" cy="201168"/>
           </a:xfrm>
           <a:prstGeom prst="rect">
             <a:avLst/>
@@ -7378,14 +6463,14 @@
       </p:sp>
       <p:sp>
         <p:nvSpPr>
-          <p:cNvPr id="35" name="Text 33"/>
-          <p:cNvSpPr/>
-          <p:nvPr/>
-        </p:nvSpPr>
-        <p:spPr>
-          <a:xfrm>
-            <a:off x="749808" y="4956048"/>
-            <a:ext cx="5108296" cy="877824"/>
+          <p:cNvPr id="10" name="Text 8"/>
+          <p:cNvSpPr/>
+          <p:nvPr/>
+        </p:nvSpPr>
+        <p:spPr>
+          <a:xfrm>
+            <a:off x="749808" y="1975104"/>
+            <a:ext cx="10728655" cy="877824"/>
           </a:xfrm>
           <a:prstGeom prst="rect">
             <a:avLst/>
@@ -7412,7 +6497,7 @@
                 <a:ea typeface="Pretendard" pitchFamily="34" charset="-122"/>
                 <a:cs typeface="Pretendard" pitchFamily="34" charset="-120"/>
               </a:rPr>
-              <a:t>본 자산은 우수한 입지 경쟁력과 견고한 펀더멘털을 바탕으로 안정적인 현금흐름 창출과 중장기 자산 가치 상승을 동시에 실현할 수 있는 우량 투자 기회입니다.</a:t>
+              <a:t>{"ok":true,"mocked":true,"extractedFields":{"area_signal":"역삼","asset_type":"오피스빌딩","price_band":"300억","size_signal":"3000평(약 9917.4㎡)"},"extractedFacts":{"region":"역삼","exactAddressCandidate":"역삼동 742-1","assetType":"오피스빌딩","priceText":"300억","sizeText":"3000평(약 9917.4㎡)","currentUse":"오피스","currentUseSignal":"근린생활시설","leaseSignal":"임대중","vacancySignal":"공실없음","tenantNames":["쿠팡","네이버"],"unitRentTexts":["301호: 1500만"],"sellerMotivationText":"자산 효율화","brokerNotes":["초역세권 매물"]},"detectedSensitiveFields":["exact_address","tenant_name"],"ambiguousFields":[],"warnings":[],"areaSignal":"역삼","assetType":"오피스빌딩","priceBand":"300억","sizeSignal":"3000평(약 9917.4㎡)","dealType":"매각","buildingName":"역삼 센트럴타워","exactAddress":"역삼동 742-1","totalFloorArea":9917.3,"buildYear":2015,"currentUseSignal":"근린생활시설","vacancySignal":"공실 없음","fitSummary":"초역세권 근생 빌딩으로 시행/사옥 매입에 최적화","cautionSummary":"주요 임차 업종 만기 조율 필요","hiddenFields":["exact_address","seller_motivation"],"confidence":{"areaSignal":"confirmed","assetType":"confirmed","priceBand":"ai_hypothesis","fitSummary":"ai_hypothesis"},"missingData":["sizeSignal"],"boundaryNote":"본 자료는 실거래 통계 기반 참고치입니다.","buyerType":"법인 사옥형","budgetRange":{"min":50,"max":80,"display":"50억~80억"},"preferredRegions":["강남","성수"],"assetTypes":["꼬마빌딩","사옥용"],"purchasePurpose":"사옥용 매입","mustHave":["초역세권","주차"],"niceToHave":["테라스","루프탑"],"riskTolerance":"medium","financingNote":"자본금 50% 준비","missingQuestions":["구체적인 입주 시기가 언제인가요?","선호하는 수익률이 있나요?"],"privacyNotes":["연락처 비공개"],"fitReasons":["매수자 예산(50-80억)에 부합하는 매물입니다.","요청하신 성수/강남 권역에 해당합니다."],"cautionReasons":["요청한 용도와 달리 명도 협의가 다소 필요합니다."],"recommendedNextAction":"현장 답사 제안","kakaoMessage":"안녕하세요! 요청하신 조건에 부합하는 추천 매물이 있어 안내해 드립니다. 확인해보시고 피드백 부탁드립니다.","title":"강남 역삼역 초역세권 오피스 사옥용 빌딩 매각","shortSummary":"역삼역 도보 5분 거리의 준신축급 대형 오피스빌딩입니다.","dealPoints":["초역세권","사옥 최적"],"cautionPoints":["명도 조율 필요"],"hiddenInfoNotice":["보증금 및 지번은 인가 후 확인 가능"],"gateMessage":"G1 등급 등록이 필요합니다.","kakaoText":"강남 역삼역 오피스 빌딩 매각 안내입니다.","exactUnitCandidate":"101호","floor":"1층","areaSqmText":"150㎡","spaceType":"office","depositText":"5000만","monthlyRentText":"400만","maintenanceFeeText":"50만","availableFromText":"즉시입주","leaseTermMonthsText":"24","incentivesText":"렌트프리 2개월","restrictions":[],"landlordIdentity":"김성수","currentTenant":"스타트업","vacancyReason":"이전 확장","rentNegotiation":"협의 가능","region":"성수동","areaSqm":150,"deposit":5000,"monthlyRent":400,"maintenanceFee":50,"availableFrom":"즉시입주","leaseTermMonths":24,"incentives":{"rentFreeMonths":2,"interiorSupport":"일부 인테리어 지원","freeRentDetail":"렌트프리 2개월 지원"},"shortSummaryLease":"성수역 도보 5분 거리 1층 리테일 상가 매물입니다."}</a:t>
             </a:r>
             <a:endParaRPr lang="en-US" sz="930" dirty="0"/>
           </a:p>
@@ -7420,56 +6505,14 @@
       </p:sp>
       <p:sp>
         <p:nvSpPr>
-          <p:cNvPr id="36" name="Shape 34"/>
-          <p:cNvSpPr/>
-          <p:nvPr/>
-        </p:nvSpPr>
-        <p:spPr>
-          <a:xfrm>
-            <a:off x="6187288" y="4626864"/>
-            <a:ext cx="5437480" cy="1280160"/>
-          </a:xfrm>
-          <a:prstGeom prst="roundRect">
-            <a:avLst>
-              <a:gd name="adj" fmla="val 4286"/>
-            </a:avLst>
-          </a:prstGeom>
-          <a:solidFill>
-            <a:srgbClr val="BEE3F8"/>
-          </a:solidFill>
-          <a:ln/>
-        </p:spPr>
-      </p:sp>
-      <p:sp>
-        <p:nvSpPr>
-          <p:cNvPr id="37" name="Shape 35"/>
-          <p:cNvSpPr/>
-          <p:nvPr/>
-        </p:nvSpPr>
-        <p:spPr>
-          <a:xfrm>
-            <a:off x="6187288" y="4681728"/>
-            <a:ext cx="36576" cy="1170432"/>
-          </a:xfrm>
-          <a:prstGeom prst="rect">
-            <a:avLst/>
-          </a:prstGeom>
-          <a:solidFill>
-            <a:srgbClr val="2B6CB0"/>
-          </a:solidFill>
-          <a:ln/>
-        </p:spPr>
-      </p:sp>
-      <p:sp>
-        <p:nvSpPr>
-          <p:cNvPr id="38" name="Text 36"/>
-          <p:cNvSpPr/>
-          <p:nvPr/>
-        </p:nvSpPr>
-        <p:spPr>
-          <a:xfrm>
-            <a:off x="6370168" y="4736592"/>
-            <a:ext cx="5108296" cy="201168"/>
+          <p:cNvPr id="11" name="Text 9"/>
+          <p:cNvSpPr/>
+          <p:nvPr/>
+        </p:nvSpPr>
+        <p:spPr>
+          <a:xfrm>
+            <a:off x="566928" y="6382512"/>
+            <a:ext cx="7315200" cy="219456"/>
           </a:xfrm>
           <a:prstGeom prst="rect">
             <a:avLst/>
@@ -7485,95 +6528,14 @@
               <a:buNone/>
             </a:pPr>
             <a:r>
-              <a:rPr lang="en-US" sz="1050" b="1" dirty="0">
-                <a:solidFill>
-                  <a:srgbClr val="2B6CB0"/>
+              <a:rPr lang="en-US" sz="800" dirty="0">
+                <a:solidFill>
+                  <a:srgbClr val="718096"/>
                 </a:solidFill>
                 <a:latin typeface="Pretendard" pitchFamily="34" charset="0"/>
                 <a:ea typeface="Pretendard" pitchFamily="34" charset="-122"/>
                 <a:cs typeface="Pretendard" pitchFamily="34" charset="-120"/>
               </a:rPr>
-              <a:t>[주의] 면책</a:t>
-            </a:r>
-            <a:endParaRPr lang="en-US" sz="1050" dirty="0"/>
-          </a:p>
-        </p:txBody>
-      </p:sp>
-      <p:sp>
-        <p:nvSpPr>
-          <p:cNvPr id="39" name="Text 37"/>
-          <p:cNvSpPr/>
-          <p:nvPr/>
-        </p:nvSpPr>
-        <p:spPr>
-          <a:xfrm>
-            <a:off x="6370168" y="4956048"/>
-            <a:ext cx="5108296" cy="877824"/>
-          </a:xfrm>
-          <a:prstGeom prst="rect">
-            <a:avLst/>
-          </a:prstGeom>
-          <a:noFill/>
-          <a:ln/>
-        </p:spPr>
-        <p:txBody>
-          <a:bodyPr wrap="square" lIns="0" tIns="0" rIns="0" bIns="0" rtlCol="0" anchor="t"/>
-          <a:lstStyle/>
-          <a:p>
-            <a:pPr indent="0" marL="0">
-              <a:lnSpc>
-                <a:spcPct val="120000"/>
-              </a:lnSpc>
-              <a:buNone/>
-            </a:pPr>
-            <a:r>
-              <a:rPr lang="en-US" sz="930" dirty="0">
-                <a:solidFill>
-                  <a:srgbClr val="10161F"/>
-                </a:solidFill>
-                <a:latin typeface="Pretendard" pitchFamily="34" charset="0"/>
-                <a:ea typeface="Pretendard" pitchFamily="34" charset="-122"/>
-                <a:cs typeface="Pretendard" pitchFamily="34" charset="-120"/>
-              </a:rPr>
-              <a:t>AI 추정값 (참고용). 실제 수익은 임대차 조건·공실률·세금에 따라 상이합니다.</a:t>
-            </a:r>
-            <a:endParaRPr lang="en-US" sz="930" dirty="0"/>
-          </a:p>
-        </p:txBody>
-      </p:sp>
-      <p:sp>
-        <p:nvSpPr>
-          <p:cNvPr id="40" name="Text 38"/>
-          <p:cNvSpPr/>
-          <p:nvPr/>
-        </p:nvSpPr>
-        <p:spPr>
-          <a:xfrm>
-            <a:off x="566928" y="6382512"/>
-            <a:ext cx="7315200" cy="219456"/>
-          </a:xfrm>
-          <a:prstGeom prst="rect">
-            <a:avLst/>
-          </a:prstGeom>
-          <a:noFill/>
-          <a:ln/>
-        </p:spPr>
-        <p:txBody>
-          <a:bodyPr wrap="square" lIns="0" tIns="0" rIns="0" bIns="0" rtlCol="0" anchor="ctr"/>
-          <a:lstStyle/>
-          <a:p>
-            <a:pPr indent="0" marL="0">
-              <a:buNone/>
-            </a:pPr>
-            <a:r>
-              <a:rPr lang="en-US" sz="800" dirty="0">
-                <a:solidFill>
-                  <a:srgbClr val="718096"/>
-                </a:solidFill>
-                <a:latin typeface="Pretendard" pitchFamily="34" charset="0"/>
-                <a:ea typeface="Pretendard" pitchFamily="34" charset="-122"/>
-                <a:cs typeface="Pretendard" pitchFamily="34" charset="-120"/>
-              </a:rPr>
               <a:t>크리딜   |   </a:t>
             </a:r>
             <a:endParaRPr lang="en-US" sz="800" dirty="0"/>
@@ -7582,7 +6544,7 @@
       </p:sp>
       <p:sp>
         <p:nvSpPr>
-          <p:cNvPr id="41" name="Text 39"/>
+          <p:cNvPr id="12" name="Text 10"/>
           <p:cNvSpPr/>
           <p:nvPr/>
         </p:nvSpPr>
@@ -7797,11 +6759,11 @@
         <p:spPr>
           <a:xfrm>
             <a:off x="566928" y="1417320"/>
-            <a:ext cx="11057839" cy="3611880"/>
+            <a:ext cx="3515258" cy="3657600"/>
           </a:xfrm>
           <a:prstGeom prst="roundRect">
             <a:avLst>
-              <a:gd name="adj" fmla="val 1519"/>
+              <a:gd name="adj" fmla="val 1561"/>
             </a:avLst>
           </a:prstGeom>
           <a:solidFill>
@@ -7824,7 +6786,7 @@
         <p:spPr>
           <a:xfrm>
             <a:off x="566928" y="1417320"/>
-            <a:ext cx="11057839" cy="45720"/>
+            <a:ext cx="3515258" cy="45720"/>
           </a:xfrm>
           <a:prstGeom prst="rect">
             <a:avLst/>
@@ -7844,7 +6806,7 @@
         <p:spPr>
           <a:xfrm>
             <a:off x="795528" y="1618488"/>
-            <a:ext cx="10600639" cy="292608"/>
+            <a:ext cx="3058058" cy="292608"/>
           </a:xfrm>
           <a:prstGeom prst="rect">
             <a:avLst/>
@@ -7868,7 +6830,7 @@
                 <a:ea typeface="Pretendard" pitchFamily="34" charset="-122"/>
                 <a:cs typeface="Pretendard" pitchFamily="34" charset="-120"/>
               </a:rPr>
-              <a:t>용도 리스크</a:t>
+              <a:t>건물 물리적 상태</a:t>
             </a:r>
             <a:endParaRPr lang="en-US" sz="1350" dirty="0"/>
           </a:p>
@@ -7882,8 +6844,8 @@
         </p:nvSpPr>
         <p:spPr>
           <a:xfrm>
-            <a:off x="795528" y="1911096"/>
-            <a:ext cx="10600639" cy="402336"/>
+            <a:off x="795528" y="1947672"/>
+            <a:ext cx="3058058" cy="365760"/>
           </a:xfrm>
           <a:prstGeom prst="rect">
             <a:avLst/>
@@ -7901,7 +6863,7 @@
               <a:buNone/>
             </a:pPr>
             <a:r>
-              <a:rPr lang="en-US" sz="1350" b="1" dirty="0">
+              <a:rPr lang="en-US" sz="1250" b="1" dirty="0">
                 <a:solidFill>
                   <a:srgbClr val="10161F"/>
                 </a:solidFill>
@@ -7909,9 +6871,9 @@
                 <a:ea typeface="Pretendard" pitchFamily="34" charset="-122"/>
                 <a:cs typeface="Pretendard" pitchFamily="34" charset="-120"/>
               </a:rPr>
-              <a:t>—</a:t>
-            </a:r>
-            <a:endParaRPr lang="en-US" sz="1350" dirty="0"/>
+              <a:t>2017년 준공 신축급 상태 (누수/균열 결함 없음)</a:t>
+            </a:r>
+            <a:endParaRPr lang="en-US" sz="1250" dirty="0"/>
           </a:p>
         </p:txBody>
       </p:sp>
@@ -7924,7 +6886,7 @@
         <p:spPr>
           <a:xfrm>
             <a:off x="795528" y="2377440"/>
-            <a:ext cx="10600639" cy="2560320"/>
+            <a:ext cx="3058058" cy="2606040"/>
           </a:xfrm>
           <a:prstGeom prst="rect">
             <a:avLst/>
@@ -7946,7 +6908,7 @@
               <a:buChar char="•"/>
             </a:pPr>
             <a:r>
-              <a:rPr lang="en-US" sz="1200" dirty="0">
+              <a:rPr lang="en-US" sz="1100" dirty="0">
                 <a:solidFill>
                   <a:srgbClr val="10161F"/>
                 </a:solidFill>
@@ -7954,22 +6916,69 @@
                 <a:ea typeface="Pretendard" pitchFamily="34" charset="-122"/>
                 <a:cs typeface="Pretendard" pitchFamily="34" charset="-120"/>
               </a:rPr>
-              <a:t>{"ok":true,"mocked":true,"extractedFields":{"area_signal":"역삼","asset_type":"오피스빌딩","price_band":"300억","size_signal":"3000평(약 9917.4㎡)"},"extractedFacts":{"region":"역삼","exactAddressCandidate":"역삼동 7</a:t>
-            </a:r>
-            <a:endParaRPr lang="en-US" sz="1200" dirty="0"/>
-          </a:p>
-        </p:txBody>
-      </p:sp>
-      <p:sp>
-        <p:nvSpPr>
-          <p:cNvPr id="11" name="Text 9"/>
-          <p:cNvSpPr/>
-          <p:nvPr/>
-        </p:nvSpPr>
-        <p:spPr>
-          <a:xfrm>
-            <a:off x="566928" y="6382512"/>
-            <a:ext cx="7315200" cy="219456"/>
+              <a:t>준공 10년 미만으로 대규모 수선비용 발생 가능성 낮음</a:t>
+            </a:r>
+            <a:endParaRPr lang="en-US" sz="1100" dirty="0"/>
+          </a:p>
+        </p:txBody>
+      </p:sp>
+      <p:sp>
+        <p:nvSpPr>
+          <p:cNvPr id="11" name="Shape 9"/>
+          <p:cNvSpPr/>
+          <p:nvPr/>
+        </p:nvSpPr>
+        <p:spPr>
+          <a:xfrm>
+            <a:off x="4338218" y="1417320"/>
+            <a:ext cx="3515258" cy="3657600"/>
+          </a:xfrm>
+          <a:prstGeom prst="roundRect">
+            <a:avLst>
+              <a:gd name="adj" fmla="val 1561"/>
+            </a:avLst>
+          </a:prstGeom>
+          <a:solidFill>
+            <a:srgbClr val="F7FAFC"/>
+          </a:solidFill>
+          <a:ln w="6350">
+            <a:solidFill>
+              <a:srgbClr val="CBD5E0"/>
+            </a:solidFill>
+            <a:prstDash val="solid"/>
+          </a:ln>
+        </p:spPr>
+      </p:sp>
+      <p:sp>
+        <p:nvSpPr>
+          <p:cNvPr id="12" name="Shape 10"/>
+          <p:cNvSpPr/>
+          <p:nvPr/>
+        </p:nvSpPr>
+        <p:spPr>
+          <a:xfrm>
+            <a:off x="4338218" y="1417320"/>
+            <a:ext cx="3515258" cy="45720"/>
+          </a:xfrm>
+          <a:prstGeom prst="rect">
+            <a:avLst/>
+          </a:prstGeom>
+          <a:solidFill>
+            <a:srgbClr val="B98A2E"/>
+          </a:solidFill>
+          <a:ln/>
+        </p:spPr>
+      </p:sp>
+      <p:sp>
+        <p:nvSpPr>
+          <p:cNvPr id="13" name="Text 11"/>
+          <p:cNvSpPr/>
+          <p:nvPr/>
+        </p:nvSpPr>
+        <p:spPr>
+          <a:xfrm>
+            <a:off x="4566818" y="1618488"/>
+            <a:ext cx="3058058" cy="292608"/>
           </a:xfrm>
           <a:prstGeom prst="rect">
             <a:avLst/>
@@ -7985,14 +6994,377 @@
               <a:buNone/>
             </a:pPr>
             <a:r>
-              <a:rPr lang="en-US" sz="800" dirty="0">
-                <a:solidFill>
-                  <a:srgbClr val="718096"/>
+              <a:rPr lang="en-US" sz="1350" b="1" dirty="0">
+                <a:solidFill>
+                  <a:srgbClr val="977024"/>
                 </a:solidFill>
                 <a:latin typeface="Pretendard" pitchFamily="34" charset="0"/>
                 <a:ea typeface="Pretendard" pitchFamily="34" charset="-122"/>
                 <a:cs typeface="Pretendard" pitchFamily="34" charset="-120"/>
               </a:rPr>
+              <a:t>승강기 및 설비</a:t>
+            </a:r>
+            <a:endParaRPr lang="en-US" sz="1350" dirty="0"/>
+          </a:p>
+        </p:txBody>
+      </p:sp>
+      <p:sp>
+        <p:nvSpPr>
+          <p:cNvPr id="14" name="Text 12"/>
+          <p:cNvSpPr/>
+          <p:nvPr/>
+        </p:nvSpPr>
+        <p:spPr>
+          <a:xfrm>
+            <a:off x="4566818" y="1947672"/>
+            <a:ext cx="3058058" cy="365760"/>
+          </a:xfrm>
+          <a:prstGeom prst="rect">
+            <a:avLst/>
+          </a:prstGeom>
+          <a:noFill/>
+          <a:ln/>
+        </p:spPr>
+        <p:txBody>
+          <a:bodyPr wrap="square" lIns="0" tIns="0" rIns="0" bIns="0" rtlCol="0" anchor="ctr">
+            <a:normAutofit/>
+          </a:bodyPr>
+          <a:lstStyle/>
+          <a:p>
+            <a:pPr indent="0" marL="0">
+              <a:buNone/>
+            </a:pPr>
+            <a:r>
+              <a:rPr lang="en-US" sz="1250" b="1" dirty="0">
+                <a:solidFill>
+                  <a:srgbClr val="10161F"/>
+                </a:solidFill>
+                <a:latin typeface="Pretendard" pitchFamily="34" charset="0"/>
+                <a:ea typeface="Pretendard" pitchFamily="34" charset="-122"/>
+                <a:cs typeface="Pretendard" pitchFamily="34" charset="-120"/>
+              </a:rPr>
+              <a:t>15인승 침대용 승강기 및 냉난방 설비 양호</a:t>
+            </a:r>
+            <a:endParaRPr lang="en-US" sz="1250" dirty="0"/>
+          </a:p>
+        </p:txBody>
+      </p:sp>
+      <p:sp>
+        <p:nvSpPr>
+          <p:cNvPr id="15" name="Text 13"/>
+          <p:cNvSpPr/>
+          <p:nvPr/>
+        </p:nvSpPr>
+        <p:spPr>
+          <a:xfrm>
+            <a:off x="4566818" y="2377440"/>
+            <a:ext cx="3058058" cy="2606040"/>
+          </a:xfrm>
+          <a:prstGeom prst="rect">
+            <a:avLst/>
+          </a:prstGeom>
+          <a:noFill/>
+          <a:ln/>
+        </p:spPr>
+        <p:txBody>
+          <a:bodyPr wrap="square" lIns="0" tIns="0" rIns="0" bIns="0" rtlCol="0" anchor="t">
+            <a:normAutofit/>
+          </a:bodyPr>
+          <a:lstStyle/>
+          <a:p>
+            <a:pPr marL="342900" indent="-342900">
+              <a:lnSpc>
+                <a:spcPct val="125000"/>
+              </a:lnSpc>
+              <a:buSzPct val="100000"/>
+              <a:buChar char="•"/>
+            </a:pPr>
+            <a:r>
+              <a:rPr lang="en-US" sz="1100" dirty="0">
+                <a:solidFill>
+                  <a:srgbClr val="10161F"/>
+                </a:solidFill>
+                <a:latin typeface="Pretendard" pitchFamily="34" charset="0"/>
+                <a:ea typeface="Pretendard" pitchFamily="34" charset="-122"/>
+                <a:cs typeface="Pretendard" pitchFamily="34" charset="-120"/>
+              </a:rPr>
+              <a:t>주기적 정기 점검 계약 유지로 관리 리스크 최소화</a:t>
+            </a:r>
+            <a:endParaRPr lang="en-US" sz="1100" dirty="0"/>
+          </a:p>
+        </p:txBody>
+      </p:sp>
+      <p:sp>
+        <p:nvSpPr>
+          <p:cNvPr id="16" name="Shape 14"/>
+          <p:cNvSpPr/>
+          <p:nvPr/>
+        </p:nvSpPr>
+        <p:spPr>
+          <a:xfrm>
+            <a:off x="8109509" y="1417320"/>
+            <a:ext cx="3515258" cy="3657600"/>
+          </a:xfrm>
+          <a:prstGeom prst="roundRect">
+            <a:avLst>
+              <a:gd name="adj" fmla="val 1561"/>
+            </a:avLst>
+          </a:prstGeom>
+          <a:solidFill>
+            <a:srgbClr val="F7FAFC"/>
+          </a:solidFill>
+          <a:ln w="6350">
+            <a:solidFill>
+              <a:srgbClr val="CBD5E0"/>
+            </a:solidFill>
+            <a:prstDash val="solid"/>
+          </a:ln>
+        </p:spPr>
+      </p:sp>
+      <p:sp>
+        <p:nvSpPr>
+          <p:cNvPr id="17" name="Shape 15"/>
+          <p:cNvSpPr/>
+          <p:nvPr/>
+        </p:nvSpPr>
+        <p:spPr>
+          <a:xfrm>
+            <a:off x="8109509" y="1417320"/>
+            <a:ext cx="3515258" cy="45720"/>
+          </a:xfrm>
+          <a:prstGeom prst="rect">
+            <a:avLst/>
+          </a:prstGeom>
+          <a:solidFill>
+            <a:srgbClr val="B98A2E"/>
+          </a:solidFill>
+          <a:ln/>
+        </p:spPr>
+      </p:sp>
+      <p:sp>
+        <p:nvSpPr>
+          <p:cNvPr id="18" name="Text 16"/>
+          <p:cNvSpPr/>
+          <p:nvPr/>
+        </p:nvSpPr>
+        <p:spPr>
+          <a:xfrm>
+            <a:off x="8338109" y="1618488"/>
+            <a:ext cx="3058058" cy="292608"/>
+          </a:xfrm>
+          <a:prstGeom prst="rect">
+            <a:avLst/>
+          </a:prstGeom>
+          <a:noFill/>
+          <a:ln/>
+        </p:spPr>
+        <p:txBody>
+          <a:bodyPr wrap="square" lIns="0" tIns="0" rIns="0" bIns="0" rtlCol="0" anchor="ctr"/>
+          <a:lstStyle/>
+          <a:p>
+            <a:pPr indent="0" marL="0">
+              <a:buNone/>
+            </a:pPr>
+            <a:r>
+              <a:rPr lang="en-US" sz="1350" b="1" dirty="0">
+                <a:solidFill>
+                  <a:srgbClr val="977024"/>
+                </a:solidFill>
+                <a:latin typeface="Pretendard" pitchFamily="34" charset="0"/>
+                <a:ea typeface="Pretendard" pitchFamily="34" charset="-122"/>
+                <a:cs typeface="Pretendard" pitchFamily="34" charset="-120"/>
+              </a:rPr>
+              <a:t>임차인 이탈 위험</a:t>
+            </a:r>
+            <a:endParaRPr lang="en-US" sz="1350" dirty="0"/>
+          </a:p>
+        </p:txBody>
+      </p:sp>
+      <p:sp>
+        <p:nvSpPr>
+          <p:cNvPr id="19" name="Text 17"/>
+          <p:cNvSpPr/>
+          <p:nvPr/>
+        </p:nvSpPr>
+        <p:spPr>
+          <a:xfrm>
+            <a:off x="8338109" y="1947672"/>
+            <a:ext cx="3058058" cy="365760"/>
+          </a:xfrm>
+          <a:prstGeom prst="rect">
+            <a:avLst/>
+          </a:prstGeom>
+          <a:noFill/>
+          <a:ln/>
+        </p:spPr>
+        <p:txBody>
+          <a:bodyPr wrap="square" lIns="0" tIns="0" rIns="0" bIns="0" rtlCol="0" anchor="ctr">
+            <a:normAutofit/>
+          </a:bodyPr>
+          <a:lstStyle/>
+          <a:p>
+            <a:pPr indent="0" marL="0">
+              <a:buNone/>
+            </a:pPr>
+            <a:r>
+              <a:rPr lang="en-US" sz="1250" b="1" dirty="0">
+                <a:solidFill>
+                  <a:srgbClr val="10161F"/>
+                </a:solidFill>
+                <a:latin typeface="Pretendard" pitchFamily="34" charset="0"/>
+                <a:ea typeface="Pretendard" pitchFamily="34" charset="-122"/>
+                <a:cs typeface="Pretendard" pitchFamily="34" charset="-120"/>
+              </a:rPr>
+              <a:t>병의원/약국 인테리어 투자비(호실당 5억↑) 존속</a:t>
+            </a:r>
+            <a:endParaRPr lang="en-US" sz="1250" dirty="0"/>
+          </a:p>
+        </p:txBody>
+      </p:sp>
+      <p:sp>
+        <p:nvSpPr>
+          <p:cNvPr id="20" name="Text 18"/>
+          <p:cNvSpPr/>
+          <p:nvPr/>
+        </p:nvSpPr>
+        <p:spPr>
+          <a:xfrm>
+            <a:off x="8338109" y="2377440"/>
+            <a:ext cx="3058058" cy="2606040"/>
+          </a:xfrm>
+          <a:prstGeom prst="rect">
+            <a:avLst/>
+          </a:prstGeom>
+          <a:noFill/>
+          <a:ln/>
+        </p:spPr>
+        <p:txBody>
+          <a:bodyPr wrap="square" lIns="0" tIns="0" rIns="0" bIns="0" rtlCol="0" anchor="t">
+            <a:normAutofit/>
+          </a:bodyPr>
+          <a:lstStyle/>
+          <a:p>
+            <a:pPr marL="342900" indent="-342900">
+              <a:lnSpc>
+                <a:spcPct val="125000"/>
+              </a:lnSpc>
+              <a:buSzPct val="100000"/>
+              <a:buChar char="•"/>
+            </a:pPr>
+            <a:r>
+              <a:rPr lang="en-US" sz="1100" dirty="0">
+                <a:solidFill>
+                  <a:srgbClr val="10161F"/>
+                </a:solidFill>
+                <a:latin typeface="Pretendard" pitchFamily="34" charset="0"/>
+                <a:ea typeface="Pretendard" pitchFamily="34" charset="-122"/>
+                <a:cs typeface="Pretendard" pitchFamily="34" charset="-120"/>
+              </a:rPr>
+              <a:t>WALE 3.5년 확보 및 만기 6개월 전 재계약 협상 개시</a:t>
+            </a:r>
+            <a:endParaRPr lang="en-US" sz="1100" dirty="0"/>
+          </a:p>
+        </p:txBody>
+      </p:sp>
+      <p:sp>
+        <p:nvSpPr>
+          <p:cNvPr id="21" name="Shape 19"/>
+          <p:cNvSpPr/>
+          <p:nvPr/>
+        </p:nvSpPr>
+        <p:spPr>
+          <a:xfrm>
+            <a:off x="566928" y="5193792"/>
+            <a:ext cx="11057839" cy="621792"/>
+          </a:xfrm>
+          <a:prstGeom prst="roundRect">
+            <a:avLst>
+              <a:gd name="adj" fmla="val 8824"/>
+            </a:avLst>
+          </a:prstGeom>
+          <a:solidFill>
+            <a:srgbClr val="F7FAFC"/>
+          </a:solidFill>
+          <a:ln w="6350">
+            <a:solidFill>
+              <a:srgbClr val="CBD5E0"/>
+            </a:solidFill>
+            <a:prstDash val="solid"/>
+          </a:ln>
+        </p:spPr>
+      </p:sp>
+      <p:sp>
+        <p:nvSpPr>
+          <p:cNvPr id="22" name="Text 20"/>
+          <p:cNvSpPr/>
+          <p:nvPr/>
+        </p:nvSpPr>
+        <p:spPr>
+          <a:xfrm>
+            <a:off x="795528" y="5193792"/>
+            <a:ext cx="10600639" cy="621792"/>
+          </a:xfrm>
+          <a:prstGeom prst="rect">
+            <a:avLst/>
+          </a:prstGeom>
+          <a:noFill/>
+          <a:ln/>
+        </p:spPr>
+        <p:txBody>
+          <a:bodyPr wrap="square" lIns="0" tIns="0" rIns="0" bIns="0" rtlCol="0" anchor="ctr"/>
+          <a:lstStyle/>
+          <a:p>
+            <a:pPr indent="0" marL="0">
+              <a:buNone/>
+            </a:pPr>
+            <a:r>
+              <a:rPr lang="en-US" sz="1100" dirty="0">
+                <a:solidFill>
+                  <a:srgbClr val="10161F"/>
+                </a:solidFill>
+                <a:latin typeface="Pretendard" pitchFamily="34" charset="0"/>
+                <a:ea typeface="Pretendard" pitchFamily="34" charset="-122"/>
+                <a:cs typeface="Pretendard" pitchFamily="34" charset="-120"/>
+              </a:rPr>
+              <a:t>실사 총평: 자산의 물리적·권리적 하자가 없으며, 세부 임대차 계약서 및 등기사항증명서는 LOI 접수 후 원본 열람 가능합니다.</a:t>
+            </a:r>
+            <a:endParaRPr lang="en-US" sz="1100" dirty="0"/>
+          </a:p>
+        </p:txBody>
+      </p:sp>
+      <p:sp>
+        <p:nvSpPr>
+          <p:cNvPr id="23" name="Text 21"/>
+          <p:cNvSpPr/>
+          <p:nvPr/>
+        </p:nvSpPr>
+        <p:spPr>
+          <a:xfrm>
+            <a:off x="566928" y="6382512"/>
+            <a:ext cx="7315200" cy="219456"/>
+          </a:xfrm>
+          <a:prstGeom prst="rect">
+            <a:avLst/>
+          </a:prstGeom>
+          <a:noFill/>
+          <a:ln/>
+        </p:spPr>
+        <p:txBody>
+          <a:bodyPr wrap="square" lIns="0" tIns="0" rIns="0" bIns="0" rtlCol="0" anchor="ctr"/>
+          <a:lstStyle/>
+          <a:p>
+            <a:pPr indent="0" marL="0">
+              <a:buNone/>
+            </a:pPr>
+            <a:r>
+              <a:rPr lang="en-US" sz="800" dirty="0">
+                <a:solidFill>
+                  <a:srgbClr val="718096"/>
+                </a:solidFill>
+                <a:latin typeface="Pretendard" pitchFamily="34" charset="0"/>
+                <a:ea typeface="Pretendard" pitchFamily="34" charset="-122"/>
+                <a:cs typeface="Pretendard" pitchFamily="34" charset="-120"/>
+              </a:rPr>
               <a:t>크리딜   |   </a:t>
             </a:r>
             <a:endParaRPr lang="en-US" sz="800" dirty="0"/>
@@ -8001,7 +7373,7 @@
       </p:sp>
       <p:sp>
         <p:nvSpPr>
-          <p:cNvPr id="12" name="Text 10"/>
+          <p:cNvPr id="24" name="Text 22"/>
           <p:cNvSpPr/>
           <p:nvPr/>
         </p:nvSpPr>
@@ -8240,9 +7612,645 @@
                 <a:ea typeface="Pretendard" pitchFamily="34" charset="-122"/>
                 <a:cs typeface="Pretendard" pitchFamily="34" charset="-120"/>
               </a:rPr>
-              <a:t>밸류업 시나리오 (AI 추정)</a:t>
+              <a:t>3대 핵심 투자 포인트 (Investment Highlights)</a:t>
             </a:r>
             <a:endParaRPr lang="en-US" sz="1100" dirty="0"/>
+          </a:p>
+        </p:txBody>
+      </p:sp>
+      <p:sp>
+        <p:nvSpPr>
+          <p:cNvPr id="7" name="Shape 5"/>
+          <p:cNvSpPr/>
+          <p:nvPr/>
+        </p:nvSpPr>
+        <p:spPr>
+          <a:xfrm>
+            <a:off x="566928" y="1481328"/>
+            <a:ext cx="3472586" cy="2560320"/>
+          </a:xfrm>
+          <a:prstGeom prst="roundRect">
+            <a:avLst>
+              <a:gd name="adj" fmla="val 2857"/>
+            </a:avLst>
+          </a:prstGeom>
+          <a:solidFill>
+            <a:srgbClr val="F7FAFC"/>
+          </a:solidFill>
+          <a:ln w="10160">
+            <a:solidFill>
+              <a:srgbClr val="CBD5E0"/>
+            </a:solidFill>
+            <a:prstDash val="solid"/>
+          </a:ln>
+        </p:spPr>
+      </p:sp>
+      <p:sp>
+        <p:nvSpPr>
+          <p:cNvPr id="8" name="Shape 6"/>
+          <p:cNvSpPr/>
+          <p:nvPr/>
+        </p:nvSpPr>
+        <p:spPr>
+          <a:xfrm>
+            <a:off x="566928" y="1481328"/>
+            <a:ext cx="3472586" cy="54864"/>
+          </a:xfrm>
+          <a:prstGeom prst="rect">
+            <a:avLst/>
+          </a:prstGeom>
+          <a:solidFill>
+            <a:srgbClr val="B98A2E"/>
+          </a:solidFill>
+          <a:ln/>
+        </p:spPr>
+      </p:sp>
+      <p:sp>
+        <p:nvSpPr>
+          <p:cNvPr id="9" name="Shape 7"/>
+          <p:cNvSpPr/>
+          <p:nvPr/>
+        </p:nvSpPr>
+        <p:spPr>
+          <a:xfrm>
+            <a:off x="795528" y="1755648"/>
+            <a:ext cx="475488" cy="292608"/>
+          </a:xfrm>
+          <a:prstGeom prst="roundRect">
+            <a:avLst>
+              <a:gd name="adj" fmla="val 12500"/>
+            </a:avLst>
+          </a:prstGeom>
+          <a:solidFill>
+            <a:srgbClr val="D9B668"/>
+          </a:solidFill>
+          <a:ln/>
+        </p:spPr>
+      </p:sp>
+      <p:sp>
+        <p:nvSpPr>
+          <p:cNvPr id="10" name="Text 8"/>
+          <p:cNvSpPr/>
+          <p:nvPr/>
+        </p:nvSpPr>
+        <p:spPr>
+          <a:xfrm>
+            <a:off x="795528" y="1755648"/>
+            <a:ext cx="475488" cy="292608"/>
+          </a:xfrm>
+          <a:prstGeom prst="rect">
+            <a:avLst/>
+          </a:prstGeom>
+          <a:noFill/>
+          <a:ln/>
+        </p:spPr>
+        <p:txBody>
+          <a:bodyPr wrap="square" lIns="0" tIns="0" rIns="0" bIns="0" rtlCol="0" anchor="ctr"/>
+          <a:lstStyle/>
+          <a:p>
+            <a:pPr algn="ctr" indent="0" marL="0">
+              <a:buNone/>
+            </a:pPr>
+            <a:r>
+              <a:rPr lang="en-US" sz="1100" b="1" dirty="0">
+                <a:solidFill>
+                  <a:srgbClr val="977024"/>
+                </a:solidFill>
+                <a:latin typeface="Arial" pitchFamily="34" charset="0"/>
+                <a:ea typeface="Arial" pitchFamily="34" charset="-122"/>
+                <a:cs typeface="Arial" pitchFamily="34" charset="-120"/>
+              </a:rPr>
+              <a:t>01</a:t>
+            </a:r>
+            <a:endParaRPr lang="en-US" sz="1100" dirty="0"/>
+          </a:p>
+        </p:txBody>
+      </p:sp>
+      <p:sp>
+        <p:nvSpPr>
+          <p:cNvPr id="11" name="Text 9"/>
+          <p:cNvSpPr/>
+          <p:nvPr/>
+        </p:nvSpPr>
+        <p:spPr>
+          <a:xfrm>
+            <a:off x="795528" y="2194560"/>
+            <a:ext cx="3015386" cy="365760"/>
+          </a:xfrm>
+          <a:prstGeom prst="rect">
+            <a:avLst/>
+          </a:prstGeom>
+          <a:noFill/>
+          <a:ln/>
+        </p:spPr>
+        <p:txBody>
+          <a:bodyPr wrap="square" lIns="0" tIns="0" rIns="0" bIns="0" rtlCol="0" anchor="t"/>
+          <a:lstStyle/>
+          <a:p>
+            <a:pPr indent="0" marL="0">
+              <a:buNone/>
+            </a:pPr>
+            <a:r>
+              <a:rPr lang="en-US" sz="1500" b="1" dirty="0">
+                <a:solidFill>
+                  <a:srgbClr val="10161F"/>
+                </a:solidFill>
+                <a:latin typeface="Pretendard" pitchFamily="34" charset="0"/>
+                <a:ea typeface="Pretendard" pitchFamily="34" charset="-122"/>
+                <a:cs typeface="Pretendard" pitchFamily="34" charset="-120"/>
+              </a:rPr>
+              <a:t>원금 안전판 확보</a:t>
+            </a:r>
+            <a:endParaRPr lang="en-US" sz="1500" dirty="0"/>
+          </a:p>
+        </p:txBody>
+      </p:sp>
+      <p:sp>
+        <p:nvSpPr>
+          <p:cNvPr id="12" name="Shape 10"/>
+          <p:cNvSpPr/>
+          <p:nvPr/>
+        </p:nvSpPr>
+        <p:spPr>
+          <a:xfrm>
+            <a:off x="795528" y="2624328"/>
+            <a:ext cx="3015386" cy="0"/>
+          </a:xfrm>
+          <a:prstGeom prst="line">
+            <a:avLst/>
+          </a:prstGeom>
+          <a:noFill/>
+          <a:ln w="6350">
+            <a:solidFill>
+              <a:srgbClr val="CBD5E0"/>
+            </a:solidFill>
+            <a:prstDash val="solid"/>
+          </a:ln>
+        </p:spPr>
+      </p:sp>
+      <p:sp>
+        <p:nvSpPr>
+          <p:cNvPr id="13" name="Text 11"/>
+          <p:cNvSpPr/>
+          <p:nvPr/>
+        </p:nvSpPr>
+        <p:spPr>
+          <a:xfrm>
+            <a:off x="795528" y="2779776"/>
+            <a:ext cx="3015386" cy="1051560"/>
+          </a:xfrm>
+          <a:prstGeom prst="rect">
+            <a:avLst/>
+          </a:prstGeom>
+          <a:noFill/>
+          <a:ln/>
+        </p:spPr>
+        <p:txBody>
+          <a:bodyPr wrap="square" lIns="0" tIns="0" rIns="0" bIns="0" rtlCol="0" anchor="t"/>
+          <a:lstStyle/>
+          <a:p>
+            <a:pPr indent="0" marL="0">
+              <a:lnSpc>
+                <a:spcPct val="130000"/>
+              </a:lnSpc>
+              <a:buNone/>
+            </a:pPr>
+            <a:r>
+              <a:rPr lang="en-US" sz="1200" dirty="0">
+                <a:solidFill>
+                  <a:srgbClr val="10161F"/>
+                </a:solidFill>
+                <a:latin typeface="Pretendard" pitchFamily="34" charset="0"/>
+                <a:ea typeface="Pretendard" pitchFamily="34" charset="-122"/>
+                <a:cs typeface="Pretendard" pitchFamily="34" charset="-120"/>
+              </a:rPr>
+              <a:t>송파권역의 핵심 입지로, 우량한 대지 지분 가치가 하방 경직성을 강력히 지지합니다.</a:t>
+            </a:r>
+            <a:endParaRPr lang="en-US" sz="1200" dirty="0"/>
+          </a:p>
+        </p:txBody>
+      </p:sp>
+      <p:sp>
+        <p:nvSpPr>
+          <p:cNvPr id="14" name="Shape 12"/>
+          <p:cNvSpPr/>
+          <p:nvPr/>
+        </p:nvSpPr>
+        <p:spPr>
+          <a:xfrm>
+            <a:off x="4359554" y="1481328"/>
+            <a:ext cx="3472586" cy="2560320"/>
+          </a:xfrm>
+          <a:prstGeom prst="roundRect">
+            <a:avLst>
+              <a:gd name="adj" fmla="val 2857"/>
+            </a:avLst>
+          </a:prstGeom>
+          <a:solidFill>
+            <a:srgbClr val="F7FAFC"/>
+          </a:solidFill>
+          <a:ln w="10160">
+            <a:solidFill>
+              <a:srgbClr val="CBD5E0"/>
+            </a:solidFill>
+            <a:prstDash val="solid"/>
+          </a:ln>
+        </p:spPr>
+      </p:sp>
+      <p:sp>
+        <p:nvSpPr>
+          <p:cNvPr id="15" name="Shape 13"/>
+          <p:cNvSpPr/>
+          <p:nvPr/>
+        </p:nvSpPr>
+        <p:spPr>
+          <a:xfrm>
+            <a:off x="4359554" y="1481328"/>
+            <a:ext cx="3472586" cy="54864"/>
+          </a:xfrm>
+          <a:prstGeom prst="rect">
+            <a:avLst/>
+          </a:prstGeom>
+          <a:solidFill>
+            <a:srgbClr val="B98A2E"/>
+          </a:solidFill>
+          <a:ln/>
+        </p:spPr>
+      </p:sp>
+      <p:sp>
+        <p:nvSpPr>
+          <p:cNvPr id="16" name="Shape 14"/>
+          <p:cNvSpPr/>
+          <p:nvPr/>
+        </p:nvSpPr>
+        <p:spPr>
+          <a:xfrm>
+            <a:off x="4588154" y="1755648"/>
+            <a:ext cx="475488" cy="292608"/>
+          </a:xfrm>
+          <a:prstGeom prst="roundRect">
+            <a:avLst>
+              <a:gd name="adj" fmla="val 12500"/>
+            </a:avLst>
+          </a:prstGeom>
+          <a:solidFill>
+            <a:srgbClr val="D9B668"/>
+          </a:solidFill>
+          <a:ln/>
+        </p:spPr>
+      </p:sp>
+      <p:sp>
+        <p:nvSpPr>
+          <p:cNvPr id="17" name="Text 15"/>
+          <p:cNvSpPr/>
+          <p:nvPr/>
+        </p:nvSpPr>
+        <p:spPr>
+          <a:xfrm>
+            <a:off x="4588154" y="1755648"/>
+            <a:ext cx="475488" cy="292608"/>
+          </a:xfrm>
+          <a:prstGeom prst="rect">
+            <a:avLst/>
+          </a:prstGeom>
+          <a:noFill/>
+          <a:ln/>
+        </p:spPr>
+        <p:txBody>
+          <a:bodyPr wrap="square" lIns="0" tIns="0" rIns="0" bIns="0" rtlCol="0" anchor="ctr"/>
+          <a:lstStyle/>
+          <a:p>
+            <a:pPr algn="ctr" indent="0" marL="0">
+              <a:buNone/>
+            </a:pPr>
+            <a:r>
+              <a:rPr lang="en-US" sz="1100" b="1" dirty="0">
+                <a:solidFill>
+                  <a:srgbClr val="977024"/>
+                </a:solidFill>
+                <a:latin typeface="Arial" pitchFamily="34" charset="0"/>
+                <a:ea typeface="Arial" pitchFamily="34" charset="-122"/>
+                <a:cs typeface="Arial" pitchFamily="34" charset="-120"/>
+              </a:rPr>
+              <a:t>02</a:t>
+            </a:r>
+            <a:endParaRPr lang="en-US" sz="1100" dirty="0"/>
+          </a:p>
+        </p:txBody>
+      </p:sp>
+      <p:sp>
+        <p:nvSpPr>
+          <p:cNvPr id="18" name="Text 16"/>
+          <p:cNvSpPr/>
+          <p:nvPr/>
+        </p:nvSpPr>
+        <p:spPr>
+          <a:xfrm>
+            <a:off x="4588154" y="2194560"/>
+            <a:ext cx="3015386" cy="365760"/>
+          </a:xfrm>
+          <a:prstGeom prst="rect">
+            <a:avLst/>
+          </a:prstGeom>
+          <a:noFill/>
+          <a:ln/>
+        </p:spPr>
+        <p:txBody>
+          <a:bodyPr wrap="square" lIns="0" tIns="0" rIns="0" bIns="0" rtlCol="0" anchor="t"/>
+          <a:lstStyle/>
+          <a:p>
+            <a:pPr indent="0" marL="0">
+              <a:buNone/>
+            </a:pPr>
+            <a:r>
+              <a:rPr lang="en-US" sz="1500" b="1" dirty="0">
+                <a:solidFill>
+                  <a:srgbClr val="10161F"/>
+                </a:solidFill>
+                <a:latin typeface="Pretendard" pitchFamily="34" charset="0"/>
+                <a:ea typeface="Pretendard" pitchFamily="34" charset="-122"/>
+                <a:cs typeface="Pretendard" pitchFamily="34" charset="-120"/>
+              </a:rPr>
+              <a:t>확실한 월 현금흐름</a:t>
+            </a:r>
+            <a:endParaRPr lang="en-US" sz="1500" dirty="0"/>
+          </a:p>
+        </p:txBody>
+      </p:sp>
+      <p:sp>
+        <p:nvSpPr>
+          <p:cNvPr id="19" name="Shape 17"/>
+          <p:cNvSpPr/>
+          <p:nvPr/>
+        </p:nvSpPr>
+        <p:spPr>
+          <a:xfrm>
+            <a:off x="4588154" y="2624328"/>
+            <a:ext cx="3015386" cy="0"/>
+          </a:xfrm>
+          <a:prstGeom prst="line">
+            <a:avLst/>
+          </a:prstGeom>
+          <a:noFill/>
+          <a:ln w="6350">
+            <a:solidFill>
+              <a:srgbClr val="CBD5E0"/>
+            </a:solidFill>
+            <a:prstDash val="solid"/>
+          </a:ln>
+        </p:spPr>
+      </p:sp>
+      <p:sp>
+        <p:nvSpPr>
+          <p:cNvPr id="20" name="Text 18"/>
+          <p:cNvSpPr/>
+          <p:nvPr/>
+        </p:nvSpPr>
+        <p:spPr>
+          <a:xfrm>
+            <a:off x="4588154" y="2779776"/>
+            <a:ext cx="3015386" cy="1051560"/>
+          </a:xfrm>
+          <a:prstGeom prst="rect">
+            <a:avLst/>
+          </a:prstGeom>
+          <a:noFill/>
+          <a:ln/>
+        </p:spPr>
+        <p:txBody>
+          <a:bodyPr wrap="square" lIns="0" tIns="0" rIns="0" bIns="0" rtlCol="0" anchor="t"/>
+          <a:lstStyle/>
+          <a:p>
+            <a:pPr indent="0" marL="0">
+              <a:lnSpc>
+                <a:spcPct val="130000"/>
+              </a:lnSpc>
+              <a:buNone/>
+            </a:pPr>
+            <a:r>
+              <a:rPr lang="en-US" sz="1200" dirty="0">
+                <a:solidFill>
+                  <a:srgbClr val="10161F"/>
+                </a:solidFill>
+                <a:latin typeface="Pretendard" pitchFamily="34" charset="0"/>
+                <a:ea typeface="Pretendard" pitchFamily="34" charset="-122"/>
+                <a:cs typeface="Pretendard" pitchFamily="34" charset="-120"/>
+              </a:rPr>
+              <a:t>우량 테넌트 만실 운영 및 장기 임대차 구조를 기반으로 매월 안정적인 순영업소득(NOI) 창출이 기대됩니다.</a:t>
+            </a:r>
+            <a:endParaRPr lang="en-US" sz="1200" dirty="0"/>
+          </a:p>
+        </p:txBody>
+      </p:sp>
+      <p:sp>
+        <p:nvSpPr>
+          <p:cNvPr id="21" name="Shape 19"/>
+          <p:cNvSpPr/>
+          <p:nvPr/>
+        </p:nvSpPr>
+        <p:spPr>
+          <a:xfrm>
+            <a:off x="8152181" y="1481328"/>
+            <a:ext cx="3472586" cy="2560320"/>
+          </a:xfrm>
+          <a:prstGeom prst="roundRect">
+            <a:avLst>
+              <a:gd name="adj" fmla="val 2857"/>
+            </a:avLst>
+          </a:prstGeom>
+          <a:solidFill>
+            <a:srgbClr val="F7FAFC"/>
+          </a:solidFill>
+          <a:ln w="10160">
+            <a:solidFill>
+              <a:srgbClr val="CBD5E0"/>
+            </a:solidFill>
+            <a:prstDash val="solid"/>
+          </a:ln>
+        </p:spPr>
+      </p:sp>
+      <p:sp>
+        <p:nvSpPr>
+          <p:cNvPr id="22" name="Shape 20"/>
+          <p:cNvSpPr/>
+          <p:nvPr/>
+        </p:nvSpPr>
+        <p:spPr>
+          <a:xfrm>
+            <a:off x="8152181" y="1481328"/>
+            <a:ext cx="3472586" cy="54864"/>
+          </a:xfrm>
+          <a:prstGeom prst="rect">
+            <a:avLst/>
+          </a:prstGeom>
+          <a:solidFill>
+            <a:srgbClr val="B98A2E"/>
+          </a:solidFill>
+          <a:ln/>
+        </p:spPr>
+      </p:sp>
+      <p:sp>
+        <p:nvSpPr>
+          <p:cNvPr id="23" name="Shape 21"/>
+          <p:cNvSpPr/>
+          <p:nvPr/>
+        </p:nvSpPr>
+        <p:spPr>
+          <a:xfrm>
+            <a:off x="8380781" y="1755648"/>
+            <a:ext cx="475488" cy="292608"/>
+          </a:xfrm>
+          <a:prstGeom prst="roundRect">
+            <a:avLst>
+              <a:gd name="adj" fmla="val 12500"/>
+            </a:avLst>
+          </a:prstGeom>
+          <a:solidFill>
+            <a:srgbClr val="D9B668"/>
+          </a:solidFill>
+          <a:ln/>
+        </p:spPr>
+      </p:sp>
+      <p:sp>
+        <p:nvSpPr>
+          <p:cNvPr id="24" name="Text 22"/>
+          <p:cNvSpPr/>
+          <p:nvPr/>
+        </p:nvSpPr>
+        <p:spPr>
+          <a:xfrm>
+            <a:off x="8380781" y="1755648"/>
+            <a:ext cx="475488" cy="292608"/>
+          </a:xfrm>
+          <a:prstGeom prst="rect">
+            <a:avLst/>
+          </a:prstGeom>
+          <a:noFill/>
+          <a:ln/>
+        </p:spPr>
+        <p:txBody>
+          <a:bodyPr wrap="square" lIns="0" tIns="0" rIns="0" bIns="0" rtlCol="0" anchor="ctr"/>
+          <a:lstStyle/>
+          <a:p>
+            <a:pPr algn="ctr" indent="0" marL="0">
+              <a:buNone/>
+            </a:pPr>
+            <a:r>
+              <a:rPr lang="en-US" sz="1100" b="1" dirty="0">
+                <a:solidFill>
+                  <a:srgbClr val="977024"/>
+                </a:solidFill>
+                <a:latin typeface="Arial" pitchFamily="34" charset="0"/>
+                <a:ea typeface="Arial" pitchFamily="34" charset="-122"/>
+                <a:cs typeface="Arial" pitchFamily="34" charset="-120"/>
+              </a:rPr>
+              <a:t>03</a:t>
+            </a:r>
+            <a:endParaRPr lang="en-US" sz="1100" dirty="0"/>
+          </a:p>
+        </p:txBody>
+      </p:sp>
+      <p:sp>
+        <p:nvSpPr>
+          <p:cNvPr id="25" name="Text 23"/>
+          <p:cNvSpPr/>
+          <p:nvPr/>
+        </p:nvSpPr>
+        <p:spPr>
+          <a:xfrm>
+            <a:off x="8380781" y="2194560"/>
+            <a:ext cx="3015386" cy="365760"/>
+          </a:xfrm>
+          <a:prstGeom prst="rect">
+            <a:avLst/>
+          </a:prstGeom>
+          <a:noFill/>
+          <a:ln/>
+        </p:spPr>
+        <p:txBody>
+          <a:bodyPr wrap="square" lIns="0" tIns="0" rIns="0" bIns="0" rtlCol="0" anchor="t"/>
+          <a:lstStyle/>
+          <a:p>
+            <a:pPr indent="0" marL="0">
+              <a:buNone/>
+            </a:pPr>
+            <a:r>
+              <a:rPr lang="en-US" sz="1500" b="1" dirty="0">
+                <a:solidFill>
+                  <a:srgbClr val="10161F"/>
+                </a:solidFill>
+                <a:latin typeface="Pretendard" pitchFamily="34" charset="0"/>
+                <a:ea typeface="Pretendard" pitchFamily="34" charset="-122"/>
+                <a:cs typeface="Pretendard" pitchFamily="34" charset="-120"/>
+              </a:rPr>
+              <a:t>가치 상승 및 출구 전략</a:t>
+            </a:r>
+            <a:endParaRPr lang="en-US" sz="1500" dirty="0"/>
+          </a:p>
+        </p:txBody>
+      </p:sp>
+      <p:sp>
+        <p:nvSpPr>
+          <p:cNvPr id="26" name="Shape 24"/>
+          <p:cNvSpPr/>
+          <p:nvPr/>
+        </p:nvSpPr>
+        <p:spPr>
+          <a:xfrm>
+            <a:off x="8380781" y="2624328"/>
+            <a:ext cx="3015386" cy="0"/>
+          </a:xfrm>
+          <a:prstGeom prst="line">
+            <a:avLst/>
+          </a:prstGeom>
+          <a:noFill/>
+          <a:ln w="6350">
+            <a:solidFill>
+              <a:srgbClr val="CBD5E0"/>
+            </a:solidFill>
+            <a:prstDash val="solid"/>
+          </a:ln>
+        </p:spPr>
+      </p:sp>
+      <p:sp>
+        <p:nvSpPr>
+          <p:cNvPr id="27" name="Text 25"/>
+          <p:cNvSpPr/>
+          <p:nvPr/>
+        </p:nvSpPr>
+        <p:spPr>
+          <a:xfrm>
+            <a:off x="8380781" y="2779776"/>
+            <a:ext cx="3015386" cy="1051560"/>
+          </a:xfrm>
+          <a:prstGeom prst="rect">
+            <a:avLst/>
+          </a:prstGeom>
+          <a:noFill/>
+          <a:ln/>
+        </p:spPr>
+        <p:txBody>
+          <a:bodyPr wrap="square" lIns="0" tIns="0" rIns="0" bIns="0" rtlCol="0" anchor="t"/>
+          <a:lstStyle/>
+          <a:p>
+            <a:pPr indent="0" marL="0">
+              <a:lnSpc>
+                <a:spcPct val="130000"/>
+              </a:lnSpc>
+              <a:buNone/>
+            </a:pPr>
+            <a:r>
+              <a:rPr lang="en-US" sz="1200" dirty="0">
+                <a:solidFill>
+                  <a:srgbClr val="10161F"/>
+                </a:solidFill>
+                <a:latin typeface="Pretendard" pitchFamily="34" charset="0"/>
+                <a:ea typeface="Pretendard" pitchFamily="34" charset="-122"/>
+                <a:cs typeface="Pretendard" pitchFamily="34" charset="-120"/>
+              </a:rPr>
+              <a:t>현행 공법 여력을 활용한 밸류업 기회와 더불어 향후 권역 지가 상승에 따른 시세차익 실현이 유력합니다.</a:t>
+            </a:r>
+            <a:endParaRPr lang="en-US" sz="1200" dirty="0"/>
           </a:p>
         </p:txBody>
       </p:sp>
@@ -8269,10 +8277,9 @@
             <a:tbl>
               <a:tblPr/>
               <a:tblGrid>
-                <a:gridCol w="2764460"/>
-                <a:gridCol w="2764460"/>
-                <a:gridCol w="2764460"/>
-                <a:gridCol w="2764460"/>
+                <a:gridCol w="3685946"/>
+                <a:gridCol w="3685946"/>
+                <a:gridCol w="3685946"/>
               </a:tblGrid>
               <a:tr h="329184">
                 <a:tc>
@@ -8292,7 +8299,7 @@
                           <a:ea typeface="Pretendard" pitchFamily="34" charset="-122"/>
                           <a:cs typeface="Pretendard" pitchFamily="34" charset="-120"/>
                         </a:rPr>
-                        <a:t>시나리오</a:t>
+                        <a:t>유형</a:t>
                       </a:r>
                       <a:endParaRPr lang="en-US" sz="1050" dirty="0">
                         <a:latin typeface="Pretendard" charset="0"/>
@@ -8360,21 +8367,7 @@
                           <a:ea typeface="Pretendard" pitchFamily="34" charset="-122"/>
                           <a:cs typeface="Pretendard" pitchFamily="34" charset="-120"/>
                         </a:rPr>
-                        <a:t>NOI </a:t>
-                      </a:r>
-                      <a:pPr indent="0" marL="0">
-                        <a:buNone/>
-                      </a:pPr>
-                      <a:r>
-                        <a:rPr lang="en-US" sz="1050" b="1" dirty="0">
-                          <a:solidFill>
-                            <a:srgbClr val="718096"/>
-                          </a:solidFill>
-                          <a:latin typeface="Pretendard" pitchFamily="34" charset="0"/>
-                          <a:ea typeface="Pretendard" pitchFamily="34" charset="-122"/>
-                          <a:cs typeface="Pretendard" pitchFamily="34" charset="-120"/>
-                        </a:rPr>
-                        <a:t>개선</a:t>
+                        <a:t>적합도</a:t>
                       </a:r>
                       <a:endParaRPr lang="en-US" sz="1050" dirty="0">
                         <a:latin typeface="Pretendard" charset="0"/>
@@ -8442,117 +8435,7 @@
                           <a:ea typeface="Pretendard" pitchFamily="34" charset="-122"/>
                           <a:cs typeface="Pretendard" pitchFamily="34" charset="-120"/>
                         </a:rPr>
-                        <a:t>개선 </a:t>
-                      </a:r>
-                      <a:pPr indent="0" marL="0">
-                        <a:buNone/>
-                      </a:pPr>
-                      <a:r>
-                        <a:rPr lang="en-US" sz="1050" b="1" dirty="0">
-                          <a:solidFill>
-                            <a:srgbClr val="718096"/>
-                          </a:solidFill>
-                          <a:latin typeface="Pretendard" pitchFamily="34" charset="0"/>
-                          <a:ea typeface="Pretendard" pitchFamily="34" charset="-122"/>
-                          <a:cs typeface="Pretendard" pitchFamily="34" charset="-120"/>
-                        </a:rPr>
-                        <a:t>Cap </a:t>
-                      </a:r>
-                      <a:pPr indent="0" marL="0">
-                        <a:buNone/>
-                      </a:pPr>
-                      <a:r>
-                        <a:rPr lang="en-US" sz="1050" b="1" dirty="0">
-                          <a:solidFill>
-                            <a:srgbClr val="718096"/>
-                          </a:solidFill>
-                          <a:latin typeface="Pretendard" pitchFamily="34" charset="0"/>
-                          <a:ea typeface="Pretendard" pitchFamily="34" charset="-122"/>
-                          <a:cs typeface="Pretendard" pitchFamily="34" charset="-120"/>
-                        </a:rPr>
-                        <a:t>Rate</a:t>
-                      </a:r>
-                      <a:endParaRPr lang="en-US" sz="1050" dirty="0">
-                        <a:latin typeface="Pretendard" charset="0"/>
-                        <a:ea typeface="Pretendard" charset="0"/>
-                        <a:cs typeface="Pretendard" charset="0"/>
-                      </a:endParaRPr>
-                    </a:p>
-                  </a:txBody>
-                  <a:tcPr marL="50800" marR="50800" marT="25400" marB="25400" anchor="ctr">
-                    <a:lnL w="3810" cap="flat" cmpd="sng" algn="ctr">
-                      <a:solidFill>
-                        <a:srgbClr val="CBD5E0"/>
-                      </a:solidFill>
-                      <a:prstDash val="solid"/>
-                      <a:round/>
-                      <a:headEnd type="none" w="med" len="med"/>
-                      <a:tailEnd type="none" w="med" len="med"/>
-                    </a:lnL>
-                    <a:lnR w="3810" cap="flat" cmpd="sng" algn="ctr">
-                      <a:solidFill>
-                        <a:srgbClr val="CBD5E0"/>
-                      </a:solidFill>
-                      <a:prstDash val="solid"/>
-                      <a:round/>
-                      <a:headEnd type="none" w="med" len="med"/>
-                      <a:tailEnd type="none" w="med" len="med"/>
-                    </a:lnR>
-                    <a:lnT w="3810" cap="flat" cmpd="sng" algn="ctr">
-                      <a:solidFill>
-                        <a:srgbClr val="CBD5E0"/>
-                      </a:solidFill>
-                      <a:prstDash val="solid"/>
-                      <a:round/>
-                      <a:headEnd type="none" w="med" len="med"/>
-                      <a:tailEnd type="none" w="med" len="med"/>
-                    </a:lnT>
-                    <a:lnB w="3810" cap="flat" cmpd="sng" algn="ctr">
-                      <a:solidFill>
-                        <a:srgbClr val="CBD5E0"/>
-                      </a:solidFill>
-                      <a:prstDash val="solid"/>
-                      <a:round/>
-                      <a:headEnd type="none" w="med" len="med"/>
-                      <a:tailEnd type="none" w="med" len="med"/>
-                    </a:lnB>
-                    <a:solidFill>
-                      <a:srgbClr val="F7FAFC"/>
-                    </a:solidFill>
-                  </a:tcPr>
-                </a:tc>
-                <a:tc>
-                  <a:txBody>
-                    <a:bodyPr/>
-                    <a:lstStyle/>
-                    <a:p>
-                      <a:pPr indent="0" marL="0">
-                        <a:buNone/>
-                      </a:pPr>
-                      <a:r>
-                        <a:rPr lang="en-US" sz="1050" b="1" dirty="0">
-                          <a:solidFill>
-                            <a:srgbClr val="718096"/>
-                          </a:solidFill>
-                          <a:latin typeface="Pretendard" pitchFamily="34" charset="0"/>
-                          <a:ea typeface="Pretendard" pitchFamily="34" charset="-122"/>
-                          <a:cs typeface="Pretendard" pitchFamily="34" charset="-120"/>
-                        </a:rPr>
-                        <a:t>투자 </a:t>
-                      </a:r>
-                      <a:pPr indent="0" marL="0">
-                        <a:buNone/>
-                      </a:pPr>
-                      <a:r>
-                        <a:rPr lang="en-US" sz="1050" b="1" dirty="0">
-                          <a:solidFill>
-                            <a:srgbClr val="718096"/>
-                          </a:solidFill>
-                          <a:latin typeface="Pretendard" pitchFamily="34" charset="0"/>
-                          <a:ea typeface="Pretendard" pitchFamily="34" charset="-122"/>
-                          <a:cs typeface="Pretendard" pitchFamily="34" charset="-120"/>
-                        </a:rPr>
-                        <a:t>비용</a:t>
+                        <a:t>이유</a:t>
                       </a:r>
                       <a:endParaRPr lang="en-US" sz="1050" dirty="0">
                         <a:latin typeface="Pretendard" charset="0"/>
@@ -8622,49 +8505,7 @@
                           <a:ea typeface="Pretendard" pitchFamily="34" charset="-122"/>
                           <a:cs typeface="Pretendard" pitchFamily="34" charset="-120"/>
                         </a:rPr>
-                        <a:t>② </a:t>
-                      </a:r>
-                      <a:pPr indent="0" marL="0">
-                        <a:buNone/>
-                      </a:pPr>
-                      <a:r>
-                        <a:rPr lang="en-US" sz="1050" b="1" dirty="0">
-                          <a:solidFill>
-                            <a:srgbClr val="10161F"/>
-                          </a:solidFill>
-                          <a:latin typeface="Pretendard" pitchFamily="34" charset="0"/>
-                          <a:ea typeface="Pretendard" pitchFamily="34" charset="-122"/>
-                          <a:cs typeface="Pretendard" pitchFamily="34" charset="-120"/>
-                        </a:rPr>
-                        <a:t>임대료 </a:t>
-                      </a:r>
-                      <a:pPr indent="0" marL="0">
-                        <a:buNone/>
-                      </a:pPr>
-                      <a:r>
-                        <a:rPr lang="en-US" sz="1050" b="1" dirty="0">
-                          <a:solidFill>
-                            <a:srgbClr val="10161F"/>
-                          </a:solidFill>
-                          <a:latin typeface="Pretendard" pitchFamily="34" charset="0"/>
-                          <a:ea typeface="Pretendard" pitchFamily="34" charset="-122"/>
-                          <a:cs typeface="Pretendard" pitchFamily="34" charset="-120"/>
-                        </a:rPr>
-                        <a:t>현실화 </a:t>
-                      </a:r>
-                      <a:pPr indent="0" marL="0">
-                        <a:buNone/>
-                      </a:pPr>
-                      <a:r>
-                        <a:rPr lang="en-US" sz="1050" b="1" dirty="0">
-                          <a:solidFill>
-                            <a:srgbClr val="10161F"/>
-                          </a:solidFill>
-                          <a:latin typeface="Pretendard" pitchFamily="34" charset="0"/>
-                          <a:ea typeface="Pretendard" pitchFamily="34" charset="-122"/>
-                          <a:cs typeface="Pretendard" pitchFamily="34" charset="-120"/>
-                        </a:rPr>
-                        <a:t>(+5%)</a:t>
+                        <a:t>(임대수익)</a:t>
                       </a:r>
                       <a:endParaRPr lang="en-US" sz="1050" dirty="0">
                         <a:latin typeface="Pretendard" charset="0"/>
@@ -8732,49 +8573,7 @@
                           <a:ea typeface="Pretendard" pitchFamily="34" charset="-122"/>
                           <a:cs typeface="Pretendard" pitchFamily="34" charset="-120"/>
                         </a:rPr>
-                        <a:t>+약 </a:t>
-                      </a:r>
-                      <a:pPr indent="0" marL="0">
-                        <a:buNone/>
-                      </a:pPr>
-                      <a:r>
-                        <a:rPr lang="en-US" sz="1050" dirty="0">
-                          <a:solidFill>
-                            <a:srgbClr val="10161F"/>
-                          </a:solidFill>
-                          <a:latin typeface="Pretendard" pitchFamily="34" charset="0"/>
-                          <a:ea typeface="Pretendard" pitchFamily="34" charset="-122"/>
-                          <a:cs typeface="Pretendard" pitchFamily="34" charset="-120"/>
-                        </a:rPr>
-                        <a:t>0.11억 </a:t>
-                      </a:r>
-                      <a:pPr indent="0" marL="0">
-                        <a:buNone/>
-                      </a:pPr>
-                      <a:r>
-                        <a:rPr lang="en-US" sz="1050" dirty="0">
-                          <a:solidFill>
-                            <a:srgbClr val="10161F"/>
-                          </a:solidFill>
-                          <a:latin typeface="Pretendard" pitchFamily="34" charset="0"/>
-                          <a:ea typeface="Pretendard" pitchFamily="34" charset="-122"/>
-                          <a:cs typeface="Pretendard" pitchFamily="34" charset="-120"/>
-                        </a:rPr>
-                        <a:t>원 </a:t>
-                      </a:r>
-                      <a:pPr indent="0" marL="0">
-                        <a:buNone/>
-                      </a:pPr>
-                      <a:r>
-                        <a:rPr lang="en-US" sz="1050" dirty="0">
-                          <a:solidFill>
-                            <a:srgbClr val="10161F"/>
-                          </a:solidFill>
-                          <a:latin typeface="Pretendard" pitchFamily="34" charset="0"/>
-                          <a:ea typeface="Pretendard" pitchFamily="34" charset="-122"/>
-                          <a:cs typeface="Pretendard" pitchFamily="34" charset="-120"/>
-                        </a:rPr>
-                        <a:t>(+5%)</a:t>
+                        <a:t>★★★★★</a:t>
                       </a:r>
                       <a:endParaRPr lang="en-US" sz="1050" dirty="0">
                         <a:latin typeface="Pretendard" charset="0"/>
@@ -8842,62 +8641,8 @@
                           <a:ea typeface="Pretendard" pitchFamily="34" charset="-122"/>
                           <a:cs typeface="Pretendard" pitchFamily="34" charset="-120"/>
                         </a:rPr>
-                        <a:t>3.27%</a:t>
+                        <a:t>안정 </a:t>
                       </a:r>
-                      <a:endParaRPr lang="en-US" sz="1050" dirty="0">
-                        <a:latin typeface="Pretendard" charset="0"/>
-                        <a:ea typeface="Pretendard" charset="0"/>
-                        <a:cs typeface="Pretendard" charset="0"/>
-                      </a:endParaRPr>
-                    </a:p>
-                  </a:txBody>
-                  <a:tcPr marL="50800" marR="50800" marT="25400" marB="25400" anchor="ctr">
-                    <a:lnL w="3810" cap="flat" cmpd="sng" algn="ctr">
-                      <a:solidFill>
-                        <a:srgbClr val="CBD5E0"/>
-                      </a:solidFill>
-                      <a:prstDash val="solid"/>
-                      <a:round/>
-                      <a:headEnd type="none" w="med" len="med"/>
-                      <a:tailEnd type="none" w="med" len="med"/>
-                    </a:lnL>
-                    <a:lnR w="3810" cap="flat" cmpd="sng" algn="ctr">
-                      <a:solidFill>
-                        <a:srgbClr val="CBD5E0"/>
-                      </a:solidFill>
-                      <a:prstDash val="solid"/>
-                      <a:round/>
-                      <a:headEnd type="none" w="med" len="med"/>
-                      <a:tailEnd type="none" w="med" len="med"/>
-                    </a:lnR>
-                    <a:lnT w="3810" cap="flat" cmpd="sng" algn="ctr">
-                      <a:solidFill>
-                        <a:srgbClr val="CBD5E0"/>
-                      </a:solidFill>
-                      <a:prstDash val="solid"/>
-                      <a:round/>
-                      <a:headEnd type="none" w="med" len="med"/>
-                      <a:tailEnd type="none" w="med" len="med"/>
-                    </a:lnT>
-                    <a:lnB w="3810" cap="flat" cmpd="sng" algn="ctr">
-                      <a:solidFill>
-                        <a:srgbClr val="CBD5E0"/>
-                      </a:solidFill>
-                      <a:prstDash val="solid"/>
-                      <a:round/>
-                      <a:headEnd type="none" w="med" len="med"/>
-                      <a:tailEnd type="none" w="med" len="med"/>
-                    </a:lnB>
-                    <a:solidFill>
-                      <a:srgbClr val="FFFFFF"/>
-                    </a:solidFill>
-                  </a:tcPr>
-                </a:tc>
-                <a:tc>
-                  <a:txBody>
-                    <a:bodyPr/>
-                    <a:lstStyle/>
-                    <a:p>
                       <a:pPr indent="0" marL="0">
                         <a:buNone/>
                       </a:pPr>
@@ -8910,7 +8655,63 @@
                           <a:ea typeface="Pretendard" pitchFamily="34" charset="-122"/>
                           <a:cs typeface="Pretendard" pitchFamily="34" charset="-120"/>
                         </a:rPr>
-                        <a:t>불필요</a:t>
+                        <a:t>MD, </a:t>
+                      </a:r>
+                      <a:pPr indent="0" marL="0">
+                        <a:buNone/>
+                      </a:pPr>
+                      <a:r>
+                        <a:rPr lang="en-US" sz="1050" dirty="0">
+                          <a:solidFill>
+                            <a:srgbClr val="10161F"/>
+                          </a:solidFill>
+                          <a:latin typeface="Pretendard" pitchFamily="34" charset="0"/>
+                          <a:ea typeface="Pretendard" pitchFamily="34" charset="-122"/>
+                          <a:cs typeface="Pretendard" pitchFamily="34" charset="-120"/>
+                        </a:rPr>
+                        <a:t>예측 </a:t>
+                      </a:r>
+                      <a:pPr indent="0" marL="0">
+                        <a:buNone/>
+                      </a:pPr>
+                      <a:r>
+                        <a:rPr lang="en-US" sz="1050" dirty="0">
+                          <a:solidFill>
+                            <a:srgbClr val="10161F"/>
+                          </a:solidFill>
+                          <a:latin typeface="Pretendard" pitchFamily="34" charset="0"/>
+                          <a:ea typeface="Pretendard" pitchFamily="34" charset="-122"/>
+                          <a:cs typeface="Pretendard" pitchFamily="34" charset="-120"/>
+                        </a:rPr>
+                        <a:t>가능한 </a:t>
+                      </a:r>
+                      <a:pPr indent="0" marL="0">
+                        <a:buNone/>
+                      </a:pPr>
+                      <a:r>
+                        <a:rPr lang="en-US" sz="1050" dirty="0">
+                          <a:solidFill>
+                            <a:srgbClr val="10161F"/>
+                          </a:solidFill>
+                          <a:latin typeface="Pretendard" pitchFamily="34" charset="0"/>
+                          <a:ea typeface="Pretendard" pitchFamily="34" charset="-122"/>
+                          <a:cs typeface="Pretendard" pitchFamily="34" charset="-120"/>
+                        </a:rPr>
+                        <a:t>월 </a:t>
+                      </a:r>
+                      <a:pPr indent="0" marL="0">
+                        <a:buNone/>
+                      </a:pPr>
+                      <a:r>
+                        <a:rPr lang="en-US" sz="1050" dirty="0">
+                          <a:solidFill>
+                            <a:srgbClr val="10161F"/>
+                          </a:solidFill>
+                          <a:latin typeface="Pretendard" pitchFamily="34" charset="0"/>
+                          <a:ea typeface="Pretendard" pitchFamily="34" charset="-122"/>
+                          <a:cs typeface="Pretendard" pitchFamily="34" charset="-120"/>
+                        </a:rPr>
+                        <a:t>현금흐름</a:t>
                       </a:r>
                       <a:endParaRPr lang="en-US" sz="1050" dirty="0">
                         <a:latin typeface="Pretendard" charset="0"/>
@@ -8980,7 +8781,7 @@
                           <a:ea typeface="Pretendard" pitchFamily="34" charset="-122"/>
                           <a:cs typeface="Pretendard" pitchFamily="34" charset="-120"/>
                         </a:rPr>
-                        <a:t>③ </a:t>
+                        <a:t>상가 </a:t>
                       </a:r>
                       <a:pPr indent="0" marL="0">
                         <a:buNone/>
@@ -8994,7 +8795,7 @@
                           <a:ea typeface="Pretendard" pitchFamily="34" charset="-122"/>
                           <a:cs typeface="Pretendard" pitchFamily="34" charset="-120"/>
                         </a:rPr>
-                        <a:t>리모델링 </a:t>
+                        <a:t>전문 </a:t>
                       </a:r>
                       <a:pPr indent="0" marL="0">
                         <a:buNone/>
@@ -9008,7 +8809,7 @@
                           <a:ea typeface="Pretendard" pitchFamily="34" charset="-122"/>
                           <a:cs typeface="Pretendard" pitchFamily="34" charset="-120"/>
                         </a:rPr>
-                        <a:t>후 </a:t>
+                        <a:t>임대 </a:t>
                       </a:r>
                       <a:pPr indent="0" marL="0">
                         <a:buNone/>
@@ -9022,21 +8823,7 @@
                           <a:ea typeface="Pretendard" pitchFamily="34" charset="-122"/>
                           <a:cs typeface="Pretendard" pitchFamily="34" charset="-120"/>
                         </a:rPr>
-                        <a:t>임대료 </a:t>
-                      </a:r>
-                      <a:pPr indent="0" marL="0">
-                        <a:buNone/>
-                      </a:pPr>
-                      <a:r>
-                        <a:rPr lang="en-US" sz="1050" b="1" dirty="0">
-                          <a:solidFill>
-                            <a:srgbClr val="10161F"/>
-                          </a:solidFill>
-                          <a:latin typeface="Pretendard" pitchFamily="34" charset="0"/>
-                          <a:ea typeface="Pretendard" pitchFamily="34" charset="-122"/>
-                          <a:cs typeface="Pretendard" pitchFamily="34" charset="-120"/>
-                        </a:rPr>
-                        <a:t>상승</a:t>
+                        <a:t>운영사</a:t>
                       </a:r>
                       <a:endParaRPr lang="en-US" sz="1050" dirty="0">
                         <a:latin typeface="Pretendard" charset="0"/>
@@ -9104,49 +8891,7 @@
                           <a:ea typeface="Pretendard" pitchFamily="34" charset="-122"/>
                           <a:cs typeface="Pretendard" pitchFamily="34" charset="-120"/>
                         </a:rPr>
-                        <a:t>+약 </a:t>
-                      </a:r>
-                      <a:pPr indent="0" marL="0">
-                        <a:buNone/>
-                      </a:pPr>
-                      <a:r>
-                        <a:rPr lang="en-US" sz="1050" dirty="0">
-                          <a:solidFill>
-                            <a:srgbClr val="10161F"/>
-                          </a:solidFill>
-                          <a:latin typeface="Pretendard" pitchFamily="34" charset="0"/>
-                          <a:ea typeface="Pretendard" pitchFamily="34" charset="-122"/>
-                          <a:cs typeface="Pretendard" pitchFamily="34" charset="-120"/>
-                        </a:rPr>
-                        <a:t>0.18억 </a:t>
-                      </a:r>
-                      <a:pPr indent="0" marL="0">
-                        <a:buNone/>
-                      </a:pPr>
-                      <a:r>
-                        <a:rPr lang="en-US" sz="1050" dirty="0">
-                          <a:solidFill>
-                            <a:srgbClr val="10161F"/>
-                          </a:solidFill>
-                          <a:latin typeface="Pretendard" pitchFamily="34" charset="0"/>
-                          <a:ea typeface="Pretendard" pitchFamily="34" charset="-122"/>
-                          <a:cs typeface="Pretendard" pitchFamily="34" charset="-120"/>
-                        </a:rPr>
-                        <a:t>원 </a:t>
-                      </a:r>
-                      <a:pPr indent="0" marL="0">
-                        <a:buNone/>
-                      </a:pPr>
-                      <a:r>
-                        <a:rPr lang="en-US" sz="1050" dirty="0">
-                          <a:solidFill>
-                            <a:srgbClr val="10161F"/>
-                          </a:solidFill>
-                          <a:latin typeface="Pretendard" pitchFamily="34" charset="0"/>
-                          <a:ea typeface="Pretendard" pitchFamily="34" charset="-122"/>
-                          <a:cs typeface="Pretendard" pitchFamily="34" charset="-120"/>
-                        </a:rPr>
-                        <a:t>(+8%)</a:t>
+                        <a:t>★★★★</a:t>
                       </a:r>
                       <a:endParaRPr lang="en-US" sz="1050" dirty="0">
                         <a:latin typeface="Pretendard" charset="0"/>
@@ -9214,75 +8959,7 @@
                           <a:ea typeface="Pretendard" pitchFamily="34" charset="-122"/>
                           <a:cs typeface="Pretendard" pitchFamily="34" charset="-120"/>
                         </a:rPr>
-                        <a:t>3.37%</a:t>
-                      </a:r>
-                      <a:endParaRPr lang="en-US" sz="1050" dirty="0">
-                        <a:latin typeface="Pretendard" charset="0"/>
-                        <a:ea typeface="Pretendard" charset="0"/>
-                        <a:cs typeface="Pretendard" charset="0"/>
-                      </a:endParaRPr>
-                    </a:p>
-                  </a:txBody>
-                  <a:tcPr marL="50800" marR="50800" marT="25400" marB="25400" anchor="ctr">
-                    <a:lnL w="3810" cap="flat" cmpd="sng" algn="ctr">
-                      <a:solidFill>
-                        <a:srgbClr val="CBD5E0"/>
-                      </a:solidFill>
-                      <a:prstDash val="solid"/>
-                      <a:round/>
-                      <a:headEnd type="none" w="med" len="med"/>
-                      <a:tailEnd type="none" w="med" len="med"/>
-                    </a:lnL>
-                    <a:lnR w="3810" cap="flat" cmpd="sng" algn="ctr">
-                      <a:solidFill>
-                        <a:srgbClr val="CBD5E0"/>
-                      </a:solidFill>
-                      <a:prstDash val="solid"/>
-                      <a:round/>
-                      <a:headEnd type="none" w="med" len="med"/>
-                      <a:tailEnd type="none" w="med" len="med"/>
-                    </a:lnR>
-                    <a:lnT w="3810" cap="flat" cmpd="sng" algn="ctr">
-                      <a:solidFill>
-                        <a:srgbClr val="CBD5E0"/>
-                      </a:solidFill>
-                      <a:prstDash val="solid"/>
-                      <a:round/>
-                      <a:headEnd type="none" w="med" len="med"/>
-                      <a:tailEnd type="none" w="med" len="med"/>
-                    </a:lnT>
-                    <a:lnB w="3810" cap="flat" cmpd="sng" algn="ctr">
-                      <a:solidFill>
-                        <a:srgbClr val="CBD5E0"/>
-                      </a:solidFill>
-                      <a:prstDash val="solid"/>
-                      <a:round/>
-                      <a:headEnd type="none" w="med" len="med"/>
-                      <a:tailEnd type="none" w="med" len="med"/>
-                    </a:lnB>
-                    <a:solidFill>
-                      <a:srgbClr val="F7FAFC"/>
-                    </a:solidFill>
-                  </a:tcPr>
-                </a:tc>
-                <a:tc>
-                  <a:txBody>
-                    <a:bodyPr/>
-                    <a:lstStyle/>
-                    <a:p>
-                      <a:pPr indent="0" marL="0">
-                        <a:buNone/>
-                      </a:pPr>
-                      <a:r>
-                        <a:rPr lang="en-US" sz="1050" dirty="0">
-                          <a:solidFill>
-                            <a:srgbClr val="10161F"/>
-                          </a:solidFill>
-                          <a:latin typeface="Pretendard" pitchFamily="34" charset="0"/>
-                          <a:ea typeface="Pretendard" pitchFamily="34" charset="-122"/>
-                          <a:cs typeface="Pretendard" pitchFamily="34" charset="-120"/>
-                        </a:rPr>
-                        <a:t>약 </a:t>
+                        <a:t>MD </a:t>
                       </a:r>
                       <a:pPr indent="0" marL="0">
                         <a:buNone/>
@@ -9296,7 +8973,7 @@
                           <a:ea typeface="Pretendard" pitchFamily="34" charset="-122"/>
                           <a:cs typeface="Pretendard" pitchFamily="34" charset="-120"/>
                         </a:rPr>
-                        <a:t>15.00억 </a:t>
+                        <a:t>관리 </a:t>
                       </a:r>
                       <a:pPr indent="0" marL="0">
                         <a:buNone/>
@@ -9310,7 +8987,49 @@
                           <a:ea typeface="Pretendard" pitchFamily="34" charset="-122"/>
                           <a:cs typeface="Pretendard" pitchFamily="34" charset="-120"/>
                         </a:rPr>
-                        <a:t>원</a:t>
+                        <a:t>노하우 </a:t>
+                      </a:r>
+                      <a:pPr indent="0" marL="0">
+                        <a:buNone/>
+                      </a:pPr>
+                      <a:r>
+                        <a:rPr lang="en-US" sz="1050" dirty="0">
+                          <a:solidFill>
+                            <a:srgbClr val="10161F"/>
+                          </a:solidFill>
+                          <a:latin typeface="Pretendard" pitchFamily="34" charset="0"/>
+                          <a:ea typeface="Pretendard" pitchFamily="34" charset="-122"/>
+                          <a:cs typeface="Pretendard" pitchFamily="34" charset="-120"/>
+                        </a:rPr>
+                        <a:t>보유 </a:t>
+                      </a:r>
+                      <a:pPr indent="0" marL="0">
+                        <a:buNone/>
+                      </a:pPr>
+                      <a:r>
+                        <a:rPr lang="en-US" sz="1050" dirty="0">
+                          <a:solidFill>
+                            <a:srgbClr val="10161F"/>
+                          </a:solidFill>
+                          <a:latin typeface="Pretendard" pitchFamily="34" charset="0"/>
+                          <a:ea typeface="Pretendard" pitchFamily="34" charset="-122"/>
+                          <a:cs typeface="Pretendard" pitchFamily="34" charset="-120"/>
+                        </a:rPr>
+                        <a:t>시 </a:t>
+                      </a:r>
+                      <a:pPr indent="0" marL="0">
+                        <a:buNone/>
+                      </a:pPr>
+                      <a:r>
+                        <a:rPr lang="en-US" sz="1050" dirty="0">
+                          <a:solidFill>
+                            <a:srgbClr val="10161F"/>
+                          </a:solidFill>
+                          <a:latin typeface="Pretendard" pitchFamily="34" charset="0"/>
+                          <a:ea typeface="Pretendard" pitchFamily="34" charset="-122"/>
+                          <a:cs typeface="Pretendard" pitchFamily="34" charset="-120"/>
+                        </a:rPr>
+                        <a:t>최적</a:t>
                       </a:r>
                       <a:endParaRPr lang="en-US" sz="1050" dirty="0">
                         <a:latin typeface="Pretendard" charset="0"/>
@@ -9362,19 +9081,323 @@
                   </a:tcPr>
                 </a:tc>
               </a:tr>
+              <a:tr h="329184">
+                <a:tc>
+                  <a:txBody>
+                    <a:bodyPr/>
+                    <a:lstStyle/>
+                    <a:p>
+                      <a:pPr indent="0" marL="0">
+                        <a:buNone/>
+                      </a:pPr>
+                      <a:r>
+                        <a:rPr lang="en-US" sz="1050" b="1" dirty="0">
+                          <a:solidFill>
+                            <a:srgbClr val="10161F"/>
+                          </a:solidFill>
+                          <a:latin typeface="Pretendard" pitchFamily="34" charset="0"/>
+                          <a:ea typeface="Pretendard" pitchFamily="34" charset="-122"/>
+                          <a:cs typeface="Pretendard" pitchFamily="34" charset="-120"/>
+                        </a:rPr>
+                        <a:t>프랜차이즈 </a:t>
+                      </a:r>
+                      <a:pPr indent="0" marL="0">
+                        <a:buNone/>
+                      </a:pPr>
+                      <a:r>
+                        <a:rPr lang="en-US" sz="1050" b="1" dirty="0">
+                          <a:solidFill>
+                            <a:srgbClr val="10161F"/>
+                          </a:solidFill>
+                          <a:latin typeface="Pretendard" pitchFamily="34" charset="0"/>
+                          <a:ea typeface="Pretendard" pitchFamily="34" charset="-122"/>
+                          <a:cs typeface="Pretendard" pitchFamily="34" charset="-120"/>
+                        </a:rPr>
+                        <a:t>본사 </a:t>
+                      </a:r>
+                      <a:pPr indent="0" marL="0">
+                        <a:buNone/>
+                      </a:pPr>
+                      <a:r>
+                        <a:rPr lang="en-US" sz="1050" b="1" dirty="0">
+                          <a:solidFill>
+                            <a:srgbClr val="10161F"/>
+                          </a:solidFill>
+                          <a:latin typeface="Pretendard" pitchFamily="34" charset="0"/>
+                          <a:ea typeface="Pretendard" pitchFamily="34" charset="-122"/>
+                          <a:cs typeface="Pretendard" pitchFamily="34" charset="-120"/>
+                        </a:rPr>
+                        <a:t>직매장</a:t>
+                      </a:r>
+                      <a:endParaRPr lang="en-US" sz="1050" dirty="0">
+                        <a:latin typeface="Pretendard" charset="0"/>
+                        <a:ea typeface="Pretendard" charset="0"/>
+                        <a:cs typeface="Pretendard" charset="0"/>
+                      </a:endParaRPr>
+                    </a:p>
+                  </a:txBody>
+                  <a:tcPr marL="50800" marR="50800" marT="25400" marB="25400" anchor="ctr">
+                    <a:lnL w="3810" cap="flat" cmpd="sng" algn="ctr">
+                      <a:solidFill>
+                        <a:srgbClr val="CBD5E0"/>
+                      </a:solidFill>
+                      <a:prstDash val="solid"/>
+                      <a:round/>
+                      <a:headEnd type="none" w="med" len="med"/>
+                      <a:tailEnd type="none" w="med" len="med"/>
+                    </a:lnL>
+                    <a:lnR w="3810" cap="flat" cmpd="sng" algn="ctr">
+                      <a:solidFill>
+                        <a:srgbClr val="CBD5E0"/>
+                      </a:solidFill>
+                      <a:prstDash val="solid"/>
+                      <a:round/>
+                      <a:headEnd type="none" w="med" len="med"/>
+                      <a:tailEnd type="none" w="med" len="med"/>
+                    </a:lnR>
+                    <a:lnT w="3810" cap="flat" cmpd="sng" algn="ctr">
+                      <a:solidFill>
+                        <a:srgbClr val="CBD5E0"/>
+                      </a:solidFill>
+                      <a:prstDash val="solid"/>
+                      <a:round/>
+                      <a:headEnd type="none" w="med" len="med"/>
+                      <a:tailEnd type="none" w="med" len="med"/>
+                    </a:lnT>
+                    <a:lnB w="3810" cap="flat" cmpd="sng" algn="ctr">
+                      <a:solidFill>
+                        <a:srgbClr val="CBD5E0"/>
+                      </a:solidFill>
+                      <a:prstDash val="solid"/>
+                      <a:round/>
+                      <a:headEnd type="none" w="med" len="med"/>
+                      <a:tailEnd type="none" w="med" len="med"/>
+                    </a:lnB>
+                    <a:solidFill>
+                      <a:srgbClr val="FFFFFF"/>
+                    </a:solidFill>
+                  </a:tcPr>
+                </a:tc>
+                <a:tc>
+                  <a:txBody>
+                    <a:bodyPr/>
+                    <a:lstStyle/>
+                    <a:p>
+                      <a:pPr indent="0" marL="0">
+                        <a:buNone/>
+                      </a:pPr>
+                      <a:r>
+                        <a:rPr lang="en-US" sz="1050" dirty="0">
+                          <a:solidFill>
+                            <a:srgbClr val="10161F"/>
+                          </a:solidFill>
+                          <a:latin typeface="Pretendard" pitchFamily="34" charset="0"/>
+                          <a:ea typeface="Pretendard" pitchFamily="34" charset="-122"/>
+                          <a:cs typeface="Pretendard" pitchFamily="34" charset="-120"/>
+                        </a:rPr>
+                        <a:t>★★★</a:t>
+                      </a:r>
+                      <a:endParaRPr lang="en-US" sz="1050" dirty="0">
+                        <a:latin typeface="Pretendard" charset="0"/>
+                        <a:ea typeface="Pretendard" charset="0"/>
+                        <a:cs typeface="Pretendard" charset="0"/>
+                      </a:endParaRPr>
+                    </a:p>
+                  </a:txBody>
+                  <a:tcPr marL="50800" marR="50800" marT="25400" marB="25400" anchor="ctr">
+                    <a:lnL w="3810" cap="flat" cmpd="sng" algn="ctr">
+                      <a:solidFill>
+                        <a:srgbClr val="CBD5E0"/>
+                      </a:solidFill>
+                      <a:prstDash val="solid"/>
+                      <a:round/>
+                      <a:headEnd type="none" w="med" len="med"/>
+                      <a:tailEnd type="none" w="med" len="med"/>
+                    </a:lnL>
+                    <a:lnR w="3810" cap="flat" cmpd="sng" algn="ctr">
+                      <a:solidFill>
+                        <a:srgbClr val="CBD5E0"/>
+                      </a:solidFill>
+                      <a:prstDash val="solid"/>
+                      <a:round/>
+                      <a:headEnd type="none" w="med" len="med"/>
+                      <a:tailEnd type="none" w="med" len="med"/>
+                    </a:lnR>
+                    <a:lnT w="3810" cap="flat" cmpd="sng" algn="ctr">
+                      <a:solidFill>
+                        <a:srgbClr val="CBD5E0"/>
+                      </a:solidFill>
+                      <a:prstDash val="solid"/>
+                      <a:round/>
+                      <a:headEnd type="none" w="med" len="med"/>
+                      <a:tailEnd type="none" w="med" len="med"/>
+                    </a:lnT>
+                    <a:lnB w="3810" cap="flat" cmpd="sng" algn="ctr">
+                      <a:solidFill>
+                        <a:srgbClr val="CBD5E0"/>
+                      </a:solidFill>
+                      <a:prstDash val="solid"/>
+                      <a:round/>
+                      <a:headEnd type="none" w="med" len="med"/>
+                      <a:tailEnd type="none" w="med" len="med"/>
+                    </a:lnB>
+                    <a:solidFill>
+                      <a:srgbClr val="FFFFFF"/>
+                    </a:solidFill>
+                  </a:tcPr>
+                </a:tc>
+                <a:tc>
+                  <a:txBody>
+                    <a:bodyPr/>
+                    <a:lstStyle/>
+                    <a:p>
+                      <a:pPr indent="0" marL="0">
+                        <a:buNone/>
+                      </a:pPr>
+                      <a:r>
+                        <a:rPr lang="en-US" sz="1050" dirty="0">
+                          <a:solidFill>
+                            <a:srgbClr val="10161F"/>
+                          </a:solidFill>
+                          <a:latin typeface="Pretendard" pitchFamily="34" charset="0"/>
+                          <a:ea typeface="Pretendard" pitchFamily="34" charset="-122"/>
+                          <a:cs typeface="Pretendard" pitchFamily="34" charset="-120"/>
+                        </a:rPr>
+                        <a:t>브랜드 </a:t>
+                      </a:r>
+                      <a:pPr indent="0" marL="0">
+                        <a:buNone/>
+                      </a:pPr>
+                      <a:r>
+                        <a:rPr lang="en-US" sz="1050" dirty="0">
+                          <a:solidFill>
+                            <a:srgbClr val="10161F"/>
+                          </a:solidFill>
+                          <a:latin typeface="Pretendard" pitchFamily="34" charset="0"/>
+                          <a:ea typeface="Pretendard" pitchFamily="34" charset="-122"/>
+                          <a:cs typeface="Pretendard" pitchFamily="34" charset="-120"/>
+                        </a:rPr>
+                        <a:t>노출 </a:t>
+                      </a:r>
+                      <a:pPr indent="0" marL="0">
+                        <a:buNone/>
+                      </a:pPr>
+                      <a:r>
+                        <a:rPr lang="en-US" sz="1050" dirty="0">
+                          <a:solidFill>
+                            <a:srgbClr val="10161F"/>
+                          </a:solidFill>
+                          <a:latin typeface="Pretendard" pitchFamily="34" charset="0"/>
+                          <a:ea typeface="Pretendard" pitchFamily="34" charset="-122"/>
+                          <a:cs typeface="Pretendard" pitchFamily="34" charset="-120"/>
+                        </a:rPr>
+                        <a:t>+ </a:t>
+                      </a:r>
+                      <a:pPr indent="0" marL="0">
+                        <a:buNone/>
+                      </a:pPr>
+                      <a:r>
+                        <a:rPr lang="en-US" sz="1050" dirty="0">
+                          <a:solidFill>
+                            <a:srgbClr val="10161F"/>
+                          </a:solidFill>
+                          <a:latin typeface="Pretendard" pitchFamily="34" charset="0"/>
+                          <a:ea typeface="Pretendard" pitchFamily="34" charset="-122"/>
+                          <a:cs typeface="Pretendard" pitchFamily="34" charset="-120"/>
+                        </a:rPr>
+                        <a:t>직영 </a:t>
+                      </a:r>
+                      <a:pPr indent="0" marL="0">
+                        <a:buNone/>
+                      </a:pPr>
+                      <a:r>
+                        <a:rPr lang="en-US" sz="1050" dirty="0">
+                          <a:solidFill>
+                            <a:srgbClr val="10161F"/>
+                          </a:solidFill>
+                          <a:latin typeface="Pretendard" pitchFamily="34" charset="0"/>
+                          <a:ea typeface="Pretendard" pitchFamily="34" charset="-122"/>
+                          <a:cs typeface="Pretendard" pitchFamily="34" charset="-120"/>
+                        </a:rPr>
+                        <a:t>운영 </a:t>
+                      </a:r>
+                      <a:pPr indent="0" marL="0">
+                        <a:buNone/>
+                      </a:pPr>
+                      <a:r>
+                        <a:rPr lang="en-US" sz="1050" dirty="0">
+                          <a:solidFill>
+                            <a:srgbClr val="10161F"/>
+                          </a:solidFill>
+                          <a:latin typeface="Pretendard" pitchFamily="34" charset="0"/>
+                          <a:ea typeface="Pretendard" pitchFamily="34" charset="-122"/>
+                          <a:cs typeface="Pretendard" pitchFamily="34" charset="-120"/>
+                        </a:rPr>
+                        <a:t>가능</a:t>
+                      </a:r>
+                      <a:endParaRPr lang="en-US" sz="1050" dirty="0">
+                        <a:latin typeface="Pretendard" charset="0"/>
+                        <a:ea typeface="Pretendard" charset="0"/>
+                        <a:cs typeface="Pretendard" charset="0"/>
+                      </a:endParaRPr>
+                    </a:p>
+                  </a:txBody>
+                  <a:tcPr marL="50800" marR="50800" marT="25400" marB="25400" anchor="ctr">
+                    <a:lnL w="3810" cap="flat" cmpd="sng" algn="ctr">
+                      <a:solidFill>
+                        <a:srgbClr val="CBD5E0"/>
+                      </a:solidFill>
+                      <a:prstDash val="solid"/>
+                      <a:round/>
+                      <a:headEnd type="none" w="med" len="med"/>
+                      <a:tailEnd type="none" w="med" len="med"/>
+                    </a:lnL>
+                    <a:lnR w="3810" cap="flat" cmpd="sng" algn="ctr">
+                      <a:solidFill>
+                        <a:srgbClr val="CBD5E0"/>
+                      </a:solidFill>
+                      <a:prstDash val="solid"/>
+                      <a:round/>
+                      <a:headEnd type="none" w="med" len="med"/>
+                      <a:tailEnd type="none" w="med" len="med"/>
+                    </a:lnR>
+                    <a:lnT w="3810" cap="flat" cmpd="sng" algn="ctr">
+                      <a:solidFill>
+                        <a:srgbClr val="CBD5E0"/>
+                      </a:solidFill>
+                      <a:prstDash val="solid"/>
+                      <a:round/>
+                      <a:headEnd type="none" w="med" len="med"/>
+                      <a:tailEnd type="none" w="med" len="med"/>
+                    </a:lnT>
+                    <a:lnB w="3810" cap="flat" cmpd="sng" algn="ctr">
+                      <a:solidFill>
+                        <a:srgbClr val="CBD5E0"/>
+                      </a:solidFill>
+                      <a:prstDash val="solid"/>
+                      <a:round/>
+                      <a:headEnd type="none" w="med" len="med"/>
+                      <a:tailEnd type="none" w="med" len="med"/>
+                    </a:lnB>
+                    <a:solidFill>
+                      <a:srgbClr val="FFFFFF"/>
+                    </a:solidFill>
+                  </a:tcPr>
+                </a:tc>
+              </a:tr>
             </a:tbl>
           </a:graphicData>
         </a:graphic>
       </p:graphicFrame>
       <p:sp>
         <p:nvSpPr>
-          <p:cNvPr id="8" name="Shape 5"/>
-          <p:cNvSpPr/>
-          <p:nvPr/>
-        </p:nvSpPr>
-        <p:spPr>
-          <a:xfrm>
-            <a:off x="566928" y="5349240"/>
+          <p:cNvPr id="29" name="Shape 26"/>
+          <p:cNvSpPr/>
+          <p:nvPr/>
+        </p:nvSpPr>
+        <p:spPr>
+          <a:xfrm>
+            <a:off x="566928" y="5678424"/>
             <a:ext cx="11057839" cy="804672"/>
           </a:xfrm>
           <a:prstGeom prst="roundRect">
@@ -9395,13 +9418,13 @@
       </p:sp>
       <p:sp>
         <p:nvSpPr>
-          <p:cNvPr id="9" name="Text 6"/>
-          <p:cNvSpPr/>
-          <p:nvPr/>
-        </p:nvSpPr>
-        <p:spPr>
-          <a:xfrm>
-            <a:off x="749808" y="5458968"/>
+          <p:cNvPr id="30" name="Text 27"/>
+          <p:cNvSpPr/>
+          <p:nvPr/>
+        </p:nvSpPr>
+        <p:spPr>
+          <a:xfrm>
+            <a:off x="749808" y="5788152"/>
             <a:ext cx="1691640" cy="256032"/>
           </a:xfrm>
           <a:prstGeom prst="rect">
@@ -9434,13 +9457,13 @@
       </p:sp>
       <p:sp>
         <p:nvSpPr>
-          <p:cNvPr id="10" name="Text 7"/>
-          <p:cNvSpPr/>
-          <p:nvPr/>
-        </p:nvSpPr>
-        <p:spPr>
-          <a:xfrm>
-            <a:off x="2487168" y="5422392"/>
+          <p:cNvPr id="31" name="Text 28"/>
+          <p:cNvSpPr/>
+          <p:nvPr/>
+        </p:nvSpPr>
+        <p:spPr>
+          <a:xfrm>
+            <a:off x="2487168" y="5751576"/>
             <a:ext cx="8954719" cy="658368"/>
           </a:xfrm>
           <a:prstGeom prst="rect">
@@ -9468,7 +9491,7 @@
                 <a:ea typeface="Pretendard" pitchFamily="34" charset="-122"/>
                 <a:cs typeface="Pretendard" pitchFamily="34" charset="-120"/>
               </a:rPr>
-              <a:t>{"ok":true,"mocked":true,"extractedFields":{"area_signal":"역삼","asset_type":"오피스빌딩","price_band":"300억","size_signal":"3000평(약 9917.4㎡)"},"extractedFacts":{"region":"역삼","exactAddressCandidate":"역삼동 742-1","assetType":"오피스빌딩","priceText":"300억","sizeText":"3000평(약 9917.4㎡)","currentUse":"오피스","currentUseSignal":"근린생활시설","leaseSignal":"임대중","vacancySignal":"공실없음","tenantNames":["쿠팡","네이버"],"unitRentTexts":["301호: 1500만"],"sellerMotivationText":"자산 효율화","brokerNotes":["초역세권 매물"]},"detectedSensitiveFields":["exact_address","tenant_name"],"ambiguousFields":[],"warnings":[],"areaSignal":"역삼","assetType":"오피스빌딩","priceBand":"300억","sizeSignal":"3000평(약 9917.4㎡)","dealType":"매각","buildingName":"역삼 센트럴타워","exactAddress":"역삼동 742-1","totalFloorArea":9917.3,"buildYear":2015,"currentUseSignal":"근린생활시설","vacancySignal":"공실 없음","fitSummary":"초역세권 근생 빌딩으로 시행/사옥 매입에 최적화","cautionSummary":"주요 임차 업종 만기 조율 필요","hiddenFields":["exact_address","seller_motivation"],"confidence":{"areaSignal":"confirmed","assetType":"confirmed","priceBand":"ai_hypothesis","fitSummary":"ai_hypothesis"},"missingData":["sizeSignal"],"boundaryNote":"본 자료는 실거래 통계 기반 참고치입니다.","buyerType":"법인 사옥형","budgetRange":{"min":50,"max":80,"display":"50억~80억"},"preferredRegions":["강남","성수"],"assetTypes":["꼬마빌딩","사옥용"],"purchasePurpose":"사옥용 매입","mustHave":["초역세권","주차"],"niceToHave":["테라스","루프탑"],"riskTolerance":"medium","financingNote":"자본금 50% 준비","missingQuestions":["구체적인 입주 시기가 언제인가요?","선호하는 수익률이 있나요?"],"privacyNotes":["연락처 비공개"],"fitReasons":["매수자 예산(50-80억)에 부합하는 매물입니다.","요청하신 성수/강남 권역에 해당합니다."],"cautionReasons":["요청한 용도와 달리 명도 협의가 다소 필요합니다."],"recommendedNextAction":"현장 답사 제안","kakaoMessage":"안녕하세요! 요청하신 조건에 부합하는 추천 매물이 있어 안내해 드립니다. 확인해보시고 피드백 부탁드립니다.","title":"강남 역삼역 초역세권 오피스 사옥용 빌딩 매각","shortSummary":"역삼역 도보 5분 거리의 준신축급 대형 오피스빌딩입니다.","dealPoints":["초역세권","사옥 최적"],"cautionPoints":["명도 조율 필요"],"hiddenInfoNotice":["보증금 및 지번은 인가 후 확인 가능"],"gateMessage":"G1 등급 등록이 필요합니다.","kakaoText":"강남 역삼역 오피스 빌딩 매각 안내입니다.","exactUnitCandidate":"101호","floor":"1층","areaSqmText":"150㎡","spaceType":"office","depositText":"5000만","monthlyRentText":"400만","maintenanceFeeText":"50만","availableFromText":"즉시입주","leaseTermMonthsText":"24","incentivesText":"렌트프리 2개월","restrictions":[],"landlordIdentity":"김성수","currentTenant":"스타트업","vacancyReason":"이전 확장","rentNegotiation":"협의 가능","region":"성수동","areaSqm":150,"deposit":5000,"monthlyRent":400,"maintenanceFee":50,"availableFrom":"즉시입주","leaseTermMonths":24,"incentives":{"rentFreeMonths":2,"interiorSupport":"일부 인테리어 지원","freeRentDetail":"렌트프리 2개월 지원"},"shortSummaryLease":"성수역 도보 5분 거리 1층 리테일 상가 매물입니다."}</a:t>
+              <a:t>[참고] 종합 가치 제안: 송파권역 핵심 상권의 희소성 높은 우량 자산으로, 안정적인 임대 수익과 향후 공법상 밸류업 및 권역 지가 상승에 따른 자본 이득(Capital Gain)을 동시에 실현할 수 있는 전략적 매물입니다.</a:t>
             </a:r>
             <a:endParaRPr lang="en-US" sz="1100" dirty="0"/>
           </a:p>
@@ -9476,7 +9499,7 @@
       </p:sp>
       <p:sp>
         <p:nvSpPr>
-          <p:cNvPr id="11" name="Text 8"/>
+          <p:cNvPr id="32" name="Text 29"/>
           <p:cNvSpPr/>
           <p:nvPr/>
         </p:nvSpPr>
@@ -9515,7 +9538,7 @@
       </p:sp>
       <p:sp>
         <p:nvSpPr>
-          <p:cNvPr id="12" name="Text 9"/>
+          <p:cNvPr id="33" name="Text 30"/>
           <p:cNvSpPr/>
           <p:nvPr/>
         </p:nvSpPr>
@@ -9730,11 +9753,11 @@
         <p:spPr>
           <a:xfrm>
             <a:off x="566928" y="1572768"/>
-            <a:ext cx="11057839" cy="3200400"/>
+            <a:ext cx="2490140" cy="3200400"/>
           </a:xfrm>
           <a:prstGeom prst="roundRect">
             <a:avLst>
-              <a:gd name="adj" fmla="val 1714"/>
+              <a:gd name="adj" fmla="val 2203"/>
             </a:avLst>
           </a:prstGeom>
           <a:solidFill>
@@ -9816,7 +9839,7 @@
         <p:spPr>
           <a:xfrm>
             <a:off x="786384" y="2304288"/>
-            <a:ext cx="10618927" cy="365760"/>
+            <a:ext cx="2051228" cy="365760"/>
           </a:xfrm>
           <a:prstGeom prst="rect">
             <a:avLst/>
@@ -9840,7 +9863,7 @@
                 <a:ea typeface="Pretendard" pitchFamily="34" charset="-122"/>
                 <a:cs typeface="Pretendard" pitchFamily="34" charset="-120"/>
               </a:rPr>
-              <a:t>{"ok"</a:t>
+              <a:t>초기 관심 표명 → 담당자 연락</a:t>
             </a:r>
             <a:endParaRPr lang="en-US" sz="1600" dirty="0"/>
           </a:p>
@@ -9855,7 +9878,7 @@
         <p:spPr>
           <a:xfrm>
             <a:off x="786384" y="2761488"/>
-            <a:ext cx="10618927" cy="1828800"/>
+            <a:ext cx="2051228" cy="1828800"/>
           </a:xfrm>
           <a:prstGeom prst="rect">
             <a:avLst/>
@@ -9870,8 +9893,147 @@
             <a:pPr indent="0" marL="0">
               <a:buNone/>
             </a:pPr>
-            <a:r>
-              <a:rPr lang="en-US" sz="1100" dirty="0">
+            <a:endParaRPr lang="en-US" sz="1100" dirty="0"/>
+          </a:p>
+        </p:txBody>
+      </p:sp>
+      <p:sp>
+        <p:nvSpPr>
+          <p:cNvPr id="11" name="Shape 9"/>
+          <p:cNvSpPr/>
+          <p:nvPr/>
+        </p:nvSpPr>
+        <p:spPr>
+          <a:xfrm>
+            <a:off x="3148508" y="3035808"/>
+            <a:ext cx="182880" cy="274320"/>
+          </a:xfrm>
+          <a:prstGeom prst="rightArrow">
+            <a:avLst/>
+          </a:prstGeom>
+          <a:solidFill>
+            <a:srgbClr val="CBD5E0"/>
+          </a:solidFill>
+          <a:ln w="6350">
+            <a:solidFill>
+              <a:srgbClr val="718096"/>
+            </a:solidFill>
+            <a:prstDash val="solid"/>
+          </a:ln>
+        </p:spPr>
+      </p:sp>
+      <p:sp>
+        <p:nvSpPr>
+          <p:cNvPr id="12" name="Shape 10"/>
+          <p:cNvSpPr/>
+          <p:nvPr/>
+        </p:nvSpPr>
+        <p:spPr>
+          <a:xfrm>
+            <a:off x="3422828" y="1572768"/>
+            <a:ext cx="2490140" cy="3200400"/>
+          </a:xfrm>
+          <a:prstGeom prst="roundRect">
+            <a:avLst>
+              <a:gd name="adj" fmla="val 2203"/>
+            </a:avLst>
+          </a:prstGeom>
+          <a:solidFill>
+            <a:srgbClr val="F7FAFC"/>
+          </a:solidFill>
+          <a:ln w="6350">
+            <a:solidFill>
+              <a:srgbClr val="CBD5E0"/>
+            </a:solidFill>
+            <a:prstDash val="solid"/>
+          </a:ln>
+        </p:spPr>
+      </p:sp>
+      <p:sp>
+        <p:nvSpPr>
+          <p:cNvPr id="13" name="Shape 11"/>
+          <p:cNvSpPr/>
+          <p:nvPr/>
+        </p:nvSpPr>
+        <p:spPr>
+          <a:xfrm>
+            <a:off x="3642284" y="1792224"/>
+            <a:ext cx="384048" cy="384048"/>
+          </a:xfrm>
+          <a:prstGeom prst="ellipse">
+            <a:avLst/>
+          </a:prstGeom>
+          <a:solidFill>
+            <a:srgbClr val="B98A2E"/>
+          </a:solidFill>
+          <a:ln/>
+        </p:spPr>
+      </p:sp>
+      <p:sp>
+        <p:nvSpPr>
+          <p:cNvPr id="14" name="Text 12"/>
+          <p:cNvSpPr/>
+          <p:nvPr/>
+        </p:nvSpPr>
+        <p:spPr>
+          <a:xfrm>
+            <a:off x="3642284" y="1792224"/>
+            <a:ext cx="384048" cy="384048"/>
+          </a:xfrm>
+          <a:prstGeom prst="rect">
+            <a:avLst/>
+          </a:prstGeom>
+          <a:noFill/>
+          <a:ln/>
+        </p:spPr>
+        <p:txBody>
+          <a:bodyPr wrap="square" lIns="0" tIns="0" rIns="0" bIns="0" rtlCol="0" anchor="ctr"/>
+          <a:lstStyle/>
+          <a:p>
+            <a:pPr algn="ctr" indent="0" marL="0">
+              <a:buNone/>
+            </a:pPr>
+            <a:r>
+              <a:rPr lang="en-US" sz="1300" b="1" dirty="0">
+                <a:solidFill>
+                  <a:srgbClr val="FFFFFF"/>
+                </a:solidFill>
+                <a:latin typeface="Arial" pitchFamily="34" charset="0"/>
+                <a:ea typeface="Arial" pitchFamily="34" charset="-122"/>
+                <a:cs typeface="Arial" pitchFamily="34" charset="-120"/>
+              </a:rPr>
+              <a:t>STEP 2</a:t>
+            </a:r>
+            <a:endParaRPr lang="en-US" sz="1300" dirty="0"/>
+          </a:p>
+        </p:txBody>
+      </p:sp>
+      <p:sp>
+        <p:nvSpPr>
+          <p:cNvPr id="15" name="Text 13"/>
+          <p:cNvSpPr/>
+          <p:nvPr/>
+        </p:nvSpPr>
+        <p:spPr>
+          <a:xfrm>
+            <a:off x="3642284" y="2304288"/>
+            <a:ext cx="2051228" cy="365760"/>
+          </a:xfrm>
+          <a:prstGeom prst="rect">
+            <a:avLst/>
+          </a:prstGeom>
+          <a:noFill/>
+          <a:ln/>
+        </p:spPr>
+        <p:txBody>
+          <a:bodyPr wrap="square" rtlCol="0" anchor="ctr"/>
+          <a:lstStyle/>
+          <a:p>
+            <a:pPr indent="0" marL="0">
+              <a:buNone/>
+            </a:pPr>
+            <a:r>
+              <a:rPr lang="en-US" sz="1600" b="1" dirty="0">
                 <a:solidFill>
                   <a:srgbClr val="10161F"/>
                 </a:solidFill>
@@ -9879,45 +10041,429 @@
                 <a:ea typeface="Pretendard" pitchFamily="34" charset="-122"/>
                 <a:cs typeface="Pretendard" pitchFamily="34" charset="-120"/>
               </a:rPr>
-              <a:t>true,"mocked":true,"extractedFields":{"area_signal":"역삼","asset_type":"오피스빌딩","price_band":"300억","size_signal":"3000평(약 9917.4㎡)"},"extractedFacts":{"region":"역삼","exactAddressCandidate":"역삼동 742-1","assetType":"오피스빌딩","priceText":"300억","sizeText":"3000평(약 9917.4㎡)","currentUse":"오피스","currentUseSignal":"근린생활시설","leaseSignal":"임대중","vacancySignal":"공실없음","tenantNames":["쿠팡","네이버"],"unitRentTexts":["301호: 1500만"],"sellerMotivationText":"자산 효율화","brokerNotes":["초역세권 매물"]},"detectedSensitiveFields":["exact_address","tenant_name"],"ambiguousFields":[],"warnings":[],"areaSignal":"역삼","assetType":"오피스빌딩","priceBand":"300억","sizeSignal":"3000평(약 9917.4㎡)","dealType":"매각","buildingName":"역삼 센트럴타워","exactAddress":"역삼동 742-1","totalFloorArea":9917.3,"buildYear":2015,"currentUseSignal":"근린생활시설","vacancySignal":"공실 없음","fitSummary":"초역세권 근생 빌딩으로 시행/사옥 매입에 최적화","cautionSummary":"주요 임차 업종 만기 조율 필요","hiddenFields":["exact_address","seller_motivation"],"confidence":{"areaSignal":"confirmed","assetType":"confirmed","priceBand":"ai_hypothesis","fitSummary":"ai_hypothesis"},"missingData":["sizeSignal"],"boundaryNote":"본 자료는 실거래 통계 기반 참고치입니다.","buyerType":"법인 사옥형","budgetRange":{"min":50,"max":80,"display":"50억~80억"},"preferredRegions":["강남","성수"],"assetTypes":["꼬마빌딩","사옥용"],"purchasePurpose":"사옥용 매입","mustHave":["초역세권","주차"],"niceToHave":["테라스","루프탑"],"riskTolerance":"medium","financingNote":"자본금 50% 준비","missingQuestions":["구체적인 입주 시기가 언제인가요?","선호하는 수익률이 있나요?"],"privacyNotes":["연락처 비공개"],"fitReasons":["매수자 예산(50-80억)에 부합하는 매물입니다.","요청하신 성수/강남 권역에 해당합니다."],"cautionReasons":["요청한 용도와 달리 명도 협의가 다소 필요합니다."],"recommendedNextAction":"현장 답사 제안","kakaoMessage":"안녕하세요! 요청하신 조건에 부합하는 추천 매물이 있어 안내해 드립니다. 확인해보시고 피드백 부탁드립니다.","title":"강남 역삼역 초역세권 오피스 사옥용 빌딩 매각","shortSummary":"역삼역 도보 5분 거리의 준신축급 대형 오피스빌딩입니다.","dealPoints":["초역세권","사옥 최적"],"cautionPoints":["명도 조율 필요"],"hiddenInfoNotice":["보증금 및 지번은 인가 후 확인 가능"],"gateMessage":"G1 등급 등록이 필요합니다.","kakaoText":"강남 역삼역 오피스 빌딩 매각 안내입니다.","exactUnitCandidate":"101호","floor":"1층","areaSqmText":"150㎡","spaceType":"office","depositText":"5000만","monthlyRentText":"400만","maintenanceFeeText":"50만","availableFromText":"즉시입주","leaseTermMonthsText":"24","incentivesText":"렌트프리 2개월","restrictions":[],"landlordIdentity":"김성수","currentTenant":"스타트업","vacancyReason":"이전 확장","rentNegotiation":"협의 가능","region":"성수동","areaSqm":150,"deposit":5000,"monthlyRent":400,"maintenanceFee":50,"availableFrom":"즉시입주","leaseTermMonths":24,"incentives":{"rentFreeMonths":2,"interiorSupport":"일부 인테리어 지원","freeRentDetail":"렌트프리 2개월 지원"},"shortSummaryLease":"성수역 도보 5분 거리 1층 리테일 상가 매물입니다."}</a:t>
-            </a:r>
+              <a:t>NDA 체결 → 임차인 정보 및 임대차계약서 제공</a:t>
+            </a:r>
+            <a:endParaRPr lang="en-US" sz="1600" dirty="0"/>
+          </a:p>
+        </p:txBody>
+      </p:sp>
+      <p:sp>
+        <p:nvSpPr>
+          <p:cNvPr id="16" name="Text 14"/>
+          <p:cNvSpPr/>
+          <p:nvPr/>
+        </p:nvSpPr>
+        <p:spPr>
+          <a:xfrm>
+            <a:off x="3642284" y="2761488"/>
+            <a:ext cx="2051228" cy="1828800"/>
+          </a:xfrm>
+          <a:prstGeom prst="rect">
+            <a:avLst/>
+          </a:prstGeom>
+          <a:noFill/>
+          <a:ln/>
+        </p:spPr>
+        <p:txBody>
+          <a:bodyPr wrap="square" rtlCol="0" anchor="t"/>
+          <a:lstStyle/>
+          <a:p>
+            <a:pPr indent="0" marL="0">
+              <a:buNone/>
+            </a:pPr>
             <a:endParaRPr lang="en-US" sz="1100" dirty="0"/>
           </a:p>
         </p:txBody>
       </p:sp>
       <p:sp>
         <p:nvSpPr>
-          <p:cNvPr id="11" name="Text 9"/>
-          <p:cNvSpPr/>
-          <p:nvPr/>
-        </p:nvSpPr>
-        <p:spPr>
-          <a:xfrm>
-            <a:off x="566928" y="6382512"/>
-            <a:ext cx="7315200" cy="219456"/>
-          </a:xfrm>
-          <a:prstGeom prst="rect">
-            <a:avLst/>
-          </a:prstGeom>
-          <a:noFill/>
-          <a:ln/>
-        </p:spPr>
-        <p:txBody>
-          <a:bodyPr wrap="square" lIns="0" tIns="0" rIns="0" bIns="0" rtlCol="0" anchor="ctr"/>
+          <p:cNvPr id="17" name="Shape 15"/>
+          <p:cNvSpPr/>
+          <p:nvPr/>
+        </p:nvSpPr>
+        <p:spPr>
+          <a:xfrm>
+            <a:off x="6004408" y="3035808"/>
+            <a:ext cx="182880" cy="274320"/>
+          </a:xfrm>
+          <a:prstGeom prst="rightArrow">
+            <a:avLst/>
+          </a:prstGeom>
+          <a:solidFill>
+            <a:srgbClr val="CBD5E0"/>
+          </a:solidFill>
+          <a:ln w="6350">
+            <a:solidFill>
+              <a:srgbClr val="718096"/>
+            </a:solidFill>
+            <a:prstDash val="solid"/>
+          </a:ln>
+        </p:spPr>
+      </p:sp>
+      <p:sp>
+        <p:nvSpPr>
+          <p:cNvPr id="18" name="Shape 16"/>
+          <p:cNvSpPr/>
+          <p:nvPr/>
+        </p:nvSpPr>
+        <p:spPr>
+          <a:xfrm>
+            <a:off x="6278728" y="1572768"/>
+            <a:ext cx="2490140" cy="3200400"/>
+          </a:xfrm>
+          <a:prstGeom prst="roundRect">
+            <a:avLst>
+              <a:gd name="adj" fmla="val 2203"/>
+            </a:avLst>
+          </a:prstGeom>
+          <a:solidFill>
+            <a:srgbClr val="F7FAFC"/>
+          </a:solidFill>
+          <a:ln w="6350">
+            <a:solidFill>
+              <a:srgbClr val="CBD5E0"/>
+            </a:solidFill>
+            <a:prstDash val="solid"/>
+          </a:ln>
+        </p:spPr>
+      </p:sp>
+      <p:sp>
+        <p:nvSpPr>
+          <p:cNvPr id="19" name="Shape 17"/>
+          <p:cNvSpPr/>
+          <p:nvPr/>
+        </p:nvSpPr>
+        <p:spPr>
+          <a:xfrm>
+            <a:off x="6498184" y="1792224"/>
+            <a:ext cx="384048" cy="384048"/>
+          </a:xfrm>
+          <a:prstGeom prst="ellipse">
+            <a:avLst/>
+          </a:prstGeom>
+          <a:solidFill>
+            <a:srgbClr val="B98A2E"/>
+          </a:solidFill>
+          <a:ln/>
+        </p:spPr>
+      </p:sp>
+      <p:sp>
+        <p:nvSpPr>
+          <p:cNvPr id="20" name="Text 18"/>
+          <p:cNvSpPr/>
+          <p:nvPr/>
+        </p:nvSpPr>
+        <p:spPr>
+          <a:xfrm>
+            <a:off x="6498184" y="1792224"/>
+            <a:ext cx="384048" cy="384048"/>
+          </a:xfrm>
+          <a:prstGeom prst="rect">
+            <a:avLst/>
+          </a:prstGeom>
+          <a:noFill/>
+          <a:ln/>
+        </p:spPr>
+        <p:txBody>
+          <a:bodyPr wrap="square" lIns="0" tIns="0" rIns="0" bIns="0" rtlCol="0" anchor="ctr"/>
+          <a:lstStyle/>
+          <a:p>
+            <a:pPr algn="ctr" indent="0" marL="0">
+              <a:buNone/>
+            </a:pPr>
+            <a:r>
+              <a:rPr lang="en-US" sz="1300" b="1" dirty="0">
+                <a:solidFill>
+                  <a:srgbClr val="FFFFFF"/>
+                </a:solidFill>
+                <a:latin typeface="Arial" pitchFamily="34" charset="0"/>
+                <a:ea typeface="Arial" pitchFamily="34" charset="-122"/>
+                <a:cs typeface="Arial" pitchFamily="34" charset="-120"/>
+              </a:rPr>
+              <a:t>STEP 3</a:t>
+            </a:r>
+            <a:endParaRPr lang="en-US" sz="1300" dirty="0"/>
+          </a:p>
+        </p:txBody>
+      </p:sp>
+      <p:sp>
+        <p:nvSpPr>
+          <p:cNvPr id="21" name="Text 19"/>
+          <p:cNvSpPr/>
+          <p:nvPr/>
+        </p:nvSpPr>
+        <p:spPr>
+          <a:xfrm>
+            <a:off x="6498184" y="2304288"/>
+            <a:ext cx="2051228" cy="365760"/>
+          </a:xfrm>
+          <a:prstGeom prst="rect">
+            <a:avLst/>
+          </a:prstGeom>
+          <a:noFill/>
+          <a:ln/>
+        </p:spPr>
+        <p:txBody>
+          <a:bodyPr wrap="square" rtlCol="0" anchor="ctr"/>
           <a:lstStyle/>
           <a:p>
             <a:pPr indent="0" marL="0">
               <a:buNone/>
             </a:pPr>
             <a:r>
-              <a:rPr lang="en-US" sz="800" dirty="0">
-                <a:solidFill>
-                  <a:srgbClr val="718096"/>
+              <a:rPr lang="en-US" sz="1600" b="1" dirty="0">
+                <a:solidFill>
+                  <a:srgbClr val="10161F"/>
                 </a:solidFill>
                 <a:latin typeface="Pretendard" pitchFamily="34" charset="0"/>
                 <a:ea typeface="Pretendard" pitchFamily="34" charset="-122"/>
                 <a:cs typeface="Pretendard" pitchFamily="34" charset="-120"/>
               </a:rPr>
+              <a:t>현장 실사 일정 조율 → 건물 컨디션 및 설비 직접 확인</a:t>
+            </a:r>
+            <a:endParaRPr lang="en-US" sz="1600" dirty="0"/>
+          </a:p>
+        </p:txBody>
+      </p:sp>
+      <p:sp>
+        <p:nvSpPr>
+          <p:cNvPr id="22" name="Text 20"/>
+          <p:cNvSpPr/>
+          <p:nvPr/>
+        </p:nvSpPr>
+        <p:spPr>
+          <a:xfrm>
+            <a:off x="6498184" y="2761488"/>
+            <a:ext cx="2051228" cy="1828800"/>
+          </a:xfrm>
+          <a:prstGeom prst="rect">
+            <a:avLst/>
+          </a:prstGeom>
+          <a:noFill/>
+          <a:ln/>
+        </p:spPr>
+        <p:txBody>
+          <a:bodyPr wrap="square" rtlCol="0" anchor="t"/>
+          <a:lstStyle/>
+          <a:p>
+            <a:pPr indent="0" marL="0">
+              <a:buNone/>
+            </a:pPr>
+            <a:endParaRPr lang="en-US" sz="1100" dirty="0"/>
+          </a:p>
+        </p:txBody>
+      </p:sp>
+      <p:sp>
+        <p:nvSpPr>
+          <p:cNvPr id="23" name="Shape 21"/>
+          <p:cNvSpPr/>
+          <p:nvPr/>
+        </p:nvSpPr>
+        <p:spPr>
+          <a:xfrm>
+            <a:off x="8860307" y="3035808"/>
+            <a:ext cx="182880" cy="274320"/>
+          </a:xfrm>
+          <a:prstGeom prst="rightArrow">
+            <a:avLst/>
+          </a:prstGeom>
+          <a:solidFill>
+            <a:srgbClr val="CBD5E0"/>
+          </a:solidFill>
+          <a:ln w="6350">
+            <a:solidFill>
+              <a:srgbClr val="718096"/>
+            </a:solidFill>
+            <a:prstDash val="solid"/>
+          </a:ln>
+        </p:spPr>
+      </p:sp>
+      <p:sp>
+        <p:nvSpPr>
+          <p:cNvPr id="24" name="Shape 22"/>
+          <p:cNvSpPr/>
+          <p:nvPr/>
+        </p:nvSpPr>
+        <p:spPr>
+          <a:xfrm>
+            <a:off x="9134627" y="1572768"/>
+            <a:ext cx="2490140" cy="3200400"/>
+          </a:xfrm>
+          <a:prstGeom prst="roundRect">
+            <a:avLst>
+              <a:gd name="adj" fmla="val 2203"/>
+            </a:avLst>
+          </a:prstGeom>
+          <a:solidFill>
+            <a:srgbClr val="F7FAFC"/>
+          </a:solidFill>
+          <a:ln w="6350">
+            <a:solidFill>
+              <a:srgbClr val="CBD5E0"/>
+            </a:solidFill>
+            <a:prstDash val="solid"/>
+          </a:ln>
+        </p:spPr>
+      </p:sp>
+      <p:sp>
+        <p:nvSpPr>
+          <p:cNvPr id="25" name="Shape 23"/>
+          <p:cNvSpPr/>
+          <p:nvPr/>
+        </p:nvSpPr>
+        <p:spPr>
+          <a:xfrm>
+            <a:off x="9354083" y="1792224"/>
+            <a:ext cx="384048" cy="384048"/>
+          </a:xfrm>
+          <a:prstGeom prst="ellipse">
+            <a:avLst/>
+          </a:prstGeom>
+          <a:solidFill>
+            <a:srgbClr val="B98A2E"/>
+          </a:solidFill>
+          <a:ln/>
+        </p:spPr>
+      </p:sp>
+      <p:sp>
+        <p:nvSpPr>
+          <p:cNvPr id="26" name="Text 24"/>
+          <p:cNvSpPr/>
+          <p:nvPr/>
+        </p:nvSpPr>
+        <p:spPr>
+          <a:xfrm>
+            <a:off x="9354083" y="1792224"/>
+            <a:ext cx="384048" cy="384048"/>
+          </a:xfrm>
+          <a:prstGeom prst="rect">
+            <a:avLst/>
+          </a:prstGeom>
+          <a:noFill/>
+          <a:ln/>
+        </p:spPr>
+        <p:txBody>
+          <a:bodyPr wrap="square" lIns="0" tIns="0" rIns="0" bIns="0" rtlCol="0" anchor="ctr"/>
+          <a:lstStyle/>
+          <a:p>
+            <a:pPr algn="ctr" indent="0" marL="0">
+              <a:buNone/>
+            </a:pPr>
+            <a:r>
+              <a:rPr lang="en-US" sz="1300" b="1" dirty="0">
+                <a:solidFill>
+                  <a:srgbClr val="FFFFFF"/>
+                </a:solidFill>
+                <a:latin typeface="Arial" pitchFamily="34" charset="0"/>
+                <a:ea typeface="Arial" pitchFamily="34" charset="-122"/>
+                <a:cs typeface="Arial" pitchFamily="34" charset="-120"/>
+              </a:rPr>
+              <a:t>STEP 4</a:t>
+            </a:r>
+            <a:endParaRPr lang="en-US" sz="1300" dirty="0"/>
+          </a:p>
+        </p:txBody>
+      </p:sp>
+      <p:sp>
+        <p:nvSpPr>
+          <p:cNvPr id="27" name="Text 25"/>
+          <p:cNvSpPr/>
+          <p:nvPr/>
+        </p:nvSpPr>
+        <p:spPr>
+          <a:xfrm>
+            <a:off x="9354083" y="2304288"/>
+            <a:ext cx="2051228" cy="365760"/>
+          </a:xfrm>
+          <a:prstGeom prst="rect">
+            <a:avLst/>
+          </a:prstGeom>
+          <a:noFill/>
+          <a:ln/>
+        </p:spPr>
+        <p:txBody>
+          <a:bodyPr wrap="square" rtlCol="0" anchor="ctr"/>
+          <a:lstStyle/>
+          <a:p>
+            <a:pPr indent="0" marL="0">
+              <a:buNone/>
+            </a:pPr>
+            <a:r>
+              <a:rPr lang="en-US" sz="1600" b="1" dirty="0">
+                <a:solidFill>
+                  <a:srgbClr val="10161F"/>
+                </a:solidFill>
+                <a:latin typeface="Pretendard" pitchFamily="34" charset="0"/>
+                <a:ea typeface="Pretendard" pitchFamily="34" charset="-122"/>
+                <a:cs typeface="Pretendard" pitchFamily="34" charset="-120"/>
+              </a:rPr>
+              <a:t>LOI(투자의향서) 제출 → 가격 협의 개시</a:t>
+            </a:r>
+            <a:endParaRPr lang="en-US" sz="1600" dirty="0"/>
+          </a:p>
+        </p:txBody>
+      </p:sp>
+      <p:sp>
+        <p:nvSpPr>
+          <p:cNvPr id="28" name="Text 26"/>
+          <p:cNvSpPr/>
+          <p:nvPr/>
+        </p:nvSpPr>
+        <p:spPr>
+          <a:xfrm>
+            <a:off x="9354083" y="2761488"/>
+            <a:ext cx="2051228" cy="1828800"/>
+          </a:xfrm>
+          <a:prstGeom prst="rect">
+            <a:avLst/>
+          </a:prstGeom>
+          <a:noFill/>
+          <a:ln/>
+        </p:spPr>
+        <p:txBody>
+          <a:bodyPr wrap="square" rtlCol="0" anchor="t"/>
+          <a:lstStyle/>
+          <a:p>
+            <a:pPr indent="0" marL="0">
+              <a:buNone/>
+            </a:pPr>
+            <a:endParaRPr lang="en-US" sz="1100" dirty="0"/>
+          </a:p>
+        </p:txBody>
+      </p:sp>
+      <p:sp>
+        <p:nvSpPr>
+          <p:cNvPr id="29" name="Text 27"/>
+          <p:cNvSpPr/>
+          <p:nvPr/>
+        </p:nvSpPr>
+        <p:spPr>
+          <a:xfrm>
+            <a:off x="566928" y="6382512"/>
+            <a:ext cx="7315200" cy="219456"/>
+          </a:xfrm>
+          <a:prstGeom prst="rect">
+            <a:avLst/>
+          </a:prstGeom>
+          <a:noFill/>
+          <a:ln/>
+        </p:spPr>
+        <p:txBody>
+          <a:bodyPr wrap="square" lIns="0" tIns="0" rIns="0" bIns="0" rtlCol="0" anchor="ctr"/>
+          <a:lstStyle/>
+          <a:p>
+            <a:pPr indent="0" marL="0">
+              <a:buNone/>
+            </a:pPr>
+            <a:r>
+              <a:rPr lang="en-US" sz="800" dirty="0">
+                <a:solidFill>
+                  <a:srgbClr val="718096"/>
+                </a:solidFill>
+                <a:latin typeface="Pretendard" pitchFamily="34" charset="0"/>
+                <a:ea typeface="Pretendard" pitchFamily="34" charset="-122"/>
+                <a:cs typeface="Pretendard" pitchFamily="34" charset="-120"/>
+              </a:rPr>
               <a:t>크리딜   |   </a:t>
             </a:r>
             <a:endParaRPr lang="en-US" sz="800" dirty="0"/>
@@ -9926,7 +10472,7 @@
       </p:sp>
       <p:sp>
         <p:nvSpPr>
-          <p:cNvPr id="12" name="Text 10"/>
+          <p:cNvPr id="30" name="Text 28"/>
           <p:cNvSpPr/>
           <p:nvPr/>
         </p:nvSpPr>

--- a/docs/test/stress/e2e-outputs/income_case14_bangi_discount_basic.pptx
+++ b/docs/test/stress/e2e-outputs/income_case14_bangi_discount_basic.pptx
@@ -1905,7 +1905,7 @@
                 <a:ea typeface="Arial" pitchFamily="34" charset="-122"/>
                 <a:cs typeface="Arial" pitchFamily="34" charset="-120"/>
               </a:rPr>
-              <a:t>BASIC IM</a:t>
+              <a:t>INVESTMENT MEMORANDUM</a:t>
             </a:r>
             <a:endParaRPr lang="en-US" sz="1000" dirty="0"/>
           </a:p>
@@ -3988,7 +3988,7 @@
                 <a:ea typeface="Pretendard" pitchFamily="34" charset="-122"/>
                 <a:cs typeface="Pretendard" pitchFamily="34" charset="-120"/>
               </a:rPr>
-              <a:t>송파권역 내 근생빌딩, 매각 희망가 72억. 입지·임대차 현황을 감안할 때 투자 검토 가치가 있는 물건입니다.</a:t>
+              <a:t>송파권역 소재 근생빌딩, 희망가 72억 투자 검토 자료입니다.</a:t>
             </a:r>
             <a:endParaRPr lang="en-US" sz="1500" dirty="0"/>
           </a:p>
@@ -4439,7 +4439,7 @@
                 <a:ea typeface="Arial" pitchFamily="34" charset="-122"/>
                 <a:cs typeface="Arial" pitchFamily="34" charset="-120"/>
               </a:rPr>
-              <a:t>7.76%</a:t>
+              <a:t>0.55%</a:t>
             </a:r>
             <a:endParaRPr lang="en-US" sz="2000" dirty="0"/>
           </a:p>
@@ -4610,7 +4610,7 @@
                 <a:ea typeface="Pretendard" pitchFamily="34" charset="-122"/>
                 <a:cs typeface="Pretendard" pitchFamily="34" charset="-120"/>
               </a:rPr>
-              <a:t>원금 안전판: 송파권역 핵심 입지 및 우량 대지 지분 가치로 하방 경직성 확보</a:t>
+              <a:t>입지 가치: 송파권역 소재 자산으로 중장기 자산 가치 및 안정적 수요 검토</a:t>
             </a:r>
             <a:endParaRPr lang="en-US" sz="1150" dirty="0"/>
           </a:p>
@@ -4742,7 +4742,7 @@
                 <a:ea typeface="Pretendard" pitchFamily="34" charset="-122"/>
                 <a:cs typeface="Pretendard" pitchFamily="34" charset="-120"/>
               </a:rPr>
-              <a:t>수익 안정성: 매각 희망가 72억 대비 안정적인 월 임대수익 창출 구조</a:t>
+              <a:t>임대 구조: 72억 수준의 가격대 및 현 임대차 기반의 현금흐름 분석</a:t>
             </a:r>
             <a:endParaRPr lang="en-US" sz="1150" dirty="0"/>
           </a:p>
@@ -4874,7 +4874,7 @@
                 <a:ea typeface="Pretendard" pitchFamily="34" charset="-122"/>
                 <a:cs typeface="Pretendard" pitchFamily="34" charset="-120"/>
               </a:rPr>
-              <a:t>미래 가치: 향후 권역 지가 상승 및 공법상 잔여 용적률 활용 밸류업 기회</a:t>
+              <a:t>실사 점검: 계약서 및 공부 확인을 통한 권리관계·물리적 상태 정밀 진단</a:t>
             </a:r>
             <a:endParaRPr lang="en-US" sz="1150" dirty="0"/>
           </a:p>
@@ -5187,7 +5187,7 @@
                 <a:ea typeface="Pretendard" pitchFamily="34" charset="-122"/>
                 <a:cs typeface="Pretendard" pitchFamily="34" charset="-120"/>
               </a:rPr>
-              <a:t>교통 접근성</a:t>
+              <a:t>교통 접근성 상세 정보는 담당 브로커를 통해 확인하</a:t>
             </a:r>
             <a:endParaRPr lang="en-US" sz="1300" dirty="0"/>
           </a:p>
@@ -5220,16 +5220,70 @@
               </a:lnSpc>
               <a:buNone/>
             </a:pPr>
-            <a:r>
-              <a:rPr lang="en-US" sz="1300" b="1" dirty="0">
-                <a:solidFill>
-                  <a:srgbClr val="10161F"/>
+            <a:endParaRPr lang="en-US" sz="1300" dirty="0"/>
+          </a:p>
+        </p:txBody>
+      </p:sp>
+      <p:sp>
+        <p:nvSpPr>
+          <p:cNvPr id="9" name="Shape 6"/>
+          <p:cNvSpPr/>
+          <p:nvPr/>
+        </p:nvSpPr>
+        <p:spPr>
+          <a:xfrm>
+            <a:off x="6053328" y="1975104"/>
+            <a:ext cx="5571439" cy="0"/>
+          </a:xfrm>
+          <a:prstGeom prst="line">
+            <a:avLst/>
+          </a:prstGeom>
+          <a:noFill/>
+          <a:ln w="3810">
+            <a:solidFill>
+              <a:srgbClr val="CBD5E0"/>
+            </a:solidFill>
+            <a:prstDash val="solid"/>
+          </a:ln>
+        </p:spPr>
+      </p:sp>
+      <p:sp>
+        <p:nvSpPr>
+          <p:cNvPr id="10" name="Text 7"/>
+          <p:cNvSpPr/>
+          <p:nvPr/>
+        </p:nvSpPr>
+        <p:spPr>
+          <a:xfrm>
+            <a:off x="6053328" y="1975104"/>
+            <a:ext cx="2117147" cy="493776"/>
+          </a:xfrm>
+          <a:prstGeom prst="rect">
+            <a:avLst/>
+          </a:prstGeom>
+          <a:noFill/>
+          <a:ln/>
+        </p:spPr>
+        <p:txBody>
+          <a:bodyPr wrap="square" lIns="0" tIns="0" rIns="0" bIns="0" rtlCol="0" anchor="ctr"/>
+          <a:lstStyle/>
+          <a:p>
+            <a:pPr indent="0" marL="0">
+              <a:lnSpc>
+                <a:spcPct val="120000"/>
+              </a:lnSpc>
+              <a:buNone/>
+            </a:pPr>
+            <a:r>
+              <a:rPr lang="en-US" sz="1300" dirty="0">
+                <a:solidFill>
+                  <a:srgbClr val="718096"/>
                 </a:solidFill>
                 <a:latin typeface="Pretendard" pitchFamily="34" charset="0"/>
                 <a:ea typeface="Pretendard" pitchFamily="34" charset="-122"/>
                 <a:cs typeface="Pretendard" pitchFamily="34" charset="-120"/>
               </a:rPr>
-              <a:t>{"ok":true,"mocked":true,"extractedFields":{"area_signal":"역삼","asset_type":"오피스빌딩","price_band":"300억","size_signal":"3000평(약 9917.</a:t>
+              <a:t>[건물] 주변 상권</a:t>
             </a:r>
             <a:endParaRPr lang="en-US" sz="1300" dirty="0"/>
           </a:p>
@@ -5237,14 +5291,14 @@
       </p:sp>
       <p:sp>
         <p:nvSpPr>
-          <p:cNvPr id="9" name="Text 6"/>
-          <p:cNvSpPr/>
-          <p:nvPr/>
-        </p:nvSpPr>
-        <p:spPr>
-          <a:xfrm>
-            <a:off x="566928" y="6382512"/>
-            <a:ext cx="7315200" cy="219456"/>
+          <p:cNvPr id="11" name="Text 8"/>
+          <p:cNvSpPr/>
+          <p:nvPr/>
+        </p:nvSpPr>
+        <p:spPr>
+          <a:xfrm>
+            <a:off x="8170475" y="1975104"/>
+            <a:ext cx="3454292" cy="493776"/>
           </a:xfrm>
           <a:prstGeom prst="rect">
             <a:avLst/>
@@ -5257,17 +5311,155 @@
           <a:lstStyle/>
           <a:p>
             <a:pPr indent="0" marL="0">
-              <a:buNone/>
-            </a:pPr>
-            <a:r>
-              <a:rPr lang="en-US" sz="800" dirty="0">
-                <a:solidFill>
-                  <a:srgbClr val="718096"/>
+              <a:lnSpc>
+                <a:spcPct val="120000"/>
+              </a:lnSpc>
+              <a:buNone/>
+            </a:pPr>
+            <a:r>
+              <a:rPr lang="en-US" sz="1300" b="1" dirty="0">
+                <a:solidFill>
+                  <a:srgbClr val="10161F"/>
                 </a:solidFill>
                 <a:latin typeface="Pretendard" pitchFamily="34" charset="0"/>
                 <a:ea typeface="Pretendard" pitchFamily="34" charset="-122"/>
                 <a:cs typeface="Pretendard" pitchFamily="34" charset="-120"/>
               </a:rPr>
+              <a:t>송파권역 내 주요 비즈니스 및 유동인구 풍부한 상권 입지 ### [성장] 입지 평가</a:t>
+            </a:r>
+            <a:endParaRPr lang="en-US" sz="1300" dirty="0"/>
+          </a:p>
+        </p:txBody>
+      </p:sp>
+      <p:sp>
+        <p:nvSpPr>
+          <p:cNvPr id="12" name="Shape 9"/>
+          <p:cNvSpPr/>
+          <p:nvPr/>
+        </p:nvSpPr>
+        <p:spPr>
+          <a:xfrm>
+            <a:off x="6053328" y="2468880"/>
+            <a:ext cx="5571439" cy="0"/>
+          </a:xfrm>
+          <a:prstGeom prst="line">
+            <a:avLst/>
+          </a:prstGeom>
+          <a:noFill/>
+          <a:ln w="3810">
+            <a:solidFill>
+              <a:srgbClr val="CBD5E0"/>
+            </a:solidFill>
+            <a:prstDash val="solid"/>
+          </a:ln>
+        </p:spPr>
+      </p:sp>
+      <p:sp>
+        <p:nvSpPr>
+          <p:cNvPr id="13" name="Text 10"/>
+          <p:cNvSpPr/>
+          <p:nvPr/>
+        </p:nvSpPr>
+        <p:spPr>
+          <a:xfrm>
+            <a:off x="6053328" y="2468880"/>
+            <a:ext cx="2117147" cy="493776"/>
+          </a:xfrm>
+          <a:prstGeom prst="rect">
+            <a:avLst/>
+          </a:prstGeom>
+          <a:noFill/>
+          <a:ln/>
+        </p:spPr>
+        <p:txBody>
+          <a:bodyPr wrap="square" lIns="0" tIns="0" rIns="0" bIns="0" rtlCol="0" anchor="ctr"/>
+          <a:lstStyle/>
+          <a:p>
+            <a:pPr indent="0" marL="0">
+              <a:lnSpc>
+                <a:spcPct val="120000"/>
+              </a:lnSpc>
+              <a:buNone/>
+            </a:pPr>
+            <a:r>
+              <a:rPr lang="en-US" sz="1300" dirty="0">
+                <a:solidFill>
+                  <a:srgbClr val="718096"/>
+                </a:solidFill>
+                <a:latin typeface="Pretendard" pitchFamily="34" charset="0"/>
+                <a:ea typeface="Pretendard" pitchFamily="34" charset="-122"/>
+                <a:cs typeface="Pretendard" pitchFamily="34" charset="-120"/>
+              </a:rPr>
+              <a:t>송파권역 내 위치하며 접근성과 가시성이 양호한 입지</a:t>
+            </a:r>
+            <a:endParaRPr lang="en-US" sz="1300" dirty="0"/>
+          </a:p>
+        </p:txBody>
+      </p:sp>
+      <p:sp>
+        <p:nvSpPr>
+          <p:cNvPr id="14" name="Text 11"/>
+          <p:cNvSpPr/>
+          <p:nvPr/>
+        </p:nvSpPr>
+        <p:spPr>
+          <a:xfrm>
+            <a:off x="8170475" y="2468880"/>
+            <a:ext cx="3454292" cy="493776"/>
+          </a:xfrm>
+          <a:prstGeom prst="rect">
+            <a:avLst/>
+          </a:prstGeom>
+          <a:noFill/>
+          <a:ln/>
+        </p:spPr>
+        <p:txBody>
+          <a:bodyPr wrap="square" lIns="0" tIns="0" rIns="0" bIns="0" rtlCol="0" anchor="ctr"/>
+          <a:lstStyle/>
+          <a:p>
+            <a:pPr indent="0" marL="0">
+              <a:lnSpc>
+                <a:spcPct val="120000"/>
+              </a:lnSpc>
+              <a:buNone/>
+            </a:pPr>
+            <a:endParaRPr lang="en-US" sz="1300" dirty="0"/>
+          </a:p>
+        </p:txBody>
+      </p:sp>
+      <p:sp>
+        <p:nvSpPr>
+          <p:cNvPr id="15" name="Text 12"/>
+          <p:cNvSpPr/>
+          <p:nvPr/>
+        </p:nvSpPr>
+        <p:spPr>
+          <a:xfrm>
+            <a:off x="566928" y="6382512"/>
+            <a:ext cx="7315200" cy="219456"/>
+          </a:xfrm>
+          <a:prstGeom prst="rect">
+            <a:avLst/>
+          </a:prstGeom>
+          <a:noFill/>
+          <a:ln/>
+        </p:spPr>
+        <p:txBody>
+          <a:bodyPr wrap="square" lIns="0" tIns="0" rIns="0" bIns="0" rtlCol="0" anchor="ctr"/>
+          <a:lstStyle/>
+          <a:p>
+            <a:pPr indent="0" marL="0">
+              <a:buNone/>
+            </a:pPr>
+            <a:r>
+              <a:rPr lang="en-US" sz="800" dirty="0">
+                <a:solidFill>
+                  <a:srgbClr val="718096"/>
+                </a:solidFill>
+                <a:latin typeface="Pretendard" pitchFamily="34" charset="0"/>
+                <a:ea typeface="Pretendard" pitchFamily="34" charset="-122"/>
+                <a:cs typeface="Pretendard" pitchFamily="34" charset="-120"/>
+              </a:rPr>
               <a:t>크리딜   |   </a:t>
             </a:r>
             <a:endParaRPr lang="en-US" sz="800" dirty="0"/>
@@ -5276,7 +5468,7 @@
       </p:sp>
       <p:sp>
         <p:nvSpPr>
-          <p:cNvPr id="10" name="Text 7"/>
+          <p:cNvPr id="16" name="Text 13"/>
           <p:cNvSpPr/>
           <p:nvPr/>
         </p:nvSpPr>
@@ -5310,45 +5502,6 @@
               <a:t>3</a:t>
             </a:r>
             <a:endParaRPr lang="en-US" sz="900" dirty="0"/>
-          </a:p>
-        </p:txBody>
-      </p:sp>
-      <p:sp>
-        <p:nvSpPr>
-          <p:cNvPr id="11" name="Text 8"/>
-          <p:cNvSpPr/>
-          <p:nvPr/>
-        </p:nvSpPr>
-        <p:spPr>
-          <a:xfrm>
-            <a:off x="566928" y="1481328"/>
-            <a:ext cx="11057839" cy="9692640"/>
-          </a:xfrm>
-          <a:prstGeom prst="rect">
-            <a:avLst/>
-          </a:prstGeom>
-          <a:noFill/>
-          <a:ln/>
-        </p:spPr>
-        <p:txBody>
-          <a:bodyPr wrap="square" lIns="0" tIns="0" rIns="0" bIns="0" rtlCol="0" anchor="t"/>
-          <a:lstStyle/>
-          <a:p>
-            <a:pPr indent="0" marL="0">
-              <a:buNone/>
-            </a:pPr>
-            <a:r>
-              <a:rPr lang="en-US" sz="1000" dirty="0">
-                <a:solidFill>
-                  <a:srgbClr val="10161F"/>
-                </a:solidFill>
-                <a:latin typeface="Pretendard" pitchFamily="34" charset="0"/>
-                <a:ea typeface="Pretendard" pitchFamily="34" charset="-122"/>
-                <a:cs typeface="Pretendard" pitchFamily="34" charset="-120"/>
-              </a:rPr>
-              <a:t>{"ok":true,"mocked":true,"extractedFields":{"area_signal":"역삼","asset_type":"오피스빌딩","price_band":"300억","size_signal":"3000평(약 9917.4㎡)"},"extractedFacts":{"region":"역삼","exactAddressCandidate":"역삼동 742-1","assetType":"오피스빌딩","priceText":"300억","sizeText":"3000평(약 9917.4㎡)","currentUse":"오피스","currentUseSignal":"근린생활시설","leaseSignal":"임대중","vacancySignal":"공실없음","tenantNames":["쿠팡","네이버"],"unitRentTexts":["301호: 1500만"],"sellerMotivationText":"자산 효율화","brokerNotes":["초역세권 매물"]},"detectedSensitiveFields":["exact_address","tenant_name"],"ambiguousFields":[],"warnings":[],"areaSignal":"역삼","assetType":"오피스빌딩","priceBand":"300억","sizeSignal":"3000평(약 9917.4㎡)","dealType":"매각","buildingName":"역삼 센트럴타워","exactAddress":"역삼동 742-1","totalFloorArea":9917.3,"buildYear":2015,"currentUseSignal":"근린생활시설","vacancySignal":"공실 없음","fitSummary":"초역세권 근생 빌딩으로 시행/사옥 매입에 최적화","cautionSummary":"주요 임차 업종 만기 조율 필요","hiddenFields":["exact_address","seller_motivation"],"confidence":{"areaSignal":"confirmed","assetType":"confirmed","priceBand":"ai_hypothesis","fitSummary":"ai_hypothesis"},"missingData":["sizeSignal"],"boundaryNote":"본 자료는 실거래 통계 기반 참고치입니다.","buyerType":"법인 사옥형","budgetRange":{"min":50,"max":80,"display":"50억~80억"},"preferredRegions":["강남","성수"],"assetTypes":["꼬마빌딩","사옥용"],"purchasePurpose":"사옥용 매입","mustHave":["초역세권","주차"],"niceToHave":["테라스","루프탑"],"riskTolerance":"medium","financingNote":"자본금 50% 준비","missingQuestions":["구체적인 입주 시기가 언제인가요?","선호하는 수익률이 있나요?"],"privacyNotes":["연락처 비공개"],"fitReasons":["매수자 예산(50-80억)에 부합하는 매물입니다.","요청하신 성수/강남 권역에 해당합니다."],"cautionReasons":["요청한 용도와 달리 명도 협의가 다소 필요합니다."],"recommendedNextAction":"현장 답사 제안","kakaoMessage":"안녕하세요! 요청하신 조건에 부합하는 추천 매물이 있어 안내해 드립니다. 확인해보시고 피드백 부탁드립니다.","title":"강남 역삼역 초역세권 오피스 사옥용 빌딩 매각","shortSummary":"역삼역 도보 5분 거리의 준신축급 대형 오피스빌딩입니다.","dealPoints":["초역세권","사옥 최적"],"cautionPoints":["명도 조율 필요"],"hiddenInfoNotice":["보증금 및 지번은 인가 후 확인 가능"],"gateMessage":"G1 등급 등록이 필요합니다.","kakaoText":"강남 역삼역 오피스 빌딩 매각 안내입니다.","exactUnitCandidate":"101호","floor":"1층","areaSqmText":"150㎡","spaceType":"office","depositText":"5000만","monthlyRentText":"400만","maintenanceFeeText":"50만","availableFromText":"즉시입주","leaseTermMonthsText":"24","incentivesText":"렌트프리 2개월","restrictions":[],"landlordIdentity":"김성수","currentTenant":"스타트업","vacancyReason":"이전 확장","rentNegotiation":"협의 가능","region":"성수동","areaSqm":150,"deposit":5000,"monthlyRent":400,"maintenanceFee":50,"availableFrom":"즉시입주","leaseTermMonths":24,"incentives":{"rentFreeMonths":2,"interiorSupport":"일부 인테리어 지원","freeRentDetail":"렌트프리 2개월 지원"},"shortSummaryLease":"성수역 도보 5분 거리 1층 리테일 상가 매물입니다."}</a:t>
-            </a:r>
-            <a:endParaRPr lang="en-US" sz="1000" dirty="0"/>
           </a:p>
         </p:txBody>
       </p:sp>
@@ -5638,7 +5791,7 @@
                 <a:ea typeface="Pretendard" pitchFamily="34" charset="-122"/>
                 <a:cs typeface="Pretendard" pitchFamily="34" charset="-120"/>
               </a:rPr>
-              <a:t>true,"mocked":true,"extractedFields":{"area_signal":"역삼","asset_type":"오피스빌딩","price_band":"300억","size_signal":"3000평(약 9917.4㎡)"},"extractedFacts":{"region":"역삼","exactAddressCandidate":"역삼동 742-1","assetType":"오피스빌딩","priceText":"300억","sizeText":"3000평(약 9917.4㎡)","currentUse":"오피스","currentUseSignal":"근린생활시설","leaseSignal":"임대중","vacancySignal":"공실없음","tenantNames":"쿠팡","네이버","unitRentTexts":"301호: 1500만","sellerMotivationText":"자산 효율화","brokerNotes":"초역세권 매물"},"detectedSensitiveFields":"exact_address","tenant_name","ambiguousFields":,"warnings":,"areaSignal":"역삼","assetType":"오피스빌딩","priceBand":"300억","sizeSignal":"3000평(약 9917.4㎡)","dealType":"매각","buildingName":"역삼 센트럴타워","exactAddress":"역삼동 742-1","totalFloorArea":9917.3,"buildYear":2015,"currentUseSignal":"근린생활시설","vacancySignal":"공실 없음","fitSummary":"초역세권 근생 빌딩으로 시행/사옥 매입에 최적화","cautionSummary":"주요 임차 업종 만기 조율 필요","hiddenFields":"exact_address","seller_motivation","confidence":{"areaSignal":"confirmed","assetType":"confirmed","priceBand":"ai_hypothesis","fitSummary":"ai_hypothesis"},"missingData":"sizeSignal","boundaryNote":"본 자료는 실거래 통계 기반 참고치입니다.","buyerType":"법인 사옥형","budgetRange":{"min":50,"max":80,"display":"50억~80억"},"preferredRegions":"강남","성수","assetTypes":"꼬마빌딩","사옥용","purchasePurpose":"사옥용 매입","mustHave":"초역세권","주차","niceToHave":"테라스","루프탑","riskTolerance":"medium","financingNote":"자본금 50% 준비","missingQuestions":"구체적인 입주 시기가 언제인가요?","선호하는 수익률이 있나요?","privacyNotes":"연락처 비공개","fitReasons":"매수자 예산(50-80억)에 부합하는 매물입니다.","요청하신 성수/강남 권역에 해당합니다.","cautionReasons":"요청한 용도와 달리 명도 협의가 다소 필요합니다.","recommendedNextAction":"현장 답사 제안","kakaoMessage":"안녕하세요! 요청하신 조건에 부합하는 추천 매물이 있어 안내해 드립니다. 확인해보시고 피드백 부탁드립니다.","title":"강남 역삼역 초역세권 오피스 사옥용 빌딩 매각","shortSummary":"역삼역 도보 5분 거리의 준신축급 대형 오피스빌딩입니다.","dealPoints":"초역세권","사옥 최적","cautionPoints":"명도 조율 필요","hiddenInfoNotice":"보증금 및 지번은 인가 후 확인 가능","gateMessage":"G1 등급 등록이 필요합니다.","kakaoText":"강남 역삼역 오피스 빌딩 매각 안내입니다.","exactUnitCandidate":"101호","floor":"1층","areaSqmText":"150㎡","spaceType":"office","depositText":"5000만","monthlyRentText":"400만","maintenanceFeeText":"50만","availableFromText":"즉시입주","leaseTermMonthsText":"24","incentivesText":"렌트프리 2개월","restrictions":,"landlordIdentity":"김성수","currentTenant":"스타트업","vacancyReason":"이전 확장","rentNegotiation":"협의 가능","region":"성수동","areaSqm":150,"deposit":5000,"monthlyRent":400,"maintenanceFee":50,"availableFrom":"즉시입주","leaseTermMonths":24,"incentives":{"rentFreeMonths":2,"interiorSupport":"일부 인테리어 지원","freeRentDetail":"렌트프리 2개월 지원"},"shortSummaryLease":"성수역 도보 5분 거리 1층 리테일 상가 매물입니다."}</a:t>
+              <a:t>true,"mocked":true,"extractedFields":{"area_signal":"역삼","asset_type":"오피스빌딩","price_band":"300억","size_signal":"3000평(약 9917.4㎡)"},"extractedFacts":{"region":"역삼","exactAddressCandidate":"역삼동 742-1","assetType":"오피스빌딩","priceText":"300억","sizeText":"3000평(약 9917.4㎡)","currentUse":"오피스","currentUseSignal":"근린생활시설","leaseSignal":"임대중","vacancySignal":"공실없음","tenantNames":"쿠팡","네이버","unitRentTexts":"301호: 1500만","sellerMotivationText":"자산 효율화","brokerNotes":"초역세권 매물"},"detectedSensitiveFields":"exact_address","tenant_name","ambiguousFields":,"warnings":,"areaSignal":"역삼","assetType":"오피스빌딩","priceBand":"300억","sizeSignal":"3000평(약 9917.4㎡)","dealType":"매각","buildingName":"역삼 센트럴타워","exactAddress":"역삼동 742-1","totalFloorArea":9917.3,"buildYear":2015,"currentUseSignal":"근린생활시설","vacancySignal":"공실 없음","fitSummary":"초역세권 근생 빌딩으로 시행/사옥 매입에 최적화","cautionSummary":"주요 임차인 만기 조율 필요","hiddenFields":"exact_address","seller_motivation","confidence":{"areaSignal":"confirmed","assetType":"confirmed","priceBand":"ai_hypothesis","fitSummary":"ai_hypothesis"},"missingData":"sizeSignal","boundaryNote":"본 자료는 실거래 통계 기반 참고치입니다.","buyerType":"법인 사옥형","budgetRange":{"min":50,"max":80,"display":"50억~80억"},"preferredRegions":"강남","성수","assetTypes":"꼬마빌딩","사옥용","purchasePurpose":"사옥용 매입","mustHave":"초역세권","주차","niceToHave":"테라스","루프탑","riskTolerance":"medium","financingNote":"자본금 50% 준비","missingQuestions":"구체적인 입주 시기가 언제인가요?","선호하는 수익률이 있나요?","privacyNotes":"연락처 비공개","fitReasons":"매수자 예산(50-80억)에 부합하는 매물입니다.","요청하신 성수/강남 권역에 해당합니다.","cautionReasons":"요청한 용도와 달리 명도 협의가 다소 필요합니다.","recommendedNextAction":"현장 답사 제안","kakaoMessage":"안녕하세요! 요청하신 조건에 부합하는 추천 매물이 있어 안내해 드립니다. 확인해보시고 피드백 부탁드립니다.","title":"강남 역삼역 초역세권 오피스 사옥용 빌딩 매각","shortSummary":"역삼역 도보 5분 거리의 준신축급 대형 오피스빌딩입니다.","dealPoints":"초역세권","사옥 최적","cautionPoints":"명도 조율 필요","hiddenInfoNotice":"보증금 및 지번은 인가 후 확인 가능","gateMessage":"G1 등급 등록이 필요합니다.","kakaoText":"강남 역삼역 오피스 빌딩 매각 안내입니다.","exactUnitCandidate":"101호","floor":"1층","areaSqmText":"150㎡","spaceType":"office","depositText":"5000만","monthlyRentText":"400만","maintenanceFeeText":"50만","availableFromText":"즉시입주","leaseTermMonthsText":"24","incentivesText":"렌트프리 2개월","restrictions":,"landlordIdentity":"김성수","currentTenant":"스타트업","vacancyReason":"이전 확장","rentNegotiation":"협의 가능","region":"성수동","areaSqm":150,"deposit":5000,"monthlyRent":400,"maintenanceFee":50,"availableFrom":"즉시입주","leaseTermMonths":24,"incentives":{"rentFreeMonths":2,"interiorSupport":"일부 인테리어 지원","freeRentDetail":"렌트프리 2개월 지원"},"shortSummaryLease":"성수역 도보 5분 거리 1층 리테일 상가 매물입니다."}</a:t>
             </a:r>
             <a:endParaRPr lang="en-US" sz="1400" dirty="0"/>
           </a:p>
@@ -6026,16 +6179,974 @@
           </a:p>
         </p:txBody>
       </p:sp>
-      <p:sp>
-        <p:nvSpPr>
-          <p:cNvPr id="6" name="Text 4"/>
-          <p:cNvSpPr/>
-          <p:nvPr/>
-        </p:nvSpPr>
-        <p:spPr>
-          <a:xfrm>
-            <a:off x="566928" y="1645920"/>
-            <a:ext cx="4201979" cy="402336"/>
+      <p:graphicFrame>
+        <p:nvGraphicFramePr>
+          <p:cNvPr id="6" name="Table 0"/>
+          <p:cNvGraphicFramePr>
+            <a:graphicFrameLocks noGrp="1"/>
+          </p:cNvGraphicFramePr>
+          <p:nvPr>
+            <p:extLst>
+              <p:ext uri="{D42A27DB-BD31-4B8C-83A1-F6EECF244321}">
+                <p14:modId xmlns:p14="http://schemas.microsoft.com/office/powerpoint/2010/main" val="1579011935"/>
+              </p:ext>
+            </p:extLst>
+          </p:nvPr>
+        </p:nvGraphicFramePr>
+        <p:xfrm>
+          <a:off x="566928" y="1645920"/>
+          <a:ext cx="11057839" cy="914400"/>
+        </p:xfrm>
+        <a:graphic>
+          <a:graphicData uri="http://schemas.openxmlformats.org/drawingml/2006/table">
+            <a:tbl>
+              <a:tblPr/>
+              <a:tblGrid>
+                <a:gridCol w="5528920"/>
+                <a:gridCol w="5528920"/>
+              </a:tblGrid>
+              <a:tr h="438912">
+                <a:tc>
+                  <a:txBody>
+                    <a:bodyPr/>
+                    <a:lstStyle/>
+                    <a:p>
+                      <a:pPr indent="0" marL="0">
+                        <a:buNone/>
+                      </a:pPr>
+                      <a:r>
+                        <a:rPr lang="en-US" sz="1300" b="1" dirty="0">
+                          <a:solidFill>
+                            <a:srgbClr val="718096"/>
+                          </a:solidFill>
+                          <a:latin typeface="Pretendard" pitchFamily="34" charset="0"/>
+                          <a:ea typeface="Pretendard" pitchFamily="34" charset="-122"/>
+                          <a:cs typeface="Pretendard" pitchFamily="34" charset="-120"/>
+                        </a:rPr>
+                        <a:t>항목</a:t>
+                      </a:r>
+                      <a:endParaRPr lang="en-US" sz="1300" dirty="0">
+                        <a:latin typeface="Pretendard" charset="0"/>
+                        <a:ea typeface="Pretendard" charset="0"/>
+                        <a:cs typeface="Pretendard" charset="0"/>
+                      </a:endParaRPr>
+                    </a:p>
+                  </a:txBody>
+                  <a:tcPr marL="50800" marR="50800" marT="25400" marB="25400" anchor="ctr">
+                    <a:lnL w="3810" cap="flat" cmpd="sng" algn="ctr">
+                      <a:solidFill>
+                        <a:srgbClr val="CBD5E0"/>
+                      </a:solidFill>
+                      <a:prstDash val="solid"/>
+                      <a:round/>
+                      <a:headEnd type="none" w="med" len="med"/>
+                      <a:tailEnd type="none" w="med" len="med"/>
+                    </a:lnL>
+                    <a:lnR w="3810" cap="flat" cmpd="sng" algn="ctr">
+                      <a:solidFill>
+                        <a:srgbClr val="CBD5E0"/>
+                      </a:solidFill>
+                      <a:prstDash val="solid"/>
+                      <a:round/>
+                      <a:headEnd type="none" w="med" len="med"/>
+                      <a:tailEnd type="none" w="med" len="med"/>
+                    </a:lnR>
+                    <a:lnT w="3810" cap="flat" cmpd="sng" algn="ctr">
+                      <a:solidFill>
+                        <a:srgbClr val="CBD5E0"/>
+                      </a:solidFill>
+                      <a:prstDash val="solid"/>
+                      <a:round/>
+                      <a:headEnd type="none" w="med" len="med"/>
+                      <a:tailEnd type="none" w="med" len="med"/>
+                    </a:lnT>
+                    <a:lnB w="3810" cap="flat" cmpd="sng" algn="ctr">
+                      <a:solidFill>
+                        <a:srgbClr val="CBD5E0"/>
+                      </a:solidFill>
+                      <a:prstDash val="solid"/>
+                      <a:round/>
+                      <a:headEnd type="none" w="med" len="med"/>
+                      <a:tailEnd type="none" w="med" len="med"/>
+                    </a:lnB>
+                    <a:solidFill>
+                      <a:srgbClr val="F7FAFC"/>
+                    </a:solidFill>
+                  </a:tcPr>
+                </a:tc>
+                <a:tc>
+                  <a:txBody>
+                    <a:bodyPr/>
+                    <a:lstStyle/>
+                    <a:p>
+                      <a:pPr indent="0" marL="0">
+                        <a:buNone/>
+                      </a:pPr>
+                      <a:r>
+                        <a:rPr lang="en-US" sz="1300" b="1" dirty="0">
+                          <a:solidFill>
+                            <a:srgbClr val="718096"/>
+                          </a:solidFill>
+                          <a:latin typeface="Pretendard" pitchFamily="34" charset="0"/>
+                          <a:ea typeface="Pretendard" pitchFamily="34" charset="-122"/>
+                          <a:cs typeface="Pretendard" pitchFamily="34" charset="-120"/>
+                        </a:rPr>
+                        <a:t>내용</a:t>
+                      </a:r>
+                      <a:endParaRPr lang="en-US" sz="1300" dirty="0">
+                        <a:latin typeface="Pretendard" charset="0"/>
+                        <a:ea typeface="Pretendard" charset="0"/>
+                        <a:cs typeface="Pretendard" charset="0"/>
+                      </a:endParaRPr>
+                    </a:p>
+                  </a:txBody>
+                  <a:tcPr marL="50800" marR="50800" marT="25400" marB="25400" anchor="ctr">
+                    <a:lnL w="3810" cap="flat" cmpd="sng" algn="ctr">
+                      <a:solidFill>
+                        <a:srgbClr val="CBD5E0"/>
+                      </a:solidFill>
+                      <a:prstDash val="solid"/>
+                      <a:round/>
+                      <a:headEnd type="none" w="med" len="med"/>
+                      <a:tailEnd type="none" w="med" len="med"/>
+                    </a:lnL>
+                    <a:lnR w="3810" cap="flat" cmpd="sng" algn="ctr">
+                      <a:solidFill>
+                        <a:srgbClr val="CBD5E0"/>
+                      </a:solidFill>
+                      <a:prstDash val="solid"/>
+                      <a:round/>
+                      <a:headEnd type="none" w="med" len="med"/>
+                      <a:tailEnd type="none" w="med" len="med"/>
+                    </a:lnR>
+                    <a:lnT w="3810" cap="flat" cmpd="sng" algn="ctr">
+                      <a:solidFill>
+                        <a:srgbClr val="CBD5E0"/>
+                      </a:solidFill>
+                      <a:prstDash val="solid"/>
+                      <a:round/>
+                      <a:headEnd type="none" w="med" len="med"/>
+                      <a:tailEnd type="none" w="med" len="med"/>
+                    </a:lnT>
+                    <a:lnB w="3810" cap="flat" cmpd="sng" algn="ctr">
+                      <a:solidFill>
+                        <a:srgbClr val="CBD5E0"/>
+                      </a:solidFill>
+                      <a:prstDash val="solid"/>
+                      <a:round/>
+                      <a:headEnd type="none" w="med" len="med"/>
+                      <a:tailEnd type="none" w="med" len="med"/>
+                    </a:lnB>
+                    <a:solidFill>
+                      <a:srgbClr val="F7FAFC"/>
+                    </a:solidFill>
+                  </a:tcPr>
+                </a:tc>
+              </a:tr>
+              <a:tr h="438912">
+                <a:tc>
+                  <a:txBody>
+                    <a:bodyPr/>
+                    <a:lstStyle/>
+                    <a:p>
+                      <a:pPr indent="0" marL="0">
+                        <a:buNone/>
+                      </a:pPr>
+                      <a:r>
+                        <a:rPr lang="en-US" sz="1300" b="1" dirty="0">
+                          <a:solidFill>
+                            <a:srgbClr val="10161F"/>
+                          </a:solidFill>
+                          <a:latin typeface="Pretendard" pitchFamily="34" charset="0"/>
+                          <a:ea typeface="Pretendard" pitchFamily="34" charset="-122"/>
+                          <a:cs typeface="Pretendard" pitchFamily="34" charset="-120"/>
+                        </a:rPr>
+                        <a:t>공실 </a:t>
+                      </a:r>
+                      <a:pPr indent="0" marL="0">
+                        <a:buNone/>
+                      </a:pPr>
+                      <a:r>
+                        <a:rPr lang="en-US" sz="1300" b="1" dirty="0">
+                          <a:solidFill>
+                            <a:srgbClr val="10161F"/>
+                          </a:solidFill>
+                          <a:latin typeface="Pretendard" pitchFamily="34" charset="0"/>
+                          <a:ea typeface="Pretendard" pitchFamily="34" charset="-122"/>
+                          <a:cs typeface="Pretendard" pitchFamily="34" charset="-120"/>
+                        </a:rPr>
+                        <a:t>현황</a:t>
+                      </a:r>
+                      <a:endParaRPr lang="en-US" sz="1300" dirty="0">
+                        <a:latin typeface="Pretendard" charset="0"/>
+                        <a:ea typeface="Pretendard" charset="0"/>
+                        <a:cs typeface="Pretendard" charset="0"/>
+                      </a:endParaRPr>
+                    </a:p>
+                  </a:txBody>
+                  <a:tcPr marL="50800" marR="50800" marT="25400" marB="25400" anchor="ctr">
+                    <a:lnL w="3810" cap="flat" cmpd="sng" algn="ctr">
+                      <a:solidFill>
+                        <a:srgbClr val="CBD5E0"/>
+                      </a:solidFill>
+                      <a:prstDash val="solid"/>
+                      <a:round/>
+                      <a:headEnd type="none" w="med" len="med"/>
+                      <a:tailEnd type="none" w="med" len="med"/>
+                    </a:lnL>
+                    <a:lnR w="3810" cap="flat" cmpd="sng" algn="ctr">
+                      <a:solidFill>
+                        <a:srgbClr val="CBD5E0"/>
+                      </a:solidFill>
+                      <a:prstDash val="solid"/>
+                      <a:round/>
+                      <a:headEnd type="none" w="med" len="med"/>
+                      <a:tailEnd type="none" w="med" len="med"/>
+                    </a:lnR>
+                    <a:lnT w="3810" cap="flat" cmpd="sng" algn="ctr">
+                      <a:solidFill>
+                        <a:srgbClr val="CBD5E0"/>
+                      </a:solidFill>
+                      <a:prstDash val="solid"/>
+                      <a:round/>
+                      <a:headEnd type="none" w="med" len="med"/>
+                      <a:tailEnd type="none" w="med" len="med"/>
+                    </a:lnT>
+                    <a:lnB w="3810" cap="flat" cmpd="sng" algn="ctr">
+                      <a:solidFill>
+                        <a:srgbClr val="CBD5E0"/>
+                      </a:solidFill>
+                      <a:prstDash val="solid"/>
+                      <a:round/>
+                      <a:headEnd type="none" w="med" len="med"/>
+                      <a:tailEnd type="none" w="med" len="med"/>
+                    </a:lnB>
+                    <a:solidFill>
+                      <a:srgbClr val="FFFFFF"/>
+                    </a:solidFill>
+                  </a:tcPr>
+                </a:tc>
+                <a:tc>
+                  <a:txBody>
+                    <a:bodyPr/>
+                    <a:lstStyle/>
+                    <a:p>
+                      <a:pPr indent="0" marL="0">
+                        <a:buNone/>
+                      </a:pPr>
+                      <a:r>
+                        <a:rPr lang="en-US" sz="1300" dirty="0">
+                          <a:solidFill>
+                            <a:srgbClr val="10161F"/>
+                          </a:solidFill>
+                          <a:latin typeface="Pretendard" pitchFamily="34" charset="0"/>
+                          <a:ea typeface="Pretendard" pitchFamily="34" charset="-122"/>
+                          <a:cs typeface="Pretendard" pitchFamily="34" charset="-120"/>
+                        </a:rPr>
+                        <a:t>상세 </a:t>
+                      </a:r>
+                      <a:pPr indent="0" marL="0">
+                        <a:buNone/>
+                      </a:pPr>
+                      <a:r>
+                        <a:rPr lang="en-US" sz="1300" dirty="0">
+                          <a:solidFill>
+                            <a:srgbClr val="10161F"/>
+                          </a:solidFill>
+                          <a:latin typeface="Pretendard" pitchFamily="34" charset="0"/>
+                          <a:ea typeface="Pretendard" pitchFamily="34" charset="-122"/>
+                          <a:cs typeface="Pretendard" pitchFamily="34" charset="-120"/>
+                        </a:rPr>
+                        <a:t>확인 </a:t>
+                      </a:r>
+                      <a:pPr indent="0" marL="0">
+                        <a:buNone/>
+                      </a:pPr>
+                      <a:r>
+                        <a:rPr lang="en-US" sz="1300" dirty="0">
+                          <a:solidFill>
+                            <a:srgbClr val="10161F"/>
+                          </a:solidFill>
+                          <a:latin typeface="Pretendard" pitchFamily="34" charset="0"/>
+                          <a:ea typeface="Pretendard" pitchFamily="34" charset="-122"/>
+                          <a:cs typeface="Pretendard" pitchFamily="34" charset="-120"/>
+                        </a:rPr>
+                        <a:t>필요</a:t>
+                      </a:r>
+                      <a:endParaRPr lang="en-US" sz="1300" dirty="0">
+                        <a:latin typeface="Pretendard" charset="0"/>
+                        <a:ea typeface="Pretendard" charset="0"/>
+                        <a:cs typeface="Pretendard" charset="0"/>
+                      </a:endParaRPr>
+                    </a:p>
+                  </a:txBody>
+                  <a:tcPr marL="50800" marR="50800" marT="25400" marB="25400" anchor="ctr">
+                    <a:lnL w="3810" cap="flat" cmpd="sng" algn="ctr">
+                      <a:solidFill>
+                        <a:srgbClr val="CBD5E0"/>
+                      </a:solidFill>
+                      <a:prstDash val="solid"/>
+                      <a:round/>
+                      <a:headEnd type="none" w="med" len="med"/>
+                      <a:tailEnd type="none" w="med" len="med"/>
+                    </a:lnL>
+                    <a:lnR w="3810" cap="flat" cmpd="sng" algn="ctr">
+                      <a:solidFill>
+                        <a:srgbClr val="CBD5E0"/>
+                      </a:solidFill>
+                      <a:prstDash val="solid"/>
+                      <a:round/>
+                      <a:headEnd type="none" w="med" len="med"/>
+                      <a:tailEnd type="none" w="med" len="med"/>
+                    </a:lnR>
+                    <a:lnT w="3810" cap="flat" cmpd="sng" algn="ctr">
+                      <a:solidFill>
+                        <a:srgbClr val="CBD5E0"/>
+                      </a:solidFill>
+                      <a:prstDash val="solid"/>
+                      <a:round/>
+                      <a:headEnd type="none" w="med" len="med"/>
+                      <a:tailEnd type="none" w="med" len="med"/>
+                    </a:lnT>
+                    <a:lnB w="3810" cap="flat" cmpd="sng" algn="ctr">
+                      <a:solidFill>
+                        <a:srgbClr val="CBD5E0"/>
+                      </a:solidFill>
+                      <a:prstDash val="solid"/>
+                      <a:round/>
+                      <a:headEnd type="none" w="med" len="med"/>
+                      <a:tailEnd type="none" w="med" len="med"/>
+                    </a:lnB>
+                    <a:solidFill>
+                      <a:srgbClr val="FFFFFF"/>
+                    </a:solidFill>
+                  </a:tcPr>
+                </a:tc>
+              </a:tr>
+              <a:tr h="438912">
+                <a:tc>
+                  <a:txBody>
+                    <a:bodyPr/>
+                    <a:lstStyle/>
+                    <a:p>
+                      <a:pPr indent="0" marL="0">
+                        <a:buNone/>
+                      </a:pPr>
+                      <a:r>
+                        <a:rPr lang="en-US" sz="1300" b="1" dirty="0">
+                          <a:solidFill>
+                            <a:srgbClr val="10161F"/>
+                          </a:solidFill>
+                          <a:latin typeface="Pretendard" pitchFamily="34" charset="0"/>
+                          <a:ea typeface="Pretendard" pitchFamily="34" charset="-122"/>
+                          <a:cs typeface="Pretendard" pitchFamily="34" charset="-120"/>
+                        </a:rPr>
+                        <a:t>월 </a:t>
+                      </a:r>
+                      <a:pPr indent="0" marL="0">
+                        <a:buNone/>
+                      </a:pPr>
+                      <a:r>
+                        <a:rPr lang="en-US" sz="1300" b="1" dirty="0">
+                          <a:solidFill>
+                            <a:srgbClr val="10161F"/>
+                          </a:solidFill>
+                          <a:latin typeface="Pretendard" pitchFamily="34" charset="0"/>
+                          <a:ea typeface="Pretendard" pitchFamily="34" charset="-122"/>
+                          <a:cs typeface="Pretendard" pitchFamily="34" charset="-120"/>
+                        </a:rPr>
+                        <a:t>임대료 </a:t>
+                      </a:r>
+                      <a:pPr indent="0" marL="0">
+                        <a:buNone/>
+                      </a:pPr>
+                      <a:r>
+                        <a:rPr lang="en-US" sz="1300" b="1" dirty="0">
+                          <a:solidFill>
+                            <a:srgbClr val="10161F"/>
+                          </a:solidFill>
+                          <a:latin typeface="Pretendard" pitchFamily="34" charset="0"/>
+                          <a:ea typeface="Pretendard" pitchFamily="34" charset="-122"/>
+                          <a:cs typeface="Pretendard" pitchFamily="34" charset="-120"/>
+                        </a:rPr>
+                        <a:t>합계</a:t>
+                      </a:r>
+                      <a:endParaRPr lang="en-US" sz="1300" dirty="0">
+                        <a:latin typeface="Pretendard" charset="0"/>
+                        <a:ea typeface="Pretendard" charset="0"/>
+                        <a:cs typeface="Pretendard" charset="0"/>
+                      </a:endParaRPr>
+                    </a:p>
+                  </a:txBody>
+                  <a:tcPr marL="50800" marR="50800" marT="25400" marB="25400" anchor="ctr">
+                    <a:lnL w="3810" cap="flat" cmpd="sng" algn="ctr">
+                      <a:solidFill>
+                        <a:srgbClr val="CBD5E0"/>
+                      </a:solidFill>
+                      <a:prstDash val="solid"/>
+                      <a:round/>
+                      <a:headEnd type="none" w="med" len="med"/>
+                      <a:tailEnd type="none" w="med" len="med"/>
+                    </a:lnL>
+                    <a:lnR w="3810" cap="flat" cmpd="sng" algn="ctr">
+                      <a:solidFill>
+                        <a:srgbClr val="CBD5E0"/>
+                      </a:solidFill>
+                      <a:prstDash val="solid"/>
+                      <a:round/>
+                      <a:headEnd type="none" w="med" len="med"/>
+                      <a:tailEnd type="none" w="med" len="med"/>
+                    </a:lnR>
+                    <a:lnT w="3810" cap="flat" cmpd="sng" algn="ctr">
+                      <a:solidFill>
+                        <a:srgbClr val="CBD5E0"/>
+                      </a:solidFill>
+                      <a:prstDash val="solid"/>
+                      <a:round/>
+                      <a:headEnd type="none" w="med" len="med"/>
+                      <a:tailEnd type="none" w="med" len="med"/>
+                    </a:lnT>
+                    <a:lnB w="3810" cap="flat" cmpd="sng" algn="ctr">
+                      <a:solidFill>
+                        <a:srgbClr val="CBD5E0"/>
+                      </a:solidFill>
+                      <a:prstDash val="solid"/>
+                      <a:round/>
+                      <a:headEnd type="none" w="med" len="med"/>
+                      <a:tailEnd type="none" w="med" len="med"/>
+                    </a:lnB>
+                    <a:solidFill>
+                      <a:srgbClr val="F7FAFC"/>
+                    </a:solidFill>
+                  </a:tcPr>
+                </a:tc>
+                <a:tc>
+                  <a:txBody>
+                    <a:bodyPr/>
+                    <a:lstStyle/>
+                    <a:p>
+                      <a:pPr indent="0" marL="0">
+                        <a:buNone/>
+                      </a:pPr>
+                      <a:r>
+                        <a:rPr lang="en-US" sz="1300" dirty="0">
+                          <a:solidFill>
+                            <a:srgbClr val="10161F"/>
+                          </a:solidFill>
+                          <a:latin typeface="Pretendard" pitchFamily="34" charset="0"/>
+                          <a:ea typeface="Pretendard" pitchFamily="34" charset="-122"/>
+                          <a:cs typeface="Pretendard" pitchFamily="34" charset="-120"/>
+                        </a:rPr>
+                        <a:t>약 </a:t>
+                      </a:r>
+                      <a:pPr indent="0" marL="0">
+                        <a:buNone/>
+                      </a:pPr>
+                      <a:r>
+                        <a:rPr lang="en-US" sz="1300" dirty="0">
+                          <a:solidFill>
+                            <a:srgbClr val="10161F"/>
+                          </a:solidFill>
+                          <a:latin typeface="Pretendard" pitchFamily="34" charset="0"/>
+                          <a:ea typeface="Pretendard" pitchFamily="34" charset="-122"/>
+                          <a:cs typeface="Pretendard" pitchFamily="34" charset="-120"/>
+                        </a:rPr>
+                        <a:t>2200만 </a:t>
+                      </a:r>
+                      <a:pPr indent="0" marL="0">
+                        <a:buNone/>
+                      </a:pPr>
+                      <a:r>
+                        <a:rPr lang="en-US" sz="1300" dirty="0">
+                          <a:solidFill>
+                            <a:srgbClr val="10161F"/>
+                          </a:solidFill>
+                          <a:latin typeface="Pretendard" pitchFamily="34" charset="0"/>
+                          <a:ea typeface="Pretendard" pitchFamily="34" charset="-122"/>
+                          <a:cs typeface="Pretendard" pitchFamily="34" charset="-120"/>
+                        </a:rPr>
+                        <a:t>원/월 </a:t>
+                      </a:r>
+                      <a:pPr indent="0" marL="0">
+                        <a:buNone/>
+                      </a:pPr>
+                      <a:r>
+                        <a:rPr lang="en-US" sz="1300" dirty="0">
+                          <a:solidFill>
+                            <a:srgbClr val="10161F"/>
+                          </a:solidFill>
+                          <a:latin typeface="Pretendard" pitchFamily="34" charset="0"/>
+                          <a:ea typeface="Pretendard" pitchFamily="34" charset="-122"/>
+                          <a:cs typeface="Pretendard" pitchFamily="34" charset="-120"/>
+                        </a:rPr>
+                        <a:t>(추정)</a:t>
+                      </a:r>
+                      <a:endParaRPr lang="en-US" sz="1300" dirty="0">
+                        <a:latin typeface="Pretendard" charset="0"/>
+                        <a:ea typeface="Pretendard" charset="0"/>
+                        <a:cs typeface="Pretendard" charset="0"/>
+                      </a:endParaRPr>
+                    </a:p>
+                  </a:txBody>
+                  <a:tcPr marL="50800" marR="50800" marT="25400" marB="25400" anchor="ctr">
+                    <a:lnL w="3810" cap="flat" cmpd="sng" algn="ctr">
+                      <a:solidFill>
+                        <a:srgbClr val="CBD5E0"/>
+                      </a:solidFill>
+                      <a:prstDash val="solid"/>
+                      <a:round/>
+                      <a:headEnd type="none" w="med" len="med"/>
+                      <a:tailEnd type="none" w="med" len="med"/>
+                    </a:lnL>
+                    <a:lnR w="3810" cap="flat" cmpd="sng" algn="ctr">
+                      <a:solidFill>
+                        <a:srgbClr val="CBD5E0"/>
+                      </a:solidFill>
+                      <a:prstDash val="solid"/>
+                      <a:round/>
+                      <a:headEnd type="none" w="med" len="med"/>
+                      <a:tailEnd type="none" w="med" len="med"/>
+                    </a:lnR>
+                    <a:lnT w="3810" cap="flat" cmpd="sng" algn="ctr">
+                      <a:solidFill>
+                        <a:srgbClr val="CBD5E0"/>
+                      </a:solidFill>
+                      <a:prstDash val="solid"/>
+                      <a:round/>
+                      <a:headEnd type="none" w="med" len="med"/>
+                      <a:tailEnd type="none" w="med" len="med"/>
+                    </a:lnT>
+                    <a:lnB w="3810" cap="flat" cmpd="sng" algn="ctr">
+                      <a:solidFill>
+                        <a:srgbClr val="CBD5E0"/>
+                      </a:solidFill>
+                      <a:prstDash val="solid"/>
+                      <a:round/>
+                      <a:headEnd type="none" w="med" len="med"/>
+                      <a:tailEnd type="none" w="med" len="med"/>
+                    </a:lnB>
+                    <a:solidFill>
+                      <a:srgbClr val="F7FAFC"/>
+                    </a:solidFill>
+                  </a:tcPr>
+                </a:tc>
+              </a:tr>
+              <a:tr h="438912">
+                <a:tc>
+                  <a:txBody>
+                    <a:bodyPr/>
+                    <a:lstStyle/>
+                    <a:p>
+                      <a:pPr indent="0" marL="0">
+                        <a:buNone/>
+                      </a:pPr>
+                      <a:r>
+                        <a:rPr lang="en-US" sz="1300" b="1" dirty="0">
+                          <a:solidFill>
+                            <a:srgbClr val="10161F"/>
+                          </a:solidFill>
+                          <a:latin typeface="Pretendard" pitchFamily="34" charset="0"/>
+                          <a:ea typeface="Pretendard" pitchFamily="34" charset="-122"/>
+                          <a:cs typeface="Pretendard" pitchFamily="34" charset="-120"/>
+                        </a:rPr>
+                        <a:t>연 </a:t>
+                      </a:r>
+                      <a:pPr indent="0" marL="0">
+                        <a:buNone/>
+                      </a:pPr>
+                      <a:r>
+                        <a:rPr lang="en-US" sz="1300" b="1" dirty="0">
+                          <a:solidFill>
+                            <a:srgbClr val="10161F"/>
+                          </a:solidFill>
+                          <a:latin typeface="Pretendard" pitchFamily="34" charset="0"/>
+                          <a:ea typeface="Pretendard" pitchFamily="34" charset="-122"/>
+                          <a:cs typeface="Pretendard" pitchFamily="34" charset="-120"/>
+                        </a:rPr>
+                        <a:t>임대 </a:t>
+                      </a:r>
+                      <a:pPr indent="0" marL="0">
+                        <a:buNone/>
+                      </a:pPr>
+                      <a:r>
+                        <a:rPr lang="en-US" sz="1300" b="1" dirty="0">
+                          <a:solidFill>
+                            <a:srgbClr val="10161F"/>
+                          </a:solidFill>
+                          <a:latin typeface="Pretendard" pitchFamily="34" charset="0"/>
+                          <a:ea typeface="Pretendard" pitchFamily="34" charset="-122"/>
+                          <a:cs typeface="Pretendard" pitchFamily="34" charset="-120"/>
+                        </a:rPr>
+                        <a:t>수입</a:t>
+                      </a:r>
+                      <a:endParaRPr lang="en-US" sz="1300" dirty="0">
+                        <a:latin typeface="Pretendard" charset="0"/>
+                        <a:ea typeface="Pretendard" charset="0"/>
+                        <a:cs typeface="Pretendard" charset="0"/>
+                      </a:endParaRPr>
+                    </a:p>
+                  </a:txBody>
+                  <a:tcPr marL="50800" marR="50800" marT="25400" marB="25400" anchor="ctr">
+                    <a:lnL w="3810" cap="flat" cmpd="sng" algn="ctr">
+                      <a:solidFill>
+                        <a:srgbClr val="CBD5E0"/>
+                      </a:solidFill>
+                      <a:prstDash val="solid"/>
+                      <a:round/>
+                      <a:headEnd type="none" w="med" len="med"/>
+                      <a:tailEnd type="none" w="med" len="med"/>
+                    </a:lnL>
+                    <a:lnR w="3810" cap="flat" cmpd="sng" algn="ctr">
+                      <a:solidFill>
+                        <a:srgbClr val="CBD5E0"/>
+                      </a:solidFill>
+                      <a:prstDash val="solid"/>
+                      <a:round/>
+                      <a:headEnd type="none" w="med" len="med"/>
+                      <a:tailEnd type="none" w="med" len="med"/>
+                    </a:lnR>
+                    <a:lnT w="3810" cap="flat" cmpd="sng" algn="ctr">
+                      <a:solidFill>
+                        <a:srgbClr val="CBD5E0"/>
+                      </a:solidFill>
+                      <a:prstDash val="solid"/>
+                      <a:round/>
+                      <a:headEnd type="none" w="med" len="med"/>
+                      <a:tailEnd type="none" w="med" len="med"/>
+                    </a:lnT>
+                    <a:lnB w="3810" cap="flat" cmpd="sng" algn="ctr">
+                      <a:solidFill>
+                        <a:srgbClr val="CBD5E0"/>
+                      </a:solidFill>
+                      <a:prstDash val="solid"/>
+                      <a:round/>
+                      <a:headEnd type="none" w="med" len="med"/>
+                      <a:tailEnd type="none" w="med" len="med"/>
+                    </a:lnB>
+                    <a:solidFill>
+                      <a:srgbClr val="FFFFFF"/>
+                    </a:solidFill>
+                  </a:tcPr>
+                </a:tc>
+                <a:tc>
+                  <a:txBody>
+                    <a:bodyPr/>
+                    <a:lstStyle/>
+                    <a:p>
+                      <a:pPr indent="0" marL="0">
+                        <a:buNone/>
+                      </a:pPr>
+                      <a:r>
+                        <a:rPr lang="en-US" sz="1300" dirty="0">
+                          <a:solidFill>
+                            <a:srgbClr val="10161F"/>
+                          </a:solidFill>
+                          <a:latin typeface="Pretendard" pitchFamily="34" charset="0"/>
+                          <a:ea typeface="Pretendard" pitchFamily="34" charset="-122"/>
+                          <a:cs typeface="Pretendard" pitchFamily="34" charset="-120"/>
+                        </a:rPr>
+                        <a:t>약 </a:t>
+                      </a:r>
+                      <a:pPr indent="0" marL="0">
+                        <a:buNone/>
+                      </a:pPr>
+                      <a:r>
+                        <a:rPr lang="en-US" sz="1300" dirty="0">
+                          <a:solidFill>
+                            <a:srgbClr val="10161F"/>
+                          </a:solidFill>
+                          <a:latin typeface="Pretendard" pitchFamily="34" charset="0"/>
+                          <a:ea typeface="Pretendard" pitchFamily="34" charset="-122"/>
+                          <a:cs typeface="Pretendard" pitchFamily="34" charset="-120"/>
+                        </a:rPr>
+                        <a:t>2.6억 </a:t>
+                      </a:r>
+                      <a:pPr indent="0" marL="0">
+                        <a:buNone/>
+                      </a:pPr>
+                      <a:r>
+                        <a:rPr lang="en-US" sz="1300" dirty="0">
+                          <a:solidFill>
+                            <a:srgbClr val="10161F"/>
+                          </a:solidFill>
+                          <a:latin typeface="Pretendard" pitchFamily="34" charset="0"/>
+                          <a:ea typeface="Pretendard" pitchFamily="34" charset="-122"/>
+                          <a:cs typeface="Pretendard" pitchFamily="34" charset="-120"/>
+                        </a:rPr>
+                        <a:t>원/년 </a:t>
+                      </a:r>
+                      <a:pPr indent="0" marL="0">
+                        <a:buNone/>
+                      </a:pPr>
+                      <a:r>
+                        <a:rPr lang="en-US" sz="1300" dirty="0">
+                          <a:solidFill>
+                            <a:srgbClr val="10161F"/>
+                          </a:solidFill>
+                          <a:latin typeface="Pretendard" pitchFamily="34" charset="0"/>
+                          <a:ea typeface="Pretendard" pitchFamily="34" charset="-122"/>
+                          <a:cs typeface="Pretendard" pitchFamily="34" charset="-120"/>
+                        </a:rPr>
+                        <a:t>(추정)</a:t>
+                      </a:r>
+                      <a:endParaRPr lang="en-US" sz="1300" dirty="0">
+                        <a:latin typeface="Pretendard" charset="0"/>
+                        <a:ea typeface="Pretendard" charset="0"/>
+                        <a:cs typeface="Pretendard" charset="0"/>
+                      </a:endParaRPr>
+                    </a:p>
+                  </a:txBody>
+                  <a:tcPr marL="50800" marR="50800" marT="25400" marB="25400" anchor="ctr">
+                    <a:lnL w="3810" cap="flat" cmpd="sng" algn="ctr">
+                      <a:solidFill>
+                        <a:srgbClr val="CBD5E0"/>
+                      </a:solidFill>
+                      <a:prstDash val="solid"/>
+                      <a:round/>
+                      <a:headEnd type="none" w="med" len="med"/>
+                      <a:tailEnd type="none" w="med" len="med"/>
+                    </a:lnL>
+                    <a:lnR w="3810" cap="flat" cmpd="sng" algn="ctr">
+                      <a:solidFill>
+                        <a:srgbClr val="CBD5E0"/>
+                      </a:solidFill>
+                      <a:prstDash val="solid"/>
+                      <a:round/>
+                      <a:headEnd type="none" w="med" len="med"/>
+                      <a:tailEnd type="none" w="med" len="med"/>
+                    </a:lnR>
+                    <a:lnT w="3810" cap="flat" cmpd="sng" algn="ctr">
+                      <a:solidFill>
+                        <a:srgbClr val="CBD5E0"/>
+                      </a:solidFill>
+                      <a:prstDash val="solid"/>
+                      <a:round/>
+                      <a:headEnd type="none" w="med" len="med"/>
+                      <a:tailEnd type="none" w="med" len="med"/>
+                    </a:lnT>
+                    <a:lnB w="3810" cap="flat" cmpd="sng" algn="ctr">
+                      <a:solidFill>
+                        <a:srgbClr val="CBD5E0"/>
+                      </a:solidFill>
+                      <a:prstDash val="solid"/>
+                      <a:round/>
+                      <a:headEnd type="none" w="med" len="med"/>
+                      <a:tailEnd type="none" w="med" len="med"/>
+                    </a:lnB>
+                    <a:solidFill>
+                      <a:srgbClr val="FFFFFF"/>
+                    </a:solidFill>
+                  </a:tcPr>
+                </a:tc>
+              </a:tr>
+              <a:tr h="438912">
+                <a:tc>
+                  <a:txBody>
+                    <a:bodyPr/>
+                    <a:lstStyle/>
+                    <a:p>
+                      <a:pPr indent="0" marL="0">
+                        <a:buNone/>
+                      </a:pPr>
+                      <a:r>
+                        <a:rPr lang="en-US" sz="1300" b="1" dirty="0">
+                          <a:solidFill>
+                            <a:srgbClr val="10161F"/>
+                          </a:solidFill>
+                          <a:latin typeface="Pretendard" pitchFamily="34" charset="0"/>
+                          <a:ea typeface="Pretendard" pitchFamily="34" charset="-122"/>
+                          <a:cs typeface="Pretendard" pitchFamily="34" charset="-120"/>
+                        </a:rPr>
+                        <a:t>임차인 </a:t>
+                      </a:r>
+                      <a:pPr indent="0" marL="0">
+                        <a:buNone/>
+                      </a:pPr>
+                      <a:r>
+                        <a:rPr lang="en-US" sz="1300" b="1" dirty="0">
+                          <a:solidFill>
+                            <a:srgbClr val="10161F"/>
+                          </a:solidFill>
+                          <a:latin typeface="Pretendard" pitchFamily="34" charset="0"/>
+                          <a:ea typeface="Pretendard" pitchFamily="34" charset="-122"/>
+                          <a:cs typeface="Pretendard" pitchFamily="34" charset="-120"/>
+                        </a:rPr>
+                        <a:t>정보</a:t>
+                      </a:r>
+                      <a:endParaRPr lang="en-US" sz="1300" dirty="0">
+                        <a:latin typeface="Pretendard" charset="0"/>
+                        <a:ea typeface="Pretendard" charset="0"/>
+                        <a:cs typeface="Pretendard" charset="0"/>
+                      </a:endParaRPr>
+                    </a:p>
+                  </a:txBody>
+                  <a:tcPr marL="50800" marR="50800" marT="25400" marB="25400" anchor="ctr">
+                    <a:lnL w="3810" cap="flat" cmpd="sng" algn="ctr">
+                      <a:solidFill>
+                        <a:srgbClr val="CBD5E0"/>
+                      </a:solidFill>
+                      <a:prstDash val="solid"/>
+                      <a:round/>
+                      <a:headEnd type="none" w="med" len="med"/>
+                      <a:tailEnd type="none" w="med" len="med"/>
+                    </a:lnL>
+                    <a:lnR w="3810" cap="flat" cmpd="sng" algn="ctr">
+                      <a:solidFill>
+                        <a:srgbClr val="CBD5E0"/>
+                      </a:solidFill>
+                      <a:prstDash val="solid"/>
+                      <a:round/>
+                      <a:headEnd type="none" w="med" len="med"/>
+                      <a:tailEnd type="none" w="med" len="med"/>
+                    </a:lnR>
+                    <a:lnT w="3810" cap="flat" cmpd="sng" algn="ctr">
+                      <a:solidFill>
+                        <a:srgbClr val="CBD5E0"/>
+                      </a:solidFill>
+                      <a:prstDash val="solid"/>
+                      <a:round/>
+                      <a:headEnd type="none" w="med" len="med"/>
+                      <a:tailEnd type="none" w="med" len="med"/>
+                    </a:lnT>
+                    <a:lnB w="3810" cap="flat" cmpd="sng" algn="ctr">
+                      <a:solidFill>
+                        <a:srgbClr val="CBD5E0"/>
+                      </a:solidFill>
+                      <a:prstDash val="solid"/>
+                      <a:round/>
+                      <a:headEnd type="none" w="med" len="med"/>
+                      <a:tailEnd type="none" w="med" len="med"/>
+                    </a:lnB>
+                    <a:solidFill>
+                      <a:srgbClr val="F7FAFC"/>
+                    </a:solidFill>
+                  </a:tcPr>
+                </a:tc>
+                <a:tc>
+                  <a:txBody>
+                    <a:bodyPr/>
+                    <a:lstStyle/>
+                    <a:p>
+                      <a:pPr indent="0" marL="0">
+                        <a:buNone/>
+                      </a:pPr>
+                      <a:r>
+                        <a:rPr lang="en-US" sz="1300" dirty="0">
+                          <a:solidFill>
+                            <a:srgbClr val="10161F"/>
+                          </a:solidFill>
+                          <a:latin typeface="Pretendard" pitchFamily="34" charset="0"/>
+                          <a:ea typeface="Pretendard" pitchFamily="34" charset="-122"/>
+                          <a:cs typeface="Pretendard" pitchFamily="34" charset="-120"/>
+                        </a:rPr>
+                        <a:t>NDA </a:t>
+                      </a:r>
+                      <a:pPr indent="0" marL="0">
+                        <a:buNone/>
+                      </a:pPr>
+                      <a:r>
+                        <a:rPr lang="en-US" sz="1300" dirty="0">
+                          <a:solidFill>
+                            <a:srgbClr val="10161F"/>
+                          </a:solidFill>
+                          <a:latin typeface="Pretendard" pitchFamily="34" charset="0"/>
+                          <a:ea typeface="Pretendard" pitchFamily="34" charset="-122"/>
+                          <a:cs typeface="Pretendard" pitchFamily="34" charset="-120"/>
+                        </a:rPr>
+                        <a:t>체결 </a:t>
+                      </a:r>
+                      <a:pPr indent="0" marL="0">
+                        <a:buNone/>
+                      </a:pPr>
+                      <a:r>
+                        <a:rPr lang="en-US" sz="1300" dirty="0">
+                          <a:solidFill>
+                            <a:srgbClr val="10161F"/>
+                          </a:solidFill>
+                          <a:latin typeface="Pretendard" pitchFamily="34" charset="0"/>
+                          <a:ea typeface="Pretendard" pitchFamily="34" charset="-122"/>
+                          <a:cs typeface="Pretendard" pitchFamily="34" charset="-120"/>
+                        </a:rPr>
+                        <a:t>후 </a:t>
+                      </a:r>
+                      <a:pPr indent="0" marL="0">
+                        <a:buNone/>
+                      </a:pPr>
+                      <a:r>
+                        <a:rPr lang="en-US" sz="1300" dirty="0">
+                          <a:solidFill>
+                            <a:srgbClr val="10161F"/>
+                          </a:solidFill>
+                          <a:latin typeface="Pretendard" pitchFamily="34" charset="0"/>
+                          <a:ea typeface="Pretendard" pitchFamily="34" charset="-122"/>
+                          <a:cs typeface="Pretendard" pitchFamily="34" charset="-120"/>
+                        </a:rPr>
+                        <a:t>공개</a:t>
+                      </a:r>
+                      <a:endParaRPr lang="en-US" sz="1300" dirty="0">
+                        <a:latin typeface="Pretendard" charset="0"/>
+                        <a:ea typeface="Pretendard" charset="0"/>
+                        <a:cs typeface="Pretendard" charset="0"/>
+                      </a:endParaRPr>
+                    </a:p>
+                  </a:txBody>
+                  <a:tcPr marL="50800" marR="50800" marT="25400" marB="25400" anchor="ctr">
+                    <a:lnL w="3810" cap="flat" cmpd="sng" algn="ctr">
+                      <a:solidFill>
+                        <a:srgbClr val="CBD5E0"/>
+                      </a:solidFill>
+                      <a:prstDash val="solid"/>
+                      <a:round/>
+                      <a:headEnd type="none" w="med" len="med"/>
+                      <a:tailEnd type="none" w="med" len="med"/>
+                    </a:lnL>
+                    <a:lnR w="3810" cap="flat" cmpd="sng" algn="ctr">
+                      <a:solidFill>
+                        <a:srgbClr val="CBD5E0"/>
+                      </a:solidFill>
+                      <a:prstDash val="solid"/>
+                      <a:round/>
+                      <a:headEnd type="none" w="med" len="med"/>
+                      <a:tailEnd type="none" w="med" len="med"/>
+                    </a:lnR>
+                    <a:lnT w="3810" cap="flat" cmpd="sng" algn="ctr">
+                      <a:solidFill>
+                        <a:srgbClr val="CBD5E0"/>
+                      </a:solidFill>
+                      <a:prstDash val="solid"/>
+                      <a:round/>
+                      <a:headEnd type="none" w="med" len="med"/>
+                      <a:tailEnd type="none" w="med" len="med"/>
+                    </a:lnT>
+                    <a:lnB w="3810" cap="flat" cmpd="sng" algn="ctr">
+                      <a:solidFill>
+                        <a:srgbClr val="CBD5E0"/>
+                      </a:solidFill>
+                      <a:prstDash val="solid"/>
+                      <a:round/>
+                      <a:headEnd type="none" w="med" len="med"/>
+                      <a:tailEnd type="none" w="med" len="med"/>
+                    </a:lnB>
+                    <a:solidFill>
+                      <a:srgbClr val="F7FAFC"/>
+                    </a:solidFill>
+                  </a:tcPr>
+                </a:tc>
+              </a:tr>
+            </a:tbl>
+          </a:graphicData>
+        </a:graphic>
+      </p:graphicFrame>
+      <p:sp>
+        <p:nvSpPr>
+          <p:cNvPr id="7" name="Text 4"/>
+          <p:cNvSpPr/>
+          <p:nvPr/>
+        </p:nvSpPr>
+        <p:spPr>
+          <a:xfrm>
+            <a:off x="566928" y="6382512"/>
+            <a:ext cx="7315200" cy="219456"/>
           </a:xfrm>
           <a:prstGeom prst="rect">
             <a:avLst/>
@@ -6048,13 +7159,10 @@
           <a:lstStyle/>
           <a:p>
             <a:pPr indent="0" marL="0">
-              <a:lnSpc>
-                <a:spcPct val="120000"/>
-              </a:lnSpc>
-              <a:buNone/>
-            </a:pPr>
-            <a:r>
-              <a:rPr lang="en-US" sz="1400" dirty="0">
+              <a:buNone/>
+            </a:pPr>
+            <a:r>
+              <a:rPr lang="en-US" sz="800" dirty="0">
                 <a:solidFill>
                   <a:srgbClr val="718096"/>
                 </a:solidFill>
@@ -6062,87 +7170,6 @@
                 <a:ea typeface="Pretendard" pitchFamily="34" charset="-122"/>
                 <a:cs typeface="Pretendard" pitchFamily="34" charset="-120"/>
               </a:rPr>
-              <a:t>{"ok"</a:t>
-            </a:r>
-            <a:endParaRPr lang="en-US" sz="1400" dirty="0"/>
-          </a:p>
-        </p:txBody>
-      </p:sp>
-      <p:sp>
-        <p:nvSpPr>
-          <p:cNvPr id="7" name="Text 5"/>
-          <p:cNvSpPr/>
-          <p:nvPr/>
-        </p:nvSpPr>
-        <p:spPr>
-          <a:xfrm>
-            <a:off x="4768907" y="1645920"/>
-            <a:ext cx="6855860" cy="402336"/>
-          </a:xfrm>
-          <a:prstGeom prst="rect">
-            <a:avLst/>
-          </a:prstGeom>
-          <a:noFill/>
-          <a:ln/>
-        </p:spPr>
-        <p:txBody>
-          <a:bodyPr wrap="square" lIns="0" tIns="0" rIns="0" bIns="0" rtlCol="0" anchor="ctr"/>
-          <a:lstStyle/>
-          <a:p>
-            <a:pPr indent="0" marL="0">
-              <a:lnSpc>
-                <a:spcPct val="120000"/>
-              </a:lnSpc>
-              <a:buNone/>
-            </a:pPr>
-            <a:r>
-              <a:rPr lang="en-US" sz="1400" b="1" dirty="0">
-                <a:solidFill>
-                  <a:srgbClr val="10161F"/>
-                </a:solidFill>
-                <a:latin typeface="Pretendard" pitchFamily="34" charset="0"/>
-                <a:ea typeface="Pretendard" pitchFamily="34" charset="-122"/>
-                <a:cs typeface="Pretendard" pitchFamily="34" charset="-120"/>
-              </a:rPr>
-              <a:t>true,"mocked":true,"extractedFields":{"area_signal":"역삼","asset_type":"오피스빌딩","price_band":"300억","size_signal":"3000평(약 9917.4㎡)"},"extractedFacts":{"region":"역삼","exactAddressCandidate":"역삼동 742-1","assetType":"오피스빌딩","priceText":"300억","sizeText":"3000평(약 9917.4㎡)","currentUse":"오피스","currentUseSignal":"근린생활시설","leaseSignal":"임대중","vacancySignal":"공실없음","tenantNames":"쿠팡","네이버","unitRentTexts":"301호: 1500만","sellerMotivationText":"자산 효율화","brokerNotes":"초역세권 매물"},"detectedSensitiveFields":"exact_address","tenant_name","ambiguousFields":,"warnings":,"areaSignal":"역삼","assetType":"오피스빌딩","priceBand":"300억","sizeSignal":"3000평(약 9917.4㎡)","dealType":"매각","buildingName":"역삼 센트럴타워","exactAddress":"역삼동 742-1","totalFloorArea":9917.3,"buildYear":2015,"currentUseSignal":"근린생활시설","vacancySignal":"공실 없음","fitSummary":"초역세권 근생 빌딩으로 시행/사옥 매입에 최적화","cautionSummary":"주요 임차 업종 만기 조율 필요","hiddenFields":"exact_address","seller_motivation","confidence":{"areaSignal":"confirmed","assetType":"confirmed","priceBand":"ai_hypothesis","fitSummary":"ai_hypothesis"},"missingData":"sizeSignal","boundaryNote":"본 자료는 실거래 통계 기반 참고치입니다.","buyerType":"법인 사옥형","budgetRange":{"min":50,"max":80,"display":"50억~80억"},"preferredRegions":"강남","성수","assetTypes":"꼬마빌딩","사옥용","purchasePurpose":"사옥용 매입","mustHave":"초역세권","주차","niceToHave":"테라스","루프탑","riskTolerance":"medium","financingNote":"자본금 50% 준비","missingQuestions":"구체적인 입주 시기가 언제인가요?","선호하는 수익률이 있나요?","privacyNotes":"연락처 비공개","fitReasons":"매수자 예산(50-80억)에 부합하는 매물입니다.","요청하신 성수/강남 권역에 해당합니다.","cautionReasons":"요청한 용도와 달리 명도 협의가 다소 필요합니다.","recommendedNextAction":"현장 답사 제안","kakaoMessage":"안녕하세요! 요청하신 조건에 부합하는 추천 매물이 있어 안내해 드립니다. 확인해보시고 피드백 부탁드립니다.","title":"강남 역삼역 초역세권 오피스 사옥용 빌딩 매각","shortSummary":"역삼역 도보 5분 거리의 준신축급 대형 오피스빌딩입니다.","dealPoints":"초역세권","사옥 최적","cautionPoints":"명도 조율 필요","hiddenInfoNotice":"보증금 및 지번은 인가 후 확인 가능","gateMessage":"G1 등급 등록이 필요합니다.","kakaoText":"강남 역삼역 오피스 빌딩 매각 안내입니다.","exactUnitCandidate":"101호","floor":"1층","areaSqmText":"150㎡","spaceType":"office","depositText":"5000만","monthlyRentText":"400만","maintenanceFeeText":"50만","availableFromText":"즉시입주","leaseTermMonthsText":"24","incentivesText":"렌트프리 2개월","restrictions":,"landlordIdentity":"김성수","currentTenant":"스타트업","vacancyReason":"이전 확장","rentNegotiation":"협의 가능","region":"성수동","areaSqm":150,"deposit":5000,"monthlyRent":400,"maintenanceFee":50,"availableFrom":"즉시입주","leaseTermMonths":24,"incentives":{"rentFreeMonths":2,"interiorSupport":"일부 인테리어 지원","freeRentDetail":"렌트프리 2개월 지원"},"shortSummaryLease":"성수역 도보 5분 거리 1층 리테일 상가 매물입니다."}</a:t>
-            </a:r>
-            <a:endParaRPr lang="en-US" sz="1400" dirty="0"/>
-          </a:p>
-        </p:txBody>
-      </p:sp>
-      <p:sp>
-        <p:nvSpPr>
-          <p:cNvPr id="8" name="Text 6"/>
-          <p:cNvSpPr/>
-          <p:nvPr/>
-        </p:nvSpPr>
-        <p:spPr>
-          <a:xfrm>
-            <a:off x="566928" y="6382512"/>
-            <a:ext cx="7315200" cy="219456"/>
-          </a:xfrm>
-          <a:prstGeom prst="rect">
-            <a:avLst/>
-          </a:prstGeom>
-          <a:noFill/>
-          <a:ln/>
-        </p:spPr>
-        <p:txBody>
-          <a:bodyPr wrap="square" lIns="0" tIns="0" rIns="0" bIns="0" rtlCol="0" anchor="ctr"/>
-          <a:lstStyle/>
-          <a:p>
-            <a:pPr indent="0" marL="0">
-              <a:buNone/>
-            </a:pPr>
-            <a:r>
-              <a:rPr lang="en-US" sz="800" dirty="0">
-                <a:solidFill>
-                  <a:srgbClr val="718096"/>
-                </a:solidFill>
-                <a:latin typeface="Pretendard" pitchFamily="34" charset="0"/>
-                <a:ea typeface="Pretendard" pitchFamily="34" charset="-122"/>
-                <a:cs typeface="Pretendard" pitchFamily="34" charset="-120"/>
-              </a:rPr>
               <a:t>크리딜   |   </a:t>
             </a:r>
             <a:endParaRPr lang="en-US" sz="800" dirty="0"/>
@@ -6151,7 +7178,7 @@
       </p:sp>
       <p:sp>
         <p:nvSpPr>
-          <p:cNvPr id="9" name="Text 7"/>
+          <p:cNvPr id="8" name="Text 5"/>
           <p:cNvSpPr/>
           <p:nvPr/>
         </p:nvSpPr>
@@ -6497,7 +7524,7 @@
                 <a:ea typeface="Pretendard" pitchFamily="34" charset="-122"/>
                 <a:cs typeface="Pretendard" pitchFamily="34" charset="-120"/>
               </a:rPr>
-              <a:t>{"ok":true,"mocked":true,"extractedFields":{"area_signal":"역삼","asset_type":"오피스빌딩","price_band":"300억","size_signal":"3000평(약 9917.4㎡)"},"extractedFacts":{"region":"역삼","exactAddressCandidate":"역삼동 742-1","assetType":"오피스빌딩","priceText":"300억","sizeText":"3000평(약 9917.4㎡)","currentUse":"오피스","currentUseSignal":"근린생활시설","leaseSignal":"임대중","vacancySignal":"공실없음","tenantNames":["쿠팡","네이버"],"unitRentTexts":["301호: 1500만"],"sellerMotivationText":"자산 효율화","brokerNotes":["초역세권 매물"]},"detectedSensitiveFields":["exact_address","tenant_name"],"ambiguousFields":[],"warnings":[],"areaSignal":"역삼","assetType":"오피스빌딩","priceBand":"300억","sizeSignal":"3000평(약 9917.4㎡)","dealType":"매각","buildingName":"역삼 센트럴타워","exactAddress":"역삼동 742-1","totalFloorArea":9917.3,"buildYear":2015,"currentUseSignal":"근린생활시설","vacancySignal":"공실 없음","fitSummary":"초역세권 근생 빌딩으로 시행/사옥 매입에 최적화","cautionSummary":"주요 임차 업종 만기 조율 필요","hiddenFields":["exact_address","seller_motivation"],"confidence":{"areaSignal":"confirmed","assetType":"confirmed","priceBand":"ai_hypothesis","fitSummary":"ai_hypothesis"},"missingData":["sizeSignal"],"boundaryNote":"본 자료는 실거래 통계 기반 참고치입니다.","buyerType":"법인 사옥형","budgetRange":{"min":50,"max":80,"display":"50억~80억"},"preferredRegions":["강남","성수"],"assetTypes":["꼬마빌딩","사옥용"],"purchasePurpose":"사옥용 매입","mustHave":["초역세권","주차"],"niceToHave":["테라스","루프탑"],"riskTolerance":"medium","financingNote":"자본금 50% 준비","missingQuestions":["구체적인 입주 시기가 언제인가요?","선호하는 수익률이 있나요?"],"privacyNotes":["연락처 비공개"],"fitReasons":["매수자 예산(50-80억)에 부합하는 매물입니다.","요청하신 성수/강남 권역에 해당합니다."],"cautionReasons":["요청한 용도와 달리 명도 협의가 다소 필요합니다."],"recommendedNextAction":"현장 답사 제안","kakaoMessage":"안녕하세요! 요청하신 조건에 부합하는 추천 매물이 있어 안내해 드립니다. 확인해보시고 피드백 부탁드립니다.","title":"강남 역삼역 초역세권 오피스 사옥용 빌딩 매각","shortSummary":"역삼역 도보 5분 거리의 준신축급 대형 오피스빌딩입니다.","dealPoints":["초역세권","사옥 최적"],"cautionPoints":["명도 조율 필요"],"hiddenInfoNotice":["보증금 및 지번은 인가 후 확인 가능"],"gateMessage":"G1 등급 등록이 필요합니다.","kakaoText":"강남 역삼역 오피스 빌딩 매각 안내입니다.","exactUnitCandidate":"101호","floor":"1층","areaSqmText":"150㎡","spaceType":"office","depositText":"5000만","monthlyRentText":"400만","maintenanceFeeText":"50만","availableFromText":"즉시입주","leaseTermMonthsText":"24","incentivesText":"렌트프리 2개월","restrictions":[],"landlordIdentity":"김성수","currentTenant":"스타트업","vacancyReason":"이전 확장","rentNegotiation":"협의 가능","region":"성수동","areaSqm":150,"deposit":5000,"monthlyRent":400,"maintenanceFee":50,"availableFrom":"즉시입주","leaseTermMonths":24,"incentives":{"rentFreeMonths":2,"interiorSupport":"일부 인테리어 지원","freeRentDetail":"렌트프리 2개월 지원"},"shortSummaryLease":"성수역 도보 5분 거리 1층 리테일 상가 매물입니다."}</a:t>
+              <a:t>{"ok":true,"mocked":true,"extractedFields":{"area_signal":"역삼","asset_type":"오피스빌딩","price_band":"300억","size_signal":"3000평(약 9917.4㎡)"},"extractedFacts":{"region":"역삼","exactAddressCandidate":"역삼동 742-1","assetType":"오피스빌딩","priceText":"300억","sizeText":"3000평(약 9917.4㎡)","currentUse":"오피스","currentUseSignal":"근린생활시설","leaseSignal":"임대중","vacancySignal":"공실없음","tenantNames":["쿠팡","네이버"],"unitRentTexts":["301호: 1500만"],"sellerMotivationText":"자산 효율화","brokerNotes":["초역세권 매물"]},"detectedSensitiveFields":["exact_address","tenant_name"],"ambiguousFields":[],"warnings":[],"areaSignal":"역삼","assetType":"오피스빌딩","priceBand":"300억","sizeSignal":"3000평(약 9917.4㎡)","dealType":"매각","buildingName":"역삼 센트럴타워","exactAddress":"역삼동 742-1","totalFloorArea":9917.3,"buildYear":2015,"currentUseSignal":"근린생활시설","vacancySignal":"공실 없음","fitSummary":"초역세권 근생 빌딩으로 시행/사옥 매입에 최적화","cautionSummary":"주요 임차인 만기 조율 필요","hiddenFields":["exact_address","seller_motivation"],"confidence":{"areaSignal":"confirmed","assetType":"confirmed","priceBand":"ai_hypothesis","fitSummary":"ai_hypothesis"},"missingData":["sizeSignal"],"boundaryNote":"본 자료는 실거래 통계 기반 참고치입니다.","buyerType":"법인 사옥형","budgetRange":{"min":50,"max":80,"display":"50억~80억"},"preferredRegions":["강남","성수"],"assetTypes":["꼬마빌딩","사옥용"],"purchasePurpose":"사옥용 매입","mustHave":["초역세권","주차"],"niceToHave":["테라스","루프탑"],"riskTolerance":"medium","financingNote":"자본금 50% 준비","missingQuestions":["구체적인 입주 시기가 언제인가요?","선호하는 수익률이 있나요?"],"privacyNotes":["연락처 비공개"],"fitReasons":["매수자 예산(50-80억)에 부합하는 매물입니다.","요청하신 성수/강남 권역에 해당합니다."],"cautionReasons":["요청한 용도와 달리 명도 협의가 다소 필요합니다."],"recommendedNextAction":"현장 답사 제안","kakaoMessage":"안녕하세요! 요청하신 조건에 부합하는 추천 매물이 있어 안내해 드립니다. 확인해보시고 피드백 부탁드립니다.","title":"강남 역삼역 초역세권 오피스 사옥용 빌딩 매각","shortSummary":"역삼역 도보 5분 거리의 준신축급 대형 오피스빌딩입니다.","dealPoints":["초역세권","사옥 최적"],"cautionPoints":["명도 조율 필요"],"hiddenInfoNotice":["보증금 및 지번은 인가 후 확인 가능"],"gateMessage":"G1 등급 등록이 필요합니다.","kakaoText":"강남 역삼역 오피스 빌딩 매각 안내입니다.","exactUnitCandidate":"101호","floor":"1층","areaSqmText":"150㎡","spaceType":"office","depositText":"5000만","monthlyRentText":"400만","maintenanceFeeText":"50만","availableFromText":"즉시입주","leaseTermMonthsText":"24","incentivesText":"렌트프리 2개월","restrictions":[],"landlordIdentity":"김성수","currentTenant":"스타트업","vacancyReason":"이전 확장","rentNegotiation":"협의 가능","region":"성수동","areaSqm":150,"deposit":5000,"monthlyRent":400,"maintenanceFee":50,"availableFrom":"즉시입주","leaseTermMonths":24,"incentives":{"rentFreeMonths":2,"interiorSupport":"일부 인테리어 지원","freeRentDetail":"렌트프리 2개월 지원"},"shortSummaryLease":"성수역 도보 5분 거리 1층 리테일 상가 매물입니다."}</a:t>
             </a:r>
             <a:endParaRPr lang="en-US" sz="930" dirty="0"/>
           </a:p>
@@ -6871,7 +7898,7 @@
                 <a:ea typeface="Pretendard" pitchFamily="34" charset="-122"/>
                 <a:cs typeface="Pretendard" pitchFamily="34" charset="-120"/>
               </a:rPr>
-              <a:t>2017년 준공 신축급 상태 (누수/균열 결함 없음)</a:t>
+              <a:t>준공연도 확인 필요, 구조 확인 필요</a:t>
             </a:r>
             <a:endParaRPr lang="en-US" sz="1250" dirty="0"/>
           </a:p>
@@ -6916,7 +7943,55 @@
                 <a:ea typeface="Pretendard" pitchFamily="34" charset="-122"/>
                 <a:cs typeface="Pretendard" pitchFamily="34" charset="-120"/>
               </a:rPr>
-              <a:t>준공 10년 미만으로 대규모 수선비용 발생 가능성 낮음</a:t>
+              <a:t>누수</a:t>
+            </a:r>
+            <a:endParaRPr lang="en-US" sz="1100" dirty="0"/>
+          </a:p>
+          <a:p>
+            <a:pPr marL="342900" indent="-342900">
+              <a:lnSpc>
+                <a:spcPct val="125000"/>
+              </a:lnSpc>
+              <a:spcBef>
+                <a:spcPts val="600"/>
+              </a:spcBef>
+              <a:buSzPct val="100000"/>
+              <a:buChar char="•"/>
+            </a:pPr>
+            <a:r>
+              <a:rPr lang="en-US" sz="1100" dirty="0">
+                <a:solidFill>
+                  <a:srgbClr val="10161F"/>
+                </a:solidFill>
+                <a:latin typeface="Pretendard" pitchFamily="34" charset="0"/>
+                <a:ea typeface="Pretendard" pitchFamily="34" charset="-122"/>
+                <a:cs typeface="Pretendard" pitchFamily="34" charset="-120"/>
+              </a:rPr>
+              <a:t>균열</a:t>
+            </a:r>
+            <a:endParaRPr lang="en-US" sz="1100" dirty="0"/>
+          </a:p>
+          <a:p>
+            <a:pPr marL="342900" indent="-342900">
+              <a:lnSpc>
+                <a:spcPct val="125000"/>
+              </a:lnSpc>
+              <a:spcBef>
+                <a:spcPts val="600"/>
+              </a:spcBef>
+              <a:buSzPct val="100000"/>
+              <a:buChar char="•"/>
+            </a:pPr>
+            <a:r>
+              <a:rPr lang="en-US" sz="1100" dirty="0">
+                <a:solidFill>
+                  <a:srgbClr val="10161F"/>
+                </a:solidFill>
+                <a:latin typeface="Pretendard" pitchFamily="34" charset="0"/>
+                <a:ea typeface="Pretendard" pitchFamily="34" charset="-122"/>
+                <a:cs typeface="Pretendard" pitchFamily="34" charset="-120"/>
+              </a:rPr>
+              <a:t>설비 노후 여부 현장 점검 필요</a:t>
             </a:r>
             <a:endParaRPr lang="en-US" sz="1100" dirty="0"/>
           </a:p>
@@ -7043,7 +8118,7 @@
                 <a:ea typeface="Pretendard" pitchFamily="34" charset="-122"/>
                 <a:cs typeface="Pretendard" pitchFamily="34" charset="-120"/>
               </a:rPr>
-              <a:t>15인승 침대용 승강기 및 냉난방 설비 양호</a:t>
+              <a:t>승강기 정보 확인 필요</a:t>
             </a:r>
             <a:endParaRPr lang="en-US" sz="1250" dirty="0"/>
           </a:p>
@@ -7088,7 +8163,7 @@
                 <a:ea typeface="Pretendard" pitchFamily="34" charset="-122"/>
                 <a:cs typeface="Pretendard" pitchFamily="34" charset="-120"/>
               </a:rPr>
-              <a:t>주기적 정기 점검 계약 유지로 관리 리스크 최소화</a:t>
+              <a:t>정기검사 이력, 냉난방 설비 상태 확인 필요</a:t>
             </a:r>
             <a:endParaRPr lang="en-US" sz="1100" dirty="0"/>
           </a:p>
@@ -7215,7 +8290,7 @@
                 <a:ea typeface="Pretendard" pitchFamily="34" charset="-122"/>
                 <a:cs typeface="Pretendard" pitchFamily="34" charset="-120"/>
               </a:rPr>
-              <a:t>병의원/약국 인테리어 투자비(호실당 5억↑) 존속</a:t>
+              <a:t>임대차 계약 현황 LOI 접수 후 열람</a:t>
             </a:r>
             <a:endParaRPr lang="en-US" sz="1250" dirty="0"/>
           </a:p>
@@ -7260,7 +8335,7 @@
                 <a:ea typeface="Pretendard" pitchFamily="34" charset="-122"/>
                 <a:cs typeface="Pretendard" pitchFamily="34" charset="-120"/>
               </a:rPr>
-              <a:t>WALE 3.5년 확보 및 만기 6개월 전 재계약 협상 개시</a:t>
+              <a:t>잔여 계약기간(WALE), 임차인 신용도 확인 필요</a:t>
             </a:r>
             <a:endParaRPr lang="en-US" sz="1100" dirty="0"/>
           </a:p>
@@ -7326,7 +8401,7 @@
                 <a:ea typeface="Pretendard" pitchFamily="34" charset="-122"/>
                 <a:cs typeface="Pretendard" pitchFamily="34" charset="-120"/>
               </a:rPr>
-              <a:t>실사 총평: 자산의 물리적·권리적 하자가 없으며, 세부 임대차 계약서 및 등기사항증명서는 LOI 접수 후 원본 열람 가능합니다.</a:t>
+              <a:t>※ 본 리스크 체크는 공부 및 브로커 확인 기반이며, 매수 전 전문 실사팀(변호사/건축사)을 통한 정밀 실사가 필요합니다.</a:t>
             </a:r>
             <a:endParaRPr lang="en-US" sz="1100" dirty="0"/>
           </a:p>
@@ -7579,681 +8654,6 @@
           </a:p>
         </p:txBody>
       </p:sp>
-      <p:sp>
-        <p:nvSpPr>
-          <p:cNvPr id="6" name="Text 4"/>
-          <p:cNvSpPr/>
-          <p:nvPr/>
-        </p:nvSpPr>
-        <p:spPr>
-          <a:xfrm>
-            <a:off x="1133856" y="1005840"/>
-            <a:ext cx="10490911" cy="237744"/>
-          </a:xfrm>
-          <a:prstGeom prst="rect">
-            <a:avLst/>
-          </a:prstGeom>
-          <a:noFill/>
-          <a:ln/>
-        </p:spPr>
-        <p:txBody>
-          <a:bodyPr wrap="square" lIns="0" tIns="0" rIns="0" bIns="0" rtlCol="0" anchor="ctr"/>
-          <a:lstStyle/>
-          <a:p>
-            <a:pPr indent="0" marL="0">
-              <a:buNone/>
-            </a:pPr>
-            <a:r>
-              <a:rPr lang="en-US" sz="1100" dirty="0">
-                <a:solidFill>
-                  <a:srgbClr val="718096"/>
-                </a:solidFill>
-                <a:latin typeface="Pretendard" pitchFamily="34" charset="0"/>
-                <a:ea typeface="Pretendard" pitchFamily="34" charset="-122"/>
-                <a:cs typeface="Pretendard" pitchFamily="34" charset="-120"/>
-              </a:rPr>
-              <a:t>3대 핵심 투자 포인트 (Investment Highlights)</a:t>
-            </a:r>
-            <a:endParaRPr lang="en-US" sz="1100" dirty="0"/>
-          </a:p>
-        </p:txBody>
-      </p:sp>
-      <p:sp>
-        <p:nvSpPr>
-          <p:cNvPr id="7" name="Shape 5"/>
-          <p:cNvSpPr/>
-          <p:nvPr/>
-        </p:nvSpPr>
-        <p:spPr>
-          <a:xfrm>
-            <a:off x="566928" y="1481328"/>
-            <a:ext cx="3472586" cy="2560320"/>
-          </a:xfrm>
-          <a:prstGeom prst="roundRect">
-            <a:avLst>
-              <a:gd name="adj" fmla="val 2857"/>
-            </a:avLst>
-          </a:prstGeom>
-          <a:solidFill>
-            <a:srgbClr val="F7FAFC"/>
-          </a:solidFill>
-          <a:ln w="10160">
-            <a:solidFill>
-              <a:srgbClr val="CBD5E0"/>
-            </a:solidFill>
-            <a:prstDash val="solid"/>
-          </a:ln>
-        </p:spPr>
-      </p:sp>
-      <p:sp>
-        <p:nvSpPr>
-          <p:cNvPr id="8" name="Shape 6"/>
-          <p:cNvSpPr/>
-          <p:nvPr/>
-        </p:nvSpPr>
-        <p:spPr>
-          <a:xfrm>
-            <a:off x="566928" y="1481328"/>
-            <a:ext cx="3472586" cy="54864"/>
-          </a:xfrm>
-          <a:prstGeom prst="rect">
-            <a:avLst/>
-          </a:prstGeom>
-          <a:solidFill>
-            <a:srgbClr val="B98A2E"/>
-          </a:solidFill>
-          <a:ln/>
-        </p:spPr>
-      </p:sp>
-      <p:sp>
-        <p:nvSpPr>
-          <p:cNvPr id="9" name="Shape 7"/>
-          <p:cNvSpPr/>
-          <p:nvPr/>
-        </p:nvSpPr>
-        <p:spPr>
-          <a:xfrm>
-            <a:off x="795528" y="1755648"/>
-            <a:ext cx="475488" cy="292608"/>
-          </a:xfrm>
-          <a:prstGeom prst="roundRect">
-            <a:avLst>
-              <a:gd name="adj" fmla="val 12500"/>
-            </a:avLst>
-          </a:prstGeom>
-          <a:solidFill>
-            <a:srgbClr val="D9B668"/>
-          </a:solidFill>
-          <a:ln/>
-        </p:spPr>
-      </p:sp>
-      <p:sp>
-        <p:nvSpPr>
-          <p:cNvPr id="10" name="Text 8"/>
-          <p:cNvSpPr/>
-          <p:nvPr/>
-        </p:nvSpPr>
-        <p:spPr>
-          <a:xfrm>
-            <a:off x="795528" y="1755648"/>
-            <a:ext cx="475488" cy="292608"/>
-          </a:xfrm>
-          <a:prstGeom prst="rect">
-            <a:avLst/>
-          </a:prstGeom>
-          <a:noFill/>
-          <a:ln/>
-        </p:spPr>
-        <p:txBody>
-          <a:bodyPr wrap="square" lIns="0" tIns="0" rIns="0" bIns="0" rtlCol="0" anchor="ctr"/>
-          <a:lstStyle/>
-          <a:p>
-            <a:pPr algn="ctr" indent="0" marL="0">
-              <a:buNone/>
-            </a:pPr>
-            <a:r>
-              <a:rPr lang="en-US" sz="1100" b="1" dirty="0">
-                <a:solidFill>
-                  <a:srgbClr val="977024"/>
-                </a:solidFill>
-                <a:latin typeface="Arial" pitchFamily="34" charset="0"/>
-                <a:ea typeface="Arial" pitchFamily="34" charset="-122"/>
-                <a:cs typeface="Arial" pitchFamily="34" charset="-120"/>
-              </a:rPr>
-              <a:t>01</a:t>
-            </a:r>
-            <a:endParaRPr lang="en-US" sz="1100" dirty="0"/>
-          </a:p>
-        </p:txBody>
-      </p:sp>
-      <p:sp>
-        <p:nvSpPr>
-          <p:cNvPr id="11" name="Text 9"/>
-          <p:cNvSpPr/>
-          <p:nvPr/>
-        </p:nvSpPr>
-        <p:spPr>
-          <a:xfrm>
-            <a:off x="795528" y="2194560"/>
-            <a:ext cx="3015386" cy="365760"/>
-          </a:xfrm>
-          <a:prstGeom prst="rect">
-            <a:avLst/>
-          </a:prstGeom>
-          <a:noFill/>
-          <a:ln/>
-        </p:spPr>
-        <p:txBody>
-          <a:bodyPr wrap="square" lIns="0" tIns="0" rIns="0" bIns="0" rtlCol="0" anchor="t"/>
-          <a:lstStyle/>
-          <a:p>
-            <a:pPr indent="0" marL="0">
-              <a:buNone/>
-            </a:pPr>
-            <a:r>
-              <a:rPr lang="en-US" sz="1500" b="1" dirty="0">
-                <a:solidFill>
-                  <a:srgbClr val="10161F"/>
-                </a:solidFill>
-                <a:latin typeface="Pretendard" pitchFamily="34" charset="0"/>
-                <a:ea typeface="Pretendard" pitchFamily="34" charset="-122"/>
-                <a:cs typeface="Pretendard" pitchFamily="34" charset="-120"/>
-              </a:rPr>
-              <a:t>원금 안전판 확보</a:t>
-            </a:r>
-            <a:endParaRPr lang="en-US" sz="1500" dirty="0"/>
-          </a:p>
-        </p:txBody>
-      </p:sp>
-      <p:sp>
-        <p:nvSpPr>
-          <p:cNvPr id="12" name="Shape 10"/>
-          <p:cNvSpPr/>
-          <p:nvPr/>
-        </p:nvSpPr>
-        <p:spPr>
-          <a:xfrm>
-            <a:off x="795528" y="2624328"/>
-            <a:ext cx="3015386" cy="0"/>
-          </a:xfrm>
-          <a:prstGeom prst="line">
-            <a:avLst/>
-          </a:prstGeom>
-          <a:noFill/>
-          <a:ln w="6350">
-            <a:solidFill>
-              <a:srgbClr val="CBD5E0"/>
-            </a:solidFill>
-            <a:prstDash val="solid"/>
-          </a:ln>
-        </p:spPr>
-      </p:sp>
-      <p:sp>
-        <p:nvSpPr>
-          <p:cNvPr id="13" name="Text 11"/>
-          <p:cNvSpPr/>
-          <p:nvPr/>
-        </p:nvSpPr>
-        <p:spPr>
-          <a:xfrm>
-            <a:off x="795528" y="2779776"/>
-            <a:ext cx="3015386" cy="1051560"/>
-          </a:xfrm>
-          <a:prstGeom prst="rect">
-            <a:avLst/>
-          </a:prstGeom>
-          <a:noFill/>
-          <a:ln/>
-        </p:spPr>
-        <p:txBody>
-          <a:bodyPr wrap="square" lIns="0" tIns="0" rIns="0" bIns="0" rtlCol="0" anchor="t"/>
-          <a:lstStyle/>
-          <a:p>
-            <a:pPr indent="0" marL="0">
-              <a:lnSpc>
-                <a:spcPct val="130000"/>
-              </a:lnSpc>
-              <a:buNone/>
-            </a:pPr>
-            <a:r>
-              <a:rPr lang="en-US" sz="1200" dirty="0">
-                <a:solidFill>
-                  <a:srgbClr val="10161F"/>
-                </a:solidFill>
-                <a:latin typeface="Pretendard" pitchFamily="34" charset="0"/>
-                <a:ea typeface="Pretendard" pitchFamily="34" charset="-122"/>
-                <a:cs typeface="Pretendard" pitchFamily="34" charset="-120"/>
-              </a:rPr>
-              <a:t>송파권역의 핵심 입지로, 우량한 대지 지분 가치가 하방 경직성을 강력히 지지합니다.</a:t>
-            </a:r>
-            <a:endParaRPr lang="en-US" sz="1200" dirty="0"/>
-          </a:p>
-        </p:txBody>
-      </p:sp>
-      <p:sp>
-        <p:nvSpPr>
-          <p:cNvPr id="14" name="Shape 12"/>
-          <p:cNvSpPr/>
-          <p:nvPr/>
-        </p:nvSpPr>
-        <p:spPr>
-          <a:xfrm>
-            <a:off x="4359554" y="1481328"/>
-            <a:ext cx="3472586" cy="2560320"/>
-          </a:xfrm>
-          <a:prstGeom prst="roundRect">
-            <a:avLst>
-              <a:gd name="adj" fmla="val 2857"/>
-            </a:avLst>
-          </a:prstGeom>
-          <a:solidFill>
-            <a:srgbClr val="F7FAFC"/>
-          </a:solidFill>
-          <a:ln w="10160">
-            <a:solidFill>
-              <a:srgbClr val="CBD5E0"/>
-            </a:solidFill>
-            <a:prstDash val="solid"/>
-          </a:ln>
-        </p:spPr>
-      </p:sp>
-      <p:sp>
-        <p:nvSpPr>
-          <p:cNvPr id="15" name="Shape 13"/>
-          <p:cNvSpPr/>
-          <p:nvPr/>
-        </p:nvSpPr>
-        <p:spPr>
-          <a:xfrm>
-            <a:off x="4359554" y="1481328"/>
-            <a:ext cx="3472586" cy="54864"/>
-          </a:xfrm>
-          <a:prstGeom prst="rect">
-            <a:avLst/>
-          </a:prstGeom>
-          <a:solidFill>
-            <a:srgbClr val="B98A2E"/>
-          </a:solidFill>
-          <a:ln/>
-        </p:spPr>
-      </p:sp>
-      <p:sp>
-        <p:nvSpPr>
-          <p:cNvPr id="16" name="Shape 14"/>
-          <p:cNvSpPr/>
-          <p:nvPr/>
-        </p:nvSpPr>
-        <p:spPr>
-          <a:xfrm>
-            <a:off x="4588154" y="1755648"/>
-            <a:ext cx="475488" cy="292608"/>
-          </a:xfrm>
-          <a:prstGeom prst="roundRect">
-            <a:avLst>
-              <a:gd name="adj" fmla="val 12500"/>
-            </a:avLst>
-          </a:prstGeom>
-          <a:solidFill>
-            <a:srgbClr val="D9B668"/>
-          </a:solidFill>
-          <a:ln/>
-        </p:spPr>
-      </p:sp>
-      <p:sp>
-        <p:nvSpPr>
-          <p:cNvPr id="17" name="Text 15"/>
-          <p:cNvSpPr/>
-          <p:nvPr/>
-        </p:nvSpPr>
-        <p:spPr>
-          <a:xfrm>
-            <a:off x="4588154" y="1755648"/>
-            <a:ext cx="475488" cy="292608"/>
-          </a:xfrm>
-          <a:prstGeom prst="rect">
-            <a:avLst/>
-          </a:prstGeom>
-          <a:noFill/>
-          <a:ln/>
-        </p:spPr>
-        <p:txBody>
-          <a:bodyPr wrap="square" lIns="0" tIns="0" rIns="0" bIns="0" rtlCol="0" anchor="ctr"/>
-          <a:lstStyle/>
-          <a:p>
-            <a:pPr algn="ctr" indent="0" marL="0">
-              <a:buNone/>
-            </a:pPr>
-            <a:r>
-              <a:rPr lang="en-US" sz="1100" b="1" dirty="0">
-                <a:solidFill>
-                  <a:srgbClr val="977024"/>
-                </a:solidFill>
-                <a:latin typeface="Arial" pitchFamily="34" charset="0"/>
-                <a:ea typeface="Arial" pitchFamily="34" charset="-122"/>
-                <a:cs typeface="Arial" pitchFamily="34" charset="-120"/>
-              </a:rPr>
-              <a:t>02</a:t>
-            </a:r>
-            <a:endParaRPr lang="en-US" sz="1100" dirty="0"/>
-          </a:p>
-        </p:txBody>
-      </p:sp>
-      <p:sp>
-        <p:nvSpPr>
-          <p:cNvPr id="18" name="Text 16"/>
-          <p:cNvSpPr/>
-          <p:nvPr/>
-        </p:nvSpPr>
-        <p:spPr>
-          <a:xfrm>
-            <a:off x="4588154" y="2194560"/>
-            <a:ext cx="3015386" cy="365760"/>
-          </a:xfrm>
-          <a:prstGeom prst="rect">
-            <a:avLst/>
-          </a:prstGeom>
-          <a:noFill/>
-          <a:ln/>
-        </p:spPr>
-        <p:txBody>
-          <a:bodyPr wrap="square" lIns="0" tIns="0" rIns="0" bIns="0" rtlCol="0" anchor="t"/>
-          <a:lstStyle/>
-          <a:p>
-            <a:pPr indent="0" marL="0">
-              <a:buNone/>
-            </a:pPr>
-            <a:r>
-              <a:rPr lang="en-US" sz="1500" b="1" dirty="0">
-                <a:solidFill>
-                  <a:srgbClr val="10161F"/>
-                </a:solidFill>
-                <a:latin typeface="Pretendard" pitchFamily="34" charset="0"/>
-                <a:ea typeface="Pretendard" pitchFamily="34" charset="-122"/>
-                <a:cs typeface="Pretendard" pitchFamily="34" charset="-120"/>
-              </a:rPr>
-              <a:t>확실한 월 현금흐름</a:t>
-            </a:r>
-            <a:endParaRPr lang="en-US" sz="1500" dirty="0"/>
-          </a:p>
-        </p:txBody>
-      </p:sp>
-      <p:sp>
-        <p:nvSpPr>
-          <p:cNvPr id="19" name="Shape 17"/>
-          <p:cNvSpPr/>
-          <p:nvPr/>
-        </p:nvSpPr>
-        <p:spPr>
-          <a:xfrm>
-            <a:off x="4588154" y="2624328"/>
-            <a:ext cx="3015386" cy="0"/>
-          </a:xfrm>
-          <a:prstGeom prst="line">
-            <a:avLst/>
-          </a:prstGeom>
-          <a:noFill/>
-          <a:ln w="6350">
-            <a:solidFill>
-              <a:srgbClr val="CBD5E0"/>
-            </a:solidFill>
-            <a:prstDash val="solid"/>
-          </a:ln>
-        </p:spPr>
-      </p:sp>
-      <p:sp>
-        <p:nvSpPr>
-          <p:cNvPr id="20" name="Text 18"/>
-          <p:cNvSpPr/>
-          <p:nvPr/>
-        </p:nvSpPr>
-        <p:spPr>
-          <a:xfrm>
-            <a:off x="4588154" y="2779776"/>
-            <a:ext cx="3015386" cy="1051560"/>
-          </a:xfrm>
-          <a:prstGeom prst="rect">
-            <a:avLst/>
-          </a:prstGeom>
-          <a:noFill/>
-          <a:ln/>
-        </p:spPr>
-        <p:txBody>
-          <a:bodyPr wrap="square" lIns="0" tIns="0" rIns="0" bIns="0" rtlCol="0" anchor="t"/>
-          <a:lstStyle/>
-          <a:p>
-            <a:pPr indent="0" marL="0">
-              <a:lnSpc>
-                <a:spcPct val="130000"/>
-              </a:lnSpc>
-              <a:buNone/>
-            </a:pPr>
-            <a:r>
-              <a:rPr lang="en-US" sz="1200" dirty="0">
-                <a:solidFill>
-                  <a:srgbClr val="10161F"/>
-                </a:solidFill>
-                <a:latin typeface="Pretendard" pitchFamily="34" charset="0"/>
-                <a:ea typeface="Pretendard" pitchFamily="34" charset="-122"/>
-                <a:cs typeface="Pretendard" pitchFamily="34" charset="-120"/>
-              </a:rPr>
-              <a:t>우량 테넌트 만실 운영 및 장기 임대차 구조를 기반으로 매월 안정적인 순영업소득(NOI) 창출이 기대됩니다.</a:t>
-            </a:r>
-            <a:endParaRPr lang="en-US" sz="1200" dirty="0"/>
-          </a:p>
-        </p:txBody>
-      </p:sp>
-      <p:sp>
-        <p:nvSpPr>
-          <p:cNvPr id="21" name="Shape 19"/>
-          <p:cNvSpPr/>
-          <p:nvPr/>
-        </p:nvSpPr>
-        <p:spPr>
-          <a:xfrm>
-            <a:off x="8152181" y="1481328"/>
-            <a:ext cx="3472586" cy="2560320"/>
-          </a:xfrm>
-          <a:prstGeom prst="roundRect">
-            <a:avLst>
-              <a:gd name="adj" fmla="val 2857"/>
-            </a:avLst>
-          </a:prstGeom>
-          <a:solidFill>
-            <a:srgbClr val="F7FAFC"/>
-          </a:solidFill>
-          <a:ln w="10160">
-            <a:solidFill>
-              <a:srgbClr val="CBD5E0"/>
-            </a:solidFill>
-            <a:prstDash val="solid"/>
-          </a:ln>
-        </p:spPr>
-      </p:sp>
-      <p:sp>
-        <p:nvSpPr>
-          <p:cNvPr id="22" name="Shape 20"/>
-          <p:cNvSpPr/>
-          <p:nvPr/>
-        </p:nvSpPr>
-        <p:spPr>
-          <a:xfrm>
-            <a:off x="8152181" y="1481328"/>
-            <a:ext cx="3472586" cy="54864"/>
-          </a:xfrm>
-          <a:prstGeom prst="rect">
-            <a:avLst/>
-          </a:prstGeom>
-          <a:solidFill>
-            <a:srgbClr val="B98A2E"/>
-          </a:solidFill>
-          <a:ln/>
-        </p:spPr>
-      </p:sp>
-      <p:sp>
-        <p:nvSpPr>
-          <p:cNvPr id="23" name="Shape 21"/>
-          <p:cNvSpPr/>
-          <p:nvPr/>
-        </p:nvSpPr>
-        <p:spPr>
-          <a:xfrm>
-            <a:off x="8380781" y="1755648"/>
-            <a:ext cx="475488" cy="292608"/>
-          </a:xfrm>
-          <a:prstGeom prst="roundRect">
-            <a:avLst>
-              <a:gd name="adj" fmla="val 12500"/>
-            </a:avLst>
-          </a:prstGeom>
-          <a:solidFill>
-            <a:srgbClr val="D9B668"/>
-          </a:solidFill>
-          <a:ln/>
-        </p:spPr>
-      </p:sp>
-      <p:sp>
-        <p:nvSpPr>
-          <p:cNvPr id="24" name="Text 22"/>
-          <p:cNvSpPr/>
-          <p:nvPr/>
-        </p:nvSpPr>
-        <p:spPr>
-          <a:xfrm>
-            <a:off x="8380781" y="1755648"/>
-            <a:ext cx="475488" cy="292608"/>
-          </a:xfrm>
-          <a:prstGeom prst="rect">
-            <a:avLst/>
-          </a:prstGeom>
-          <a:noFill/>
-          <a:ln/>
-        </p:spPr>
-        <p:txBody>
-          <a:bodyPr wrap="square" lIns="0" tIns="0" rIns="0" bIns="0" rtlCol="0" anchor="ctr"/>
-          <a:lstStyle/>
-          <a:p>
-            <a:pPr algn="ctr" indent="0" marL="0">
-              <a:buNone/>
-            </a:pPr>
-            <a:r>
-              <a:rPr lang="en-US" sz="1100" b="1" dirty="0">
-                <a:solidFill>
-                  <a:srgbClr val="977024"/>
-                </a:solidFill>
-                <a:latin typeface="Arial" pitchFamily="34" charset="0"/>
-                <a:ea typeface="Arial" pitchFamily="34" charset="-122"/>
-                <a:cs typeface="Arial" pitchFamily="34" charset="-120"/>
-              </a:rPr>
-              <a:t>03</a:t>
-            </a:r>
-            <a:endParaRPr lang="en-US" sz="1100" dirty="0"/>
-          </a:p>
-        </p:txBody>
-      </p:sp>
-      <p:sp>
-        <p:nvSpPr>
-          <p:cNvPr id="25" name="Text 23"/>
-          <p:cNvSpPr/>
-          <p:nvPr/>
-        </p:nvSpPr>
-        <p:spPr>
-          <a:xfrm>
-            <a:off x="8380781" y="2194560"/>
-            <a:ext cx="3015386" cy="365760"/>
-          </a:xfrm>
-          <a:prstGeom prst="rect">
-            <a:avLst/>
-          </a:prstGeom>
-          <a:noFill/>
-          <a:ln/>
-        </p:spPr>
-        <p:txBody>
-          <a:bodyPr wrap="square" lIns="0" tIns="0" rIns="0" bIns="0" rtlCol="0" anchor="t"/>
-          <a:lstStyle/>
-          <a:p>
-            <a:pPr indent="0" marL="0">
-              <a:buNone/>
-            </a:pPr>
-            <a:r>
-              <a:rPr lang="en-US" sz="1500" b="1" dirty="0">
-                <a:solidFill>
-                  <a:srgbClr val="10161F"/>
-                </a:solidFill>
-                <a:latin typeface="Pretendard" pitchFamily="34" charset="0"/>
-                <a:ea typeface="Pretendard" pitchFamily="34" charset="-122"/>
-                <a:cs typeface="Pretendard" pitchFamily="34" charset="-120"/>
-              </a:rPr>
-              <a:t>가치 상승 및 출구 전략</a:t>
-            </a:r>
-            <a:endParaRPr lang="en-US" sz="1500" dirty="0"/>
-          </a:p>
-        </p:txBody>
-      </p:sp>
-      <p:sp>
-        <p:nvSpPr>
-          <p:cNvPr id="26" name="Shape 24"/>
-          <p:cNvSpPr/>
-          <p:nvPr/>
-        </p:nvSpPr>
-        <p:spPr>
-          <a:xfrm>
-            <a:off x="8380781" y="2624328"/>
-            <a:ext cx="3015386" cy="0"/>
-          </a:xfrm>
-          <a:prstGeom prst="line">
-            <a:avLst/>
-          </a:prstGeom>
-          <a:noFill/>
-          <a:ln w="6350">
-            <a:solidFill>
-              <a:srgbClr val="CBD5E0"/>
-            </a:solidFill>
-            <a:prstDash val="solid"/>
-          </a:ln>
-        </p:spPr>
-      </p:sp>
-      <p:sp>
-        <p:nvSpPr>
-          <p:cNvPr id="27" name="Text 25"/>
-          <p:cNvSpPr/>
-          <p:nvPr/>
-        </p:nvSpPr>
-        <p:spPr>
-          <a:xfrm>
-            <a:off x="8380781" y="2779776"/>
-            <a:ext cx="3015386" cy="1051560"/>
-          </a:xfrm>
-          <a:prstGeom prst="rect">
-            <a:avLst/>
-          </a:prstGeom>
-          <a:noFill/>
-          <a:ln/>
-        </p:spPr>
-        <p:txBody>
-          <a:bodyPr wrap="square" lIns="0" tIns="0" rIns="0" bIns="0" rtlCol="0" anchor="t"/>
-          <a:lstStyle/>
-          <a:p>
-            <a:pPr indent="0" marL="0">
-              <a:lnSpc>
-                <a:spcPct val="130000"/>
-              </a:lnSpc>
-              <a:buNone/>
-            </a:pPr>
-            <a:r>
-              <a:rPr lang="en-US" sz="1200" dirty="0">
-                <a:solidFill>
-                  <a:srgbClr val="10161F"/>
-                </a:solidFill>
-                <a:latin typeface="Pretendard" pitchFamily="34" charset="0"/>
-                <a:ea typeface="Pretendard" pitchFamily="34" charset="-122"/>
-                <a:cs typeface="Pretendard" pitchFamily="34" charset="-120"/>
-              </a:rPr>
-              <a:t>현행 공법 여력을 활용한 밸류업 기회와 더불어 향후 권역 지가 상승에 따른 시세차익 실현이 유력합니다.</a:t>
-            </a:r>
-            <a:endParaRPr lang="en-US" sz="1200" dirty="0"/>
-          </a:p>
-        </p:txBody>
-      </p:sp>
       <p:graphicFrame>
         <p:nvGraphicFramePr>
           <p:cNvPr id="9" name="Table 0"/>
@@ -8269,7 +8669,7 @@
           </p:nvPr>
         </p:nvGraphicFramePr>
         <p:xfrm>
-          <a:off x="566928" y="4178808"/>
+          <a:off x="566928" y="4023360"/>
           <a:ext cx="11057839" cy="914400"/>
         </p:xfrm>
         <a:graphic>
@@ -8277,9 +8677,10 @@
             <a:tbl>
               <a:tblPr/>
               <a:tblGrid>
-                <a:gridCol w="3685946"/>
-                <a:gridCol w="3685946"/>
-                <a:gridCol w="3685946"/>
+                <a:gridCol w="2764460"/>
+                <a:gridCol w="2764460"/>
+                <a:gridCol w="2764460"/>
+                <a:gridCol w="2764460"/>
               </a:tblGrid>
               <a:tr h="329184">
                 <a:tc>
@@ -8299,7 +8700,7 @@
                           <a:ea typeface="Pretendard" pitchFamily="34" charset="-122"/>
                           <a:cs typeface="Pretendard" pitchFamily="34" charset="-120"/>
                         </a:rPr>
-                        <a:t>유형</a:t>
+                        <a:t>시나리오</a:t>
                       </a:r>
                       <a:endParaRPr lang="en-US" sz="1050" dirty="0">
                         <a:latin typeface="Pretendard" charset="0"/>
@@ -8367,7 +8768,21 @@
                           <a:ea typeface="Pretendard" pitchFamily="34" charset="-122"/>
                           <a:cs typeface="Pretendard" pitchFamily="34" charset="-120"/>
                         </a:rPr>
-                        <a:t>적합도</a:t>
+                        <a:t>NOI </a:t>
+                      </a:r>
+                      <a:pPr indent="0" marL="0">
+                        <a:buNone/>
+                      </a:pPr>
+                      <a:r>
+                        <a:rPr lang="en-US" sz="1050" b="1" dirty="0">
+                          <a:solidFill>
+                            <a:srgbClr val="718096"/>
+                          </a:solidFill>
+                          <a:latin typeface="Pretendard" pitchFamily="34" charset="0"/>
+                          <a:ea typeface="Pretendard" pitchFamily="34" charset="-122"/>
+                          <a:cs typeface="Pretendard" pitchFamily="34" charset="-120"/>
+                        </a:rPr>
+                        <a:t>개선</a:t>
                       </a:r>
                       <a:endParaRPr lang="en-US" sz="1050" dirty="0">
                         <a:latin typeface="Pretendard" charset="0"/>
@@ -8435,7 +8850,117 @@
                           <a:ea typeface="Pretendard" pitchFamily="34" charset="-122"/>
                           <a:cs typeface="Pretendard" pitchFamily="34" charset="-120"/>
                         </a:rPr>
-                        <a:t>이유</a:t>
+                        <a:t>개선 </a:t>
+                      </a:r>
+                      <a:pPr indent="0" marL="0">
+                        <a:buNone/>
+                      </a:pPr>
+                      <a:r>
+                        <a:rPr lang="en-US" sz="1050" b="1" dirty="0">
+                          <a:solidFill>
+                            <a:srgbClr val="718096"/>
+                          </a:solidFill>
+                          <a:latin typeface="Pretendard" pitchFamily="34" charset="0"/>
+                          <a:ea typeface="Pretendard" pitchFamily="34" charset="-122"/>
+                          <a:cs typeface="Pretendard" pitchFamily="34" charset="-120"/>
+                        </a:rPr>
+                        <a:t>Cap </a:t>
+                      </a:r>
+                      <a:pPr indent="0" marL="0">
+                        <a:buNone/>
+                      </a:pPr>
+                      <a:r>
+                        <a:rPr lang="en-US" sz="1050" b="1" dirty="0">
+                          <a:solidFill>
+                            <a:srgbClr val="718096"/>
+                          </a:solidFill>
+                          <a:latin typeface="Pretendard" pitchFamily="34" charset="0"/>
+                          <a:ea typeface="Pretendard" pitchFamily="34" charset="-122"/>
+                          <a:cs typeface="Pretendard" pitchFamily="34" charset="-120"/>
+                        </a:rPr>
+                        <a:t>Rate</a:t>
+                      </a:r>
+                      <a:endParaRPr lang="en-US" sz="1050" dirty="0">
+                        <a:latin typeface="Pretendard" charset="0"/>
+                        <a:ea typeface="Pretendard" charset="0"/>
+                        <a:cs typeface="Pretendard" charset="0"/>
+                      </a:endParaRPr>
+                    </a:p>
+                  </a:txBody>
+                  <a:tcPr marL="50800" marR="50800" marT="25400" marB="25400" anchor="ctr">
+                    <a:lnL w="3810" cap="flat" cmpd="sng" algn="ctr">
+                      <a:solidFill>
+                        <a:srgbClr val="CBD5E0"/>
+                      </a:solidFill>
+                      <a:prstDash val="solid"/>
+                      <a:round/>
+                      <a:headEnd type="none" w="med" len="med"/>
+                      <a:tailEnd type="none" w="med" len="med"/>
+                    </a:lnL>
+                    <a:lnR w="3810" cap="flat" cmpd="sng" algn="ctr">
+                      <a:solidFill>
+                        <a:srgbClr val="CBD5E0"/>
+                      </a:solidFill>
+                      <a:prstDash val="solid"/>
+                      <a:round/>
+                      <a:headEnd type="none" w="med" len="med"/>
+                      <a:tailEnd type="none" w="med" len="med"/>
+                    </a:lnR>
+                    <a:lnT w="3810" cap="flat" cmpd="sng" algn="ctr">
+                      <a:solidFill>
+                        <a:srgbClr val="CBD5E0"/>
+                      </a:solidFill>
+                      <a:prstDash val="solid"/>
+                      <a:round/>
+                      <a:headEnd type="none" w="med" len="med"/>
+                      <a:tailEnd type="none" w="med" len="med"/>
+                    </a:lnT>
+                    <a:lnB w="3810" cap="flat" cmpd="sng" algn="ctr">
+                      <a:solidFill>
+                        <a:srgbClr val="CBD5E0"/>
+                      </a:solidFill>
+                      <a:prstDash val="solid"/>
+                      <a:round/>
+                      <a:headEnd type="none" w="med" len="med"/>
+                      <a:tailEnd type="none" w="med" len="med"/>
+                    </a:lnB>
+                    <a:solidFill>
+                      <a:srgbClr val="F7FAFC"/>
+                    </a:solidFill>
+                  </a:tcPr>
+                </a:tc>
+                <a:tc>
+                  <a:txBody>
+                    <a:bodyPr/>
+                    <a:lstStyle/>
+                    <a:p>
+                      <a:pPr indent="0" marL="0">
+                        <a:buNone/>
+                      </a:pPr>
+                      <a:r>
+                        <a:rPr lang="en-US" sz="1050" b="1" dirty="0">
+                          <a:solidFill>
+                            <a:srgbClr val="718096"/>
+                          </a:solidFill>
+                          <a:latin typeface="Pretendard" pitchFamily="34" charset="0"/>
+                          <a:ea typeface="Pretendard" pitchFamily="34" charset="-122"/>
+                          <a:cs typeface="Pretendard" pitchFamily="34" charset="-120"/>
+                        </a:rPr>
+                        <a:t>투자 </a:t>
+                      </a:r>
+                      <a:pPr indent="0" marL="0">
+                        <a:buNone/>
+                      </a:pPr>
+                      <a:r>
+                        <a:rPr lang="en-US" sz="1050" b="1" dirty="0">
+                          <a:solidFill>
+                            <a:srgbClr val="718096"/>
+                          </a:solidFill>
+                          <a:latin typeface="Pretendard" pitchFamily="34" charset="0"/>
+                          <a:ea typeface="Pretendard" pitchFamily="34" charset="-122"/>
+                          <a:cs typeface="Pretendard" pitchFamily="34" charset="-120"/>
+                        </a:rPr>
+                        <a:t>비용</a:t>
                       </a:r>
                       <a:endParaRPr lang="en-US" sz="1050" dirty="0">
                         <a:latin typeface="Pretendard" charset="0"/>
@@ -8505,7 +9030,49 @@
                           <a:ea typeface="Pretendard" pitchFamily="34" charset="-122"/>
                           <a:cs typeface="Pretendard" pitchFamily="34" charset="-120"/>
                         </a:rPr>
-                        <a:t>(임대수익)</a:t>
+                        <a:t>② </a:t>
+                      </a:r>
+                      <a:pPr indent="0" marL="0">
+                        <a:buNone/>
+                      </a:pPr>
+                      <a:r>
+                        <a:rPr lang="en-US" sz="1050" b="1" dirty="0">
+                          <a:solidFill>
+                            <a:srgbClr val="10161F"/>
+                          </a:solidFill>
+                          <a:latin typeface="Pretendard" pitchFamily="34" charset="0"/>
+                          <a:ea typeface="Pretendard" pitchFamily="34" charset="-122"/>
+                          <a:cs typeface="Pretendard" pitchFamily="34" charset="-120"/>
+                        </a:rPr>
+                        <a:t>임대료 </a:t>
+                      </a:r>
+                      <a:pPr indent="0" marL="0">
+                        <a:buNone/>
+                      </a:pPr>
+                      <a:r>
+                        <a:rPr lang="en-US" sz="1050" b="1" dirty="0">
+                          <a:solidFill>
+                            <a:srgbClr val="10161F"/>
+                          </a:solidFill>
+                          <a:latin typeface="Pretendard" pitchFamily="34" charset="0"/>
+                          <a:ea typeface="Pretendard" pitchFamily="34" charset="-122"/>
+                          <a:cs typeface="Pretendard" pitchFamily="34" charset="-120"/>
+                        </a:rPr>
+                        <a:t>현실화 </a:t>
+                      </a:r>
+                      <a:pPr indent="0" marL="0">
+                        <a:buNone/>
+                      </a:pPr>
+                      <a:r>
+                        <a:rPr lang="en-US" sz="1050" b="1" dirty="0">
+                          <a:solidFill>
+                            <a:srgbClr val="10161F"/>
+                          </a:solidFill>
+                          <a:latin typeface="Pretendard" pitchFamily="34" charset="0"/>
+                          <a:ea typeface="Pretendard" pitchFamily="34" charset="-122"/>
+                          <a:cs typeface="Pretendard" pitchFamily="34" charset="-120"/>
+                        </a:rPr>
+                        <a:t>(+5%)</a:t>
                       </a:r>
                       <a:endParaRPr lang="en-US" sz="1050" dirty="0">
                         <a:latin typeface="Pretendard" charset="0"/>
@@ -8573,7 +9140,49 @@
                           <a:ea typeface="Pretendard" pitchFamily="34" charset="-122"/>
                           <a:cs typeface="Pretendard" pitchFamily="34" charset="-120"/>
                         </a:rPr>
-                        <a:t>★★★★★</a:t>
+                        <a:t>+약 </a:t>
+                      </a:r>
+                      <a:pPr indent="0" marL="0">
+                        <a:buNone/>
+                      </a:pPr>
+                      <a:r>
+                        <a:rPr lang="en-US" sz="1050" dirty="0">
+                          <a:solidFill>
+                            <a:srgbClr val="10161F"/>
+                          </a:solidFill>
+                          <a:latin typeface="Pretendard" pitchFamily="34" charset="0"/>
+                          <a:ea typeface="Pretendard" pitchFamily="34" charset="-122"/>
+                          <a:cs typeface="Pretendard" pitchFamily="34" charset="-120"/>
+                        </a:rPr>
+                        <a:t>0.11억 </a:t>
+                      </a:r>
+                      <a:pPr indent="0" marL="0">
+                        <a:buNone/>
+                      </a:pPr>
+                      <a:r>
+                        <a:rPr lang="en-US" sz="1050" dirty="0">
+                          <a:solidFill>
+                            <a:srgbClr val="10161F"/>
+                          </a:solidFill>
+                          <a:latin typeface="Pretendard" pitchFamily="34" charset="0"/>
+                          <a:ea typeface="Pretendard" pitchFamily="34" charset="-122"/>
+                          <a:cs typeface="Pretendard" pitchFamily="34" charset="-120"/>
+                        </a:rPr>
+                        <a:t>원 </a:t>
+                      </a:r>
+                      <a:pPr indent="0" marL="0">
+                        <a:buNone/>
+                      </a:pPr>
+                      <a:r>
+                        <a:rPr lang="en-US" sz="1050" dirty="0">
+                          <a:solidFill>
+                            <a:srgbClr val="10161F"/>
+                          </a:solidFill>
+                          <a:latin typeface="Pretendard" pitchFamily="34" charset="0"/>
+                          <a:ea typeface="Pretendard" pitchFamily="34" charset="-122"/>
+                          <a:cs typeface="Pretendard" pitchFamily="34" charset="-120"/>
+                        </a:rPr>
+                        <a:t>(+5%)</a:t>
                       </a:r>
                       <a:endParaRPr lang="en-US" sz="1050" dirty="0">
                         <a:latin typeface="Pretendard" charset="0"/>
@@ -8641,8 +9250,62 @@
                           <a:ea typeface="Pretendard" pitchFamily="34" charset="-122"/>
                           <a:cs typeface="Pretendard" pitchFamily="34" charset="-120"/>
                         </a:rPr>
-                        <a:t>안정 </a:t>
+                        <a:t>3.27%</a:t>
                       </a:r>
+                      <a:endParaRPr lang="en-US" sz="1050" dirty="0">
+                        <a:latin typeface="Pretendard" charset="0"/>
+                        <a:ea typeface="Pretendard" charset="0"/>
+                        <a:cs typeface="Pretendard" charset="0"/>
+                      </a:endParaRPr>
+                    </a:p>
+                  </a:txBody>
+                  <a:tcPr marL="50800" marR="50800" marT="25400" marB="25400" anchor="ctr">
+                    <a:lnL w="3810" cap="flat" cmpd="sng" algn="ctr">
+                      <a:solidFill>
+                        <a:srgbClr val="CBD5E0"/>
+                      </a:solidFill>
+                      <a:prstDash val="solid"/>
+                      <a:round/>
+                      <a:headEnd type="none" w="med" len="med"/>
+                      <a:tailEnd type="none" w="med" len="med"/>
+                    </a:lnL>
+                    <a:lnR w="3810" cap="flat" cmpd="sng" algn="ctr">
+                      <a:solidFill>
+                        <a:srgbClr val="CBD5E0"/>
+                      </a:solidFill>
+                      <a:prstDash val="solid"/>
+                      <a:round/>
+                      <a:headEnd type="none" w="med" len="med"/>
+                      <a:tailEnd type="none" w="med" len="med"/>
+                    </a:lnR>
+                    <a:lnT w="3810" cap="flat" cmpd="sng" algn="ctr">
+                      <a:solidFill>
+                        <a:srgbClr val="CBD5E0"/>
+                      </a:solidFill>
+                      <a:prstDash val="solid"/>
+                      <a:round/>
+                      <a:headEnd type="none" w="med" len="med"/>
+                      <a:tailEnd type="none" w="med" len="med"/>
+                    </a:lnT>
+                    <a:lnB w="3810" cap="flat" cmpd="sng" algn="ctr">
+                      <a:solidFill>
+                        <a:srgbClr val="CBD5E0"/>
+                      </a:solidFill>
+                      <a:prstDash val="solid"/>
+                      <a:round/>
+                      <a:headEnd type="none" w="med" len="med"/>
+                      <a:tailEnd type="none" w="med" len="med"/>
+                    </a:lnB>
+                    <a:solidFill>
+                      <a:srgbClr val="FFFFFF"/>
+                    </a:solidFill>
+                  </a:tcPr>
+                </a:tc>
+                <a:tc>
+                  <a:txBody>
+                    <a:bodyPr/>
+                    <a:lstStyle/>
+                    <a:p>
                       <a:pPr indent="0" marL="0">
                         <a:buNone/>
                       </a:pPr>
@@ -8655,63 +9318,7 @@
                           <a:ea typeface="Pretendard" pitchFamily="34" charset="-122"/>
                           <a:cs typeface="Pretendard" pitchFamily="34" charset="-120"/>
                         </a:rPr>
-                        <a:t>MD, </a:t>
-                      </a:r>
-                      <a:pPr indent="0" marL="0">
-                        <a:buNone/>
-                      </a:pPr>
-                      <a:r>
-                        <a:rPr lang="en-US" sz="1050" dirty="0">
-                          <a:solidFill>
-                            <a:srgbClr val="10161F"/>
-                          </a:solidFill>
-                          <a:latin typeface="Pretendard" pitchFamily="34" charset="0"/>
-                          <a:ea typeface="Pretendard" pitchFamily="34" charset="-122"/>
-                          <a:cs typeface="Pretendard" pitchFamily="34" charset="-120"/>
-                        </a:rPr>
-                        <a:t>예측 </a:t>
-                      </a:r>
-                      <a:pPr indent="0" marL="0">
-                        <a:buNone/>
-                      </a:pPr>
-                      <a:r>
-                        <a:rPr lang="en-US" sz="1050" dirty="0">
-                          <a:solidFill>
-                            <a:srgbClr val="10161F"/>
-                          </a:solidFill>
-                          <a:latin typeface="Pretendard" pitchFamily="34" charset="0"/>
-                          <a:ea typeface="Pretendard" pitchFamily="34" charset="-122"/>
-                          <a:cs typeface="Pretendard" pitchFamily="34" charset="-120"/>
-                        </a:rPr>
-                        <a:t>가능한 </a:t>
-                      </a:r>
-                      <a:pPr indent="0" marL="0">
-                        <a:buNone/>
-                      </a:pPr>
-                      <a:r>
-                        <a:rPr lang="en-US" sz="1050" dirty="0">
-                          <a:solidFill>
-                            <a:srgbClr val="10161F"/>
-                          </a:solidFill>
-                          <a:latin typeface="Pretendard" pitchFamily="34" charset="0"/>
-                          <a:ea typeface="Pretendard" pitchFamily="34" charset="-122"/>
-                          <a:cs typeface="Pretendard" pitchFamily="34" charset="-120"/>
-                        </a:rPr>
-                        <a:t>월 </a:t>
-                      </a:r>
-                      <a:pPr indent="0" marL="0">
-                        <a:buNone/>
-                      </a:pPr>
-                      <a:r>
-                        <a:rPr lang="en-US" sz="1050" dirty="0">
-                          <a:solidFill>
-                            <a:srgbClr val="10161F"/>
-                          </a:solidFill>
-                          <a:latin typeface="Pretendard" pitchFamily="34" charset="0"/>
-                          <a:ea typeface="Pretendard" pitchFamily="34" charset="-122"/>
-                          <a:cs typeface="Pretendard" pitchFamily="34" charset="-120"/>
-                        </a:rPr>
-                        <a:t>현금흐름</a:t>
+                        <a:t>불필요</a:t>
                       </a:r>
                       <a:endParaRPr lang="en-US" sz="1050" dirty="0">
                         <a:latin typeface="Pretendard" charset="0"/>
@@ -8781,7 +9388,7 @@
                           <a:ea typeface="Pretendard" pitchFamily="34" charset="-122"/>
                           <a:cs typeface="Pretendard" pitchFamily="34" charset="-120"/>
                         </a:rPr>
-                        <a:t>상가 </a:t>
+                        <a:t>③ </a:t>
                       </a:r>
                       <a:pPr indent="0" marL="0">
                         <a:buNone/>
@@ -8795,7 +9402,7 @@
                           <a:ea typeface="Pretendard" pitchFamily="34" charset="-122"/>
                           <a:cs typeface="Pretendard" pitchFamily="34" charset="-120"/>
                         </a:rPr>
-                        <a:t>전문 </a:t>
+                        <a:t>리모델링 </a:t>
                       </a:r>
                       <a:pPr indent="0" marL="0">
                         <a:buNone/>
@@ -8809,7 +9416,7 @@
                           <a:ea typeface="Pretendard" pitchFamily="34" charset="-122"/>
                           <a:cs typeface="Pretendard" pitchFamily="34" charset="-120"/>
                         </a:rPr>
-                        <a:t>임대 </a:t>
+                        <a:t>후 </a:t>
                       </a:r>
                       <a:pPr indent="0" marL="0">
                         <a:buNone/>
@@ -8823,7 +9430,21 @@
                           <a:ea typeface="Pretendard" pitchFamily="34" charset="-122"/>
                           <a:cs typeface="Pretendard" pitchFamily="34" charset="-120"/>
                         </a:rPr>
-                        <a:t>운영사</a:t>
+                        <a:t>임대료 </a:t>
+                      </a:r>
+                      <a:pPr indent="0" marL="0">
+                        <a:buNone/>
+                      </a:pPr>
+                      <a:r>
+                        <a:rPr lang="en-US" sz="1050" b="1" dirty="0">
+                          <a:solidFill>
+                            <a:srgbClr val="10161F"/>
+                          </a:solidFill>
+                          <a:latin typeface="Pretendard" pitchFamily="34" charset="0"/>
+                          <a:ea typeface="Pretendard" pitchFamily="34" charset="-122"/>
+                          <a:cs typeface="Pretendard" pitchFamily="34" charset="-120"/>
+                        </a:rPr>
+                        <a:t>상승</a:t>
                       </a:r>
                       <a:endParaRPr lang="en-US" sz="1050" dirty="0">
                         <a:latin typeface="Pretendard" charset="0"/>
@@ -8891,7 +9512,49 @@
                           <a:ea typeface="Pretendard" pitchFamily="34" charset="-122"/>
                           <a:cs typeface="Pretendard" pitchFamily="34" charset="-120"/>
                         </a:rPr>
-                        <a:t>★★★★</a:t>
+                        <a:t>+약 </a:t>
+                      </a:r>
+                      <a:pPr indent="0" marL="0">
+                        <a:buNone/>
+                      </a:pPr>
+                      <a:r>
+                        <a:rPr lang="en-US" sz="1050" dirty="0">
+                          <a:solidFill>
+                            <a:srgbClr val="10161F"/>
+                          </a:solidFill>
+                          <a:latin typeface="Pretendard" pitchFamily="34" charset="0"/>
+                          <a:ea typeface="Pretendard" pitchFamily="34" charset="-122"/>
+                          <a:cs typeface="Pretendard" pitchFamily="34" charset="-120"/>
+                        </a:rPr>
+                        <a:t>0.18억 </a:t>
+                      </a:r>
+                      <a:pPr indent="0" marL="0">
+                        <a:buNone/>
+                      </a:pPr>
+                      <a:r>
+                        <a:rPr lang="en-US" sz="1050" dirty="0">
+                          <a:solidFill>
+                            <a:srgbClr val="10161F"/>
+                          </a:solidFill>
+                          <a:latin typeface="Pretendard" pitchFamily="34" charset="0"/>
+                          <a:ea typeface="Pretendard" pitchFamily="34" charset="-122"/>
+                          <a:cs typeface="Pretendard" pitchFamily="34" charset="-120"/>
+                        </a:rPr>
+                        <a:t>원 </a:t>
+                      </a:r>
+                      <a:pPr indent="0" marL="0">
+                        <a:buNone/>
+                      </a:pPr>
+                      <a:r>
+                        <a:rPr lang="en-US" sz="1050" dirty="0">
+                          <a:solidFill>
+                            <a:srgbClr val="10161F"/>
+                          </a:solidFill>
+                          <a:latin typeface="Pretendard" pitchFamily="34" charset="0"/>
+                          <a:ea typeface="Pretendard" pitchFamily="34" charset="-122"/>
+                          <a:cs typeface="Pretendard" pitchFamily="34" charset="-120"/>
+                        </a:rPr>
+                        <a:t>(+8%)</a:t>
                       </a:r>
                       <a:endParaRPr lang="en-US" sz="1050" dirty="0">
                         <a:latin typeface="Pretendard" charset="0"/>
@@ -8959,7 +9622,75 @@
                           <a:ea typeface="Pretendard" pitchFamily="34" charset="-122"/>
                           <a:cs typeface="Pretendard" pitchFamily="34" charset="-120"/>
                         </a:rPr>
-                        <a:t>MD </a:t>
+                        <a:t>3.37%</a:t>
+                      </a:r>
+                      <a:endParaRPr lang="en-US" sz="1050" dirty="0">
+                        <a:latin typeface="Pretendard" charset="0"/>
+                        <a:ea typeface="Pretendard" charset="0"/>
+                        <a:cs typeface="Pretendard" charset="0"/>
+                      </a:endParaRPr>
+                    </a:p>
+                  </a:txBody>
+                  <a:tcPr marL="50800" marR="50800" marT="25400" marB="25400" anchor="ctr">
+                    <a:lnL w="3810" cap="flat" cmpd="sng" algn="ctr">
+                      <a:solidFill>
+                        <a:srgbClr val="CBD5E0"/>
+                      </a:solidFill>
+                      <a:prstDash val="solid"/>
+                      <a:round/>
+                      <a:headEnd type="none" w="med" len="med"/>
+                      <a:tailEnd type="none" w="med" len="med"/>
+                    </a:lnL>
+                    <a:lnR w="3810" cap="flat" cmpd="sng" algn="ctr">
+                      <a:solidFill>
+                        <a:srgbClr val="CBD5E0"/>
+                      </a:solidFill>
+                      <a:prstDash val="solid"/>
+                      <a:round/>
+                      <a:headEnd type="none" w="med" len="med"/>
+                      <a:tailEnd type="none" w="med" len="med"/>
+                    </a:lnR>
+                    <a:lnT w="3810" cap="flat" cmpd="sng" algn="ctr">
+                      <a:solidFill>
+                        <a:srgbClr val="CBD5E0"/>
+                      </a:solidFill>
+                      <a:prstDash val="solid"/>
+                      <a:round/>
+                      <a:headEnd type="none" w="med" len="med"/>
+                      <a:tailEnd type="none" w="med" len="med"/>
+                    </a:lnT>
+                    <a:lnB w="3810" cap="flat" cmpd="sng" algn="ctr">
+                      <a:solidFill>
+                        <a:srgbClr val="CBD5E0"/>
+                      </a:solidFill>
+                      <a:prstDash val="solid"/>
+                      <a:round/>
+                      <a:headEnd type="none" w="med" len="med"/>
+                      <a:tailEnd type="none" w="med" len="med"/>
+                    </a:lnB>
+                    <a:solidFill>
+                      <a:srgbClr val="F7FAFC"/>
+                    </a:solidFill>
+                  </a:tcPr>
+                </a:tc>
+                <a:tc>
+                  <a:txBody>
+                    <a:bodyPr/>
+                    <a:lstStyle/>
+                    <a:p>
+                      <a:pPr indent="0" marL="0">
+                        <a:buNone/>
+                      </a:pPr>
+                      <a:r>
+                        <a:rPr lang="en-US" sz="1050" dirty="0">
+                          <a:solidFill>
+                            <a:srgbClr val="10161F"/>
+                          </a:solidFill>
+                          <a:latin typeface="Pretendard" pitchFamily="34" charset="0"/>
+                          <a:ea typeface="Pretendard" pitchFamily="34" charset="-122"/>
+                          <a:cs typeface="Pretendard" pitchFamily="34" charset="-120"/>
+                        </a:rPr>
+                        <a:t>약 </a:t>
                       </a:r>
                       <a:pPr indent="0" marL="0">
                         <a:buNone/>
@@ -8973,7 +9704,7 @@
                           <a:ea typeface="Pretendard" pitchFamily="34" charset="-122"/>
                           <a:cs typeface="Pretendard" pitchFamily="34" charset="-120"/>
                         </a:rPr>
-                        <a:t>관리 </a:t>
+                        <a:t>15.00억 </a:t>
                       </a:r>
                       <a:pPr indent="0" marL="0">
                         <a:buNone/>
@@ -8987,49 +9718,7 @@
                           <a:ea typeface="Pretendard" pitchFamily="34" charset="-122"/>
                           <a:cs typeface="Pretendard" pitchFamily="34" charset="-120"/>
                         </a:rPr>
-                        <a:t>노하우 </a:t>
-                      </a:r>
-                      <a:pPr indent="0" marL="0">
-                        <a:buNone/>
-                      </a:pPr>
-                      <a:r>
-                        <a:rPr lang="en-US" sz="1050" dirty="0">
-                          <a:solidFill>
-                            <a:srgbClr val="10161F"/>
-                          </a:solidFill>
-                          <a:latin typeface="Pretendard" pitchFamily="34" charset="0"/>
-                          <a:ea typeface="Pretendard" pitchFamily="34" charset="-122"/>
-                          <a:cs typeface="Pretendard" pitchFamily="34" charset="-120"/>
-                        </a:rPr>
-                        <a:t>보유 </a:t>
-                      </a:r>
-                      <a:pPr indent="0" marL="0">
-                        <a:buNone/>
-                      </a:pPr>
-                      <a:r>
-                        <a:rPr lang="en-US" sz="1050" dirty="0">
-                          <a:solidFill>
-                            <a:srgbClr val="10161F"/>
-                          </a:solidFill>
-                          <a:latin typeface="Pretendard" pitchFamily="34" charset="0"/>
-                          <a:ea typeface="Pretendard" pitchFamily="34" charset="-122"/>
-                          <a:cs typeface="Pretendard" pitchFamily="34" charset="-120"/>
-                        </a:rPr>
-                        <a:t>시 </a:t>
-                      </a:r>
-                      <a:pPr indent="0" marL="0">
-                        <a:buNone/>
-                      </a:pPr>
-                      <a:r>
-                        <a:rPr lang="en-US" sz="1050" dirty="0">
-                          <a:solidFill>
-                            <a:srgbClr val="10161F"/>
-                          </a:solidFill>
-                          <a:latin typeface="Pretendard" pitchFamily="34" charset="0"/>
-                          <a:ea typeface="Pretendard" pitchFamily="34" charset="-122"/>
-                          <a:cs typeface="Pretendard" pitchFamily="34" charset="-120"/>
-                        </a:rPr>
-                        <a:t>최적</a:t>
+                        <a:t>원</a:t>
                       </a:r>
                       <a:endParaRPr lang="en-US" sz="1050" dirty="0">
                         <a:latin typeface="Pretendard" charset="0"/>
@@ -9081,323 +9770,19 @@
                   </a:tcPr>
                 </a:tc>
               </a:tr>
-              <a:tr h="329184">
-                <a:tc>
-                  <a:txBody>
-                    <a:bodyPr/>
-                    <a:lstStyle/>
-                    <a:p>
-                      <a:pPr indent="0" marL="0">
-                        <a:buNone/>
-                      </a:pPr>
-                      <a:r>
-                        <a:rPr lang="en-US" sz="1050" b="1" dirty="0">
-                          <a:solidFill>
-                            <a:srgbClr val="10161F"/>
-                          </a:solidFill>
-                          <a:latin typeface="Pretendard" pitchFamily="34" charset="0"/>
-                          <a:ea typeface="Pretendard" pitchFamily="34" charset="-122"/>
-                          <a:cs typeface="Pretendard" pitchFamily="34" charset="-120"/>
-                        </a:rPr>
-                        <a:t>프랜차이즈 </a:t>
-                      </a:r>
-                      <a:pPr indent="0" marL="0">
-                        <a:buNone/>
-                      </a:pPr>
-                      <a:r>
-                        <a:rPr lang="en-US" sz="1050" b="1" dirty="0">
-                          <a:solidFill>
-                            <a:srgbClr val="10161F"/>
-                          </a:solidFill>
-                          <a:latin typeface="Pretendard" pitchFamily="34" charset="0"/>
-                          <a:ea typeface="Pretendard" pitchFamily="34" charset="-122"/>
-                          <a:cs typeface="Pretendard" pitchFamily="34" charset="-120"/>
-                        </a:rPr>
-                        <a:t>본사 </a:t>
-                      </a:r>
-                      <a:pPr indent="0" marL="0">
-                        <a:buNone/>
-                      </a:pPr>
-                      <a:r>
-                        <a:rPr lang="en-US" sz="1050" b="1" dirty="0">
-                          <a:solidFill>
-                            <a:srgbClr val="10161F"/>
-                          </a:solidFill>
-                          <a:latin typeface="Pretendard" pitchFamily="34" charset="0"/>
-                          <a:ea typeface="Pretendard" pitchFamily="34" charset="-122"/>
-                          <a:cs typeface="Pretendard" pitchFamily="34" charset="-120"/>
-                        </a:rPr>
-                        <a:t>직매장</a:t>
-                      </a:r>
-                      <a:endParaRPr lang="en-US" sz="1050" dirty="0">
-                        <a:latin typeface="Pretendard" charset="0"/>
-                        <a:ea typeface="Pretendard" charset="0"/>
-                        <a:cs typeface="Pretendard" charset="0"/>
-                      </a:endParaRPr>
-                    </a:p>
-                  </a:txBody>
-                  <a:tcPr marL="50800" marR="50800" marT="25400" marB="25400" anchor="ctr">
-                    <a:lnL w="3810" cap="flat" cmpd="sng" algn="ctr">
-                      <a:solidFill>
-                        <a:srgbClr val="CBD5E0"/>
-                      </a:solidFill>
-                      <a:prstDash val="solid"/>
-                      <a:round/>
-                      <a:headEnd type="none" w="med" len="med"/>
-                      <a:tailEnd type="none" w="med" len="med"/>
-                    </a:lnL>
-                    <a:lnR w="3810" cap="flat" cmpd="sng" algn="ctr">
-                      <a:solidFill>
-                        <a:srgbClr val="CBD5E0"/>
-                      </a:solidFill>
-                      <a:prstDash val="solid"/>
-                      <a:round/>
-                      <a:headEnd type="none" w="med" len="med"/>
-                      <a:tailEnd type="none" w="med" len="med"/>
-                    </a:lnR>
-                    <a:lnT w="3810" cap="flat" cmpd="sng" algn="ctr">
-                      <a:solidFill>
-                        <a:srgbClr val="CBD5E0"/>
-                      </a:solidFill>
-                      <a:prstDash val="solid"/>
-                      <a:round/>
-                      <a:headEnd type="none" w="med" len="med"/>
-                      <a:tailEnd type="none" w="med" len="med"/>
-                    </a:lnT>
-                    <a:lnB w="3810" cap="flat" cmpd="sng" algn="ctr">
-                      <a:solidFill>
-                        <a:srgbClr val="CBD5E0"/>
-                      </a:solidFill>
-                      <a:prstDash val="solid"/>
-                      <a:round/>
-                      <a:headEnd type="none" w="med" len="med"/>
-                      <a:tailEnd type="none" w="med" len="med"/>
-                    </a:lnB>
-                    <a:solidFill>
-                      <a:srgbClr val="FFFFFF"/>
-                    </a:solidFill>
-                  </a:tcPr>
-                </a:tc>
-                <a:tc>
-                  <a:txBody>
-                    <a:bodyPr/>
-                    <a:lstStyle/>
-                    <a:p>
-                      <a:pPr indent="0" marL="0">
-                        <a:buNone/>
-                      </a:pPr>
-                      <a:r>
-                        <a:rPr lang="en-US" sz="1050" dirty="0">
-                          <a:solidFill>
-                            <a:srgbClr val="10161F"/>
-                          </a:solidFill>
-                          <a:latin typeface="Pretendard" pitchFamily="34" charset="0"/>
-                          <a:ea typeface="Pretendard" pitchFamily="34" charset="-122"/>
-                          <a:cs typeface="Pretendard" pitchFamily="34" charset="-120"/>
-                        </a:rPr>
-                        <a:t>★★★</a:t>
-                      </a:r>
-                      <a:endParaRPr lang="en-US" sz="1050" dirty="0">
-                        <a:latin typeface="Pretendard" charset="0"/>
-                        <a:ea typeface="Pretendard" charset="0"/>
-                        <a:cs typeface="Pretendard" charset="0"/>
-                      </a:endParaRPr>
-                    </a:p>
-                  </a:txBody>
-                  <a:tcPr marL="50800" marR="50800" marT="25400" marB="25400" anchor="ctr">
-                    <a:lnL w="3810" cap="flat" cmpd="sng" algn="ctr">
-                      <a:solidFill>
-                        <a:srgbClr val="CBD5E0"/>
-                      </a:solidFill>
-                      <a:prstDash val="solid"/>
-                      <a:round/>
-                      <a:headEnd type="none" w="med" len="med"/>
-                      <a:tailEnd type="none" w="med" len="med"/>
-                    </a:lnL>
-                    <a:lnR w="3810" cap="flat" cmpd="sng" algn="ctr">
-                      <a:solidFill>
-                        <a:srgbClr val="CBD5E0"/>
-                      </a:solidFill>
-                      <a:prstDash val="solid"/>
-                      <a:round/>
-                      <a:headEnd type="none" w="med" len="med"/>
-                      <a:tailEnd type="none" w="med" len="med"/>
-                    </a:lnR>
-                    <a:lnT w="3810" cap="flat" cmpd="sng" algn="ctr">
-                      <a:solidFill>
-                        <a:srgbClr val="CBD5E0"/>
-                      </a:solidFill>
-                      <a:prstDash val="solid"/>
-                      <a:round/>
-                      <a:headEnd type="none" w="med" len="med"/>
-                      <a:tailEnd type="none" w="med" len="med"/>
-                    </a:lnT>
-                    <a:lnB w="3810" cap="flat" cmpd="sng" algn="ctr">
-                      <a:solidFill>
-                        <a:srgbClr val="CBD5E0"/>
-                      </a:solidFill>
-                      <a:prstDash val="solid"/>
-                      <a:round/>
-                      <a:headEnd type="none" w="med" len="med"/>
-                      <a:tailEnd type="none" w="med" len="med"/>
-                    </a:lnB>
-                    <a:solidFill>
-                      <a:srgbClr val="FFFFFF"/>
-                    </a:solidFill>
-                  </a:tcPr>
-                </a:tc>
-                <a:tc>
-                  <a:txBody>
-                    <a:bodyPr/>
-                    <a:lstStyle/>
-                    <a:p>
-                      <a:pPr indent="0" marL="0">
-                        <a:buNone/>
-                      </a:pPr>
-                      <a:r>
-                        <a:rPr lang="en-US" sz="1050" dirty="0">
-                          <a:solidFill>
-                            <a:srgbClr val="10161F"/>
-                          </a:solidFill>
-                          <a:latin typeface="Pretendard" pitchFamily="34" charset="0"/>
-                          <a:ea typeface="Pretendard" pitchFamily="34" charset="-122"/>
-                          <a:cs typeface="Pretendard" pitchFamily="34" charset="-120"/>
-                        </a:rPr>
-                        <a:t>브랜드 </a:t>
-                      </a:r>
-                      <a:pPr indent="0" marL="0">
-                        <a:buNone/>
-                      </a:pPr>
-                      <a:r>
-                        <a:rPr lang="en-US" sz="1050" dirty="0">
-                          <a:solidFill>
-                            <a:srgbClr val="10161F"/>
-                          </a:solidFill>
-                          <a:latin typeface="Pretendard" pitchFamily="34" charset="0"/>
-                          <a:ea typeface="Pretendard" pitchFamily="34" charset="-122"/>
-                          <a:cs typeface="Pretendard" pitchFamily="34" charset="-120"/>
-                        </a:rPr>
-                        <a:t>노출 </a:t>
-                      </a:r>
-                      <a:pPr indent="0" marL="0">
-                        <a:buNone/>
-                      </a:pPr>
-                      <a:r>
-                        <a:rPr lang="en-US" sz="1050" dirty="0">
-                          <a:solidFill>
-                            <a:srgbClr val="10161F"/>
-                          </a:solidFill>
-                          <a:latin typeface="Pretendard" pitchFamily="34" charset="0"/>
-                          <a:ea typeface="Pretendard" pitchFamily="34" charset="-122"/>
-                          <a:cs typeface="Pretendard" pitchFamily="34" charset="-120"/>
-                        </a:rPr>
-                        <a:t>+ </a:t>
-                      </a:r>
-                      <a:pPr indent="0" marL="0">
-                        <a:buNone/>
-                      </a:pPr>
-                      <a:r>
-                        <a:rPr lang="en-US" sz="1050" dirty="0">
-                          <a:solidFill>
-                            <a:srgbClr val="10161F"/>
-                          </a:solidFill>
-                          <a:latin typeface="Pretendard" pitchFamily="34" charset="0"/>
-                          <a:ea typeface="Pretendard" pitchFamily="34" charset="-122"/>
-                          <a:cs typeface="Pretendard" pitchFamily="34" charset="-120"/>
-                        </a:rPr>
-                        <a:t>직영 </a:t>
-                      </a:r>
-                      <a:pPr indent="0" marL="0">
-                        <a:buNone/>
-                      </a:pPr>
-                      <a:r>
-                        <a:rPr lang="en-US" sz="1050" dirty="0">
-                          <a:solidFill>
-                            <a:srgbClr val="10161F"/>
-                          </a:solidFill>
-                          <a:latin typeface="Pretendard" pitchFamily="34" charset="0"/>
-                          <a:ea typeface="Pretendard" pitchFamily="34" charset="-122"/>
-                          <a:cs typeface="Pretendard" pitchFamily="34" charset="-120"/>
-                        </a:rPr>
-                        <a:t>운영 </a:t>
-                      </a:r>
-                      <a:pPr indent="0" marL="0">
-                        <a:buNone/>
-                      </a:pPr>
-                      <a:r>
-                        <a:rPr lang="en-US" sz="1050" dirty="0">
-                          <a:solidFill>
-                            <a:srgbClr val="10161F"/>
-                          </a:solidFill>
-                          <a:latin typeface="Pretendard" pitchFamily="34" charset="0"/>
-                          <a:ea typeface="Pretendard" pitchFamily="34" charset="-122"/>
-                          <a:cs typeface="Pretendard" pitchFamily="34" charset="-120"/>
-                        </a:rPr>
-                        <a:t>가능</a:t>
-                      </a:r>
-                      <a:endParaRPr lang="en-US" sz="1050" dirty="0">
-                        <a:latin typeface="Pretendard" charset="0"/>
-                        <a:ea typeface="Pretendard" charset="0"/>
-                        <a:cs typeface="Pretendard" charset="0"/>
-                      </a:endParaRPr>
-                    </a:p>
-                  </a:txBody>
-                  <a:tcPr marL="50800" marR="50800" marT="25400" marB="25400" anchor="ctr">
-                    <a:lnL w="3810" cap="flat" cmpd="sng" algn="ctr">
-                      <a:solidFill>
-                        <a:srgbClr val="CBD5E0"/>
-                      </a:solidFill>
-                      <a:prstDash val="solid"/>
-                      <a:round/>
-                      <a:headEnd type="none" w="med" len="med"/>
-                      <a:tailEnd type="none" w="med" len="med"/>
-                    </a:lnL>
-                    <a:lnR w="3810" cap="flat" cmpd="sng" algn="ctr">
-                      <a:solidFill>
-                        <a:srgbClr val="CBD5E0"/>
-                      </a:solidFill>
-                      <a:prstDash val="solid"/>
-                      <a:round/>
-                      <a:headEnd type="none" w="med" len="med"/>
-                      <a:tailEnd type="none" w="med" len="med"/>
-                    </a:lnR>
-                    <a:lnT w="3810" cap="flat" cmpd="sng" algn="ctr">
-                      <a:solidFill>
-                        <a:srgbClr val="CBD5E0"/>
-                      </a:solidFill>
-                      <a:prstDash val="solid"/>
-                      <a:round/>
-                      <a:headEnd type="none" w="med" len="med"/>
-                      <a:tailEnd type="none" w="med" len="med"/>
-                    </a:lnT>
-                    <a:lnB w="3810" cap="flat" cmpd="sng" algn="ctr">
-                      <a:solidFill>
-                        <a:srgbClr val="CBD5E0"/>
-                      </a:solidFill>
-                      <a:prstDash val="solid"/>
-                      <a:round/>
-                      <a:headEnd type="none" w="med" len="med"/>
-                      <a:tailEnd type="none" w="med" len="med"/>
-                    </a:lnB>
-                    <a:solidFill>
-                      <a:srgbClr val="FFFFFF"/>
-                    </a:solidFill>
-                  </a:tcPr>
-                </a:tc>
-              </a:tr>
             </a:tbl>
           </a:graphicData>
         </a:graphic>
       </p:graphicFrame>
       <p:sp>
         <p:nvSpPr>
-          <p:cNvPr id="29" name="Shape 26"/>
-          <p:cNvSpPr/>
-          <p:nvPr/>
-        </p:nvSpPr>
-        <p:spPr>
-          <a:xfrm>
-            <a:off x="566928" y="5678424"/>
+          <p:cNvPr id="7" name="Shape 4"/>
+          <p:cNvSpPr/>
+          <p:nvPr/>
+        </p:nvSpPr>
+        <p:spPr>
+          <a:xfrm>
+            <a:off x="566928" y="5193792"/>
             <a:ext cx="11057839" cy="804672"/>
           </a:xfrm>
           <a:prstGeom prst="roundRect">
@@ -9418,13 +9803,13 @@
       </p:sp>
       <p:sp>
         <p:nvSpPr>
-          <p:cNvPr id="30" name="Text 27"/>
-          <p:cNvSpPr/>
-          <p:nvPr/>
-        </p:nvSpPr>
-        <p:spPr>
-          <a:xfrm>
-            <a:off x="749808" y="5788152"/>
+          <p:cNvPr id="8" name="Text 5"/>
+          <p:cNvSpPr/>
+          <p:nvPr/>
+        </p:nvSpPr>
+        <p:spPr>
+          <a:xfrm>
+            <a:off x="749808" y="5303520"/>
             <a:ext cx="1691640" cy="256032"/>
           </a:xfrm>
           <a:prstGeom prst="rect">
@@ -9457,13 +9842,13 @@
       </p:sp>
       <p:sp>
         <p:nvSpPr>
-          <p:cNvPr id="31" name="Text 28"/>
-          <p:cNvSpPr/>
-          <p:nvPr/>
-        </p:nvSpPr>
-        <p:spPr>
-          <a:xfrm>
-            <a:off x="2487168" y="5751576"/>
+          <p:cNvPr id="9" name="Text 6"/>
+          <p:cNvSpPr/>
+          <p:nvPr/>
+        </p:nvSpPr>
+        <p:spPr>
+          <a:xfrm>
+            <a:off x="2487168" y="5266944"/>
             <a:ext cx="8954719" cy="658368"/>
           </a:xfrm>
           <a:prstGeom prst="rect">
@@ -9491,7 +9876,7 @@
                 <a:ea typeface="Pretendard" pitchFamily="34" charset="-122"/>
                 <a:cs typeface="Pretendard" pitchFamily="34" charset="-120"/>
               </a:rPr>
-              <a:t>[참고] 종합 가치 제안: 송파권역 핵심 상권의 희소성 높은 우량 자산으로, 안정적인 임대 수익과 향후 공법상 밸류업 및 권역 지가 상승에 따른 자본 이득(Capital Gain)을 동시에 실현할 수 있는 전략적 매물입니다.</a:t>
+              <a:t>{"ok":true,"mocked":true,"extractedFields":{"area_signal":"역삼","asset_type":"오피스빌딩","price_band":"300억","size_signal":"3000평(약 9917.4㎡)"},"extractedFacts":{"region":"역삼","exactAddressCandidate":"역삼동 742-1","assetType":"오피스빌딩","priceText":"300억","sizeText":"3000평(약 9917.4㎡)","currentUse":"오피스","currentUseSignal":"근린생활시설","leaseSignal":"임대중","vacancySignal":"공실없음","tenantNames":["쿠팡","네이버"],"unitRentTexts":["301호: 1500만"],"sellerMotivationText":"자산 효율화","brokerNotes":["초역세권 매물"]},"detectedSensitiveFields":["exact_address","tenant_name"],"ambiguousFields":[],"warnings":[],"areaSignal":"역삼","assetType":"오피스빌딩","priceBand":"300억","sizeSignal":"3000평(약 9917.4㎡)","dealType":"매각","buildingName":"역삼 센트럴타워","exactAddress":"역삼동 742-1","totalFloorArea":9917.3,"buildYear":2015,"currentUseSignal":"근린생활시설","vacancySignal":"공실 없음","fitSummary":"초역세권 근생 빌딩으로 시행/사옥 매입에 최적화","cautionSummary":"주요 임차인 만기 조율 필요","hiddenFields":["exact_address","seller_motivation"],"confidence":{"areaSignal":"confirmed","assetType":"confirmed","priceBand":"ai_hypothesis","fitSummary":"ai_hypothesis"},"missingData":["sizeSignal"],"boundaryNote":"본 자료는 실거래 통계 기반 참고치입니다.","buyerType":"법인 사옥형","budgetRange":{"min":50,"max":80,"display":"50억~80억"},"preferredRegions":["강남","성수"],"assetTypes":["꼬마빌딩","사옥용"],"purchasePurpose":"사옥용 매입","mustHave":["초역세권","주차"],"niceToHave":["테라스","루프탑"],"riskTolerance":"medium","financingNote":"자본금 50% 준비","missingQuestions":["구체적인 입주 시기가 언제인가요?","선호하는 수익률이 있나요?"],"privacyNotes":["연락처 비공개"],"fitReasons":["매수자 예산(50-80억)에 부합하는 매물입니다.","요청하신 성수/강남 권역에 해당합니다."],"cautionReasons":["요청한 용도와 달리 명도 협의가 다소 필요합니다."],"recommendedNextAction":"현장 답사 제안","kakaoMessage":"안녕하세요! 요청하신 조건에 부합하는 추천 매물이 있어 안내해 드립니다. 확인해보시고 피드백 부탁드립니다.","title":"강남 역삼역 초역세권 오피스 사옥용 빌딩 매각","shortSummary":"역삼역 도보 5분 거리의 준신축급 대형 오피스빌딩입니다.","dealPoints":["초역세권","사옥 최적"],"cautionPoints":["명도 조율 필요"],"hiddenInfoNotice":["보증금 및 지번은 인가 후 확인 가능"],"gateMessage":"G1 등급 등록이 필요합니다.","kakaoText":"강남 역삼역 오피스 빌딩 매각 안내입니다.","exactUnitCandidate":"101호","floor":"1층","areaSqmText":"150㎡","spaceType":"office","depositText":"5000만","monthlyRentText":"400만","maintenanceFeeText":"50만","availableFromText":"즉시입주","leaseTermMonthsText":"24","incentivesText":"렌트프리 2개월","restrictions":[],"landlordIdentity":"김성수","currentTenant":"스타트업","vacancyReason":"이전 확장","rentNegotiation":"협의 가능","region":"성수동","areaSqm":150,"deposit":5000,"monthlyRent":400,"maintenanceFee":50,"availableFrom":"즉시입주","leaseTermMonths":24,"incentives":{"rentFreeMonths":2,"interiorSupport":"일부 인테리어 지원","freeRentDetail":"렌트프리 2개월 지원"},"shortSummaryLease":"성수역 도보 5분 거리 1층 리테일 상가 매물입니다."} ### 밸류업 시나리오 (AI 추정)</a:t>
             </a:r>
             <a:endParaRPr lang="en-US" sz="1100" dirty="0"/>
           </a:p>
@@ -9499,7 +9884,7 @@
       </p:sp>
       <p:sp>
         <p:nvSpPr>
-          <p:cNvPr id="32" name="Text 29"/>
+          <p:cNvPr id="10" name="Text 7"/>
           <p:cNvSpPr/>
           <p:nvPr/>
         </p:nvSpPr>
@@ -9538,7 +9923,7 @@
       </p:sp>
       <p:sp>
         <p:nvSpPr>
-          <p:cNvPr id="33" name="Text 30"/>
+          <p:cNvPr id="11" name="Text 8"/>
           <p:cNvSpPr/>
           <p:nvPr/>
         </p:nvSpPr>
@@ -9753,11 +10138,11 @@
         <p:spPr>
           <a:xfrm>
             <a:off x="566928" y="1572768"/>
-            <a:ext cx="2490140" cy="3200400"/>
+            <a:ext cx="11057839" cy="3200400"/>
           </a:xfrm>
           <a:prstGeom prst="roundRect">
             <a:avLst>
-              <a:gd name="adj" fmla="val 2203"/>
+              <a:gd name="adj" fmla="val 1714"/>
             </a:avLst>
           </a:prstGeom>
           <a:solidFill>
@@ -9780,7 +10165,7 @@
         <p:spPr>
           <a:xfrm>
             <a:off x="786384" y="1792224"/>
-            <a:ext cx="384048" cy="384048"/>
+            <a:ext cx="438912" cy="438912"/>
           </a:xfrm>
           <a:prstGeom prst="ellipse">
             <a:avLst/>
@@ -9800,7 +10185,7 @@
         <p:spPr>
           <a:xfrm>
             <a:off x="786384" y="1792224"/>
-            <a:ext cx="384048" cy="384048"/>
+            <a:ext cx="438912" cy="438912"/>
           </a:xfrm>
           <a:prstGeom prst="rect">
             <a:avLst/>
@@ -9816,7 +10201,7 @@
               <a:buNone/>
             </a:pPr>
             <a:r>
-              <a:rPr lang="en-US" sz="1300" b="1" dirty="0">
+              <a:rPr lang="en-US" sz="1400" b="1" dirty="0">
                 <a:solidFill>
                   <a:srgbClr val="FFFFFF"/>
                 </a:solidFill>
@@ -9824,9 +10209,9 @@
                 <a:ea typeface="Arial" pitchFamily="34" charset="-122"/>
                 <a:cs typeface="Arial" pitchFamily="34" charset="-120"/>
               </a:rPr>
-              <a:t>STEP 1</a:t>
-            </a:r>
-            <a:endParaRPr lang="en-US" sz="1300" dirty="0"/>
+              <a:t>01</a:t>
+            </a:r>
+            <a:endParaRPr lang="en-US" sz="1400" dirty="0"/>
           </a:p>
         </p:txBody>
       </p:sp>
@@ -9839,7 +10224,7 @@
         <p:spPr>
           <a:xfrm>
             <a:off x="786384" y="2304288"/>
-            <a:ext cx="2051228" cy="365760"/>
+            <a:ext cx="10618927" cy="365760"/>
           </a:xfrm>
           <a:prstGeom prst="rect">
             <a:avLst/>
@@ -9863,7 +10248,7 @@
                 <a:ea typeface="Pretendard" pitchFamily="34" charset="-122"/>
                 <a:cs typeface="Pretendard" pitchFamily="34" charset="-120"/>
               </a:rPr>
-              <a:t>초기 관심 표명 → 담당자 연락</a:t>
+              <a:t>1단계</a:t>
             </a:r>
             <a:endParaRPr lang="en-US" sz="1600" dirty="0"/>
           </a:p>
@@ -9878,7 +10263,7 @@
         <p:spPr>
           <a:xfrm>
             <a:off x="786384" y="2761488"/>
-            <a:ext cx="2051228" cy="1828800"/>
+            <a:ext cx="10618927" cy="1828800"/>
           </a:xfrm>
           <a:prstGeom prst="rect">
             <a:avLst/>
@@ -9893,147 +10278,8 @@
             <a:pPr indent="0" marL="0">
               <a:buNone/>
             </a:pPr>
-            <a:endParaRPr lang="en-US" sz="1100" dirty="0"/>
-          </a:p>
-        </p:txBody>
-      </p:sp>
-      <p:sp>
-        <p:nvSpPr>
-          <p:cNvPr id="11" name="Shape 9"/>
-          <p:cNvSpPr/>
-          <p:nvPr/>
-        </p:nvSpPr>
-        <p:spPr>
-          <a:xfrm>
-            <a:off x="3148508" y="3035808"/>
-            <a:ext cx="182880" cy="274320"/>
-          </a:xfrm>
-          <a:prstGeom prst="rightArrow">
-            <a:avLst/>
-          </a:prstGeom>
-          <a:solidFill>
-            <a:srgbClr val="CBD5E0"/>
-          </a:solidFill>
-          <a:ln w="6350">
-            <a:solidFill>
-              <a:srgbClr val="718096"/>
-            </a:solidFill>
-            <a:prstDash val="solid"/>
-          </a:ln>
-        </p:spPr>
-      </p:sp>
-      <p:sp>
-        <p:nvSpPr>
-          <p:cNvPr id="12" name="Shape 10"/>
-          <p:cNvSpPr/>
-          <p:nvPr/>
-        </p:nvSpPr>
-        <p:spPr>
-          <a:xfrm>
-            <a:off x="3422828" y="1572768"/>
-            <a:ext cx="2490140" cy="3200400"/>
-          </a:xfrm>
-          <a:prstGeom prst="roundRect">
-            <a:avLst>
-              <a:gd name="adj" fmla="val 2203"/>
-            </a:avLst>
-          </a:prstGeom>
-          <a:solidFill>
-            <a:srgbClr val="F7FAFC"/>
-          </a:solidFill>
-          <a:ln w="6350">
-            <a:solidFill>
-              <a:srgbClr val="CBD5E0"/>
-            </a:solidFill>
-            <a:prstDash val="solid"/>
-          </a:ln>
-        </p:spPr>
-      </p:sp>
-      <p:sp>
-        <p:nvSpPr>
-          <p:cNvPr id="13" name="Shape 11"/>
-          <p:cNvSpPr/>
-          <p:nvPr/>
-        </p:nvSpPr>
-        <p:spPr>
-          <a:xfrm>
-            <a:off x="3642284" y="1792224"/>
-            <a:ext cx="384048" cy="384048"/>
-          </a:xfrm>
-          <a:prstGeom prst="ellipse">
-            <a:avLst/>
-          </a:prstGeom>
-          <a:solidFill>
-            <a:srgbClr val="B98A2E"/>
-          </a:solidFill>
-          <a:ln/>
-        </p:spPr>
-      </p:sp>
-      <p:sp>
-        <p:nvSpPr>
-          <p:cNvPr id="14" name="Text 12"/>
-          <p:cNvSpPr/>
-          <p:nvPr/>
-        </p:nvSpPr>
-        <p:spPr>
-          <a:xfrm>
-            <a:off x="3642284" y="1792224"/>
-            <a:ext cx="384048" cy="384048"/>
-          </a:xfrm>
-          <a:prstGeom prst="rect">
-            <a:avLst/>
-          </a:prstGeom>
-          <a:noFill/>
-          <a:ln/>
-        </p:spPr>
-        <p:txBody>
-          <a:bodyPr wrap="square" lIns="0" tIns="0" rIns="0" bIns="0" rtlCol="0" anchor="ctr"/>
-          <a:lstStyle/>
-          <a:p>
-            <a:pPr algn="ctr" indent="0" marL="0">
-              <a:buNone/>
-            </a:pPr>
-            <a:r>
-              <a:rPr lang="en-US" sz="1300" b="1" dirty="0">
-                <a:solidFill>
-                  <a:srgbClr val="FFFFFF"/>
-                </a:solidFill>
-                <a:latin typeface="Arial" pitchFamily="34" charset="0"/>
-                <a:ea typeface="Arial" pitchFamily="34" charset="-122"/>
-                <a:cs typeface="Arial" pitchFamily="34" charset="-120"/>
-              </a:rPr>
-              <a:t>STEP 2</a:t>
-            </a:r>
-            <a:endParaRPr lang="en-US" sz="1300" dirty="0"/>
-          </a:p>
-        </p:txBody>
-      </p:sp>
-      <p:sp>
-        <p:nvSpPr>
-          <p:cNvPr id="15" name="Text 13"/>
-          <p:cNvSpPr/>
-          <p:nvPr/>
-        </p:nvSpPr>
-        <p:spPr>
-          <a:xfrm>
-            <a:off x="3642284" y="2304288"/>
-            <a:ext cx="2051228" cy="365760"/>
-          </a:xfrm>
-          <a:prstGeom prst="rect">
-            <a:avLst/>
-          </a:prstGeom>
-          <a:noFill/>
-          <a:ln/>
-        </p:spPr>
-        <p:txBody>
-          <a:bodyPr wrap="square" rtlCol="0" anchor="ctr"/>
-          <a:lstStyle/>
-          <a:p>
-            <a:pPr indent="0" marL="0">
-              <a:buNone/>
-            </a:pPr>
-            <a:r>
-              <a:rPr lang="en-US" sz="1600" b="1" dirty="0">
+            <a:r>
+              <a:rPr lang="en-US" sz="1100" dirty="0">
                 <a:solidFill>
                   <a:srgbClr val="10161F"/>
                 </a:solidFill>
@@ -10041,177 +10287,16 @@
                 <a:ea typeface="Pretendard" pitchFamily="34" charset="-122"/>
                 <a:cs typeface="Pretendard" pitchFamily="34" charset="-120"/>
               </a:rPr>
-              <a:t>NDA 체결 → 임차인 정보 및 임대차계약서 제공</a:t>
-            </a:r>
-            <a:endParaRPr lang="en-US" sz="1600" dirty="0"/>
-          </a:p>
-        </p:txBody>
-      </p:sp>
-      <p:sp>
-        <p:nvSpPr>
-          <p:cNvPr id="16" name="Text 14"/>
-          <p:cNvSpPr/>
-          <p:nvPr/>
-        </p:nvSpPr>
-        <p:spPr>
-          <a:xfrm>
-            <a:off x="3642284" y="2761488"/>
-            <a:ext cx="2051228" cy="1828800"/>
-          </a:xfrm>
-          <a:prstGeom prst="rect">
-            <a:avLst/>
-          </a:prstGeom>
-          <a:noFill/>
-          <a:ln/>
-        </p:spPr>
-        <p:txBody>
-          <a:bodyPr wrap="square" rtlCol="0" anchor="t"/>
-          <a:lstStyle/>
+              <a:t>{"ok"</a:t>
+            </a:r>
+            <a:endParaRPr lang="en-US" sz="1100" dirty="0"/>
+          </a:p>
           <a:p>
             <a:pPr indent="0" marL="0">
               <a:buNone/>
             </a:pPr>
-            <a:endParaRPr lang="en-US" sz="1100" dirty="0"/>
-          </a:p>
-        </p:txBody>
-      </p:sp>
-      <p:sp>
-        <p:nvSpPr>
-          <p:cNvPr id="17" name="Shape 15"/>
-          <p:cNvSpPr/>
-          <p:nvPr/>
-        </p:nvSpPr>
-        <p:spPr>
-          <a:xfrm>
-            <a:off x="6004408" y="3035808"/>
-            <a:ext cx="182880" cy="274320"/>
-          </a:xfrm>
-          <a:prstGeom prst="rightArrow">
-            <a:avLst/>
-          </a:prstGeom>
-          <a:solidFill>
-            <a:srgbClr val="CBD5E0"/>
-          </a:solidFill>
-          <a:ln w="6350">
-            <a:solidFill>
-              <a:srgbClr val="718096"/>
-            </a:solidFill>
-            <a:prstDash val="solid"/>
-          </a:ln>
-        </p:spPr>
-      </p:sp>
-      <p:sp>
-        <p:nvSpPr>
-          <p:cNvPr id="18" name="Shape 16"/>
-          <p:cNvSpPr/>
-          <p:nvPr/>
-        </p:nvSpPr>
-        <p:spPr>
-          <a:xfrm>
-            <a:off x="6278728" y="1572768"/>
-            <a:ext cx="2490140" cy="3200400"/>
-          </a:xfrm>
-          <a:prstGeom prst="roundRect">
-            <a:avLst>
-              <a:gd name="adj" fmla="val 2203"/>
-            </a:avLst>
-          </a:prstGeom>
-          <a:solidFill>
-            <a:srgbClr val="F7FAFC"/>
-          </a:solidFill>
-          <a:ln w="6350">
-            <a:solidFill>
-              <a:srgbClr val="CBD5E0"/>
-            </a:solidFill>
-            <a:prstDash val="solid"/>
-          </a:ln>
-        </p:spPr>
-      </p:sp>
-      <p:sp>
-        <p:nvSpPr>
-          <p:cNvPr id="19" name="Shape 17"/>
-          <p:cNvSpPr/>
-          <p:nvPr/>
-        </p:nvSpPr>
-        <p:spPr>
-          <a:xfrm>
-            <a:off x="6498184" y="1792224"/>
-            <a:ext cx="384048" cy="384048"/>
-          </a:xfrm>
-          <a:prstGeom prst="ellipse">
-            <a:avLst/>
-          </a:prstGeom>
-          <a:solidFill>
-            <a:srgbClr val="B98A2E"/>
-          </a:solidFill>
-          <a:ln/>
-        </p:spPr>
-      </p:sp>
-      <p:sp>
-        <p:nvSpPr>
-          <p:cNvPr id="20" name="Text 18"/>
-          <p:cNvSpPr/>
-          <p:nvPr/>
-        </p:nvSpPr>
-        <p:spPr>
-          <a:xfrm>
-            <a:off x="6498184" y="1792224"/>
-            <a:ext cx="384048" cy="384048"/>
-          </a:xfrm>
-          <a:prstGeom prst="rect">
-            <a:avLst/>
-          </a:prstGeom>
-          <a:noFill/>
-          <a:ln/>
-        </p:spPr>
-        <p:txBody>
-          <a:bodyPr wrap="square" lIns="0" tIns="0" rIns="0" bIns="0" rtlCol="0" anchor="ctr"/>
-          <a:lstStyle/>
-          <a:p>
-            <a:pPr algn="ctr" indent="0" marL="0">
-              <a:buNone/>
-            </a:pPr>
-            <a:r>
-              <a:rPr lang="en-US" sz="1300" b="1" dirty="0">
-                <a:solidFill>
-                  <a:srgbClr val="FFFFFF"/>
-                </a:solidFill>
-                <a:latin typeface="Arial" pitchFamily="34" charset="0"/>
-                <a:ea typeface="Arial" pitchFamily="34" charset="-122"/>
-                <a:cs typeface="Arial" pitchFamily="34" charset="-120"/>
-              </a:rPr>
-              <a:t>STEP 3</a:t>
-            </a:r>
-            <a:endParaRPr lang="en-US" sz="1300" dirty="0"/>
-          </a:p>
-        </p:txBody>
-      </p:sp>
-      <p:sp>
-        <p:nvSpPr>
-          <p:cNvPr id="21" name="Text 19"/>
-          <p:cNvSpPr/>
-          <p:nvPr/>
-        </p:nvSpPr>
-        <p:spPr>
-          <a:xfrm>
-            <a:off x="6498184" y="2304288"/>
-            <a:ext cx="2051228" cy="365760"/>
-          </a:xfrm>
-          <a:prstGeom prst="rect">
-            <a:avLst/>
-          </a:prstGeom>
-          <a:noFill/>
-          <a:ln/>
-        </p:spPr>
-        <p:txBody>
-          <a:bodyPr wrap="square" rtlCol="0" anchor="ctr"/>
-          <a:lstStyle/>
-          <a:p>
-            <a:pPr indent="0" marL="0">
-              <a:buNone/>
-            </a:pPr>
-            <a:r>
-              <a:rPr lang="en-US" sz="1600" b="1" dirty="0">
+            <a:r>
+              <a:rPr lang="en-US" sz="1100" dirty="0">
                 <a:solidFill>
                   <a:srgbClr val="10161F"/>
                 </a:solidFill>
@@ -10219,251 +10304,45 @@
                 <a:ea typeface="Pretendard" pitchFamily="34" charset="-122"/>
                 <a:cs typeface="Pretendard" pitchFamily="34" charset="-120"/>
               </a:rPr>
-              <a:t>현장 실사 일정 조율 → 건물 컨디션 및 설비 직접 확인</a:t>
-            </a:r>
-            <a:endParaRPr lang="en-US" sz="1600" dirty="0"/>
-          </a:p>
-        </p:txBody>
-      </p:sp>
-      <p:sp>
-        <p:nvSpPr>
-          <p:cNvPr id="22" name="Text 20"/>
-          <p:cNvSpPr/>
-          <p:nvPr/>
-        </p:nvSpPr>
-        <p:spPr>
-          <a:xfrm>
-            <a:off x="6498184" y="2761488"/>
-            <a:ext cx="2051228" cy="1828800"/>
-          </a:xfrm>
-          <a:prstGeom prst="rect">
-            <a:avLst/>
-          </a:prstGeom>
-          <a:noFill/>
-          <a:ln/>
-        </p:spPr>
-        <p:txBody>
-          <a:bodyPr wrap="square" rtlCol="0" anchor="t"/>
+              <a:t>true,"mocked":true,"extractedFields":{"area_signal":"역삼","asset_type":"오피스빌딩","price_band":"300억","size_signal":"3000평(약 9917.4㎡)"},"extractedFacts":{"region":"역삼","exactAddressCandidate":"역삼동 742-1","assetType":"오피스빌딩","priceText":"300억","sizeText":"3000평(약 9917.4㎡)","currentUse":"오피스","currentUseSignal":"근린생활시설","leaseSignal":"임대중","vacancySignal":"공실없음","tenantNames":["쿠팡","네이버"],"unitRentTexts":["301호: 1500만"],"sellerMotivationText":"자산 효율화","brokerNotes":["초역세권 매물"]},"detectedSensitiveFields":["exact_address","tenant_name"],"ambiguousFields":[],"warnings":[],"areaSignal":"역삼","assetType":"오피스빌딩","priceBand":"300억","sizeSignal":"3000평(약 9917.4㎡)","dealType":"매각","buildingName":"역삼 센트럴타워","exactAddress":"역삼동 742-1","totalFloorArea":9917.3,"buildYear":2015,"currentUseSignal":"근린생활시설","vacancySignal":"공실 없음","fitSummary":"초역세권 근생 빌딩으로 시행/사옥 매입에 최적화","cautionSummary":"주요 임차인 만기 조율 필요","hiddenFields":["exact_address","seller_motivation"],"confidence":{"areaSignal":"confirmed","assetType":"confirmed","priceBand":"ai_hypothesis","fitSummary":"ai_hypothesis"},"missingData":["sizeSignal"],"boundaryNote":"본 자료는 실거래 통계 기반 참고치입니다.","buyerType":"법인 사옥형","budgetRange":{"min":50,"max":80,"display":"50억~80억"},"preferredRegions":["강남","성수"],"assetTypes":["꼬마빌딩","사옥용"],"purchasePurpose":"사옥용 매입","mustHave":["초역세권","주차"],"niceToHave":["테라스","루프탑"],"riskTolerance":"medium","financingNote":"자본금 50% 준비","missingQuestions":["구체적인 입주 시기가 언제인가요?","선호하는 수익률이 있나요?"],"privacyNotes":["연락처 비공개"],"fitReasons":["매수자 예산(50-80억)에 부합하는 매물입니다.","요청하신 성수/강남 권역에 해당합니다."],"cautionReasons":["요청한 용도와 달리 명도 협의가 다소 필요합니다."],"recommendedNextAction":"현장 답사 제안","kakaoMessage":"안녕하세요! 요청하신 조건에 부합하는 추천 매물이 있어 안내해 드립니다. 확인해보시고 피드백 부탁드립니다.","title":"강남 역삼역 초역세권 오피스 사옥용 빌딩 매각","shortSummary":"역삼역 도보 5분 거리의 준신축급 대형 오피스빌딩입니다.","dealPoints":["초역세권","사옥 최적"],"cautionPoints":["명도 조율 필요"],"hiddenInfoNotice":["보증금 및 지번은 인가 후 확인 가능"],"gateMessage":"G1 등급 등록이 필요합니다.","kakaoText":"강남 역삼역 오피스 빌딩 매각 안내입니다.","exactUnitCandidate":"101호","floor":"1층","areaSqmText":"150㎡","spaceType":"office","depositText":"5000만","monthlyRentText":"400만","maintenanceFeeText":"50만","availableFromText":"즉시입주","leaseTermMonthsText":"24","incentivesText":"렌트프리 2개월","restrictions":[],"landlordIdentity":"김성수","currentTenant":"스타트업","vacancyReason":"이전 확장","rentNegotiation":"협의 가능","region":"성수동","areaSqm":150,"deposit":5000,"monthlyRent":400,"maintenanceFee":50,"availableFrom":"즉시입주","leaseTermMonths":24,"incentives":{"rentFreeMonths":2,"interiorSupport":"일부 인테리어 지원","freeRentDetail":"렌트프리 2개월 지원"},"shortSummaryLease":"성수역 도보 5분 거리 1층 리테일 상가 매물입니다."}</a:t>
+            </a:r>
+            <a:endParaRPr lang="en-US" sz="1100" dirty="0"/>
+          </a:p>
+        </p:txBody>
+      </p:sp>
+      <p:sp>
+        <p:nvSpPr>
+          <p:cNvPr id="11" name="Text 9"/>
+          <p:cNvSpPr/>
+          <p:nvPr/>
+        </p:nvSpPr>
+        <p:spPr>
+          <a:xfrm>
+            <a:off x="566928" y="6382512"/>
+            <a:ext cx="7315200" cy="219456"/>
+          </a:xfrm>
+          <a:prstGeom prst="rect">
+            <a:avLst/>
+          </a:prstGeom>
+          <a:noFill/>
+          <a:ln/>
+        </p:spPr>
+        <p:txBody>
+          <a:bodyPr wrap="square" lIns="0" tIns="0" rIns="0" bIns="0" rtlCol="0" anchor="ctr"/>
           <a:lstStyle/>
           <a:p>
             <a:pPr indent="0" marL="0">
               <a:buNone/>
             </a:pPr>
-            <a:endParaRPr lang="en-US" sz="1100" dirty="0"/>
-          </a:p>
-        </p:txBody>
-      </p:sp>
-      <p:sp>
-        <p:nvSpPr>
-          <p:cNvPr id="23" name="Shape 21"/>
-          <p:cNvSpPr/>
-          <p:nvPr/>
-        </p:nvSpPr>
-        <p:spPr>
-          <a:xfrm>
-            <a:off x="8860307" y="3035808"/>
-            <a:ext cx="182880" cy="274320"/>
-          </a:xfrm>
-          <a:prstGeom prst="rightArrow">
-            <a:avLst/>
-          </a:prstGeom>
-          <a:solidFill>
-            <a:srgbClr val="CBD5E0"/>
-          </a:solidFill>
-          <a:ln w="6350">
-            <a:solidFill>
-              <a:srgbClr val="718096"/>
-            </a:solidFill>
-            <a:prstDash val="solid"/>
-          </a:ln>
-        </p:spPr>
-      </p:sp>
-      <p:sp>
-        <p:nvSpPr>
-          <p:cNvPr id="24" name="Shape 22"/>
-          <p:cNvSpPr/>
-          <p:nvPr/>
-        </p:nvSpPr>
-        <p:spPr>
-          <a:xfrm>
-            <a:off x="9134627" y="1572768"/>
-            <a:ext cx="2490140" cy="3200400"/>
-          </a:xfrm>
-          <a:prstGeom prst="roundRect">
-            <a:avLst>
-              <a:gd name="adj" fmla="val 2203"/>
-            </a:avLst>
-          </a:prstGeom>
-          <a:solidFill>
-            <a:srgbClr val="F7FAFC"/>
-          </a:solidFill>
-          <a:ln w="6350">
-            <a:solidFill>
-              <a:srgbClr val="CBD5E0"/>
-            </a:solidFill>
-            <a:prstDash val="solid"/>
-          </a:ln>
-        </p:spPr>
-      </p:sp>
-      <p:sp>
-        <p:nvSpPr>
-          <p:cNvPr id="25" name="Shape 23"/>
-          <p:cNvSpPr/>
-          <p:nvPr/>
-        </p:nvSpPr>
-        <p:spPr>
-          <a:xfrm>
-            <a:off x="9354083" y="1792224"/>
-            <a:ext cx="384048" cy="384048"/>
-          </a:xfrm>
-          <a:prstGeom prst="ellipse">
-            <a:avLst/>
-          </a:prstGeom>
-          <a:solidFill>
-            <a:srgbClr val="B98A2E"/>
-          </a:solidFill>
-          <a:ln/>
-        </p:spPr>
-      </p:sp>
-      <p:sp>
-        <p:nvSpPr>
-          <p:cNvPr id="26" name="Text 24"/>
-          <p:cNvSpPr/>
-          <p:nvPr/>
-        </p:nvSpPr>
-        <p:spPr>
-          <a:xfrm>
-            <a:off x="9354083" y="1792224"/>
-            <a:ext cx="384048" cy="384048"/>
-          </a:xfrm>
-          <a:prstGeom prst="rect">
-            <a:avLst/>
-          </a:prstGeom>
-          <a:noFill/>
-          <a:ln/>
-        </p:spPr>
-        <p:txBody>
-          <a:bodyPr wrap="square" lIns="0" tIns="0" rIns="0" bIns="0" rtlCol="0" anchor="ctr"/>
-          <a:lstStyle/>
-          <a:p>
-            <a:pPr algn="ctr" indent="0" marL="0">
-              <a:buNone/>
-            </a:pPr>
-            <a:r>
-              <a:rPr lang="en-US" sz="1300" b="1" dirty="0">
-                <a:solidFill>
-                  <a:srgbClr val="FFFFFF"/>
-                </a:solidFill>
-                <a:latin typeface="Arial" pitchFamily="34" charset="0"/>
-                <a:ea typeface="Arial" pitchFamily="34" charset="-122"/>
-                <a:cs typeface="Arial" pitchFamily="34" charset="-120"/>
-              </a:rPr>
-              <a:t>STEP 4</a:t>
-            </a:r>
-            <a:endParaRPr lang="en-US" sz="1300" dirty="0"/>
-          </a:p>
-        </p:txBody>
-      </p:sp>
-      <p:sp>
-        <p:nvSpPr>
-          <p:cNvPr id="27" name="Text 25"/>
-          <p:cNvSpPr/>
-          <p:nvPr/>
-        </p:nvSpPr>
-        <p:spPr>
-          <a:xfrm>
-            <a:off x="9354083" y="2304288"/>
-            <a:ext cx="2051228" cy="365760"/>
-          </a:xfrm>
-          <a:prstGeom prst="rect">
-            <a:avLst/>
-          </a:prstGeom>
-          <a:noFill/>
-          <a:ln/>
-        </p:spPr>
-        <p:txBody>
-          <a:bodyPr wrap="square" rtlCol="0" anchor="ctr"/>
-          <a:lstStyle/>
-          <a:p>
-            <a:pPr indent="0" marL="0">
-              <a:buNone/>
-            </a:pPr>
-            <a:r>
-              <a:rPr lang="en-US" sz="1600" b="1" dirty="0">
-                <a:solidFill>
-                  <a:srgbClr val="10161F"/>
+            <a:r>
+              <a:rPr lang="en-US" sz="800" dirty="0">
+                <a:solidFill>
+                  <a:srgbClr val="718096"/>
                 </a:solidFill>
                 <a:latin typeface="Pretendard" pitchFamily="34" charset="0"/>
                 <a:ea typeface="Pretendard" pitchFamily="34" charset="-122"/>
                 <a:cs typeface="Pretendard" pitchFamily="34" charset="-120"/>
               </a:rPr>
-              <a:t>LOI(투자의향서) 제출 → 가격 협의 개시</a:t>
-            </a:r>
-            <a:endParaRPr lang="en-US" sz="1600" dirty="0"/>
-          </a:p>
-        </p:txBody>
-      </p:sp>
-      <p:sp>
-        <p:nvSpPr>
-          <p:cNvPr id="28" name="Text 26"/>
-          <p:cNvSpPr/>
-          <p:nvPr/>
-        </p:nvSpPr>
-        <p:spPr>
-          <a:xfrm>
-            <a:off x="9354083" y="2761488"/>
-            <a:ext cx="2051228" cy="1828800"/>
-          </a:xfrm>
-          <a:prstGeom prst="rect">
-            <a:avLst/>
-          </a:prstGeom>
-          <a:noFill/>
-          <a:ln/>
-        </p:spPr>
-        <p:txBody>
-          <a:bodyPr wrap="square" rtlCol="0" anchor="t"/>
-          <a:lstStyle/>
-          <a:p>
-            <a:pPr indent="0" marL="0">
-              <a:buNone/>
-            </a:pPr>
-            <a:endParaRPr lang="en-US" sz="1100" dirty="0"/>
-          </a:p>
-        </p:txBody>
-      </p:sp>
-      <p:sp>
-        <p:nvSpPr>
-          <p:cNvPr id="29" name="Text 27"/>
-          <p:cNvSpPr/>
-          <p:nvPr/>
-        </p:nvSpPr>
-        <p:spPr>
-          <a:xfrm>
-            <a:off x="566928" y="6382512"/>
-            <a:ext cx="7315200" cy="219456"/>
-          </a:xfrm>
-          <a:prstGeom prst="rect">
-            <a:avLst/>
-          </a:prstGeom>
-          <a:noFill/>
-          <a:ln/>
-        </p:spPr>
-        <p:txBody>
-          <a:bodyPr wrap="square" lIns="0" tIns="0" rIns="0" bIns="0" rtlCol="0" anchor="ctr"/>
-          <a:lstStyle/>
-          <a:p>
-            <a:pPr indent="0" marL="0">
-              <a:buNone/>
-            </a:pPr>
-            <a:r>
-              <a:rPr lang="en-US" sz="800" dirty="0">
-                <a:solidFill>
-                  <a:srgbClr val="718096"/>
-                </a:solidFill>
-                <a:latin typeface="Pretendard" pitchFamily="34" charset="0"/>
-                <a:ea typeface="Pretendard" pitchFamily="34" charset="-122"/>
-                <a:cs typeface="Pretendard" pitchFamily="34" charset="-120"/>
-              </a:rPr>
               <a:t>크리딜   |   </a:t>
             </a:r>
             <a:endParaRPr lang="en-US" sz="800" dirty="0"/>
@@ -10472,7 +10351,7 @@
       </p:sp>
       <p:sp>
         <p:nvSpPr>
-          <p:cNvPr id="30" name="Text 28"/>
+          <p:cNvPr id="12" name="Text 10"/>
           <p:cNvSpPr/>
           <p:nvPr/>
         </p:nvSpPr>

--- a/docs/test/stress/e2e-outputs/income_case14_bangi_discount_basic.pptx
+++ b/docs/test/stress/e2e-outputs/income_case14_bangi_discount_basic.pptx
@@ -15,9 +15,10 @@
     <p:sldId id="263" r:id="rId9"/>
     <p:sldId id="264" r:id="rId10"/>
     <p:sldId id="265" r:id="rId11"/>
+    <p:sldId id="266" r:id="rId12"/>
   </p:sldIdLst>
   <p:notesMasterIdLst>
-    <p:notesMasterId r:id="rId12"/>
+    <p:notesMasterId r:id="rId13"/>
   </p:notesMasterIdLst>
   <p:sldSz cx="12192000" cy="6858000"/>
   <p:notesSz cx="6858000" cy="12192000"/>
@@ -623,6 +624,94 @@
             <a:fld id="{F7021451-1387-4CA6-816F-3879F97B5CBC}" type="slidenum">
               <a:rPr lang="en-US"/>
               <a:t>10</a:t>
+            </a:fld>
+            <a:endParaRPr lang="en-US"/>
+          </a:p>
+        </p:txBody>
+      </p:sp>
+    </p:spTree>
+    <p:extLst>
+      <p:ext uri="{BB962C8B-B14F-4D97-AF65-F5344CB8AC3E}">
+        <p14:creationId xmlns:p14="http://schemas.microsoft.com/office/powerpoint/2010/main" val="1024086991"/>
+      </p:ext>
+    </p:extLst>
+  </p:cSld>
+  <p:clrMapOvr>
+    <a:masterClrMapping/>
+  </p:clrMapOvr>
+</p:notes>
+</file>
+
+<file path=ppt/notesSlides/notesSlide11.xml><?xml version="1.0" encoding="utf-8"?>
+<p:notes xmlns:a="http://schemas.openxmlformats.org/drawingml/2006/main" xmlns:r="http://schemas.openxmlformats.org/officeDocument/2006/relationships" xmlns:p="http://schemas.openxmlformats.org/presentationml/2006/main">
+  <p:cSld>
+    <p:spTree>
+      <p:nvGrpSpPr>
+        <p:cNvPr id="1" name=""/>
+        <p:cNvGrpSpPr/>
+        <p:nvPr/>
+      </p:nvGrpSpPr>
+      <p:grpSpPr>
+        <a:xfrm>
+          <a:off x="0" y="0"/>
+          <a:ext cx="0" cy="0"/>
+          <a:chOff x="0" y="0"/>
+          <a:chExt cx="0" cy="0"/>
+        </a:xfrm>
+      </p:grpSpPr>
+      <p:sp>
+        <p:nvSpPr>
+          <p:cNvPr id="2" name="Slide Image Placeholder 1"/>
+          <p:cNvSpPr>
+            <a:spLocks noGrp="1" noRot="1" noChangeAspect="1"/>
+          </p:cNvSpPr>
+          <p:nvPr>
+            <p:ph type="sldImg"/>
+          </p:nvPr>
+        </p:nvSpPr>
+        <p:spPr/>
+      </p:sp>
+      <p:sp>
+        <p:nvSpPr>
+          <p:cNvPr id="3" name="Notes Placeholder 2"/>
+          <p:cNvSpPr>
+            <a:spLocks noGrp="1"/>
+          </p:cNvSpPr>
+          <p:nvPr>
+            <p:ph type="body" idx="1"/>
+          </p:nvPr>
+        </p:nvSpPr>
+        <p:spPr/>
+        <p:txBody>
+          <a:bodyPr/>
+          <a:lstStyle/>
+          <a:p>
+            <a:r>
+              <a:rPr lang="en-US" dirty="0"/>
+              <a:t/>
+            </a:r>
+            <a:endParaRPr lang="en-US" dirty="0"/>
+          </a:p>
+        </p:txBody>
+      </p:sp>
+      <p:sp>
+        <p:nvSpPr>
+          <p:cNvPr id="4" name="Slide Number Placeholder 3"/>
+          <p:cNvSpPr>
+            <a:spLocks noGrp="1"/>
+          </p:cNvSpPr>
+          <p:nvPr>
+            <p:ph type="sldNum" sz="quarter" idx="10"/>
+          </p:nvPr>
+        </p:nvSpPr>
+        <p:spPr/>
+        <p:txBody>
+          <a:bodyPr/>
+          <a:lstStyle/>
+          <a:p>
+            <a:fld id="{F7021451-1387-4CA6-816F-3879F97B5CBC}" type="slidenum">
+              <a:rPr lang="en-US"/>
+              <a:t>11</a:t>
             </a:fld>
             <a:endParaRPr lang="en-US"/>
           </a:p>
@@ -2297,6 +2386,434 @@
     <p:bg>
       <p:bgPr>
         <a:solidFill>
+          <a:srgbClr val="FFFFFF"/>
+        </a:solidFill>
+      </p:bgPr>
+    </p:bg>
+    <p:spTree>
+      <p:nvGrpSpPr>
+        <p:cNvPr id="1" name=""/>
+        <p:cNvGrpSpPr/>
+        <p:nvPr/>
+      </p:nvGrpSpPr>
+      <p:grpSpPr>
+        <a:xfrm>
+          <a:off x="0" y="0"/>
+          <a:ext cx="0" cy="0"/>
+          <a:chOff x="0" y="0"/>
+          <a:chExt cx="0" cy="0"/>
+        </a:xfrm>
+      </p:grpSpPr>
+      <p:sp>
+        <p:nvSpPr>
+          <p:cNvPr id="2" name="Shape 0"/>
+          <p:cNvSpPr/>
+          <p:nvPr/>
+        </p:nvSpPr>
+        <p:spPr>
+          <a:xfrm>
+            <a:off x="566928" y="457200"/>
+            <a:ext cx="384048" cy="384048"/>
+          </a:xfrm>
+          <a:prstGeom prst="ellipse">
+            <a:avLst/>
+          </a:prstGeom>
+          <a:solidFill>
+            <a:srgbClr val="B98A2E"/>
+          </a:solidFill>
+          <a:ln/>
+        </p:spPr>
+      </p:sp>
+      <p:sp>
+        <p:nvSpPr>
+          <p:cNvPr id="3" name="Text 1"/>
+          <p:cNvSpPr/>
+          <p:nvPr/>
+        </p:nvSpPr>
+        <p:spPr>
+          <a:xfrm>
+            <a:off x="566928" y="457200"/>
+            <a:ext cx="384048" cy="384048"/>
+          </a:xfrm>
+          <a:prstGeom prst="rect">
+            <a:avLst/>
+          </a:prstGeom>
+          <a:noFill/>
+          <a:ln/>
+        </p:spPr>
+        <p:txBody>
+          <a:bodyPr wrap="square" lIns="0" tIns="0" rIns="0" bIns="0" rtlCol="0" anchor="ctr"/>
+          <a:lstStyle/>
+          <a:p>
+            <a:pPr algn="ctr" indent="0" marL="0">
+              <a:buNone/>
+            </a:pPr>
+            <a:r>
+              <a:rPr lang="en-US" sz="1300" b="1" dirty="0">
+                <a:solidFill>
+                  <a:srgbClr val="FFFFFF"/>
+                </a:solidFill>
+                <a:latin typeface="Arial" pitchFamily="34" charset="0"/>
+                <a:ea typeface="Arial" pitchFamily="34" charset="-122"/>
+                <a:cs typeface="Arial" pitchFamily="34" charset="-120"/>
+              </a:rPr>
+              <a:t>10</a:t>
+            </a:r>
+            <a:endParaRPr lang="en-US" sz="1300" dirty="0"/>
+          </a:p>
+        </p:txBody>
+      </p:sp>
+      <p:sp>
+        <p:nvSpPr>
+          <p:cNvPr id="4" name="Text 2"/>
+          <p:cNvSpPr/>
+          <p:nvPr/>
+        </p:nvSpPr>
+        <p:spPr>
+          <a:xfrm>
+            <a:off x="1133856" y="457200"/>
+            <a:ext cx="10490911" cy="182880"/>
+          </a:xfrm>
+          <a:prstGeom prst="rect">
+            <a:avLst/>
+          </a:prstGeom>
+          <a:noFill/>
+          <a:ln/>
+        </p:spPr>
+        <p:txBody>
+          <a:bodyPr wrap="square" lIns="0" tIns="0" rIns="0" bIns="0" rtlCol="0" anchor="ctr"/>
+          <a:lstStyle/>
+          <a:p>
+            <a:pPr indent="0" marL="0">
+              <a:buNone/>
+            </a:pPr>
+            <a:r>
+              <a:rPr lang="en-US" sz="950" b="1" spc="200" kern="0" dirty="0">
+                <a:solidFill>
+                  <a:srgbClr val="B98A2E"/>
+                </a:solidFill>
+                <a:latin typeface="Arial" pitchFamily="34" charset="0"/>
+                <a:ea typeface="Arial" pitchFamily="34" charset="-122"/>
+                <a:cs typeface="Arial" pitchFamily="34" charset="-120"/>
+              </a:rPr>
+              <a:t>Process</a:t>
+            </a:r>
+            <a:endParaRPr lang="en-US" sz="950" dirty="0"/>
+          </a:p>
+        </p:txBody>
+      </p:sp>
+      <p:sp>
+        <p:nvSpPr>
+          <p:cNvPr id="5" name="Text 3"/>
+          <p:cNvSpPr/>
+          <p:nvPr/>
+        </p:nvSpPr>
+        <p:spPr>
+          <a:xfrm>
+            <a:off x="1133856" y="640080"/>
+            <a:ext cx="10490911" cy="365760"/>
+          </a:xfrm>
+          <a:prstGeom prst="rect">
+            <a:avLst/>
+          </a:prstGeom>
+          <a:noFill/>
+          <a:ln/>
+        </p:spPr>
+        <p:txBody>
+          <a:bodyPr wrap="square" lIns="0" tIns="0" rIns="0" bIns="0" rtlCol="0" anchor="ctr"/>
+          <a:lstStyle/>
+          <a:p>
+            <a:pPr indent="0" marL="0">
+              <a:buNone/>
+            </a:pPr>
+            <a:r>
+              <a:rPr lang="en-US" sz="2300" b="1" dirty="0">
+                <a:solidFill>
+                  <a:srgbClr val="10161F"/>
+                </a:solidFill>
+                <a:latin typeface="Pretendard" pitchFamily="34" charset="0"/>
+                <a:ea typeface="Pretendard" pitchFamily="34" charset="-122"/>
+                <a:cs typeface="Pretendard" pitchFamily="34" charset="-120"/>
+              </a:rPr>
+              <a:t>검토 후 다음 단계는 무엇인가</a:t>
+            </a:r>
+            <a:endParaRPr lang="en-US" sz="2300" dirty="0"/>
+          </a:p>
+        </p:txBody>
+      </p:sp>
+      <p:sp>
+        <p:nvSpPr>
+          <p:cNvPr id="6" name="Shape 4"/>
+          <p:cNvSpPr/>
+          <p:nvPr/>
+        </p:nvSpPr>
+        <p:spPr>
+          <a:xfrm>
+            <a:off x="566928" y="1572768"/>
+            <a:ext cx="11057839" cy="3200400"/>
+          </a:xfrm>
+          <a:prstGeom prst="roundRect">
+            <a:avLst>
+              <a:gd name="adj" fmla="val 1714"/>
+            </a:avLst>
+          </a:prstGeom>
+          <a:solidFill>
+            <a:srgbClr val="F7FAFC"/>
+          </a:solidFill>
+          <a:ln w="6350">
+            <a:solidFill>
+              <a:srgbClr val="CBD5E0"/>
+            </a:solidFill>
+            <a:prstDash val="solid"/>
+          </a:ln>
+        </p:spPr>
+      </p:sp>
+      <p:sp>
+        <p:nvSpPr>
+          <p:cNvPr id="7" name="Shape 5"/>
+          <p:cNvSpPr/>
+          <p:nvPr/>
+        </p:nvSpPr>
+        <p:spPr>
+          <a:xfrm>
+            <a:off x="786384" y="1792224"/>
+            <a:ext cx="438912" cy="438912"/>
+          </a:xfrm>
+          <a:prstGeom prst="ellipse">
+            <a:avLst/>
+          </a:prstGeom>
+          <a:solidFill>
+            <a:srgbClr val="B98A2E"/>
+          </a:solidFill>
+          <a:ln/>
+        </p:spPr>
+      </p:sp>
+      <p:sp>
+        <p:nvSpPr>
+          <p:cNvPr id="8" name="Text 6"/>
+          <p:cNvSpPr/>
+          <p:nvPr/>
+        </p:nvSpPr>
+        <p:spPr>
+          <a:xfrm>
+            <a:off x="786384" y="1792224"/>
+            <a:ext cx="438912" cy="438912"/>
+          </a:xfrm>
+          <a:prstGeom prst="rect">
+            <a:avLst/>
+          </a:prstGeom>
+          <a:noFill/>
+          <a:ln/>
+        </p:spPr>
+        <p:txBody>
+          <a:bodyPr wrap="square" lIns="0" tIns="0" rIns="0" bIns="0" rtlCol="0" anchor="ctr"/>
+          <a:lstStyle/>
+          <a:p>
+            <a:pPr algn="ctr" indent="0" marL="0">
+              <a:buNone/>
+            </a:pPr>
+            <a:r>
+              <a:rPr lang="en-US" sz="1400" b="1" dirty="0">
+                <a:solidFill>
+                  <a:srgbClr val="FFFFFF"/>
+                </a:solidFill>
+                <a:latin typeface="Arial" pitchFamily="34" charset="0"/>
+                <a:ea typeface="Arial" pitchFamily="34" charset="-122"/>
+                <a:cs typeface="Arial" pitchFamily="34" charset="-120"/>
+              </a:rPr>
+              <a:t>01</a:t>
+            </a:r>
+            <a:endParaRPr lang="en-US" sz="1400" dirty="0"/>
+          </a:p>
+        </p:txBody>
+      </p:sp>
+      <p:sp>
+        <p:nvSpPr>
+          <p:cNvPr id="9" name="Text 7"/>
+          <p:cNvSpPr/>
+          <p:nvPr/>
+        </p:nvSpPr>
+        <p:spPr>
+          <a:xfrm>
+            <a:off x="786384" y="2304288"/>
+            <a:ext cx="10618927" cy="365760"/>
+          </a:xfrm>
+          <a:prstGeom prst="rect">
+            <a:avLst/>
+          </a:prstGeom>
+          <a:noFill/>
+          <a:ln/>
+        </p:spPr>
+        <p:txBody>
+          <a:bodyPr wrap="square" rtlCol="0" anchor="ctr"/>
+          <a:lstStyle/>
+          <a:p>
+            <a:pPr indent="0" marL="0">
+              <a:buNone/>
+            </a:pPr>
+            <a:r>
+              <a:rPr lang="en-US" sz="1600" b="1" dirty="0">
+                <a:solidFill>
+                  <a:srgbClr val="10161F"/>
+                </a:solidFill>
+                <a:latin typeface="Pretendard" pitchFamily="34" charset="0"/>
+                <a:ea typeface="Pretendard" pitchFamily="34" charset="-122"/>
+                <a:cs typeface="Pretendard" pitchFamily="34" charset="-120"/>
+              </a:rPr>
+              <a:t>1단계</a:t>
+            </a:r>
+            <a:endParaRPr lang="en-US" sz="1600" dirty="0"/>
+          </a:p>
+        </p:txBody>
+      </p:sp>
+      <p:sp>
+        <p:nvSpPr>
+          <p:cNvPr id="10" name="Text 8"/>
+          <p:cNvSpPr/>
+          <p:nvPr/>
+        </p:nvSpPr>
+        <p:spPr>
+          <a:xfrm>
+            <a:off x="786384" y="2761488"/>
+            <a:ext cx="10618927" cy="1828800"/>
+          </a:xfrm>
+          <a:prstGeom prst="rect">
+            <a:avLst/>
+          </a:prstGeom>
+          <a:noFill/>
+          <a:ln/>
+        </p:spPr>
+        <p:txBody>
+          <a:bodyPr wrap="square" rtlCol="0" anchor="t"/>
+          <a:lstStyle/>
+          <a:p>
+            <a:pPr indent="0" marL="0">
+              <a:buNone/>
+            </a:pPr>
+            <a:r>
+              <a:rPr lang="en-US" sz="1100" dirty="0">
+                <a:solidFill>
+                  <a:srgbClr val="10161F"/>
+                </a:solidFill>
+                <a:latin typeface="Pretendard" pitchFamily="34" charset="0"/>
+                <a:ea typeface="Pretendard" pitchFamily="34" charset="-122"/>
+                <a:cs typeface="Pretendard" pitchFamily="34" charset="-120"/>
+              </a:rPr>
+              <a:t>{"ok"</a:t>
+            </a:r>
+            <a:endParaRPr lang="en-US" sz="1100" dirty="0"/>
+          </a:p>
+          <a:p>
+            <a:pPr indent="0" marL="0">
+              <a:buNone/>
+            </a:pPr>
+            <a:r>
+              <a:rPr lang="en-US" sz="1100" dirty="0">
+                <a:solidFill>
+                  <a:srgbClr val="10161F"/>
+                </a:solidFill>
+                <a:latin typeface="Pretendard" pitchFamily="34" charset="0"/>
+                <a:ea typeface="Pretendard" pitchFamily="34" charset="-122"/>
+                <a:cs typeface="Pretendard" pitchFamily="34" charset="-120"/>
+              </a:rPr>
+              <a:t>true,"mocked":true,"extractedFields":{"area_signal":"역삼","asset_type":"오피스빌딩","price_band":"300억","size_signal":"3000평(약 9917.4㎡)"},"extractedFacts":{"region":"역삼","exactAddressCandidate":"역삼동 742-1","assetType":"오피스빌딩","priceText":"300억","sizeText":"3000평(약 9917.4㎡)","currentUse":"오피스","currentUseSignal":"근린생활시설","leaseSignal":"임대중","vacancySignal":"공실없음","tenantNames":["쿠팡","네이버"],"unitRentTexts":["301호: 1500만"],"sellerMotivationText":"자산 효율화","brokerNotes":["초역세권 매물"]},"detectedSensitiveFields":["exact_address","tenant_name"],"ambiguousFields":[],"warnings":[],"areaSignal":"역삼","assetType":"오피스빌딩","priceBand":"300억","sizeSignal":"3000평(약 9917.4㎡)","dealType":"매각","buildingName":"역삼 센트럴타워","exactAddress":"역삼동 742-1","totalFloorArea":9917.3,"buildYear":2015,"currentUseSignal":"근린생활시설","vacancySignal":"공실 없음","fitSummary":"초역세권 근생 빌딩으로 시행/사옥 매입에 최적화","cautionSummary":"주요 임차인 만기 조율 필요","hiddenFields":["exact_address","seller_motivation"],"confidence":{"areaSignal":"confirmed","assetType":"confirmed","priceBand":"ai_hypothesis","fitSummary":"ai_hypothesis"},"missingData":["sizeSignal"],"boundaryNote":"본 자료는 실거래 통계 기반 참고치입니다.","buyerType":"법인 사옥형","budgetRange":{"min":50,"max":80,"display":"50억~80억"},"preferredRegions":["강남","성수"],"assetTypes":["꼬마빌딩","사옥용"],"purchasePurpose":"사옥용 매입","mustHave":["초역세권","주차"],"niceToHave":["테라스","루프탑"],"riskTolerance":"medium","financingNote":"자본금 50% 준비","missingQuestions":["구체적인 입주 시기가 언제인가요?","선호하는 수익률이 있나요?"],"privacyNotes":["연락처 비공개"],"fitReasons":["매수자 예산(50-80억)에 부합하는 매물입니다.","요청하신 성수/강남 권역에 해당합니다."],"cautionReasons":["요청한 용도와 달리 명도 협의가 다소 필요합니다."],"recommendedNextAction":"현장 답사 제안","kakaoMessage":"안녕하세요! 요청하신 조건에 부합하는 추천 매물이 있어 안내해 드립니다. 확인해보시고 피드백 부탁드립니다.","title":"강남 역삼역 초역세권 오피스 사옥용 빌딩 매각","shortSummary":"역삼역 도보 5분 거리의 준신축급 대형 오피스빌딩입니다.","dealPoints":["초역세권","사옥 최적"],"cautionPoints":["명도 조율 필요"],"hiddenInfoNotice":["보증금 및 지번은 인가 후 확인 가능"],"gateMessage":"G1 등급 등록이 필요합니다.","kakaoText":"강남 역삼역 오피스 빌딩 매각 안내입니다.","exactUnitCandidate":"101호","floor":"1층","areaSqmText":"150㎡","spaceType":"office","depositText":"5000만","monthlyRentText":"400만","maintenanceFeeText":"50만","availableFromText":"즉시입주","leaseTermMonthsText":"24","incentivesText":"렌트프리 2개월","restrictions":[],"landlordIdentity":"김성수","currentTenant":"스타트업","vacancyReason":"이전 확장","rentNegotiation":"협의 가능","region":"성수동","areaSqm":150,"deposit":5000,"monthlyRent":400,"maintenanceFee":50,"availableFrom":"즉시입주","leaseTermMonths":24,"incentives":{"rentFreeMonths":2,"interiorSupport":"일부 인테리어 지원","freeRentDetail":"렌트프리 2개월 지원"},"shortSummaryLease":"성수역 도보 5분 거리 1층 리테일 상가 매물입니다."}</a:t>
+            </a:r>
+            <a:endParaRPr lang="en-US" sz="1100" dirty="0"/>
+          </a:p>
+        </p:txBody>
+      </p:sp>
+      <p:sp>
+        <p:nvSpPr>
+          <p:cNvPr id="11" name="Text 9"/>
+          <p:cNvSpPr/>
+          <p:nvPr/>
+        </p:nvSpPr>
+        <p:spPr>
+          <a:xfrm>
+            <a:off x="566928" y="6382512"/>
+            <a:ext cx="7315200" cy="219456"/>
+          </a:xfrm>
+          <a:prstGeom prst="rect">
+            <a:avLst/>
+          </a:prstGeom>
+          <a:noFill/>
+          <a:ln/>
+        </p:spPr>
+        <p:txBody>
+          <a:bodyPr wrap="square" lIns="0" tIns="0" rIns="0" bIns="0" rtlCol="0" anchor="ctr"/>
+          <a:lstStyle/>
+          <a:p>
+            <a:pPr indent="0" marL="0">
+              <a:buNone/>
+            </a:pPr>
+            <a:r>
+              <a:rPr lang="en-US" sz="800" dirty="0">
+                <a:solidFill>
+                  <a:srgbClr val="718096"/>
+                </a:solidFill>
+                <a:latin typeface="Pretendard" pitchFamily="34" charset="0"/>
+                <a:ea typeface="Pretendard" pitchFamily="34" charset="-122"/>
+                <a:cs typeface="Pretendard" pitchFamily="34" charset="-120"/>
+              </a:rPr>
+              <a:t>크리딜   |   </a:t>
+            </a:r>
+            <a:endParaRPr lang="en-US" sz="800" dirty="0"/>
+          </a:p>
+        </p:txBody>
+      </p:sp>
+      <p:sp>
+        <p:nvSpPr>
+          <p:cNvPr id="12" name="Text 10"/>
+          <p:cNvSpPr/>
+          <p:nvPr/>
+        </p:nvSpPr>
+        <p:spPr>
+          <a:xfrm>
+            <a:off x="10710367" y="6382512"/>
+            <a:ext cx="914400" cy="219456"/>
+          </a:xfrm>
+          <a:prstGeom prst="rect">
+            <a:avLst/>
+          </a:prstGeom>
+          <a:noFill/>
+          <a:ln/>
+        </p:spPr>
+        <p:txBody>
+          <a:bodyPr wrap="square" lIns="0" tIns="0" rIns="0" bIns="0" rtlCol="0" anchor="ctr"/>
+          <a:lstStyle/>
+          <a:p>
+            <a:pPr algn="r" indent="0" marL="0">
+              <a:buNone/>
+            </a:pPr>
+            <a:r>
+              <a:rPr lang="en-US" sz="900" b="1" dirty="0">
+                <a:solidFill>
+                  <a:srgbClr val="B98A2E"/>
+                </a:solidFill>
+                <a:latin typeface="Arial" pitchFamily="34" charset="0"/>
+                <a:ea typeface="Arial" pitchFamily="34" charset="-122"/>
+                <a:cs typeface="Arial" pitchFamily="34" charset="-120"/>
+              </a:rPr>
+              <a:t>10</a:t>
+            </a:r>
+            <a:endParaRPr lang="en-US" sz="900" dirty="0"/>
+          </a:p>
+        </p:txBody>
+      </p:sp>
+    </p:spTree>
+  </p:cSld>
+  <p:clrMapOvr>
+    <a:masterClrMapping/>
+  </p:clrMapOvr>
+</p:sld>
+</file>
+
+<file path=ppt/slides/slide11.xml><?xml version="1.0" encoding="utf-8"?>
+<p:sld xmlns:a="http://schemas.openxmlformats.org/drawingml/2006/main" xmlns:r="http://schemas.openxmlformats.org/officeDocument/2006/relationships" xmlns:p="http://schemas.openxmlformats.org/presentationml/2006/main">
+  <p:cSld name="Slide 11">
+    <p:bg>
+      <p:bgPr>
+        <a:solidFill>
           <a:srgbClr val="10161F"/>
         </a:solidFill>
       </p:bgPr>
@@ -2368,7 +2885,7 @@
                 <a:ea typeface="Arial" pitchFamily="34" charset="-122"/>
                 <a:cs typeface="Arial" pitchFamily="34" charset="-120"/>
               </a:rPr>
-              <a:t>10</a:t>
+              <a:t>11</a:t>
             </a:r>
             <a:endParaRPr lang="en-US" sz="1300" dirty="0"/>
           </a:p>
@@ -3780,7 +4297,7 @@
                 <a:ea typeface="Arial" pitchFamily="34" charset="-122"/>
                 <a:cs typeface="Arial" pitchFamily="34" charset="-120"/>
               </a:rPr>
-              <a:t>10</a:t>
+              <a:t>11</a:t>
             </a:r>
             <a:endParaRPr lang="en-US" sz="900" dirty="0"/>
           </a:p>
@@ -4291,7 +4808,7 @@
                 <a:ea typeface="Pretendard" pitchFamily="34" charset="-122"/>
                 <a:cs typeface="Pretendard" pitchFamily="34" charset="-120"/>
               </a:rPr>
-              <a:t>연 순수익률(Cap Rate)</a:t>
+              <a:t>연 수익률(Cap Rate, 기준: NOI)</a:t>
             </a:r>
             <a:endParaRPr lang="en-US" sz="950" dirty="0"/>
           </a:p>
@@ -5187,7 +5704,7 @@
                 <a:ea typeface="Pretendard" pitchFamily="34" charset="-122"/>
                 <a:cs typeface="Pretendard" pitchFamily="34" charset="-120"/>
               </a:rPr>
-              <a:t>교통 접근성 상세 정보는 담당 브로커를 통해 확인하</a:t>
+              <a:t>교통 접근성</a:t>
             </a:r>
             <a:endParaRPr lang="en-US" sz="1300" dirty="0"/>
           </a:p>
@@ -5220,70 +5737,16 @@
               </a:lnSpc>
               <a:buNone/>
             </a:pPr>
-            <a:endParaRPr lang="en-US" sz="1300" dirty="0"/>
-          </a:p>
-        </p:txBody>
-      </p:sp>
-      <p:sp>
-        <p:nvSpPr>
-          <p:cNvPr id="9" name="Shape 6"/>
-          <p:cNvSpPr/>
-          <p:nvPr/>
-        </p:nvSpPr>
-        <p:spPr>
-          <a:xfrm>
-            <a:off x="6053328" y="1975104"/>
-            <a:ext cx="5571439" cy="0"/>
-          </a:xfrm>
-          <a:prstGeom prst="line">
-            <a:avLst/>
-          </a:prstGeom>
-          <a:noFill/>
-          <a:ln w="3810">
-            <a:solidFill>
-              <a:srgbClr val="CBD5E0"/>
-            </a:solidFill>
-            <a:prstDash val="solid"/>
-          </a:ln>
-        </p:spPr>
-      </p:sp>
-      <p:sp>
-        <p:nvSpPr>
-          <p:cNvPr id="10" name="Text 7"/>
-          <p:cNvSpPr/>
-          <p:nvPr/>
-        </p:nvSpPr>
-        <p:spPr>
-          <a:xfrm>
-            <a:off x="6053328" y="1975104"/>
-            <a:ext cx="2117147" cy="493776"/>
-          </a:xfrm>
-          <a:prstGeom prst="rect">
-            <a:avLst/>
-          </a:prstGeom>
-          <a:noFill/>
-          <a:ln/>
-        </p:spPr>
-        <p:txBody>
-          <a:bodyPr wrap="square" lIns="0" tIns="0" rIns="0" bIns="0" rtlCol="0" anchor="ctr"/>
-          <a:lstStyle/>
-          <a:p>
-            <a:pPr indent="0" marL="0">
-              <a:lnSpc>
-                <a:spcPct val="120000"/>
-              </a:lnSpc>
-              <a:buNone/>
-            </a:pPr>
-            <a:r>
-              <a:rPr lang="en-US" sz="1300" dirty="0">
-                <a:solidFill>
-                  <a:srgbClr val="718096"/>
+            <a:r>
+              <a:rPr lang="en-US" sz="1300" b="1" dirty="0">
+                <a:solidFill>
+                  <a:srgbClr val="10161F"/>
                 </a:solidFill>
                 <a:latin typeface="Pretendard" pitchFamily="34" charset="0"/>
                 <a:ea typeface="Pretendard" pitchFamily="34" charset="-122"/>
                 <a:cs typeface="Pretendard" pitchFamily="34" charset="-120"/>
               </a:rPr>
-              <a:t>[건물] 주변 상권</a:t>
+              <a:t>{"ok":true,"mocked":true,"extractedFields":{"area_signal":"역삼","asset_type":"오피스빌딩","price_band":"300억","size_signal":"3000평(약 9917.</a:t>
             </a:r>
             <a:endParaRPr lang="en-US" sz="1300" dirty="0"/>
           </a:p>
@@ -5291,14 +5754,14 @@
       </p:sp>
       <p:sp>
         <p:nvSpPr>
-          <p:cNvPr id="11" name="Text 8"/>
-          <p:cNvSpPr/>
-          <p:nvPr/>
-        </p:nvSpPr>
-        <p:spPr>
-          <a:xfrm>
-            <a:off x="8170475" y="1975104"/>
-            <a:ext cx="3454292" cy="493776"/>
+          <p:cNvPr id="9" name="Text 6"/>
+          <p:cNvSpPr/>
+          <p:nvPr/>
+        </p:nvSpPr>
+        <p:spPr>
+          <a:xfrm>
+            <a:off x="566928" y="6382512"/>
+            <a:ext cx="7315200" cy="219456"/>
           </a:xfrm>
           <a:prstGeom prst="rect">
             <a:avLst/>
@@ -5311,197 +5774,98 @@
           <a:lstStyle/>
           <a:p>
             <a:pPr indent="0" marL="0">
-              <a:lnSpc>
-                <a:spcPct val="120000"/>
-              </a:lnSpc>
-              <a:buNone/>
-            </a:pPr>
-            <a:r>
-              <a:rPr lang="en-US" sz="1300" b="1" dirty="0">
-                <a:solidFill>
-                  <a:srgbClr val="10161F"/>
+              <a:buNone/>
+            </a:pPr>
+            <a:r>
+              <a:rPr lang="en-US" sz="800" dirty="0">
+                <a:solidFill>
+                  <a:srgbClr val="718096"/>
                 </a:solidFill>
                 <a:latin typeface="Pretendard" pitchFamily="34" charset="0"/>
                 <a:ea typeface="Pretendard" pitchFamily="34" charset="-122"/>
                 <a:cs typeface="Pretendard" pitchFamily="34" charset="-120"/>
               </a:rPr>
-              <a:t>송파권역 내 주요 비즈니스 및 유동인구 풍부한 상권 입지 ### [성장] 입지 평가</a:t>
-            </a:r>
-            <a:endParaRPr lang="en-US" sz="1300" dirty="0"/>
-          </a:p>
-        </p:txBody>
-      </p:sp>
-      <p:sp>
-        <p:nvSpPr>
-          <p:cNvPr id="12" name="Shape 9"/>
-          <p:cNvSpPr/>
-          <p:nvPr/>
-        </p:nvSpPr>
-        <p:spPr>
-          <a:xfrm>
-            <a:off x="6053328" y="2468880"/>
-            <a:ext cx="5571439" cy="0"/>
-          </a:xfrm>
-          <a:prstGeom prst="line">
-            <a:avLst/>
-          </a:prstGeom>
-          <a:noFill/>
-          <a:ln w="3810">
-            <a:solidFill>
-              <a:srgbClr val="CBD5E0"/>
-            </a:solidFill>
-            <a:prstDash val="solid"/>
-          </a:ln>
-        </p:spPr>
-      </p:sp>
-      <p:sp>
-        <p:nvSpPr>
-          <p:cNvPr id="13" name="Text 10"/>
-          <p:cNvSpPr/>
-          <p:nvPr/>
-        </p:nvSpPr>
-        <p:spPr>
-          <a:xfrm>
-            <a:off x="6053328" y="2468880"/>
-            <a:ext cx="2117147" cy="493776"/>
-          </a:xfrm>
-          <a:prstGeom prst="rect">
-            <a:avLst/>
-          </a:prstGeom>
-          <a:noFill/>
-          <a:ln/>
-        </p:spPr>
-        <p:txBody>
-          <a:bodyPr wrap="square" lIns="0" tIns="0" rIns="0" bIns="0" rtlCol="0" anchor="ctr"/>
+              <a:t>크리딜   |   </a:t>
+            </a:r>
+            <a:endParaRPr lang="en-US" sz="800" dirty="0"/>
+          </a:p>
+        </p:txBody>
+      </p:sp>
+      <p:sp>
+        <p:nvSpPr>
+          <p:cNvPr id="10" name="Text 7"/>
+          <p:cNvSpPr/>
+          <p:nvPr/>
+        </p:nvSpPr>
+        <p:spPr>
+          <a:xfrm>
+            <a:off x="10710367" y="6382512"/>
+            <a:ext cx="914400" cy="219456"/>
+          </a:xfrm>
+          <a:prstGeom prst="rect">
+            <a:avLst/>
+          </a:prstGeom>
+          <a:noFill/>
+          <a:ln/>
+        </p:spPr>
+        <p:txBody>
+          <a:bodyPr wrap="square" lIns="0" tIns="0" rIns="0" bIns="0" rtlCol="0" anchor="ctr"/>
+          <a:lstStyle/>
+          <a:p>
+            <a:pPr algn="r" indent="0" marL="0">
+              <a:buNone/>
+            </a:pPr>
+            <a:r>
+              <a:rPr lang="en-US" sz="900" b="1" dirty="0">
+                <a:solidFill>
+                  <a:srgbClr val="B98A2E"/>
+                </a:solidFill>
+                <a:latin typeface="Arial" pitchFamily="34" charset="0"/>
+                <a:ea typeface="Arial" pitchFamily="34" charset="-122"/>
+                <a:cs typeface="Arial" pitchFamily="34" charset="-120"/>
+              </a:rPr>
+              <a:t>3</a:t>
+            </a:r>
+            <a:endParaRPr lang="en-US" sz="900" dirty="0"/>
+          </a:p>
+        </p:txBody>
+      </p:sp>
+      <p:sp>
+        <p:nvSpPr>
+          <p:cNvPr id="11" name="Text 8"/>
+          <p:cNvSpPr/>
+          <p:nvPr/>
+        </p:nvSpPr>
+        <p:spPr>
+          <a:xfrm>
+            <a:off x="566928" y="1481328"/>
+            <a:ext cx="11057839" cy="9692640"/>
+          </a:xfrm>
+          <a:prstGeom prst="rect">
+            <a:avLst/>
+          </a:prstGeom>
+          <a:noFill/>
+          <a:ln/>
+        </p:spPr>
+        <p:txBody>
+          <a:bodyPr wrap="square" lIns="0" tIns="0" rIns="0" bIns="0" rtlCol="0" anchor="t"/>
           <a:lstStyle/>
           <a:p>
             <a:pPr indent="0" marL="0">
-              <a:lnSpc>
-                <a:spcPct val="120000"/>
-              </a:lnSpc>
-              <a:buNone/>
-            </a:pPr>
-            <a:r>
-              <a:rPr lang="en-US" sz="1300" dirty="0">
-                <a:solidFill>
-                  <a:srgbClr val="718096"/>
+              <a:buNone/>
+            </a:pPr>
+            <a:r>
+              <a:rPr lang="en-US" sz="1000" dirty="0">
+                <a:solidFill>
+                  <a:srgbClr val="10161F"/>
                 </a:solidFill>
                 <a:latin typeface="Pretendard" pitchFamily="34" charset="0"/>
                 <a:ea typeface="Pretendard" pitchFamily="34" charset="-122"/>
                 <a:cs typeface="Pretendard" pitchFamily="34" charset="-120"/>
               </a:rPr>
-              <a:t>송파권역 내 위치하며 접근성과 가시성이 양호한 입지</a:t>
-            </a:r>
-            <a:endParaRPr lang="en-US" sz="1300" dirty="0"/>
-          </a:p>
-        </p:txBody>
-      </p:sp>
-      <p:sp>
-        <p:nvSpPr>
-          <p:cNvPr id="14" name="Text 11"/>
-          <p:cNvSpPr/>
-          <p:nvPr/>
-        </p:nvSpPr>
-        <p:spPr>
-          <a:xfrm>
-            <a:off x="8170475" y="2468880"/>
-            <a:ext cx="3454292" cy="493776"/>
-          </a:xfrm>
-          <a:prstGeom prst="rect">
-            <a:avLst/>
-          </a:prstGeom>
-          <a:noFill/>
-          <a:ln/>
-        </p:spPr>
-        <p:txBody>
-          <a:bodyPr wrap="square" lIns="0" tIns="0" rIns="0" bIns="0" rtlCol="0" anchor="ctr"/>
-          <a:lstStyle/>
-          <a:p>
-            <a:pPr indent="0" marL="0">
-              <a:lnSpc>
-                <a:spcPct val="120000"/>
-              </a:lnSpc>
-              <a:buNone/>
-            </a:pPr>
-            <a:endParaRPr lang="en-US" sz="1300" dirty="0"/>
-          </a:p>
-        </p:txBody>
-      </p:sp>
-      <p:sp>
-        <p:nvSpPr>
-          <p:cNvPr id="15" name="Text 12"/>
-          <p:cNvSpPr/>
-          <p:nvPr/>
-        </p:nvSpPr>
-        <p:spPr>
-          <a:xfrm>
-            <a:off x="566928" y="6382512"/>
-            <a:ext cx="7315200" cy="219456"/>
-          </a:xfrm>
-          <a:prstGeom prst="rect">
-            <a:avLst/>
-          </a:prstGeom>
-          <a:noFill/>
-          <a:ln/>
-        </p:spPr>
-        <p:txBody>
-          <a:bodyPr wrap="square" lIns="0" tIns="0" rIns="0" bIns="0" rtlCol="0" anchor="ctr"/>
-          <a:lstStyle/>
-          <a:p>
-            <a:pPr indent="0" marL="0">
-              <a:buNone/>
-            </a:pPr>
-            <a:r>
-              <a:rPr lang="en-US" sz="800" dirty="0">
-                <a:solidFill>
-                  <a:srgbClr val="718096"/>
-                </a:solidFill>
-                <a:latin typeface="Pretendard" pitchFamily="34" charset="0"/>
-                <a:ea typeface="Pretendard" pitchFamily="34" charset="-122"/>
-                <a:cs typeface="Pretendard" pitchFamily="34" charset="-120"/>
-              </a:rPr>
-              <a:t>크리딜   |   </a:t>
-            </a:r>
-            <a:endParaRPr lang="en-US" sz="800" dirty="0"/>
-          </a:p>
-        </p:txBody>
-      </p:sp>
-      <p:sp>
-        <p:nvSpPr>
-          <p:cNvPr id="16" name="Text 13"/>
-          <p:cNvSpPr/>
-          <p:nvPr/>
-        </p:nvSpPr>
-        <p:spPr>
-          <a:xfrm>
-            <a:off x="10710367" y="6382512"/>
-            <a:ext cx="914400" cy="219456"/>
-          </a:xfrm>
-          <a:prstGeom prst="rect">
-            <a:avLst/>
-          </a:prstGeom>
-          <a:noFill/>
-          <a:ln/>
-        </p:spPr>
-        <p:txBody>
-          <a:bodyPr wrap="square" lIns="0" tIns="0" rIns="0" bIns="0" rtlCol="0" anchor="ctr"/>
-          <a:lstStyle/>
-          <a:p>
-            <a:pPr algn="r" indent="0" marL="0">
-              <a:buNone/>
-            </a:pPr>
-            <a:r>
-              <a:rPr lang="en-US" sz="900" b="1" dirty="0">
-                <a:solidFill>
-                  <a:srgbClr val="B98A2E"/>
-                </a:solidFill>
-                <a:latin typeface="Arial" pitchFamily="34" charset="0"/>
-                <a:ea typeface="Arial" pitchFamily="34" charset="-122"/>
-                <a:cs typeface="Arial" pitchFamily="34" charset="-120"/>
-              </a:rPr>
-              <a:t>3</a:t>
-            </a:r>
-            <a:endParaRPr lang="en-US" sz="900" dirty="0"/>
+              <a:t>{"ok":true,"mocked":true,"extractedFields":{"area_signal":"역삼","asset_type":"오피스빌딩","price_band":"300억","size_signal":"3000평(약 9917.4㎡)"},"extractedFacts":{"region":"역삼","exactAddressCandidate":"역삼동 742-1","assetType":"오피스빌딩","priceText":"300억","sizeText":"3000평(약 9917.4㎡)","currentUse":"오피스","currentUseSignal":"근린생활시설","leaseSignal":"임대중","vacancySignal":"공실없음","tenantNames":["쿠팡","네이버"],"unitRentTexts":["301호: 1500만"],"sellerMotivationText":"자산 효율화","brokerNotes":["초역세권 매물"]},"detectedSensitiveFields":["exact_address","tenant_name"],"ambiguousFields":[],"warnings":[],"areaSignal":"역삼","assetType":"오피스빌딩","priceBand":"300억","sizeSignal":"3000평(약 9917.4㎡)","dealType":"매각","buildingName":"역삼 센트럴타워","exactAddress":"역삼동 742-1","totalFloorArea":9917.3,"buildYear":2015,"currentUseSignal":"근린생활시설","vacancySignal":"공실 없음","fitSummary":"초역세권 근생 빌딩으로 시행/사옥 매입에 최적화","cautionSummary":"주요 임차인 만기 조율 필요","hiddenFields":["exact_address","seller_motivation"],"confidence":{"areaSignal":"confirmed","assetType":"confirmed","priceBand":"ai_hypothesis","fitSummary":"ai_hypothesis"},"missingData":["sizeSignal"],"boundaryNote":"본 자료는 실거래 통계 기반 참고치입니다.","buyerType":"법인 사옥형","budgetRange":{"min":50,"max":80,"display":"50억~80억"},"preferredRegions":["강남","성수"],"assetTypes":["꼬마빌딩","사옥용"],"purchasePurpose":"사옥용 매입","mustHave":["초역세권","주차"],"niceToHave":["테라스","루프탑"],"riskTolerance":"medium","financingNote":"자본금 50% 준비","missingQuestions":["구체적인 입주 시기가 언제인가요?","선호하는 수익률이 있나요?"],"privacyNotes":["연락처 비공개"],"fitReasons":["매수자 예산(50-80억)에 부합하는 매물입니다.","요청하신 성수/강남 권역에 해당합니다."],"cautionReasons":["요청한 용도와 달리 명도 협의가 다소 필요합니다."],"recommendedNextAction":"현장 답사 제안","kakaoMessage":"안녕하세요! 요청하신 조건에 부합하는 추천 매물이 있어 안내해 드립니다. 확인해보시고 피드백 부탁드립니다.","title":"강남 역삼역 초역세권 오피스 사옥용 빌딩 매각","shortSummary":"역삼역 도보 5분 거리의 준신축급 대형 오피스빌딩입니다.","dealPoints":["초역세권","사옥 최적"],"cautionPoints":["명도 조율 필요"],"hiddenInfoNotice":["보증금 및 지번은 인가 후 확인 가능"],"gateMessage":"G1 등급 등록이 필요합니다.","kakaoText":"강남 역삼역 오피스 빌딩 매각 안내입니다.","exactUnitCandidate":"101호","floor":"1층","areaSqmText":"150㎡","spaceType":"office","depositText":"5000만","monthlyRentText":"400만","maintenanceFeeText":"50만","availableFromText":"즉시입주","leaseTermMonthsText":"24","incentivesText":"렌트프리 2개월","restrictions":[],"landlordIdentity":"김성수","currentTenant":"스타트업","vacancyReason":"이전 확장","rentNegotiation":"협의 가능","region":"성수동","areaSqm":150,"deposit":5000,"monthlyRent":400,"maintenanceFee":50,"availableFrom":"즉시입주","leaseTermMonths":24,"incentives":{"rentFreeMonths":2,"interiorSupport":"일부 인테리어 지원","freeRentDetail":"렌트프리 2개월 지원"},"shortSummaryLease":"성수역 도보 5분 거리 1층 리테일 상가 매물입니다."}</a:t>
+            </a:r>
+            <a:endParaRPr lang="en-US" sz="1000" dirty="0"/>
           </a:p>
         </p:txBody>
       </p:sp>
@@ -5749,7 +6113,7 @@
                 <a:ea typeface="Pretendard" pitchFamily="34" charset="-122"/>
                 <a:cs typeface="Pretendard" pitchFamily="34" charset="-120"/>
               </a:rPr>
-              <a:t>{"ok"</a:t>
+              <a:t>주요 용도</a:t>
             </a:r>
             <a:endParaRPr lang="en-US" sz="1400" dirty="0"/>
           </a:p>
@@ -5791,7 +6155,7 @@
                 <a:ea typeface="Pretendard" pitchFamily="34" charset="-122"/>
                 <a:cs typeface="Pretendard" pitchFamily="34" charset="-120"/>
               </a:rPr>
-              <a:t>true,"mocked":true,"extractedFields":{"area_signal":"역삼","asset_type":"오피스빌딩","price_band":"300억","size_signal":"3000평(약 9917.4㎡)"},"extractedFacts":{"region":"역삼","exactAddressCandidate":"역삼동 742-1","assetType":"오피스빌딩","priceText":"300억","sizeText":"3000평(약 9917.4㎡)","currentUse":"오피스","currentUseSignal":"근린생활시설","leaseSignal":"임대중","vacancySignal":"공실없음","tenantNames":"쿠팡","네이버","unitRentTexts":"301호: 1500만","sellerMotivationText":"자산 효율화","brokerNotes":"초역세권 매물"},"detectedSensitiveFields":"exact_address","tenant_name","ambiguousFields":,"warnings":,"areaSignal":"역삼","assetType":"오피스빌딩","priceBand":"300억","sizeSignal":"3000평(약 9917.4㎡)","dealType":"매각","buildingName":"역삼 센트럴타워","exactAddress":"역삼동 742-1","totalFloorArea":9917.3,"buildYear":2015,"currentUseSignal":"근린생활시설","vacancySignal":"공실 없음","fitSummary":"초역세권 근생 빌딩으로 시행/사옥 매입에 최적화","cautionSummary":"주요 임차인 만기 조율 필요","hiddenFields":"exact_address","seller_motivation","confidence":{"areaSignal":"confirmed","assetType":"confirmed","priceBand":"ai_hypothesis","fitSummary":"ai_hypothesis"},"missingData":"sizeSignal","boundaryNote":"본 자료는 실거래 통계 기반 참고치입니다.","buyerType":"법인 사옥형","budgetRange":{"min":50,"max":80,"display":"50억~80억"},"preferredRegions":"강남","성수","assetTypes":"꼬마빌딩","사옥용","purchasePurpose":"사옥용 매입","mustHave":"초역세권","주차","niceToHave":"테라스","루프탑","riskTolerance":"medium","financingNote":"자본금 50% 준비","missingQuestions":"구체적인 입주 시기가 언제인가요?","선호하는 수익률이 있나요?","privacyNotes":"연락처 비공개","fitReasons":"매수자 예산(50-80억)에 부합하는 매물입니다.","요청하신 성수/강남 권역에 해당합니다.","cautionReasons":"요청한 용도와 달리 명도 협의가 다소 필요합니다.","recommendedNextAction":"현장 답사 제안","kakaoMessage":"안녕하세요! 요청하신 조건에 부합하는 추천 매물이 있어 안내해 드립니다. 확인해보시고 피드백 부탁드립니다.","title":"강남 역삼역 초역세권 오피스 사옥용 빌딩 매각","shortSummary":"역삼역 도보 5분 거리의 준신축급 대형 오피스빌딩입니다.","dealPoints":"초역세권","사옥 최적","cautionPoints":"명도 조율 필요","hiddenInfoNotice":"보증금 및 지번은 인가 후 확인 가능","gateMessage":"G1 등급 등록이 필요합니다.","kakaoText":"강남 역삼역 오피스 빌딩 매각 안내입니다.","exactUnitCandidate":"101호","floor":"1층","areaSqmText":"150㎡","spaceType":"office","depositText":"5000만","monthlyRentText":"400만","maintenanceFeeText":"50만","availableFromText":"즉시입주","leaseTermMonthsText":"24","incentivesText":"렌트프리 2개월","restrictions":,"landlordIdentity":"김성수","currentTenant":"스타트업","vacancyReason":"이전 확장","rentNegotiation":"협의 가능","region":"성수동","areaSqm":150,"deposit":5000,"monthlyRent":400,"maintenanceFee":50,"availableFrom":"즉시입주","leaseTermMonths":24,"incentives":{"rentFreeMonths":2,"interiorSupport":"일부 인테리어 지원","freeRentDetail":"렌트프리 2개월 지원"},"shortSummaryLease":"성수역 도보 5분 거리 1층 리테일 상가 매물입니다."}</a:t>
+              <a:t>확인 필요</a:t>
             </a:r>
             <a:endParaRPr lang="en-US" sz="1400" dirty="0"/>
           </a:p>
@@ -5800,6 +6164,434 @@
       <p:sp>
         <p:nvSpPr>
           <p:cNvPr id="9" name="Shape 7"/>
+          <p:cNvSpPr/>
+          <p:nvPr/>
+        </p:nvSpPr>
+        <p:spPr>
+          <a:xfrm>
+            <a:off x="566928" y="2048256"/>
+            <a:ext cx="6858000" cy="0"/>
+          </a:xfrm>
+          <a:prstGeom prst="line">
+            <a:avLst/>
+          </a:prstGeom>
+          <a:noFill/>
+          <a:ln w="3810">
+            <a:solidFill>
+              <a:srgbClr val="CBD5E0"/>
+            </a:solidFill>
+            <a:prstDash val="solid"/>
+          </a:ln>
+        </p:spPr>
+      </p:sp>
+      <p:sp>
+        <p:nvSpPr>
+          <p:cNvPr id="10" name="Text 8"/>
+          <p:cNvSpPr/>
+          <p:nvPr/>
+        </p:nvSpPr>
+        <p:spPr>
+          <a:xfrm>
+            <a:off x="566928" y="2048256"/>
+            <a:ext cx="2606040" cy="402336"/>
+          </a:xfrm>
+          <a:prstGeom prst="rect">
+            <a:avLst/>
+          </a:prstGeom>
+          <a:noFill/>
+          <a:ln/>
+        </p:spPr>
+        <p:txBody>
+          <a:bodyPr wrap="square" lIns="0" tIns="0" rIns="0" bIns="0" rtlCol="0" anchor="ctr"/>
+          <a:lstStyle/>
+          <a:p>
+            <a:pPr indent="0" marL="0">
+              <a:lnSpc>
+                <a:spcPct val="120000"/>
+              </a:lnSpc>
+              <a:buNone/>
+            </a:pPr>
+            <a:r>
+              <a:rPr lang="en-US" sz="1400" dirty="0">
+                <a:solidFill>
+                  <a:srgbClr val="718096"/>
+                </a:solidFill>
+                <a:latin typeface="Pretendard" pitchFamily="34" charset="0"/>
+                <a:ea typeface="Pretendard" pitchFamily="34" charset="-122"/>
+                <a:cs typeface="Pretendard" pitchFamily="34" charset="-120"/>
+              </a:rPr>
+              <a:t>연면적</a:t>
+            </a:r>
+            <a:endParaRPr lang="en-US" sz="1400" dirty="0"/>
+          </a:p>
+        </p:txBody>
+      </p:sp>
+      <p:sp>
+        <p:nvSpPr>
+          <p:cNvPr id="11" name="Text 9"/>
+          <p:cNvSpPr/>
+          <p:nvPr/>
+        </p:nvSpPr>
+        <p:spPr>
+          <a:xfrm>
+            <a:off x="3172968" y="2048256"/>
+            <a:ext cx="4251960" cy="402336"/>
+          </a:xfrm>
+          <a:prstGeom prst="rect">
+            <a:avLst/>
+          </a:prstGeom>
+          <a:noFill/>
+          <a:ln/>
+        </p:spPr>
+        <p:txBody>
+          <a:bodyPr wrap="square" lIns="0" tIns="0" rIns="0" bIns="0" rtlCol="0" anchor="ctr"/>
+          <a:lstStyle/>
+          <a:p>
+            <a:pPr indent="0" marL="0">
+              <a:lnSpc>
+                <a:spcPct val="120000"/>
+              </a:lnSpc>
+              <a:buNone/>
+            </a:pPr>
+            <a:r>
+              <a:rPr lang="en-US" sz="1400" b="1" dirty="0">
+                <a:solidFill>
+                  <a:srgbClr val="10161F"/>
+                </a:solidFill>
+                <a:latin typeface="Pretendard" pitchFamily="34" charset="0"/>
+                <a:ea typeface="Pretendard" pitchFamily="34" charset="-122"/>
+                <a:cs typeface="Pretendard" pitchFamily="34" charset="-120"/>
+              </a:rPr>
+              <a:t>5,000㎡ (약 1513평(약 5001.7㎡))</a:t>
+            </a:r>
+            <a:endParaRPr lang="en-US" sz="1400" dirty="0"/>
+          </a:p>
+        </p:txBody>
+      </p:sp>
+      <p:sp>
+        <p:nvSpPr>
+          <p:cNvPr id="12" name="Shape 10"/>
+          <p:cNvSpPr/>
+          <p:nvPr/>
+        </p:nvSpPr>
+        <p:spPr>
+          <a:xfrm>
+            <a:off x="566928" y="2450592"/>
+            <a:ext cx="6858000" cy="0"/>
+          </a:xfrm>
+          <a:prstGeom prst="line">
+            <a:avLst/>
+          </a:prstGeom>
+          <a:noFill/>
+          <a:ln w="3810">
+            <a:solidFill>
+              <a:srgbClr val="CBD5E0"/>
+            </a:solidFill>
+            <a:prstDash val="solid"/>
+          </a:ln>
+        </p:spPr>
+      </p:sp>
+      <p:sp>
+        <p:nvSpPr>
+          <p:cNvPr id="13" name="Text 11"/>
+          <p:cNvSpPr/>
+          <p:nvPr/>
+        </p:nvSpPr>
+        <p:spPr>
+          <a:xfrm>
+            <a:off x="566928" y="2450592"/>
+            <a:ext cx="2606040" cy="402336"/>
+          </a:xfrm>
+          <a:prstGeom prst="rect">
+            <a:avLst/>
+          </a:prstGeom>
+          <a:noFill/>
+          <a:ln/>
+        </p:spPr>
+        <p:txBody>
+          <a:bodyPr wrap="square" lIns="0" tIns="0" rIns="0" bIns="0" rtlCol="0" anchor="ctr"/>
+          <a:lstStyle/>
+          <a:p>
+            <a:pPr indent="0" marL="0">
+              <a:lnSpc>
+                <a:spcPct val="120000"/>
+              </a:lnSpc>
+              <a:buNone/>
+            </a:pPr>
+            <a:r>
+              <a:rPr lang="en-US" sz="1400" dirty="0">
+                <a:solidFill>
+                  <a:srgbClr val="718096"/>
+                </a:solidFill>
+                <a:latin typeface="Pretendard" pitchFamily="34" charset="0"/>
+                <a:ea typeface="Pretendard" pitchFamily="34" charset="-122"/>
+                <a:cs typeface="Pretendard" pitchFamily="34" charset="-120"/>
+              </a:rPr>
+              <a:t>대지면적</a:t>
+            </a:r>
+            <a:endParaRPr lang="en-US" sz="1400" dirty="0"/>
+          </a:p>
+        </p:txBody>
+      </p:sp>
+      <p:sp>
+        <p:nvSpPr>
+          <p:cNvPr id="14" name="Text 12"/>
+          <p:cNvSpPr/>
+          <p:nvPr/>
+        </p:nvSpPr>
+        <p:spPr>
+          <a:xfrm>
+            <a:off x="3172968" y="2450592"/>
+            <a:ext cx="4251960" cy="402336"/>
+          </a:xfrm>
+          <a:prstGeom prst="rect">
+            <a:avLst/>
+          </a:prstGeom>
+          <a:noFill/>
+          <a:ln/>
+        </p:spPr>
+        <p:txBody>
+          <a:bodyPr wrap="square" lIns="0" tIns="0" rIns="0" bIns="0" rtlCol="0" anchor="ctr"/>
+          <a:lstStyle/>
+          <a:p>
+            <a:pPr indent="0" marL="0">
+              <a:lnSpc>
+                <a:spcPct val="120000"/>
+              </a:lnSpc>
+              <a:buNone/>
+            </a:pPr>
+            <a:r>
+              <a:rPr lang="en-US" sz="1400" b="1" dirty="0">
+                <a:solidFill>
+                  <a:srgbClr val="10161F"/>
+                </a:solidFill>
+                <a:latin typeface="Pretendard" pitchFamily="34" charset="0"/>
+                <a:ea typeface="Pretendard" pitchFamily="34" charset="-122"/>
+                <a:cs typeface="Pretendard" pitchFamily="34" charset="-120"/>
+              </a:rPr>
+              <a:t>1,000㎡ (약 303평(약 1001.7㎡))</a:t>
+            </a:r>
+            <a:endParaRPr lang="en-US" sz="1400" dirty="0"/>
+          </a:p>
+        </p:txBody>
+      </p:sp>
+      <p:sp>
+        <p:nvSpPr>
+          <p:cNvPr id="15" name="Shape 13"/>
+          <p:cNvSpPr/>
+          <p:nvPr/>
+        </p:nvSpPr>
+        <p:spPr>
+          <a:xfrm>
+            <a:off x="566928" y="2852928"/>
+            <a:ext cx="6858000" cy="0"/>
+          </a:xfrm>
+          <a:prstGeom prst="line">
+            <a:avLst/>
+          </a:prstGeom>
+          <a:noFill/>
+          <a:ln w="3810">
+            <a:solidFill>
+              <a:srgbClr val="CBD5E0"/>
+            </a:solidFill>
+            <a:prstDash val="solid"/>
+          </a:ln>
+        </p:spPr>
+      </p:sp>
+      <p:sp>
+        <p:nvSpPr>
+          <p:cNvPr id="16" name="Text 14"/>
+          <p:cNvSpPr/>
+          <p:nvPr/>
+        </p:nvSpPr>
+        <p:spPr>
+          <a:xfrm>
+            <a:off x="566928" y="2852928"/>
+            <a:ext cx="2606040" cy="402336"/>
+          </a:xfrm>
+          <a:prstGeom prst="rect">
+            <a:avLst/>
+          </a:prstGeom>
+          <a:noFill/>
+          <a:ln/>
+        </p:spPr>
+        <p:txBody>
+          <a:bodyPr wrap="square" lIns="0" tIns="0" rIns="0" bIns="0" rtlCol="0" anchor="ctr"/>
+          <a:lstStyle/>
+          <a:p>
+            <a:pPr indent="0" marL="0">
+              <a:lnSpc>
+                <a:spcPct val="120000"/>
+              </a:lnSpc>
+              <a:buNone/>
+            </a:pPr>
+            <a:r>
+              <a:rPr lang="en-US" sz="1400" dirty="0">
+                <a:solidFill>
+                  <a:srgbClr val="718096"/>
+                </a:solidFill>
+                <a:latin typeface="Pretendard" pitchFamily="34" charset="0"/>
+                <a:ea typeface="Pretendard" pitchFamily="34" charset="-122"/>
+                <a:cs typeface="Pretendard" pitchFamily="34" charset="-120"/>
+              </a:rPr>
+              <a:t>용도지역</a:t>
+            </a:r>
+            <a:endParaRPr lang="en-US" sz="1400" dirty="0"/>
+          </a:p>
+        </p:txBody>
+      </p:sp>
+      <p:sp>
+        <p:nvSpPr>
+          <p:cNvPr id="17" name="Text 15"/>
+          <p:cNvSpPr/>
+          <p:nvPr/>
+        </p:nvSpPr>
+        <p:spPr>
+          <a:xfrm>
+            <a:off x="3172968" y="2852928"/>
+            <a:ext cx="4251960" cy="402336"/>
+          </a:xfrm>
+          <a:prstGeom prst="rect">
+            <a:avLst/>
+          </a:prstGeom>
+          <a:noFill/>
+          <a:ln/>
+        </p:spPr>
+        <p:txBody>
+          <a:bodyPr wrap="square" lIns="0" tIns="0" rIns="0" bIns="0" rtlCol="0" anchor="ctr"/>
+          <a:lstStyle/>
+          <a:p>
+            <a:pPr indent="0" marL="0">
+              <a:lnSpc>
+                <a:spcPct val="120000"/>
+              </a:lnSpc>
+              <a:buNone/>
+            </a:pPr>
+            <a:r>
+              <a:rPr lang="en-US" sz="1400" b="1" dirty="0">
+                <a:solidFill>
+                  <a:srgbClr val="10161F"/>
+                </a:solidFill>
+                <a:latin typeface="Pretendard" pitchFamily="34" charset="0"/>
+                <a:ea typeface="Pretendard" pitchFamily="34" charset="-122"/>
+                <a:cs typeface="Pretendard" pitchFamily="34" charset="-120"/>
+              </a:rPr>
+              <a:t>일반상업지역</a:t>
+            </a:r>
+            <a:endParaRPr lang="en-US" sz="1400" dirty="0"/>
+          </a:p>
+        </p:txBody>
+      </p:sp>
+      <p:sp>
+        <p:nvSpPr>
+          <p:cNvPr id="18" name="Shape 16"/>
+          <p:cNvSpPr/>
+          <p:nvPr/>
+        </p:nvSpPr>
+        <p:spPr>
+          <a:xfrm>
+            <a:off x="566928" y="3255264"/>
+            <a:ext cx="6858000" cy="0"/>
+          </a:xfrm>
+          <a:prstGeom prst="line">
+            <a:avLst/>
+          </a:prstGeom>
+          <a:noFill/>
+          <a:ln w="3810">
+            <a:solidFill>
+              <a:srgbClr val="CBD5E0"/>
+            </a:solidFill>
+            <a:prstDash val="solid"/>
+          </a:ln>
+        </p:spPr>
+      </p:sp>
+      <p:sp>
+        <p:nvSpPr>
+          <p:cNvPr id="19" name="Text 17"/>
+          <p:cNvSpPr/>
+          <p:nvPr/>
+        </p:nvSpPr>
+        <p:spPr>
+          <a:xfrm>
+            <a:off x="566928" y="3255264"/>
+            <a:ext cx="2606040" cy="402336"/>
+          </a:xfrm>
+          <a:prstGeom prst="rect">
+            <a:avLst/>
+          </a:prstGeom>
+          <a:noFill/>
+          <a:ln/>
+        </p:spPr>
+        <p:txBody>
+          <a:bodyPr wrap="square" lIns="0" tIns="0" rIns="0" bIns="0" rtlCol="0" anchor="ctr"/>
+          <a:lstStyle/>
+          <a:p>
+            <a:pPr indent="0" marL="0">
+              <a:lnSpc>
+                <a:spcPct val="120000"/>
+              </a:lnSpc>
+              <a:buNone/>
+            </a:pPr>
+            <a:r>
+              <a:rPr lang="en-US" sz="1400" dirty="0">
+                <a:solidFill>
+                  <a:srgbClr val="718096"/>
+                </a:solidFill>
+                <a:latin typeface="Pretendard" pitchFamily="34" charset="0"/>
+                <a:ea typeface="Pretendard" pitchFamily="34" charset="-122"/>
+                <a:cs typeface="Pretendard" pitchFamily="34" charset="-120"/>
+              </a:rPr>
+              <a:t>매매 희망가</a:t>
+            </a:r>
+            <a:endParaRPr lang="en-US" sz="1400" dirty="0"/>
+          </a:p>
+        </p:txBody>
+      </p:sp>
+      <p:sp>
+        <p:nvSpPr>
+          <p:cNvPr id="20" name="Text 18"/>
+          <p:cNvSpPr/>
+          <p:nvPr/>
+        </p:nvSpPr>
+        <p:spPr>
+          <a:xfrm>
+            <a:off x="3172968" y="3255264"/>
+            <a:ext cx="4251960" cy="402336"/>
+          </a:xfrm>
+          <a:prstGeom prst="rect">
+            <a:avLst/>
+          </a:prstGeom>
+          <a:noFill/>
+          <a:ln/>
+        </p:spPr>
+        <p:txBody>
+          <a:bodyPr wrap="square" lIns="0" tIns="0" rIns="0" bIns="0" rtlCol="0" anchor="ctr"/>
+          <a:lstStyle/>
+          <a:p>
+            <a:pPr indent="0" marL="0">
+              <a:lnSpc>
+                <a:spcPct val="120000"/>
+              </a:lnSpc>
+              <a:buNone/>
+            </a:pPr>
+            <a:r>
+              <a:rPr lang="en-US" sz="1400" b="1" dirty="0">
+                <a:solidFill>
+                  <a:srgbClr val="10161F"/>
+                </a:solidFill>
+                <a:latin typeface="Pretendard" pitchFamily="34" charset="0"/>
+                <a:ea typeface="Pretendard" pitchFamily="34" charset="-122"/>
+                <a:cs typeface="Pretendard" pitchFamily="34" charset="-120"/>
+              </a:rPr>
+              <a:t>72억</a:t>
+            </a:r>
+            <a:endParaRPr lang="en-US" sz="1400" dirty="0"/>
+          </a:p>
+        </p:txBody>
+      </p:sp>
+      <p:sp>
+        <p:nvSpPr>
+          <p:cNvPr id="21" name="Shape 19"/>
           <p:cNvSpPr/>
           <p:nvPr/>
         </p:nvSpPr>
@@ -5822,7 +6614,7 @@
       </p:sp>
       <p:sp>
         <p:nvSpPr>
-          <p:cNvPr id="10" name="Shape 8"/>
+          <p:cNvPr id="22" name="Shape 20"/>
           <p:cNvSpPr/>
           <p:nvPr/>
         </p:nvSpPr>
@@ -5837,14 +6629,14 @@
             </a:avLst>
           </a:prstGeom>
           <a:solidFill>
-            <a:srgbClr val="F3EBDA"/>
+            <a:srgbClr val="BEE3F8"/>
           </a:solidFill>
           <a:ln/>
         </p:spPr>
       </p:sp>
       <p:sp>
         <p:nvSpPr>
-          <p:cNvPr id="11" name="Shape 9"/>
+          <p:cNvPr id="23" name="Shape 21"/>
           <p:cNvSpPr/>
           <p:nvPr/>
         </p:nvSpPr>
@@ -5857,14 +6649,14 @@
             <a:avLst/>
           </a:prstGeom>
           <a:solidFill>
-            <a:srgbClr val="977024"/>
+            <a:srgbClr val="2B6CB0"/>
           </a:solidFill>
           <a:ln/>
         </p:spPr>
       </p:sp>
       <p:sp>
         <p:nvSpPr>
-          <p:cNvPr id="12" name="Text 10"/>
+          <p:cNvPr id="24" name="Text 22"/>
           <p:cNvSpPr/>
           <p:nvPr/>
         </p:nvSpPr>
@@ -5886,13 +6678,24 @@
             <a:pPr indent="0" marL="0">
               <a:buNone/>
             </a:pPr>
+            <a:r>
+              <a:rPr lang="en-US" sz="1050" b="1" dirty="0">
+                <a:solidFill>
+                  <a:srgbClr val="2B6CB0"/>
+                </a:solidFill>
+                <a:latin typeface="Pretendard" pitchFamily="34" charset="0"/>
+                <a:ea typeface="Pretendard" pitchFamily="34" charset="-122"/>
+                <a:cs typeface="Pretendard" pitchFamily="34" charset="-120"/>
+              </a:rPr>
+              <a:t>토지 및 건물 분석 포인트</a:t>
+            </a:r>
             <a:endParaRPr lang="en-US" sz="1050" dirty="0"/>
           </a:p>
         </p:txBody>
       </p:sp>
       <p:sp>
         <p:nvSpPr>
-          <p:cNvPr id="13" name="Text 11"/>
+          <p:cNvPr id="25" name="Text 23"/>
           <p:cNvSpPr/>
           <p:nvPr/>
         </p:nvSpPr>
@@ -5911,11 +6714,12 @@
           <a:bodyPr wrap="square" lIns="0" tIns="0" rIns="0" bIns="0" rtlCol="0" anchor="t"/>
           <a:lstStyle/>
           <a:p>
-            <a:pPr indent="0" marL="0">
+            <a:pPr marL="342900" indent="-342900">
               <a:lnSpc>
                 <a:spcPct val="120000"/>
               </a:lnSpc>
-              <a:buNone/>
+              <a:buSzPct val="100000"/>
+              <a:buChar char="•"/>
             </a:pPr>
             <a:r>
               <a:rPr lang="en-US" sz="930" dirty="0">
@@ -5926,45 +6730,253 @@
                 <a:ea typeface="Pretendard" pitchFamily="34" charset="-122"/>
                 <a:cs typeface="Pretendard" pitchFamily="34" charset="-120"/>
               </a:rPr>
-              <a:t>{"ok":true,"mocked":true,"extractedFields":{"area_signal":"역삼","asset_type":"오피스빌딩","price_band":"300억","size_signal":"3</a:t>
+              <a:t>물건 접면 도로 및 교통 여건은 현장 확인 사항입니다</a:t>
             </a:r>
             <a:endParaRPr lang="en-US" sz="930" dirty="0"/>
           </a:p>
-        </p:txBody>
-      </p:sp>
-      <p:sp>
-        <p:nvSpPr>
-          <p:cNvPr id="14" name="Text 12"/>
-          <p:cNvSpPr/>
-          <p:nvPr/>
-        </p:nvSpPr>
-        <p:spPr>
-          <a:xfrm>
-            <a:off x="566928" y="6382512"/>
-            <a:ext cx="7315200" cy="219456"/>
-          </a:xfrm>
-          <a:prstGeom prst="rect">
-            <a:avLst/>
-          </a:prstGeom>
-          <a:noFill/>
-          <a:ln/>
-        </p:spPr>
-        <p:txBody>
-          <a:bodyPr wrap="square" lIns="0" tIns="0" rIns="0" bIns="0" rtlCol="0" anchor="ctr"/>
-          <a:lstStyle/>
-          <a:p>
-            <a:pPr indent="0" marL="0">
-              <a:buNone/>
-            </a:pPr>
-            <a:r>
-              <a:rPr lang="en-US" sz="800" dirty="0">
-                <a:solidFill>
-                  <a:srgbClr val="718096"/>
+          <a:p>
+            <a:pPr marL="342900" indent="-342900">
+              <a:lnSpc>
+                <a:spcPct val="120000"/>
+              </a:lnSpc>
+              <a:buSzPct val="100000"/>
+              <a:buChar char="•"/>
+            </a:pPr>
+            <a:r>
+              <a:rPr lang="en-US" sz="930" dirty="0">
+                <a:solidFill>
+                  <a:srgbClr val="10161F"/>
                 </a:solidFill>
                 <a:latin typeface="Pretendard" pitchFamily="34" charset="0"/>
                 <a:ea typeface="Pretendard" pitchFamily="34" charset="-122"/>
                 <a:cs typeface="Pretendard" pitchFamily="34" charset="-120"/>
               </a:rPr>
+              <a:t>상세 건물 제원은 실사 자료를 참조하시기 바랍니다</a:t>
+            </a:r>
+            <a:endParaRPr lang="en-US" sz="930" dirty="0"/>
+          </a:p>
+          <a:p>
+            <a:pPr marL="342900" indent="-342900">
+              <a:lnSpc>
+                <a:spcPct val="120000"/>
+              </a:lnSpc>
+              <a:buSzPct val="100000"/>
+              <a:buChar char="•"/>
+            </a:pPr>
+            <a:r>
+              <a:rPr lang="en-US" sz="930" dirty="0">
+                <a:solidFill>
+                  <a:srgbClr val="10161F"/>
+                </a:solidFill>
+                <a:latin typeface="Pretendard" pitchFamily="34" charset="0"/>
+                <a:ea typeface="Pretendard" pitchFamily="34" charset="-122"/>
+                <a:cs typeface="Pretendard" pitchFamily="34" charset="-120"/>
+              </a:rPr>
+              <a:t>건물 현황 및 규모는 첨부 대장을 기준으로 합니다</a:t>
+            </a:r>
+            <a:endParaRPr lang="en-US" sz="930" dirty="0"/>
+          </a:p>
+        </p:txBody>
+      </p:sp>
+      <p:sp>
+        <p:nvSpPr>
+          <p:cNvPr id="26" name="Shape 24"/>
+          <p:cNvSpPr/>
+          <p:nvPr/>
+        </p:nvSpPr>
+        <p:spPr>
+          <a:xfrm>
+            <a:off x="7784287" y="3977640"/>
+            <a:ext cx="3840480" cy="2148840"/>
+          </a:xfrm>
+          <a:prstGeom prst="roundRect">
+            <a:avLst>
+              <a:gd name="adj" fmla="val 2553"/>
+            </a:avLst>
+          </a:prstGeom>
+          <a:solidFill>
+            <a:srgbClr val="BEE3F8"/>
+          </a:solidFill>
+          <a:ln/>
+        </p:spPr>
+      </p:sp>
+      <p:sp>
+        <p:nvSpPr>
+          <p:cNvPr id="27" name="Shape 25"/>
+          <p:cNvSpPr/>
+          <p:nvPr/>
+        </p:nvSpPr>
+        <p:spPr>
+          <a:xfrm>
+            <a:off x="7784287" y="4032504"/>
+            <a:ext cx="36576" cy="2039112"/>
+          </a:xfrm>
+          <a:prstGeom prst="rect">
+            <a:avLst/>
+          </a:prstGeom>
+          <a:solidFill>
+            <a:srgbClr val="2B6CB0"/>
+          </a:solidFill>
+          <a:ln/>
+        </p:spPr>
+      </p:sp>
+      <p:sp>
+        <p:nvSpPr>
+          <p:cNvPr id="28" name="Text 26"/>
+          <p:cNvSpPr/>
+          <p:nvPr/>
+        </p:nvSpPr>
+        <p:spPr>
+          <a:xfrm>
+            <a:off x="7967167" y="4087368"/>
+            <a:ext cx="3511296" cy="201168"/>
+          </a:xfrm>
+          <a:prstGeom prst="rect">
+            <a:avLst/>
+          </a:prstGeom>
+          <a:noFill/>
+          <a:ln/>
+        </p:spPr>
+        <p:txBody>
+          <a:bodyPr wrap="square" lIns="0" tIns="0" rIns="0" bIns="0" rtlCol="0" anchor="ctr"/>
+          <a:lstStyle/>
+          <a:p>
+            <a:pPr indent="0" marL="0">
+              <a:buNone/>
+            </a:pPr>
+            <a:r>
+              <a:rPr lang="en-US" sz="1050" b="1" dirty="0">
+                <a:solidFill>
+                  <a:srgbClr val="2B6CB0"/>
+                </a:solidFill>
+                <a:latin typeface="Pretendard" pitchFamily="34" charset="0"/>
+                <a:ea typeface="Pretendard" pitchFamily="34" charset="-122"/>
+                <a:cs typeface="Pretendard" pitchFamily="34" charset="-120"/>
+              </a:rPr>
+              <a:t>물건 실사 및 관리 상태</a:t>
+            </a:r>
+            <a:endParaRPr lang="en-US" sz="1050" dirty="0"/>
+          </a:p>
+        </p:txBody>
+      </p:sp>
+      <p:sp>
+        <p:nvSpPr>
+          <p:cNvPr id="29" name="Text 27"/>
+          <p:cNvSpPr/>
+          <p:nvPr/>
+        </p:nvSpPr>
+        <p:spPr>
+          <a:xfrm>
+            <a:off x="7967167" y="4306824"/>
+            <a:ext cx="3511296" cy="1746504"/>
+          </a:xfrm>
+          <a:prstGeom prst="rect">
+            <a:avLst/>
+          </a:prstGeom>
+          <a:noFill/>
+          <a:ln/>
+        </p:spPr>
+        <p:txBody>
+          <a:bodyPr wrap="square" lIns="0" tIns="0" rIns="0" bIns="0" rtlCol="0" anchor="t"/>
+          <a:lstStyle/>
+          <a:p>
+            <a:pPr marL="342900" indent="-342900">
+              <a:lnSpc>
+                <a:spcPct val="120000"/>
+              </a:lnSpc>
+              <a:buSzPct val="100000"/>
+              <a:buChar char="•"/>
+            </a:pPr>
+            <a:r>
+              <a:rPr lang="en-US" sz="930" dirty="0">
+                <a:solidFill>
+                  <a:srgbClr val="10161F"/>
+                </a:solidFill>
+                <a:latin typeface="Pretendard" pitchFamily="34" charset="0"/>
+                <a:ea typeface="Pretendard" pitchFamily="34" charset="-122"/>
+                <a:cs typeface="Pretendard" pitchFamily="34" charset="-120"/>
+              </a:rPr>
+              <a:t>건물 상태 및 설비 현황은 실사 보고서를 참조하십시오</a:t>
+            </a:r>
+            <a:endParaRPr lang="en-US" sz="930" dirty="0"/>
+          </a:p>
+          <a:p>
+            <a:pPr marL="342900" indent="-342900">
+              <a:lnSpc>
+                <a:spcPct val="120000"/>
+              </a:lnSpc>
+              <a:buSzPct val="100000"/>
+              <a:buChar char="•"/>
+            </a:pPr>
+            <a:r>
+              <a:rPr lang="en-US" sz="930" dirty="0">
+                <a:solidFill>
+                  <a:srgbClr val="10161F"/>
+                </a:solidFill>
+                <a:latin typeface="Pretendard" pitchFamily="34" charset="0"/>
+                <a:ea typeface="Pretendard" pitchFamily="34" charset="-122"/>
+                <a:cs typeface="Pretendard" pitchFamily="34" charset="-120"/>
+              </a:rPr>
+              <a:t>자금 조달 및 대출 조건은 금융 자문 후 확정됩니다</a:t>
+            </a:r>
+            <a:endParaRPr lang="en-US" sz="930" dirty="0"/>
+          </a:p>
+          <a:p>
+            <a:pPr marL="342900" indent="-342900">
+              <a:lnSpc>
+                <a:spcPct val="120000"/>
+              </a:lnSpc>
+              <a:buSzPct val="100000"/>
+              <a:buChar char="•"/>
+            </a:pPr>
+            <a:r>
+              <a:rPr lang="en-US" sz="930" dirty="0">
+                <a:solidFill>
+                  <a:srgbClr val="10161F"/>
+                </a:solidFill>
+                <a:latin typeface="Pretendard" pitchFamily="34" charset="0"/>
+                <a:ea typeface="Pretendard" pitchFamily="34" charset="-122"/>
+                <a:cs typeface="Pretendard" pitchFamily="34" charset="-120"/>
+              </a:rPr>
+              <a:t>상세 실사 단계에서 구체적인 계약 조건 및 세무 검토가 진행됩니다</a:t>
+            </a:r>
+            <a:endParaRPr lang="en-US" sz="930" dirty="0"/>
+          </a:p>
+        </p:txBody>
+      </p:sp>
+      <p:sp>
+        <p:nvSpPr>
+          <p:cNvPr id="30" name="Text 28"/>
+          <p:cNvSpPr/>
+          <p:nvPr/>
+        </p:nvSpPr>
+        <p:spPr>
+          <a:xfrm>
+            <a:off x="566928" y="6382512"/>
+            <a:ext cx="7315200" cy="219456"/>
+          </a:xfrm>
+          <a:prstGeom prst="rect">
+            <a:avLst/>
+          </a:prstGeom>
+          <a:noFill/>
+          <a:ln/>
+        </p:spPr>
+        <p:txBody>
+          <a:bodyPr wrap="square" lIns="0" tIns="0" rIns="0" bIns="0" rtlCol="0" anchor="ctr"/>
+          <a:lstStyle/>
+          <a:p>
+            <a:pPr indent="0" marL="0">
+              <a:buNone/>
+            </a:pPr>
+            <a:r>
+              <a:rPr lang="en-US" sz="800" dirty="0">
+                <a:solidFill>
+                  <a:srgbClr val="718096"/>
+                </a:solidFill>
+                <a:latin typeface="Pretendard" pitchFamily="34" charset="0"/>
+                <a:ea typeface="Pretendard" pitchFamily="34" charset="-122"/>
+                <a:cs typeface="Pretendard" pitchFamily="34" charset="-120"/>
+              </a:rPr>
               <a:t>크리딜   |   </a:t>
             </a:r>
             <a:endParaRPr lang="en-US" sz="800" dirty="0"/>
@@ -5973,7 +6985,7 @@
       </p:sp>
       <p:sp>
         <p:nvSpPr>
-          <p:cNvPr id="15" name="Text 13"/>
+          <p:cNvPr id="31" name="Text 29"/>
           <p:cNvSpPr/>
           <p:nvPr/>
         </p:nvSpPr>
@@ -6179,974 +7191,16 @@
           </a:p>
         </p:txBody>
       </p:sp>
-      <p:graphicFrame>
-        <p:nvGraphicFramePr>
-          <p:cNvPr id="6" name="Table 0"/>
-          <p:cNvGraphicFramePr>
-            <a:graphicFrameLocks noGrp="1"/>
-          </p:cNvGraphicFramePr>
-          <p:nvPr>
-            <p:extLst>
-              <p:ext uri="{D42A27DB-BD31-4B8C-83A1-F6EECF244321}">
-                <p14:modId xmlns:p14="http://schemas.microsoft.com/office/powerpoint/2010/main" val="1579011935"/>
-              </p:ext>
-            </p:extLst>
-          </p:nvPr>
-        </p:nvGraphicFramePr>
-        <p:xfrm>
-          <a:off x="566928" y="1645920"/>
-          <a:ext cx="11057839" cy="914400"/>
-        </p:xfrm>
-        <a:graphic>
-          <a:graphicData uri="http://schemas.openxmlformats.org/drawingml/2006/table">
-            <a:tbl>
-              <a:tblPr/>
-              <a:tblGrid>
-                <a:gridCol w="5528920"/>
-                <a:gridCol w="5528920"/>
-              </a:tblGrid>
-              <a:tr h="438912">
-                <a:tc>
-                  <a:txBody>
-                    <a:bodyPr/>
-                    <a:lstStyle/>
-                    <a:p>
-                      <a:pPr indent="0" marL="0">
-                        <a:buNone/>
-                      </a:pPr>
-                      <a:r>
-                        <a:rPr lang="en-US" sz="1300" b="1" dirty="0">
-                          <a:solidFill>
-                            <a:srgbClr val="718096"/>
-                          </a:solidFill>
-                          <a:latin typeface="Pretendard" pitchFamily="34" charset="0"/>
-                          <a:ea typeface="Pretendard" pitchFamily="34" charset="-122"/>
-                          <a:cs typeface="Pretendard" pitchFamily="34" charset="-120"/>
-                        </a:rPr>
-                        <a:t>항목</a:t>
-                      </a:r>
-                      <a:endParaRPr lang="en-US" sz="1300" dirty="0">
-                        <a:latin typeface="Pretendard" charset="0"/>
-                        <a:ea typeface="Pretendard" charset="0"/>
-                        <a:cs typeface="Pretendard" charset="0"/>
-                      </a:endParaRPr>
-                    </a:p>
-                  </a:txBody>
-                  <a:tcPr marL="50800" marR="50800" marT="25400" marB="25400" anchor="ctr">
-                    <a:lnL w="3810" cap="flat" cmpd="sng" algn="ctr">
-                      <a:solidFill>
-                        <a:srgbClr val="CBD5E0"/>
-                      </a:solidFill>
-                      <a:prstDash val="solid"/>
-                      <a:round/>
-                      <a:headEnd type="none" w="med" len="med"/>
-                      <a:tailEnd type="none" w="med" len="med"/>
-                    </a:lnL>
-                    <a:lnR w="3810" cap="flat" cmpd="sng" algn="ctr">
-                      <a:solidFill>
-                        <a:srgbClr val="CBD5E0"/>
-                      </a:solidFill>
-                      <a:prstDash val="solid"/>
-                      <a:round/>
-                      <a:headEnd type="none" w="med" len="med"/>
-                      <a:tailEnd type="none" w="med" len="med"/>
-                    </a:lnR>
-                    <a:lnT w="3810" cap="flat" cmpd="sng" algn="ctr">
-                      <a:solidFill>
-                        <a:srgbClr val="CBD5E0"/>
-                      </a:solidFill>
-                      <a:prstDash val="solid"/>
-                      <a:round/>
-                      <a:headEnd type="none" w="med" len="med"/>
-                      <a:tailEnd type="none" w="med" len="med"/>
-                    </a:lnT>
-                    <a:lnB w="3810" cap="flat" cmpd="sng" algn="ctr">
-                      <a:solidFill>
-                        <a:srgbClr val="CBD5E0"/>
-                      </a:solidFill>
-                      <a:prstDash val="solid"/>
-                      <a:round/>
-                      <a:headEnd type="none" w="med" len="med"/>
-                      <a:tailEnd type="none" w="med" len="med"/>
-                    </a:lnB>
-                    <a:solidFill>
-                      <a:srgbClr val="F7FAFC"/>
-                    </a:solidFill>
-                  </a:tcPr>
-                </a:tc>
-                <a:tc>
-                  <a:txBody>
-                    <a:bodyPr/>
-                    <a:lstStyle/>
-                    <a:p>
-                      <a:pPr indent="0" marL="0">
-                        <a:buNone/>
-                      </a:pPr>
-                      <a:r>
-                        <a:rPr lang="en-US" sz="1300" b="1" dirty="0">
-                          <a:solidFill>
-                            <a:srgbClr val="718096"/>
-                          </a:solidFill>
-                          <a:latin typeface="Pretendard" pitchFamily="34" charset="0"/>
-                          <a:ea typeface="Pretendard" pitchFamily="34" charset="-122"/>
-                          <a:cs typeface="Pretendard" pitchFamily="34" charset="-120"/>
-                        </a:rPr>
-                        <a:t>내용</a:t>
-                      </a:r>
-                      <a:endParaRPr lang="en-US" sz="1300" dirty="0">
-                        <a:latin typeface="Pretendard" charset="0"/>
-                        <a:ea typeface="Pretendard" charset="0"/>
-                        <a:cs typeface="Pretendard" charset="0"/>
-                      </a:endParaRPr>
-                    </a:p>
-                  </a:txBody>
-                  <a:tcPr marL="50800" marR="50800" marT="25400" marB="25400" anchor="ctr">
-                    <a:lnL w="3810" cap="flat" cmpd="sng" algn="ctr">
-                      <a:solidFill>
-                        <a:srgbClr val="CBD5E0"/>
-                      </a:solidFill>
-                      <a:prstDash val="solid"/>
-                      <a:round/>
-                      <a:headEnd type="none" w="med" len="med"/>
-                      <a:tailEnd type="none" w="med" len="med"/>
-                    </a:lnL>
-                    <a:lnR w="3810" cap="flat" cmpd="sng" algn="ctr">
-                      <a:solidFill>
-                        <a:srgbClr val="CBD5E0"/>
-                      </a:solidFill>
-                      <a:prstDash val="solid"/>
-                      <a:round/>
-                      <a:headEnd type="none" w="med" len="med"/>
-                      <a:tailEnd type="none" w="med" len="med"/>
-                    </a:lnR>
-                    <a:lnT w="3810" cap="flat" cmpd="sng" algn="ctr">
-                      <a:solidFill>
-                        <a:srgbClr val="CBD5E0"/>
-                      </a:solidFill>
-                      <a:prstDash val="solid"/>
-                      <a:round/>
-                      <a:headEnd type="none" w="med" len="med"/>
-                      <a:tailEnd type="none" w="med" len="med"/>
-                    </a:lnT>
-                    <a:lnB w="3810" cap="flat" cmpd="sng" algn="ctr">
-                      <a:solidFill>
-                        <a:srgbClr val="CBD5E0"/>
-                      </a:solidFill>
-                      <a:prstDash val="solid"/>
-                      <a:round/>
-                      <a:headEnd type="none" w="med" len="med"/>
-                      <a:tailEnd type="none" w="med" len="med"/>
-                    </a:lnB>
-                    <a:solidFill>
-                      <a:srgbClr val="F7FAFC"/>
-                    </a:solidFill>
-                  </a:tcPr>
-                </a:tc>
-              </a:tr>
-              <a:tr h="438912">
-                <a:tc>
-                  <a:txBody>
-                    <a:bodyPr/>
-                    <a:lstStyle/>
-                    <a:p>
-                      <a:pPr indent="0" marL="0">
-                        <a:buNone/>
-                      </a:pPr>
-                      <a:r>
-                        <a:rPr lang="en-US" sz="1300" b="1" dirty="0">
-                          <a:solidFill>
-                            <a:srgbClr val="10161F"/>
-                          </a:solidFill>
-                          <a:latin typeface="Pretendard" pitchFamily="34" charset="0"/>
-                          <a:ea typeface="Pretendard" pitchFamily="34" charset="-122"/>
-                          <a:cs typeface="Pretendard" pitchFamily="34" charset="-120"/>
-                        </a:rPr>
-                        <a:t>공실 </a:t>
-                      </a:r>
-                      <a:pPr indent="0" marL="0">
-                        <a:buNone/>
-                      </a:pPr>
-                      <a:r>
-                        <a:rPr lang="en-US" sz="1300" b="1" dirty="0">
-                          <a:solidFill>
-                            <a:srgbClr val="10161F"/>
-                          </a:solidFill>
-                          <a:latin typeface="Pretendard" pitchFamily="34" charset="0"/>
-                          <a:ea typeface="Pretendard" pitchFamily="34" charset="-122"/>
-                          <a:cs typeface="Pretendard" pitchFamily="34" charset="-120"/>
-                        </a:rPr>
-                        <a:t>현황</a:t>
-                      </a:r>
-                      <a:endParaRPr lang="en-US" sz="1300" dirty="0">
-                        <a:latin typeface="Pretendard" charset="0"/>
-                        <a:ea typeface="Pretendard" charset="0"/>
-                        <a:cs typeface="Pretendard" charset="0"/>
-                      </a:endParaRPr>
-                    </a:p>
-                  </a:txBody>
-                  <a:tcPr marL="50800" marR="50800" marT="25400" marB="25400" anchor="ctr">
-                    <a:lnL w="3810" cap="flat" cmpd="sng" algn="ctr">
-                      <a:solidFill>
-                        <a:srgbClr val="CBD5E0"/>
-                      </a:solidFill>
-                      <a:prstDash val="solid"/>
-                      <a:round/>
-                      <a:headEnd type="none" w="med" len="med"/>
-                      <a:tailEnd type="none" w="med" len="med"/>
-                    </a:lnL>
-                    <a:lnR w="3810" cap="flat" cmpd="sng" algn="ctr">
-                      <a:solidFill>
-                        <a:srgbClr val="CBD5E0"/>
-                      </a:solidFill>
-                      <a:prstDash val="solid"/>
-                      <a:round/>
-                      <a:headEnd type="none" w="med" len="med"/>
-                      <a:tailEnd type="none" w="med" len="med"/>
-                    </a:lnR>
-                    <a:lnT w="3810" cap="flat" cmpd="sng" algn="ctr">
-                      <a:solidFill>
-                        <a:srgbClr val="CBD5E0"/>
-                      </a:solidFill>
-                      <a:prstDash val="solid"/>
-                      <a:round/>
-                      <a:headEnd type="none" w="med" len="med"/>
-                      <a:tailEnd type="none" w="med" len="med"/>
-                    </a:lnT>
-                    <a:lnB w="3810" cap="flat" cmpd="sng" algn="ctr">
-                      <a:solidFill>
-                        <a:srgbClr val="CBD5E0"/>
-                      </a:solidFill>
-                      <a:prstDash val="solid"/>
-                      <a:round/>
-                      <a:headEnd type="none" w="med" len="med"/>
-                      <a:tailEnd type="none" w="med" len="med"/>
-                    </a:lnB>
-                    <a:solidFill>
-                      <a:srgbClr val="FFFFFF"/>
-                    </a:solidFill>
-                  </a:tcPr>
-                </a:tc>
-                <a:tc>
-                  <a:txBody>
-                    <a:bodyPr/>
-                    <a:lstStyle/>
-                    <a:p>
-                      <a:pPr indent="0" marL="0">
-                        <a:buNone/>
-                      </a:pPr>
-                      <a:r>
-                        <a:rPr lang="en-US" sz="1300" dirty="0">
-                          <a:solidFill>
-                            <a:srgbClr val="10161F"/>
-                          </a:solidFill>
-                          <a:latin typeface="Pretendard" pitchFamily="34" charset="0"/>
-                          <a:ea typeface="Pretendard" pitchFamily="34" charset="-122"/>
-                          <a:cs typeface="Pretendard" pitchFamily="34" charset="-120"/>
-                        </a:rPr>
-                        <a:t>상세 </a:t>
-                      </a:r>
-                      <a:pPr indent="0" marL="0">
-                        <a:buNone/>
-                      </a:pPr>
-                      <a:r>
-                        <a:rPr lang="en-US" sz="1300" dirty="0">
-                          <a:solidFill>
-                            <a:srgbClr val="10161F"/>
-                          </a:solidFill>
-                          <a:latin typeface="Pretendard" pitchFamily="34" charset="0"/>
-                          <a:ea typeface="Pretendard" pitchFamily="34" charset="-122"/>
-                          <a:cs typeface="Pretendard" pitchFamily="34" charset="-120"/>
-                        </a:rPr>
-                        <a:t>확인 </a:t>
-                      </a:r>
-                      <a:pPr indent="0" marL="0">
-                        <a:buNone/>
-                      </a:pPr>
-                      <a:r>
-                        <a:rPr lang="en-US" sz="1300" dirty="0">
-                          <a:solidFill>
-                            <a:srgbClr val="10161F"/>
-                          </a:solidFill>
-                          <a:latin typeface="Pretendard" pitchFamily="34" charset="0"/>
-                          <a:ea typeface="Pretendard" pitchFamily="34" charset="-122"/>
-                          <a:cs typeface="Pretendard" pitchFamily="34" charset="-120"/>
-                        </a:rPr>
-                        <a:t>필요</a:t>
-                      </a:r>
-                      <a:endParaRPr lang="en-US" sz="1300" dirty="0">
-                        <a:latin typeface="Pretendard" charset="0"/>
-                        <a:ea typeface="Pretendard" charset="0"/>
-                        <a:cs typeface="Pretendard" charset="0"/>
-                      </a:endParaRPr>
-                    </a:p>
-                  </a:txBody>
-                  <a:tcPr marL="50800" marR="50800" marT="25400" marB="25400" anchor="ctr">
-                    <a:lnL w="3810" cap="flat" cmpd="sng" algn="ctr">
-                      <a:solidFill>
-                        <a:srgbClr val="CBD5E0"/>
-                      </a:solidFill>
-                      <a:prstDash val="solid"/>
-                      <a:round/>
-                      <a:headEnd type="none" w="med" len="med"/>
-                      <a:tailEnd type="none" w="med" len="med"/>
-                    </a:lnL>
-                    <a:lnR w="3810" cap="flat" cmpd="sng" algn="ctr">
-                      <a:solidFill>
-                        <a:srgbClr val="CBD5E0"/>
-                      </a:solidFill>
-                      <a:prstDash val="solid"/>
-                      <a:round/>
-                      <a:headEnd type="none" w="med" len="med"/>
-                      <a:tailEnd type="none" w="med" len="med"/>
-                    </a:lnR>
-                    <a:lnT w="3810" cap="flat" cmpd="sng" algn="ctr">
-                      <a:solidFill>
-                        <a:srgbClr val="CBD5E0"/>
-                      </a:solidFill>
-                      <a:prstDash val="solid"/>
-                      <a:round/>
-                      <a:headEnd type="none" w="med" len="med"/>
-                      <a:tailEnd type="none" w="med" len="med"/>
-                    </a:lnT>
-                    <a:lnB w="3810" cap="flat" cmpd="sng" algn="ctr">
-                      <a:solidFill>
-                        <a:srgbClr val="CBD5E0"/>
-                      </a:solidFill>
-                      <a:prstDash val="solid"/>
-                      <a:round/>
-                      <a:headEnd type="none" w="med" len="med"/>
-                      <a:tailEnd type="none" w="med" len="med"/>
-                    </a:lnB>
-                    <a:solidFill>
-                      <a:srgbClr val="FFFFFF"/>
-                    </a:solidFill>
-                  </a:tcPr>
-                </a:tc>
-              </a:tr>
-              <a:tr h="438912">
-                <a:tc>
-                  <a:txBody>
-                    <a:bodyPr/>
-                    <a:lstStyle/>
-                    <a:p>
-                      <a:pPr indent="0" marL="0">
-                        <a:buNone/>
-                      </a:pPr>
-                      <a:r>
-                        <a:rPr lang="en-US" sz="1300" b="1" dirty="0">
-                          <a:solidFill>
-                            <a:srgbClr val="10161F"/>
-                          </a:solidFill>
-                          <a:latin typeface="Pretendard" pitchFamily="34" charset="0"/>
-                          <a:ea typeface="Pretendard" pitchFamily="34" charset="-122"/>
-                          <a:cs typeface="Pretendard" pitchFamily="34" charset="-120"/>
-                        </a:rPr>
-                        <a:t>월 </a:t>
-                      </a:r>
-                      <a:pPr indent="0" marL="0">
-                        <a:buNone/>
-                      </a:pPr>
-                      <a:r>
-                        <a:rPr lang="en-US" sz="1300" b="1" dirty="0">
-                          <a:solidFill>
-                            <a:srgbClr val="10161F"/>
-                          </a:solidFill>
-                          <a:latin typeface="Pretendard" pitchFamily="34" charset="0"/>
-                          <a:ea typeface="Pretendard" pitchFamily="34" charset="-122"/>
-                          <a:cs typeface="Pretendard" pitchFamily="34" charset="-120"/>
-                        </a:rPr>
-                        <a:t>임대료 </a:t>
-                      </a:r>
-                      <a:pPr indent="0" marL="0">
-                        <a:buNone/>
-                      </a:pPr>
-                      <a:r>
-                        <a:rPr lang="en-US" sz="1300" b="1" dirty="0">
-                          <a:solidFill>
-                            <a:srgbClr val="10161F"/>
-                          </a:solidFill>
-                          <a:latin typeface="Pretendard" pitchFamily="34" charset="0"/>
-                          <a:ea typeface="Pretendard" pitchFamily="34" charset="-122"/>
-                          <a:cs typeface="Pretendard" pitchFamily="34" charset="-120"/>
-                        </a:rPr>
-                        <a:t>합계</a:t>
-                      </a:r>
-                      <a:endParaRPr lang="en-US" sz="1300" dirty="0">
-                        <a:latin typeface="Pretendard" charset="0"/>
-                        <a:ea typeface="Pretendard" charset="0"/>
-                        <a:cs typeface="Pretendard" charset="0"/>
-                      </a:endParaRPr>
-                    </a:p>
-                  </a:txBody>
-                  <a:tcPr marL="50800" marR="50800" marT="25400" marB="25400" anchor="ctr">
-                    <a:lnL w="3810" cap="flat" cmpd="sng" algn="ctr">
-                      <a:solidFill>
-                        <a:srgbClr val="CBD5E0"/>
-                      </a:solidFill>
-                      <a:prstDash val="solid"/>
-                      <a:round/>
-                      <a:headEnd type="none" w="med" len="med"/>
-                      <a:tailEnd type="none" w="med" len="med"/>
-                    </a:lnL>
-                    <a:lnR w="3810" cap="flat" cmpd="sng" algn="ctr">
-                      <a:solidFill>
-                        <a:srgbClr val="CBD5E0"/>
-                      </a:solidFill>
-                      <a:prstDash val="solid"/>
-                      <a:round/>
-                      <a:headEnd type="none" w="med" len="med"/>
-                      <a:tailEnd type="none" w="med" len="med"/>
-                    </a:lnR>
-                    <a:lnT w="3810" cap="flat" cmpd="sng" algn="ctr">
-                      <a:solidFill>
-                        <a:srgbClr val="CBD5E0"/>
-                      </a:solidFill>
-                      <a:prstDash val="solid"/>
-                      <a:round/>
-                      <a:headEnd type="none" w="med" len="med"/>
-                      <a:tailEnd type="none" w="med" len="med"/>
-                    </a:lnT>
-                    <a:lnB w="3810" cap="flat" cmpd="sng" algn="ctr">
-                      <a:solidFill>
-                        <a:srgbClr val="CBD5E0"/>
-                      </a:solidFill>
-                      <a:prstDash val="solid"/>
-                      <a:round/>
-                      <a:headEnd type="none" w="med" len="med"/>
-                      <a:tailEnd type="none" w="med" len="med"/>
-                    </a:lnB>
-                    <a:solidFill>
-                      <a:srgbClr val="F7FAFC"/>
-                    </a:solidFill>
-                  </a:tcPr>
-                </a:tc>
-                <a:tc>
-                  <a:txBody>
-                    <a:bodyPr/>
-                    <a:lstStyle/>
-                    <a:p>
-                      <a:pPr indent="0" marL="0">
-                        <a:buNone/>
-                      </a:pPr>
-                      <a:r>
-                        <a:rPr lang="en-US" sz="1300" dirty="0">
-                          <a:solidFill>
-                            <a:srgbClr val="10161F"/>
-                          </a:solidFill>
-                          <a:latin typeface="Pretendard" pitchFamily="34" charset="0"/>
-                          <a:ea typeface="Pretendard" pitchFamily="34" charset="-122"/>
-                          <a:cs typeface="Pretendard" pitchFamily="34" charset="-120"/>
-                        </a:rPr>
-                        <a:t>약 </a:t>
-                      </a:r>
-                      <a:pPr indent="0" marL="0">
-                        <a:buNone/>
-                      </a:pPr>
-                      <a:r>
-                        <a:rPr lang="en-US" sz="1300" dirty="0">
-                          <a:solidFill>
-                            <a:srgbClr val="10161F"/>
-                          </a:solidFill>
-                          <a:latin typeface="Pretendard" pitchFamily="34" charset="0"/>
-                          <a:ea typeface="Pretendard" pitchFamily="34" charset="-122"/>
-                          <a:cs typeface="Pretendard" pitchFamily="34" charset="-120"/>
-                        </a:rPr>
-                        <a:t>2200만 </a:t>
-                      </a:r>
-                      <a:pPr indent="0" marL="0">
-                        <a:buNone/>
-                      </a:pPr>
-                      <a:r>
-                        <a:rPr lang="en-US" sz="1300" dirty="0">
-                          <a:solidFill>
-                            <a:srgbClr val="10161F"/>
-                          </a:solidFill>
-                          <a:latin typeface="Pretendard" pitchFamily="34" charset="0"/>
-                          <a:ea typeface="Pretendard" pitchFamily="34" charset="-122"/>
-                          <a:cs typeface="Pretendard" pitchFamily="34" charset="-120"/>
-                        </a:rPr>
-                        <a:t>원/월 </a:t>
-                      </a:r>
-                      <a:pPr indent="0" marL="0">
-                        <a:buNone/>
-                      </a:pPr>
-                      <a:r>
-                        <a:rPr lang="en-US" sz="1300" dirty="0">
-                          <a:solidFill>
-                            <a:srgbClr val="10161F"/>
-                          </a:solidFill>
-                          <a:latin typeface="Pretendard" pitchFamily="34" charset="0"/>
-                          <a:ea typeface="Pretendard" pitchFamily="34" charset="-122"/>
-                          <a:cs typeface="Pretendard" pitchFamily="34" charset="-120"/>
-                        </a:rPr>
-                        <a:t>(추정)</a:t>
-                      </a:r>
-                      <a:endParaRPr lang="en-US" sz="1300" dirty="0">
-                        <a:latin typeface="Pretendard" charset="0"/>
-                        <a:ea typeface="Pretendard" charset="0"/>
-                        <a:cs typeface="Pretendard" charset="0"/>
-                      </a:endParaRPr>
-                    </a:p>
-                  </a:txBody>
-                  <a:tcPr marL="50800" marR="50800" marT="25400" marB="25400" anchor="ctr">
-                    <a:lnL w="3810" cap="flat" cmpd="sng" algn="ctr">
-                      <a:solidFill>
-                        <a:srgbClr val="CBD5E0"/>
-                      </a:solidFill>
-                      <a:prstDash val="solid"/>
-                      <a:round/>
-                      <a:headEnd type="none" w="med" len="med"/>
-                      <a:tailEnd type="none" w="med" len="med"/>
-                    </a:lnL>
-                    <a:lnR w="3810" cap="flat" cmpd="sng" algn="ctr">
-                      <a:solidFill>
-                        <a:srgbClr val="CBD5E0"/>
-                      </a:solidFill>
-                      <a:prstDash val="solid"/>
-                      <a:round/>
-                      <a:headEnd type="none" w="med" len="med"/>
-                      <a:tailEnd type="none" w="med" len="med"/>
-                    </a:lnR>
-                    <a:lnT w="3810" cap="flat" cmpd="sng" algn="ctr">
-                      <a:solidFill>
-                        <a:srgbClr val="CBD5E0"/>
-                      </a:solidFill>
-                      <a:prstDash val="solid"/>
-                      <a:round/>
-                      <a:headEnd type="none" w="med" len="med"/>
-                      <a:tailEnd type="none" w="med" len="med"/>
-                    </a:lnT>
-                    <a:lnB w="3810" cap="flat" cmpd="sng" algn="ctr">
-                      <a:solidFill>
-                        <a:srgbClr val="CBD5E0"/>
-                      </a:solidFill>
-                      <a:prstDash val="solid"/>
-                      <a:round/>
-                      <a:headEnd type="none" w="med" len="med"/>
-                      <a:tailEnd type="none" w="med" len="med"/>
-                    </a:lnB>
-                    <a:solidFill>
-                      <a:srgbClr val="F7FAFC"/>
-                    </a:solidFill>
-                  </a:tcPr>
-                </a:tc>
-              </a:tr>
-              <a:tr h="438912">
-                <a:tc>
-                  <a:txBody>
-                    <a:bodyPr/>
-                    <a:lstStyle/>
-                    <a:p>
-                      <a:pPr indent="0" marL="0">
-                        <a:buNone/>
-                      </a:pPr>
-                      <a:r>
-                        <a:rPr lang="en-US" sz="1300" b="1" dirty="0">
-                          <a:solidFill>
-                            <a:srgbClr val="10161F"/>
-                          </a:solidFill>
-                          <a:latin typeface="Pretendard" pitchFamily="34" charset="0"/>
-                          <a:ea typeface="Pretendard" pitchFamily="34" charset="-122"/>
-                          <a:cs typeface="Pretendard" pitchFamily="34" charset="-120"/>
-                        </a:rPr>
-                        <a:t>연 </a:t>
-                      </a:r>
-                      <a:pPr indent="0" marL="0">
-                        <a:buNone/>
-                      </a:pPr>
-                      <a:r>
-                        <a:rPr lang="en-US" sz="1300" b="1" dirty="0">
-                          <a:solidFill>
-                            <a:srgbClr val="10161F"/>
-                          </a:solidFill>
-                          <a:latin typeface="Pretendard" pitchFamily="34" charset="0"/>
-                          <a:ea typeface="Pretendard" pitchFamily="34" charset="-122"/>
-                          <a:cs typeface="Pretendard" pitchFamily="34" charset="-120"/>
-                        </a:rPr>
-                        <a:t>임대 </a:t>
-                      </a:r>
-                      <a:pPr indent="0" marL="0">
-                        <a:buNone/>
-                      </a:pPr>
-                      <a:r>
-                        <a:rPr lang="en-US" sz="1300" b="1" dirty="0">
-                          <a:solidFill>
-                            <a:srgbClr val="10161F"/>
-                          </a:solidFill>
-                          <a:latin typeface="Pretendard" pitchFamily="34" charset="0"/>
-                          <a:ea typeface="Pretendard" pitchFamily="34" charset="-122"/>
-                          <a:cs typeface="Pretendard" pitchFamily="34" charset="-120"/>
-                        </a:rPr>
-                        <a:t>수입</a:t>
-                      </a:r>
-                      <a:endParaRPr lang="en-US" sz="1300" dirty="0">
-                        <a:latin typeface="Pretendard" charset="0"/>
-                        <a:ea typeface="Pretendard" charset="0"/>
-                        <a:cs typeface="Pretendard" charset="0"/>
-                      </a:endParaRPr>
-                    </a:p>
-                  </a:txBody>
-                  <a:tcPr marL="50800" marR="50800" marT="25400" marB="25400" anchor="ctr">
-                    <a:lnL w="3810" cap="flat" cmpd="sng" algn="ctr">
-                      <a:solidFill>
-                        <a:srgbClr val="CBD5E0"/>
-                      </a:solidFill>
-                      <a:prstDash val="solid"/>
-                      <a:round/>
-                      <a:headEnd type="none" w="med" len="med"/>
-                      <a:tailEnd type="none" w="med" len="med"/>
-                    </a:lnL>
-                    <a:lnR w="3810" cap="flat" cmpd="sng" algn="ctr">
-                      <a:solidFill>
-                        <a:srgbClr val="CBD5E0"/>
-                      </a:solidFill>
-                      <a:prstDash val="solid"/>
-                      <a:round/>
-                      <a:headEnd type="none" w="med" len="med"/>
-                      <a:tailEnd type="none" w="med" len="med"/>
-                    </a:lnR>
-                    <a:lnT w="3810" cap="flat" cmpd="sng" algn="ctr">
-                      <a:solidFill>
-                        <a:srgbClr val="CBD5E0"/>
-                      </a:solidFill>
-                      <a:prstDash val="solid"/>
-                      <a:round/>
-                      <a:headEnd type="none" w="med" len="med"/>
-                      <a:tailEnd type="none" w="med" len="med"/>
-                    </a:lnT>
-                    <a:lnB w="3810" cap="flat" cmpd="sng" algn="ctr">
-                      <a:solidFill>
-                        <a:srgbClr val="CBD5E0"/>
-                      </a:solidFill>
-                      <a:prstDash val="solid"/>
-                      <a:round/>
-                      <a:headEnd type="none" w="med" len="med"/>
-                      <a:tailEnd type="none" w="med" len="med"/>
-                    </a:lnB>
-                    <a:solidFill>
-                      <a:srgbClr val="FFFFFF"/>
-                    </a:solidFill>
-                  </a:tcPr>
-                </a:tc>
-                <a:tc>
-                  <a:txBody>
-                    <a:bodyPr/>
-                    <a:lstStyle/>
-                    <a:p>
-                      <a:pPr indent="0" marL="0">
-                        <a:buNone/>
-                      </a:pPr>
-                      <a:r>
-                        <a:rPr lang="en-US" sz="1300" dirty="0">
-                          <a:solidFill>
-                            <a:srgbClr val="10161F"/>
-                          </a:solidFill>
-                          <a:latin typeface="Pretendard" pitchFamily="34" charset="0"/>
-                          <a:ea typeface="Pretendard" pitchFamily="34" charset="-122"/>
-                          <a:cs typeface="Pretendard" pitchFamily="34" charset="-120"/>
-                        </a:rPr>
-                        <a:t>약 </a:t>
-                      </a:r>
-                      <a:pPr indent="0" marL="0">
-                        <a:buNone/>
-                      </a:pPr>
-                      <a:r>
-                        <a:rPr lang="en-US" sz="1300" dirty="0">
-                          <a:solidFill>
-                            <a:srgbClr val="10161F"/>
-                          </a:solidFill>
-                          <a:latin typeface="Pretendard" pitchFamily="34" charset="0"/>
-                          <a:ea typeface="Pretendard" pitchFamily="34" charset="-122"/>
-                          <a:cs typeface="Pretendard" pitchFamily="34" charset="-120"/>
-                        </a:rPr>
-                        <a:t>2.6억 </a:t>
-                      </a:r>
-                      <a:pPr indent="0" marL="0">
-                        <a:buNone/>
-                      </a:pPr>
-                      <a:r>
-                        <a:rPr lang="en-US" sz="1300" dirty="0">
-                          <a:solidFill>
-                            <a:srgbClr val="10161F"/>
-                          </a:solidFill>
-                          <a:latin typeface="Pretendard" pitchFamily="34" charset="0"/>
-                          <a:ea typeface="Pretendard" pitchFamily="34" charset="-122"/>
-                          <a:cs typeface="Pretendard" pitchFamily="34" charset="-120"/>
-                        </a:rPr>
-                        <a:t>원/년 </a:t>
-                      </a:r>
-                      <a:pPr indent="0" marL="0">
-                        <a:buNone/>
-                      </a:pPr>
-                      <a:r>
-                        <a:rPr lang="en-US" sz="1300" dirty="0">
-                          <a:solidFill>
-                            <a:srgbClr val="10161F"/>
-                          </a:solidFill>
-                          <a:latin typeface="Pretendard" pitchFamily="34" charset="0"/>
-                          <a:ea typeface="Pretendard" pitchFamily="34" charset="-122"/>
-                          <a:cs typeface="Pretendard" pitchFamily="34" charset="-120"/>
-                        </a:rPr>
-                        <a:t>(추정)</a:t>
-                      </a:r>
-                      <a:endParaRPr lang="en-US" sz="1300" dirty="0">
-                        <a:latin typeface="Pretendard" charset="0"/>
-                        <a:ea typeface="Pretendard" charset="0"/>
-                        <a:cs typeface="Pretendard" charset="0"/>
-                      </a:endParaRPr>
-                    </a:p>
-                  </a:txBody>
-                  <a:tcPr marL="50800" marR="50800" marT="25400" marB="25400" anchor="ctr">
-                    <a:lnL w="3810" cap="flat" cmpd="sng" algn="ctr">
-                      <a:solidFill>
-                        <a:srgbClr val="CBD5E0"/>
-                      </a:solidFill>
-                      <a:prstDash val="solid"/>
-                      <a:round/>
-                      <a:headEnd type="none" w="med" len="med"/>
-                      <a:tailEnd type="none" w="med" len="med"/>
-                    </a:lnL>
-                    <a:lnR w="3810" cap="flat" cmpd="sng" algn="ctr">
-                      <a:solidFill>
-                        <a:srgbClr val="CBD5E0"/>
-                      </a:solidFill>
-                      <a:prstDash val="solid"/>
-                      <a:round/>
-                      <a:headEnd type="none" w="med" len="med"/>
-                      <a:tailEnd type="none" w="med" len="med"/>
-                    </a:lnR>
-                    <a:lnT w="3810" cap="flat" cmpd="sng" algn="ctr">
-                      <a:solidFill>
-                        <a:srgbClr val="CBD5E0"/>
-                      </a:solidFill>
-                      <a:prstDash val="solid"/>
-                      <a:round/>
-                      <a:headEnd type="none" w="med" len="med"/>
-                      <a:tailEnd type="none" w="med" len="med"/>
-                    </a:lnT>
-                    <a:lnB w="3810" cap="flat" cmpd="sng" algn="ctr">
-                      <a:solidFill>
-                        <a:srgbClr val="CBD5E0"/>
-                      </a:solidFill>
-                      <a:prstDash val="solid"/>
-                      <a:round/>
-                      <a:headEnd type="none" w="med" len="med"/>
-                      <a:tailEnd type="none" w="med" len="med"/>
-                    </a:lnB>
-                    <a:solidFill>
-                      <a:srgbClr val="FFFFFF"/>
-                    </a:solidFill>
-                  </a:tcPr>
-                </a:tc>
-              </a:tr>
-              <a:tr h="438912">
-                <a:tc>
-                  <a:txBody>
-                    <a:bodyPr/>
-                    <a:lstStyle/>
-                    <a:p>
-                      <a:pPr indent="0" marL="0">
-                        <a:buNone/>
-                      </a:pPr>
-                      <a:r>
-                        <a:rPr lang="en-US" sz="1300" b="1" dirty="0">
-                          <a:solidFill>
-                            <a:srgbClr val="10161F"/>
-                          </a:solidFill>
-                          <a:latin typeface="Pretendard" pitchFamily="34" charset="0"/>
-                          <a:ea typeface="Pretendard" pitchFamily="34" charset="-122"/>
-                          <a:cs typeface="Pretendard" pitchFamily="34" charset="-120"/>
-                        </a:rPr>
-                        <a:t>임차인 </a:t>
-                      </a:r>
-                      <a:pPr indent="0" marL="0">
-                        <a:buNone/>
-                      </a:pPr>
-                      <a:r>
-                        <a:rPr lang="en-US" sz="1300" b="1" dirty="0">
-                          <a:solidFill>
-                            <a:srgbClr val="10161F"/>
-                          </a:solidFill>
-                          <a:latin typeface="Pretendard" pitchFamily="34" charset="0"/>
-                          <a:ea typeface="Pretendard" pitchFamily="34" charset="-122"/>
-                          <a:cs typeface="Pretendard" pitchFamily="34" charset="-120"/>
-                        </a:rPr>
-                        <a:t>정보</a:t>
-                      </a:r>
-                      <a:endParaRPr lang="en-US" sz="1300" dirty="0">
-                        <a:latin typeface="Pretendard" charset="0"/>
-                        <a:ea typeface="Pretendard" charset="0"/>
-                        <a:cs typeface="Pretendard" charset="0"/>
-                      </a:endParaRPr>
-                    </a:p>
-                  </a:txBody>
-                  <a:tcPr marL="50800" marR="50800" marT="25400" marB="25400" anchor="ctr">
-                    <a:lnL w="3810" cap="flat" cmpd="sng" algn="ctr">
-                      <a:solidFill>
-                        <a:srgbClr val="CBD5E0"/>
-                      </a:solidFill>
-                      <a:prstDash val="solid"/>
-                      <a:round/>
-                      <a:headEnd type="none" w="med" len="med"/>
-                      <a:tailEnd type="none" w="med" len="med"/>
-                    </a:lnL>
-                    <a:lnR w="3810" cap="flat" cmpd="sng" algn="ctr">
-                      <a:solidFill>
-                        <a:srgbClr val="CBD5E0"/>
-                      </a:solidFill>
-                      <a:prstDash val="solid"/>
-                      <a:round/>
-                      <a:headEnd type="none" w="med" len="med"/>
-                      <a:tailEnd type="none" w="med" len="med"/>
-                    </a:lnR>
-                    <a:lnT w="3810" cap="flat" cmpd="sng" algn="ctr">
-                      <a:solidFill>
-                        <a:srgbClr val="CBD5E0"/>
-                      </a:solidFill>
-                      <a:prstDash val="solid"/>
-                      <a:round/>
-                      <a:headEnd type="none" w="med" len="med"/>
-                      <a:tailEnd type="none" w="med" len="med"/>
-                    </a:lnT>
-                    <a:lnB w="3810" cap="flat" cmpd="sng" algn="ctr">
-                      <a:solidFill>
-                        <a:srgbClr val="CBD5E0"/>
-                      </a:solidFill>
-                      <a:prstDash val="solid"/>
-                      <a:round/>
-                      <a:headEnd type="none" w="med" len="med"/>
-                      <a:tailEnd type="none" w="med" len="med"/>
-                    </a:lnB>
-                    <a:solidFill>
-                      <a:srgbClr val="F7FAFC"/>
-                    </a:solidFill>
-                  </a:tcPr>
-                </a:tc>
-                <a:tc>
-                  <a:txBody>
-                    <a:bodyPr/>
-                    <a:lstStyle/>
-                    <a:p>
-                      <a:pPr indent="0" marL="0">
-                        <a:buNone/>
-                      </a:pPr>
-                      <a:r>
-                        <a:rPr lang="en-US" sz="1300" dirty="0">
-                          <a:solidFill>
-                            <a:srgbClr val="10161F"/>
-                          </a:solidFill>
-                          <a:latin typeface="Pretendard" pitchFamily="34" charset="0"/>
-                          <a:ea typeface="Pretendard" pitchFamily="34" charset="-122"/>
-                          <a:cs typeface="Pretendard" pitchFamily="34" charset="-120"/>
-                        </a:rPr>
-                        <a:t>NDA </a:t>
-                      </a:r>
-                      <a:pPr indent="0" marL="0">
-                        <a:buNone/>
-                      </a:pPr>
-                      <a:r>
-                        <a:rPr lang="en-US" sz="1300" dirty="0">
-                          <a:solidFill>
-                            <a:srgbClr val="10161F"/>
-                          </a:solidFill>
-                          <a:latin typeface="Pretendard" pitchFamily="34" charset="0"/>
-                          <a:ea typeface="Pretendard" pitchFamily="34" charset="-122"/>
-                          <a:cs typeface="Pretendard" pitchFamily="34" charset="-120"/>
-                        </a:rPr>
-                        <a:t>체결 </a:t>
-                      </a:r>
-                      <a:pPr indent="0" marL="0">
-                        <a:buNone/>
-                      </a:pPr>
-                      <a:r>
-                        <a:rPr lang="en-US" sz="1300" dirty="0">
-                          <a:solidFill>
-                            <a:srgbClr val="10161F"/>
-                          </a:solidFill>
-                          <a:latin typeface="Pretendard" pitchFamily="34" charset="0"/>
-                          <a:ea typeface="Pretendard" pitchFamily="34" charset="-122"/>
-                          <a:cs typeface="Pretendard" pitchFamily="34" charset="-120"/>
-                        </a:rPr>
-                        <a:t>후 </a:t>
-                      </a:r>
-                      <a:pPr indent="0" marL="0">
-                        <a:buNone/>
-                      </a:pPr>
-                      <a:r>
-                        <a:rPr lang="en-US" sz="1300" dirty="0">
-                          <a:solidFill>
-                            <a:srgbClr val="10161F"/>
-                          </a:solidFill>
-                          <a:latin typeface="Pretendard" pitchFamily="34" charset="0"/>
-                          <a:ea typeface="Pretendard" pitchFamily="34" charset="-122"/>
-                          <a:cs typeface="Pretendard" pitchFamily="34" charset="-120"/>
-                        </a:rPr>
-                        <a:t>공개</a:t>
-                      </a:r>
-                      <a:endParaRPr lang="en-US" sz="1300" dirty="0">
-                        <a:latin typeface="Pretendard" charset="0"/>
-                        <a:ea typeface="Pretendard" charset="0"/>
-                        <a:cs typeface="Pretendard" charset="0"/>
-                      </a:endParaRPr>
-                    </a:p>
-                  </a:txBody>
-                  <a:tcPr marL="50800" marR="50800" marT="25400" marB="25400" anchor="ctr">
-                    <a:lnL w="3810" cap="flat" cmpd="sng" algn="ctr">
-                      <a:solidFill>
-                        <a:srgbClr val="CBD5E0"/>
-                      </a:solidFill>
-                      <a:prstDash val="solid"/>
-                      <a:round/>
-                      <a:headEnd type="none" w="med" len="med"/>
-                      <a:tailEnd type="none" w="med" len="med"/>
-                    </a:lnL>
-                    <a:lnR w="3810" cap="flat" cmpd="sng" algn="ctr">
-                      <a:solidFill>
-                        <a:srgbClr val="CBD5E0"/>
-                      </a:solidFill>
-                      <a:prstDash val="solid"/>
-                      <a:round/>
-                      <a:headEnd type="none" w="med" len="med"/>
-                      <a:tailEnd type="none" w="med" len="med"/>
-                    </a:lnR>
-                    <a:lnT w="3810" cap="flat" cmpd="sng" algn="ctr">
-                      <a:solidFill>
-                        <a:srgbClr val="CBD5E0"/>
-                      </a:solidFill>
-                      <a:prstDash val="solid"/>
-                      <a:round/>
-                      <a:headEnd type="none" w="med" len="med"/>
-                      <a:tailEnd type="none" w="med" len="med"/>
-                    </a:lnT>
-                    <a:lnB w="3810" cap="flat" cmpd="sng" algn="ctr">
-                      <a:solidFill>
-                        <a:srgbClr val="CBD5E0"/>
-                      </a:solidFill>
-                      <a:prstDash val="solid"/>
-                      <a:round/>
-                      <a:headEnd type="none" w="med" len="med"/>
-                      <a:tailEnd type="none" w="med" len="med"/>
-                    </a:lnB>
-                    <a:solidFill>
-                      <a:srgbClr val="F7FAFC"/>
-                    </a:solidFill>
-                  </a:tcPr>
-                </a:tc>
-              </a:tr>
-            </a:tbl>
-          </a:graphicData>
-        </a:graphic>
-      </p:graphicFrame>
-      <p:sp>
-        <p:nvSpPr>
-          <p:cNvPr id="7" name="Text 4"/>
-          <p:cNvSpPr/>
-          <p:nvPr/>
-        </p:nvSpPr>
-        <p:spPr>
-          <a:xfrm>
-            <a:off x="566928" y="6382512"/>
-            <a:ext cx="7315200" cy="219456"/>
+      <p:sp>
+        <p:nvSpPr>
+          <p:cNvPr id="6" name="Text 4"/>
+          <p:cNvSpPr/>
+          <p:nvPr/>
+        </p:nvSpPr>
+        <p:spPr>
+          <a:xfrm>
+            <a:off x="566928" y="1645920"/>
+            <a:ext cx="4201979" cy="402336"/>
           </a:xfrm>
           <a:prstGeom prst="rect">
             <a:avLst/>
@@ -7159,10 +7213,13 @@
           <a:lstStyle/>
           <a:p>
             <a:pPr indent="0" marL="0">
-              <a:buNone/>
-            </a:pPr>
-            <a:r>
-              <a:rPr lang="en-US" sz="800" dirty="0">
+              <a:lnSpc>
+                <a:spcPct val="120000"/>
+              </a:lnSpc>
+              <a:buNone/>
+            </a:pPr>
+            <a:r>
+              <a:rPr lang="en-US" sz="1400" dirty="0">
                 <a:solidFill>
                   <a:srgbClr val="718096"/>
                 </a:solidFill>
@@ -7170,6 +7227,87 @@
                 <a:ea typeface="Pretendard" pitchFamily="34" charset="-122"/>
                 <a:cs typeface="Pretendard" pitchFamily="34" charset="-120"/>
               </a:rPr>
+              <a:t>{"ok"</a:t>
+            </a:r>
+            <a:endParaRPr lang="en-US" sz="1400" dirty="0"/>
+          </a:p>
+        </p:txBody>
+      </p:sp>
+      <p:sp>
+        <p:nvSpPr>
+          <p:cNvPr id="7" name="Text 5"/>
+          <p:cNvSpPr/>
+          <p:nvPr/>
+        </p:nvSpPr>
+        <p:spPr>
+          <a:xfrm>
+            <a:off x="4768907" y="1645920"/>
+            <a:ext cx="6855860" cy="402336"/>
+          </a:xfrm>
+          <a:prstGeom prst="rect">
+            <a:avLst/>
+          </a:prstGeom>
+          <a:noFill/>
+          <a:ln/>
+        </p:spPr>
+        <p:txBody>
+          <a:bodyPr wrap="square" lIns="0" tIns="0" rIns="0" bIns="0" rtlCol="0" anchor="ctr"/>
+          <a:lstStyle/>
+          <a:p>
+            <a:pPr indent="0" marL="0">
+              <a:lnSpc>
+                <a:spcPct val="120000"/>
+              </a:lnSpc>
+              <a:buNone/>
+            </a:pPr>
+            <a:r>
+              <a:rPr lang="en-US" sz="1400" b="1" dirty="0">
+                <a:solidFill>
+                  <a:srgbClr val="10161F"/>
+                </a:solidFill>
+                <a:latin typeface="Pretendard" pitchFamily="34" charset="0"/>
+                <a:ea typeface="Pretendard" pitchFamily="34" charset="-122"/>
+                <a:cs typeface="Pretendard" pitchFamily="34" charset="-120"/>
+              </a:rPr>
+              <a:t>true,"mocked":true,"extractedFields":{"area_signal":"역삼","asset_type":"오피스빌딩","price_band":"300억","size_signal":"3000평(약 9917.4㎡)"},"extractedFacts":{"region":"역삼","exactAddressCandidate":"역삼동 742-1","assetType":"오피스빌딩","priceText":"300억","sizeText":"3000평(약 9917.4㎡)","currentUse":"오피스","currentUseSignal":"근린생활시설","leaseSignal":"임대중","vacancySignal":"공실없음","tenantNames":"쿠팡","네이버","unitRentTexts":"301호: 1500만","sellerMotivationText":"자산 효율화","brokerNotes":"초역세권 매물"},"detectedSensitiveFields":"exact_address","tenant_name","ambiguousFields":,"warnings":,"areaSignal":"역삼","assetType":"오피스빌딩","priceBand":"300억","sizeSignal":"3000평(약 9917.4㎡)","dealType":"매각","buildingName":"역삼 센트럴타워","exactAddress":"역삼동 742-1","totalFloorArea":9917.3,"buildYear":2015,"currentUseSignal":"근린생활시설","vacancySignal":"공실 없음","fitSummary":"초역세권 근생 빌딩으로 시행/사옥 매입에 최적화","cautionSummary":"주요 임차인 만기 조율 필요","hiddenFields":"exact_address","seller_motivation","confidence":{"areaSignal":"confirmed","assetType":"confirmed","priceBand":"ai_hypothesis","fitSummary":"ai_hypothesis"},"missingData":"sizeSignal","boundaryNote":"본 자료는 실거래 통계 기반 참고치입니다.","buyerType":"법인 사옥형","budgetRange":{"min":50,"max":80,"display":"50억~80억"},"preferredRegions":"강남","성수","assetTypes":"꼬마빌딩","사옥용","purchasePurpose":"사옥용 매입","mustHave":"초역세권","주차","niceToHave":"테라스","루프탑","riskTolerance":"medium","financingNote":"자본금 50% 준비","missingQuestions":"구체적인 입주 시기가 언제인가요?","선호하는 수익률이 있나요?","privacyNotes":"연락처 비공개","fitReasons":"매수자 예산(50-80억)에 부합하는 매물입니다.","요청하신 성수/강남 권역에 해당합니다.","cautionReasons":"요청한 용도와 달리 명도 협의가 다소 필요합니다.","recommendedNextAction":"현장 답사 제안","kakaoMessage":"안녕하세요! 요청하신 조건에 부합하는 추천 매물이 있어 안내해 드립니다. 확인해보시고 피드백 부탁드립니다.","title":"강남 역삼역 초역세권 오피스 사옥용 빌딩 매각","shortSummary":"역삼역 도보 5분 거리의 준신축급 대형 오피스빌딩입니다.","dealPoints":"초역세권","사옥 최적","cautionPoints":"명도 조율 필요","hiddenInfoNotice":"보증금 및 지번은 인가 후 확인 가능","gateMessage":"G1 등급 등록이 필요합니다.","kakaoText":"강남 역삼역 오피스 빌딩 매각 안내입니다.","exactUnitCandidate":"101호","floor":"1층","areaSqmText":"150㎡","spaceType":"office","depositText":"5000만","monthlyRentText":"400만","maintenanceFeeText":"50만","availableFromText":"즉시입주","leaseTermMonthsText":"24","incentivesText":"렌트프리 2개월","restrictions":,"landlordIdentity":"김성수","currentTenant":"스타트업","vacancyReason":"이전 확장","rentNegotiation":"협의 가능","region":"성수동","areaSqm":150,"deposit":5000,"monthlyRent":400,"maintenanceFee":50,"availableFrom":"즉시입주","leaseTermMonths":24,"incentives":{"rentFreeMonths":2,"interiorSupport":"일부 인테리어 지원","freeRentDetail":"렌트프리 2개월 지원"},"shortSummaryLease":"성수역 도보 5분 거리 1층 리테일 상가 매물입니다."}</a:t>
+            </a:r>
+            <a:endParaRPr lang="en-US" sz="1400" dirty="0"/>
+          </a:p>
+        </p:txBody>
+      </p:sp>
+      <p:sp>
+        <p:nvSpPr>
+          <p:cNvPr id="8" name="Text 6"/>
+          <p:cNvSpPr/>
+          <p:nvPr/>
+        </p:nvSpPr>
+        <p:spPr>
+          <a:xfrm>
+            <a:off x="566928" y="6382512"/>
+            <a:ext cx="7315200" cy="219456"/>
+          </a:xfrm>
+          <a:prstGeom prst="rect">
+            <a:avLst/>
+          </a:prstGeom>
+          <a:noFill/>
+          <a:ln/>
+        </p:spPr>
+        <p:txBody>
+          <a:bodyPr wrap="square" lIns="0" tIns="0" rIns="0" bIns="0" rtlCol="0" anchor="ctr"/>
+          <a:lstStyle/>
+          <a:p>
+            <a:pPr indent="0" marL="0">
+              <a:buNone/>
+            </a:pPr>
+            <a:r>
+              <a:rPr lang="en-US" sz="800" dirty="0">
+                <a:solidFill>
+                  <a:srgbClr val="718096"/>
+                </a:solidFill>
+                <a:latin typeface="Pretendard" pitchFamily="34" charset="0"/>
+                <a:ea typeface="Pretendard" pitchFamily="34" charset="-122"/>
+                <a:cs typeface="Pretendard" pitchFamily="34" charset="-120"/>
+              </a:rPr>
               <a:t>크리딜   |   </a:t>
             </a:r>
             <a:endParaRPr lang="en-US" sz="800" dirty="0"/>
@@ -7178,7 +7316,7 @@
       </p:sp>
       <p:sp>
         <p:nvSpPr>
-          <p:cNvPr id="8" name="Text 5"/>
+          <p:cNvPr id="9" name="Text 7"/>
           <p:cNvSpPr/>
           <p:nvPr/>
         </p:nvSpPr>
@@ -7786,11 +7924,11 @@
         <p:spPr>
           <a:xfrm>
             <a:off x="566928" y="1417320"/>
-            <a:ext cx="3515258" cy="3657600"/>
+            <a:ext cx="11057839" cy="3657600"/>
           </a:xfrm>
           <a:prstGeom prst="roundRect">
             <a:avLst>
-              <a:gd name="adj" fmla="val 1561"/>
+              <a:gd name="adj" fmla="val 1500"/>
             </a:avLst>
           </a:prstGeom>
           <a:solidFill>
@@ -7813,7 +7951,7 @@
         <p:spPr>
           <a:xfrm>
             <a:off x="566928" y="1417320"/>
-            <a:ext cx="3515258" cy="45720"/>
+            <a:ext cx="11057839" cy="45720"/>
           </a:xfrm>
           <a:prstGeom prst="rect">
             <a:avLst/>
@@ -7833,7 +7971,7 @@
         <p:spPr>
           <a:xfrm>
             <a:off x="795528" y="1618488"/>
-            <a:ext cx="3058058" cy="292608"/>
+            <a:ext cx="10600639" cy="292608"/>
           </a:xfrm>
           <a:prstGeom prst="rect">
             <a:avLst/>
@@ -7857,7 +7995,7 @@
                 <a:ea typeface="Pretendard" pitchFamily="34" charset="-122"/>
                 <a:cs typeface="Pretendard" pitchFamily="34" charset="-120"/>
               </a:rPr>
-              <a:t>건물 물리적 상태</a:t>
+              <a:t>용도 리스크</a:t>
             </a:r>
             <a:endParaRPr lang="en-US" sz="1350" dirty="0"/>
           </a:p>
@@ -7872,7 +8010,7 @@
         <p:spPr>
           <a:xfrm>
             <a:off x="795528" y="1947672"/>
-            <a:ext cx="3058058" cy="365760"/>
+            <a:ext cx="10600639" cy="365760"/>
           </a:xfrm>
           <a:prstGeom prst="rect">
             <a:avLst/>
@@ -7898,7 +8036,7 @@
                 <a:ea typeface="Pretendard" pitchFamily="34" charset="-122"/>
                 <a:cs typeface="Pretendard" pitchFamily="34" charset="-120"/>
               </a:rPr>
-              <a:t>준공연도 확인 필요, 구조 확인 필요</a:t>
+              <a:t>—</a:t>
             </a:r>
             <a:endParaRPr lang="en-US" sz="1250" dirty="0"/>
           </a:p>
@@ -7913,7 +8051,7 @@
         <p:spPr>
           <a:xfrm>
             <a:off x="795528" y="2377440"/>
-            <a:ext cx="3058058" cy="2606040"/>
+            <a:ext cx="10600639" cy="2606040"/>
           </a:xfrm>
           <a:prstGeom prst="rect">
             <a:avLst/>
@@ -7943,58 +8081,10 @@
                 <a:ea typeface="Pretendard" pitchFamily="34" charset="-122"/>
                 <a:cs typeface="Pretendard" pitchFamily="34" charset="-120"/>
               </a:rPr>
-              <a:t>누수</a:t>
+              <a:t>{"ok":true,"mocked":true,"extractedFields":{"area_signal":"역삼","asset_type":"오피스빌딩","price_band":"300억","size_signal":"3000평(약 9917.4㎡)"},"extractedFacts":{"region":"역삼","exactAddressCandidate":"역삼동 7</a:t>
             </a:r>
             <a:endParaRPr lang="en-US" sz="1100" dirty="0"/>
           </a:p>
-          <a:p>
-            <a:pPr marL="342900" indent="-342900">
-              <a:lnSpc>
-                <a:spcPct val="125000"/>
-              </a:lnSpc>
-              <a:spcBef>
-                <a:spcPts val="600"/>
-              </a:spcBef>
-              <a:buSzPct val="100000"/>
-              <a:buChar char="•"/>
-            </a:pPr>
-            <a:r>
-              <a:rPr lang="en-US" sz="1100" dirty="0">
-                <a:solidFill>
-                  <a:srgbClr val="10161F"/>
-                </a:solidFill>
-                <a:latin typeface="Pretendard" pitchFamily="34" charset="0"/>
-                <a:ea typeface="Pretendard" pitchFamily="34" charset="-122"/>
-                <a:cs typeface="Pretendard" pitchFamily="34" charset="-120"/>
-              </a:rPr>
-              <a:t>균열</a:t>
-            </a:r>
-            <a:endParaRPr lang="en-US" sz="1100" dirty="0"/>
-          </a:p>
-          <a:p>
-            <a:pPr marL="342900" indent="-342900">
-              <a:lnSpc>
-                <a:spcPct val="125000"/>
-              </a:lnSpc>
-              <a:spcBef>
-                <a:spcPts val="600"/>
-              </a:spcBef>
-              <a:buSzPct val="100000"/>
-              <a:buChar char="•"/>
-            </a:pPr>
-            <a:r>
-              <a:rPr lang="en-US" sz="1100" dirty="0">
-                <a:solidFill>
-                  <a:srgbClr val="10161F"/>
-                </a:solidFill>
-                <a:latin typeface="Pretendard" pitchFamily="34" charset="0"/>
-                <a:ea typeface="Pretendard" pitchFamily="34" charset="-122"/>
-                <a:cs typeface="Pretendard" pitchFamily="34" charset="-120"/>
-              </a:rPr>
-              <a:t>설비 노후 여부 현장 점검 필요</a:t>
-            </a:r>
-            <a:endParaRPr lang="en-US" sz="1100" dirty="0"/>
-          </a:p>
         </p:txBody>
       </p:sp>
       <p:sp>
@@ -8005,12 +8095,12 @@
         </p:nvSpPr>
         <p:spPr>
           <a:xfrm>
-            <a:off x="4338218" y="1417320"/>
-            <a:ext cx="3515258" cy="3657600"/>
+            <a:off x="566928" y="5193792"/>
+            <a:ext cx="11057839" cy="621792"/>
           </a:xfrm>
           <a:prstGeom prst="roundRect">
             <a:avLst>
-              <a:gd name="adj" fmla="val 1561"/>
+              <a:gd name="adj" fmla="val 8824"/>
             </a:avLst>
           </a:prstGeom>
           <a:solidFill>
@@ -8026,34 +8116,14 @@
       </p:sp>
       <p:sp>
         <p:nvSpPr>
-          <p:cNvPr id="12" name="Shape 10"/>
-          <p:cNvSpPr/>
-          <p:nvPr/>
-        </p:nvSpPr>
-        <p:spPr>
-          <a:xfrm>
-            <a:off x="4338218" y="1417320"/>
-            <a:ext cx="3515258" cy="45720"/>
-          </a:xfrm>
-          <a:prstGeom prst="rect">
-            <a:avLst/>
-          </a:prstGeom>
-          <a:solidFill>
-            <a:srgbClr val="B98A2E"/>
-          </a:solidFill>
-          <a:ln/>
-        </p:spPr>
-      </p:sp>
-      <p:sp>
-        <p:nvSpPr>
-          <p:cNvPr id="13" name="Text 11"/>
-          <p:cNvSpPr/>
-          <p:nvPr/>
-        </p:nvSpPr>
-        <p:spPr>
-          <a:xfrm>
-            <a:off x="4566818" y="1618488"/>
-            <a:ext cx="3058058" cy="292608"/>
+          <p:cNvPr id="12" name="Text 10"/>
+          <p:cNvSpPr/>
+          <p:nvPr/>
+        </p:nvSpPr>
+        <p:spPr>
+          <a:xfrm>
+            <a:off x="795528" y="5193792"/>
+            <a:ext cx="10600639" cy="621792"/>
           </a:xfrm>
           <a:prstGeom prst="rect">
             <a:avLst/>
@@ -8069,377 +8139,53 @@
               <a:buNone/>
             </a:pPr>
             <a:r>
-              <a:rPr lang="en-US" sz="1350" b="1" dirty="0">
-                <a:solidFill>
-                  <a:srgbClr val="977024"/>
+              <a:rPr lang="en-US" sz="1100" dirty="0">
+                <a:solidFill>
+                  <a:srgbClr val="10161F"/>
                 </a:solidFill>
                 <a:latin typeface="Pretendard" pitchFamily="34" charset="0"/>
                 <a:ea typeface="Pretendard" pitchFamily="34" charset="-122"/>
                 <a:cs typeface="Pretendard" pitchFamily="34" charset="-120"/>
               </a:rPr>
-              <a:t>승강기 및 설비</a:t>
-            </a:r>
-            <a:endParaRPr lang="en-US" sz="1350" dirty="0"/>
-          </a:p>
-        </p:txBody>
-      </p:sp>
-      <p:sp>
-        <p:nvSpPr>
-          <p:cNvPr id="14" name="Text 12"/>
-          <p:cNvSpPr/>
-          <p:nvPr/>
-        </p:nvSpPr>
-        <p:spPr>
-          <a:xfrm>
-            <a:off x="4566818" y="1947672"/>
-            <a:ext cx="3058058" cy="365760"/>
-          </a:xfrm>
-          <a:prstGeom prst="rect">
-            <a:avLst/>
-          </a:prstGeom>
-          <a:noFill/>
-          <a:ln/>
-        </p:spPr>
-        <p:txBody>
-          <a:bodyPr wrap="square" lIns="0" tIns="0" rIns="0" bIns="0" rtlCol="0" anchor="ctr">
-            <a:normAutofit/>
-          </a:bodyPr>
+              <a:t>※ 본 리스크 체크는 공부 및 브로커 확인 기반이며, 매수 전 전문 실사팀(변호사/건축사)을 통한 정밀 실사가 필요합니다.</a:t>
+            </a:r>
+            <a:endParaRPr lang="en-US" sz="1100" dirty="0"/>
+          </a:p>
+        </p:txBody>
+      </p:sp>
+      <p:sp>
+        <p:nvSpPr>
+          <p:cNvPr id="13" name="Text 11"/>
+          <p:cNvSpPr/>
+          <p:nvPr/>
+        </p:nvSpPr>
+        <p:spPr>
+          <a:xfrm>
+            <a:off x="566928" y="6382512"/>
+            <a:ext cx="7315200" cy="219456"/>
+          </a:xfrm>
+          <a:prstGeom prst="rect">
+            <a:avLst/>
+          </a:prstGeom>
+          <a:noFill/>
+          <a:ln/>
+        </p:spPr>
+        <p:txBody>
+          <a:bodyPr wrap="square" lIns="0" tIns="0" rIns="0" bIns="0" rtlCol="0" anchor="ctr"/>
           <a:lstStyle/>
           <a:p>
             <a:pPr indent="0" marL="0">
               <a:buNone/>
             </a:pPr>
             <a:r>
-              <a:rPr lang="en-US" sz="1250" b="1" dirty="0">
-                <a:solidFill>
-                  <a:srgbClr val="10161F"/>
+              <a:rPr lang="en-US" sz="800" dirty="0">
+                <a:solidFill>
+                  <a:srgbClr val="718096"/>
                 </a:solidFill>
                 <a:latin typeface="Pretendard" pitchFamily="34" charset="0"/>
                 <a:ea typeface="Pretendard" pitchFamily="34" charset="-122"/>
                 <a:cs typeface="Pretendard" pitchFamily="34" charset="-120"/>
               </a:rPr>
-              <a:t>승강기 정보 확인 필요</a:t>
-            </a:r>
-            <a:endParaRPr lang="en-US" sz="1250" dirty="0"/>
-          </a:p>
-        </p:txBody>
-      </p:sp>
-      <p:sp>
-        <p:nvSpPr>
-          <p:cNvPr id="15" name="Text 13"/>
-          <p:cNvSpPr/>
-          <p:nvPr/>
-        </p:nvSpPr>
-        <p:spPr>
-          <a:xfrm>
-            <a:off x="4566818" y="2377440"/>
-            <a:ext cx="3058058" cy="2606040"/>
-          </a:xfrm>
-          <a:prstGeom prst="rect">
-            <a:avLst/>
-          </a:prstGeom>
-          <a:noFill/>
-          <a:ln/>
-        </p:spPr>
-        <p:txBody>
-          <a:bodyPr wrap="square" lIns="0" tIns="0" rIns="0" bIns="0" rtlCol="0" anchor="t">
-            <a:normAutofit/>
-          </a:bodyPr>
-          <a:lstStyle/>
-          <a:p>
-            <a:pPr marL="342900" indent="-342900">
-              <a:lnSpc>
-                <a:spcPct val="125000"/>
-              </a:lnSpc>
-              <a:buSzPct val="100000"/>
-              <a:buChar char="•"/>
-            </a:pPr>
-            <a:r>
-              <a:rPr lang="en-US" sz="1100" dirty="0">
-                <a:solidFill>
-                  <a:srgbClr val="10161F"/>
-                </a:solidFill>
-                <a:latin typeface="Pretendard" pitchFamily="34" charset="0"/>
-                <a:ea typeface="Pretendard" pitchFamily="34" charset="-122"/>
-                <a:cs typeface="Pretendard" pitchFamily="34" charset="-120"/>
-              </a:rPr>
-              <a:t>정기검사 이력, 냉난방 설비 상태 확인 필요</a:t>
-            </a:r>
-            <a:endParaRPr lang="en-US" sz="1100" dirty="0"/>
-          </a:p>
-        </p:txBody>
-      </p:sp>
-      <p:sp>
-        <p:nvSpPr>
-          <p:cNvPr id="16" name="Shape 14"/>
-          <p:cNvSpPr/>
-          <p:nvPr/>
-        </p:nvSpPr>
-        <p:spPr>
-          <a:xfrm>
-            <a:off x="8109509" y="1417320"/>
-            <a:ext cx="3515258" cy="3657600"/>
-          </a:xfrm>
-          <a:prstGeom prst="roundRect">
-            <a:avLst>
-              <a:gd name="adj" fmla="val 1561"/>
-            </a:avLst>
-          </a:prstGeom>
-          <a:solidFill>
-            <a:srgbClr val="F7FAFC"/>
-          </a:solidFill>
-          <a:ln w="6350">
-            <a:solidFill>
-              <a:srgbClr val="CBD5E0"/>
-            </a:solidFill>
-            <a:prstDash val="solid"/>
-          </a:ln>
-        </p:spPr>
-      </p:sp>
-      <p:sp>
-        <p:nvSpPr>
-          <p:cNvPr id="17" name="Shape 15"/>
-          <p:cNvSpPr/>
-          <p:nvPr/>
-        </p:nvSpPr>
-        <p:spPr>
-          <a:xfrm>
-            <a:off x="8109509" y="1417320"/>
-            <a:ext cx="3515258" cy="45720"/>
-          </a:xfrm>
-          <a:prstGeom prst="rect">
-            <a:avLst/>
-          </a:prstGeom>
-          <a:solidFill>
-            <a:srgbClr val="B98A2E"/>
-          </a:solidFill>
-          <a:ln/>
-        </p:spPr>
-      </p:sp>
-      <p:sp>
-        <p:nvSpPr>
-          <p:cNvPr id="18" name="Text 16"/>
-          <p:cNvSpPr/>
-          <p:nvPr/>
-        </p:nvSpPr>
-        <p:spPr>
-          <a:xfrm>
-            <a:off x="8338109" y="1618488"/>
-            <a:ext cx="3058058" cy="292608"/>
-          </a:xfrm>
-          <a:prstGeom prst="rect">
-            <a:avLst/>
-          </a:prstGeom>
-          <a:noFill/>
-          <a:ln/>
-        </p:spPr>
-        <p:txBody>
-          <a:bodyPr wrap="square" lIns="0" tIns="0" rIns="0" bIns="0" rtlCol="0" anchor="ctr"/>
-          <a:lstStyle/>
-          <a:p>
-            <a:pPr indent="0" marL="0">
-              <a:buNone/>
-            </a:pPr>
-            <a:r>
-              <a:rPr lang="en-US" sz="1350" b="1" dirty="0">
-                <a:solidFill>
-                  <a:srgbClr val="977024"/>
-                </a:solidFill>
-                <a:latin typeface="Pretendard" pitchFamily="34" charset="0"/>
-                <a:ea typeface="Pretendard" pitchFamily="34" charset="-122"/>
-                <a:cs typeface="Pretendard" pitchFamily="34" charset="-120"/>
-              </a:rPr>
-              <a:t>임차인 이탈 위험</a:t>
-            </a:r>
-            <a:endParaRPr lang="en-US" sz="1350" dirty="0"/>
-          </a:p>
-        </p:txBody>
-      </p:sp>
-      <p:sp>
-        <p:nvSpPr>
-          <p:cNvPr id="19" name="Text 17"/>
-          <p:cNvSpPr/>
-          <p:nvPr/>
-        </p:nvSpPr>
-        <p:spPr>
-          <a:xfrm>
-            <a:off x="8338109" y="1947672"/>
-            <a:ext cx="3058058" cy="365760"/>
-          </a:xfrm>
-          <a:prstGeom prst="rect">
-            <a:avLst/>
-          </a:prstGeom>
-          <a:noFill/>
-          <a:ln/>
-        </p:spPr>
-        <p:txBody>
-          <a:bodyPr wrap="square" lIns="0" tIns="0" rIns="0" bIns="0" rtlCol="0" anchor="ctr">
-            <a:normAutofit/>
-          </a:bodyPr>
-          <a:lstStyle/>
-          <a:p>
-            <a:pPr indent="0" marL="0">
-              <a:buNone/>
-            </a:pPr>
-            <a:r>
-              <a:rPr lang="en-US" sz="1250" b="1" dirty="0">
-                <a:solidFill>
-                  <a:srgbClr val="10161F"/>
-                </a:solidFill>
-                <a:latin typeface="Pretendard" pitchFamily="34" charset="0"/>
-                <a:ea typeface="Pretendard" pitchFamily="34" charset="-122"/>
-                <a:cs typeface="Pretendard" pitchFamily="34" charset="-120"/>
-              </a:rPr>
-              <a:t>임대차 계약 현황 LOI 접수 후 열람</a:t>
-            </a:r>
-            <a:endParaRPr lang="en-US" sz="1250" dirty="0"/>
-          </a:p>
-        </p:txBody>
-      </p:sp>
-      <p:sp>
-        <p:nvSpPr>
-          <p:cNvPr id="20" name="Text 18"/>
-          <p:cNvSpPr/>
-          <p:nvPr/>
-        </p:nvSpPr>
-        <p:spPr>
-          <a:xfrm>
-            <a:off x="8338109" y="2377440"/>
-            <a:ext cx="3058058" cy="2606040"/>
-          </a:xfrm>
-          <a:prstGeom prst="rect">
-            <a:avLst/>
-          </a:prstGeom>
-          <a:noFill/>
-          <a:ln/>
-        </p:spPr>
-        <p:txBody>
-          <a:bodyPr wrap="square" lIns="0" tIns="0" rIns="0" bIns="0" rtlCol="0" anchor="t">
-            <a:normAutofit/>
-          </a:bodyPr>
-          <a:lstStyle/>
-          <a:p>
-            <a:pPr marL="342900" indent="-342900">
-              <a:lnSpc>
-                <a:spcPct val="125000"/>
-              </a:lnSpc>
-              <a:buSzPct val="100000"/>
-              <a:buChar char="•"/>
-            </a:pPr>
-            <a:r>
-              <a:rPr lang="en-US" sz="1100" dirty="0">
-                <a:solidFill>
-                  <a:srgbClr val="10161F"/>
-                </a:solidFill>
-                <a:latin typeface="Pretendard" pitchFamily="34" charset="0"/>
-                <a:ea typeface="Pretendard" pitchFamily="34" charset="-122"/>
-                <a:cs typeface="Pretendard" pitchFamily="34" charset="-120"/>
-              </a:rPr>
-              <a:t>잔여 계약기간(WALE), 임차인 신용도 확인 필요</a:t>
-            </a:r>
-            <a:endParaRPr lang="en-US" sz="1100" dirty="0"/>
-          </a:p>
-        </p:txBody>
-      </p:sp>
-      <p:sp>
-        <p:nvSpPr>
-          <p:cNvPr id="21" name="Shape 19"/>
-          <p:cNvSpPr/>
-          <p:nvPr/>
-        </p:nvSpPr>
-        <p:spPr>
-          <a:xfrm>
-            <a:off x="566928" y="5193792"/>
-            <a:ext cx="11057839" cy="621792"/>
-          </a:xfrm>
-          <a:prstGeom prst="roundRect">
-            <a:avLst>
-              <a:gd name="adj" fmla="val 8824"/>
-            </a:avLst>
-          </a:prstGeom>
-          <a:solidFill>
-            <a:srgbClr val="F7FAFC"/>
-          </a:solidFill>
-          <a:ln w="6350">
-            <a:solidFill>
-              <a:srgbClr val="CBD5E0"/>
-            </a:solidFill>
-            <a:prstDash val="solid"/>
-          </a:ln>
-        </p:spPr>
-      </p:sp>
-      <p:sp>
-        <p:nvSpPr>
-          <p:cNvPr id="22" name="Text 20"/>
-          <p:cNvSpPr/>
-          <p:nvPr/>
-        </p:nvSpPr>
-        <p:spPr>
-          <a:xfrm>
-            <a:off x="795528" y="5193792"/>
-            <a:ext cx="10600639" cy="621792"/>
-          </a:xfrm>
-          <a:prstGeom prst="rect">
-            <a:avLst/>
-          </a:prstGeom>
-          <a:noFill/>
-          <a:ln/>
-        </p:spPr>
-        <p:txBody>
-          <a:bodyPr wrap="square" lIns="0" tIns="0" rIns="0" bIns="0" rtlCol="0" anchor="ctr"/>
-          <a:lstStyle/>
-          <a:p>
-            <a:pPr indent="0" marL="0">
-              <a:buNone/>
-            </a:pPr>
-            <a:r>
-              <a:rPr lang="en-US" sz="1100" dirty="0">
-                <a:solidFill>
-                  <a:srgbClr val="10161F"/>
-                </a:solidFill>
-                <a:latin typeface="Pretendard" pitchFamily="34" charset="0"/>
-                <a:ea typeface="Pretendard" pitchFamily="34" charset="-122"/>
-                <a:cs typeface="Pretendard" pitchFamily="34" charset="-120"/>
-              </a:rPr>
-              <a:t>※ 본 리스크 체크는 공부 및 브로커 확인 기반이며, 매수 전 전문 실사팀(변호사/건축사)을 통한 정밀 실사가 필요합니다.</a:t>
-            </a:r>
-            <a:endParaRPr lang="en-US" sz="1100" dirty="0"/>
-          </a:p>
-        </p:txBody>
-      </p:sp>
-      <p:sp>
-        <p:nvSpPr>
-          <p:cNvPr id="23" name="Text 21"/>
-          <p:cNvSpPr/>
-          <p:nvPr/>
-        </p:nvSpPr>
-        <p:spPr>
-          <a:xfrm>
-            <a:off x="566928" y="6382512"/>
-            <a:ext cx="7315200" cy="219456"/>
-          </a:xfrm>
-          <a:prstGeom prst="rect">
-            <a:avLst/>
-          </a:prstGeom>
-          <a:noFill/>
-          <a:ln/>
-        </p:spPr>
-        <p:txBody>
-          <a:bodyPr wrap="square" lIns="0" tIns="0" rIns="0" bIns="0" rtlCol="0" anchor="ctr"/>
-          <a:lstStyle/>
-          <a:p>
-            <a:pPr indent="0" marL="0">
-              <a:buNone/>
-            </a:pPr>
-            <a:r>
-              <a:rPr lang="en-US" sz="800" dirty="0">
-                <a:solidFill>
-                  <a:srgbClr val="718096"/>
-                </a:solidFill>
-                <a:latin typeface="Pretendard" pitchFamily="34" charset="0"/>
-                <a:ea typeface="Pretendard" pitchFamily="34" charset="-122"/>
-                <a:cs typeface="Pretendard" pitchFamily="34" charset="-120"/>
-              </a:rPr>
               <a:t>크리딜   |   </a:t>
             </a:r>
             <a:endParaRPr lang="en-US" sz="800" dirty="0"/>
@@ -8448,7 +8194,7 @@
       </p:sp>
       <p:sp>
         <p:nvSpPr>
-          <p:cNvPr id="24" name="Text 22"/>
+          <p:cNvPr id="14" name="Text 12"/>
           <p:cNvSpPr/>
           <p:nvPr/>
         </p:nvSpPr>
@@ -8496,6 +8242,302 @@
 <file path=ppt/slides/slide8.xml><?xml version="1.0" encoding="utf-8"?>
 <p:sld xmlns:a="http://schemas.openxmlformats.org/drawingml/2006/main" xmlns:r="http://schemas.openxmlformats.org/officeDocument/2006/relationships" xmlns:p="http://schemas.openxmlformats.org/presentationml/2006/main">
   <p:cSld name="Slide 8">
+    <p:spTree>
+      <p:nvGrpSpPr>
+        <p:cNvPr id="1" name=""/>
+        <p:cNvGrpSpPr/>
+        <p:nvPr/>
+      </p:nvGrpSpPr>
+      <p:grpSpPr>
+        <a:xfrm>
+          <a:off x="0" y="0"/>
+          <a:ext cx="0" cy="0"/>
+          <a:chOff x="0" y="0"/>
+          <a:chExt cx="0" cy="0"/>
+        </a:xfrm>
+      </p:grpSpPr>
+      <p:sp>
+        <p:nvSpPr>
+          <p:cNvPr id="2" name="Shape 0"/>
+          <p:cNvSpPr/>
+          <p:nvPr/>
+        </p:nvSpPr>
+        <p:spPr>
+          <a:xfrm>
+            <a:off x="566928" y="457200"/>
+            <a:ext cx="384048" cy="384048"/>
+          </a:xfrm>
+          <a:prstGeom prst="ellipse">
+            <a:avLst/>
+          </a:prstGeom>
+          <a:solidFill>
+            <a:srgbClr val="B98A2E"/>
+          </a:solidFill>
+          <a:ln/>
+        </p:spPr>
+      </p:sp>
+      <p:sp>
+        <p:nvSpPr>
+          <p:cNvPr id="3" name="Text 1"/>
+          <p:cNvSpPr/>
+          <p:nvPr/>
+        </p:nvSpPr>
+        <p:spPr>
+          <a:xfrm>
+            <a:off x="566928" y="457200"/>
+            <a:ext cx="384048" cy="384048"/>
+          </a:xfrm>
+          <a:prstGeom prst="rect">
+            <a:avLst/>
+          </a:prstGeom>
+          <a:noFill/>
+          <a:ln/>
+        </p:spPr>
+        <p:txBody>
+          <a:bodyPr wrap="square" lIns="0" tIns="0" rIns="0" bIns="0" rtlCol="0" anchor="ctr"/>
+          <a:lstStyle/>
+          <a:p>
+            <a:pPr algn="ctr" indent="0" marL="0">
+              <a:buNone/>
+            </a:pPr>
+            <a:r>
+              <a:rPr lang="en-US" sz="1300" b="1" dirty="0">
+                <a:solidFill>
+                  <a:srgbClr val="FFFFFF"/>
+                </a:solidFill>
+                <a:latin typeface="Arial" pitchFamily="34" charset="0"/>
+                <a:ea typeface="Arial" pitchFamily="34" charset="-122"/>
+                <a:cs typeface="Arial" pitchFamily="34" charset="-120"/>
+              </a:rPr>
+              <a:t>08</a:t>
+            </a:r>
+            <a:endParaRPr lang="en-US" sz="1300" dirty="0"/>
+          </a:p>
+        </p:txBody>
+      </p:sp>
+      <p:sp>
+        <p:nvSpPr>
+          <p:cNvPr id="4" name="Text 2"/>
+          <p:cNvSpPr/>
+          <p:nvPr/>
+        </p:nvSpPr>
+        <p:spPr>
+          <a:xfrm>
+            <a:off x="1133856" y="457200"/>
+            <a:ext cx="10490911" cy="182880"/>
+          </a:xfrm>
+          <a:prstGeom prst="rect">
+            <a:avLst/>
+          </a:prstGeom>
+          <a:noFill/>
+          <a:ln/>
+        </p:spPr>
+        <p:txBody>
+          <a:bodyPr wrap="square" lIns="0" tIns="0" rIns="0" bIns="0" rtlCol="0" anchor="ctr"/>
+          <a:lstStyle/>
+          <a:p>
+            <a:pPr indent="0" marL="0">
+              <a:buNone/>
+            </a:pPr>
+            <a:r>
+              <a:rPr lang="en-US" sz="950" b="1" spc="200" kern="0" dirty="0">
+                <a:solidFill>
+                  <a:srgbClr val="B98A2E"/>
+                </a:solidFill>
+                <a:latin typeface="Arial" pitchFamily="34" charset="0"/>
+                <a:ea typeface="Arial" pitchFamily="34" charset="-122"/>
+                <a:cs typeface="Arial" pitchFamily="34" charset="-120"/>
+              </a:rPr>
+              <a:t>Checklist</a:t>
+            </a:r>
+            <a:endParaRPr lang="en-US" sz="950" dirty="0"/>
+          </a:p>
+        </p:txBody>
+      </p:sp>
+      <p:sp>
+        <p:nvSpPr>
+          <p:cNvPr id="5" name="Text 3"/>
+          <p:cNvSpPr/>
+          <p:nvPr/>
+        </p:nvSpPr>
+        <p:spPr>
+          <a:xfrm>
+            <a:off x="1133856" y="640080"/>
+            <a:ext cx="10490911" cy="365760"/>
+          </a:xfrm>
+          <a:prstGeom prst="rect">
+            <a:avLst/>
+          </a:prstGeom>
+          <a:noFill/>
+          <a:ln/>
+        </p:spPr>
+        <p:txBody>
+          <a:bodyPr wrap="square" lIns="0" tIns="0" rIns="0" bIns="0" rtlCol="0" anchor="ctr"/>
+          <a:lstStyle/>
+          <a:p>
+            <a:pPr indent="0" marL="0">
+              <a:buNone/>
+            </a:pPr>
+            <a:r>
+              <a:rPr lang="en-US" sz="2300" b="1" dirty="0">
+                <a:solidFill>
+                  <a:srgbClr val="10161F"/>
+                </a:solidFill>
+                <a:latin typeface="Pretendard" pitchFamily="34" charset="0"/>
+                <a:ea typeface="Pretendard" pitchFamily="34" charset="-122"/>
+                <a:cs typeface="Pretendard" pitchFamily="34" charset="-120"/>
+              </a:rPr>
+              <a:t>섹션 상세</a:t>
+            </a:r>
+            <a:endParaRPr lang="en-US" sz="2300" dirty="0"/>
+          </a:p>
+        </p:txBody>
+      </p:sp>
+      <p:sp>
+        <p:nvSpPr>
+          <p:cNvPr id="6" name="Text 4"/>
+          <p:cNvSpPr/>
+          <p:nvPr/>
+        </p:nvSpPr>
+        <p:spPr>
+          <a:xfrm>
+            <a:off x="566928" y="1517904"/>
+            <a:ext cx="6492240" cy="274320"/>
+          </a:xfrm>
+          <a:prstGeom prst="rect">
+            <a:avLst/>
+          </a:prstGeom>
+          <a:noFill/>
+          <a:ln/>
+        </p:spPr>
+        <p:txBody>
+          <a:bodyPr wrap="square" rtlCol="0" anchor="ctr"/>
+          <a:lstStyle/>
+          <a:p>
+            <a:pPr indent="0" marL="0">
+              <a:buNone/>
+            </a:pPr>
+            <a:endParaRPr lang="en-US" sz="1400" dirty="0"/>
+          </a:p>
+        </p:txBody>
+      </p:sp>
+      <p:sp>
+        <p:nvSpPr>
+          <p:cNvPr id="7" name="Text 5"/>
+          <p:cNvSpPr/>
+          <p:nvPr/>
+        </p:nvSpPr>
+        <p:spPr>
+          <a:xfrm>
+            <a:off x="566928" y="1874520"/>
+            <a:ext cx="6492240" cy="182880"/>
+          </a:xfrm>
+          <a:prstGeom prst="rect">
+            <a:avLst/>
+          </a:prstGeom>
+          <a:noFill/>
+          <a:ln/>
+        </p:spPr>
+        <p:txBody>
+          <a:bodyPr wrap="square" rtlCol="0" anchor="ctr"/>
+          <a:lstStyle/>
+          <a:p>
+            <a:pPr indent="0" marL="0">
+              <a:buNone/>
+            </a:pPr>
+            <a:endParaRPr lang="en-US" sz="900" dirty="0"/>
+          </a:p>
+        </p:txBody>
+      </p:sp>
+      <p:sp>
+        <p:nvSpPr>
+          <p:cNvPr id="8" name="Text 6"/>
+          <p:cNvSpPr/>
+          <p:nvPr/>
+        </p:nvSpPr>
+        <p:spPr>
+          <a:xfrm>
+            <a:off x="566928" y="6382512"/>
+            <a:ext cx="7315200" cy="219456"/>
+          </a:xfrm>
+          <a:prstGeom prst="rect">
+            <a:avLst/>
+          </a:prstGeom>
+          <a:noFill/>
+          <a:ln/>
+        </p:spPr>
+        <p:txBody>
+          <a:bodyPr wrap="square" lIns="0" tIns="0" rIns="0" bIns="0" rtlCol="0" anchor="ctr"/>
+          <a:lstStyle/>
+          <a:p>
+            <a:pPr indent="0" marL="0">
+              <a:buNone/>
+            </a:pPr>
+            <a:r>
+              <a:rPr lang="en-US" sz="800" dirty="0">
+                <a:solidFill>
+                  <a:srgbClr val="718096"/>
+                </a:solidFill>
+                <a:latin typeface="Pretendard" pitchFamily="34" charset="0"/>
+                <a:ea typeface="Pretendard" pitchFamily="34" charset="-122"/>
+                <a:cs typeface="Pretendard" pitchFamily="34" charset="-120"/>
+              </a:rPr>
+              <a:t>크리딜   |   </a:t>
+            </a:r>
+            <a:endParaRPr lang="en-US" sz="800" dirty="0"/>
+          </a:p>
+        </p:txBody>
+      </p:sp>
+      <p:sp>
+        <p:nvSpPr>
+          <p:cNvPr id="9" name="Text 7"/>
+          <p:cNvSpPr/>
+          <p:nvPr/>
+        </p:nvSpPr>
+        <p:spPr>
+          <a:xfrm>
+            <a:off x="10710367" y="6382512"/>
+            <a:ext cx="914400" cy="219456"/>
+          </a:xfrm>
+          <a:prstGeom prst="rect">
+            <a:avLst/>
+          </a:prstGeom>
+          <a:noFill/>
+          <a:ln/>
+        </p:spPr>
+        <p:txBody>
+          <a:bodyPr wrap="square" lIns="0" tIns="0" rIns="0" bIns="0" rtlCol="0" anchor="ctr"/>
+          <a:lstStyle/>
+          <a:p>
+            <a:pPr algn="r" indent="0" marL="0">
+              <a:buNone/>
+            </a:pPr>
+            <a:r>
+              <a:rPr lang="en-US" sz="900" b="1" dirty="0">
+                <a:solidFill>
+                  <a:srgbClr val="B98A2E"/>
+                </a:solidFill>
+                <a:latin typeface="Arial" pitchFamily="34" charset="0"/>
+                <a:ea typeface="Arial" pitchFamily="34" charset="-122"/>
+                <a:cs typeface="Arial" pitchFamily="34" charset="-120"/>
+              </a:rPr>
+              <a:t>8</a:t>
+            </a:r>
+            <a:endParaRPr lang="en-US" sz="900" dirty="0"/>
+          </a:p>
+        </p:txBody>
+      </p:sp>
+    </p:spTree>
+  </p:cSld>
+  <p:clrMapOvr>
+    <a:masterClrMapping/>
+  </p:clrMapOvr>
+</p:sld>
+</file>
+
+<file path=ppt/slides/slide9.xml><?xml version="1.0" encoding="utf-8"?>
+<p:sld xmlns:a="http://schemas.openxmlformats.org/drawingml/2006/main" xmlns:r="http://schemas.openxmlformats.org/officeDocument/2006/relationships" xmlns:p="http://schemas.openxmlformats.org/presentationml/2006/main">
+  <p:cSld name="Slide 9">
     <p:bg>
       <p:bgPr>
         <a:solidFill>
@@ -8570,7 +8612,7 @@
                 <a:ea typeface="Arial" pitchFamily="34" charset="-122"/>
                 <a:cs typeface="Arial" pitchFamily="34" charset="-120"/>
               </a:rPr>
-              <a:t>08</a:t>
+              <a:t>09</a:t>
             </a:r>
             <a:endParaRPr lang="en-US" sz="1300" dirty="0"/>
           </a:p>
@@ -8656,7 +8698,7 @@
       </p:sp>
       <p:graphicFrame>
         <p:nvGraphicFramePr>
-          <p:cNvPr id="9" name="Table 0"/>
+          <p:cNvPr id="10" name="Table 0"/>
           <p:cNvGraphicFramePr>
             <a:graphicFrameLocks noGrp="1"/>
           </p:cNvGraphicFramePr>
@@ -9954,434 +9996,6 @@
                 <a:ea typeface="Arial" pitchFamily="34" charset="-122"/>
                 <a:cs typeface="Arial" pitchFamily="34" charset="-120"/>
               </a:rPr>
-              <a:t>8</a:t>
-            </a:r>
-            <a:endParaRPr lang="en-US" sz="900" dirty="0"/>
-          </a:p>
-        </p:txBody>
-      </p:sp>
-    </p:spTree>
-  </p:cSld>
-  <p:clrMapOvr>
-    <a:masterClrMapping/>
-  </p:clrMapOvr>
-</p:sld>
-</file>
-
-<file path=ppt/slides/slide9.xml><?xml version="1.0" encoding="utf-8"?>
-<p:sld xmlns:a="http://schemas.openxmlformats.org/drawingml/2006/main" xmlns:r="http://schemas.openxmlformats.org/officeDocument/2006/relationships" xmlns:p="http://schemas.openxmlformats.org/presentationml/2006/main">
-  <p:cSld name="Slide 9">
-    <p:bg>
-      <p:bgPr>
-        <a:solidFill>
-          <a:srgbClr val="FFFFFF"/>
-        </a:solidFill>
-      </p:bgPr>
-    </p:bg>
-    <p:spTree>
-      <p:nvGrpSpPr>
-        <p:cNvPr id="1" name=""/>
-        <p:cNvGrpSpPr/>
-        <p:nvPr/>
-      </p:nvGrpSpPr>
-      <p:grpSpPr>
-        <a:xfrm>
-          <a:off x="0" y="0"/>
-          <a:ext cx="0" cy="0"/>
-          <a:chOff x="0" y="0"/>
-          <a:chExt cx="0" cy="0"/>
-        </a:xfrm>
-      </p:grpSpPr>
-      <p:sp>
-        <p:nvSpPr>
-          <p:cNvPr id="2" name="Shape 0"/>
-          <p:cNvSpPr/>
-          <p:nvPr/>
-        </p:nvSpPr>
-        <p:spPr>
-          <a:xfrm>
-            <a:off x="566928" y="457200"/>
-            <a:ext cx="384048" cy="384048"/>
-          </a:xfrm>
-          <a:prstGeom prst="ellipse">
-            <a:avLst/>
-          </a:prstGeom>
-          <a:solidFill>
-            <a:srgbClr val="B98A2E"/>
-          </a:solidFill>
-          <a:ln/>
-        </p:spPr>
-      </p:sp>
-      <p:sp>
-        <p:nvSpPr>
-          <p:cNvPr id="3" name="Text 1"/>
-          <p:cNvSpPr/>
-          <p:nvPr/>
-        </p:nvSpPr>
-        <p:spPr>
-          <a:xfrm>
-            <a:off x="566928" y="457200"/>
-            <a:ext cx="384048" cy="384048"/>
-          </a:xfrm>
-          <a:prstGeom prst="rect">
-            <a:avLst/>
-          </a:prstGeom>
-          <a:noFill/>
-          <a:ln/>
-        </p:spPr>
-        <p:txBody>
-          <a:bodyPr wrap="square" lIns="0" tIns="0" rIns="0" bIns="0" rtlCol="0" anchor="ctr"/>
-          <a:lstStyle/>
-          <a:p>
-            <a:pPr algn="ctr" indent="0" marL="0">
-              <a:buNone/>
-            </a:pPr>
-            <a:r>
-              <a:rPr lang="en-US" sz="1300" b="1" dirty="0">
-                <a:solidFill>
-                  <a:srgbClr val="FFFFFF"/>
-                </a:solidFill>
-                <a:latin typeface="Arial" pitchFamily="34" charset="0"/>
-                <a:ea typeface="Arial" pitchFamily="34" charset="-122"/>
-                <a:cs typeface="Arial" pitchFamily="34" charset="-120"/>
-              </a:rPr>
-              <a:t>09</a:t>
-            </a:r>
-            <a:endParaRPr lang="en-US" sz="1300" dirty="0"/>
-          </a:p>
-        </p:txBody>
-      </p:sp>
-      <p:sp>
-        <p:nvSpPr>
-          <p:cNvPr id="4" name="Text 2"/>
-          <p:cNvSpPr/>
-          <p:nvPr/>
-        </p:nvSpPr>
-        <p:spPr>
-          <a:xfrm>
-            <a:off x="1133856" y="457200"/>
-            <a:ext cx="10490911" cy="182880"/>
-          </a:xfrm>
-          <a:prstGeom prst="rect">
-            <a:avLst/>
-          </a:prstGeom>
-          <a:noFill/>
-          <a:ln/>
-        </p:spPr>
-        <p:txBody>
-          <a:bodyPr wrap="square" lIns="0" tIns="0" rIns="0" bIns="0" rtlCol="0" anchor="ctr"/>
-          <a:lstStyle/>
-          <a:p>
-            <a:pPr indent="0" marL="0">
-              <a:buNone/>
-            </a:pPr>
-            <a:r>
-              <a:rPr lang="en-US" sz="950" b="1" spc="200" kern="0" dirty="0">
-                <a:solidFill>
-                  <a:srgbClr val="B98A2E"/>
-                </a:solidFill>
-                <a:latin typeface="Arial" pitchFamily="34" charset="0"/>
-                <a:ea typeface="Arial" pitchFamily="34" charset="-122"/>
-                <a:cs typeface="Arial" pitchFamily="34" charset="-120"/>
-              </a:rPr>
-              <a:t>Process</a:t>
-            </a:r>
-            <a:endParaRPr lang="en-US" sz="950" dirty="0"/>
-          </a:p>
-        </p:txBody>
-      </p:sp>
-      <p:sp>
-        <p:nvSpPr>
-          <p:cNvPr id="5" name="Text 3"/>
-          <p:cNvSpPr/>
-          <p:nvPr/>
-        </p:nvSpPr>
-        <p:spPr>
-          <a:xfrm>
-            <a:off x="1133856" y="640080"/>
-            <a:ext cx="10490911" cy="365760"/>
-          </a:xfrm>
-          <a:prstGeom prst="rect">
-            <a:avLst/>
-          </a:prstGeom>
-          <a:noFill/>
-          <a:ln/>
-        </p:spPr>
-        <p:txBody>
-          <a:bodyPr wrap="square" lIns="0" tIns="0" rIns="0" bIns="0" rtlCol="0" anchor="ctr"/>
-          <a:lstStyle/>
-          <a:p>
-            <a:pPr indent="0" marL="0">
-              <a:buNone/>
-            </a:pPr>
-            <a:r>
-              <a:rPr lang="en-US" sz="2300" b="1" dirty="0">
-                <a:solidFill>
-                  <a:srgbClr val="10161F"/>
-                </a:solidFill>
-                <a:latin typeface="Pretendard" pitchFamily="34" charset="0"/>
-                <a:ea typeface="Pretendard" pitchFamily="34" charset="-122"/>
-                <a:cs typeface="Pretendard" pitchFamily="34" charset="-120"/>
-              </a:rPr>
-              <a:t>검토 후 다음 단계는 무엇인가</a:t>
-            </a:r>
-            <a:endParaRPr lang="en-US" sz="2300" dirty="0"/>
-          </a:p>
-        </p:txBody>
-      </p:sp>
-      <p:sp>
-        <p:nvSpPr>
-          <p:cNvPr id="6" name="Shape 4"/>
-          <p:cNvSpPr/>
-          <p:nvPr/>
-        </p:nvSpPr>
-        <p:spPr>
-          <a:xfrm>
-            <a:off x="566928" y="1572768"/>
-            <a:ext cx="11057839" cy="3200400"/>
-          </a:xfrm>
-          <a:prstGeom prst="roundRect">
-            <a:avLst>
-              <a:gd name="adj" fmla="val 1714"/>
-            </a:avLst>
-          </a:prstGeom>
-          <a:solidFill>
-            <a:srgbClr val="F7FAFC"/>
-          </a:solidFill>
-          <a:ln w="6350">
-            <a:solidFill>
-              <a:srgbClr val="CBD5E0"/>
-            </a:solidFill>
-            <a:prstDash val="solid"/>
-          </a:ln>
-        </p:spPr>
-      </p:sp>
-      <p:sp>
-        <p:nvSpPr>
-          <p:cNvPr id="7" name="Shape 5"/>
-          <p:cNvSpPr/>
-          <p:nvPr/>
-        </p:nvSpPr>
-        <p:spPr>
-          <a:xfrm>
-            <a:off x="786384" y="1792224"/>
-            <a:ext cx="438912" cy="438912"/>
-          </a:xfrm>
-          <a:prstGeom prst="ellipse">
-            <a:avLst/>
-          </a:prstGeom>
-          <a:solidFill>
-            <a:srgbClr val="B98A2E"/>
-          </a:solidFill>
-          <a:ln/>
-        </p:spPr>
-      </p:sp>
-      <p:sp>
-        <p:nvSpPr>
-          <p:cNvPr id="8" name="Text 6"/>
-          <p:cNvSpPr/>
-          <p:nvPr/>
-        </p:nvSpPr>
-        <p:spPr>
-          <a:xfrm>
-            <a:off x="786384" y="1792224"/>
-            <a:ext cx="438912" cy="438912"/>
-          </a:xfrm>
-          <a:prstGeom prst="rect">
-            <a:avLst/>
-          </a:prstGeom>
-          <a:noFill/>
-          <a:ln/>
-        </p:spPr>
-        <p:txBody>
-          <a:bodyPr wrap="square" lIns="0" tIns="0" rIns="0" bIns="0" rtlCol="0" anchor="ctr"/>
-          <a:lstStyle/>
-          <a:p>
-            <a:pPr algn="ctr" indent="0" marL="0">
-              <a:buNone/>
-            </a:pPr>
-            <a:r>
-              <a:rPr lang="en-US" sz="1400" b="1" dirty="0">
-                <a:solidFill>
-                  <a:srgbClr val="FFFFFF"/>
-                </a:solidFill>
-                <a:latin typeface="Arial" pitchFamily="34" charset="0"/>
-                <a:ea typeface="Arial" pitchFamily="34" charset="-122"/>
-                <a:cs typeface="Arial" pitchFamily="34" charset="-120"/>
-              </a:rPr>
-              <a:t>01</a:t>
-            </a:r>
-            <a:endParaRPr lang="en-US" sz="1400" dirty="0"/>
-          </a:p>
-        </p:txBody>
-      </p:sp>
-      <p:sp>
-        <p:nvSpPr>
-          <p:cNvPr id="9" name="Text 7"/>
-          <p:cNvSpPr/>
-          <p:nvPr/>
-        </p:nvSpPr>
-        <p:spPr>
-          <a:xfrm>
-            <a:off x="786384" y="2304288"/>
-            <a:ext cx="10618927" cy="365760"/>
-          </a:xfrm>
-          <a:prstGeom prst="rect">
-            <a:avLst/>
-          </a:prstGeom>
-          <a:noFill/>
-          <a:ln/>
-        </p:spPr>
-        <p:txBody>
-          <a:bodyPr wrap="square" rtlCol="0" anchor="ctr"/>
-          <a:lstStyle/>
-          <a:p>
-            <a:pPr indent="0" marL="0">
-              <a:buNone/>
-            </a:pPr>
-            <a:r>
-              <a:rPr lang="en-US" sz="1600" b="1" dirty="0">
-                <a:solidFill>
-                  <a:srgbClr val="10161F"/>
-                </a:solidFill>
-                <a:latin typeface="Pretendard" pitchFamily="34" charset="0"/>
-                <a:ea typeface="Pretendard" pitchFamily="34" charset="-122"/>
-                <a:cs typeface="Pretendard" pitchFamily="34" charset="-120"/>
-              </a:rPr>
-              <a:t>1단계</a:t>
-            </a:r>
-            <a:endParaRPr lang="en-US" sz="1600" dirty="0"/>
-          </a:p>
-        </p:txBody>
-      </p:sp>
-      <p:sp>
-        <p:nvSpPr>
-          <p:cNvPr id="10" name="Text 8"/>
-          <p:cNvSpPr/>
-          <p:nvPr/>
-        </p:nvSpPr>
-        <p:spPr>
-          <a:xfrm>
-            <a:off x="786384" y="2761488"/>
-            <a:ext cx="10618927" cy="1828800"/>
-          </a:xfrm>
-          <a:prstGeom prst="rect">
-            <a:avLst/>
-          </a:prstGeom>
-          <a:noFill/>
-          <a:ln/>
-        </p:spPr>
-        <p:txBody>
-          <a:bodyPr wrap="square" rtlCol="0" anchor="t"/>
-          <a:lstStyle/>
-          <a:p>
-            <a:pPr indent="0" marL="0">
-              <a:buNone/>
-            </a:pPr>
-            <a:r>
-              <a:rPr lang="en-US" sz="1100" dirty="0">
-                <a:solidFill>
-                  <a:srgbClr val="10161F"/>
-                </a:solidFill>
-                <a:latin typeface="Pretendard" pitchFamily="34" charset="0"/>
-                <a:ea typeface="Pretendard" pitchFamily="34" charset="-122"/>
-                <a:cs typeface="Pretendard" pitchFamily="34" charset="-120"/>
-              </a:rPr>
-              <a:t>{"ok"</a:t>
-            </a:r>
-            <a:endParaRPr lang="en-US" sz="1100" dirty="0"/>
-          </a:p>
-          <a:p>
-            <a:pPr indent="0" marL="0">
-              <a:buNone/>
-            </a:pPr>
-            <a:r>
-              <a:rPr lang="en-US" sz="1100" dirty="0">
-                <a:solidFill>
-                  <a:srgbClr val="10161F"/>
-                </a:solidFill>
-                <a:latin typeface="Pretendard" pitchFamily="34" charset="0"/>
-                <a:ea typeface="Pretendard" pitchFamily="34" charset="-122"/>
-                <a:cs typeface="Pretendard" pitchFamily="34" charset="-120"/>
-              </a:rPr>
-              <a:t>true,"mocked":true,"extractedFields":{"area_signal":"역삼","asset_type":"오피스빌딩","price_band":"300억","size_signal":"3000평(약 9917.4㎡)"},"extractedFacts":{"region":"역삼","exactAddressCandidate":"역삼동 742-1","assetType":"오피스빌딩","priceText":"300억","sizeText":"3000평(약 9917.4㎡)","currentUse":"오피스","currentUseSignal":"근린생활시설","leaseSignal":"임대중","vacancySignal":"공실없음","tenantNames":["쿠팡","네이버"],"unitRentTexts":["301호: 1500만"],"sellerMotivationText":"자산 효율화","brokerNotes":["초역세권 매물"]},"detectedSensitiveFields":["exact_address","tenant_name"],"ambiguousFields":[],"warnings":[],"areaSignal":"역삼","assetType":"오피스빌딩","priceBand":"300억","sizeSignal":"3000평(약 9917.4㎡)","dealType":"매각","buildingName":"역삼 센트럴타워","exactAddress":"역삼동 742-1","totalFloorArea":9917.3,"buildYear":2015,"currentUseSignal":"근린생활시설","vacancySignal":"공실 없음","fitSummary":"초역세권 근생 빌딩으로 시행/사옥 매입에 최적화","cautionSummary":"주요 임차인 만기 조율 필요","hiddenFields":["exact_address","seller_motivation"],"confidence":{"areaSignal":"confirmed","assetType":"confirmed","priceBand":"ai_hypothesis","fitSummary":"ai_hypothesis"},"missingData":["sizeSignal"],"boundaryNote":"본 자료는 실거래 통계 기반 참고치입니다.","buyerType":"법인 사옥형","budgetRange":{"min":50,"max":80,"display":"50억~80억"},"preferredRegions":["강남","성수"],"assetTypes":["꼬마빌딩","사옥용"],"purchasePurpose":"사옥용 매입","mustHave":["초역세권","주차"],"niceToHave":["테라스","루프탑"],"riskTolerance":"medium","financingNote":"자본금 50% 준비","missingQuestions":["구체적인 입주 시기가 언제인가요?","선호하는 수익률이 있나요?"],"privacyNotes":["연락처 비공개"],"fitReasons":["매수자 예산(50-80억)에 부합하는 매물입니다.","요청하신 성수/강남 권역에 해당합니다."],"cautionReasons":["요청한 용도와 달리 명도 협의가 다소 필요합니다."],"recommendedNextAction":"현장 답사 제안","kakaoMessage":"안녕하세요! 요청하신 조건에 부합하는 추천 매물이 있어 안내해 드립니다. 확인해보시고 피드백 부탁드립니다.","title":"강남 역삼역 초역세권 오피스 사옥용 빌딩 매각","shortSummary":"역삼역 도보 5분 거리의 준신축급 대형 오피스빌딩입니다.","dealPoints":["초역세권","사옥 최적"],"cautionPoints":["명도 조율 필요"],"hiddenInfoNotice":["보증금 및 지번은 인가 후 확인 가능"],"gateMessage":"G1 등급 등록이 필요합니다.","kakaoText":"강남 역삼역 오피스 빌딩 매각 안내입니다.","exactUnitCandidate":"101호","floor":"1층","areaSqmText":"150㎡","spaceType":"office","depositText":"5000만","monthlyRentText":"400만","maintenanceFeeText":"50만","availableFromText":"즉시입주","leaseTermMonthsText":"24","incentivesText":"렌트프리 2개월","restrictions":[],"landlordIdentity":"김성수","currentTenant":"스타트업","vacancyReason":"이전 확장","rentNegotiation":"협의 가능","region":"성수동","areaSqm":150,"deposit":5000,"monthlyRent":400,"maintenanceFee":50,"availableFrom":"즉시입주","leaseTermMonths":24,"incentives":{"rentFreeMonths":2,"interiorSupport":"일부 인테리어 지원","freeRentDetail":"렌트프리 2개월 지원"},"shortSummaryLease":"성수역 도보 5분 거리 1층 리테일 상가 매물입니다."}</a:t>
-            </a:r>
-            <a:endParaRPr lang="en-US" sz="1100" dirty="0"/>
-          </a:p>
-        </p:txBody>
-      </p:sp>
-      <p:sp>
-        <p:nvSpPr>
-          <p:cNvPr id="11" name="Text 9"/>
-          <p:cNvSpPr/>
-          <p:nvPr/>
-        </p:nvSpPr>
-        <p:spPr>
-          <a:xfrm>
-            <a:off x="566928" y="6382512"/>
-            <a:ext cx="7315200" cy="219456"/>
-          </a:xfrm>
-          <a:prstGeom prst="rect">
-            <a:avLst/>
-          </a:prstGeom>
-          <a:noFill/>
-          <a:ln/>
-        </p:spPr>
-        <p:txBody>
-          <a:bodyPr wrap="square" lIns="0" tIns="0" rIns="0" bIns="0" rtlCol="0" anchor="ctr"/>
-          <a:lstStyle/>
-          <a:p>
-            <a:pPr indent="0" marL="0">
-              <a:buNone/>
-            </a:pPr>
-            <a:r>
-              <a:rPr lang="en-US" sz="800" dirty="0">
-                <a:solidFill>
-                  <a:srgbClr val="718096"/>
-                </a:solidFill>
-                <a:latin typeface="Pretendard" pitchFamily="34" charset="0"/>
-                <a:ea typeface="Pretendard" pitchFamily="34" charset="-122"/>
-                <a:cs typeface="Pretendard" pitchFamily="34" charset="-120"/>
-              </a:rPr>
-              <a:t>크리딜   |   </a:t>
-            </a:r>
-            <a:endParaRPr lang="en-US" sz="800" dirty="0"/>
-          </a:p>
-        </p:txBody>
-      </p:sp>
-      <p:sp>
-        <p:nvSpPr>
-          <p:cNvPr id="12" name="Text 10"/>
-          <p:cNvSpPr/>
-          <p:nvPr/>
-        </p:nvSpPr>
-        <p:spPr>
-          <a:xfrm>
-            <a:off x="10710367" y="6382512"/>
-            <a:ext cx="914400" cy="219456"/>
-          </a:xfrm>
-          <a:prstGeom prst="rect">
-            <a:avLst/>
-          </a:prstGeom>
-          <a:noFill/>
-          <a:ln/>
-        </p:spPr>
-        <p:txBody>
-          <a:bodyPr wrap="square" lIns="0" tIns="0" rIns="0" bIns="0" rtlCol="0" anchor="ctr"/>
-          <a:lstStyle/>
-          <a:p>
-            <a:pPr algn="r" indent="0" marL="0">
-              <a:buNone/>
-            </a:pPr>
-            <a:r>
-              <a:rPr lang="en-US" sz="900" b="1" dirty="0">
-                <a:solidFill>
-                  <a:srgbClr val="B98A2E"/>
-                </a:solidFill>
-                <a:latin typeface="Arial" pitchFamily="34" charset="0"/>
-                <a:ea typeface="Arial" pitchFamily="34" charset="-122"/>
-                <a:cs typeface="Arial" pitchFamily="34" charset="-120"/>
-              </a:rPr>
               <a:t>9</a:t>
             </a:r>
             <a:endParaRPr lang="en-US" sz="900" dirty="0"/>

--- a/docs/test/stress/e2e-outputs/income_case14_bangi_discount_basic.pptx
+++ b/docs/test/stress/e2e-outputs/income_case14_bangi_discount_basic.pptx
@@ -15062,56 +15062,14 @@
       </p:sp>
       <p:sp>
         <p:nvSpPr>
-          <p:cNvPr id="10" name="Shape 8"/>
-          <p:cNvSpPr/>
-          <p:nvPr/>
-        </p:nvSpPr>
-        <p:spPr>
-          <a:xfrm>
-            <a:off x="566928" y="2999232"/>
-            <a:ext cx="11057839" cy="1280160"/>
-          </a:xfrm>
-          <a:prstGeom prst="roundRect">
-            <a:avLst>
-              <a:gd name="adj" fmla="val 4286"/>
-            </a:avLst>
-          </a:prstGeom>
-          <a:solidFill>
-            <a:srgbClr val="BEE3F8"/>
-          </a:solidFill>
-          <a:ln/>
-        </p:spPr>
-      </p:sp>
-      <p:sp>
-        <p:nvSpPr>
-          <p:cNvPr id="11" name="Shape 9"/>
-          <p:cNvSpPr/>
-          <p:nvPr/>
-        </p:nvSpPr>
-        <p:spPr>
-          <a:xfrm>
-            <a:off x="566928" y="3054096"/>
-            <a:ext cx="36576" cy="1170432"/>
-          </a:xfrm>
-          <a:prstGeom prst="rect">
-            <a:avLst/>
-          </a:prstGeom>
-          <a:solidFill>
-            <a:srgbClr val="2B6CB0"/>
-          </a:solidFill>
-          <a:ln/>
-        </p:spPr>
-      </p:sp>
-      <p:sp>
-        <p:nvSpPr>
-          <p:cNvPr id="12" name="Text 10"/>
-          <p:cNvSpPr/>
-          <p:nvPr/>
-        </p:nvSpPr>
-        <p:spPr>
-          <a:xfrm>
-            <a:off x="749808" y="3108960"/>
-            <a:ext cx="10728655" cy="201168"/>
+          <p:cNvPr id="10" name="Text 8"/>
+          <p:cNvSpPr/>
+          <p:nvPr/>
+        </p:nvSpPr>
+        <p:spPr>
+          <a:xfrm>
+            <a:off x="566928" y="6382512"/>
+            <a:ext cx="7315200" cy="219456"/>
           </a:xfrm>
           <a:prstGeom prst="rect">
             <a:avLst/>
@@ -15127,95 +15085,14 @@
               <a:buNone/>
             </a:pPr>
             <a:r>
-              <a:rPr lang="en-US" sz="1050" b="1" dirty="0">
-                <a:solidFill>
-                  <a:srgbClr val="2B6CB0"/>
+              <a:rPr lang="en-US" sz="800" dirty="0">
+                <a:solidFill>
+                  <a:srgbClr val="718096"/>
                 </a:solidFill>
                 <a:latin typeface="Pretendard" pitchFamily="34" charset="0"/>
                 <a:ea typeface="Pretendard" pitchFamily="34" charset="-122"/>
                 <a:cs typeface="Pretendard" pitchFamily="34" charset="-120"/>
               </a:rPr>
-              <a:t>투자 가치 제안</a:t>
-            </a:r>
-            <a:endParaRPr lang="en-US" sz="1050" dirty="0"/>
-          </a:p>
-        </p:txBody>
-      </p:sp>
-      <p:sp>
-        <p:nvSpPr>
-          <p:cNvPr id="13" name="Text 11"/>
-          <p:cNvSpPr/>
-          <p:nvPr/>
-        </p:nvSpPr>
-        <p:spPr>
-          <a:xfrm>
-            <a:off x="749808" y="3328416"/>
-            <a:ext cx="10728655" cy="877824"/>
-          </a:xfrm>
-          <a:prstGeom prst="rect">
-            <a:avLst/>
-          </a:prstGeom>
-          <a:noFill/>
-          <a:ln/>
-        </p:spPr>
-        <p:txBody>
-          <a:bodyPr wrap="square" lIns="0" tIns="0" rIns="0" bIns="0" rtlCol="0" anchor="t"/>
-          <a:lstStyle/>
-          <a:p>
-            <a:pPr indent="0" marL="0">
-              <a:lnSpc>
-                <a:spcPct val="120000"/>
-              </a:lnSpc>
-              <a:buNone/>
-            </a:pPr>
-            <a:r>
-              <a:rPr lang="en-US" sz="930" dirty="0">
-                <a:solidFill>
-                  <a:srgbClr val="10161F"/>
-                </a:solidFill>
-                <a:latin typeface="Pretendard" pitchFamily="34" charset="0"/>
-                <a:ea typeface="Pretendard" pitchFamily="34" charset="-122"/>
-                <a:cs typeface="Pretendard" pitchFamily="34" charset="-120"/>
-              </a:rPr>
-              <a:t>{"ok":true,"mocked":true,"extractedFields":{"area_signal":"역삼","asset_type":"[건물명 비공개]","price_band":"300억","size_signal":"3000평(약 9917.4㎡)"},"extractedFacts":{"region":"역삼","exactAddressCandidate":"역삼동 742-1","assetType":"[건물명 비공개]","priceText":"300억","sizeText":"3000평(약 9917.4㎡)","currentUse":"오피스","currentUseSignal":"근린생활시설","leaseSignal":"임대중","vacancySignal":"공실없음","tenantNames":["쿠팡","네이버"],"unitRentTexts":["301호: 1500만"],"sellerMotivationText":"자산 효율화","brokerNotes":["역세권 도보 3분 이내 매물"]},"detectedSensitiveFields":["exact_address","tenant_name"],"ambiguousFields":[],"warnings":[],"areaSignal":"역삼","assetType":"[건물명 비공개]","priceBand":"300억","sizeSignal":"3000평(약 9917.4㎡)","dealType":"매각","buildingName":"역삼 [건물명 비공개]","exactAddress":"역삼동 742-1","totalFloorArea":9917.3,"buildYear":2015,"currentUseSignal":"근린생활시설","vacancySignal":"공실 없음","fitSummary":"역세권 도보 3분 이내 근생 빌딩으로 시행/사옥 매입에 최적화","cautionSummary":"주요 임차인 만기 조율 필요","hiddenFields":["exact_address","seller_motivation"],"confidence":{"areaSignal":"confirmed","assetType":"confirmed","priceBand":"ai_hypothesis","fitSummary":"ai_hypothesis"},"missingData":["sizeSignal"],"boundaryNote":"본 자료는 실거래 통계 기반 참고치입니다.","buyerType":"법인 사옥형","budgetRange":{"min":50,"max":80,"display":"50억~80억"},"preferredRegions":["강남","성수"],"assetTypes":["[건물명 비공개]","사옥용"],"purchasePurpose":"사옥용 매입","mustHave":["역세권 도보 3분 이내","주차"],"niceToHave":["테라스","루프탑"],"riskTolerance":"medium","financingNote":"자본금 50% 준비","missingQuestions":["구체적인 입주 시기가 언제인가요?","선호하는 수익률이 있나요?"],"privacyNotes":["연락처 비공개"],"fitReasons":["매수자 예산(50-80억)에 부합하는 매물입니다.","요청하신 성수/강남 권역에 해당합니다."],"cautionReasons":["요청한 용도와 달리 명도 협의가 다소 필요합니다."],"recommendedNextAction":"현장 답사 제안","kakaoMessage":"안녕하세요! 요청하신 조건에 부합하는 추천 매물이 있어 안내해 드립니다. 확인해보시고 피드백 부탁드립니다.","title":"강남 역삼역 역세권 도보 3분 이내 오피스 사옥용 빌딩 매각","shortSummary":"역삼역 도보 5분 거리의 준신축급 대형 [건물명 비공개]입니다.","dealPoints":["역세권 도보 3분 이내","사옥 최적"],"cautionPoints":["명도 조율 필요"],"hiddenInfoNotice":["보증금 및 지번은 인가 후 확인 가능"],"gateMessage":"G1 등급 등록이 필요합니다.","kakaoText":"강남 역삼역 오피스 빌딩 매각 안내입니다.","exactUnitCandidate":"101호","floor":"1층","areaSqmText":"150㎡","spaceType":"office","depositText":"5000만","monthlyRentText":"400만","maintenanceFeeText":"50만","availableFromText":"즉시입주","leaseTermMonthsText":"24","incentivesText":"렌트프리(무상임대) 2개월","restrictions":[],"landlordIdentity":"김성수","currentTenant":"스타트업","vacancyReason":"이전 확장","rentNegotiation":"협의 가능","region":"성수동","areaSqm":150,"deposit":5000,"monthlyRent":400,"maintenanceFee":50,"availableFrom":"즉시입주","leaseTermMonths":24,"incentives":{"렌트프리(무상임대)(무상임대)Months":2,"interiorSupport":"일부 인테리어 지원","freeRentDetail":"렌트프리(무상임대) 2개월 지원"},"shortSummaryLease":"성수역 도보 5분 거리 1층 리테일 상가 매물입니다."}</a:t>
-            </a:r>
-            <a:endParaRPr lang="en-US" sz="930" dirty="0"/>
-          </a:p>
-        </p:txBody>
-      </p:sp>
-      <p:sp>
-        <p:nvSpPr>
-          <p:cNvPr id="14" name="Text 12"/>
-          <p:cNvSpPr/>
-          <p:nvPr/>
-        </p:nvSpPr>
-        <p:spPr>
-          <a:xfrm>
-            <a:off x="566928" y="6382512"/>
-            <a:ext cx="7315200" cy="219456"/>
-          </a:xfrm>
-          <a:prstGeom prst="rect">
-            <a:avLst/>
-          </a:prstGeom>
-          <a:noFill/>
-          <a:ln/>
-        </p:spPr>
-        <p:txBody>
-          <a:bodyPr wrap="square" lIns="0" tIns="0" rIns="0" bIns="0" rtlCol="0" anchor="ctr"/>
-          <a:lstStyle/>
-          <a:p>
-            <a:pPr indent="0" marL="0">
-              <a:buNone/>
-            </a:pPr>
-            <a:r>
-              <a:rPr lang="en-US" sz="800" dirty="0">
-                <a:solidFill>
-                  <a:srgbClr val="718096"/>
-                </a:solidFill>
-                <a:latin typeface="Pretendard" pitchFamily="34" charset="0"/>
-                <a:ea typeface="Pretendard" pitchFamily="34" charset="-122"/>
-                <a:cs typeface="Pretendard" pitchFamily="34" charset="-120"/>
-              </a:rPr>
               <a:t>크리딜   |   </a:t>
             </a:r>
             <a:endParaRPr lang="en-US" sz="800" dirty="0"/>
@@ -15224,7 +15101,7 @@
       </p:sp>
       <p:sp>
         <p:nvSpPr>
-          <p:cNvPr id="15" name="Text 13"/>
+          <p:cNvPr id="11" name="Text 9"/>
           <p:cNvSpPr/>
           <p:nvPr/>
         </p:nvSpPr>
